--- a/学校要求与提交材料/开题答辩.pptx
+++ b/学校要求与提交材料/开题答辩.pptx
@@ -5,7 +5,7 @@
     <p:sldMasterId id="2147483648" r:id="rId0"/>
   </p:sldMasterIdLst>
   <p:notesMasterIdLst>
-    <p:notesMasterId r:id="rId16"/>
+    <p:notesMasterId r:id="rId18"/>
   </p:notesMasterIdLst>
   <p:sldIdLst>
     <p:sldId id="256" r:id="rId1"/>
@@ -23,6 +23,8 @@
     <p:sldId id="268" r:id="rId13"/>
     <p:sldId id="269" r:id="rId14"/>
     <p:sldId id="270" r:id="rId15"/>
+    <p:sldId id="271" r:id="rId16"/>
+    <p:sldId id="272" r:id="rId17"/>
   </p:sldIdLst>
   <p:sldSz cx="12192000" cy="6858000"/>
   <p:notesSz cx="6858000" cy="12192000"/>
@@ -558,7 +560,7 @@
   <p:cSld>
     <p:spTree>
       <p:nvGrpSpPr>
-        <p:cNvPr id="1" name="" descr="&lt;Slide&gt;&#10;  &lt;Box style={{ width: '1280px', height: '720px', background: '#0E3F8C', position: 'relative', overflow: 'hidden' }}&gt;&#10;    {/* 背景装饰：科技节点线稿 */}&#10;    &lt;Box style={{ position: 'absolute', top: 0, right: 0, width: 700, height: 720, opacity: 0.12 }}&gt;&#10;      &lt;svg width={700} height={720} viewBox='0 0 700 720'&gt;&#10;        &lt;g stroke='#FFFFFF' strokeWidth='1.5' fill='none'&gt;&#10;          &lt;circle cx='120' cy='140' r='40' /&gt;&#10;          &lt;circle cx='320' cy='90' r='55' /&gt;&#10;          &lt;circle cx='540' cy='200' r='35' /&gt;&#10;          &lt;circle cx='180' cy='380' r='50' /&gt;&#10;          &lt;circle cx='430' cy='420' r='60' /&gt;&#10;          &lt;circle cx='580' cy='560' r='45' /&gt;&#10;          &lt;circle cx='260' cy='610' r='35' /&gt;&#10;          &lt;path d='M120 140 L320 90 L540 200 L430 420 L180 380 Z' /&gt;&#10;          &lt;path d='M320 90 L430 420 M540 200 L580 560 M430 420 L580 560 M180 380 L260 610 M120 140 L180 380' /&gt;&#10;        &lt;/g&gt;&#10;        &lt;g fill='#FFFFFF'&gt;&#10;          &lt;circle cx='120' cy='140' r='5' /&gt;&#10;          &lt;circle cx='320' cy='90' r='6' /&gt;&#10;          &lt;circle cx='540' cy='200' r='4' /&gt;&#10;          &lt;circle cx='180' cy='380' r='5' /&gt;&#10;          &lt;circle cx='430' cy='420' r='7' /&gt;&#10;          &lt;circle cx='580' cy='560' r='5' /&gt;&#10;          &lt;circle cx='260' cy='610' r='4' /&gt;&#10;        &lt;/g&gt;&#10;      &lt;/svg&gt;&#10;    &lt;/Box&gt;&#10;&#10;    {/* 顶部单位 */}&#10;    &lt;Box style={{ position: 'absolute', top: 48, left: 60, right: 60, flexDirection: 'row', justifyContent: 'space-between', alignItems: 'center' }}&gt;&#10;      &lt;Text style={{ color: '#8FB3E8', fontSize: 18, letterSpacing: 2 }}&gt;中国科学技术大学软件学院&lt;/Text&gt;&#10;      &lt;Text style={{ color: '#8FB3E8', fontSize: 16 }}&gt;软件工程实践 · 开题答辩&lt;/Text&gt;&#10;    &lt;/Box&gt;&#10;&#10;    {/* 中央主标题 */}&#10;    &lt;Box style={{ position: 'absolute', top: 0, left: 0, right: 0, bottom: 0, flexDirection: 'column', alignItems: 'center', justifyContent: 'center', paddingTop: 40 }}&gt;&#10;      &lt;Box style={{ width: 78, height: 4, background: '#3D7BD9', borderRadius: 2, marginBottom: 32 }} /&gt;&#10;      &lt;Text style={{ color: '#FFFFFF', fontSize: 56, fontWeight: 'bold', textAlign: 'center', letterSpacing: 2 }}&gt;&#10;        基于 RAG 的轻量级&#10;      &lt;/Text&gt;&#10;      &lt;Text style={{ color: '#FFFFFF', fontSize: 56, fontWeight: 'bold', textAlign: 'center', letterSpacing: 2, marginTop: 8 }}&gt;&#10;        企业工艺生成系统&#10;      &lt;/Text&gt;&#10;      &lt;Text style={{ color: '#8FB3E8', fontSize: 22, textAlign: 'center', marginTop: 28, letterSpacing: 1 }}&gt;&#10;        A Lightweight Enterprise Manufacturing Process Generation System Based on RAG&#10;      &lt;/Text&gt;&#10;    &lt;/Box&gt;&#10;&#10;    {/* 底部信息条 */}&#10;    &lt;Box style={{ position: 'absolute', bottom: 0, left: 0, right: 0, height: 120, background: 'rgba(0,0,0,0.18)', flexDirection: 'row', alignItems: 'center', paddingLeft: 60, paddingRight: 60 }}&gt;&#10;      &lt;Box style={{ flexDirection: 'row', alignItems: 'center', gap: 40, flex: 1 }}&gt;&#10;        &lt;Box style={{ flexDirection: 'column', gap: 6 }}&gt;&#10;          &lt;Text style={{ color: '#8FB3E8', fontSize: 14 }}&gt;团队成员&lt;/Text&gt;&#10;          &lt;Text style={{ color: '#FFFFFF', fontSize: 20, fontWeight: 'bold' }}&gt;熊佳昀 · 齐梦伟 · 张承伟 · 资唯&lt;/Text&gt;&#10;        &lt;/Box&gt;&#10;        &lt;Box style={{ width: 1, height: 44, background: 'rgba(255,255,255,0.3)' }} /&gt;&#10;        &lt;Box style={{ flexDirection: 'column', gap: 6 }}&gt;&#10;          &lt;Text style={{ color: '#8FB3E8', fontSize: 14 }}&gt;指导教师&lt;/Text&gt;&#10;          &lt;Text style={{ color: '#FFFFFF', fontSize: 20, fontWeight: 'bold' }}&gt;丁箐&lt;/Text&gt;&#10;        &lt;/Box&gt;&#10;      &lt;/Box&gt;&#10;      &lt;Text style={{ color: '#8FB3E8', fontSize: 18 }}&gt;2026 年 10 月&lt;/Text&gt;&#10;    &lt;/Box&gt;&#10;  &lt;/Box&gt;&#10;&lt;/Slide&gt;&#10;"/>
+        <p:cNvPr id="1" name=""/>
         <p:cNvGrpSpPr/>
         <p:nvPr/>
       </p:nvGrpSpPr>
@@ -591,7 +593,10 @@
         </p:spPr>
         <p:txBody>
           <a:bodyPr/>
-          <a:p/>
+          <a:p>
+            <a:pPr/>
+            <a:endParaRPr/>
+          </a:p>
         </p:txBody>
       </p:sp>
       <p:pic>
@@ -739,7 +744,10 @@
         </p:spPr>
         <p:txBody>
           <a:bodyPr/>
-          <a:p/>
+          <a:p>
+            <a:pPr/>
+            <a:endParaRPr/>
+          </a:p>
         </p:txBody>
       </p:sp>
       <p:sp>
@@ -890,7 +898,10 @@
         </p:spPr>
         <p:txBody>
           <a:bodyPr/>
-          <a:p/>
+          <a:p>
+            <a:pPr/>
+            <a:endParaRPr/>
+          </a:p>
         </p:txBody>
       </p:sp>
       <p:sp>
@@ -1046,7 +1057,10 @@
         </p:spPr>
         <p:txBody>
           <a:bodyPr/>
-          <a:p/>
+          <a:p>
+            <a:pPr/>
+            <a:endParaRPr/>
+          </a:p>
         </p:txBody>
       </p:sp>
       <p:sp>
@@ -1194,7 +1208,7 @@
   <p:cSld>
     <p:spTree>
       <p:nvGrpSpPr>
-        <p:cNvPr id="17" name="" descr="&lt;Slide&gt;&#10;  &lt;Box style={{ width: '1280px', height: '720px', background: '#FFFFFF', flexDirection: 'column' }}&gt;&#10;    {/* 页眉 */}&#10;    &lt;Box style={{ height: 72, background: '#1E4FA8', flexDirection: 'row', alignItems: 'center', justifyContent: 'space-between', paddingLeft: 40, paddingRight: 40 }}&gt;&#10;      &lt;Text style={{ color: '#FFFFFF', fontSize: 16 }}&gt;基于 RAG 的轻量级企业工艺生成系统&lt;/Text&gt;&#10;      &lt;Text style={{ color: 'rgba(255,255,255,0.85)', fontSize: 14 }}&gt;技术方案&lt;/Text&gt;&#10;    &lt;/Box&gt;&#10;&#10;    {/* 主标题 */}&#10;    &lt;Box style={{ paddingLeft: 40, paddingRight: 40, paddingTop: 26, paddingBottom: 14 }}&gt;&#10;      &lt;Text style={{ color: '#1A2230', fontSize: 34, fontWeight: 'bold' }}&gt;两大关键技术特色&lt;/Text&gt;&#10;    &lt;/Box&gt;&#10;&#10;    {/* 非对称双栏：左 55% 特色一，右 40% 特色二 */}&#10;    &lt;Box style={{ flex: 1, flexDirection: 'row', paddingLeft: 40, paddingRight: 40, gap: 32, paddingBottom: 20 }}&gt;&#10;      {/* 左：特色一 */}&#10;      &lt;Box style={{ flex: 1.35, flexDirection: 'column', padding: 30, background: '#0E3F8C', borderRadius: 14, justifyContent: 'space-between' }}&gt;&#10;        &lt;Box style={{ flexDirection: 'row', alignItems: 'center', gap: 12 }}&gt;&#10;          &lt;Box style={{ width: 36, height: 36, background: '#3D7BD9', borderRadius: 8, alignItems: 'center', justifyContent: 'center' }}&gt;&#10;            &lt;Text style={{ color: '#FFFFFF', fontSize: 20, fontWeight: 'bold' }}&gt;1&lt;/Text&gt;&#10;          &lt;/Box&gt;&#10;          &lt;Text style={{ color: '#FFFFFF', fontSize: 26, fontWeight: 'bold' }}&gt;混合召回 + 重排序的两级检索&lt;/Text&gt;&#10;        &lt;/Box&gt;&#10;        &lt;Text style={{ color: '#D6E4F7', fontSize: 19, lineHeight: 1.7, marginTop: 22 }}&gt;&#10;          双路召回保证「不遗漏」：稠密向量负责语义理解，BM25 负责型号、数字等精确匹配；&#10;        &lt;/Text&gt;&#10;        &lt;Text style={{ color: '#D6E4F7', fontSize: 19, lineHeight: 1.7, marginTop: 14 }}&gt;&#10;          Cross-encoder 精排保证「准确」：在有限候选中二次排序，兼顾检索质量与响应速度。&#10;        &lt;/Text&gt;&#10;        &lt;Box style={{ flexDirection: 'row', alignItems: 'center', gap: 10, paddingTop: 22 }}&gt;&#10;          &lt;Box style={{ width: 10, height: 10, background: '#3D7BD9', borderRadius: 5 }} /&gt;&#10;          &lt;Text style={{ color: '#8FB3E8', fontSize: 15 }}&gt;针对数字、牌号对精确匹配要求高的痛点&lt;/Text&gt;&#10;        &lt;/Box&gt;&#10;      &lt;/Box&gt;&#10;&#10;      {/* 右：特色二 */}&#10;      &lt;Box style={{ flex: 1, flexDirection: 'column', padding: 30, background: '#F7F9FC', borderRadius: 14, border: '1px solid #E5E7EB', justifyContent: 'space-between' }}&gt;&#10;        &lt;Box style={{ flexDirection: 'row', alignItems: 'center', gap: 12 }}&gt;&#10;          &lt;Box style={{ width: 36, height: 36, background: '#1E4FA8', borderRadius: 8, alignItems: 'center', justifyContent: 'center' }}&gt;&#10;            &lt;Text style={{ color: '#FFFFFF', fontSize: 20, fontWeight: 'bold' }}&gt;2&lt;/Text&gt;&#10;          &lt;/Box&gt;&#10;          &lt;Text style={{ color: '#1A2230', fontSize: 26, fontWeight: 'bold' }}&gt;表格处理 + 可信生成&lt;/Text&gt;&#10;        &lt;/Box&gt;&#10;        &lt;Box style={{ flexDirection: 'column', gap: 22, marginTop: 22 }}&gt;&#10;          &lt;Box style={{ flexDirection: 'column', gap: 6 }}&gt;&#10;            &lt;Text style={{ color: '#1E4FA8', fontSize: 18, fontWeight: 'bold' }}&gt;表格与参数处理&lt;/Text&gt;&#10;            &lt;Text style={{ color: '#4A5568', fontSize: 17, lineHeight: 1.6 }}&gt;解析保留表格结构，分块保护完整表格，BM25 精确匹配型号数字&lt;/Text&gt;&#10;          &lt;/Box&gt;&#10;          &lt;Box style={{ flexDirection: 'column', gap: 6 }}&gt;&#10;            &lt;Text style={{ color: '#1E4FA8', fontSize: 18, fontWeight: 'bold' }}&gt;强约束可信生成&lt;/Text&gt;&#10;            &lt;Text style={{ color: '#4A5568', fontSize: 17, lineHeight: 1.6 }}&gt;Prompt 约束「只依据资料作答、资料不足即声明」，参数与来源页码绑定，实现可核对、可追溯&lt;/Text&gt;&#10;          &lt;/Box&gt;&#10;        &lt;/Box&gt;&#10;        &lt;Box style={{ flexDirection: 'row', alignItems: 'center', gap: 10, paddingTop: 22 }}&gt;&#10;          &lt;Box style={{ width: 10, height: 10, background: '#1E4FA8', borderRadius: 5 }} /&gt;&#10;          &lt;Text style={{ color: '#1E4FA8', fontSize: 15 }}&gt;实现可核对、可追溯的加工指令&lt;/Text&gt;&#10;        &lt;/Box&gt;&#10;      &lt;/Box&gt;&#10;    &lt;/Box&gt;&#10;&#10;    {/* 页脚 */}&#10;    &lt;Box style={{ height: 40, flexDirection: 'row', alignItems: 'center', justifyContent: 'space-between', paddingLeft: 40, paddingRight: 40 }}&gt;&#10;      &lt;Text style={{ color: '#8B97A8', fontSize: 14 }}&gt;中国科学技术大学软件学院&lt;/Text&gt;&#10;      &lt;Text style={{ color: '#1E4FA8', fontSize: 16, fontWeight: 'bold' }}&gt;10 / 15&lt;/Text&gt;&#10;    &lt;/Box&gt;&#10;  &lt;/Box&gt;&#10;&lt;/Slide&gt;&#10;"/>
+        <p:cNvPr id="17" name=""/>
         <p:cNvGrpSpPr/>
         <p:nvPr/>
       </p:nvGrpSpPr>
@@ -1227,7 +1241,10 @@
         </p:spPr>
         <p:txBody>
           <a:bodyPr/>
-          <a:p/>
+          <a:p>
+            <a:pPr/>
+            <a:endParaRPr/>
+          </a:p>
         </p:txBody>
       </p:sp>
       <p:sp>
@@ -1251,7 +1268,10 @@
         </p:spPr>
         <p:txBody>
           <a:bodyPr/>
-          <a:p/>
+          <a:p>
+            <a:pPr/>
+            <a:endParaRPr/>
+          </a:p>
         </p:txBody>
       </p:sp>
       <p:sp>
@@ -1348,7 +1368,2649 @@
       </p:sp>
       <p:sp>
         <p:nvSpPr>
-          <p:cNvPr id="22" name="" descr="{&quot;isTemplate&quot;:true,&quot;type&quot;:&quot;text&quot;}"/>
+          <p:cNvPr id="22" name=""/>
+          <p:cNvSpPr/>
+          <p:nvPr/>
+        </p:nvSpPr>
+        <p:spPr>
+          <a:xfrm rot="0" flipH="0" flipV="0">
+            <a:off x="381000" y="952500"/>
+            <a:ext cx="457200" cy="38100"/>
+          </a:xfrm>
+          <a:prstGeom prst="roundRect">
+            <a:avLst>
+              <a:gd name="adj" fmla="val 50000"/>
+            </a:avLst>
+          </a:prstGeom>
+          <a:solidFill>
+            <a:srgbClr val="3D7BD9"/>
+          </a:solidFill>
+          <a:ln/>
+        </p:spPr>
+        <p:txBody>
+          <a:bodyPr/>
+          <a:p>
+            <a:pPr/>
+            <a:endParaRPr/>
+          </a:p>
+        </p:txBody>
+      </p:sp>
+      <p:sp>
+        <p:nvSpPr>
+          <p:cNvPr id="23" name="" descr="{&quot;isTemplate&quot;:true,&quot;type&quot;:&quot;text&quot;}"/>
+          <p:cNvSpPr txBox="1"/>
+          <p:nvPr/>
+        </p:nvSpPr>
+        <p:spPr>
+          <a:xfrm rot="0" flipH="0" flipV="0">
+            <a:off x="381000" y="1143000"/>
+            <a:ext cx="2857500" cy="514350"/>
+          </a:xfrm>
+          <a:prstGeom prst="rect"/>
+        </p:spPr>
+        <p:txBody>
+          <a:bodyPr wrap="none" lIns="0" tIns="0" rIns="0" bIns="0"/>
+          <a:p>
+            <a:pPr>
+              <a:lnSpc>
+                <a:spcPct val="130000"/>
+              </a:lnSpc>
+            </a:pPr>
+            <a:r>
+              <a:rPr lang="zh-CN" sz="2550" b="1">
+                <a:solidFill>
+                  <a:srgbClr val="1A2230"/>
+                </a:solidFill>
+                <a:latin typeface="Microsoft YaHei"/>
+                <a:ea typeface="Microsoft YaHei"/>
+              </a:rPr>
+              <a:t>离线建库链路</a:t>
+            </a:r>
+            <a:endParaRPr/>
+          </a:p>
+        </p:txBody>
+      </p:sp>
+      <p:sp>
+        <p:nvSpPr>
+          <p:cNvPr id="24" name="" descr="{&quot;isTemplate&quot;:true,&quot;type&quot;:&quot;text&quot;}"/>
+          <p:cNvSpPr txBox="1"/>
+          <p:nvPr/>
+        </p:nvSpPr>
+        <p:spPr>
+          <a:xfrm rot="0" flipH="0" flipV="0">
+            <a:off x="381000" y="1809750"/>
+            <a:ext cx="2857500" cy="552450"/>
+          </a:xfrm>
+          <a:prstGeom prst="rect"/>
+        </p:spPr>
+        <p:txBody>
+          <a:bodyPr wrap="square" lIns="0" tIns="0" rIns="0" bIns="0">
+            <a:normAutofit/>
+          </a:bodyPr>
+          <a:p>
+            <a:pPr>
+              <a:lnSpc>
+                <a:spcPct val="150000"/>
+              </a:lnSpc>
+            </a:pPr>
+            <a:r>
+              <a:rPr lang="zh-CN" sz="1200">
+                <a:solidFill>
+                  <a:srgbClr val="8B97A8"/>
+                </a:solidFill>
+                <a:latin typeface="Microsoft YaHei"/>
+                <a:ea typeface="Microsoft YaHei"/>
+              </a:rPr>
+              <a:t>一次构建，为在线问答准备可检索的知识库</a:t>
+            </a:r>
+            <a:endParaRPr/>
+          </a:p>
+        </p:txBody>
+      </p:sp>
+      <p:sp>
+        <p:nvSpPr>
+          <p:cNvPr id="25" name=""/>
+          <p:cNvSpPr/>
+          <p:nvPr/>
+        </p:nvSpPr>
+        <p:spPr>
+          <a:xfrm rot="0" flipH="0" flipV="0">
+            <a:off x="381000" y="4867275"/>
+            <a:ext cx="2857500" cy="1457325"/>
+          </a:xfrm>
+          <a:prstGeom prst="roundRect">
+            <a:avLst>
+              <a:gd name="adj" fmla="val 5229"/>
+            </a:avLst>
+          </a:prstGeom>
+          <a:solidFill>
+            <a:srgbClr val="0E3F8C"/>
+          </a:solidFill>
+          <a:ln/>
+        </p:spPr>
+        <p:txBody>
+          <a:bodyPr/>
+          <a:p>
+            <a:pPr/>
+            <a:endParaRPr/>
+          </a:p>
+        </p:txBody>
+      </p:sp>
+      <p:sp>
+        <p:nvSpPr>
+          <p:cNvPr id="26" name="" descr="{&quot;isTemplate&quot;:true,&quot;type&quot;:&quot;text&quot;}"/>
+          <p:cNvSpPr txBox="1"/>
+          <p:nvPr/>
+        </p:nvSpPr>
+        <p:spPr>
+          <a:xfrm rot="0" flipH="0" flipV="0">
+            <a:off x="552450" y="5038725"/>
+            <a:ext cx="2514600" cy="209550"/>
+          </a:xfrm>
+          <a:prstGeom prst="rect"/>
+        </p:spPr>
+        <p:txBody>
+          <a:bodyPr wrap="none" lIns="0" tIns="0" rIns="0" bIns="0"/>
+          <a:p>
+            <a:pPr>
+              <a:lnSpc>
+                <a:spcPct val="100000"/>
+              </a:lnSpc>
+            </a:pPr>
+            <a:r>
+              <a:rPr lang="zh-CN" sz="1350" b="1">
+                <a:solidFill>
+                  <a:srgbClr val="FFFFFF"/>
+                </a:solidFill>
+                <a:latin typeface="Microsoft YaHei"/>
+                <a:ea typeface="Microsoft YaHei"/>
+              </a:rPr>
+              <a:t>关键点</a:t>
+            </a:r>
+            <a:endParaRPr/>
+          </a:p>
+        </p:txBody>
+      </p:sp>
+      <p:sp>
+        <p:nvSpPr>
+          <p:cNvPr id="27" name="" descr="{&quot;isTemplate&quot;:true,&quot;type&quot;:&quot;text&quot;}"/>
+          <p:cNvSpPr txBox="1"/>
+          <p:nvPr/>
+        </p:nvSpPr>
+        <p:spPr>
+          <a:xfrm rot="0" flipH="0" flipV="0">
+            <a:off x="552450" y="5324475"/>
+            <a:ext cx="2514600" cy="828675"/>
+          </a:xfrm>
+          <a:prstGeom prst="rect"/>
+        </p:spPr>
+        <p:txBody>
+          <a:bodyPr wrap="square" lIns="0" tIns="0" rIns="0" bIns="0">
+            <a:normAutofit/>
+          </a:bodyPr>
+          <a:p>
+            <a:pPr>
+              <a:lnSpc>
+                <a:spcPct val="160000"/>
+              </a:lnSpc>
+            </a:pPr>
+            <a:r>
+              <a:rPr lang="zh-CN" sz="1125">
+                <a:solidFill>
+                  <a:srgbClr val="D6E4F7"/>
+                </a:solidFill>
+                <a:latin typeface="Microsoft YaHei"/>
+                <a:ea typeface="Microsoft YaHei"/>
+              </a:rPr>
+              <a:t>表格保护：解析保留表格结构，分块保护完整表格，块记录来源文档、页码、章节元数据。</a:t>
+            </a:r>
+            <a:endParaRPr/>
+          </a:p>
+        </p:txBody>
+      </p:sp>
+      <p:sp>
+        <p:nvSpPr>
+          <p:cNvPr id="28" name=""/>
+          <p:cNvSpPr/>
+          <p:nvPr/>
+        </p:nvSpPr>
+        <p:spPr>
+          <a:xfrm rot="0" flipH="0" flipV="0">
+            <a:off x="3619500" y="952500"/>
+            <a:ext cx="8191500" cy="1009650"/>
+          </a:xfrm>
+          <a:prstGeom prst="roundRect">
+            <a:avLst>
+              <a:gd name="adj" fmla="val 9434"/>
+            </a:avLst>
+          </a:prstGeom>
+          <a:solidFill>
+            <a:srgbClr val="F7F9FC"/>
+          </a:solidFill>
+          <a:ln w="12700">
+            <a:solidFill>
+              <a:srgbClr val="E5E7EB"/>
+            </a:solidFill>
+            <a:prstDash val="solid"/>
+          </a:ln>
+        </p:spPr>
+        <p:txBody>
+          <a:bodyPr/>
+          <a:p>
+            <a:pPr/>
+            <a:endParaRPr/>
+          </a:p>
+        </p:txBody>
+      </p:sp>
+      <p:sp>
+        <p:nvSpPr>
+          <p:cNvPr id="29" name=""/>
+          <p:cNvSpPr/>
+          <p:nvPr/>
+        </p:nvSpPr>
+        <p:spPr>
+          <a:xfrm rot="0" flipH="0" flipV="0">
+            <a:off x="3829050" y="1238250"/>
+            <a:ext cx="438150" cy="438150"/>
+          </a:xfrm>
+          <a:prstGeom prst="roundRect">
+            <a:avLst>
+              <a:gd name="adj" fmla="val 50000"/>
+            </a:avLst>
+          </a:prstGeom>
+          <a:solidFill>
+            <a:srgbClr val="1E4FA8"/>
+          </a:solidFill>
+          <a:ln/>
+        </p:spPr>
+        <p:txBody>
+          <a:bodyPr/>
+          <a:p>
+            <a:pPr/>
+            <a:endParaRPr/>
+          </a:p>
+        </p:txBody>
+      </p:sp>
+      <p:sp>
+        <p:nvSpPr>
+          <p:cNvPr id="30" name="" descr="{&quot;isTemplate&quot;:true,&quot;type&quot;:&quot;text&quot;}"/>
+          <p:cNvSpPr txBox="1"/>
+          <p:nvPr/>
+        </p:nvSpPr>
+        <p:spPr>
+          <a:xfrm rot="0" flipH="0" flipV="0">
+            <a:off x="3990975" y="1343025"/>
+            <a:ext cx="123825" cy="228600"/>
+          </a:xfrm>
+          <a:prstGeom prst="rect"/>
+        </p:spPr>
+        <p:txBody>
+          <a:bodyPr wrap="none" lIns="0" tIns="0" rIns="0" bIns="0"/>
+          <a:p>
+            <a:pPr>
+              <a:lnSpc>
+                <a:spcPct val="100000"/>
+              </a:lnSpc>
+            </a:pPr>
+            <a:r>
+              <a:rPr lang="en-US" sz="1500" b="1">
+                <a:solidFill>
+                  <a:srgbClr val="FFFFFF"/>
+                </a:solidFill>
+                <a:latin typeface="Microsoft YaHei"/>
+                <a:ea typeface="Microsoft YaHei"/>
+              </a:rPr>
+              <a:t>1</a:t>
+            </a:r>
+            <a:endParaRPr/>
+          </a:p>
+        </p:txBody>
+      </p:sp>
+      <p:sp>
+        <p:nvSpPr>
+          <p:cNvPr id="31" name="" descr="{&quot;isTemplate&quot;:true,&quot;type&quot;:&quot;text&quot;}"/>
+          <p:cNvSpPr txBox="1"/>
+          <p:nvPr/>
+        </p:nvSpPr>
+        <p:spPr>
+          <a:xfrm rot="0" flipH="0" flipV="0">
+            <a:off x="4457700" y="1162050"/>
+            <a:ext cx="7143750" cy="257175"/>
+          </a:xfrm>
+          <a:prstGeom prst="rect"/>
+        </p:spPr>
+        <p:txBody>
+          <a:bodyPr wrap="none" lIns="0" tIns="0" rIns="0" bIns="0"/>
+          <a:p>
+            <a:pPr>
+              <a:lnSpc>
+                <a:spcPct val="100000"/>
+              </a:lnSpc>
+            </a:pPr>
+            <a:r>
+              <a:rPr lang="zh-CN" sz="1650" b="1">
+                <a:solidFill>
+                  <a:srgbClr val="1A2230"/>
+                </a:solidFill>
+                <a:latin typeface="Microsoft YaHei"/>
+                <a:ea typeface="Microsoft YaHei"/>
+              </a:rPr>
+              <a:t>文档解析</a:t>
+            </a:r>
+            <a:endParaRPr/>
+          </a:p>
+        </p:txBody>
+      </p:sp>
+      <p:sp>
+        <p:nvSpPr>
+          <p:cNvPr id="32" name="" descr="{&quot;isTemplate&quot;:true,&quot;type&quot;:&quot;text&quot;}"/>
+          <p:cNvSpPr txBox="1"/>
+          <p:nvPr/>
+        </p:nvSpPr>
+        <p:spPr>
+          <a:xfrm rot="0" flipH="0" flipV="0">
+            <a:off x="4457700" y="1476375"/>
+            <a:ext cx="7143750" cy="276225"/>
+          </a:xfrm>
+          <a:prstGeom prst="rect"/>
+        </p:spPr>
+        <p:txBody>
+          <a:bodyPr wrap="none" lIns="0" tIns="0" rIns="0" bIns="0"/>
+          <a:p>
+            <a:pPr>
+              <a:lnSpc>
+                <a:spcPct val="150000"/>
+              </a:lnSpc>
+            </a:pPr>
+            <a:r>
+              <a:rPr lang="en-US" sz="1200">
+                <a:solidFill>
+                  <a:srgbClr val="4A5568"/>
+                </a:solidFill>
+                <a:latin typeface="Microsoft YaHei"/>
+                <a:ea typeface="Microsoft YaHei"/>
+              </a:rPr>
+              <a:t xml:space="preserve">PyMuPDF </a:t>
+            </a:r>
+            <a:r>
+              <a:rPr lang="zh-CN" sz="1200">
+                <a:solidFill>
+                  <a:srgbClr val="4A5568"/>
+                </a:solidFill>
+                <a:latin typeface="Microsoft YaHei"/>
+                <a:ea typeface="Microsoft YaHei"/>
+              </a:rPr>
+              <a:t>提取文字</a:t>
+            </a:r>
+            <a:r>
+              <a:rPr lang="en-US" sz="1200">
+                <a:solidFill>
+                  <a:srgbClr val="4A5568"/>
+                </a:solidFill>
+                <a:latin typeface="Microsoft YaHei"/>
+                <a:ea typeface="Microsoft YaHei"/>
+              </a:rPr>
+              <a:t>/</a:t>
+            </a:r>
+            <a:r>
+              <a:rPr lang="zh-CN" sz="1200">
+                <a:solidFill>
+                  <a:srgbClr val="4A5568"/>
+                </a:solidFill>
+                <a:latin typeface="Microsoft YaHei"/>
+                <a:ea typeface="Microsoft YaHei"/>
+              </a:rPr>
+              <a:t>页码</a:t>
+            </a:r>
+            <a:r>
+              <a:rPr lang="en-US" sz="1200">
+                <a:solidFill>
+                  <a:srgbClr val="4A5568"/>
+                </a:solidFill>
+                <a:latin typeface="Microsoft YaHei"/>
+                <a:ea typeface="Microsoft YaHei"/>
+              </a:rPr>
+              <a:t>/</a:t>
+            </a:r>
+            <a:r>
+              <a:rPr lang="zh-CN" sz="1200">
+                <a:solidFill>
+                  <a:srgbClr val="4A5568"/>
+                </a:solidFill>
+                <a:latin typeface="Microsoft YaHei"/>
+                <a:ea typeface="Microsoft YaHei"/>
+              </a:rPr>
+              <a:t>版面，</a:t>
+            </a:r>
+            <a:r>
+              <a:rPr lang="en-US" sz="1200">
+                <a:solidFill>
+                  <a:srgbClr val="4A5568"/>
+                </a:solidFill>
+                <a:latin typeface="Microsoft YaHei"/>
+                <a:ea typeface="Microsoft YaHei"/>
+              </a:rPr>
+              <a:t xml:space="preserve">pdfplumber </a:t>
+            </a:r>
+            <a:r>
+              <a:rPr lang="zh-CN" sz="1200">
+                <a:solidFill>
+                  <a:srgbClr val="4A5568"/>
+                </a:solidFill>
+                <a:latin typeface="Microsoft YaHei"/>
+                <a:ea typeface="Microsoft YaHei"/>
+              </a:rPr>
+              <a:t>抽取表格结构</a:t>
+            </a:r>
+            <a:endParaRPr/>
+          </a:p>
+        </p:txBody>
+      </p:sp>
+      <p:sp>
+        <p:nvSpPr>
+          <p:cNvPr id="33" name=""/>
+          <p:cNvSpPr/>
+          <p:nvPr/>
+        </p:nvSpPr>
+        <p:spPr>
+          <a:xfrm rot="0" flipH="0" flipV="0">
+            <a:off x="3619500" y="2409825"/>
+            <a:ext cx="8191500" cy="1009650"/>
+          </a:xfrm>
+          <a:prstGeom prst="roundRect">
+            <a:avLst>
+              <a:gd name="adj" fmla="val 9434"/>
+            </a:avLst>
+          </a:prstGeom>
+          <a:solidFill>
+            <a:srgbClr val="F7F9FC"/>
+          </a:solidFill>
+          <a:ln w="12700">
+            <a:solidFill>
+              <a:srgbClr val="E5E7EB"/>
+            </a:solidFill>
+            <a:prstDash val="solid"/>
+          </a:ln>
+        </p:spPr>
+        <p:txBody>
+          <a:bodyPr/>
+          <a:p>
+            <a:pPr/>
+            <a:endParaRPr/>
+          </a:p>
+        </p:txBody>
+      </p:sp>
+      <p:sp>
+        <p:nvSpPr>
+          <p:cNvPr id="34" name=""/>
+          <p:cNvSpPr/>
+          <p:nvPr/>
+        </p:nvSpPr>
+        <p:spPr>
+          <a:xfrm rot="0" flipH="0" flipV="0">
+            <a:off x="3829050" y="2695575"/>
+            <a:ext cx="438150" cy="438150"/>
+          </a:xfrm>
+          <a:prstGeom prst="roundRect">
+            <a:avLst>
+              <a:gd name="adj" fmla="val 50000"/>
+            </a:avLst>
+          </a:prstGeom>
+          <a:solidFill>
+            <a:srgbClr val="1E4FA8"/>
+          </a:solidFill>
+          <a:ln/>
+        </p:spPr>
+        <p:txBody>
+          <a:bodyPr/>
+          <a:p>
+            <a:pPr/>
+            <a:endParaRPr/>
+          </a:p>
+        </p:txBody>
+      </p:sp>
+      <p:sp>
+        <p:nvSpPr>
+          <p:cNvPr id="35" name="" descr="{&quot;isTemplate&quot;:true,&quot;type&quot;:&quot;text&quot;}"/>
+          <p:cNvSpPr txBox="1"/>
+          <p:nvPr/>
+        </p:nvSpPr>
+        <p:spPr>
+          <a:xfrm rot="0" flipH="0" flipV="0">
+            <a:off x="3990975" y="2800350"/>
+            <a:ext cx="123825" cy="228600"/>
+          </a:xfrm>
+          <a:prstGeom prst="rect"/>
+        </p:spPr>
+        <p:txBody>
+          <a:bodyPr wrap="none" lIns="0" tIns="0" rIns="0" bIns="0"/>
+          <a:p>
+            <a:pPr>
+              <a:lnSpc>
+                <a:spcPct val="100000"/>
+              </a:lnSpc>
+            </a:pPr>
+            <a:r>
+              <a:rPr lang="en-US" sz="1500" b="1">
+                <a:solidFill>
+                  <a:srgbClr val="FFFFFF"/>
+                </a:solidFill>
+                <a:latin typeface="Microsoft YaHei"/>
+                <a:ea typeface="Microsoft YaHei"/>
+              </a:rPr>
+              <a:t>2</a:t>
+            </a:r>
+            <a:endParaRPr/>
+          </a:p>
+        </p:txBody>
+      </p:sp>
+      <p:sp>
+        <p:nvSpPr>
+          <p:cNvPr id="36" name="" descr="{&quot;isTemplate&quot;:true,&quot;type&quot;:&quot;text&quot;}"/>
+          <p:cNvSpPr txBox="1"/>
+          <p:nvPr/>
+        </p:nvSpPr>
+        <p:spPr>
+          <a:xfrm rot="0" flipH="0" flipV="0">
+            <a:off x="4457700" y="2619375"/>
+            <a:ext cx="7143750" cy="257175"/>
+          </a:xfrm>
+          <a:prstGeom prst="rect"/>
+        </p:spPr>
+        <p:txBody>
+          <a:bodyPr wrap="none" lIns="0" tIns="0" rIns="0" bIns="0"/>
+          <a:p>
+            <a:pPr>
+              <a:lnSpc>
+                <a:spcPct val="100000"/>
+              </a:lnSpc>
+            </a:pPr>
+            <a:r>
+              <a:rPr lang="zh-CN" sz="1650" b="1">
+                <a:solidFill>
+                  <a:srgbClr val="1A2230"/>
+                </a:solidFill>
+                <a:latin typeface="Microsoft YaHei"/>
+                <a:ea typeface="Microsoft YaHei"/>
+              </a:rPr>
+              <a:t>文档分块</a:t>
+            </a:r>
+            <a:endParaRPr/>
+          </a:p>
+        </p:txBody>
+      </p:sp>
+      <p:sp>
+        <p:nvSpPr>
+          <p:cNvPr id="37" name="" descr="{&quot;isTemplate&quot;:true,&quot;type&quot;:&quot;text&quot;}"/>
+          <p:cNvSpPr txBox="1"/>
+          <p:nvPr/>
+        </p:nvSpPr>
+        <p:spPr>
+          <a:xfrm rot="0" flipH="0" flipV="0">
+            <a:off x="4457700" y="2933700"/>
+            <a:ext cx="7143750" cy="276225"/>
+          </a:xfrm>
+          <a:prstGeom prst="rect"/>
+        </p:spPr>
+        <p:txBody>
+          <a:bodyPr wrap="none" lIns="0" tIns="0" rIns="0" bIns="0"/>
+          <a:p>
+            <a:pPr>
+              <a:lnSpc>
+                <a:spcPct val="150000"/>
+              </a:lnSpc>
+            </a:pPr>
+            <a:r>
+              <a:rPr lang="zh-CN" sz="1200">
+                <a:solidFill>
+                  <a:srgbClr val="4A5568"/>
+                </a:solidFill>
+                <a:latin typeface="Microsoft YaHei"/>
+                <a:ea typeface="Microsoft YaHei"/>
+              </a:rPr>
+              <a:t>递归字符分块</a:t>
+            </a:r>
+            <a:r>
+              <a:rPr lang="en-US" sz="1200">
+                <a:solidFill>
+                  <a:srgbClr val="4A5568"/>
+                </a:solidFill>
+                <a:latin typeface="Microsoft YaHei"/>
+                <a:ea typeface="Microsoft YaHei"/>
+              </a:rPr>
+              <a:t xml:space="preserve"> + </a:t>
+            </a:r>
+            <a:r>
+              <a:rPr lang="zh-CN" sz="1200">
+                <a:solidFill>
+                  <a:srgbClr val="4A5568"/>
+                </a:solidFill>
+                <a:latin typeface="Microsoft YaHei"/>
+                <a:ea typeface="Microsoft YaHei"/>
+              </a:rPr>
+              <a:t>表格保护</a:t>
+            </a:r>
+            <a:r>
+              <a:rPr lang="en-US" sz="1200">
+                <a:solidFill>
+                  <a:srgbClr val="4A5568"/>
+                </a:solidFill>
+                <a:latin typeface="Microsoft YaHei"/>
+                <a:ea typeface="Microsoft YaHei"/>
+              </a:rPr>
+              <a:t xml:space="preserve"> + </a:t>
+            </a:r>
+            <a:r>
+              <a:rPr lang="zh-CN" sz="1200">
+                <a:solidFill>
+                  <a:srgbClr val="4A5568"/>
+                </a:solidFill>
+                <a:latin typeface="Microsoft YaHei"/>
+                <a:ea typeface="Microsoft YaHei"/>
+              </a:rPr>
+              <a:t>相邻块重叠</a:t>
+            </a:r>
+            <a:endParaRPr/>
+          </a:p>
+        </p:txBody>
+      </p:sp>
+      <p:sp>
+        <p:nvSpPr>
+          <p:cNvPr id="38" name=""/>
+          <p:cNvSpPr/>
+          <p:nvPr/>
+        </p:nvSpPr>
+        <p:spPr>
+          <a:xfrm rot="0" flipH="0" flipV="0">
+            <a:off x="3619500" y="3857625"/>
+            <a:ext cx="8191500" cy="1009650"/>
+          </a:xfrm>
+          <a:prstGeom prst="roundRect">
+            <a:avLst>
+              <a:gd name="adj" fmla="val 9434"/>
+            </a:avLst>
+          </a:prstGeom>
+          <a:solidFill>
+            <a:srgbClr val="F7F9FC"/>
+          </a:solidFill>
+          <a:ln w="12700">
+            <a:solidFill>
+              <a:srgbClr val="E5E7EB"/>
+            </a:solidFill>
+            <a:prstDash val="solid"/>
+          </a:ln>
+        </p:spPr>
+        <p:txBody>
+          <a:bodyPr/>
+          <a:p>
+            <a:pPr/>
+            <a:endParaRPr/>
+          </a:p>
+        </p:txBody>
+      </p:sp>
+      <p:sp>
+        <p:nvSpPr>
+          <p:cNvPr id="39" name=""/>
+          <p:cNvSpPr/>
+          <p:nvPr/>
+        </p:nvSpPr>
+        <p:spPr>
+          <a:xfrm rot="0" flipH="0" flipV="0">
+            <a:off x="3829050" y="4143375"/>
+            <a:ext cx="438150" cy="438150"/>
+          </a:xfrm>
+          <a:prstGeom prst="roundRect">
+            <a:avLst>
+              <a:gd name="adj" fmla="val 50000"/>
+            </a:avLst>
+          </a:prstGeom>
+          <a:solidFill>
+            <a:srgbClr val="1E4FA8"/>
+          </a:solidFill>
+          <a:ln/>
+        </p:spPr>
+        <p:txBody>
+          <a:bodyPr/>
+          <a:p>
+            <a:pPr/>
+            <a:endParaRPr/>
+          </a:p>
+        </p:txBody>
+      </p:sp>
+      <p:sp>
+        <p:nvSpPr>
+          <p:cNvPr id="40" name="" descr="{&quot;isTemplate&quot;:true,&quot;type&quot;:&quot;text&quot;}"/>
+          <p:cNvSpPr txBox="1"/>
+          <p:nvPr/>
+        </p:nvSpPr>
+        <p:spPr>
+          <a:xfrm rot="0" flipH="0" flipV="0">
+            <a:off x="3990975" y="4248150"/>
+            <a:ext cx="123825" cy="228600"/>
+          </a:xfrm>
+          <a:prstGeom prst="rect"/>
+        </p:spPr>
+        <p:txBody>
+          <a:bodyPr wrap="none" lIns="0" tIns="0" rIns="0" bIns="0"/>
+          <a:p>
+            <a:pPr>
+              <a:lnSpc>
+                <a:spcPct val="100000"/>
+              </a:lnSpc>
+            </a:pPr>
+            <a:r>
+              <a:rPr lang="en-US" sz="1500" b="1">
+                <a:solidFill>
+                  <a:srgbClr val="FFFFFF"/>
+                </a:solidFill>
+                <a:latin typeface="Microsoft YaHei"/>
+                <a:ea typeface="Microsoft YaHei"/>
+              </a:rPr>
+              <a:t>3</a:t>
+            </a:r>
+            <a:endParaRPr/>
+          </a:p>
+        </p:txBody>
+      </p:sp>
+      <p:sp>
+        <p:nvSpPr>
+          <p:cNvPr id="41" name="" descr="{&quot;isTemplate&quot;:true,&quot;type&quot;:&quot;text&quot;}"/>
+          <p:cNvSpPr txBox="1"/>
+          <p:nvPr/>
+        </p:nvSpPr>
+        <p:spPr>
+          <a:xfrm rot="0" flipH="0" flipV="0">
+            <a:off x="4457700" y="4067175"/>
+            <a:ext cx="7143750" cy="257175"/>
+          </a:xfrm>
+          <a:prstGeom prst="rect"/>
+        </p:spPr>
+        <p:txBody>
+          <a:bodyPr wrap="none" lIns="0" tIns="0" rIns="0" bIns="0"/>
+          <a:p>
+            <a:pPr>
+              <a:lnSpc>
+                <a:spcPct val="100000"/>
+              </a:lnSpc>
+            </a:pPr>
+            <a:r>
+              <a:rPr lang="zh-CN" sz="1650" b="1">
+                <a:solidFill>
+                  <a:srgbClr val="1A2230"/>
+                </a:solidFill>
+                <a:latin typeface="Microsoft YaHei"/>
+                <a:ea typeface="Microsoft YaHei"/>
+              </a:rPr>
+              <a:t>向量化</a:t>
+            </a:r>
+            <a:endParaRPr/>
+          </a:p>
+        </p:txBody>
+      </p:sp>
+      <p:sp>
+        <p:nvSpPr>
+          <p:cNvPr id="42" name="" descr="{&quot;isTemplate&quot;:true,&quot;type&quot;:&quot;text&quot;}"/>
+          <p:cNvSpPr txBox="1"/>
+          <p:nvPr/>
+        </p:nvSpPr>
+        <p:spPr>
+          <a:xfrm rot="0" flipH="0" flipV="0">
+            <a:off x="4457700" y="4381500"/>
+            <a:ext cx="7143750" cy="276225"/>
+          </a:xfrm>
+          <a:prstGeom prst="rect"/>
+        </p:spPr>
+        <p:txBody>
+          <a:bodyPr wrap="none" lIns="0" tIns="0" rIns="0" bIns="0"/>
+          <a:p>
+            <a:pPr>
+              <a:lnSpc>
+                <a:spcPct val="150000"/>
+              </a:lnSpc>
+            </a:pPr>
+            <a:r>
+              <a:rPr lang="en-US" sz="1200">
+                <a:solidFill>
+                  <a:srgbClr val="4A5568"/>
+                </a:solidFill>
+                <a:latin typeface="Microsoft YaHei"/>
+                <a:ea typeface="Microsoft YaHei"/>
+              </a:rPr>
+              <a:t xml:space="preserve">BGE-M3 </a:t>
+            </a:r>
+            <a:r>
+              <a:rPr lang="zh-CN" sz="1200">
+                <a:solidFill>
+                  <a:srgbClr val="4A5568"/>
+                </a:solidFill>
+                <a:latin typeface="Microsoft YaHei"/>
+                <a:ea typeface="Microsoft YaHei"/>
+              </a:rPr>
+              <a:t>嵌入模型生成稠密向量</a:t>
+            </a:r>
+            <a:endParaRPr/>
+          </a:p>
+        </p:txBody>
+      </p:sp>
+      <p:sp>
+        <p:nvSpPr>
+          <p:cNvPr id="43" name=""/>
+          <p:cNvSpPr/>
+          <p:nvPr/>
+        </p:nvSpPr>
+        <p:spPr>
+          <a:xfrm rot="0" flipH="0" flipV="0">
+            <a:off x="3619500" y="5314950"/>
+            <a:ext cx="8191500" cy="1009650"/>
+          </a:xfrm>
+          <a:prstGeom prst="roundRect">
+            <a:avLst>
+              <a:gd name="adj" fmla="val 9434"/>
+            </a:avLst>
+          </a:prstGeom>
+          <a:solidFill>
+            <a:srgbClr val="F7F9FC"/>
+          </a:solidFill>
+          <a:ln w="12700">
+            <a:solidFill>
+              <a:srgbClr val="E5E7EB"/>
+            </a:solidFill>
+            <a:prstDash val="solid"/>
+          </a:ln>
+        </p:spPr>
+        <p:txBody>
+          <a:bodyPr/>
+          <a:p>
+            <a:pPr/>
+            <a:endParaRPr/>
+          </a:p>
+        </p:txBody>
+      </p:sp>
+      <p:sp>
+        <p:nvSpPr>
+          <p:cNvPr id="44" name=""/>
+          <p:cNvSpPr/>
+          <p:nvPr/>
+        </p:nvSpPr>
+        <p:spPr>
+          <a:xfrm rot="0" flipH="0" flipV="0">
+            <a:off x="3829050" y="5600700"/>
+            <a:ext cx="438150" cy="438150"/>
+          </a:xfrm>
+          <a:prstGeom prst="roundRect">
+            <a:avLst>
+              <a:gd name="adj" fmla="val 50000"/>
+            </a:avLst>
+          </a:prstGeom>
+          <a:solidFill>
+            <a:srgbClr val="1E4FA8"/>
+          </a:solidFill>
+          <a:ln/>
+        </p:spPr>
+        <p:txBody>
+          <a:bodyPr/>
+          <a:p>
+            <a:pPr/>
+            <a:endParaRPr/>
+          </a:p>
+        </p:txBody>
+      </p:sp>
+      <p:sp>
+        <p:nvSpPr>
+          <p:cNvPr id="45" name="" descr="{&quot;isTemplate&quot;:true,&quot;type&quot;:&quot;text&quot;}"/>
+          <p:cNvSpPr txBox="1"/>
+          <p:nvPr/>
+        </p:nvSpPr>
+        <p:spPr>
+          <a:xfrm rot="0" flipH="0" flipV="0">
+            <a:off x="3990975" y="5705475"/>
+            <a:ext cx="123825" cy="228600"/>
+          </a:xfrm>
+          <a:prstGeom prst="rect"/>
+        </p:spPr>
+        <p:txBody>
+          <a:bodyPr wrap="none" lIns="0" tIns="0" rIns="0" bIns="0"/>
+          <a:p>
+            <a:pPr>
+              <a:lnSpc>
+                <a:spcPct val="100000"/>
+              </a:lnSpc>
+            </a:pPr>
+            <a:r>
+              <a:rPr lang="en-US" sz="1500" b="1">
+                <a:solidFill>
+                  <a:srgbClr val="FFFFFF"/>
+                </a:solidFill>
+                <a:latin typeface="Microsoft YaHei"/>
+                <a:ea typeface="Microsoft YaHei"/>
+              </a:rPr>
+              <a:t>4</a:t>
+            </a:r>
+            <a:endParaRPr/>
+          </a:p>
+        </p:txBody>
+      </p:sp>
+      <p:sp>
+        <p:nvSpPr>
+          <p:cNvPr id="46" name="" descr="{&quot;isTemplate&quot;:true,&quot;type&quot;:&quot;text&quot;}"/>
+          <p:cNvSpPr txBox="1"/>
+          <p:nvPr/>
+        </p:nvSpPr>
+        <p:spPr>
+          <a:xfrm rot="0" flipH="0" flipV="0">
+            <a:off x="4457700" y="5524500"/>
+            <a:ext cx="7143750" cy="257175"/>
+          </a:xfrm>
+          <a:prstGeom prst="rect"/>
+        </p:spPr>
+        <p:txBody>
+          <a:bodyPr wrap="none" lIns="0" tIns="0" rIns="0" bIns="0"/>
+          <a:p>
+            <a:pPr>
+              <a:lnSpc>
+                <a:spcPct val="100000"/>
+              </a:lnSpc>
+            </a:pPr>
+            <a:r>
+              <a:rPr lang="zh-CN" sz="1650" b="1">
+                <a:solidFill>
+                  <a:srgbClr val="1A2230"/>
+                </a:solidFill>
+                <a:latin typeface="Microsoft YaHei"/>
+                <a:ea typeface="Microsoft YaHei"/>
+              </a:rPr>
+              <a:t>索引入库</a:t>
+            </a:r>
+            <a:endParaRPr/>
+          </a:p>
+        </p:txBody>
+      </p:sp>
+      <p:sp>
+        <p:nvSpPr>
+          <p:cNvPr id="47" name="" descr="{&quot;isTemplate&quot;:true,&quot;type&quot;:&quot;text&quot;}"/>
+          <p:cNvSpPr txBox="1"/>
+          <p:nvPr/>
+        </p:nvSpPr>
+        <p:spPr>
+          <a:xfrm rot="0" flipH="0" flipV="0">
+            <a:off x="4457700" y="5838825"/>
+            <a:ext cx="7143750" cy="276225"/>
+          </a:xfrm>
+          <a:prstGeom prst="rect"/>
+        </p:spPr>
+        <p:txBody>
+          <a:bodyPr wrap="none" lIns="0" tIns="0" rIns="0" bIns="0"/>
+          <a:p>
+            <a:pPr>
+              <a:lnSpc>
+                <a:spcPct val="150000"/>
+              </a:lnSpc>
+            </a:pPr>
+            <a:r>
+              <a:rPr lang="en-US" sz="1200">
+                <a:solidFill>
+                  <a:srgbClr val="4A5568"/>
+                </a:solidFill>
+                <a:latin typeface="Microsoft YaHei"/>
+                <a:ea typeface="Microsoft YaHei"/>
+              </a:rPr>
+              <a:t xml:space="preserve">Chroma </a:t>
+            </a:r>
+            <a:r>
+              <a:rPr lang="zh-CN" sz="1200">
+                <a:solidFill>
+                  <a:srgbClr val="4A5568"/>
+                </a:solidFill>
+                <a:latin typeface="Microsoft YaHei"/>
+                <a:ea typeface="Microsoft YaHei"/>
+              </a:rPr>
+              <a:t>写入稠密向量，</a:t>
+            </a:r>
+            <a:r>
+              <a:rPr lang="en-US" sz="1200">
+                <a:solidFill>
+                  <a:srgbClr val="4A5568"/>
+                </a:solidFill>
+                <a:latin typeface="Microsoft YaHei"/>
+                <a:ea typeface="Microsoft YaHei"/>
+              </a:rPr>
+              <a:t xml:space="preserve">rank_bm25 </a:t>
+            </a:r>
+            <a:r>
+              <a:rPr lang="zh-CN" sz="1200">
+                <a:solidFill>
+                  <a:srgbClr val="4A5568"/>
+                </a:solidFill>
+                <a:latin typeface="Microsoft YaHei"/>
+                <a:ea typeface="Microsoft YaHei"/>
+              </a:rPr>
+              <a:t>构建稀疏索引</a:t>
+            </a:r>
+            <a:endParaRPr/>
+          </a:p>
+        </p:txBody>
+      </p:sp>
+      <p:sp>
+        <p:nvSpPr>
+          <p:cNvPr id="48" name="" descr="{&quot;isTemplate&quot;:true,&quot;type&quot;:&quot;text&quot;}"/>
+          <p:cNvSpPr txBox="1"/>
+          <p:nvPr/>
+        </p:nvSpPr>
+        <p:spPr>
+          <a:xfrm rot="0" flipH="0" flipV="0">
+            <a:off x="381000" y="6591300"/>
+            <a:ext cx="1600200" cy="161925"/>
+          </a:xfrm>
+          <a:prstGeom prst="rect"/>
+        </p:spPr>
+        <p:txBody>
+          <a:bodyPr wrap="none" lIns="0" tIns="0" rIns="0" bIns="0"/>
+          <a:p>
+            <a:pPr>
+              <a:lnSpc>
+                <a:spcPct val="100000"/>
+              </a:lnSpc>
+            </a:pPr>
+            <a:r>
+              <a:rPr lang="zh-CN" sz="1050">
+                <a:solidFill>
+                  <a:srgbClr val="8B97A8"/>
+                </a:solidFill>
+                <a:latin typeface="Microsoft YaHei"/>
+                <a:ea typeface="Microsoft YaHei"/>
+              </a:rPr>
+              <a:t>中国科学技术大学软件学院</a:t>
+            </a:r>
+            <a:endParaRPr/>
+          </a:p>
+        </p:txBody>
+      </p:sp>
+      <p:sp>
+        <p:nvSpPr>
+          <p:cNvPr id="49" name="" descr="{&quot;isTemplate&quot;:true,&quot;type&quot;:&quot;text&quot;}"/>
+          <p:cNvSpPr txBox="1"/>
+          <p:nvPr/>
+        </p:nvSpPr>
+        <p:spPr>
+          <a:xfrm rot="0" flipH="0" flipV="0">
+            <a:off x="11268075" y="6572250"/>
+            <a:ext cx="542925" cy="190500"/>
+          </a:xfrm>
+          <a:prstGeom prst="rect"/>
+        </p:spPr>
+        <p:txBody>
+          <a:bodyPr wrap="none" lIns="0" tIns="0" rIns="0" bIns="0"/>
+          <a:p>
+            <a:pPr>
+              <a:lnSpc>
+                <a:spcPct val="100000"/>
+              </a:lnSpc>
+            </a:pPr>
+            <a:r>
+              <a:rPr lang="en-US" sz="1200" b="1">
+                <a:solidFill>
+                  <a:srgbClr val="1E4FA8"/>
+                </a:solidFill>
+                <a:latin typeface="Microsoft YaHei"/>
+                <a:ea typeface="Microsoft YaHei"/>
+              </a:rPr>
+              <a:t>10 / 17</a:t>
+            </a:r>
+            <a:endParaRPr/>
+          </a:p>
+        </p:txBody>
+      </p:sp>
+    </p:spTree>
+  </p:cSld>
+</p:sld>
+</file>
+
+<file path=ppt/slides/slide11.xml><?xml version="1.0" encoding="utf-8"?>
+<p:sld xmlns:p="http://schemas.openxmlformats.org/presentationml/2006/main" xmlns:a="http://schemas.openxmlformats.org/drawingml/2006/main">
+  <p:cSld>
+    <p:spTree>
+      <p:nvGrpSpPr>
+        <p:cNvPr id="50" name=""/>
+        <p:cNvGrpSpPr/>
+        <p:nvPr/>
+      </p:nvGrpSpPr>
+      <p:grpSpPr>
+        <a:xfrm>
+          <a:off x="0" y="0"/>
+          <a:ext cx="0" cy="0"/>
+          <a:chOff x="0" y="0"/>
+          <a:chExt cx="0" cy="0"/>
+        </a:xfrm>
+      </p:grpSpPr>
+      <p:sp>
+        <p:nvSpPr>
+          <p:cNvPr id="51" name=""/>
+          <p:cNvSpPr/>
+          <p:nvPr/>
+        </p:nvSpPr>
+        <p:spPr>
+          <a:xfrm rot="0" flipH="0" flipV="0">
+            <a:off x="0" y="0"/>
+            <a:ext cx="12192000" cy="6858000"/>
+          </a:xfrm>
+          <a:prstGeom prst="rect">
+            <a:avLst/>
+          </a:prstGeom>
+          <a:solidFill>
+            <a:srgbClr val="FFFFFF"/>
+          </a:solidFill>
+          <a:ln/>
+        </p:spPr>
+        <p:txBody>
+          <a:bodyPr/>
+          <a:p>
+            <a:pPr/>
+            <a:endParaRPr/>
+          </a:p>
+        </p:txBody>
+      </p:sp>
+      <p:sp>
+        <p:nvSpPr>
+          <p:cNvPr id="52" name=""/>
+          <p:cNvSpPr/>
+          <p:nvPr/>
+        </p:nvSpPr>
+        <p:spPr>
+          <a:xfrm rot="0" flipH="0" flipV="0">
+            <a:off x="0" y="0"/>
+            <a:ext cx="12192000" cy="685800"/>
+          </a:xfrm>
+          <a:prstGeom prst="rect">
+            <a:avLst/>
+          </a:prstGeom>
+          <a:solidFill>
+            <a:srgbClr val="1E4FA8"/>
+          </a:solidFill>
+          <a:ln/>
+        </p:spPr>
+        <p:txBody>
+          <a:bodyPr/>
+          <a:p>
+            <a:pPr/>
+            <a:endParaRPr/>
+          </a:p>
+        </p:txBody>
+      </p:sp>
+      <p:sp>
+        <p:nvSpPr>
+          <p:cNvPr id="53" name="" descr="{&quot;isTemplate&quot;:true,&quot;type&quot;:&quot;text&quot;}"/>
+          <p:cNvSpPr txBox="1"/>
+          <p:nvPr/>
+        </p:nvSpPr>
+        <p:spPr>
+          <a:xfrm rot="0" flipH="0" flipV="0">
+            <a:off x="381000" y="247650"/>
+            <a:ext cx="2543175" cy="190500"/>
+          </a:xfrm>
+          <a:prstGeom prst="rect"/>
+        </p:spPr>
+        <p:txBody>
+          <a:bodyPr wrap="none" lIns="0" tIns="0" rIns="0" bIns="0"/>
+          <a:p>
+            <a:pPr>
+              <a:lnSpc>
+                <a:spcPct val="100000"/>
+              </a:lnSpc>
+            </a:pPr>
+            <a:r>
+              <a:rPr lang="zh-CN" sz="1200">
+                <a:solidFill>
+                  <a:srgbClr val="FFFFFF"/>
+                </a:solidFill>
+                <a:latin typeface="Microsoft YaHei"/>
+                <a:ea typeface="Microsoft YaHei"/>
+              </a:rPr>
+              <a:t>基于</a:t>
+            </a:r>
+            <a:r>
+              <a:rPr lang="en-US" sz="1200">
+                <a:solidFill>
+                  <a:srgbClr val="FFFFFF"/>
+                </a:solidFill>
+                <a:latin typeface="Microsoft YaHei"/>
+                <a:ea typeface="Microsoft YaHei"/>
+              </a:rPr>
+              <a:t xml:space="preserve"> RAG </a:t>
+            </a:r>
+            <a:r>
+              <a:rPr lang="zh-CN" sz="1200">
+                <a:solidFill>
+                  <a:srgbClr val="FFFFFF"/>
+                </a:solidFill>
+                <a:latin typeface="Microsoft YaHei"/>
+                <a:ea typeface="Microsoft YaHei"/>
+              </a:rPr>
+              <a:t>的轻量级企业工艺生成系统</a:t>
+            </a:r>
+            <a:endParaRPr/>
+          </a:p>
+        </p:txBody>
+      </p:sp>
+      <p:sp>
+        <p:nvSpPr>
+          <p:cNvPr id="54" name="" descr="{&quot;isTemplate&quot;:true,&quot;type&quot;:&quot;text&quot;}"/>
+          <p:cNvSpPr txBox="1"/>
+          <p:nvPr/>
+        </p:nvSpPr>
+        <p:spPr>
+          <a:xfrm rot="0" flipH="0" flipV="0">
+            <a:off x="11277600" y="266700"/>
+            <a:ext cx="533400" cy="161925"/>
+          </a:xfrm>
+          <a:prstGeom prst="rect"/>
+        </p:spPr>
+        <p:txBody>
+          <a:bodyPr wrap="none" lIns="0" tIns="0" rIns="0" bIns="0"/>
+          <a:p>
+            <a:pPr>
+              <a:lnSpc>
+                <a:spcPct val="100000"/>
+              </a:lnSpc>
+            </a:pPr>
+            <a:r>
+              <a:rPr lang="zh-CN" sz="1050">
+                <a:solidFill>
+                  <a:srgbClr val="FFFFFF">
+                    <a:alpha val="85000"/>
+                  </a:srgbClr>
+                </a:solidFill>
+                <a:latin typeface="Microsoft YaHei"/>
+                <a:ea typeface="Microsoft YaHei"/>
+              </a:rPr>
+              <a:t>技术方案</a:t>
+            </a:r>
+            <a:endParaRPr/>
+          </a:p>
+        </p:txBody>
+      </p:sp>
+      <p:sp>
+        <p:nvSpPr>
+          <p:cNvPr id="55" name=""/>
+          <p:cNvSpPr/>
+          <p:nvPr/>
+        </p:nvSpPr>
+        <p:spPr>
+          <a:xfrm rot="0" flipH="0" flipV="0">
+            <a:off x="381000" y="952500"/>
+            <a:ext cx="457200" cy="38100"/>
+          </a:xfrm>
+          <a:prstGeom prst="roundRect">
+            <a:avLst>
+              <a:gd name="adj" fmla="val 50000"/>
+            </a:avLst>
+          </a:prstGeom>
+          <a:solidFill>
+            <a:srgbClr val="3D7BD9"/>
+          </a:solidFill>
+          <a:ln/>
+        </p:spPr>
+        <p:txBody>
+          <a:bodyPr/>
+          <a:p>
+            <a:pPr/>
+            <a:endParaRPr/>
+          </a:p>
+        </p:txBody>
+      </p:sp>
+      <p:sp>
+        <p:nvSpPr>
+          <p:cNvPr id="56" name="" descr="{&quot;isTemplate&quot;:true,&quot;type&quot;:&quot;text&quot;}"/>
+          <p:cNvSpPr txBox="1"/>
+          <p:nvPr/>
+        </p:nvSpPr>
+        <p:spPr>
+          <a:xfrm rot="0" flipH="0" flipV="0">
+            <a:off x="381000" y="1143000"/>
+            <a:ext cx="2857500" cy="514350"/>
+          </a:xfrm>
+          <a:prstGeom prst="rect"/>
+        </p:spPr>
+        <p:txBody>
+          <a:bodyPr wrap="none" lIns="0" tIns="0" rIns="0" bIns="0"/>
+          <a:p>
+            <a:pPr>
+              <a:lnSpc>
+                <a:spcPct val="130000"/>
+              </a:lnSpc>
+            </a:pPr>
+            <a:r>
+              <a:rPr lang="zh-CN" sz="2550" b="1">
+                <a:solidFill>
+                  <a:srgbClr val="1A2230"/>
+                </a:solidFill>
+                <a:latin typeface="Microsoft YaHei"/>
+                <a:ea typeface="Microsoft YaHei"/>
+              </a:rPr>
+              <a:t>在线问答链路</a:t>
+            </a:r>
+            <a:endParaRPr/>
+          </a:p>
+        </p:txBody>
+      </p:sp>
+      <p:sp>
+        <p:nvSpPr>
+          <p:cNvPr id="57" name="" descr="{&quot;isTemplate&quot;:true,&quot;type&quot;:&quot;text&quot;}"/>
+          <p:cNvSpPr txBox="1"/>
+          <p:nvPr/>
+        </p:nvSpPr>
+        <p:spPr>
+          <a:xfrm rot="0" flipH="0" flipV="0">
+            <a:off x="381000" y="1809750"/>
+            <a:ext cx="2857500" cy="552450"/>
+          </a:xfrm>
+          <a:prstGeom prst="rect"/>
+        </p:spPr>
+        <p:txBody>
+          <a:bodyPr wrap="square" lIns="0" tIns="0" rIns="0" bIns="0">
+            <a:normAutofit/>
+          </a:bodyPr>
+          <a:p>
+            <a:pPr>
+              <a:lnSpc>
+                <a:spcPct val="150000"/>
+              </a:lnSpc>
+            </a:pPr>
+            <a:r>
+              <a:rPr lang="zh-CN" sz="1200">
+                <a:solidFill>
+                  <a:srgbClr val="8B97A8"/>
+                </a:solidFill>
+                <a:latin typeface="Microsoft YaHei"/>
+                <a:ea typeface="Microsoft YaHei"/>
+              </a:rPr>
+              <a:t>每次提问，从知识库检索并生成带引用的加工指令</a:t>
+            </a:r>
+            <a:endParaRPr/>
+          </a:p>
+        </p:txBody>
+      </p:sp>
+      <p:sp>
+        <p:nvSpPr>
+          <p:cNvPr id="58" name=""/>
+          <p:cNvSpPr/>
+          <p:nvPr/>
+        </p:nvSpPr>
+        <p:spPr>
+          <a:xfrm rot="0" flipH="0" flipV="0">
+            <a:off x="381000" y="5143500"/>
+            <a:ext cx="2857500" cy="1181100"/>
+          </a:xfrm>
+          <a:prstGeom prst="roundRect">
+            <a:avLst>
+              <a:gd name="adj" fmla="val 6452"/>
+            </a:avLst>
+          </a:prstGeom>
+          <a:solidFill>
+            <a:srgbClr val="0E3F8C"/>
+          </a:solidFill>
+          <a:ln/>
+        </p:spPr>
+        <p:txBody>
+          <a:bodyPr/>
+          <a:p>
+            <a:pPr/>
+            <a:endParaRPr/>
+          </a:p>
+        </p:txBody>
+      </p:sp>
+      <p:sp>
+        <p:nvSpPr>
+          <p:cNvPr id="59" name="" descr="{&quot;isTemplate&quot;:true,&quot;type&quot;:&quot;text&quot;}"/>
+          <p:cNvSpPr txBox="1"/>
+          <p:nvPr/>
+        </p:nvSpPr>
+        <p:spPr>
+          <a:xfrm rot="0" flipH="0" flipV="0">
+            <a:off x="552450" y="5314950"/>
+            <a:ext cx="2514600" cy="209550"/>
+          </a:xfrm>
+          <a:prstGeom prst="rect"/>
+        </p:spPr>
+        <p:txBody>
+          <a:bodyPr wrap="none" lIns="0" tIns="0" rIns="0" bIns="0"/>
+          <a:p>
+            <a:pPr>
+              <a:lnSpc>
+                <a:spcPct val="100000"/>
+              </a:lnSpc>
+            </a:pPr>
+            <a:r>
+              <a:rPr lang="zh-CN" sz="1350" b="1">
+                <a:solidFill>
+                  <a:srgbClr val="FFFFFF"/>
+                </a:solidFill>
+                <a:latin typeface="Microsoft YaHei"/>
+                <a:ea typeface="Microsoft YaHei"/>
+              </a:rPr>
+              <a:t>关键点</a:t>
+            </a:r>
+            <a:endParaRPr/>
+          </a:p>
+        </p:txBody>
+      </p:sp>
+      <p:sp>
+        <p:nvSpPr>
+          <p:cNvPr id="60" name="" descr="{&quot;isTemplate&quot;:true,&quot;type&quot;:&quot;text&quot;}"/>
+          <p:cNvSpPr txBox="1"/>
+          <p:nvPr/>
+        </p:nvSpPr>
+        <p:spPr>
+          <a:xfrm rot="0" flipH="0" flipV="0">
+            <a:off x="552450" y="5600700"/>
+            <a:ext cx="2514600" cy="552450"/>
+          </a:xfrm>
+          <a:prstGeom prst="rect"/>
+        </p:spPr>
+        <p:txBody>
+          <a:bodyPr wrap="square" lIns="0" tIns="0" rIns="0" bIns="0">
+            <a:normAutofit/>
+          </a:bodyPr>
+          <a:p>
+            <a:pPr>
+              <a:lnSpc>
+                <a:spcPct val="160000"/>
+              </a:lnSpc>
+            </a:pPr>
+            <a:r>
+              <a:rPr lang="zh-CN" sz="1125">
+                <a:solidFill>
+                  <a:srgbClr val="D6E4F7"/>
+                </a:solidFill>
+                <a:latin typeface="Microsoft YaHei"/>
+                <a:ea typeface="Microsoft YaHei"/>
+              </a:rPr>
+              <a:t>多轮查询改写：把含代词、省略的追问补全为独立问题，再走检索链路。</a:t>
+            </a:r>
+            <a:endParaRPr/>
+          </a:p>
+        </p:txBody>
+      </p:sp>
+      <p:sp>
+        <p:nvSpPr>
+          <p:cNvPr id="61" name=""/>
+          <p:cNvSpPr/>
+          <p:nvPr/>
+        </p:nvSpPr>
+        <p:spPr>
+          <a:xfrm rot="0" flipH="0" flipV="0">
+            <a:off x="3619500" y="952500"/>
+            <a:ext cx="8191500" cy="895350"/>
+          </a:xfrm>
+          <a:prstGeom prst="roundRect">
+            <a:avLst>
+              <a:gd name="adj" fmla="val 10638"/>
+            </a:avLst>
+          </a:prstGeom>
+          <a:solidFill>
+            <a:srgbClr val="F7F9FC"/>
+          </a:solidFill>
+          <a:ln w="12700">
+            <a:solidFill>
+              <a:srgbClr val="E5E7EB"/>
+            </a:solidFill>
+            <a:prstDash val="solid"/>
+          </a:ln>
+        </p:spPr>
+        <p:txBody>
+          <a:bodyPr/>
+          <a:p>
+            <a:pPr/>
+            <a:endParaRPr/>
+          </a:p>
+        </p:txBody>
+      </p:sp>
+      <p:sp>
+        <p:nvSpPr>
+          <p:cNvPr id="62" name=""/>
+          <p:cNvSpPr/>
+          <p:nvPr/>
+        </p:nvSpPr>
+        <p:spPr>
+          <a:xfrm rot="0" flipH="0" flipV="0">
+            <a:off x="3771900" y="1181100"/>
+            <a:ext cx="438150" cy="438150"/>
+          </a:xfrm>
+          <a:prstGeom prst="roundRect">
+            <a:avLst>
+              <a:gd name="adj" fmla="val 50000"/>
+            </a:avLst>
+          </a:prstGeom>
+          <a:solidFill>
+            <a:srgbClr val="1E4FA8"/>
+          </a:solidFill>
+          <a:ln/>
+        </p:spPr>
+        <p:txBody>
+          <a:bodyPr/>
+          <a:p>
+            <a:pPr/>
+            <a:endParaRPr/>
+          </a:p>
+        </p:txBody>
+      </p:sp>
+      <p:sp>
+        <p:nvSpPr>
+          <p:cNvPr id="63" name="" descr="{&quot;isTemplate&quot;:true,&quot;type&quot;:&quot;text&quot;}"/>
+          <p:cNvSpPr txBox="1"/>
+          <p:nvPr/>
+        </p:nvSpPr>
+        <p:spPr>
+          <a:xfrm rot="0" flipH="0" flipV="0">
+            <a:off x="3933825" y="1285875"/>
+            <a:ext cx="123825" cy="228600"/>
+          </a:xfrm>
+          <a:prstGeom prst="rect"/>
+        </p:spPr>
+        <p:txBody>
+          <a:bodyPr wrap="none" lIns="0" tIns="0" rIns="0" bIns="0"/>
+          <a:p>
+            <a:pPr>
+              <a:lnSpc>
+                <a:spcPct val="100000"/>
+              </a:lnSpc>
+            </a:pPr>
+            <a:r>
+              <a:rPr lang="en-US" sz="1500" b="1">
+                <a:solidFill>
+                  <a:srgbClr val="FFFFFF"/>
+                </a:solidFill>
+                <a:latin typeface="Microsoft YaHei"/>
+                <a:ea typeface="Microsoft YaHei"/>
+              </a:rPr>
+              <a:t>1</a:t>
+            </a:r>
+            <a:endParaRPr/>
+          </a:p>
+        </p:txBody>
+      </p:sp>
+      <p:sp>
+        <p:nvSpPr>
+          <p:cNvPr id="64" name="" descr="{&quot;isTemplate&quot;:true,&quot;type&quot;:&quot;text&quot;}"/>
+          <p:cNvSpPr txBox="1"/>
+          <p:nvPr/>
+        </p:nvSpPr>
+        <p:spPr>
+          <a:xfrm rot="0" flipH="0" flipV="0">
+            <a:off x="4400550" y="1104900"/>
+            <a:ext cx="7258050" cy="257175"/>
+          </a:xfrm>
+          <a:prstGeom prst="rect"/>
+        </p:spPr>
+        <p:txBody>
+          <a:bodyPr wrap="none" lIns="0" tIns="0" rIns="0" bIns="0"/>
+          <a:p>
+            <a:pPr>
+              <a:lnSpc>
+                <a:spcPct val="100000"/>
+              </a:lnSpc>
+            </a:pPr>
+            <a:r>
+              <a:rPr lang="zh-CN" sz="1650" b="1">
+                <a:solidFill>
+                  <a:srgbClr val="1A2230"/>
+                </a:solidFill>
+                <a:latin typeface="Microsoft YaHei"/>
+                <a:ea typeface="Microsoft YaHei"/>
+              </a:rPr>
+              <a:t>查询改写</a:t>
+            </a:r>
+            <a:endParaRPr/>
+          </a:p>
+        </p:txBody>
+      </p:sp>
+      <p:sp>
+        <p:nvSpPr>
+          <p:cNvPr id="65" name="" descr="{&quot;isTemplate&quot;:true,&quot;type&quot;:&quot;text&quot;}"/>
+          <p:cNvSpPr txBox="1"/>
+          <p:nvPr/>
+        </p:nvSpPr>
+        <p:spPr>
+          <a:xfrm rot="0" flipH="0" flipV="0">
+            <a:off x="4400550" y="1419225"/>
+            <a:ext cx="7258050" cy="276225"/>
+          </a:xfrm>
+          <a:prstGeom prst="rect"/>
+        </p:spPr>
+        <p:txBody>
+          <a:bodyPr wrap="none" lIns="0" tIns="0" rIns="0" bIns="0"/>
+          <a:p>
+            <a:pPr>
+              <a:lnSpc>
+                <a:spcPct val="150000"/>
+              </a:lnSpc>
+            </a:pPr>
+            <a:r>
+              <a:rPr lang="zh-CN" sz="1200">
+                <a:solidFill>
+                  <a:srgbClr val="4A5568"/>
+                </a:solidFill>
+                <a:latin typeface="Microsoft YaHei"/>
+                <a:ea typeface="Microsoft YaHei"/>
+              </a:rPr>
+              <a:t>记录历史，将追问补全为独立问题</a:t>
+            </a:r>
+            <a:endParaRPr/>
+          </a:p>
+        </p:txBody>
+      </p:sp>
+      <p:sp>
+        <p:nvSpPr>
+          <p:cNvPr id="66" name=""/>
+          <p:cNvSpPr/>
+          <p:nvPr/>
+        </p:nvSpPr>
+        <p:spPr>
+          <a:xfrm rot="0" flipH="0" flipV="0">
+            <a:off x="3619500" y="2076450"/>
+            <a:ext cx="8191500" cy="895350"/>
+          </a:xfrm>
+          <a:prstGeom prst="roundRect">
+            <a:avLst>
+              <a:gd name="adj" fmla="val 10638"/>
+            </a:avLst>
+          </a:prstGeom>
+          <a:solidFill>
+            <a:srgbClr val="F7F9FC"/>
+          </a:solidFill>
+          <a:ln w="12700">
+            <a:solidFill>
+              <a:srgbClr val="E5E7EB"/>
+            </a:solidFill>
+            <a:prstDash val="solid"/>
+          </a:ln>
+        </p:spPr>
+        <p:txBody>
+          <a:bodyPr/>
+          <a:p>
+            <a:pPr/>
+            <a:endParaRPr/>
+          </a:p>
+        </p:txBody>
+      </p:sp>
+      <p:sp>
+        <p:nvSpPr>
+          <p:cNvPr id="67" name=""/>
+          <p:cNvSpPr/>
+          <p:nvPr/>
+        </p:nvSpPr>
+        <p:spPr>
+          <a:xfrm rot="0" flipH="0" flipV="0">
+            <a:off x="3771900" y="2305050"/>
+            <a:ext cx="438150" cy="438150"/>
+          </a:xfrm>
+          <a:prstGeom prst="roundRect">
+            <a:avLst>
+              <a:gd name="adj" fmla="val 50000"/>
+            </a:avLst>
+          </a:prstGeom>
+          <a:solidFill>
+            <a:srgbClr val="1E4FA8"/>
+          </a:solidFill>
+          <a:ln/>
+        </p:spPr>
+        <p:txBody>
+          <a:bodyPr/>
+          <a:p>
+            <a:pPr/>
+            <a:endParaRPr/>
+          </a:p>
+        </p:txBody>
+      </p:sp>
+      <p:sp>
+        <p:nvSpPr>
+          <p:cNvPr id="68" name="" descr="{&quot;isTemplate&quot;:true,&quot;type&quot;:&quot;text&quot;}"/>
+          <p:cNvSpPr txBox="1"/>
+          <p:nvPr/>
+        </p:nvSpPr>
+        <p:spPr>
+          <a:xfrm rot="0" flipH="0" flipV="0">
+            <a:off x="3933825" y="2409825"/>
+            <a:ext cx="123825" cy="228600"/>
+          </a:xfrm>
+          <a:prstGeom prst="rect"/>
+        </p:spPr>
+        <p:txBody>
+          <a:bodyPr wrap="none" lIns="0" tIns="0" rIns="0" bIns="0"/>
+          <a:p>
+            <a:pPr>
+              <a:lnSpc>
+                <a:spcPct val="100000"/>
+              </a:lnSpc>
+            </a:pPr>
+            <a:r>
+              <a:rPr lang="en-US" sz="1500" b="1">
+                <a:solidFill>
+                  <a:srgbClr val="FFFFFF"/>
+                </a:solidFill>
+                <a:latin typeface="Microsoft YaHei"/>
+                <a:ea typeface="Microsoft YaHei"/>
+              </a:rPr>
+              <a:t>2</a:t>
+            </a:r>
+            <a:endParaRPr/>
+          </a:p>
+        </p:txBody>
+      </p:sp>
+      <p:sp>
+        <p:nvSpPr>
+          <p:cNvPr id="69" name="" descr="{&quot;isTemplate&quot;:true,&quot;type&quot;:&quot;text&quot;}"/>
+          <p:cNvSpPr txBox="1"/>
+          <p:nvPr/>
+        </p:nvSpPr>
+        <p:spPr>
+          <a:xfrm rot="0" flipH="0" flipV="0">
+            <a:off x="4400550" y="2228850"/>
+            <a:ext cx="7258050" cy="257175"/>
+          </a:xfrm>
+          <a:prstGeom prst="rect"/>
+        </p:spPr>
+        <p:txBody>
+          <a:bodyPr wrap="none" lIns="0" tIns="0" rIns="0" bIns="0"/>
+          <a:p>
+            <a:pPr>
+              <a:lnSpc>
+                <a:spcPct val="100000"/>
+              </a:lnSpc>
+            </a:pPr>
+            <a:r>
+              <a:rPr lang="zh-CN" sz="1650" b="1">
+                <a:solidFill>
+                  <a:srgbClr val="1A2230"/>
+                </a:solidFill>
+                <a:latin typeface="Microsoft YaHei"/>
+                <a:ea typeface="Microsoft YaHei"/>
+              </a:rPr>
+              <a:t>混合召回</a:t>
+            </a:r>
+            <a:endParaRPr/>
+          </a:p>
+        </p:txBody>
+      </p:sp>
+      <p:sp>
+        <p:nvSpPr>
+          <p:cNvPr id="70" name="" descr="{&quot;isTemplate&quot;:true,&quot;type&quot;:&quot;text&quot;}"/>
+          <p:cNvSpPr txBox="1"/>
+          <p:nvPr/>
+        </p:nvSpPr>
+        <p:spPr>
+          <a:xfrm rot="0" flipH="0" flipV="0">
+            <a:off x="4400550" y="2543175"/>
+            <a:ext cx="7258050" cy="276225"/>
+          </a:xfrm>
+          <a:prstGeom prst="rect"/>
+        </p:spPr>
+        <p:txBody>
+          <a:bodyPr wrap="none" lIns="0" tIns="0" rIns="0" bIns="0"/>
+          <a:p>
+            <a:pPr>
+              <a:lnSpc>
+                <a:spcPct val="150000"/>
+              </a:lnSpc>
+            </a:pPr>
+            <a:r>
+              <a:rPr lang="zh-CN" sz="1200">
+                <a:solidFill>
+                  <a:srgbClr val="4A5568"/>
+                </a:solidFill>
+                <a:latin typeface="Microsoft YaHei"/>
+                <a:ea typeface="Microsoft YaHei"/>
+              </a:rPr>
+              <a:t>并行执行向量检索</a:t>
+            </a:r>
+            <a:r>
+              <a:rPr lang="en-US" sz="1200">
+                <a:solidFill>
+                  <a:srgbClr val="4A5568"/>
+                </a:solidFill>
+                <a:latin typeface="Microsoft YaHei"/>
+                <a:ea typeface="Microsoft YaHei"/>
+              </a:rPr>
+              <a:t xml:space="preserve"> + BM25 </a:t>
+            </a:r>
+            <a:r>
+              <a:rPr lang="zh-CN" sz="1200">
+                <a:solidFill>
+                  <a:srgbClr val="4A5568"/>
+                </a:solidFill>
+                <a:latin typeface="Microsoft YaHei"/>
+                <a:ea typeface="Microsoft YaHei"/>
+              </a:rPr>
+              <a:t>检索</a:t>
+            </a:r>
+            <a:endParaRPr/>
+          </a:p>
+        </p:txBody>
+      </p:sp>
+      <p:sp>
+        <p:nvSpPr>
+          <p:cNvPr id="71" name=""/>
+          <p:cNvSpPr/>
+          <p:nvPr/>
+        </p:nvSpPr>
+        <p:spPr>
+          <a:xfrm rot="0" flipH="0" flipV="0">
+            <a:off x="3619500" y="3190875"/>
+            <a:ext cx="8191500" cy="895350"/>
+          </a:xfrm>
+          <a:prstGeom prst="roundRect">
+            <a:avLst>
+              <a:gd name="adj" fmla="val 10638"/>
+            </a:avLst>
+          </a:prstGeom>
+          <a:solidFill>
+            <a:srgbClr val="F7F9FC"/>
+          </a:solidFill>
+          <a:ln w="12700">
+            <a:solidFill>
+              <a:srgbClr val="E5E7EB"/>
+            </a:solidFill>
+            <a:prstDash val="solid"/>
+          </a:ln>
+        </p:spPr>
+        <p:txBody>
+          <a:bodyPr/>
+          <a:p>
+            <a:pPr/>
+            <a:endParaRPr/>
+          </a:p>
+        </p:txBody>
+      </p:sp>
+      <p:sp>
+        <p:nvSpPr>
+          <p:cNvPr id="72" name=""/>
+          <p:cNvSpPr/>
+          <p:nvPr/>
+        </p:nvSpPr>
+        <p:spPr>
+          <a:xfrm rot="0" flipH="0" flipV="0">
+            <a:off x="3771900" y="3419475"/>
+            <a:ext cx="438150" cy="438150"/>
+          </a:xfrm>
+          <a:prstGeom prst="roundRect">
+            <a:avLst>
+              <a:gd name="adj" fmla="val 50000"/>
+            </a:avLst>
+          </a:prstGeom>
+          <a:solidFill>
+            <a:srgbClr val="1E4FA8"/>
+          </a:solidFill>
+          <a:ln/>
+        </p:spPr>
+        <p:txBody>
+          <a:bodyPr/>
+          <a:p>
+            <a:pPr/>
+            <a:endParaRPr/>
+          </a:p>
+        </p:txBody>
+      </p:sp>
+      <p:sp>
+        <p:nvSpPr>
+          <p:cNvPr id="73" name="" descr="{&quot;isTemplate&quot;:true,&quot;type&quot;:&quot;text&quot;}"/>
+          <p:cNvSpPr txBox="1"/>
+          <p:nvPr/>
+        </p:nvSpPr>
+        <p:spPr>
+          <a:xfrm rot="0" flipH="0" flipV="0">
+            <a:off x="3933825" y="3524250"/>
+            <a:ext cx="123825" cy="228600"/>
+          </a:xfrm>
+          <a:prstGeom prst="rect"/>
+        </p:spPr>
+        <p:txBody>
+          <a:bodyPr wrap="none" lIns="0" tIns="0" rIns="0" bIns="0"/>
+          <a:p>
+            <a:pPr>
+              <a:lnSpc>
+                <a:spcPct val="100000"/>
+              </a:lnSpc>
+            </a:pPr>
+            <a:r>
+              <a:rPr lang="en-US" sz="1500" b="1">
+                <a:solidFill>
+                  <a:srgbClr val="FFFFFF"/>
+                </a:solidFill>
+                <a:latin typeface="Microsoft YaHei"/>
+                <a:ea typeface="Microsoft YaHei"/>
+              </a:rPr>
+              <a:t>3</a:t>
+            </a:r>
+            <a:endParaRPr/>
+          </a:p>
+        </p:txBody>
+      </p:sp>
+      <p:sp>
+        <p:nvSpPr>
+          <p:cNvPr id="74" name="" descr="{&quot;isTemplate&quot;:true,&quot;type&quot;:&quot;text&quot;}"/>
+          <p:cNvSpPr txBox="1"/>
+          <p:nvPr/>
+        </p:nvSpPr>
+        <p:spPr>
+          <a:xfrm rot="0" flipH="0" flipV="0">
+            <a:off x="4400550" y="3343275"/>
+            <a:ext cx="7258050" cy="257175"/>
+          </a:xfrm>
+          <a:prstGeom prst="rect"/>
+        </p:spPr>
+        <p:txBody>
+          <a:bodyPr wrap="none" lIns="0" tIns="0" rIns="0" bIns="0"/>
+          <a:p>
+            <a:pPr>
+              <a:lnSpc>
+                <a:spcPct val="100000"/>
+              </a:lnSpc>
+            </a:pPr>
+            <a:r>
+              <a:rPr lang="en-US" sz="1650" b="1">
+                <a:solidFill>
+                  <a:srgbClr val="1A2230"/>
+                </a:solidFill>
+                <a:latin typeface="Microsoft YaHei"/>
+                <a:ea typeface="Microsoft YaHei"/>
+              </a:rPr>
+              <a:t xml:space="preserve">RRF </a:t>
+            </a:r>
+            <a:r>
+              <a:rPr lang="zh-CN" sz="1650" b="1">
+                <a:solidFill>
+                  <a:srgbClr val="1A2230"/>
+                </a:solidFill>
+                <a:latin typeface="Microsoft YaHei"/>
+                <a:ea typeface="Microsoft YaHei"/>
+              </a:rPr>
+              <a:t>融合</a:t>
+            </a:r>
+            <a:endParaRPr/>
+          </a:p>
+        </p:txBody>
+      </p:sp>
+      <p:sp>
+        <p:nvSpPr>
+          <p:cNvPr id="75" name="" descr="{&quot;isTemplate&quot;:true,&quot;type&quot;:&quot;text&quot;}"/>
+          <p:cNvSpPr txBox="1"/>
+          <p:nvPr/>
+        </p:nvSpPr>
+        <p:spPr>
+          <a:xfrm rot="0" flipH="0" flipV="0">
+            <a:off x="4400550" y="3657600"/>
+            <a:ext cx="7258050" cy="276225"/>
+          </a:xfrm>
+          <a:prstGeom prst="rect"/>
+        </p:spPr>
+        <p:txBody>
+          <a:bodyPr wrap="none" lIns="0" tIns="0" rIns="0" bIns="0"/>
+          <a:p>
+            <a:pPr>
+              <a:lnSpc>
+                <a:spcPct val="150000"/>
+              </a:lnSpc>
+            </a:pPr>
+            <a:r>
+              <a:rPr lang="en-US" sz="1200">
+                <a:solidFill>
+                  <a:srgbClr val="4A5568"/>
+                </a:solidFill>
+                <a:latin typeface="Microsoft YaHei"/>
+                <a:ea typeface="Microsoft YaHei"/>
+              </a:rPr>
+              <a:t xml:space="preserve">k=60 </a:t>
+            </a:r>
+            <a:r>
+              <a:rPr lang="zh-CN" sz="1200">
+                <a:solidFill>
+                  <a:srgbClr val="4A5568"/>
+                </a:solidFill>
+                <a:latin typeface="Microsoft YaHei"/>
+                <a:ea typeface="Microsoft YaHei"/>
+              </a:rPr>
+              <a:t>合并两路结果并去重</a:t>
+            </a:r>
+            <a:endParaRPr/>
+          </a:p>
+        </p:txBody>
+      </p:sp>
+      <p:sp>
+        <p:nvSpPr>
+          <p:cNvPr id="76" name=""/>
+          <p:cNvSpPr/>
+          <p:nvPr/>
+        </p:nvSpPr>
+        <p:spPr>
+          <a:xfrm rot="0" flipH="0" flipV="0">
+            <a:off x="3619500" y="4314825"/>
+            <a:ext cx="8191500" cy="895350"/>
+          </a:xfrm>
+          <a:prstGeom prst="roundRect">
+            <a:avLst>
+              <a:gd name="adj" fmla="val 10638"/>
+            </a:avLst>
+          </a:prstGeom>
+          <a:solidFill>
+            <a:srgbClr val="F7F9FC"/>
+          </a:solidFill>
+          <a:ln w="12700">
+            <a:solidFill>
+              <a:srgbClr val="E5E7EB"/>
+            </a:solidFill>
+            <a:prstDash val="solid"/>
+          </a:ln>
+        </p:spPr>
+        <p:txBody>
+          <a:bodyPr/>
+          <a:p>
+            <a:pPr/>
+            <a:endParaRPr/>
+          </a:p>
+        </p:txBody>
+      </p:sp>
+      <p:sp>
+        <p:nvSpPr>
+          <p:cNvPr id="77" name=""/>
+          <p:cNvSpPr/>
+          <p:nvPr/>
+        </p:nvSpPr>
+        <p:spPr>
+          <a:xfrm rot="0" flipH="0" flipV="0">
+            <a:off x="3771900" y="4543425"/>
+            <a:ext cx="438150" cy="438150"/>
+          </a:xfrm>
+          <a:prstGeom prst="roundRect">
+            <a:avLst>
+              <a:gd name="adj" fmla="val 50000"/>
+            </a:avLst>
+          </a:prstGeom>
+          <a:solidFill>
+            <a:srgbClr val="1E4FA8"/>
+          </a:solidFill>
+          <a:ln/>
+        </p:spPr>
+        <p:txBody>
+          <a:bodyPr/>
+          <a:p>
+            <a:pPr/>
+            <a:endParaRPr/>
+          </a:p>
+        </p:txBody>
+      </p:sp>
+      <p:sp>
+        <p:nvSpPr>
+          <p:cNvPr id="78" name="" descr="{&quot;isTemplate&quot;:true,&quot;type&quot;:&quot;text&quot;}"/>
+          <p:cNvSpPr txBox="1"/>
+          <p:nvPr/>
+        </p:nvSpPr>
+        <p:spPr>
+          <a:xfrm rot="0" flipH="0" flipV="0">
+            <a:off x="3933825" y="4648200"/>
+            <a:ext cx="123825" cy="228600"/>
+          </a:xfrm>
+          <a:prstGeom prst="rect"/>
+        </p:spPr>
+        <p:txBody>
+          <a:bodyPr wrap="none" lIns="0" tIns="0" rIns="0" bIns="0"/>
+          <a:p>
+            <a:pPr>
+              <a:lnSpc>
+                <a:spcPct val="100000"/>
+              </a:lnSpc>
+            </a:pPr>
+            <a:r>
+              <a:rPr lang="en-US" sz="1500" b="1">
+                <a:solidFill>
+                  <a:srgbClr val="FFFFFF"/>
+                </a:solidFill>
+                <a:latin typeface="Microsoft YaHei"/>
+                <a:ea typeface="Microsoft YaHei"/>
+              </a:rPr>
+              <a:t>4</a:t>
+            </a:r>
+            <a:endParaRPr/>
+          </a:p>
+        </p:txBody>
+      </p:sp>
+      <p:sp>
+        <p:nvSpPr>
+          <p:cNvPr id="79" name="" descr="{&quot;isTemplate&quot;:true,&quot;type&quot;:&quot;text&quot;}"/>
+          <p:cNvSpPr txBox="1"/>
+          <p:nvPr/>
+        </p:nvSpPr>
+        <p:spPr>
+          <a:xfrm rot="0" flipH="0" flipV="0">
+            <a:off x="4400550" y="4467225"/>
+            <a:ext cx="7258050" cy="257175"/>
+          </a:xfrm>
+          <a:prstGeom prst="rect"/>
+        </p:spPr>
+        <p:txBody>
+          <a:bodyPr wrap="none" lIns="0" tIns="0" rIns="0" bIns="0"/>
+          <a:p>
+            <a:pPr>
+              <a:lnSpc>
+                <a:spcPct val="100000"/>
+              </a:lnSpc>
+            </a:pPr>
+            <a:r>
+              <a:rPr lang="zh-CN" sz="1650" b="1">
+                <a:solidFill>
+                  <a:srgbClr val="1A2230"/>
+                </a:solidFill>
+                <a:latin typeface="Microsoft YaHei"/>
+                <a:ea typeface="Microsoft YaHei"/>
+              </a:rPr>
+              <a:t>重排序</a:t>
+            </a:r>
+            <a:endParaRPr/>
+          </a:p>
+        </p:txBody>
+      </p:sp>
+      <p:sp>
+        <p:nvSpPr>
+          <p:cNvPr id="80" name="" descr="{&quot;isTemplate&quot;:true,&quot;type&quot;:&quot;text&quot;}"/>
+          <p:cNvSpPr txBox="1"/>
+          <p:nvPr/>
+        </p:nvSpPr>
+        <p:spPr>
+          <a:xfrm rot="0" flipH="0" flipV="0">
+            <a:off x="4400550" y="4781550"/>
+            <a:ext cx="7258050" cy="276225"/>
+          </a:xfrm>
+          <a:prstGeom prst="rect"/>
+        </p:spPr>
+        <p:txBody>
+          <a:bodyPr wrap="none" lIns="0" tIns="0" rIns="0" bIns="0"/>
+          <a:p>
+            <a:pPr>
+              <a:lnSpc>
+                <a:spcPct val="150000"/>
+              </a:lnSpc>
+            </a:pPr>
+            <a:r>
+              <a:rPr lang="en-US" sz="1200">
+                <a:solidFill>
+                  <a:srgbClr val="4A5568"/>
+                </a:solidFill>
+                <a:latin typeface="Microsoft YaHei"/>
+                <a:ea typeface="Microsoft YaHei"/>
+              </a:rPr>
+              <a:t xml:space="preserve">bge-reranker-v2-m3 </a:t>
+            </a:r>
+            <a:r>
+              <a:rPr lang="zh-CN" sz="1200">
+                <a:solidFill>
+                  <a:srgbClr val="4A5568"/>
+                </a:solidFill>
+                <a:latin typeface="Microsoft YaHei"/>
+                <a:ea typeface="Microsoft YaHei"/>
+              </a:rPr>
+              <a:t>精排，取</a:t>
+            </a:r>
+            <a:r>
+              <a:rPr lang="en-US" sz="1200">
+                <a:solidFill>
+                  <a:srgbClr val="4A5568"/>
+                </a:solidFill>
+                <a:latin typeface="Microsoft YaHei"/>
+                <a:ea typeface="Microsoft YaHei"/>
+              </a:rPr>
+              <a:t xml:space="preserve"> top 3~5</a:t>
+            </a:r>
+            <a:endParaRPr/>
+          </a:p>
+        </p:txBody>
+      </p:sp>
+      <p:sp>
+        <p:nvSpPr>
+          <p:cNvPr id="81" name=""/>
+          <p:cNvSpPr/>
+          <p:nvPr/>
+        </p:nvSpPr>
+        <p:spPr>
+          <a:xfrm rot="0" flipH="0" flipV="0">
+            <a:off x="3619500" y="5429250"/>
+            <a:ext cx="8191500" cy="895350"/>
+          </a:xfrm>
+          <a:prstGeom prst="roundRect">
+            <a:avLst>
+              <a:gd name="adj" fmla="val 10638"/>
+            </a:avLst>
+          </a:prstGeom>
+          <a:solidFill>
+            <a:srgbClr val="F7F9FC"/>
+          </a:solidFill>
+          <a:ln w="12700">
+            <a:solidFill>
+              <a:srgbClr val="E5E7EB"/>
+            </a:solidFill>
+            <a:prstDash val="solid"/>
+          </a:ln>
+        </p:spPr>
+        <p:txBody>
+          <a:bodyPr/>
+          <a:p>
+            <a:pPr/>
+            <a:endParaRPr/>
+          </a:p>
+        </p:txBody>
+      </p:sp>
+      <p:sp>
+        <p:nvSpPr>
+          <p:cNvPr id="82" name=""/>
+          <p:cNvSpPr/>
+          <p:nvPr/>
+        </p:nvSpPr>
+        <p:spPr>
+          <a:xfrm rot="0" flipH="0" flipV="0">
+            <a:off x="3771900" y="5657850"/>
+            <a:ext cx="438150" cy="438150"/>
+          </a:xfrm>
+          <a:prstGeom prst="roundRect">
+            <a:avLst>
+              <a:gd name="adj" fmla="val 50000"/>
+            </a:avLst>
+          </a:prstGeom>
+          <a:solidFill>
+            <a:srgbClr val="1E4FA8"/>
+          </a:solidFill>
+          <a:ln/>
+        </p:spPr>
+        <p:txBody>
+          <a:bodyPr/>
+          <a:p>
+            <a:pPr/>
+            <a:endParaRPr/>
+          </a:p>
+        </p:txBody>
+      </p:sp>
+      <p:sp>
+        <p:nvSpPr>
+          <p:cNvPr id="83" name="" descr="{&quot;isTemplate&quot;:true,&quot;type&quot;:&quot;text&quot;}"/>
+          <p:cNvSpPr txBox="1"/>
+          <p:nvPr/>
+        </p:nvSpPr>
+        <p:spPr>
+          <a:xfrm rot="0" flipH="0" flipV="0">
+            <a:off x="3933825" y="5762625"/>
+            <a:ext cx="123825" cy="228600"/>
+          </a:xfrm>
+          <a:prstGeom prst="rect"/>
+        </p:spPr>
+        <p:txBody>
+          <a:bodyPr wrap="none" lIns="0" tIns="0" rIns="0" bIns="0"/>
+          <a:p>
+            <a:pPr>
+              <a:lnSpc>
+                <a:spcPct val="100000"/>
+              </a:lnSpc>
+            </a:pPr>
+            <a:r>
+              <a:rPr lang="en-US" sz="1500" b="1">
+                <a:solidFill>
+                  <a:srgbClr val="FFFFFF"/>
+                </a:solidFill>
+                <a:latin typeface="Microsoft YaHei"/>
+                <a:ea typeface="Microsoft YaHei"/>
+              </a:rPr>
+              <a:t>5</a:t>
+            </a:r>
+            <a:endParaRPr/>
+          </a:p>
+        </p:txBody>
+      </p:sp>
+      <p:sp>
+        <p:nvSpPr>
+          <p:cNvPr id="84" name="" descr="{&quot;isTemplate&quot;:true,&quot;type&quot;:&quot;text&quot;}"/>
+          <p:cNvSpPr txBox="1"/>
+          <p:nvPr/>
+        </p:nvSpPr>
+        <p:spPr>
+          <a:xfrm rot="0" flipH="0" flipV="0">
+            <a:off x="4400550" y="5581650"/>
+            <a:ext cx="7258050" cy="257175"/>
+          </a:xfrm>
+          <a:prstGeom prst="rect"/>
+        </p:spPr>
+        <p:txBody>
+          <a:bodyPr wrap="none" lIns="0" tIns="0" rIns="0" bIns="0"/>
+          <a:p>
+            <a:pPr>
+              <a:lnSpc>
+                <a:spcPct val="100000"/>
+              </a:lnSpc>
+            </a:pPr>
+            <a:r>
+              <a:rPr lang="zh-CN" sz="1650" b="1">
+                <a:solidFill>
+                  <a:srgbClr val="1A2230"/>
+                </a:solidFill>
+                <a:latin typeface="Microsoft YaHei"/>
+                <a:ea typeface="Microsoft YaHei"/>
+              </a:rPr>
+              <a:t>生成</a:t>
+            </a:r>
+            <a:r>
+              <a:rPr lang="en-US" sz="1650" b="1">
+                <a:solidFill>
+                  <a:srgbClr val="1A2230"/>
+                </a:solidFill>
+                <a:latin typeface="Microsoft YaHei"/>
+                <a:ea typeface="Microsoft YaHei"/>
+              </a:rPr>
+              <a:t xml:space="preserve"> + </a:t>
+            </a:r>
+            <a:r>
+              <a:rPr lang="zh-CN" sz="1650" b="1">
+                <a:solidFill>
+                  <a:srgbClr val="1A2230"/>
+                </a:solidFill>
+                <a:latin typeface="Microsoft YaHei"/>
+                <a:ea typeface="Microsoft YaHei"/>
+              </a:rPr>
+              <a:t>溯源</a:t>
+            </a:r>
+            <a:endParaRPr/>
+          </a:p>
+        </p:txBody>
+      </p:sp>
+      <p:sp>
+        <p:nvSpPr>
+          <p:cNvPr id="85" name="" descr="{&quot;isTemplate&quot;:true,&quot;type&quot;:&quot;text&quot;}"/>
+          <p:cNvSpPr txBox="1"/>
+          <p:nvPr/>
+        </p:nvSpPr>
+        <p:spPr>
+          <a:xfrm rot="0" flipH="0" flipV="0">
+            <a:off x="4400550" y="5895975"/>
+            <a:ext cx="7258050" cy="276225"/>
+          </a:xfrm>
+          <a:prstGeom prst="rect"/>
+        </p:spPr>
+        <p:txBody>
+          <a:bodyPr wrap="none" lIns="0" tIns="0" rIns="0" bIns="0"/>
+          <a:p>
+            <a:pPr>
+              <a:lnSpc>
+                <a:spcPct val="150000"/>
+              </a:lnSpc>
+            </a:pPr>
+            <a:r>
+              <a:rPr lang="zh-CN" sz="1200">
+                <a:solidFill>
+                  <a:srgbClr val="4A5568"/>
+                </a:solidFill>
+                <a:latin typeface="Microsoft YaHei"/>
+                <a:ea typeface="Microsoft YaHei"/>
+              </a:rPr>
+              <a:t>拼装</a:t>
+            </a:r>
+            <a:r>
+              <a:rPr lang="en-US" sz="1200">
+                <a:solidFill>
+                  <a:srgbClr val="4A5568"/>
+                </a:solidFill>
+                <a:latin typeface="Microsoft YaHei"/>
+                <a:ea typeface="Microsoft YaHei"/>
+              </a:rPr>
+              <a:t xml:space="preserve"> Prompt </a:t>
+            </a:r>
+            <a:r>
+              <a:rPr lang="zh-CN" sz="1200">
+                <a:solidFill>
+                  <a:srgbClr val="4A5568"/>
+                </a:solidFill>
+                <a:latin typeface="Microsoft YaHei"/>
+                <a:ea typeface="Microsoft YaHei"/>
+              </a:rPr>
+              <a:t>调用大模型，生成带引用的结构化指令</a:t>
+            </a:r>
+            <a:endParaRPr/>
+          </a:p>
+        </p:txBody>
+      </p:sp>
+      <p:sp>
+        <p:nvSpPr>
+          <p:cNvPr id="86" name="" descr="{&quot;isTemplate&quot;:true,&quot;type&quot;:&quot;text&quot;}"/>
+          <p:cNvSpPr txBox="1"/>
+          <p:nvPr/>
+        </p:nvSpPr>
+        <p:spPr>
+          <a:xfrm rot="0" flipH="0" flipV="0">
+            <a:off x="381000" y="6591300"/>
+            <a:ext cx="1600200" cy="161925"/>
+          </a:xfrm>
+          <a:prstGeom prst="rect"/>
+        </p:spPr>
+        <p:txBody>
+          <a:bodyPr wrap="none" lIns="0" tIns="0" rIns="0" bIns="0"/>
+          <a:p>
+            <a:pPr>
+              <a:lnSpc>
+                <a:spcPct val="100000"/>
+              </a:lnSpc>
+            </a:pPr>
+            <a:r>
+              <a:rPr lang="zh-CN" sz="1050">
+                <a:solidFill>
+                  <a:srgbClr val="8B97A8"/>
+                </a:solidFill>
+                <a:latin typeface="Microsoft YaHei"/>
+                <a:ea typeface="Microsoft YaHei"/>
+              </a:rPr>
+              <a:t>中国科学技术大学软件学院</a:t>
+            </a:r>
+            <a:endParaRPr/>
+          </a:p>
+        </p:txBody>
+      </p:sp>
+      <p:sp>
+        <p:nvSpPr>
+          <p:cNvPr id="87" name="" descr="{&quot;isTemplate&quot;:true,&quot;type&quot;:&quot;text&quot;}"/>
+          <p:cNvSpPr txBox="1"/>
+          <p:nvPr/>
+        </p:nvSpPr>
+        <p:spPr>
+          <a:xfrm rot="0" flipH="0" flipV="0">
+            <a:off x="11268075" y="6572250"/>
+            <a:ext cx="542925" cy="190500"/>
+          </a:xfrm>
+          <a:prstGeom prst="rect"/>
+        </p:spPr>
+        <p:txBody>
+          <a:bodyPr wrap="none" lIns="0" tIns="0" rIns="0" bIns="0"/>
+          <a:p>
+            <a:pPr>
+              <a:lnSpc>
+                <a:spcPct val="100000"/>
+              </a:lnSpc>
+            </a:pPr>
+            <a:r>
+              <a:rPr lang="en-US" sz="1200" b="1">
+                <a:solidFill>
+                  <a:srgbClr val="1E4FA8"/>
+                </a:solidFill>
+                <a:latin typeface="Microsoft YaHei"/>
+                <a:ea typeface="Microsoft YaHei"/>
+              </a:rPr>
+              <a:t>11 / 17</a:t>
+            </a:r>
+            <a:endParaRPr/>
+          </a:p>
+        </p:txBody>
+      </p:sp>
+    </p:spTree>
+  </p:cSld>
+</p:sld>
+</file>
+
+<file path=ppt/slides/slide12.xml><?xml version="1.0" encoding="utf-8"?>
+<p:sld xmlns:p="http://schemas.openxmlformats.org/presentationml/2006/main" xmlns:a="http://schemas.openxmlformats.org/drawingml/2006/main">
+  <p:cSld>
+    <p:spTree>
+      <p:nvGrpSpPr>
+        <p:cNvPr id="88" name=""/>
+        <p:cNvGrpSpPr/>
+        <p:nvPr/>
+      </p:nvGrpSpPr>
+      <p:grpSpPr>
+        <a:xfrm>
+          <a:off x="0" y="0"/>
+          <a:ext cx="0" cy="0"/>
+          <a:chOff x="0" y="0"/>
+          <a:chExt cx="0" cy="0"/>
+        </a:xfrm>
+      </p:grpSpPr>
+      <p:sp>
+        <p:nvSpPr>
+          <p:cNvPr id="89" name=""/>
+          <p:cNvSpPr/>
+          <p:nvPr/>
+        </p:nvSpPr>
+        <p:spPr>
+          <a:xfrm rot="0" flipH="0" flipV="0">
+            <a:off x="0" y="0"/>
+            <a:ext cx="12192000" cy="6858000"/>
+          </a:xfrm>
+          <a:prstGeom prst="rect">
+            <a:avLst/>
+          </a:prstGeom>
+          <a:solidFill>
+            <a:srgbClr val="FFFFFF"/>
+          </a:solidFill>
+          <a:ln/>
+        </p:spPr>
+        <p:txBody>
+          <a:bodyPr/>
+          <a:p>
+            <a:pPr/>
+            <a:endParaRPr/>
+          </a:p>
+        </p:txBody>
+      </p:sp>
+      <p:sp>
+        <p:nvSpPr>
+          <p:cNvPr id="90" name=""/>
+          <p:cNvSpPr/>
+          <p:nvPr/>
+        </p:nvSpPr>
+        <p:spPr>
+          <a:xfrm rot="0" flipH="0" flipV="0">
+            <a:off x="0" y="0"/>
+            <a:ext cx="12192000" cy="685800"/>
+          </a:xfrm>
+          <a:prstGeom prst="rect">
+            <a:avLst/>
+          </a:prstGeom>
+          <a:solidFill>
+            <a:srgbClr val="1E4FA8"/>
+          </a:solidFill>
+          <a:ln/>
+        </p:spPr>
+        <p:txBody>
+          <a:bodyPr/>
+          <a:p>
+            <a:pPr/>
+            <a:endParaRPr/>
+          </a:p>
+        </p:txBody>
+      </p:sp>
+      <p:sp>
+        <p:nvSpPr>
+          <p:cNvPr id="91" name="" descr="{&quot;isTemplate&quot;:true,&quot;type&quot;:&quot;text&quot;}"/>
+          <p:cNvSpPr txBox="1"/>
+          <p:nvPr/>
+        </p:nvSpPr>
+        <p:spPr>
+          <a:xfrm rot="0" flipH="0" flipV="0">
+            <a:off x="381000" y="247650"/>
+            <a:ext cx="2543175" cy="190500"/>
+          </a:xfrm>
+          <a:prstGeom prst="rect"/>
+        </p:spPr>
+        <p:txBody>
+          <a:bodyPr wrap="none" lIns="0" tIns="0" rIns="0" bIns="0"/>
+          <a:p>
+            <a:pPr>
+              <a:lnSpc>
+                <a:spcPct val="100000"/>
+              </a:lnSpc>
+            </a:pPr>
+            <a:r>
+              <a:rPr lang="zh-CN" sz="1200">
+                <a:solidFill>
+                  <a:srgbClr val="FFFFFF"/>
+                </a:solidFill>
+                <a:latin typeface="Microsoft YaHei"/>
+                <a:ea typeface="Microsoft YaHei"/>
+              </a:rPr>
+              <a:t>基于</a:t>
+            </a:r>
+            <a:r>
+              <a:rPr lang="en-US" sz="1200">
+                <a:solidFill>
+                  <a:srgbClr val="FFFFFF"/>
+                </a:solidFill>
+                <a:latin typeface="Microsoft YaHei"/>
+                <a:ea typeface="Microsoft YaHei"/>
+              </a:rPr>
+              <a:t xml:space="preserve"> RAG </a:t>
+            </a:r>
+            <a:r>
+              <a:rPr lang="zh-CN" sz="1200">
+                <a:solidFill>
+                  <a:srgbClr val="FFFFFF"/>
+                </a:solidFill>
+                <a:latin typeface="Microsoft YaHei"/>
+                <a:ea typeface="Microsoft YaHei"/>
+              </a:rPr>
+              <a:t>的轻量级企业工艺生成系统</a:t>
+            </a:r>
+            <a:endParaRPr/>
+          </a:p>
+        </p:txBody>
+      </p:sp>
+      <p:sp>
+        <p:nvSpPr>
+          <p:cNvPr id="92" name="" descr="{&quot;isTemplate&quot;:true,&quot;type&quot;:&quot;text&quot;}"/>
+          <p:cNvSpPr txBox="1"/>
+          <p:nvPr/>
+        </p:nvSpPr>
+        <p:spPr>
+          <a:xfrm rot="0" flipH="0" flipV="0">
+            <a:off x="11277600" y="266700"/>
+            <a:ext cx="533400" cy="161925"/>
+          </a:xfrm>
+          <a:prstGeom prst="rect"/>
+        </p:spPr>
+        <p:txBody>
+          <a:bodyPr wrap="none" lIns="0" tIns="0" rIns="0" bIns="0"/>
+          <a:p>
+            <a:pPr>
+              <a:lnSpc>
+                <a:spcPct val="100000"/>
+              </a:lnSpc>
+            </a:pPr>
+            <a:r>
+              <a:rPr lang="zh-CN" sz="1050">
+                <a:solidFill>
+                  <a:srgbClr val="FFFFFF">
+                    <a:alpha val="85000"/>
+                  </a:srgbClr>
+                </a:solidFill>
+                <a:latin typeface="Microsoft YaHei"/>
+                <a:ea typeface="Microsoft YaHei"/>
+              </a:rPr>
+              <a:t>技术方案</a:t>
+            </a:r>
+            <a:endParaRPr/>
+          </a:p>
+        </p:txBody>
+      </p:sp>
+      <p:sp>
+        <p:nvSpPr>
+          <p:cNvPr id="93" name="" descr="{&quot;isTemplate&quot;:true,&quot;type&quot;:&quot;text&quot;}"/>
           <p:cNvSpPr txBox="1"/>
           <p:nvPr/>
         </p:nvSpPr>
@@ -1383,7 +4045,7 @@
       </p:sp>
       <p:sp>
         <p:nvSpPr>
-          <p:cNvPr id="23" name=""/>
+          <p:cNvPr id="94" name=""/>
           <p:cNvSpPr/>
           <p:nvPr/>
         </p:nvSpPr>
@@ -1404,12 +4066,15 @@
         </p:spPr>
         <p:txBody>
           <a:bodyPr/>
-          <a:p/>
-        </p:txBody>
-      </p:sp>
-      <p:sp>
-        <p:nvSpPr>
-          <p:cNvPr id="24" name=""/>
+          <a:p>
+            <a:pPr/>
+            <a:endParaRPr/>
+          </a:p>
+        </p:txBody>
+      </p:sp>
+      <p:sp>
+        <p:nvSpPr>
+          <p:cNvPr id="95" name=""/>
           <p:cNvSpPr/>
           <p:nvPr/>
         </p:nvSpPr>
@@ -1430,12 +4095,15 @@
         </p:spPr>
         <p:txBody>
           <a:bodyPr/>
-          <a:p/>
-        </p:txBody>
-      </p:sp>
-      <p:sp>
-        <p:nvSpPr>
-          <p:cNvPr id="25" name="" descr="{&quot;isTemplate&quot;:true,&quot;type&quot;:&quot;text&quot;}"/>
+          <a:p>
+            <a:pPr/>
+            <a:endParaRPr/>
+          </a:p>
+        </p:txBody>
+      </p:sp>
+      <p:sp>
+        <p:nvSpPr>
+          <p:cNvPr id="96" name="" descr="{&quot;isTemplate&quot;:true,&quot;type&quot;:&quot;text&quot;}"/>
           <p:cNvSpPr txBox="1"/>
           <p:nvPr/>
         </p:nvSpPr>
@@ -1470,7 +4138,7 @@
       </p:sp>
       <p:sp>
         <p:nvSpPr>
-          <p:cNvPr id="26" name="" descr="{&quot;isTemplate&quot;:true,&quot;type&quot;:&quot;text&quot;}"/>
+          <p:cNvPr id="97" name="" descr="{&quot;isTemplate&quot;:true,&quot;type&quot;:&quot;text&quot;}"/>
           <p:cNvSpPr txBox="1"/>
           <p:nvPr/>
         </p:nvSpPr>
@@ -1525,7 +4193,7 @@
       </p:sp>
       <p:sp>
         <p:nvSpPr>
-          <p:cNvPr id="27" name="" descr="{&quot;isTemplate&quot;:true,&quot;type&quot;:&quot;text&quot;}"/>
+          <p:cNvPr id="98" name="" descr="{&quot;isTemplate&quot;:true,&quot;type&quot;:&quot;text&quot;}"/>
           <p:cNvSpPr txBox="1"/>
           <p:nvPr/>
         </p:nvSpPr>
@@ -1582,7 +4250,7 @@
       </p:sp>
       <p:sp>
         <p:nvSpPr>
-          <p:cNvPr id="28" name="" descr="{&quot;isTemplate&quot;:true,&quot;type&quot;:&quot;text&quot;}"/>
+          <p:cNvPr id="99" name="" descr="{&quot;isTemplate&quot;:true,&quot;type&quot;:&quot;text&quot;}"/>
           <p:cNvSpPr txBox="1"/>
           <p:nvPr/>
         </p:nvSpPr>
@@ -1629,7 +4297,7 @@
       </p:sp>
       <p:sp>
         <p:nvSpPr>
-          <p:cNvPr id="29" name=""/>
+          <p:cNvPr id="100" name=""/>
           <p:cNvSpPr/>
           <p:nvPr/>
         </p:nvSpPr>
@@ -1650,12 +4318,15 @@
         </p:spPr>
         <p:txBody>
           <a:bodyPr/>
-          <a:p/>
-        </p:txBody>
-      </p:sp>
-      <p:sp>
-        <p:nvSpPr>
-          <p:cNvPr id="30" name="" descr="{&quot;isTemplate&quot;:true,&quot;type&quot;:&quot;text&quot;}"/>
+          <a:p>
+            <a:pPr/>
+            <a:endParaRPr/>
+          </a:p>
+        </p:txBody>
+      </p:sp>
+      <p:sp>
+        <p:nvSpPr>
+          <p:cNvPr id="101" name="" descr="{&quot;isTemplate&quot;:true,&quot;type&quot;:&quot;text&quot;}"/>
           <p:cNvSpPr txBox="1"/>
           <p:nvPr/>
         </p:nvSpPr>
@@ -1690,7 +4361,7 @@
       </p:sp>
       <p:sp>
         <p:nvSpPr>
-          <p:cNvPr id="31" name=""/>
+          <p:cNvPr id="102" name=""/>
           <p:cNvSpPr/>
           <p:nvPr/>
         </p:nvSpPr>
@@ -1716,12 +4387,15 @@
         </p:spPr>
         <p:txBody>
           <a:bodyPr/>
-          <a:p/>
-        </p:txBody>
-      </p:sp>
-      <p:sp>
-        <p:nvSpPr>
-          <p:cNvPr id="32" name=""/>
+          <a:p>
+            <a:pPr/>
+            <a:endParaRPr/>
+          </a:p>
+        </p:txBody>
+      </p:sp>
+      <p:sp>
+        <p:nvSpPr>
+          <p:cNvPr id="103" name=""/>
           <p:cNvSpPr/>
           <p:nvPr/>
         </p:nvSpPr>
@@ -1742,12 +4416,15 @@
         </p:spPr>
         <p:txBody>
           <a:bodyPr/>
-          <a:p/>
-        </p:txBody>
-      </p:sp>
-      <p:sp>
-        <p:nvSpPr>
-          <p:cNvPr id="33" name="" descr="{&quot;isTemplate&quot;:true,&quot;type&quot;:&quot;text&quot;}"/>
+          <a:p>
+            <a:pPr/>
+            <a:endParaRPr/>
+          </a:p>
+        </p:txBody>
+      </p:sp>
+      <p:sp>
+        <p:nvSpPr>
+          <p:cNvPr id="104" name="" descr="{&quot;isTemplate&quot;:true,&quot;type&quot;:&quot;text&quot;}"/>
           <p:cNvSpPr txBox="1"/>
           <p:nvPr/>
         </p:nvSpPr>
@@ -1782,7 +4459,7 @@
       </p:sp>
       <p:sp>
         <p:nvSpPr>
-          <p:cNvPr id="34" name="" descr="{&quot;isTemplate&quot;:true,&quot;type&quot;:&quot;text&quot;}"/>
+          <p:cNvPr id="105" name="" descr="{&quot;isTemplate&quot;:true,&quot;type&quot;:&quot;text&quot;}"/>
           <p:cNvSpPr txBox="1"/>
           <p:nvPr/>
         </p:nvSpPr>
@@ -1837,7 +4514,7 @@
       </p:sp>
       <p:sp>
         <p:nvSpPr>
-          <p:cNvPr id="35" name="" descr="{&quot;isTemplate&quot;:true,&quot;type&quot;:&quot;text&quot;}"/>
+          <p:cNvPr id="106" name="" descr="{&quot;isTemplate&quot;:true,&quot;type&quot;:&quot;text&quot;}"/>
           <p:cNvSpPr txBox="1"/>
           <p:nvPr/>
         </p:nvSpPr>
@@ -1872,7 +4549,7 @@
       </p:sp>
       <p:sp>
         <p:nvSpPr>
-          <p:cNvPr id="36" name="" descr="{&quot;isTemplate&quot;:true,&quot;type&quot;:&quot;text&quot;}"/>
+          <p:cNvPr id="107" name="" descr="{&quot;isTemplate&quot;:true,&quot;type&quot;:&quot;text&quot;}"/>
           <p:cNvSpPr txBox="1"/>
           <p:nvPr/>
         </p:nvSpPr>
@@ -1929,7 +4606,7 @@
       </p:sp>
       <p:sp>
         <p:nvSpPr>
-          <p:cNvPr id="37" name="" descr="{&quot;isTemplate&quot;:true,&quot;type&quot;:&quot;text&quot;}"/>
+          <p:cNvPr id="108" name="" descr="{&quot;isTemplate&quot;:true,&quot;type&quot;:&quot;text&quot;}"/>
           <p:cNvSpPr txBox="1"/>
           <p:nvPr/>
         </p:nvSpPr>
@@ -1964,7 +4641,7 @@
       </p:sp>
       <p:sp>
         <p:nvSpPr>
-          <p:cNvPr id="38" name="" descr="{&quot;isTemplate&quot;:true,&quot;type&quot;:&quot;text&quot;}"/>
+          <p:cNvPr id="109" name="" descr="{&quot;isTemplate&quot;:true,&quot;type&quot;:&quot;text&quot;}"/>
           <p:cNvSpPr txBox="1"/>
           <p:nvPr/>
         </p:nvSpPr>
@@ -2011,7 +4688,7 @@
       </p:sp>
       <p:sp>
         <p:nvSpPr>
-          <p:cNvPr id="39" name=""/>
+          <p:cNvPr id="110" name=""/>
           <p:cNvSpPr/>
           <p:nvPr/>
         </p:nvSpPr>
@@ -2032,12 +4709,15 @@
         </p:spPr>
         <p:txBody>
           <a:bodyPr/>
-          <a:p/>
-        </p:txBody>
-      </p:sp>
-      <p:sp>
-        <p:nvSpPr>
-          <p:cNvPr id="40" name="" descr="{&quot;isTemplate&quot;:true,&quot;type&quot;:&quot;text&quot;}"/>
+          <a:p>
+            <a:pPr/>
+            <a:endParaRPr/>
+          </a:p>
+        </p:txBody>
+      </p:sp>
+      <p:sp>
+        <p:nvSpPr>
+          <p:cNvPr id="111" name="" descr="{&quot;isTemplate&quot;:true,&quot;type&quot;:&quot;text&quot;}"/>
           <p:cNvSpPr txBox="1"/>
           <p:nvPr/>
         </p:nvSpPr>
@@ -2072,7 +4752,7 @@
       </p:sp>
       <p:sp>
         <p:nvSpPr>
-          <p:cNvPr id="41" name="" descr="{&quot;isTemplate&quot;:true,&quot;type&quot;:&quot;text&quot;}"/>
+          <p:cNvPr id="112" name="" descr="{&quot;isTemplate&quot;:true,&quot;type&quot;:&quot;text&quot;}"/>
           <p:cNvSpPr txBox="1"/>
           <p:nvPr/>
         </p:nvSpPr>
@@ -2107,7 +4787,7 @@
       </p:sp>
       <p:sp>
         <p:nvSpPr>
-          <p:cNvPr id="42" name="" descr="{&quot;isTemplate&quot;:true,&quot;type&quot;:&quot;text&quot;}"/>
+          <p:cNvPr id="113" name="" descr="{&quot;isTemplate&quot;:true,&quot;type&quot;:&quot;text&quot;}"/>
           <p:cNvSpPr txBox="1"/>
           <p:nvPr/>
         </p:nvSpPr>
@@ -2134,7 +4814,7 @@
                 <a:latin typeface="Microsoft YaHei"/>
                 <a:ea typeface="Microsoft YaHei"/>
               </a:rPr>
-              <a:t>10 / 15</a:t>
+              <a:t>12 / 17</a:t>
             </a:r>
             <a:endParaRPr/>
           </a:p>
@@ -2145,12 +4825,12 @@
 </p:sld>
 </file>
 
-<file path=ppt/slides/slide11.xml><?xml version="1.0" encoding="utf-8"?>
+<file path=ppt/slides/slide13.xml><?xml version="1.0" encoding="utf-8"?>
 <p:sld xmlns:p="http://schemas.openxmlformats.org/presentationml/2006/main" xmlns:a="http://schemas.openxmlformats.org/drawingml/2006/main" xmlns:a16="http://schemas.microsoft.com/office/drawing/2014/main" xmlns:mc="http://schemas.openxmlformats.org/markup-compatibility/2006" mc:Ignorable="a16">
   <p:cSld>
     <p:spTree>
       <p:nvGrpSpPr>
-        <p:cNvPr id="43" name="" descr="&lt;Slide&gt;&#10;  &lt;Box style={{ width: '1280px', height: '720px', background: '#FFFFFF', flexDirection: 'column' }}&gt;&#10;    {/* 页眉 */}&#10;    &lt;Box style={{ height: 72, background: '#1E4FA8', flexDirection: 'row', alignItems: 'center', justifyContent: 'space-between', paddingLeft: 40, paddingRight: 40 }}&gt;&#10;      &lt;Text style={{ color: '#FFFFFF', fontSize: 16 }}&gt;基于 RAG 的轻量级企业工艺生成系统&lt;/Text&gt;&#10;      &lt;Text style={{ color: 'rgba(255,255,255,0.85)', fontSize: 14 }}&gt;技术方案&lt;/Text&gt;&#10;    &lt;/Box&gt;&#10;&#10;    {/* 左标题栏 + 右表格 */}&#10;    &lt;Box style={{ flex: 1, flexDirection: 'row', paddingLeft: 40, paddingRight: 40, paddingTop: 28, paddingBottom: 16, gap: 40 }}&gt;&#10;      {/* 左标题栏 */}&#10;      &lt;Box style={{ width: 300, flexDirection: 'column', justifyContent: 'space-between', gap: 16 }}&gt;&#10;        &lt;Box style={{ flexDirection: 'column', gap: 16 }}&gt;&#10;          &lt;Box style={{ width: 48, height: 4, background: '#3D7BD9', borderRadius: 2 }} /&gt;&#10;          &lt;Text style={{ color: '#1A2230', fontSize: 34, fontWeight: 'bold', lineHeight: 1.3 }}&gt;技术选型&lt;/Text&gt;&#10;          &lt;Text style={{ color: '#8B97A8', fontSize: 16, lineHeight: 1.5 }}&gt;全部基于开源、轻量组件，普通设备即可运行&lt;/Text&gt;&#10;        &lt;/Box&gt;&#10;        &lt;Box style={{ padding: 18, background: '#0E3F8C', borderRadius: 8 }}&gt;&#10;          &lt;Text style={{ color: '#FFFFFF', fontSize: 18, fontWeight: 'bold' }}&gt;选型原则&lt;/Text&gt;&#10;          &lt;Text style={{ color: '#D6E4F7', fontSize: 15, lineHeight: 1.6, marginTop: 8 }}&gt;&#10;            轻量、开源、零运维，契合「轻量级」定位，可平滑替换为企业内部知识库。&#10;          &lt;/Text&gt;&#10;        &lt;/Box&gt;&#10;      &lt;/Box&gt;&#10;&#10;      {/* 右：选型表 + 底部说明 */}&#10;      &lt;Box style={{ flex: 1, flexDirection: 'column', justifyContent: 'space-between' }}&gt;&#10;        &lt;Table&#10;          style={{ width: '100%', height: 440 }}&#10;          defaultTextStyle={{ fontSize: 17, textAlign: 'center', color: '#1A2230' }}&#10;          defaultCellStyle={{&#10;            border: {&#10;              left: { width: 1, color: '#D6DCE5' },&#10;              right: { width: 1, color: '#D6DCE5' },&#10;              top: { width: 1, color: '#D6DCE5' },&#10;              bottom: { width: 1, color: '#D6DCE5' },&#10;            },&#10;          }}&#10;          cells={[&#10;            [&#10;              { text: '模块', textStyle: { bold: true, color: '#FFFFFF' }, cellStyle: { background: { color: '#1E4FA8' } } },&#10;              { text: '技术选型', textStyle: { bold: true, color: '#FFFFFF' }, cellStyle: { background: { color: '#1E4FA8' } } },&#10;            ],&#10;            ['编程语言', 'Python 3.10+'],&#10;            ['RAG 框架', 'LangChain'],&#10;            ['向量数据库', 'Chroma'],&#10;            ['稀疏检索', 'rank_bm25（BM25）'],&#10;            ['嵌入模型', 'BGE-M3'],&#10;            ['重排序', 'bge-reranker-v2-m3'],&#10;            ['PDF 解析', 'PyMuPDF + pdfplumber'],&#10;            ['大模型', '开源大模型 API（OpenAI 兼容）'],&#10;            ['界面', 'Gradio'],&#10;            ['版本管理', 'Git + GitHub'],&#10;          ]}&#10;        /&gt;&#10;        &lt;Box style={{ flexDirection: 'row', alignItems: 'center', gap: 12, padding: 14, background: '#F0F5FC', borderRadius: 8 }}&gt;&#10;          &lt;Box style={{ width: 8, height: 8, background: '#1E4FA8', borderRadius: 4 }} /&gt;&#10;          &lt;Text style={{ color: '#4A5568', fontSize: 15, lineHeight: 1.5 }}&gt;嵌入与重排模型支持 API 或本地部署两种方式，可做对比实验&lt;/Text&gt;&#10;        &lt;/Box&gt;&#10;      &lt;/Box&gt;&#10;    &lt;/Box&gt;&#10;&#10;    {/* 页脚 */}&#10;    &lt;Box style={{ height: 40, flexDirection: 'row', alignItems: 'center', justifyContent: 'space-between', paddingLeft: 40, paddingRight: 40 }}&gt;&#10;      &lt;Text style={{ color: '#8B97A8', fontSize: 14 }}&gt;中国科学技术大学软件学院&lt;/Text&gt;&#10;      &lt;Text style={{ color: '#1E4FA8', fontSize: 16, fontWeight: 'bold' }}&gt;11 / 15&lt;/Text&gt;&#10;    &lt;/Box&gt;&#10;  &lt;/Box&gt;&#10;&lt;/Slide&gt;&#10;"/>
+        <p:cNvPr id="114" name=""/>
         <p:cNvGrpSpPr/>
         <p:nvPr/>
       </p:nvGrpSpPr>
@@ -2164,7 +4844,7 @@
       </p:grpSpPr>
       <p:sp>
         <p:nvSpPr>
-          <p:cNvPr id="44" name=""/>
+          <p:cNvPr id="115" name=""/>
           <p:cNvSpPr/>
           <p:nvPr/>
         </p:nvSpPr>
@@ -2183,12 +4863,15 @@
         </p:spPr>
         <p:txBody>
           <a:bodyPr/>
-          <a:p/>
-        </p:txBody>
-      </p:sp>
-      <p:sp>
-        <p:nvSpPr>
-          <p:cNvPr id="45" name=""/>
+          <a:p>
+            <a:pPr/>
+            <a:endParaRPr/>
+          </a:p>
+        </p:txBody>
+      </p:sp>
+      <p:sp>
+        <p:nvSpPr>
+          <p:cNvPr id="116" name=""/>
           <p:cNvSpPr/>
           <p:nvPr/>
         </p:nvSpPr>
@@ -2207,12 +4890,15 @@
         </p:spPr>
         <p:txBody>
           <a:bodyPr/>
-          <a:p/>
-        </p:txBody>
-      </p:sp>
-      <p:sp>
-        <p:nvSpPr>
-          <p:cNvPr id="46" name="" descr="{&quot;isTemplate&quot;:true,&quot;type&quot;:&quot;text&quot;}"/>
+          <a:p>
+            <a:pPr/>
+            <a:endParaRPr/>
+          </a:p>
+        </p:txBody>
+      </p:sp>
+      <p:sp>
+        <p:nvSpPr>
+          <p:cNvPr id="117" name="" descr="{&quot;isTemplate&quot;:true,&quot;type&quot;:&quot;text&quot;}"/>
           <p:cNvSpPr txBox="1"/>
           <p:nvPr/>
         </p:nvSpPr>
@@ -2267,7 +4953,7 @@
       </p:sp>
       <p:sp>
         <p:nvSpPr>
-          <p:cNvPr id="47" name="" descr="{&quot;isTemplate&quot;:true,&quot;type&quot;:&quot;text&quot;}"/>
+          <p:cNvPr id="118" name="" descr="{&quot;isTemplate&quot;:true,&quot;type&quot;:&quot;text&quot;}"/>
           <p:cNvSpPr txBox="1"/>
           <p:nvPr/>
         </p:nvSpPr>
@@ -2304,7 +4990,7 @@
       </p:sp>
       <p:sp>
         <p:nvSpPr>
-          <p:cNvPr id="48" name=""/>
+          <p:cNvPr id="119" name=""/>
           <p:cNvSpPr/>
           <p:nvPr/>
         </p:nvSpPr>
@@ -2325,12 +5011,15 @@
         </p:spPr>
         <p:txBody>
           <a:bodyPr/>
-          <a:p/>
-        </p:txBody>
-      </p:sp>
-      <p:sp>
-        <p:nvSpPr>
-          <p:cNvPr id="49" name="" descr="{&quot;isTemplate&quot;:true,&quot;type&quot;:&quot;text&quot;}"/>
+          <a:p>
+            <a:pPr/>
+            <a:endParaRPr/>
+          </a:p>
+        </p:txBody>
+      </p:sp>
+      <p:sp>
+        <p:nvSpPr>
+          <p:cNvPr id="120" name="" descr="{&quot;isTemplate&quot;:true,&quot;type&quot;:&quot;text&quot;}"/>
           <p:cNvSpPr txBox="1"/>
           <p:nvPr/>
         </p:nvSpPr>
@@ -2365,7 +5054,7 @@
       </p:sp>
       <p:sp>
         <p:nvSpPr>
-          <p:cNvPr id="50" name="" descr="{&quot;isTemplate&quot;:true,&quot;type&quot;:&quot;text&quot;}"/>
+          <p:cNvPr id="121" name="" descr="{&quot;isTemplate&quot;:true,&quot;type&quot;:&quot;text&quot;}"/>
           <p:cNvSpPr txBox="1"/>
           <p:nvPr/>
         </p:nvSpPr>
@@ -2402,7 +5091,7 @@
       </p:sp>
       <p:sp>
         <p:nvSpPr>
-          <p:cNvPr id="51" name=""/>
+          <p:cNvPr id="122" name=""/>
           <p:cNvSpPr/>
           <p:nvPr/>
         </p:nvSpPr>
@@ -2423,12 +5112,15 @@
         </p:spPr>
         <p:txBody>
           <a:bodyPr/>
-          <a:p/>
-        </p:txBody>
-      </p:sp>
-      <p:sp>
-        <p:nvSpPr>
-          <p:cNvPr id="52" name="" descr="{&quot;isTemplate&quot;:true,&quot;type&quot;:&quot;text&quot;}"/>
+          <a:p>
+            <a:pPr/>
+            <a:endParaRPr/>
+          </a:p>
+        </p:txBody>
+      </p:sp>
+      <p:sp>
+        <p:nvSpPr>
+          <p:cNvPr id="123" name="" descr="{&quot;isTemplate&quot;:true,&quot;type&quot;:&quot;text&quot;}"/>
           <p:cNvSpPr txBox="1"/>
           <p:nvPr/>
         </p:nvSpPr>
@@ -2463,7 +5155,7 @@
       </p:sp>
       <p:sp>
         <p:nvSpPr>
-          <p:cNvPr id="53" name="" descr="{&quot;isTemplate&quot;:true,&quot;type&quot;:&quot;text&quot;}"/>
+          <p:cNvPr id="124" name="" descr="{&quot;isTemplate&quot;:true,&quot;type&quot;:&quot;text&quot;}"/>
           <p:cNvSpPr txBox="1"/>
           <p:nvPr/>
         </p:nvSpPr>
@@ -2500,7 +5192,7 @@
       </p:sp>
       <p:graphicFrame>
         <p:nvGraphicFramePr>
-          <p:cNvPr id="54" name=""/>
+          <p:cNvPr id="125" name=""/>
           <p:cNvGraphicFramePr/>
           <p:nvPr/>
         </p:nvGraphicFramePr>
@@ -3474,7 +6166,7 @@
       </p:graphicFrame>
       <p:sp>
         <p:nvSpPr>
-          <p:cNvPr id="55" name=""/>
+          <p:cNvPr id="126" name=""/>
           <p:cNvSpPr/>
           <p:nvPr/>
         </p:nvSpPr>
@@ -3495,12 +6187,15 @@
         </p:spPr>
         <p:txBody>
           <a:bodyPr/>
-          <a:p/>
-        </p:txBody>
-      </p:sp>
-      <p:sp>
-        <p:nvSpPr>
-          <p:cNvPr id="56" name=""/>
+          <a:p>
+            <a:pPr/>
+            <a:endParaRPr/>
+          </a:p>
+        </p:txBody>
+      </p:sp>
+      <p:sp>
+        <p:nvSpPr>
+          <p:cNvPr id="127" name=""/>
           <p:cNvSpPr/>
           <p:nvPr/>
         </p:nvSpPr>
@@ -3521,12 +6216,15 @@
         </p:spPr>
         <p:txBody>
           <a:bodyPr/>
-          <a:p/>
-        </p:txBody>
-      </p:sp>
-      <p:sp>
-        <p:nvSpPr>
-          <p:cNvPr id="57" name="" descr="{&quot;isTemplate&quot;:true,&quot;type&quot;:&quot;text&quot;}"/>
+          <a:p>
+            <a:pPr/>
+            <a:endParaRPr/>
+          </a:p>
+        </p:txBody>
+      </p:sp>
+      <p:sp>
+        <p:nvSpPr>
+          <p:cNvPr id="128" name="" descr="{&quot;isTemplate&quot;:true,&quot;type&quot;:&quot;text&quot;}"/>
           <p:cNvSpPr txBox="1"/>
           <p:nvPr/>
         </p:nvSpPr>
@@ -3581,7 +6279,7 @@
       </p:sp>
       <p:sp>
         <p:nvSpPr>
-          <p:cNvPr id="58" name="" descr="{&quot;isTemplate&quot;:true,&quot;type&quot;:&quot;text&quot;}"/>
+          <p:cNvPr id="129" name="" descr="{&quot;isTemplate&quot;:true,&quot;type&quot;:&quot;text&quot;}"/>
           <p:cNvSpPr txBox="1"/>
           <p:nvPr/>
         </p:nvSpPr>
@@ -3616,7 +6314,7 @@
       </p:sp>
       <p:sp>
         <p:nvSpPr>
-          <p:cNvPr id="59" name="" descr="{&quot;isTemplate&quot;:true,&quot;type&quot;:&quot;text&quot;}"/>
+          <p:cNvPr id="130" name="" descr="{&quot;isTemplate&quot;:true,&quot;type&quot;:&quot;text&quot;}"/>
           <p:cNvSpPr txBox="1"/>
           <p:nvPr/>
         </p:nvSpPr>
@@ -3643,7 +6341,7 @@
                 <a:latin typeface="Microsoft YaHei"/>
                 <a:ea typeface="Microsoft YaHei"/>
               </a:rPr>
-              <a:t>11 / 15</a:t>
+              <a:t>13 / 17</a:t>
             </a:r>
             <a:endParaRPr/>
           </a:p>
@@ -3654,12 +6352,12 @@
 </p:sld>
 </file>
 
-<file path=ppt/slides/slide12.xml><?xml version="1.0" encoding="utf-8"?>
+<file path=ppt/slides/slide14.xml><?xml version="1.0" encoding="utf-8"?>
 <p:sld xmlns:p="http://schemas.openxmlformats.org/presentationml/2006/main" xmlns:a="http://schemas.openxmlformats.org/drawingml/2006/main">
   <p:cSld>
     <p:spTree>
       <p:nvGrpSpPr>
-        <p:cNvPr id="60" name="" descr="&lt;Slide&gt;&#10;  &lt;Box style={{ width: '1280px', height: '720px', background: '#FFFFFF', flexDirection: 'row', alignItems: 'center' }}&gt;&#10;    {/* 左侧大数字 */}&#10;    &lt;Box style={{ width: 360, height: 720, background: '#F0F5FC', alignItems: 'center', justifyContent: 'center' }}&gt;&#10;      &lt;Text style={{ color: '#0E3F8C', fontSize: 200, fontWeight: 'bold', lineHeight: 1 }}&gt;03&lt;/Text&gt;&#10;    &lt;/Box&gt;&#10;&#10;    {/* 右侧标题与要点 */}&#10;    &lt;Box style={{ flex: 1, height: 720, flexDirection: 'column', justifyContent: 'center', paddingLeft: 72, paddingRight: 60, gap: 24 }}&gt;&#10;      &lt;Box style={{ width: 48, height: 4, background: '#3D7BD9', borderRadius: 2 }} /&gt;&#10;      &lt;Text style={{ color: '#1A2230', fontSize: 48, fontWeight: 'bold' }}&gt;开发方法与测试&lt;/Text&gt;&#10;      &lt;Text style={{ color: '#8B97A8', fontSize: 20, letterSpacing: 1 }}&gt;模块化迭代开发 · 四类测试方案&lt;/Text&gt;&#10;&#10;      &lt;Box style={{ flexDirection: 'column', gap: 24, marginTop: 16 }}&gt;&#10;        {[&#10;          { t: '模块化、迭代式开发', d: '按解析建库 → 检索重排 → 生成对话 → 溯源界面 → 测试评估 分阶段推进，先单测后集成' },&#10;          { t: '功能测试', d: '验证 PDF 解析、表格抽取、混合检索、重排序、生成、溯源各模块正确性' },&#10;          { t: '多文档测试 + 人工评估', d: '构建典型工艺问题测试集，由评估人员对相关性、正确性、引用准确性打分' },&#10;          { t: '对比实验', d: '比较仅向量 / 向量+BM25 / 混合+重排 的召回与生成效果，分析各模块贡献' },&#10;        ].map((item, idx) =&gt; (&#10;          &lt;Box key={idx} style={{ flexDirection: 'row', alignItems: 'flex-start', gap: 16 }}&gt;&#10;            &lt;Box style={{ width: 8, height: 8, background: '#1E4FA8', borderRadius: 4, marginTop: 10 }} /&gt;&#10;            &lt;Box style={{ flexDirection: 'column', gap: 4 }}&gt;&#10;              &lt;Text style={{ color: '#1A2230', fontSize: 22, fontWeight: 'bold' }}&gt;{item.t}&lt;/Text&gt;&#10;              &lt;Text style={{ color: '#4A5568', fontSize: 18, lineHeight: 1.5 }}&gt;{item.d}&lt;/Text&gt;&#10;            &lt;/Box&gt;&#10;          &lt;/Box&gt;&#10;        ))}&#10;      &lt;/Box&gt;&#10;&#10;      &lt;Box style={{ flexDirection: 'row', alignItems: 'center', gap: 12, padding: 16, background: '#F0F5FC', borderRadius: 8, marginTop: 8 }}&gt;&#10;        &lt;Box style={{ width: 8, height: 8, background: '#1E4FA8', borderRadius: 4 }} /&gt;&#10;        &lt;Text style={{ color: '#1E4FA8', fontSize: 16, fontWeight: 'bold' }}&gt;评估结果用于反哺优化解析、分块与检索策略&lt;/Text&gt;&#10;      &lt;/Box&gt;&#10;    &lt;/Box&gt;&#10;  &lt;/Box&gt;&#10;&lt;/Slide&gt;&#10;"/>
+        <p:cNvPr id="131" name=""/>
         <p:cNvGrpSpPr/>
         <p:nvPr/>
       </p:nvGrpSpPr>
@@ -3673,7 +6371,7 @@
       </p:grpSpPr>
       <p:sp>
         <p:nvSpPr>
-          <p:cNvPr id="61" name=""/>
+          <p:cNvPr id="132" name=""/>
           <p:cNvSpPr/>
           <p:nvPr/>
         </p:nvSpPr>
@@ -3692,12 +6390,15 @@
         </p:spPr>
         <p:txBody>
           <a:bodyPr/>
-          <a:p/>
-        </p:txBody>
-      </p:sp>
-      <p:sp>
-        <p:nvSpPr>
-          <p:cNvPr id="62" name=""/>
+          <a:p>
+            <a:pPr/>
+            <a:endParaRPr/>
+          </a:p>
+        </p:txBody>
+      </p:sp>
+      <p:sp>
+        <p:nvSpPr>
+          <p:cNvPr id="133" name=""/>
           <p:cNvSpPr/>
           <p:nvPr/>
         </p:nvSpPr>
@@ -3716,12 +6417,15 @@
         </p:spPr>
         <p:txBody>
           <a:bodyPr/>
-          <a:p/>
-        </p:txBody>
-      </p:sp>
-      <p:sp>
-        <p:nvSpPr>
-          <p:cNvPr id="63" name="" descr="{&quot;isTemplate&quot;:true,&quot;type&quot;:&quot;text&quot;}"/>
+          <a:p>
+            <a:pPr/>
+            <a:endParaRPr/>
+          </a:p>
+        </p:txBody>
+      </p:sp>
+      <p:sp>
+        <p:nvSpPr>
+          <p:cNvPr id="134" name="" descr="{&quot;isTemplate&quot;:true,&quot;type&quot;:&quot;text&quot;}"/>
           <p:cNvSpPr txBox="1"/>
           <p:nvPr/>
         </p:nvSpPr>
@@ -3756,7 +6460,7 @@
       </p:sp>
       <p:sp>
         <p:nvSpPr>
-          <p:cNvPr id="64" name=""/>
+          <p:cNvPr id="135" name=""/>
           <p:cNvSpPr/>
           <p:nvPr/>
         </p:nvSpPr>
@@ -3777,12 +6481,15 @@
         </p:spPr>
         <p:txBody>
           <a:bodyPr/>
-          <a:p/>
-        </p:txBody>
-      </p:sp>
-      <p:sp>
-        <p:nvSpPr>
-          <p:cNvPr id="65" name="" descr="{&quot;isTemplate&quot;:true,&quot;type&quot;:&quot;text&quot;}"/>
+          <a:p>
+            <a:pPr/>
+            <a:endParaRPr/>
+          </a:p>
+        </p:txBody>
+      </p:sp>
+      <p:sp>
+        <p:nvSpPr>
+          <p:cNvPr id="136" name="" descr="{&quot;isTemplate&quot;:true,&quot;type&quot;:&quot;text&quot;}"/>
           <p:cNvSpPr txBox="1"/>
           <p:nvPr/>
         </p:nvSpPr>
@@ -3817,7 +6524,7 @@
       </p:sp>
       <p:sp>
         <p:nvSpPr>
-          <p:cNvPr id="66" name="" descr="{&quot;isTemplate&quot;:true,&quot;type&quot;:&quot;text&quot;}"/>
+          <p:cNvPr id="137" name="" descr="{&quot;isTemplate&quot;:true,&quot;type&quot;:&quot;text&quot;}"/>
           <p:cNvSpPr txBox="1"/>
           <p:nvPr/>
         </p:nvSpPr>
@@ -3872,7 +6579,7 @@
       </p:sp>
       <p:sp>
         <p:nvSpPr>
-          <p:cNvPr id="67" name=""/>
+          <p:cNvPr id="138" name=""/>
           <p:cNvSpPr/>
           <p:nvPr/>
         </p:nvSpPr>
@@ -3893,12 +6600,15 @@
         </p:spPr>
         <p:txBody>
           <a:bodyPr/>
-          <a:p/>
-        </p:txBody>
-      </p:sp>
-      <p:sp>
-        <p:nvSpPr>
-          <p:cNvPr id="68" name="" descr="{&quot;isTemplate&quot;:true,&quot;type&quot;:&quot;text&quot;}"/>
+          <a:p>
+            <a:pPr/>
+            <a:endParaRPr/>
+          </a:p>
+        </p:txBody>
+      </p:sp>
+      <p:sp>
+        <p:nvSpPr>
+          <p:cNvPr id="139" name="" descr="{&quot;isTemplate&quot;:true,&quot;type&quot;:&quot;text&quot;}"/>
           <p:cNvSpPr txBox="1"/>
           <p:nvPr/>
         </p:nvSpPr>
@@ -3933,7 +6643,7 @@
       </p:sp>
       <p:sp>
         <p:nvSpPr>
-          <p:cNvPr id="69" name="" descr="{&quot;isTemplate&quot;:true,&quot;type&quot;:&quot;text&quot;}"/>
+          <p:cNvPr id="140" name="" descr="{&quot;isTemplate&quot;:true,&quot;type&quot;:&quot;text&quot;}"/>
           <p:cNvSpPr txBox="1"/>
           <p:nvPr/>
         </p:nvSpPr>
@@ -4068,7 +6778,7 @@
       </p:sp>
       <p:sp>
         <p:nvSpPr>
-          <p:cNvPr id="70" name=""/>
+          <p:cNvPr id="141" name=""/>
           <p:cNvSpPr/>
           <p:nvPr/>
         </p:nvSpPr>
@@ -4089,12 +6799,15 @@
         </p:spPr>
         <p:txBody>
           <a:bodyPr/>
-          <a:p/>
-        </p:txBody>
-      </p:sp>
-      <p:sp>
-        <p:nvSpPr>
-          <p:cNvPr id="71" name="" descr="{&quot;isTemplate&quot;:true,&quot;type&quot;:&quot;text&quot;}"/>
+          <a:p>
+            <a:pPr/>
+            <a:endParaRPr/>
+          </a:p>
+        </p:txBody>
+      </p:sp>
+      <p:sp>
+        <p:nvSpPr>
+          <p:cNvPr id="142" name="" descr="{&quot;isTemplate&quot;:true,&quot;type&quot;:&quot;text&quot;}"/>
           <p:cNvSpPr txBox="1"/>
           <p:nvPr/>
         </p:nvSpPr>
@@ -4129,7 +6842,7 @@
       </p:sp>
       <p:sp>
         <p:nvSpPr>
-          <p:cNvPr id="72" name="" descr="{&quot;isTemplate&quot;:true,&quot;type&quot;:&quot;text&quot;}"/>
+          <p:cNvPr id="143" name="" descr="{&quot;isTemplate&quot;:true,&quot;type&quot;:&quot;text&quot;}"/>
           <p:cNvSpPr txBox="1"/>
           <p:nvPr/>
         </p:nvSpPr>
@@ -4184,7 +6897,7 @@
       </p:sp>
       <p:sp>
         <p:nvSpPr>
-          <p:cNvPr id="73" name=""/>
+          <p:cNvPr id="144" name=""/>
           <p:cNvSpPr/>
           <p:nvPr/>
         </p:nvSpPr>
@@ -4205,12 +6918,15 @@
         </p:spPr>
         <p:txBody>
           <a:bodyPr/>
-          <a:p/>
-        </p:txBody>
-      </p:sp>
-      <p:sp>
-        <p:nvSpPr>
-          <p:cNvPr id="74" name="" descr="{&quot;isTemplate&quot;:true,&quot;type&quot;:&quot;text&quot;}"/>
+          <a:p>
+            <a:pPr/>
+            <a:endParaRPr/>
+          </a:p>
+        </p:txBody>
+      </p:sp>
+      <p:sp>
+        <p:nvSpPr>
+          <p:cNvPr id="145" name="" descr="{&quot;isTemplate&quot;:true,&quot;type&quot;:&quot;text&quot;}"/>
           <p:cNvSpPr txBox="1"/>
           <p:nvPr/>
         </p:nvSpPr>
@@ -4265,7 +6981,7 @@
       </p:sp>
       <p:sp>
         <p:nvSpPr>
-          <p:cNvPr id="75" name="" descr="{&quot;isTemplate&quot;:true,&quot;type&quot;:&quot;text&quot;}"/>
+          <p:cNvPr id="146" name="" descr="{&quot;isTemplate&quot;:true,&quot;type&quot;:&quot;text&quot;}"/>
           <p:cNvSpPr txBox="1"/>
           <p:nvPr/>
         </p:nvSpPr>
@@ -4300,7 +7016,7 @@
       </p:sp>
       <p:sp>
         <p:nvSpPr>
-          <p:cNvPr id="76" name=""/>
+          <p:cNvPr id="147" name=""/>
           <p:cNvSpPr/>
           <p:nvPr/>
         </p:nvSpPr>
@@ -4321,12 +7037,15 @@
         </p:spPr>
         <p:txBody>
           <a:bodyPr/>
-          <a:p/>
-        </p:txBody>
-      </p:sp>
-      <p:sp>
-        <p:nvSpPr>
-          <p:cNvPr id="77" name="" descr="{&quot;isTemplate&quot;:true,&quot;type&quot;:&quot;text&quot;}"/>
+          <a:p>
+            <a:pPr/>
+            <a:endParaRPr/>
+          </a:p>
+        </p:txBody>
+      </p:sp>
+      <p:sp>
+        <p:nvSpPr>
+          <p:cNvPr id="148" name="" descr="{&quot;isTemplate&quot;:true,&quot;type&quot;:&quot;text&quot;}"/>
           <p:cNvSpPr txBox="1"/>
           <p:nvPr/>
         </p:nvSpPr>
@@ -4361,7 +7080,7 @@
       </p:sp>
       <p:sp>
         <p:nvSpPr>
-          <p:cNvPr id="78" name="" descr="{&quot;isTemplate&quot;:true,&quot;type&quot;:&quot;text&quot;}"/>
+          <p:cNvPr id="149" name="" descr="{&quot;isTemplate&quot;:true,&quot;type&quot;:&quot;text&quot;}"/>
           <p:cNvSpPr txBox="1"/>
           <p:nvPr/>
         </p:nvSpPr>
@@ -4476,7 +7195,7 @@
       </p:sp>
       <p:sp>
         <p:nvSpPr>
-          <p:cNvPr id="79" name=""/>
+          <p:cNvPr id="150" name=""/>
           <p:cNvSpPr/>
           <p:nvPr/>
         </p:nvSpPr>
@@ -4497,12 +7216,15 @@
         </p:spPr>
         <p:txBody>
           <a:bodyPr/>
-          <a:p/>
-        </p:txBody>
-      </p:sp>
-      <p:sp>
-        <p:nvSpPr>
-          <p:cNvPr id="80" name=""/>
+          <a:p>
+            <a:pPr/>
+            <a:endParaRPr/>
+          </a:p>
+        </p:txBody>
+      </p:sp>
+      <p:sp>
+        <p:nvSpPr>
+          <p:cNvPr id="151" name=""/>
           <p:cNvSpPr/>
           <p:nvPr/>
         </p:nvSpPr>
@@ -4523,12 +7245,15 @@
         </p:spPr>
         <p:txBody>
           <a:bodyPr/>
-          <a:p/>
-        </p:txBody>
-      </p:sp>
-      <p:sp>
-        <p:nvSpPr>
-          <p:cNvPr id="81" name="" descr="{&quot;isTemplate&quot;:true,&quot;type&quot;:&quot;text&quot;}"/>
+          <a:p>
+            <a:pPr/>
+            <a:endParaRPr/>
+          </a:p>
+        </p:txBody>
+      </p:sp>
+      <p:sp>
+        <p:nvSpPr>
+          <p:cNvPr id="152" name="" descr="{&quot;isTemplate&quot;:true,&quot;type&quot;:&quot;text&quot;}"/>
           <p:cNvSpPr txBox="1"/>
           <p:nvPr/>
         </p:nvSpPr>
@@ -4566,12 +7291,12 @@
 </p:sld>
 </file>
 
-<file path=ppt/slides/slide13.xml><?xml version="1.0" encoding="utf-8"?>
+<file path=ppt/slides/slide15.xml><?xml version="1.0" encoding="utf-8"?>
 <p:sld xmlns:p="http://schemas.openxmlformats.org/presentationml/2006/main" xmlns:a="http://schemas.openxmlformats.org/drawingml/2006/main" xmlns:asvg="http://schemas.microsoft.com/office/drawing/2016/SVG/main" xmlns:r="http://schemas.openxmlformats.org/officeDocument/2006/relationships" xmlns:mc="http://schemas.openxmlformats.org/markup-compatibility/2006" mc:Ignorable="asvg">
   <p:cSld>
     <p:spTree>
       <p:nvGrpSpPr>
-        <p:cNvPr id="82" name="" descr="&lt;Slide&gt;&#10;  &lt;Box style={{ width: '1280px', height: '720px', background: '#FFFFFF', flexDirection: 'column' }}&gt;&#10;    {/* 页眉 */}&#10;    &lt;Box style={{ height: 72, background: '#1E4FA8', flexDirection: 'row', alignItems: 'center', justifyContent: 'space-between', paddingLeft: 40, paddingRight: 40 }}&gt;&#10;      &lt;Text style={{ color: '#FFFFFF', fontSize: 16 }}&gt;基于 RAG 的轻量级企业工艺生成系统&lt;/Text&gt;&#10;      &lt;Text style={{ color: 'rgba(255,255,255,0.85)', fontSize: 14 }}&gt;方法进度&lt;/Text&gt;&#10;    &lt;/Box&gt;&#10;&#10;    {/* 主标题 */}&#10;    &lt;Box style={{ paddingLeft: 40, paddingRight: 40, paddingTop: 22, paddingBottom: 8 }}&gt;&#10;      &lt;Text style={{ color: '#1A2230', fontSize: 34, fontWeight: 'bold' }}&gt;进度安排（2026.10 — 2027.06）&lt;/Text&gt;&#10;    &lt;/Box&gt;&#10;&#10;    {/* 上：时间轴大图 */}&#10;    &lt;Box style={{ paddingLeft: 40, paddingRight: 40, paddingTop: 8 }}&gt;&#10;      &lt;svg width={1200} height={250} viewBox='0 0 1200 250'&gt;&#10;        {/* 时间轴线 */}&#10;        &lt;line x1='20' y1='85' x2='1180' y2='85' stroke='#3D7BD9' strokeWidth='3' /&gt;&#10;        {/* 7 个阶段节点 */}&#10;        &lt;g font-size='14' fill='#1A2230' text-anchor='middle'&gt;&#10;          {[&#10;            { x: 80, t: '文献调研\n需求分析', d: '2026.10-11', done: true },&#10;            { x: 265, t: '解析建库', d: '2026.11-12', done: false },&#10;            { x: 450, t: '检索重排', d: '2026.12-01', done: false },&#10;            { x: 635, t: '生成对话', d: '2027.02-03', done: false },&#10;            { x: 820, t: '溯源界面', d: '2027.03-04', done: false },&#10;            { x: 1005, t: '测试优化', d: '2027.04-05', done: false },&#10;            { x: 1135, t: '结题答辩', d: '2027.05-06', done: false },&#10;          ].map((s) =&gt; (&#10;            &lt;g key={s.x}&gt;&#10;              &lt;circle cx={s.x} cy='85' r='13' fill={s.done ? '#1E4FA8' : '#FFFFFF'} stroke='#1E4FA8' strokeWidth='3' /&gt;&#10;              {s.done &amp;&amp; &lt;circle cx={s.x} cy='85' r='5' fill='#FFFFFF' /&gt;}&#10;              &lt;text x={s.x} y='57' font-size='14' font-weight='bold' fill='#0E3F8C'&gt;{s.d.split(' ')[0]}&lt;/text&gt;&#10;              &lt;text x={s.x} y='133' font-size='15' font-weight='bold'&gt;{s.t.split('\n')[0]}&lt;/text&gt;&#10;              &lt;text x={s.x} y='155' font-size='14' fill='#8B97A8'&gt;{s.t.split('\n')[1]}&lt;/text&gt;&#10;            &lt;/g&gt;&#10;          ))}&#10;        &lt;/g&gt;&#10;        {/* 当前阶段标记 + 成果说明 */}&#10;        &lt;rect x='30' y='186' width='130' height='30' rx='15' fill='#E8EFF8' /&gt;&#10;        &lt;text x='95' y='206' font-size='13' fill='#1E4FA8' text-anchor='middle' font-weight='bold'&gt;当前：第 1 阶段&lt;/text&gt;&#10;        &lt;text x='180' y='206' font-size='15' fill='#4A5568'&gt;每阶段成果：开题报告 → 知识库 → 检索评测 → 问答原型 → 可演示系统 → 评估报告 → 结题文档&lt;/text&gt;&#10;      &lt;/svg&gt;&#10;    &lt;/Box&gt;&#10;&#10;    {/* 下方结论条 + 三列成果预览 */}&#10;    &lt;Box style={{ paddingLeft: 40, paddingRight: 40, paddingTop: 16, flex: 1, flexDirection: 'column', gap: 14 }}&gt;&#10;      &lt;Box style={{ flexDirection: 'row', alignItems: 'center', gap: 16, padding: 18, background: '#F0F5FC', borderRadius: 10 }}&gt;&#10;        &lt;Box style={{ width: 44, height: 44, background: '#1E4FA8', borderRadius: 8, alignItems: 'center', justifyContent: 'center' }}&gt;&#10;          &lt;Text style={{ color: '#FFFFFF', fontSize: 18, fontWeight: 'bold' }}&gt;7&lt;/Text&gt;&#10;        &lt;/Box&gt;&#10;        &lt;Box style={{ flex: 1, flexDirection: 'column', gap: 4 }}&gt;&#10;          &lt;Text style={{ color: '#1A2230', fontSize: 20, fontWeight: 'bold' }}&gt;七个阶段 · 阶段性成果可验收&lt;/Text&gt;&#10;          &lt;Text style={{ color: '#4A5568', fontSize: 16, lineHeight: 1.5 }}&gt;当前已完成第 1 阶段（文献调研、需求分析、开题报告、GitHub 仓库），即将进入第 2 阶段解析与离线建库&lt;/Text&gt;&#10;        &lt;/Box&gt;&#10;      &lt;/Box&gt;&#10;      &lt;Box style={{ flexDirection: 'row', gap: 16, flex: 1 }}&gt;&#10;        {[&#10;          { t: '阶段 1-2', s: '开题 · 建库', d: '文献调研与需求分析、开题报告、PDF 解析与知识库构建' },&#10;          { t: '阶段 3-4', s: '检索 · 原型', d: '混合检索与重排序、生成与多轮对话、可运行问答原型' },&#10;          { t: '阶段 5-7', s: '系统 · 结题', d: '溯源与界面、多文档测试评估、结题报告与答辩' },&#10;        ].map((item) =&gt; (&#10;          &lt;Box key={item.t} style={{ flex: 1, flexDirection: 'column', gap: 8, padding: 20, background: '#F7F9FC', borderRadius: 10, border: '1px solid #E5E7EB' }}&gt;&#10;            &lt;Box style={{ flexDirection: 'row', alignItems: 'center', gap: 8 }}&gt;&#10;              &lt;Text style={{ color: '#1E4FA8', fontSize: 18, fontWeight: 'bold' }}&gt;{item.t}&lt;/Text&gt;&#10;              &lt;Box style={{ paddingLeft: 8, paddingRight: 8, paddingTop: 2, paddingBottom: 2, background: '#E8EFF8', borderRadius: 4 }}&gt;&#10;                &lt;Text style={{ color: '#1E4FA8', fontSize: 13 }}&gt;{item.s}&lt;/Text&gt;&#10;              &lt;/Box&gt;&#10;            &lt;/Box&gt;&#10;            &lt;Text style={{ color: '#4A5568', fontSize: 15, lineHeight: 1.6 }}&gt;{item.d}&lt;/Text&gt;&#10;          &lt;/Box&gt;&#10;        ))}&#10;      &lt;/Box&gt;&#10;    &lt;/Box&gt;&#10;&#10;    {/* 页脚 */}&#10;    &lt;Box style={{ height: 40, flexDirection: 'row', alignItems: 'center', justifyContent: 'space-between', paddingLeft: 40, paddingRight: 40 }}&gt;&#10;      &lt;Text style={{ color: '#8B97A8', fontSize: 14 }}&gt;中国科学技术大学软件学院&lt;/Text&gt;&#10;      &lt;Text style={{ color: '#1E4FA8', fontSize: 16, fontWeight: 'bold' }}&gt;13 / 15&lt;/Text&gt;&#10;    &lt;/Box&gt;&#10;  &lt;/Box&gt;&#10;&lt;/Slide&gt;&#10;"/>
+        <p:cNvPr id="153" name=""/>
         <p:cNvGrpSpPr/>
         <p:nvPr/>
       </p:nvGrpSpPr>
@@ -4585,7 +7310,7 @@
       </p:grpSpPr>
       <p:sp>
         <p:nvSpPr>
-          <p:cNvPr id="83" name=""/>
+          <p:cNvPr id="154" name=""/>
           <p:cNvSpPr/>
           <p:nvPr/>
         </p:nvSpPr>
@@ -4604,12 +7329,15 @@
         </p:spPr>
         <p:txBody>
           <a:bodyPr/>
-          <a:p/>
-        </p:txBody>
-      </p:sp>
-      <p:sp>
-        <p:nvSpPr>
-          <p:cNvPr id="84" name=""/>
+          <a:p>
+            <a:pPr/>
+            <a:endParaRPr/>
+          </a:p>
+        </p:txBody>
+      </p:sp>
+      <p:sp>
+        <p:nvSpPr>
+          <p:cNvPr id="155" name=""/>
           <p:cNvSpPr/>
           <p:nvPr/>
         </p:nvSpPr>
@@ -4628,12 +7356,15 @@
         </p:spPr>
         <p:txBody>
           <a:bodyPr/>
-          <a:p/>
-        </p:txBody>
-      </p:sp>
-      <p:sp>
-        <p:nvSpPr>
-          <p:cNvPr id="85" name="" descr="{&quot;isTemplate&quot;:true,&quot;type&quot;:&quot;text&quot;}"/>
+          <a:p>
+            <a:pPr/>
+            <a:endParaRPr/>
+          </a:p>
+        </p:txBody>
+      </p:sp>
+      <p:sp>
+        <p:nvSpPr>
+          <p:cNvPr id="156" name="" descr="{&quot;isTemplate&quot;:true,&quot;type&quot;:&quot;text&quot;}"/>
           <p:cNvSpPr txBox="1"/>
           <p:nvPr/>
         </p:nvSpPr>
@@ -4688,7 +7419,7 @@
       </p:sp>
       <p:sp>
         <p:nvSpPr>
-          <p:cNvPr id="86" name="" descr="{&quot;isTemplate&quot;:true,&quot;type&quot;:&quot;text&quot;}"/>
+          <p:cNvPr id="157" name="" descr="{&quot;isTemplate&quot;:true,&quot;type&quot;:&quot;text&quot;}"/>
           <p:cNvSpPr txBox="1"/>
           <p:nvPr/>
         </p:nvSpPr>
@@ -4725,7 +7456,7 @@
       </p:sp>
       <p:sp>
         <p:nvSpPr>
-          <p:cNvPr id="87" name="" descr="{&quot;isTemplate&quot;:true,&quot;type&quot;:&quot;text&quot;}"/>
+          <p:cNvPr id="158" name="" descr="{&quot;isTemplate&quot;:true,&quot;type&quot;:&quot;text&quot;}"/>
           <p:cNvSpPr txBox="1"/>
           <p:nvPr/>
         </p:nvSpPr>
@@ -4780,7 +7511,7 @@
       </p:sp>
       <p:pic>
         <p:nvPicPr>
-          <p:cNvPr id="88" name=""/>
+          <p:cNvPr id="159" name=""/>
           <p:cNvPicPr>
             <a:picLocks noChangeAspect="1"/>
           </p:cNvPicPr>
@@ -4811,7 +7542,7 @@
       </p:pic>
       <p:sp>
         <p:nvSpPr>
-          <p:cNvPr id="89" name=""/>
+          <p:cNvPr id="160" name=""/>
           <p:cNvSpPr/>
           <p:nvPr/>
         </p:nvSpPr>
@@ -4832,12 +7563,15 @@
         </p:spPr>
         <p:txBody>
           <a:bodyPr/>
-          <a:p/>
-        </p:txBody>
-      </p:sp>
-      <p:sp>
-        <p:nvSpPr>
-          <p:cNvPr id="90" name=""/>
+          <a:p>
+            <a:pPr/>
+            <a:endParaRPr/>
+          </a:p>
+        </p:txBody>
+      </p:sp>
+      <p:sp>
+        <p:nvSpPr>
+          <p:cNvPr id="161" name=""/>
           <p:cNvSpPr/>
           <p:nvPr/>
         </p:nvSpPr>
@@ -4858,12 +7592,15 @@
         </p:spPr>
         <p:txBody>
           <a:bodyPr/>
-          <a:p/>
-        </p:txBody>
-      </p:sp>
-      <p:sp>
-        <p:nvSpPr>
-          <p:cNvPr id="91" name="" descr="{&quot;isTemplate&quot;:true,&quot;type&quot;:&quot;text&quot;}"/>
+          <a:p>
+            <a:pPr/>
+            <a:endParaRPr/>
+          </a:p>
+        </p:txBody>
+      </p:sp>
+      <p:sp>
+        <p:nvSpPr>
+          <p:cNvPr id="162" name="" descr="{&quot;isTemplate&quot;:true,&quot;type&quot;:&quot;text&quot;}"/>
           <p:cNvSpPr txBox="1"/>
           <p:nvPr/>
         </p:nvSpPr>
@@ -4898,7 +7635,7 @@
       </p:sp>
       <p:sp>
         <p:nvSpPr>
-          <p:cNvPr id="92" name="" descr="{&quot;isTemplate&quot;:true,&quot;type&quot;:&quot;text&quot;}"/>
+          <p:cNvPr id="163" name="" descr="{&quot;isTemplate&quot;:true,&quot;type&quot;:&quot;text&quot;}"/>
           <p:cNvSpPr txBox="1"/>
           <p:nvPr/>
         </p:nvSpPr>
@@ -4953,7 +7690,7 @@
       </p:sp>
       <p:sp>
         <p:nvSpPr>
-          <p:cNvPr id="93" name="" descr="{&quot;isTemplate&quot;:true,&quot;type&quot;:&quot;text&quot;}"/>
+          <p:cNvPr id="164" name="" descr="{&quot;isTemplate&quot;:true,&quot;type&quot;:&quot;text&quot;}"/>
           <p:cNvSpPr txBox="1"/>
           <p:nvPr/>
         </p:nvSpPr>
@@ -5048,7 +7785,7 @@
       </p:sp>
       <p:sp>
         <p:nvSpPr>
-          <p:cNvPr id="94" name=""/>
+          <p:cNvPr id="165" name=""/>
           <p:cNvSpPr/>
           <p:nvPr/>
         </p:nvSpPr>
@@ -5074,12 +7811,15 @@
         </p:spPr>
         <p:txBody>
           <a:bodyPr/>
-          <a:p/>
-        </p:txBody>
-      </p:sp>
-      <p:sp>
-        <p:nvSpPr>
-          <p:cNvPr id="95" name="" descr="{&quot;isTemplate&quot;:true,&quot;type&quot;:&quot;text&quot;}"/>
+          <a:p>
+            <a:pPr/>
+            <a:endParaRPr/>
+          </a:p>
+        </p:txBody>
+      </p:sp>
+      <p:sp>
+        <p:nvSpPr>
+          <p:cNvPr id="166" name="" descr="{&quot;isTemplate&quot;:true,&quot;type&quot;:&quot;text&quot;}"/>
           <p:cNvSpPr txBox="1"/>
           <p:nvPr/>
         </p:nvSpPr>
@@ -5124,7 +7864,7 @@
       </p:sp>
       <p:sp>
         <p:nvSpPr>
-          <p:cNvPr id="96" name=""/>
+          <p:cNvPr id="167" name=""/>
           <p:cNvSpPr/>
           <p:nvPr/>
         </p:nvSpPr>
@@ -5145,12 +7885,15 @@
         </p:spPr>
         <p:txBody>
           <a:bodyPr/>
-          <a:p/>
-        </p:txBody>
-      </p:sp>
-      <p:sp>
-        <p:nvSpPr>
-          <p:cNvPr id="97" name="" descr="{&quot;isTemplate&quot;:true,&quot;type&quot;:&quot;text&quot;}"/>
+          <a:p>
+            <a:pPr/>
+            <a:endParaRPr/>
+          </a:p>
+        </p:txBody>
+      </p:sp>
+      <p:sp>
+        <p:nvSpPr>
+          <p:cNvPr id="168" name="" descr="{&quot;isTemplate&quot;:true,&quot;type&quot;:&quot;text&quot;}"/>
           <p:cNvSpPr txBox="1"/>
           <p:nvPr/>
         </p:nvSpPr>
@@ -5205,7 +7948,7 @@
       </p:sp>
       <p:sp>
         <p:nvSpPr>
-          <p:cNvPr id="98" name="" descr="{&quot;isTemplate&quot;:true,&quot;type&quot;:&quot;text&quot;}"/>
+          <p:cNvPr id="169" name="" descr="{&quot;isTemplate&quot;:true,&quot;type&quot;:&quot;text&quot;}"/>
           <p:cNvSpPr txBox="1"/>
           <p:nvPr/>
         </p:nvSpPr>
@@ -5262,7 +8005,7 @@
       </p:sp>
       <p:sp>
         <p:nvSpPr>
-          <p:cNvPr id="99" name=""/>
+          <p:cNvPr id="170" name=""/>
           <p:cNvSpPr/>
           <p:nvPr/>
         </p:nvSpPr>
@@ -5288,12 +8031,15 @@
         </p:spPr>
         <p:txBody>
           <a:bodyPr/>
-          <a:p/>
-        </p:txBody>
-      </p:sp>
-      <p:sp>
-        <p:nvSpPr>
-          <p:cNvPr id="100" name="" descr="{&quot;isTemplate&quot;:true,&quot;type&quot;:&quot;text&quot;}"/>
+          <a:p>
+            <a:pPr/>
+            <a:endParaRPr/>
+          </a:p>
+        </p:txBody>
+      </p:sp>
+      <p:sp>
+        <p:nvSpPr>
+          <p:cNvPr id="171" name="" descr="{&quot;isTemplate&quot;:true,&quot;type&quot;:&quot;text&quot;}"/>
           <p:cNvSpPr txBox="1"/>
           <p:nvPr/>
         </p:nvSpPr>
@@ -5338,7 +8084,7 @@
       </p:sp>
       <p:sp>
         <p:nvSpPr>
-          <p:cNvPr id="101" name=""/>
+          <p:cNvPr id="172" name=""/>
           <p:cNvSpPr/>
           <p:nvPr/>
         </p:nvSpPr>
@@ -5359,12 +8105,15 @@
         </p:spPr>
         <p:txBody>
           <a:bodyPr/>
-          <a:p/>
-        </p:txBody>
-      </p:sp>
-      <p:sp>
-        <p:nvSpPr>
-          <p:cNvPr id="102" name="" descr="{&quot;isTemplate&quot;:true,&quot;type&quot;:&quot;text&quot;}"/>
+          <a:p>
+            <a:pPr/>
+            <a:endParaRPr/>
+          </a:p>
+        </p:txBody>
+      </p:sp>
+      <p:sp>
+        <p:nvSpPr>
+          <p:cNvPr id="173" name="" descr="{&quot;isTemplate&quot;:true,&quot;type&quot;:&quot;text&quot;}"/>
           <p:cNvSpPr txBox="1"/>
           <p:nvPr/>
         </p:nvSpPr>
@@ -5419,7 +8168,7 @@
       </p:sp>
       <p:sp>
         <p:nvSpPr>
-          <p:cNvPr id="103" name="" descr="{&quot;isTemplate&quot;:true,&quot;type&quot;:&quot;text&quot;}"/>
+          <p:cNvPr id="174" name="" descr="{&quot;isTemplate&quot;:true,&quot;type&quot;:&quot;text&quot;}"/>
           <p:cNvSpPr txBox="1"/>
           <p:nvPr/>
         </p:nvSpPr>
@@ -5456,7 +8205,7 @@
       </p:sp>
       <p:sp>
         <p:nvSpPr>
-          <p:cNvPr id="104" name=""/>
+          <p:cNvPr id="175" name=""/>
           <p:cNvSpPr/>
           <p:nvPr/>
         </p:nvSpPr>
@@ -5482,12 +8231,15 @@
         </p:spPr>
         <p:txBody>
           <a:bodyPr/>
-          <a:p/>
-        </p:txBody>
-      </p:sp>
-      <p:sp>
-        <p:nvSpPr>
-          <p:cNvPr id="105" name="" descr="{&quot;isTemplate&quot;:true,&quot;type&quot;:&quot;text&quot;}"/>
+          <a:p>
+            <a:pPr/>
+            <a:endParaRPr/>
+          </a:p>
+        </p:txBody>
+      </p:sp>
+      <p:sp>
+        <p:nvSpPr>
+          <p:cNvPr id="176" name="" descr="{&quot;isTemplate&quot;:true,&quot;type&quot;:&quot;text&quot;}"/>
           <p:cNvSpPr txBox="1"/>
           <p:nvPr/>
         </p:nvSpPr>
@@ -5532,7 +8284,7 @@
       </p:sp>
       <p:sp>
         <p:nvSpPr>
-          <p:cNvPr id="106" name=""/>
+          <p:cNvPr id="177" name=""/>
           <p:cNvSpPr/>
           <p:nvPr/>
         </p:nvSpPr>
@@ -5553,12 +8305,15 @@
         </p:spPr>
         <p:txBody>
           <a:bodyPr/>
-          <a:p/>
-        </p:txBody>
-      </p:sp>
-      <p:sp>
-        <p:nvSpPr>
-          <p:cNvPr id="107" name="" descr="{&quot;isTemplate&quot;:true,&quot;type&quot;:&quot;text&quot;}"/>
+          <a:p>
+            <a:pPr/>
+            <a:endParaRPr/>
+          </a:p>
+        </p:txBody>
+      </p:sp>
+      <p:sp>
+        <p:nvSpPr>
+          <p:cNvPr id="178" name="" descr="{&quot;isTemplate&quot;:true,&quot;type&quot;:&quot;text&quot;}"/>
           <p:cNvSpPr txBox="1"/>
           <p:nvPr/>
         </p:nvSpPr>
@@ -5613,7 +8368,7 @@
       </p:sp>
       <p:sp>
         <p:nvSpPr>
-          <p:cNvPr id="108" name="" descr="{&quot;isTemplate&quot;:true,&quot;type&quot;:&quot;text&quot;}"/>
+          <p:cNvPr id="179" name="" descr="{&quot;isTemplate&quot;:true,&quot;type&quot;:&quot;text&quot;}"/>
           <p:cNvSpPr txBox="1"/>
           <p:nvPr/>
         </p:nvSpPr>
@@ -5648,7 +8403,7 @@
       </p:sp>
       <p:sp>
         <p:nvSpPr>
-          <p:cNvPr id="109" name="" descr="{&quot;isTemplate&quot;:true,&quot;type&quot;:&quot;text&quot;}"/>
+          <p:cNvPr id="180" name="" descr="{&quot;isTemplate&quot;:true,&quot;type&quot;:&quot;text&quot;}"/>
           <p:cNvSpPr txBox="1"/>
           <p:nvPr/>
         </p:nvSpPr>
@@ -5683,7 +8438,7 @@
       </p:sp>
       <p:sp>
         <p:nvSpPr>
-          <p:cNvPr id="110" name="" descr="{&quot;isTemplate&quot;:true,&quot;type&quot;:&quot;text&quot;}"/>
+          <p:cNvPr id="181" name="" descr="{&quot;isTemplate&quot;:true,&quot;type&quot;:&quot;text&quot;}"/>
           <p:cNvSpPr txBox="1"/>
           <p:nvPr/>
         </p:nvSpPr>
@@ -5710,7 +8465,7 @@
                 <a:latin typeface="Microsoft YaHei"/>
                 <a:ea typeface="Microsoft YaHei"/>
               </a:rPr>
-              <a:t>13 / 15</a:t>
+              <a:t>15 / 17</a:t>
             </a:r>
             <a:endParaRPr/>
           </a:p>
@@ -5721,12 +8476,12 @@
 </p:sld>
 </file>
 
-<file path=ppt/slides/slide14.xml><?xml version="1.0" encoding="utf-8"?>
+<file path=ppt/slides/slide16.xml><?xml version="1.0" encoding="utf-8"?>
 <p:sld xmlns:p="http://schemas.openxmlformats.org/presentationml/2006/main" xmlns:a="http://schemas.openxmlformats.org/drawingml/2006/main">
   <p:cSld>
     <p:spTree>
       <p:nvGrpSpPr>
-        <p:cNvPr id="111" name="" descr="&lt;Slide&gt;&#10;  &lt;Box style={{ width: '1280px', height: '720px', background: '#FFFFFF', flexDirection: 'row', alignItems: 'center' }}&gt;&#10;    {/* 左侧大数字 */}&#10;    &lt;Box style={{ width: 360, height: 720, background: '#F0F5FC', alignItems: 'center', justifyContent: 'center', flexDirection: 'column', gap: 20 }}&gt;&#10;      &lt;Text style={{ color: '#8B97A8', fontSize: 18, letterSpacing: 4 }}&gt;CHAPTER&lt;/Text&gt;&#10;      &lt;Text style={{ color: '#0E3F8C', fontSize: 200, fontWeight: 'bold', lineHeight: 1 }}&gt;04&lt;/Text&gt;&#10;      &lt;Text style={{ color: '#8B97A8', fontSize: 16, letterSpacing: 2 }}&gt;预期成果 · 交付物&lt;/Text&gt;&#10;    &lt;/Box&gt;&#10;&#10;    {/* 右侧标题与要点 */}&#10;    &lt;Box style={{ flex: 1, height: 720, flexDirection: 'column', justifyContent: 'space-between', paddingTop: 48, paddingBottom: 48, paddingLeft: 72, paddingRight: 60 }}&gt;&#10;      &lt;Box style={{ flexDirection: 'column', gap: 14 }}&gt;&#10;        &lt;Box style={{ width: 48, height: 4, background: '#3D7BD9', borderRadius: 2 }} /&gt;&#10;        &lt;Text style={{ color: '#1A2230', fontSize: 44, fontWeight: 'bold' }}&gt;预期成果&lt;/Text&gt;&#10;        &lt;Text style={{ color: '#8B97A8', fontSize: 19, letterSpacing: 1 }}&gt;五项可验收成果&lt;/Text&gt;&#10;      &lt;/Box&gt;&#10;&#10;      &lt;Box style={{ flexDirection: 'column', gap: 12 }}&gt;&#10;        {[&#10;          { n: '1', t: '可运行系统', d: '覆盖解析、混合检索、重排、多轮对话、引用溯源，提供 Web 界面' },&#10;          { n: '2', t: '结构化加工指令', d: '参数忠实于资料、可定位原文页码，支持资料不足时的安全提示' },&#10;          { n: '3', t: '源码与工程文档', d: '代码托管 GitHub，模块结构清晰、附使用说明' },&#10;          { n: '4', t: '评估报告', d: '多文档测试问题集、人工评估结果、检索策略对比实验' },&#10;          { n: '5', t: '结题与技术报告', d: '总结系统设计、关键技术与改进方向' },&#10;        ].map((item) =&gt; (&#10;          &lt;Box key={item.n} style={{ flexDirection: 'row', alignItems: 'center', gap: 14, padding: 13, background: '#F7F9FC', borderRadius: 10, border: '1px solid #E5E7EB' }}&gt;&#10;            &lt;Box style={{ width: 32, height: 32, background: '#1E4FA8', borderRadius: 8, alignItems: 'center', justifyContent: 'center' }}&gt;&#10;              &lt;Text style={{ color: '#FFFFFF', fontSize: 16, fontWeight: 'bold' }}&gt;{item.n}&lt;/Text&gt;&#10;            &lt;/Box&gt;&#10;            &lt;Box style={{ flex: 1, flexDirection: 'column', gap: 3 }}&gt;&#10;              &lt;Text style={{ color: '#1A2230', fontSize: 19, fontWeight: 'bold' }}&gt;{item.t}&lt;/Text&gt;&#10;              &lt;Text style={{ color: '#4A5568', fontSize: 15, lineHeight: 1.45 }}&gt;{item.d}&lt;/Text&gt;&#10;            &lt;/Box&gt;&#10;          &lt;/Box&gt;&#10;        ))}&#10;      &lt;/Box&gt;&#10;&#10;      &lt;Box style={{ flexDirection: 'row', alignItems: 'center', gap: 12, padding: 14, background: '#0E3F8C', borderRadius: 8 }}&gt;&#10;        &lt;Box style={{ width: 8, height: 8, background: '#3D7BD9', borderRadius: 4 }} /&gt;&#10;        &lt;Text style={{ color: '#FFFFFF', fontSize: 16, fontWeight: 'bold' }}&gt;覆盖选题五条要求的完整闭环，成果可演示、可验收&lt;/Text&gt;&#10;      &lt;/Box&gt;&#10;    &lt;/Box&gt;&#10;  &lt;/Box&gt;&#10;&lt;/Slide&gt;&#10;"/>
+        <p:cNvPr id="182" name=""/>
         <p:cNvGrpSpPr/>
         <p:nvPr/>
       </p:nvGrpSpPr>
@@ -5740,7 +8495,7 @@
       </p:grpSpPr>
       <p:sp>
         <p:nvSpPr>
-          <p:cNvPr id="112" name=""/>
+          <p:cNvPr id="183" name=""/>
           <p:cNvSpPr/>
           <p:nvPr/>
         </p:nvSpPr>
@@ -5759,12 +8514,15 @@
         </p:spPr>
         <p:txBody>
           <a:bodyPr/>
-          <a:p/>
-        </p:txBody>
-      </p:sp>
-      <p:sp>
-        <p:nvSpPr>
-          <p:cNvPr id="113" name=""/>
+          <a:p>
+            <a:pPr/>
+            <a:endParaRPr/>
+          </a:p>
+        </p:txBody>
+      </p:sp>
+      <p:sp>
+        <p:nvSpPr>
+          <p:cNvPr id="184" name=""/>
           <p:cNvSpPr/>
           <p:nvPr/>
         </p:nvSpPr>
@@ -5783,12 +8541,15 @@
         </p:spPr>
         <p:txBody>
           <a:bodyPr/>
-          <a:p/>
-        </p:txBody>
-      </p:sp>
-      <p:sp>
-        <p:nvSpPr>
-          <p:cNvPr id="114" name="" descr="{&quot;isTemplate&quot;:true,&quot;type&quot;:&quot;text&quot;}"/>
+          <a:p>
+            <a:pPr/>
+            <a:endParaRPr/>
+          </a:p>
+        </p:txBody>
+      </p:sp>
+      <p:sp>
+        <p:nvSpPr>
+          <p:cNvPr id="185" name="" descr="{&quot;isTemplate&quot;:true,&quot;type&quot;:&quot;text&quot;}"/>
           <p:cNvSpPr txBox="1"/>
           <p:nvPr/>
         </p:nvSpPr>
@@ -5823,7 +8584,7 @@
       </p:sp>
       <p:sp>
         <p:nvSpPr>
-          <p:cNvPr id="115" name="" descr="{&quot;isTemplate&quot;:true,&quot;type&quot;:&quot;text&quot;}"/>
+          <p:cNvPr id="186" name="" descr="{&quot;isTemplate&quot;:true,&quot;type&quot;:&quot;text&quot;}"/>
           <p:cNvSpPr txBox="1"/>
           <p:nvPr/>
         </p:nvSpPr>
@@ -5858,7 +8619,7 @@
       </p:sp>
       <p:sp>
         <p:nvSpPr>
-          <p:cNvPr id="116" name="" descr="{&quot;isTemplate&quot;:true,&quot;type&quot;:&quot;text&quot;}"/>
+          <p:cNvPr id="187" name="" descr="{&quot;isTemplate&quot;:true,&quot;type&quot;:&quot;text&quot;}"/>
           <p:cNvSpPr txBox="1"/>
           <p:nvPr/>
         </p:nvSpPr>
@@ -5913,7 +8674,7 @@
       </p:sp>
       <p:sp>
         <p:nvSpPr>
-          <p:cNvPr id="117" name=""/>
+          <p:cNvPr id="188" name=""/>
           <p:cNvSpPr/>
           <p:nvPr/>
         </p:nvSpPr>
@@ -5934,12 +8695,15 @@
         </p:spPr>
         <p:txBody>
           <a:bodyPr/>
-          <a:p/>
-        </p:txBody>
-      </p:sp>
-      <p:sp>
-        <p:nvSpPr>
-          <p:cNvPr id="118" name="" descr="{&quot;isTemplate&quot;:true,&quot;type&quot;:&quot;text&quot;}"/>
+          <a:p>
+            <a:pPr/>
+            <a:endParaRPr/>
+          </a:p>
+        </p:txBody>
+      </p:sp>
+      <p:sp>
+        <p:nvSpPr>
+          <p:cNvPr id="189" name="" descr="{&quot;isTemplate&quot;:true,&quot;type&quot;:&quot;text&quot;}"/>
           <p:cNvSpPr txBox="1"/>
           <p:nvPr/>
         </p:nvSpPr>
@@ -5974,7 +8738,7 @@
       </p:sp>
       <p:sp>
         <p:nvSpPr>
-          <p:cNvPr id="119" name="" descr="{&quot;isTemplate&quot;:true,&quot;type&quot;:&quot;text&quot;}"/>
+          <p:cNvPr id="190" name="" descr="{&quot;isTemplate&quot;:true,&quot;type&quot;:&quot;text&quot;}"/>
           <p:cNvSpPr txBox="1"/>
           <p:nvPr/>
         </p:nvSpPr>
@@ -6009,7 +8773,7 @@
       </p:sp>
       <p:sp>
         <p:nvSpPr>
-          <p:cNvPr id="120" name=""/>
+          <p:cNvPr id="191" name=""/>
           <p:cNvSpPr/>
           <p:nvPr/>
         </p:nvSpPr>
@@ -6035,12 +8799,15 @@
         </p:spPr>
         <p:txBody>
           <a:bodyPr/>
-          <a:p/>
-        </p:txBody>
-      </p:sp>
-      <p:sp>
-        <p:nvSpPr>
-          <p:cNvPr id="121" name=""/>
+          <a:p>
+            <a:pPr/>
+            <a:endParaRPr/>
+          </a:p>
+        </p:txBody>
+      </p:sp>
+      <p:sp>
+        <p:nvSpPr>
+          <p:cNvPr id="192" name=""/>
           <p:cNvSpPr/>
           <p:nvPr/>
         </p:nvSpPr>
@@ -6061,12 +8828,15 @@
         </p:spPr>
         <p:txBody>
           <a:bodyPr/>
-          <a:p/>
-        </p:txBody>
-      </p:sp>
-      <p:sp>
-        <p:nvSpPr>
-          <p:cNvPr id="122" name="" descr="{&quot;isTemplate&quot;:true,&quot;type&quot;:&quot;text&quot;}"/>
+          <a:p>
+            <a:pPr/>
+            <a:endParaRPr/>
+          </a:p>
+        </p:txBody>
+      </p:sp>
+      <p:sp>
+        <p:nvSpPr>
+          <p:cNvPr id="193" name="" descr="{&quot;isTemplate&quot;:true,&quot;type&quot;:&quot;text&quot;}"/>
           <p:cNvSpPr txBox="1"/>
           <p:nvPr/>
         </p:nvSpPr>
@@ -6101,7 +8871,7 @@
       </p:sp>
       <p:sp>
         <p:nvSpPr>
-          <p:cNvPr id="123" name="" descr="{&quot;isTemplate&quot;:true,&quot;type&quot;:&quot;text&quot;}"/>
+          <p:cNvPr id="194" name="" descr="{&quot;isTemplate&quot;:true,&quot;type&quot;:&quot;text&quot;}"/>
           <p:cNvSpPr txBox="1"/>
           <p:nvPr/>
         </p:nvSpPr>
@@ -6136,7 +8906,7 @@
       </p:sp>
       <p:sp>
         <p:nvSpPr>
-          <p:cNvPr id="124" name="" descr="{&quot;isTemplate&quot;:true,&quot;type&quot;:&quot;text&quot;}"/>
+          <p:cNvPr id="195" name="" descr="{&quot;isTemplate&quot;:true,&quot;type&quot;:&quot;text&quot;}"/>
           <p:cNvSpPr txBox="1"/>
           <p:nvPr/>
         </p:nvSpPr>
@@ -6191,7 +8961,7 @@
       </p:sp>
       <p:sp>
         <p:nvSpPr>
-          <p:cNvPr id="125" name=""/>
+          <p:cNvPr id="196" name=""/>
           <p:cNvSpPr/>
           <p:nvPr/>
         </p:nvSpPr>
@@ -6217,12 +8987,15 @@
         </p:spPr>
         <p:txBody>
           <a:bodyPr/>
-          <a:p/>
-        </p:txBody>
-      </p:sp>
-      <p:sp>
-        <p:nvSpPr>
-          <p:cNvPr id="126" name=""/>
+          <a:p>
+            <a:pPr/>
+            <a:endParaRPr/>
+          </a:p>
+        </p:txBody>
+      </p:sp>
+      <p:sp>
+        <p:nvSpPr>
+          <p:cNvPr id="197" name=""/>
           <p:cNvSpPr/>
           <p:nvPr/>
         </p:nvSpPr>
@@ -6243,12 +9016,15 @@
         </p:spPr>
         <p:txBody>
           <a:bodyPr/>
-          <a:p/>
-        </p:txBody>
-      </p:sp>
-      <p:sp>
-        <p:nvSpPr>
-          <p:cNvPr id="127" name="" descr="{&quot;isTemplate&quot;:true,&quot;type&quot;:&quot;text&quot;}"/>
+          <a:p>
+            <a:pPr/>
+            <a:endParaRPr/>
+          </a:p>
+        </p:txBody>
+      </p:sp>
+      <p:sp>
+        <p:nvSpPr>
+          <p:cNvPr id="198" name="" descr="{&quot;isTemplate&quot;:true,&quot;type&quot;:&quot;text&quot;}"/>
           <p:cNvSpPr txBox="1"/>
           <p:nvPr/>
         </p:nvSpPr>
@@ -6283,7 +9059,7 @@
       </p:sp>
       <p:sp>
         <p:nvSpPr>
-          <p:cNvPr id="128" name="" descr="{&quot;isTemplate&quot;:true,&quot;type&quot;:&quot;text&quot;}"/>
+          <p:cNvPr id="199" name="" descr="{&quot;isTemplate&quot;:true,&quot;type&quot;:&quot;text&quot;}"/>
           <p:cNvSpPr txBox="1"/>
           <p:nvPr/>
         </p:nvSpPr>
@@ -6318,7 +9094,7 @@
       </p:sp>
       <p:sp>
         <p:nvSpPr>
-          <p:cNvPr id="129" name="" descr="{&quot;isTemplate&quot;:true,&quot;type&quot;:&quot;text&quot;}"/>
+          <p:cNvPr id="200" name="" descr="{&quot;isTemplate&quot;:true,&quot;type&quot;:&quot;text&quot;}"/>
           <p:cNvSpPr txBox="1"/>
           <p:nvPr/>
         </p:nvSpPr>
@@ -6353,7 +9129,7 @@
       </p:sp>
       <p:sp>
         <p:nvSpPr>
-          <p:cNvPr id="130" name=""/>
+          <p:cNvPr id="201" name=""/>
           <p:cNvSpPr/>
           <p:nvPr/>
         </p:nvSpPr>
@@ -6379,12 +9155,15 @@
         </p:spPr>
         <p:txBody>
           <a:bodyPr/>
-          <a:p/>
-        </p:txBody>
-      </p:sp>
-      <p:sp>
-        <p:nvSpPr>
-          <p:cNvPr id="131" name=""/>
+          <a:p>
+            <a:pPr/>
+            <a:endParaRPr/>
+          </a:p>
+        </p:txBody>
+      </p:sp>
+      <p:sp>
+        <p:nvSpPr>
+          <p:cNvPr id="202" name=""/>
           <p:cNvSpPr/>
           <p:nvPr/>
         </p:nvSpPr>
@@ -6405,12 +9184,15 @@
         </p:spPr>
         <p:txBody>
           <a:bodyPr/>
-          <a:p/>
-        </p:txBody>
-      </p:sp>
-      <p:sp>
-        <p:nvSpPr>
-          <p:cNvPr id="132" name="" descr="{&quot;isTemplate&quot;:true,&quot;type&quot;:&quot;text&quot;}"/>
+          <a:p>
+            <a:pPr/>
+            <a:endParaRPr/>
+          </a:p>
+        </p:txBody>
+      </p:sp>
+      <p:sp>
+        <p:nvSpPr>
+          <p:cNvPr id="203" name="" descr="{&quot;isTemplate&quot;:true,&quot;type&quot;:&quot;text&quot;}"/>
           <p:cNvSpPr txBox="1"/>
           <p:nvPr/>
         </p:nvSpPr>
@@ -6445,7 +9227,7 @@
       </p:sp>
       <p:sp>
         <p:nvSpPr>
-          <p:cNvPr id="133" name="" descr="{&quot;isTemplate&quot;:true,&quot;type&quot;:&quot;text&quot;}"/>
+          <p:cNvPr id="204" name="" descr="{&quot;isTemplate&quot;:true,&quot;type&quot;:&quot;text&quot;}"/>
           <p:cNvSpPr txBox="1"/>
           <p:nvPr/>
         </p:nvSpPr>
@@ -6480,7 +9262,7 @@
       </p:sp>
       <p:sp>
         <p:nvSpPr>
-          <p:cNvPr id="134" name="" descr="{&quot;isTemplate&quot;:true,&quot;type&quot;:&quot;text&quot;}"/>
+          <p:cNvPr id="205" name="" descr="{&quot;isTemplate&quot;:true,&quot;type&quot;:&quot;text&quot;}"/>
           <p:cNvSpPr txBox="1"/>
           <p:nvPr/>
         </p:nvSpPr>
@@ -6535,7 +9317,7 @@
       </p:sp>
       <p:sp>
         <p:nvSpPr>
-          <p:cNvPr id="135" name=""/>
+          <p:cNvPr id="206" name=""/>
           <p:cNvSpPr/>
           <p:nvPr/>
         </p:nvSpPr>
@@ -6561,12 +9343,15 @@
         </p:spPr>
         <p:txBody>
           <a:bodyPr/>
-          <a:p/>
-        </p:txBody>
-      </p:sp>
-      <p:sp>
-        <p:nvSpPr>
-          <p:cNvPr id="136" name=""/>
+          <a:p>
+            <a:pPr/>
+            <a:endParaRPr/>
+          </a:p>
+        </p:txBody>
+      </p:sp>
+      <p:sp>
+        <p:nvSpPr>
+          <p:cNvPr id="207" name=""/>
           <p:cNvSpPr/>
           <p:nvPr/>
         </p:nvSpPr>
@@ -6587,12 +9372,15 @@
         </p:spPr>
         <p:txBody>
           <a:bodyPr/>
-          <a:p/>
-        </p:txBody>
-      </p:sp>
-      <p:sp>
-        <p:nvSpPr>
-          <p:cNvPr id="137" name="" descr="{&quot;isTemplate&quot;:true,&quot;type&quot;:&quot;text&quot;}"/>
+          <a:p>
+            <a:pPr/>
+            <a:endParaRPr/>
+          </a:p>
+        </p:txBody>
+      </p:sp>
+      <p:sp>
+        <p:nvSpPr>
+          <p:cNvPr id="208" name="" descr="{&quot;isTemplate&quot;:true,&quot;type&quot;:&quot;text&quot;}"/>
           <p:cNvSpPr txBox="1"/>
           <p:nvPr/>
         </p:nvSpPr>
@@ -6627,7 +9415,7 @@
       </p:sp>
       <p:sp>
         <p:nvSpPr>
-          <p:cNvPr id="138" name="" descr="{&quot;isTemplate&quot;:true,&quot;type&quot;:&quot;text&quot;}"/>
+          <p:cNvPr id="209" name="" descr="{&quot;isTemplate&quot;:true,&quot;type&quot;:&quot;text&quot;}"/>
           <p:cNvSpPr txBox="1"/>
           <p:nvPr/>
         </p:nvSpPr>
@@ -6662,7 +9450,7 @@
       </p:sp>
       <p:sp>
         <p:nvSpPr>
-          <p:cNvPr id="139" name="" descr="{&quot;isTemplate&quot;:true,&quot;type&quot;:&quot;text&quot;}"/>
+          <p:cNvPr id="210" name="" descr="{&quot;isTemplate&quot;:true,&quot;type&quot;:&quot;text&quot;}"/>
           <p:cNvSpPr txBox="1"/>
           <p:nvPr/>
         </p:nvSpPr>
@@ -6697,7 +9485,7 @@
       </p:sp>
       <p:sp>
         <p:nvSpPr>
-          <p:cNvPr id="140" name=""/>
+          <p:cNvPr id="211" name=""/>
           <p:cNvSpPr/>
           <p:nvPr/>
         </p:nvSpPr>
@@ -6723,12 +9511,15 @@
         </p:spPr>
         <p:txBody>
           <a:bodyPr/>
-          <a:p/>
-        </p:txBody>
-      </p:sp>
-      <p:sp>
-        <p:nvSpPr>
-          <p:cNvPr id="141" name=""/>
+          <a:p>
+            <a:pPr/>
+            <a:endParaRPr/>
+          </a:p>
+        </p:txBody>
+      </p:sp>
+      <p:sp>
+        <p:nvSpPr>
+          <p:cNvPr id="212" name=""/>
           <p:cNvSpPr/>
           <p:nvPr/>
         </p:nvSpPr>
@@ -6749,12 +9540,15 @@
         </p:spPr>
         <p:txBody>
           <a:bodyPr/>
-          <a:p/>
-        </p:txBody>
-      </p:sp>
-      <p:sp>
-        <p:nvSpPr>
-          <p:cNvPr id="142" name="" descr="{&quot;isTemplate&quot;:true,&quot;type&quot;:&quot;text&quot;}"/>
+          <a:p>
+            <a:pPr/>
+            <a:endParaRPr/>
+          </a:p>
+        </p:txBody>
+      </p:sp>
+      <p:sp>
+        <p:nvSpPr>
+          <p:cNvPr id="213" name="" descr="{&quot;isTemplate&quot;:true,&quot;type&quot;:&quot;text&quot;}"/>
           <p:cNvSpPr txBox="1"/>
           <p:nvPr/>
         </p:nvSpPr>
@@ -6789,7 +9583,7 @@
       </p:sp>
       <p:sp>
         <p:nvSpPr>
-          <p:cNvPr id="143" name="" descr="{&quot;isTemplate&quot;:true,&quot;type&quot;:&quot;text&quot;}"/>
+          <p:cNvPr id="214" name="" descr="{&quot;isTemplate&quot;:true,&quot;type&quot;:&quot;text&quot;}"/>
           <p:cNvSpPr txBox="1"/>
           <p:nvPr/>
         </p:nvSpPr>
@@ -6824,7 +9618,7 @@
       </p:sp>
       <p:sp>
         <p:nvSpPr>
-          <p:cNvPr id="144" name="" descr="{&quot;isTemplate&quot;:true,&quot;type&quot;:&quot;text&quot;}"/>
+          <p:cNvPr id="215" name="" descr="{&quot;isTemplate&quot;:true,&quot;type&quot;:&quot;text&quot;}"/>
           <p:cNvSpPr txBox="1"/>
           <p:nvPr/>
         </p:nvSpPr>
@@ -6859,7 +9653,7 @@
       </p:sp>
       <p:sp>
         <p:nvSpPr>
-          <p:cNvPr id="145" name=""/>
+          <p:cNvPr id="216" name=""/>
           <p:cNvSpPr/>
           <p:nvPr/>
         </p:nvSpPr>
@@ -6880,12 +9674,15 @@
         </p:spPr>
         <p:txBody>
           <a:bodyPr/>
-          <a:p/>
-        </p:txBody>
-      </p:sp>
-      <p:sp>
-        <p:nvSpPr>
-          <p:cNvPr id="146" name=""/>
+          <a:p>
+            <a:pPr/>
+            <a:endParaRPr/>
+          </a:p>
+        </p:txBody>
+      </p:sp>
+      <p:sp>
+        <p:nvSpPr>
+          <p:cNvPr id="217" name=""/>
           <p:cNvSpPr/>
           <p:nvPr/>
         </p:nvSpPr>
@@ -6906,12 +9703,15 @@
         </p:spPr>
         <p:txBody>
           <a:bodyPr/>
-          <a:p/>
-        </p:txBody>
-      </p:sp>
-      <p:sp>
-        <p:nvSpPr>
-          <p:cNvPr id="147" name="" descr="{&quot;isTemplate&quot;:true,&quot;type&quot;:&quot;text&quot;}"/>
+          <a:p>
+            <a:pPr/>
+            <a:endParaRPr/>
+          </a:p>
+        </p:txBody>
+      </p:sp>
+      <p:sp>
+        <p:nvSpPr>
+          <p:cNvPr id="218" name="" descr="{&quot;isTemplate&quot;:true,&quot;type&quot;:&quot;text&quot;}"/>
           <p:cNvSpPr txBox="1"/>
           <p:nvPr/>
         </p:nvSpPr>
@@ -6949,12 +9749,12 @@
 </p:sld>
 </file>
 
-<file path=ppt/slides/slide15.xml><?xml version="1.0" encoding="utf-8"?>
+<file path=ppt/slides/slide17.xml><?xml version="1.0" encoding="utf-8"?>
 <p:sld xmlns:p="http://schemas.openxmlformats.org/presentationml/2006/main" xmlns:a="http://schemas.openxmlformats.org/drawingml/2006/main" xmlns:asvg="http://schemas.microsoft.com/office/drawing/2016/SVG/main" xmlns:r="http://schemas.openxmlformats.org/officeDocument/2006/relationships" xmlns:mc="http://schemas.openxmlformats.org/markup-compatibility/2006" mc:Ignorable="asvg">
   <p:cSld>
     <p:spTree>
       <p:nvGrpSpPr>
-        <p:cNvPr id="148" name="" descr="&lt;Slide&gt;&#10;  &lt;Box style={{ width: '1280px', height: '720px', background: '#0E3F8C', position: 'relative', overflow: 'hidden', alignItems: 'center', justifyContent: 'center' }}&gt;&#10;    {/* 背景装饰节点线稿 */}&#10;    &lt;Box style={{ position: 'absolute', top: 0, left: 0, width: 1280, height: 720, opacity: 0.10 }}&gt;&#10;      &lt;svg width={1280} height={720} viewBox='0 0 1280 720'&gt;&#10;        &lt;g stroke='#FFFFFF' strokeWidth='1.5' fill='none'&gt;&#10;          &lt;circle cx='150' cy='180' r='50' /&gt;&#10;          &lt;circle cx='480' cy='120' r='65' /&gt;&#10;          &lt;circle cx='820' cy='220' r='45' /&gt;&#10;          &lt;circle cx='1080' cy='150' r='55' /&gt;&#10;          &lt;circle cx='250' cy='520' r='60' /&gt;&#10;          &lt;circle cx='620' cy='580' r='50' /&gt;&#10;          &lt;circle cx='980' cy='520' r='65' /&gt;&#10;          &lt;path d='M150 180 L480 120 L820 220 L1080 150' /&gt;&#10;          &lt;path d='M480 120 L620 580 L250 520 Z' /&gt;&#10;          &lt;path d='M820 220 L980 520 L620 580' /&gt;&#10;          &lt;path d='M150 180 L250 520 M1080 150 L980 520' /&gt;&#10;        &lt;/g&gt;&#10;        &lt;g fill='#FFFFFF'&gt;&#10;          &lt;circle cx='150' cy='180' r='5' /&gt;&#10;          &lt;circle cx='480' cy='120' r='6' /&gt;&#10;          &lt;circle cx='820' cy='220' r='4' /&gt;&#10;          &lt;circle cx='1080' cy='150' r='5' /&gt;&#10;          &lt;circle cx='250' cy='520' r='5' /&gt;&#10;          &lt;circle cx='620' cy='580' r='4' /&gt;&#10;          &lt;circle cx='980' cy='520' r='6' /&gt;&#10;        &lt;/g&gt;&#10;      &lt;/svg&gt;&#10;    &lt;/Box&gt;&#10;&#10;    {/* 顶部信息 */}&#10;    &lt;Box style={{ position: 'absolute', top: 48, left: 0, right: 0, alignItems: 'center' }}&gt;&#10;      &lt;Text style={{ color: '#8FB3E8', fontSize: 16, letterSpacing: 2 }}&gt;中国科学技术大学软件学院 · 软件工程实践&lt;/Text&gt;&#10;    &lt;/Box&gt;&#10;&#10;    {/* 中央内容 */}&#10;    &lt;Box style={{ flexDirection: 'column', alignItems: 'center', gap: 32 }}&gt;&#10;      &lt;Box style={{ width: 78, height: 4, background: '#3D7BD9', borderRadius: 2 }} /&gt;&#10;      &lt;Text style={{ color: '#FFFFFF', fontSize: 64, fontWeight: 'bold', letterSpacing: 4 }}&gt;感谢聆听&lt;/Text&gt;&#10;      &lt;Text style={{ color: '#8FB3E8', fontSize: 24, letterSpacing: 2 }}&gt;恳请各位老师批评指正&lt;/Text&gt;&#10;      &lt;Box style={{ flexDirection: 'row', alignItems: 'center', gap: 24, marginTop: 16 }}&gt;&#10;        &lt;Text style={{ color: '#D6E4F7', fontSize: 18 }}&gt;熊佳昀 · 齐梦伟 · 张承伟 · 资唯&lt;/Text&gt;&#10;        &lt;Box style={{ width: 1, height: 20, background: 'rgba(255,255,255,0.3)' }} /&gt;&#10;        &lt;Text style={{ color: '#D6E4F7', fontSize: 18 }}&gt;指导教师 丁箐&lt;/Text&gt;&#10;      &lt;/Box&gt;&#10;    &lt;/Box&gt;&#10;&#10;    {/* 底部单位信息 */}&#10;    &lt;Box style={{ position: 'absolute', bottom: 48, left: 0, right: 0, alignItems: 'center' }}&gt;&#10;      &lt;Text style={{ color: '#8FB3E8', fontSize: 16, letterSpacing: 2 }}&gt;2026 年 10 月 · 开题答辩&lt;/Text&gt;&#10;    &lt;/Box&gt;&#10;  &lt;/Box&gt;&#10;&lt;/Slide&gt;&#10;"/>
+        <p:cNvPr id="219" name=""/>
         <p:cNvGrpSpPr/>
         <p:nvPr/>
       </p:nvGrpSpPr>
@@ -6968,7 +9768,7 @@
       </p:grpSpPr>
       <p:sp>
         <p:nvSpPr>
-          <p:cNvPr id="149" name=""/>
+          <p:cNvPr id="220" name=""/>
           <p:cNvSpPr/>
           <p:nvPr/>
         </p:nvSpPr>
@@ -6987,12 +9787,15 @@
         </p:spPr>
         <p:txBody>
           <a:bodyPr/>
-          <a:p/>
-        </p:txBody>
-      </p:sp>
-      <p:sp>
-        <p:nvSpPr>
-          <p:cNvPr id="150" name=""/>
+          <a:p>
+            <a:pPr/>
+            <a:endParaRPr/>
+          </a:p>
+        </p:txBody>
+      </p:sp>
+      <p:sp>
+        <p:nvSpPr>
+          <p:cNvPr id="221" name=""/>
           <p:cNvSpPr/>
           <p:nvPr/>
         </p:nvSpPr>
@@ -7013,12 +9816,15 @@
         </p:spPr>
         <p:txBody>
           <a:bodyPr/>
-          <a:p/>
-        </p:txBody>
-      </p:sp>
-      <p:sp>
-        <p:nvSpPr>
-          <p:cNvPr id="151" name="" descr="{&quot;isTemplate&quot;:true,&quot;type&quot;:&quot;text&quot;}"/>
+          <a:p>
+            <a:pPr/>
+            <a:endParaRPr/>
+          </a:p>
+        </p:txBody>
+      </p:sp>
+      <p:sp>
+        <p:nvSpPr>
+          <p:cNvPr id="222" name="" descr="{&quot;isTemplate&quot;:true,&quot;type&quot;:&quot;text&quot;}"/>
           <p:cNvSpPr txBox="1"/>
           <p:nvPr/>
         </p:nvSpPr>
@@ -7053,7 +9859,7 @@
       </p:sp>
       <p:sp>
         <p:nvSpPr>
-          <p:cNvPr id="152" name="" descr="{&quot;isTemplate&quot;:true,&quot;type&quot;:&quot;text&quot;}"/>
+          <p:cNvPr id="223" name="" descr="{&quot;isTemplate&quot;:true,&quot;type&quot;:&quot;text&quot;}"/>
           <p:cNvSpPr txBox="1"/>
           <p:nvPr/>
         </p:nvSpPr>
@@ -7088,7 +9894,7 @@
       </p:sp>
       <p:sp>
         <p:nvSpPr>
-          <p:cNvPr id="153" name="" descr="{&quot;isTemplate&quot;:true,&quot;type&quot;:&quot;text&quot;}"/>
+          <p:cNvPr id="224" name="" descr="{&quot;isTemplate&quot;:true,&quot;type&quot;:&quot;text&quot;}"/>
           <p:cNvSpPr txBox="1"/>
           <p:nvPr/>
         </p:nvSpPr>
@@ -7183,7 +9989,7 @@
       </p:sp>
       <p:sp>
         <p:nvSpPr>
-          <p:cNvPr id="154" name=""/>
+          <p:cNvPr id="225" name=""/>
           <p:cNvSpPr/>
           <p:nvPr/>
         </p:nvSpPr>
@@ -7204,12 +10010,15 @@
         </p:spPr>
         <p:txBody>
           <a:bodyPr/>
-          <a:p/>
-        </p:txBody>
-      </p:sp>
-      <p:sp>
-        <p:nvSpPr>
-          <p:cNvPr id="155" name="" descr="{&quot;isTemplate&quot;:true,&quot;type&quot;:&quot;text&quot;}"/>
+          <a:p>
+            <a:pPr/>
+            <a:endParaRPr/>
+          </a:p>
+        </p:txBody>
+      </p:sp>
+      <p:sp>
+        <p:nvSpPr>
+          <p:cNvPr id="226" name="" descr="{&quot;isTemplate&quot;:true,&quot;type&quot;:&quot;text&quot;}"/>
           <p:cNvSpPr txBox="1"/>
           <p:nvPr/>
         </p:nvSpPr>
@@ -7264,7 +10073,7 @@
       </p:sp>
       <p:pic>
         <p:nvPicPr>
-          <p:cNvPr id="156" name=""/>
+          <p:cNvPr id="227" name=""/>
           <p:cNvPicPr>
             <a:picLocks noChangeAspect="1"/>
           </p:cNvPicPr>
@@ -7296,7 +10105,7 @@
       </p:pic>
       <p:sp>
         <p:nvSpPr>
-          <p:cNvPr id="157" name="" descr="{&quot;isTemplate&quot;:true,&quot;type&quot;:&quot;text&quot;}"/>
+          <p:cNvPr id="228" name="" descr="{&quot;isTemplate&quot;:true,&quot;type&quot;:&quot;text&quot;}"/>
           <p:cNvSpPr txBox="1"/>
           <p:nvPr/>
         </p:nvSpPr>
@@ -7351,7 +10160,7 @@
       </p:sp>
       <p:sp>
         <p:nvSpPr>
-          <p:cNvPr id="158" name="" descr="{&quot;isTemplate&quot;:true,&quot;type&quot;:&quot;text&quot;}"/>
+          <p:cNvPr id="229" name="" descr="{&quot;isTemplate&quot;:true,&quot;type&quot;:&quot;text&quot;}"/>
           <p:cNvSpPr txBox="1"/>
           <p:nvPr/>
         </p:nvSpPr>
@@ -7444,7 +10253,7 @@
   <p:cSld>
     <p:spTree>
       <p:nvGrpSpPr>
-        <p:cNvPr id="159" name="" descr="&lt;Slide&gt;&#10;  &lt;Box style={{ width: '1280px', height: '720px', background: '#F7F9FC', flexDirection: 'row' }}&gt;&#10;    {/* 左侧深蓝栏 */}&#10;    &lt;Box style={{ width: 320, height: 720, background: '#0E3F8C', flexDirection: 'column', justifyContent: 'center', paddingLeft: 48, paddingRight: 48 }}&gt;&#10;      &lt;Box style={{ width: 48, height: 4, background: '#3D7BD9', borderRadius: 2, marginBottom: 28 }} /&gt;&#10;      &lt;Text style={{ color: '#FFFFFF', fontSize: 48, fontWeight: 'bold', letterSpacing: 4 }}&gt;目录&lt;/Text&gt;&#10;      &lt;Text style={{ color: '#8FB3E8', fontSize: 20, marginTop: 16, letterSpacing: 2 }}&gt;CONTENTS&lt;/Text&gt;&#10;    &lt;/Box&gt;&#10;&#10;    {/* 右侧目录条目 */}&#10;    &lt;Box style={{ flex: 1, flexDirection: 'column', justifyContent: 'center', paddingLeft: 72, paddingRight: 60, gap: 28 }}&gt;&#10;      {[&#10;        { n: '01', t: '选题背景与意义', d: '工艺知识痛点 · 通用大模型的局限' },&#10;        { n: '02', t: '项目目标与需求', d: '双链路定位 · 五大功能需求' },&#10;        { n: '03', t: '技术方案与选型', d: '总体架构 · 关键技术 · 组件选型' },&#10;        { n: '04', t: '开发方法与进度', d: '迭代开发 · 测试方案 · 7 阶段安排' },&#10;        { n: '05', t: '预期成果', d: '系统 · 指令 · 文档 · 评估报告' },&#10;      ].map((item) =&gt; (&#10;        &lt;Box key={item.n} style={{ flexDirection: 'row', alignItems: 'center', gap: 28, paddingBottom: 22, borderBottom: '1px solid #E5E7EB' }}&gt;&#10;          &lt;Box style={{ width: 60, height: 60, background: '#1E4FA8', borderRadius: 8, alignItems: 'center', justifyContent: 'center' }}&gt;&#10;            &lt;Text style={{ color: '#FFFFFF', fontSize: 24, fontWeight: 'bold' }}&gt;{item.n}&lt;/Text&gt;&#10;          &lt;/Box&gt;&#10;          &lt;Box style={{ flexDirection: 'column', gap: 4 }}&gt;&#10;            &lt;Text style={{ color: '#1A2230', fontSize: 28, fontWeight: 'bold' }}&gt;{item.t}&lt;/Text&gt;&#10;            &lt;Text style={{ color: '#8B97A8', fontSize: 16 }}&gt;{item.d}&lt;/Text&gt;&#10;          &lt;/Box&gt;&#10;        &lt;/Box&gt;&#10;      ))}&#10;    &lt;/Box&gt;&#10;  &lt;/Box&gt;&#10;&lt;/Slide&gt;&#10;"/>
+        <p:cNvPr id="230" name=""/>
         <p:cNvGrpSpPr/>
         <p:nvPr/>
       </p:nvGrpSpPr>
@@ -7458,7 +10267,7 @@
       </p:grpSpPr>
       <p:sp>
         <p:nvSpPr>
-          <p:cNvPr id="160" name=""/>
+          <p:cNvPr id="231" name=""/>
           <p:cNvSpPr/>
           <p:nvPr/>
         </p:nvSpPr>
@@ -7477,12 +10286,15 @@
         </p:spPr>
         <p:txBody>
           <a:bodyPr/>
-          <a:p/>
-        </p:txBody>
-      </p:sp>
-      <p:sp>
-        <p:nvSpPr>
-          <p:cNvPr id="161" name=""/>
+          <a:p>
+            <a:pPr/>
+            <a:endParaRPr/>
+          </a:p>
+        </p:txBody>
+      </p:sp>
+      <p:sp>
+        <p:nvSpPr>
+          <p:cNvPr id="232" name=""/>
           <p:cNvSpPr/>
           <p:nvPr/>
         </p:nvSpPr>
@@ -7501,12 +10313,15 @@
         </p:spPr>
         <p:txBody>
           <a:bodyPr/>
-          <a:p/>
-        </p:txBody>
-      </p:sp>
-      <p:sp>
-        <p:nvSpPr>
-          <p:cNvPr id="162" name=""/>
+          <a:p>
+            <a:pPr/>
+            <a:endParaRPr/>
+          </a:p>
+        </p:txBody>
+      </p:sp>
+      <p:sp>
+        <p:nvSpPr>
+          <p:cNvPr id="233" name=""/>
           <p:cNvSpPr/>
           <p:nvPr/>
         </p:nvSpPr>
@@ -7527,12 +10342,15 @@
         </p:spPr>
         <p:txBody>
           <a:bodyPr/>
-          <a:p/>
-        </p:txBody>
-      </p:sp>
-      <p:sp>
-        <p:nvSpPr>
-          <p:cNvPr id="163" name="" descr="{&quot;isTemplate&quot;:true,&quot;type&quot;:&quot;text&quot;}"/>
+          <a:p>
+            <a:pPr/>
+            <a:endParaRPr/>
+          </a:p>
+        </p:txBody>
+      </p:sp>
+      <p:sp>
+        <p:nvSpPr>
+          <p:cNvPr id="234" name="" descr="{&quot;isTemplate&quot;:true,&quot;type&quot;:&quot;text&quot;}"/>
           <p:cNvSpPr txBox="1"/>
           <p:nvPr/>
         </p:nvSpPr>
@@ -7567,7 +10385,7 @@
       </p:sp>
       <p:sp>
         <p:nvSpPr>
-          <p:cNvPr id="164" name="" descr="{&quot;isTemplate&quot;:true,&quot;type&quot;:&quot;text&quot;}"/>
+          <p:cNvPr id="235" name="" descr="{&quot;isTemplate&quot;:true,&quot;type&quot;:&quot;text&quot;}"/>
           <p:cNvSpPr txBox="1"/>
           <p:nvPr/>
         </p:nvSpPr>
@@ -7602,7 +10420,7 @@
       </p:sp>
       <p:sp>
         <p:nvSpPr>
-          <p:cNvPr id="165" name=""/>
+          <p:cNvPr id="236" name=""/>
           <p:cNvSpPr/>
           <p:nvPr/>
         </p:nvSpPr>
@@ -7637,12 +10455,15 @@
         </p:spPr>
         <p:txBody>
           <a:bodyPr/>
-          <a:p/>
-        </p:txBody>
-      </p:sp>
-      <p:sp>
-        <p:nvSpPr>
-          <p:cNvPr id="166" name=""/>
+          <a:p>
+            <a:pPr/>
+            <a:endParaRPr/>
+          </a:p>
+        </p:txBody>
+      </p:sp>
+      <p:sp>
+        <p:nvSpPr>
+          <p:cNvPr id="237" name=""/>
           <p:cNvSpPr/>
           <p:nvPr/>
         </p:nvSpPr>
@@ -7663,12 +10484,15 @@
         </p:spPr>
         <p:txBody>
           <a:bodyPr/>
-          <a:p/>
-        </p:txBody>
-      </p:sp>
-      <p:sp>
-        <p:nvSpPr>
-          <p:cNvPr id="167" name="" descr="{&quot;isTemplate&quot;:true,&quot;type&quot;:&quot;text&quot;}"/>
+          <a:p>
+            <a:pPr/>
+            <a:endParaRPr/>
+          </a:p>
+        </p:txBody>
+      </p:sp>
+      <p:sp>
+        <p:nvSpPr>
+          <p:cNvPr id="238" name="" descr="{&quot;isTemplate&quot;:true,&quot;type&quot;:&quot;text&quot;}"/>
           <p:cNvSpPr txBox="1"/>
           <p:nvPr/>
         </p:nvSpPr>
@@ -7703,7 +10527,7 @@
       </p:sp>
       <p:sp>
         <p:nvSpPr>
-          <p:cNvPr id="168" name="" descr="{&quot;isTemplate&quot;:true,&quot;type&quot;:&quot;text&quot;}"/>
+          <p:cNvPr id="239" name="" descr="{&quot;isTemplate&quot;:true,&quot;type&quot;:&quot;text&quot;}"/>
           <p:cNvSpPr txBox="1"/>
           <p:nvPr/>
         </p:nvSpPr>
@@ -7738,7 +10562,7 @@
       </p:sp>
       <p:sp>
         <p:nvSpPr>
-          <p:cNvPr id="169" name="" descr="{&quot;isTemplate&quot;:true,&quot;type&quot;:&quot;text&quot;}"/>
+          <p:cNvPr id="240" name="" descr="{&quot;isTemplate&quot;:true,&quot;type&quot;:&quot;text&quot;}"/>
           <p:cNvSpPr txBox="1"/>
           <p:nvPr/>
         </p:nvSpPr>
@@ -7793,7 +10617,7 @@
       </p:sp>
       <p:sp>
         <p:nvSpPr>
-          <p:cNvPr id="170" name=""/>
+          <p:cNvPr id="241" name=""/>
           <p:cNvSpPr/>
           <p:nvPr/>
         </p:nvSpPr>
@@ -7828,12 +10652,15 @@
         </p:spPr>
         <p:txBody>
           <a:bodyPr/>
-          <a:p/>
-        </p:txBody>
-      </p:sp>
-      <p:sp>
-        <p:nvSpPr>
-          <p:cNvPr id="171" name=""/>
+          <a:p>
+            <a:pPr/>
+            <a:endParaRPr/>
+          </a:p>
+        </p:txBody>
+      </p:sp>
+      <p:sp>
+        <p:nvSpPr>
+          <p:cNvPr id="242" name=""/>
           <p:cNvSpPr/>
           <p:nvPr/>
         </p:nvSpPr>
@@ -7854,12 +10681,15 @@
         </p:spPr>
         <p:txBody>
           <a:bodyPr/>
-          <a:p/>
-        </p:txBody>
-      </p:sp>
-      <p:sp>
-        <p:nvSpPr>
-          <p:cNvPr id="172" name="" descr="{&quot;isTemplate&quot;:true,&quot;type&quot;:&quot;text&quot;}"/>
+          <a:p>
+            <a:pPr/>
+            <a:endParaRPr/>
+          </a:p>
+        </p:txBody>
+      </p:sp>
+      <p:sp>
+        <p:nvSpPr>
+          <p:cNvPr id="243" name="" descr="{&quot;isTemplate&quot;:true,&quot;type&quot;:&quot;text&quot;}"/>
           <p:cNvSpPr txBox="1"/>
           <p:nvPr/>
         </p:nvSpPr>
@@ -7894,7 +10724,7 @@
       </p:sp>
       <p:sp>
         <p:nvSpPr>
-          <p:cNvPr id="173" name="" descr="{&quot;isTemplate&quot;:true,&quot;type&quot;:&quot;text&quot;}"/>
+          <p:cNvPr id="244" name="" descr="{&quot;isTemplate&quot;:true,&quot;type&quot;:&quot;text&quot;}"/>
           <p:cNvSpPr txBox="1"/>
           <p:nvPr/>
         </p:nvSpPr>
@@ -7929,7 +10759,7 @@
       </p:sp>
       <p:sp>
         <p:nvSpPr>
-          <p:cNvPr id="174" name="" descr="{&quot;isTemplate&quot;:true,&quot;type&quot;:&quot;text&quot;}"/>
+          <p:cNvPr id="245" name="" descr="{&quot;isTemplate&quot;:true,&quot;type&quot;:&quot;text&quot;}"/>
           <p:cNvSpPr txBox="1"/>
           <p:nvPr/>
         </p:nvSpPr>
@@ -7984,7 +10814,7 @@
       </p:sp>
       <p:sp>
         <p:nvSpPr>
-          <p:cNvPr id="175" name=""/>
+          <p:cNvPr id="246" name=""/>
           <p:cNvSpPr/>
           <p:nvPr/>
         </p:nvSpPr>
@@ -8019,12 +10849,15 @@
         </p:spPr>
         <p:txBody>
           <a:bodyPr/>
-          <a:p/>
-        </p:txBody>
-      </p:sp>
-      <p:sp>
-        <p:nvSpPr>
-          <p:cNvPr id="176" name=""/>
+          <a:p>
+            <a:pPr/>
+            <a:endParaRPr/>
+          </a:p>
+        </p:txBody>
+      </p:sp>
+      <p:sp>
+        <p:nvSpPr>
+          <p:cNvPr id="247" name=""/>
           <p:cNvSpPr/>
           <p:nvPr/>
         </p:nvSpPr>
@@ -8045,12 +10878,15 @@
         </p:spPr>
         <p:txBody>
           <a:bodyPr/>
-          <a:p/>
-        </p:txBody>
-      </p:sp>
-      <p:sp>
-        <p:nvSpPr>
-          <p:cNvPr id="177" name="" descr="{&quot;isTemplate&quot;:true,&quot;type&quot;:&quot;text&quot;}"/>
+          <a:p>
+            <a:pPr/>
+            <a:endParaRPr/>
+          </a:p>
+        </p:txBody>
+      </p:sp>
+      <p:sp>
+        <p:nvSpPr>
+          <p:cNvPr id="248" name="" descr="{&quot;isTemplate&quot;:true,&quot;type&quot;:&quot;text&quot;}"/>
           <p:cNvSpPr txBox="1"/>
           <p:nvPr/>
         </p:nvSpPr>
@@ -8085,7 +10921,7 @@
       </p:sp>
       <p:sp>
         <p:nvSpPr>
-          <p:cNvPr id="178" name="" descr="{&quot;isTemplate&quot;:true,&quot;type&quot;:&quot;text&quot;}"/>
+          <p:cNvPr id="249" name="" descr="{&quot;isTemplate&quot;:true,&quot;type&quot;:&quot;text&quot;}"/>
           <p:cNvSpPr txBox="1"/>
           <p:nvPr/>
         </p:nvSpPr>
@@ -8120,7 +10956,7 @@
       </p:sp>
       <p:sp>
         <p:nvSpPr>
-          <p:cNvPr id="179" name="" descr="{&quot;isTemplate&quot;:true,&quot;type&quot;:&quot;text&quot;}"/>
+          <p:cNvPr id="250" name="" descr="{&quot;isTemplate&quot;:true,&quot;type&quot;:&quot;text&quot;}"/>
           <p:cNvSpPr txBox="1"/>
           <p:nvPr/>
         </p:nvSpPr>
@@ -8195,7 +11031,7 @@
       </p:sp>
       <p:sp>
         <p:nvSpPr>
-          <p:cNvPr id="180" name=""/>
+          <p:cNvPr id="251" name=""/>
           <p:cNvSpPr/>
           <p:nvPr/>
         </p:nvSpPr>
@@ -8230,12 +11066,15 @@
         </p:spPr>
         <p:txBody>
           <a:bodyPr/>
-          <a:p/>
-        </p:txBody>
-      </p:sp>
-      <p:sp>
-        <p:nvSpPr>
-          <p:cNvPr id="181" name=""/>
+          <a:p>
+            <a:pPr/>
+            <a:endParaRPr/>
+          </a:p>
+        </p:txBody>
+      </p:sp>
+      <p:sp>
+        <p:nvSpPr>
+          <p:cNvPr id="252" name=""/>
           <p:cNvSpPr/>
           <p:nvPr/>
         </p:nvSpPr>
@@ -8256,12 +11095,15 @@
         </p:spPr>
         <p:txBody>
           <a:bodyPr/>
-          <a:p/>
-        </p:txBody>
-      </p:sp>
-      <p:sp>
-        <p:nvSpPr>
-          <p:cNvPr id="182" name="" descr="{&quot;isTemplate&quot;:true,&quot;type&quot;:&quot;text&quot;}"/>
+          <a:p>
+            <a:pPr/>
+            <a:endParaRPr/>
+          </a:p>
+        </p:txBody>
+      </p:sp>
+      <p:sp>
+        <p:nvSpPr>
+          <p:cNvPr id="253" name="" descr="{&quot;isTemplate&quot;:true,&quot;type&quot;:&quot;text&quot;}"/>
           <p:cNvSpPr txBox="1"/>
           <p:nvPr/>
         </p:nvSpPr>
@@ -8296,7 +11138,7 @@
       </p:sp>
       <p:sp>
         <p:nvSpPr>
-          <p:cNvPr id="183" name="" descr="{&quot;isTemplate&quot;:true,&quot;type&quot;:&quot;text&quot;}"/>
+          <p:cNvPr id="254" name="" descr="{&quot;isTemplate&quot;:true,&quot;type&quot;:&quot;text&quot;}"/>
           <p:cNvSpPr txBox="1"/>
           <p:nvPr/>
         </p:nvSpPr>
@@ -8331,7 +11173,7 @@
       </p:sp>
       <p:sp>
         <p:nvSpPr>
-          <p:cNvPr id="184" name="" descr="{&quot;isTemplate&quot;:true,&quot;type&quot;:&quot;text&quot;}"/>
+          <p:cNvPr id="255" name="" descr="{&quot;isTemplate&quot;:true,&quot;type&quot;:&quot;text&quot;}"/>
           <p:cNvSpPr txBox="1"/>
           <p:nvPr/>
         </p:nvSpPr>
@@ -8406,7 +11248,7 @@
       </p:sp>
       <p:sp>
         <p:nvSpPr>
-          <p:cNvPr id="185" name=""/>
+          <p:cNvPr id="256" name=""/>
           <p:cNvSpPr/>
           <p:nvPr/>
         </p:nvSpPr>
@@ -8441,12 +11283,15 @@
         </p:spPr>
         <p:txBody>
           <a:bodyPr/>
-          <a:p/>
-        </p:txBody>
-      </p:sp>
-      <p:sp>
-        <p:nvSpPr>
-          <p:cNvPr id="186" name=""/>
+          <a:p>
+            <a:pPr/>
+            <a:endParaRPr/>
+          </a:p>
+        </p:txBody>
+      </p:sp>
+      <p:sp>
+        <p:nvSpPr>
+          <p:cNvPr id="257" name=""/>
           <p:cNvSpPr/>
           <p:nvPr/>
         </p:nvSpPr>
@@ -8467,12 +11312,15 @@
         </p:spPr>
         <p:txBody>
           <a:bodyPr/>
-          <a:p/>
-        </p:txBody>
-      </p:sp>
-      <p:sp>
-        <p:nvSpPr>
-          <p:cNvPr id="187" name="" descr="{&quot;isTemplate&quot;:true,&quot;type&quot;:&quot;text&quot;}"/>
+          <a:p>
+            <a:pPr/>
+            <a:endParaRPr/>
+          </a:p>
+        </p:txBody>
+      </p:sp>
+      <p:sp>
+        <p:nvSpPr>
+          <p:cNvPr id="258" name="" descr="{&quot;isTemplate&quot;:true,&quot;type&quot;:&quot;text&quot;}"/>
           <p:cNvSpPr txBox="1"/>
           <p:nvPr/>
         </p:nvSpPr>
@@ -8507,7 +11355,7 @@
       </p:sp>
       <p:sp>
         <p:nvSpPr>
-          <p:cNvPr id="188" name="" descr="{&quot;isTemplate&quot;:true,&quot;type&quot;:&quot;text&quot;}"/>
+          <p:cNvPr id="259" name="" descr="{&quot;isTemplate&quot;:true,&quot;type&quot;:&quot;text&quot;}"/>
           <p:cNvSpPr txBox="1"/>
           <p:nvPr/>
         </p:nvSpPr>
@@ -8542,7 +11390,7 @@
       </p:sp>
       <p:sp>
         <p:nvSpPr>
-          <p:cNvPr id="189" name="" descr="{&quot;isTemplate&quot;:true,&quot;type&quot;:&quot;text&quot;}"/>
+          <p:cNvPr id="260" name="" descr="{&quot;isTemplate&quot;:true,&quot;type&quot;:&quot;text&quot;}"/>
           <p:cNvSpPr txBox="1"/>
           <p:nvPr/>
         </p:nvSpPr>
@@ -8645,7 +11493,7 @@
   <p:cSld>
     <p:spTree>
       <p:nvGrpSpPr>
-        <p:cNvPr id="190" name="" descr="&lt;Slide&gt;&#10;  &lt;Box style={{ width: '1280px', height: '720px', background: '#FFFFFF', flexDirection: 'row', alignItems: 'center' }}&gt;&#10;    {/* 左侧大数字 */}&#10;    &lt;Box style={{ width: 360, height: 720, background: '#F0F5FC', alignItems: 'center', justifyContent: 'center' }}&gt;&#10;      &lt;Text style={{ color: '#0E3F8C', fontSize: 200, fontWeight: 'bold', lineHeight: 1 }}&gt;01&lt;/Text&gt;&#10;    &lt;/Box&gt;&#10;&#10;    {/* 右侧标题与要点 */}&#10;    &lt;Box style={{ flex: 1, flexDirection: 'column', paddingLeft: 72, paddingRight: 60, gap: 28 }}&gt;&#10;      &lt;Box style={{ width: 48, height: 4, background: '#3D7BD9', borderRadius: 2 }} /&gt;&#10;      &lt;Text style={{ color: '#1A2230', fontSize: 48, fontWeight: 'bold' }}&gt;选题背景与意义&lt;/Text&gt;&#10;      &lt;Text style={{ color: '#8B97A8', fontSize: 20, letterSpacing: 1 }}&gt;研究意义 · 国内外现状 · 选题价值&lt;/Text&gt;&#10;&#10;      &lt;Box style={{ flexDirection: 'column', gap: 18, marginTop: 12 }}&gt;&#10;        {[&#10;          '机械加工工艺知识高度依赖人工经验，手册检索效率低',&#10;          '工艺知识传承困难，标准更新不及时',&#10;          '通用大模型直接生成参数存在幻觉与不可追溯问题',&#10;        ].map((item, idx) =&gt; (&#10;          &lt;Box key={idx} style={{ flexDirection: 'row', alignItems: 'flex-start', gap: 16 }}&gt;&#10;            &lt;Box style={{ width: 8, height: 8, background: '#1E4FA8', borderRadius: 4, marginTop: 10 }} /&gt;&#10;            &lt;Text style={{ color: '#4A5568', fontSize: 22, lineHeight: 1.5 }}&gt;{item}&lt;/Text&gt;&#10;          &lt;/Box&gt;&#10;        ))}&#10;      &lt;/Box&gt;&#10;    &lt;/Box&gt;&#10;  &lt;/Box&gt;&#10;&lt;/Slide&gt;&#10;"/>
+        <p:cNvPr id="261" name=""/>
         <p:cNvGrpSpPr/>
         <p:nvPr/>
       </p:nvGrpSpPr>
@@ -8659,7 +11507,7 @@
       </p:grpSpPr>
       <p:sp>
         <p:nvSpPr>
-          <p:cNvPr id="191" name=""/>
+          <p:cNvPr id="262" name=""/>
           <p:cNvSpPr/>
           <p:nvPr/>
         </p:nvSpPr>
@@ -8678,12 +11526,15 @@
         </p:spPr>
         <p:txBody>
           <a:bodyPr/>
-          <a:p/>
-        </p:txBody>
-      </p:sp>
-      <p:sp>
-        <p:nvSpPr>
-          <p:cNvPr id="192" name=""/>
+          <a:p>
+            <a:pPr/>
+            <a:endParaRPr/>
+          </a:p>
+        </p:txBody>
+      </p:sp>
+      <p:sp>
+        <p:nvSpPr>
+          <p:cNvPr id="263" name=""/>
           <p:cNvSpPr/>
           <p:nvPr/>
         </p:nvSpPr>
@@ -8702,12 +11553,15 @@
         </p:spPr>
         <p:txBody>
           <a:bodyPr/>
-          <a:p/>
-        </p:txBody>
-      </p:sp>
-      <p:sp>
-        <p:nvSpPr>
-          <p:cNvPr id="193" name="" descr="{&quot;isTemplate&quot;:true,&quot;type&quot;:&quot;text&quot;}"/>
+          <a:p>
+            <a:pPr/>
+            <a:endParaRPr/>
+          </a:p>
+        </p:txBody>
+      </p:sp>
+      <p:sp>
+        <p:nvSpPr>
+          <p:cNvPr id="264" name="" descr="{&quot;isTemplate&quot;:true,&quot;type&quot;:&quot;text&quot;}"/>
           <p:cNvSpPr txBox="1"/>
           <p:nvPr/>
         </p:nvSpPr>
@@ -8742,7 +11596,7 @@
       </p:sp>
       <p:sp>
         <p:nvSpPr>
-          <p:cNvPr id="194" name=""/>
+          <p:cNvPr id="265" name=""/>
           <p:cNvSpPr/>
           <p:nvPr/>
         </p:nvSpPr>
@@ -8763,12 +11617,15 @@
         </p:spPr>
         <p:txBody>
           <a:bodyPr/>
-          <a:p/>
-        </p:txBody>
-      </p:sp>
-      <p:sp>
-        <p:nvSpPr>
-          <p:cNvPr id="195" name="" descr="{&quot;isTemplate&quot;:true,&quot;type&quot;:&quot;text&quot;}"/>
+          <a:p>
+            <a:pPr/>
+            <a:endParaRPr/>
+          </a:p>
+        </p:txBody>
+      </p:sp>
+      <p:sp>
+        <p:nvSpPr>
+          <p:cNvPr id="266" name="" descr="{&quot;isTemplate&quot;:true,&quot;type&quot;:&quot;text&quot;}"/>
           <p:cNvSpPr txBox="1"/>
           <p:nvPr/>
         </p:nvSpPr>
@@ -8803,7 +11660,7 @@
       </p:sp>
       <p:sp>
         <p:nvSpPr>
-          <p:cNvPr id="196" name="" descr="{&quot;isTemplate&quot;:true,&quot;type&quot;:&quot;text&quot;}"/>
+          <p:cNvPr id="267" name="" descr="{&quot;isTemplate&quot;:true,&quot;type&quot;:&quot;text&quot;}"/>
           <p:cNvSpPr txBox="1"/>
           <p:nvPr/>
         </p:nvSpPr>
@@ -8878,7 +11735,7 @@
       </p:sp>
       <p:sp>
         <p:nvSpPr>
-          <p:cNvPr id="197" name=""/>
+          <p:cNvPr id="268" name=""/>
           <p:cNvSpPr/>
           <p:nvPr/>
         </p:nvSpPr>
@@ -8899,12 +11756,15 @@
         </p:spPr>
         <p:txBody>
           <a:bodyPr/>
-          <a:p/>
-        </p:txBody>
-      </p:sp>
-      <p:sp>
-        <p:nvSpPr>
-          <p:cNvPr id="198" name="" descr="{&quot;isTemplate&quot;:true,&quot;type&quot;:&quot;text&quot;}"/>
+          <a:p>
+            <a:pPr/>
+            <a:endParaRPr/>
+          </a:p>
+        </p:txBody>
+      </p:sp>
+      <p:sp>
+        <p:nvSpPr>
+          <p:cNvPr id="269" name="" descr="{&quot;isTemplate&quot;:true,&quot;type&quot;:&quot;text&quot;}"/>
           <p:cNvSpPr txBox="1"/>
           <p:nvPr/>
         </p:nvSpPr>
@@ -8939,7 +11799,7 @@
       </p:sp>
       <p:sp>
         <p:nvSpPr>
-          <p:cNvPr id="199" name=""/>
+          <p:cNvPr id="270" name=""/>
           <p:cNvSpPr/>
           <p:nvPr/>
         </p:nvSpPr>
@@ -8960,12 +11820,15 @@
         </p:spPr>
         <p:txBody>
           <a:bodyPr/>
-          <a:p/>
-        </p:txBody>
-      </p:sp>
-      <p:sp>
-        <p:nvSpPr>
-          <p:cNvPr id="200" name="" descr="{&quot;isTemplate&quot;:true,&quot;type&quot;:&quot;text&quot;}"/>
+          <a:p>
+            <a:pPr/>
+            <a:endParaRPr/>
+          </a:p>
+        </p:txBody>
+      </p:sp>
+      <p:sp>
+        <p:nvSpPr>
+          <p:cNvPr id="271" name="" descr="{&quot;isTemplate&quot;:true,&quot;type&quot;:&quot;text&quot;}"/>
           <p:cNvSpPr txBox="1"/>
           <p:nvPr/>
         </p:nvSpPr>
@@ -9000,7 +11863,7 @@
       </p:sp>
       <p:sp>
         <p:nvSpPr>
-          <p:cNvPr id="201" name=""/>
+          <p:cNvPr id="272" name=""/>
           <p:cNvSpPr/>
           <p:nvPr/>
         </p:nvSpPr>
@@ -9021,12 +11884,15 @@
         </p:spPr>
         <p:txBody>
           <a:bodyPr/>
-          <a:p/>
-        </p:txBody>
-      </p:sp>
-      <p:sp>
-        <p:nvSpPr>
-          <p:cNvPr id="202" name="" descr="{&quot;isTemplate&quot;:true,&quot;type&quot;:&quot;text&quot;}"/>
+          <a:p>
+            <a:pPr/>
+            <a:endParaRPr/>
+          </a:p>
+        </p:txBody>
+      </p:sp>
+      <p:sp>
+        <p:nvSpPr>
+          <p:cNvPr id="273" name="" descr="{&quot;isTemplate&quot;:true,&quot;type&quot;:&quot;text&quot;}"/>
           <p:cNvSpPr txBox="1"/>
           <p:nvPr/>
         </p:nvSpPr>
@@ -9069,7 +11935,7 @@
   <p:cSld>
     <p:spTree>
       <p:nvGrpSpPr>
-        <p:cNvPr id="203" name="" descr="&lt;Slide&gt;&#10;  &lt;Box style={{ width: '1280px', height: '720px', background: '#FFFFFF', flexDirection: 'column' }}&gt;&#10;    {/* 页眉 */}&#10;    &lt;Box style={{ height: 72, background: '#1E4FA8', flexDirection: 'row', alignItems: 'center', justifyContent: 'space-between', paddingLeft: 40, paddingRight: 40 }}&gt;&#10;      &lt;Text style={{ color: '#FFFFFF', fontSize: 16 }}&gt;基于 RAG 的轻量级企业工艺生成系统&lt;/Text&gt;&#10;      &lt;Text style={{ color: 'rgba(255,255,255,0.85)', fontSize: 14 }}&gt;选题背景&lt;/Text&gt;&#10;    &lt;/Box&gt;&#10;&#10;    {/* 主标题 */}&#10;    &lt;Box style={{ paddingLeft: 40, paddingRight: 40, paddingTop: 28, paddingBottom: 12 }}&gt;&#10;      &lt;Text style={{ color: '#1A2230', fontSize: 34, fontWeight: 'bold' }}&gt;通用大模型直接生成工艺参数的三大痛点&lt;/Text&gt;&#10;    &lt;/Box&gt;&#10;&#10;    {/* 非对称双栏：左 55% 痛点，右 40% 解法 */}&#10;    &lt;Box style={{ flex: 1, flexDirection: 'row', paddingLeft: 40, paddingRight: 40, gap: 36, paddingBottom: 20 }}&gt;&#10;      {/* 左：三大痛点 */}&#10;      &lt;Box style={{ flex: 1.4, flexDirection: 'column', gap: 20 }}&gt;&#10;        {[&#10;          { n: '01', t: '知识覆盖不全', d: '训练数据缺乏企业/行业内部的专业工艺资料，关键参数缺失' },&#10;          { n: '02', t: '幻觉 · 安全风险', d: '模型&quot;一本正经地编造&quot;切削参数，错误参数可能致刀具崩损、零件报废' },&#10;          { n: '03', t: '不可追溯', d: '生成结果无来源依据，无法核对，难以满足工程可验证、可担责要求' },&#10;        ].map((item) =&gt; (&#10;          &lt;Box key={item.n} style={{ flexDirection: 'row', gap: 20, padding: 22, background: '#F7F9FC', borderRadius: 10, border: '1px solid #E5E7EB', alignItems: 'flex-start' }}&gt;&#10;            &lt;Box style={{ width: 46, height: 46, background: '#1E4FA8', borderRadius: 8, alignItems: 'center', justifyContent: 'center' }}&gt;&#10;              &lt;Text style={{ color: '#FFFFFF', fontSize: 20, fontWeight: 'bold' }}&gt;{item.n}&lt;/Text&gt;&#10;            &lt;/Box&gt;&#10;            &lt;Box style={{ flex: 1, flexDirection: 'column', gap: 6 }}&gt;&#10;              &lt;Text style={{ color: '#1A2230', fontSize: 24, fontWeight: 'bold' }}&gt;{item.t}&lt;/Text&gt;&#10;              &lt;Text style={{ color: '#4A5568', fontSize: 18, lineHeight: 1.5 }}&gt;{item.d}&lt;/Text&gt;&#10;            &lt;/Box&gt;&#10;          &lt;/Box&gt;&#10;        ))}&#10;      &lt;/Box&gt;&#10;&#10;      {/* 右：RAG 解法 */}&#10;      &lt;Box style={{ flex: 1, flexDirection: 'column', justifyContent: 'center', padding: 28, background: '#0E3F8C', borderRadius: 12 }}&gt;&#10;        &lt;Text style={{ color: '#8FB3E8', fontSize: 16, letterSpacing: 2 }}&gt;我们的方案&lt;/Text&gt;&#10;        &lt;Text style={{ color: '#FFFFFF', fontSize: 30, fontWeight: 'bold', marginTop: 12, lineHeight: 1.4 }}&gt;&#10;          检索增强生成（RAG）&#10;        &lt;/Text&gt;&#10;        &lt;Text style={{ color: '#D6E4F7', fontSize: 20, lineHeight: 1.6, marginTop: 16 }}&gt;&#10;          先检索、后生成，让模型基于权威工艺资料作答，从源头缓解幻觉与不可追溯问题。&#10;        &lt;/Text&gt;&#10;        &lt;Box style={{ flexDirection: 'row', alignItems: 'center', gap: 12, marginTop: 24 }}&gt;&#10;          &lt;Box style={{ flex: 1, height: 4, background: '#3D7BD9', borderRadius: 2 }} /&gt;&#10;          &lt;Text style={{ color: '#8FB3E8', fontSize: 14 }}&gt;对症下药&lt;/Text&gt;&#10;        &lt;/Box&gt;&#10;      &lt;/Box&gt;&#10;    &lt;/Box&gt;&#10;&#10;    {/* 页脚 */}&#10;    &lt;Box style={{ height: 40, flexDirection: 'row', alignItems: 'center', justifyContent: 'space-between', paddingLeft: 40, paddingRight: 40 }}&gt;&#10;      &lt;Text style={{ color: '#8B97A8', fontSize: 14 }}&gt;中国科学技术大学软件学院&lt;/Text&gt;&#10;      &lt;Text style={{ color: '#1E4FA8', fontSize: 16, fontWeight: 'bold' }}&gt;04 / 15&lt;/Text&gt;&#10;    &lt;/Box&gt;&#10;  &lt;/Box&gt;&#10;&lt;/Slide&gt;&#10;"/>
+        <p:cNvPr id="274" name=""/>
         <p:cNvGrpSpPr/>
         <p:nvPr/>
       </p:nvGrpSpPr>
@@ -9083,7 +11949,7 @@
       </p:grpSpPr>
       <p:sp>
         <p:nvSpPr>
-          <p:cNvPr id="204" name=""/>
+          <p:cNvPr id="275" name=""/>
           <p:cNvSpPr/>
           <p:nvPr/>
         </p:nvSpPr>
@@ -9102,12 +11968,15 @@
         </p:spPr>
         <p:txBody>
           <a:bodyPr/>
-          <a:p/>
-        </p:txBody>
-      </p:sp>
-      <p:sp>
-        <p:nvSpPr>
-          <p:cNvPr id="205" name=""/>
+          <a:p>
+            <a:pPr/>
+            <a:endParaRPr/>
+          </a:p>
+        </p:txBody>
+      </p:sp>
+      <p:sp>
+        <p:nvSpPr>
+          <p:cNvPr id="276" name=""/>
           <p:cNvSpPr/>
           <p:nvPr/>
         </p:nvSpPr>
@@ -9126,12 +11995,15 @@
         </p:spPr>
         <p:txBody>
           <a:bodyPr/>
-          <a:p/>
-        </p:txBody>
-      </p:sp>
-      <p:sp>
-        <p:nvSpPr>
-          <p:cNvPr id="206" name="" descr="{&quot;isTemplate&quot;:true,&quot;type&quot;:&quot;text&quot;}"/>
+          <a:p>
+            <a:pPr/>
+            <a:endParaRPr/>
+          </a:p>
+        </p:txBody>
+      </p:sp>
+      <p:sp>
+        <p:nvSpPr>
+          <p:cNvPr id="277" name="" descr="{&quot;isTemplate&quot;:true,&quot;type&quot;:&quot;text&quot;}"/>
           <p:cNvSpPr txBox="1"/>
           <p:nvPr/>
         </p:nvSpPr>
@@ -9186,7 +12058,7 @@
       </p:sp>
       <p:sp>
         <p:nvSpPr>
-          <p:cNvPr id="207" name="" descr="{&quot;isTemplate&quot;:true,&quot;type&quot;:&quot;text&quot;}"/>
+          <p:cNvPr id="278" name="" descr="{&quot;isTemplate&quot;:true,&quot;type&quot;:&quot;text&quot;}"/>
           <p:cNvSpPr txBox="1"/>
           <p:nvPr/>
         </p:nvSpPr>
@@ -9223,7 +12095,7 @@
       </p:sp>
       <p:sp>
         <p:nvSpPr>
-          <p:cNvPr id="208" name="" descr="{&quot;isTemplate&quot;:true,&quot;type&quot;:&quot;text&quot;}"/>
+          <p:cNvPr id="279" name="" descr="{&quot;isTemplate&quot;:true,&quot;type&quot;:&quot;text&quot;}"/>
           <p:cNvSpPr txBox="1"/>
           <p:nvPr/>
         </p:nvSpPr>
@@ -9258,7 +12130,7 @@
       </p:sp>
       <p:sp>
         <p:nvSpPr>
-          <p:cNvPr id="209" name=""/>
+          <p:cNvPr id="280" name=""/>
           <p:cNvSpPr/>
           <p:nvPr/>
         </p:nvSpPr>
@@ -9284,12 +12156,15 @@
         </p:spPr>
         <p:txBody>
           <a:bodyPr/>
-          <a:p/>
-        </p:txBody>
-      </p:sp>
-      <p:sp>
-        <p:nvSpPr>
-          <p:cNvPr id="210" name=""/>
+          <a:p>
+            <a:pPr/>
+            <a:endParaRPr/>
+          </a:p>
+        </p:txBody>
+      </p:sp>
+      <p:sp>
+        <p:nvSpPr>
+          <p:cNvPr id="281" name=""/>
           <p:cNvSpPr/>
           <p:nvPr/>
         </p:nvSpPr>
@@ -9310,12 +12185,15 @@
         </p:spPr>
         <p:txBody>
           <a:bodyPr/>
-          <a:p/>
-        </p:txBody>
-      </p:sp>
-      <p:sp>
-        <p:nvSpPr>
-          <p:cNvPr id="211" name="" descr="{&quot;isTemplate&quot;:true,&quot;type&quot;:&quot;text&quot;}"/>
+          <a:p>
+            <a:pPr/>
+            <a:endParaRPr/>
+          </a:p>
+        </p:txBody>
+      </p:sp>
+      <p:sp>
+        <p:nvSpPr>
+          <p:cNvPr id="282" name="" descr="{&quot;isTemplate&quot;:true,&quot;type&quot;:&quot;text&quot;}"/>
           <p:cNvSpPr txBox="1"/>
           <p:nvPr/>
         </p:nvSpPr>
@@ -9350,7 +12228,7 @@
       </p:sp>
       <p:sp>
         <p:nvSpPr>
-          <p:cNvPr id="212" name="" descr="{&quot;isTemplate&quot;:true,&quot;type&quot;:&quot;text&quot;}"/>
+          <p:cNvPr id="283" name="" descr="{&quot;isTemplate&quot;:true,&quot;type&quot;:&quot;text&quot;}"/>
           <p:cNvSpPr txBox="1"/>
           <p:nvPr/>
         </p:nvSpPr>
@@ -9385,7 +12263,7 @@
       </p:sp>
       <p:sp>
         <p:nvSpPr>
-          <p:cNvPr id="213" name="" descr="{&quot;isTemplate&quot;:true,&quot;type&quot;:&quot;text&quot;}"/>
+          <p:cNvPr id="284" name="" descr="{&quot;isTemplate&quot;:true,&quot;type&quot;:&quot;text&quot;}"/>
           <p:cNvSpPr txBox="1"/>
           <p:nvPr/>
         </p:nvSpPr>
@@ -9440,7 +12318,7 @@
       </p:sp>
       <p:sp>
         <p:nvSpPr>
-          <p:cNvPr id="214" name=""/>
+          <p:cNvPr id="285" name=""/>
           <p:cNvSpPr/>
           <p:nvPr/>
         </p:nvSpPr>
@@ -9466,12 +12344,15 @@
         </p:spPr>
         <p:txBody>
           <a:bodyPr/>
-          <a:p/>
-        </p:txBody>
-      </p:sp>
-      <p:sp>
-        <p:nvSpPr>
-          <p:cNvPr id="215" name=""/>
+          <a:p>
+            <a:pPr/>
+            <a:endParaRPr/>
+          </a:p>
+        </p:txBody>
+      </p:sp>
+      <p:sp>
+        <p:nvSpPr>
+          <p:cNvPr id="286" name=""/>
           <p:cNvSpPr/>
           <p:nvPr/>
         </p:nvSpPr>
@@ -9492,12 +12373,15 @@
         </p:spPr>
         <p:txBody>
           <a:bodyPr/>
-          <a:p/>
-        </p:txBody>
-      </p:sp>
-      <p:sp>
-        <p:nvSpPr>
-          <p:cNvPr id="216" name="" descr="{&quot;isTemplate&quot;:true,&quot;type&quot;:&quot;text&quot;}"/>
+          <a:p>
+            <a:pPr/>
+            <a:endParaRPr/>
+          </a:p>
+        </p:txBody>
+      </p:sp>
+      <p:sp>
+        <p:nvSpPr>
+          <p:cNvPr id="287" name="" descr="{&quot;isTemplate&quot;:true,&quot;type&quot;:&quot;text&quot;}"/>
           <p:cNvSpPr txBox="1"/>
           <p:nvPr/>
         </p:nvSpPr>
@@ -9532,7 +12416,7 @@
       </p:sp>
       <p:sp>
         <p:nvSpPr>
-          <p:cNvPr id="217" name="" descr="{&quot;isTemplate&quot;:true,&quot;type&quot;:&quot;text&quot;}"/>
+          <p:cNvPr id="288" name="" descr="{&quot;isTemplate&quot;:true,&quot;type&quot;:&quot;text&quot;}"/>
           <p:cNvSpPr txBox="1"/>
           <p:nvPr/>
         </p:nvSpPr>
@@ -9587,7 +12471,7 @@
       </p:sp>
       <p:sp>
         <p:nvSpPr>
-          <p:cNvPr id="218" name="" descr="{&quot;isTemplate&quot;:true,&quot;type&quot;:&quot;text&quot;}"/>
+          <p:cNvPr id="289" name="" descr="{&quot;isTemplate&quot;:true,&quot;type&quot;:&quot;text&quot;}"/>
           <p:cNvSpPr txBox="1"/>
           <p:nvPr/>
         </p:nvSpPr>
@@ -9662,7 +12546,7 @@
       </p:sp>
       <p:sp>
         <p:nvSpPr>
-          <p:cNvPr id="219" name=""/>
+          <p:cNvPr id="290" name=""/>
           <p:cNvSpPr/>
           <p:nvPr/>
         </p:nvSpPr>
@@ -9688,12 +12572,15 @@
         </p:spPr>
         <p:txBody>
           <a:bodyPr/>
-          <a:p/>
-        </p:txBody>
-      </p:sp>
-      <p:sp>
-        <p:nvSpPr>
-          <p:cNvPr id="220" name=""/>
+          <a:p>
+            <a:pPr/>
+            <a:endParaRPr/>
+          </a:p>
+        </p:txBody>
+      </p:sp>
+      <p:sp>
+        <p:nvSpPr>
+          <p:cNvPr id="291" name=""/>
           <p:cNvSpPr/>
           <p:nvPr/>
         </p:nvSpPr>
@@ -9714,12 +12601,15 @@
         </p:spPr>
         <p:txBody>
           <a:bodyPr/>
-          <a:p/>
-        </p:txBody>
-      </p:sp>
-      <p:sp>
-        <p:nvSpPr>
-          <p:cNvPr id="221" name="" descr="{&quot;isTemplate&quot;:true,&quot;type&quot;:&quot;text&quot;}"/>
+          <a:p>
+            <a:pPr/>
+            <a:endParaRPr/>
+          </a:p>
+        </p:txBody>
+      </p:sp>
+      <p:sp>
+        <p:nvSpPr>
+          <p:cNvPr id="292" name="" descr="{&quot;isTemplate&quot;:true,&quot;type&quot;:&quot;text&quot;}"/>
           <p:cNvSpPr txBox="1"/>
           <p:nvPr/>
         </p:nvSpPr>
@@ -9754,7 +12644,7 @@
       </p:sp>
       <p:sp>
         <p:nvSpPr>
-          <p:cNvPr id="222" name="" descr="{&quot;isTemplate&quot;:true,&quot;type&quot;:&quot;text&quot;}"/>
+          <p:cNvPr id="293" name="" descr="{&quot;isTemplate&quot;:true,&quot;type&quot;:&quot;text&quot;}"/>
           <p:cNvSpPr txBox="1"/>
           <p:nvPr/>
         </p:nvSpPr>
@@ -9789,7 +12679,7 @@
       </p:sp>
       <p:sp>
         <p:nvSpPr>
-          <p:cNvPr id="223" name="" descr="{&quot;isTemplate&quot;:true,&quot;type&quot;:&quot;text&quot;}"/>
+          <p:cNvPr id="294" name="" descr="{&quot;isTemplate&quot;:true,&quot;type&quot;:&quot;text&quot;}"/>
           <p:cNvSpPr txBox="1"/>
           <p:nvPr/>
         </p:nvSpPr>
@@ -9824,7 +12714,7 @@
       </p:sp>
       <p:sp>
         <p:nvSpPr>
-          <p:cNvPr id="224" name=""/>
+          <p:cNvPr id="295" name=""/>
           <p:cNvSpPr/>
           <p:nvPr/>
         </p:nvSpPr>
@@ -9845,12 +12735,15 @@
         </p:spPr>
         <p:txBody>
           <a:bodyPr/>
-          <a:p/>
-        </p:txBody>
-      </p:sp>
-      <p:sp>
-        <p:nvSpPr>
-          <p:cNvPr id="225" name="" descr="{&quot;isTemplate&quot;:true,&quot;type&quot;:&quot;text&quot;}"/>
+          <a:p>
+            <a:pPr/>
+            <a:endParaRPr/>
+          </a:p>
+        </p:txBody>
+      </p:sp>
+      <p:sp>
+        <p:nvSpPr>
+          <p:cNvPr id="296" name="" descr="{&quot;isTemplate&quot;:true,&quot;type&quot;:&quot;text&quot;}"/>
           <p:cNvSpPr txBox="1"/>
           <p:nvPr/>
         </p:nvSpPr>
@@ -9885,7 +12778,7 @@
       </p:sp>
       <p:sp>
         <p:nvSpPr>
-          <p:cNvPr id="226" name="" descr="{&quot;isTemplate&quot;:true,&quot;type&quot;:&quot;text&quot;}"/>
+          <p:cNvPr id="297" name="" descr="{&quot;isTemplate&quot;:true,&quot;type&quot;:&quot;text&quot;}"/>
           <p:cNvSpPr txBox="1"/>
           <p:nvPr/>
         </p:nvSpPr>
@@ -9940,7 +12833,7 @@
       </p:sp>
       <p:sp>
         <p:nvSpPr>
-          <p:cNvPr id="227" name="" descr="{&quot;isTemplate&quot;:true,&quot;type&quot;:&quot;text&quot;}"/>
+          <p:cNvPr id="298" name="" descr="{&quot;isTemplate&quot;:true,&quot;type&quot;:&quot;text&quot;}"/>
           <p:cNvSpPr txBox="1"/>
           <p:nvPr/>
         </p:nvSpPr>
@@ -9977,7 +12870,7 @@
       </p:sp>
       <p:sp>
         <p:nvSpPr>
-          <p:cNvPr id="228" name=""/>
+          <p:cNvPr id="299" name=""/>
           <p:cNvSpPr/>
           <p:nvPr/>
         </p:nvSpPr>
@@ -9998,12 +12891,15 @@
         </p:spPr>
         <p:txBody>
           <a:bodyPr/>
-          <a:p/>
-        </p:txBody>
-      </p:sp>
-      <p:sp>
-        <p:nvSpPr>
-          <p:cNvPr id="229" name="" descr="{&quot;isTemplate&quot;:true,&quot;type&quot;:&quot;text&quot;}"/>
+          <a:p>
+            <a:pPr/>
+            <a:endParaRPr/>
+          </a:p>
+        </p:txBody>
+      </p:sp>
+      <p:sp>
+        <p:nvSpPr>
+          <p:cNvPr id="300" name="" descr="{&quot;isTemplate&quot;:true,&quot;type&quot;:&quot;text&quot;}"/>
           <p:cNvSpPr txBox="1"/>
           <p:nvPr/>
         </p:nvSpPr>
@@ -10038,7 +12934,7 @@
       </p:sp>
       <p:sp>
         <p:nvSpPr>
-          <p:cNvPr id="230" name="" descr="{&quot;isTemplate&quot;:true,&quot;type&quot;:&quot;text&quot;}"/>
+          <p:cNvPr id="301" name="" descr="{&quot;isTemplate&quot;:true,&quot;type&quot;:&quot;text&quot;}"/>
           <p:cNvSpPr txBox="1"/>
           <p:nvPr/>
         </p:nvSpPr>
@@ -10073,7 +12969,7 @@
       </p:sp>
       <p:sp>
         <p:nvSpPr>
-          <p:cNvPr id="231" name="" descr="{&quot;isTemplate&quot;:true,&quot;type&quot;:&quot;text&quot;}"/>
+          <p:cNvPr id="302" name="" descr="{&quot;isTemplate&quot;:true,&quot;type&quot;:&quot;text&quot;}"/>
           <p:cNvSpPr txBox="1"/>
           <p:nvPr/>
         </p:nvSpPr>
@@ -10100,7 +12996,7 @@
                 <a:latin typeface="Microsoft YaHei"/>
                 <a:ea typeface="Microsoft YaHei"/>
               </a:rPr>
-              <a:t>04 / 15</a:t>
+              <a:t>04 / 17</a:t>
             </a:r>
             <a:endParaRPr/>
           </a:p>
@@ -10116,7 +13012,7 @@
   <p:cSld>
     <p:spTree>
       <p:nvGrpSpPr>
-        <p:cNvPr id="232" name="" descr="&lt;Slide&gt;&#10;  &lt;Box style={{ width: '1280px', height: '720px', background: '#FFFFFF', flexDirection: 'row', alignItems: 'center' }}&gt;&#10;    {/* 左侧大数字 */}&#10;    &lt;Box style={{ width: 360, height: 720, background: '#F0F5FC', alignItems: 'center', justifyContent: 'center' }}&gt;&#10;      &lt;Text style={{ color: '#0E3F8C', fontSize: 200, fontWeight: 'bold', lineHeight: 1 }}&gt;02&lt;/Text&gt;&#10;    &lt;/Box&gt;&#10;&#10;    {/* 右侧标题与要点 */}&#10;    &lt;Box style={{ flex: 1, flexDirection: 'column', paddingLeft: 72, paddingRight: 60, gap: 28 }}&gt;&#10;      &lt;Box style={{ width: 48, height: 4, background: '#3D7BD9', borderRadius: 2 }} /&gt;&#10;      &lt;Text style={{ color: '#1A2230', fontSize: 48, fontWeight: 'bold' }}&gt;项目目标与需求&lt;/Text&gt;&#10;      &lt;Text style={{ color: '#8B97A8', fontSize: 20, letterSpacing: 1 }}&gt;双链路定位 · 五大功能需求&lt;/Text&gt;&#10;&#10;      &lt;Box style={{ padding: 24, background: '#F7F9FC', borderRadius: 10, border: '1px solid #E5E7EB', marginTop: 12 }}&gt;&#10;        &lt;Text style={{ color: '#1A2230', fontSize: 24, lineHeight: 1.6, fontWeight: 'bold' }}&gt;&#10;          构建「离线建库 + 在线问答」的轻量级工艺生成系统&#10;        &lt;/Text&gt;&#10;        &lt;Text style={{ color: '#4A5568', fontSize: 20, lineHeight: 1.6, marginTop: 10 }}&gt;&#10;          把工艺手册中的参数转化为可检索、可溯源的知识，自动生成带引用、可核对的加工指令。&#10;        &lt;/Text&gt;&#10;      &lt;/Box&gt;&#10;    &lt;/Box&gt;&#10;  &lt;/Box&gt;&#10;&lt;/Slide&gt;&#10;"/>
+        <p:cNvPr id="303" name=""/>
         <p:cNvGrpSpPr/>
         <p:nvPr/>
       </p:nvGrpSpPr>
@@ -10130,7 +13026,7 @@
       </p:grpSpPr>
       <p:sp>
         <p:nvSpPr>
-          <p:cNvPr id="233" name=""/>
+          <p:cNvPr id="304" name=""/>
           <p:cNvSpPr/>
           <p:nvPr/>
         </p:nvSpPr>
@@ -10149,12 +13045,15 @@
         </p:spPr>
         <p:txBody>
           <a:bodyPr/>
-          <a:p/>
-        </p:txBody>
-      </p:sp>
-      <p:sp>
-        <p:nvSpPr>
-          <p:cNvPr id="234" name=""/>
+          <a:p>
+            <a:pPr/>
+            <a:endParaRPr/>
+          </a:p>
+        </p:txBody>
+      </p:sp>
+      <p:sp>
+        <p:nvSpPr>
+          <p:cNvPr id="305" name=""/>
           <p:cNvSpPr/>
           <p:nvPr/>
         </p:nvSpPr>
@@ -10173,12 +13072,15 @@
         </p:spPr>
         <p:txBody>
           <a:bodyPr/>
-          <a:p/>
-        </p:txBody>
-      </p:sp>
-      <p:sp>
-        <p:nvSpPr>
-          <p:cNvPr id="235" name="" descr="{&quot;isTemplate&quot;:true,&quot;type&quot;:&quot;text&quot;}"/>
+          <a:p>
+            <a:pPr/>
+            <a:endParaRPr/>
+          </a:p>
+        </p:txBody>
+      </p:sp>
+      <p:sp>
+        <p:nvSpPr>
+          <p:cNvPr id="306" name="" descr="{&quot;isTemplate&quot;:true,&quot;type&quot;:&quot;text&quot;}"/>
           <p:cNvSpPr txBox="1"/>
           <p:nvPr/>
         </p:nvSpPr>
@@ -10213,7 +13115,7 @@
       </p:sp>
       <p:sp>
         <p:nvSpPr>
-          <p:cNvPr id="236" name=""/>
+          <p:cNvPr id="307" name=""/>
           <p:cNvSpPr/>
           <p:nvPr/>
         </p:nvSpPr>
@@ -10234,12 +13136,15 @@
         </p:spPr>
         <p:txBody>
           <a:bodyPr/>
-          <a:p/>
-        </p:txBody>
-      </p:sp>
-      <p:sp>
-        <p:nvSpPr>
-          <p:cNvPr id="237" name="" descr="{&quot;isTemplate&quot;:true,&quot;type&quot;:&quot;text&quot;}"/>
+          <a:p>
+            <a:pPr/>
+            <a:endParaRPr/>
+          </a:p>
+        </p:txBody>
+      </p:sp>
+      <p:sp>
+        <p:nvSpPr>
+          <p:cNvPr id="308" name="" descr="{&quot;isTemplate&quot;:true,&quot;type&quot;:&quot;text&quot;}"/>
           <p:cNvSpPr txBox="1"/>
           <p:nvPr/>
         </p:nvSpPr>
@@ -10274,7 +13179,7 @@
       </p:sp>
       <p:sp>
         <p:nvSpPr>
-          <p:cNvPr id="238" name="" descr="{&quot;isTemplate&quot;:true,&quot;type&quot;:&quot;text&quot;}"/>
+          <p:cNvPr id="309" name="" descr="{&quot;isTemplate&quot;:true,&quot;type&quot;:&quot;text&quot;}"/>
           <p:cNvSpPr txBox="1"/>
           <p:nvPr/>
         </p:nvSpPr>
@@ -10329,7 +13234,7 @@
       </p:sp>
       <p:sp>
         <p:nvSpPr>
-          <p:cNvPr id="239" name=""/>
+          <p:cNvPr id="310" name=""/>
           <p:cNvSpPr/>
           <p:nvPr/>
         </p:nvSpPr>
@@ -10355,12 +13260,15 @@
         </p:spPr>
         <p:txBody>
           <a:bodyPr/>
-          <a:p/>
-        </p:txBody>
-      </p:sp>
-      <p:sp>
-        <p:nvSpPr>
-          <p:cNvPr id="240" name="" descr="{&quot;isTemplate&quot;:true,&quot;type&quot;:&quot;text&quot;}"/>
+          <a:p>
+            <a:pPr/>
+            <a:endParaRPr/>
+          </a:p>
+        </p:txBody>
+      </p:sp>
+      <p:sp>
+        <p:nvSpPr>
+          <p:cNvPr id="311" name="" descr="{&quot;isTemplate&quot;:true,&quot;type&quot;:&quot;text&quot;}"/>
           <p:cNvSpPr txBox="1"/>
           <p:nvPr/>
         </p:nvSpPr>
@@ -10415,7 +13323,7 @@
       </p:sp>
       <p:sp>
         <p:nvSpPr>
-          <p:cNvPr id="241" name="" descr="{&quot;isTemplate&quot;:true,&quot;type&quot;:&quot;text&quot;}"/>
+          <p:cNvPr id="312" name="" descr="{&quot;isTemplate&quot;:true,&quot;type&quot;:&quot;text&quot;}"/>
           <p:cNvSpPr txBox="1"/>
           <p:nvPr/>
         </p:nvSpPr>
@@ -10460,7 +13368,7 @@
   <p:cSld>
     <p:spTree>
       <p:nvGrpSpPr>
-        <p:cNvPr id="242" name="" descr="&lt;Slide&gt;&#10;  &lt;Box style={{ width: '1280px', height: '720px', background: '#FFFFFF', flexDirection: 'column' }}&gt;&#10;    {/* 页眉 */}&#10;    &lt;Box style={{ height: 72, background: '#1E4FA8', flexDirection: 'row', alignItems: 'center', justifyContent: 'space-between', paddingLeft: 40, paddingRight: 40 }}&gt;&#10;      &lt;Text style={{ color: '#FFFFFF', fontSize: 16 }}&gt;基于 RAG 的轻量级企业工艺生成系统&lt;/Text&gt;&#10;      &lt;Text style={{ color: 'rgba(255,255,255,0.85)', fontSize: 14 }}&gt;项目目标&lt;/Text&gt;&#10;    &lt;/Box&gt;&#10;&#10;    {/* 左标题栏 + 右内容 */}&#10;    &lt;Box style={{ flex: 1, flexDirection: 'row', paddingLeft: 40, paddingRight: 40, paddingTop: 28, paddingBottom: 16, gap: 40 }}&gt;&#10;      {/* 左标题栏 */}&#10;      &lt;Box style={{ width: 300, flexDirection: 'column', gap: 16, justifyContent: 'space-between' }}&gt;&#10;        &lt;Box style={{ flexDirection: 'column', gap: 16 }}&gt;&#10;          &lt;Box style={{ width: 48, height: 4, background: '#3D7BD9', borderRadius: 2 }} /&gt;&#10;          &lt;Text style={{ color: '#1A2230', fontSize: 34, fontWeight: 'bold', lineHeight: 1.3 }}&gt;五大功能需求&lt;/Text&gt;&#10;          &lt;Text style={{ color: '#8B97A8', fontSize: 16, lineHeight: 1.5 }}&gt;对应选题五条硬性要求，一条不落&lt;/Text&gt;&#10;          &lt;Box style={{ padding: 18, background: '#F0F5FC', borderRadius: 8, marginTop: 8 }}&gt;&#10;            &lt;Text style={{ color: '#1E4FA8', fontSize: 18, fontWeight: 'bold' }}&gt;覆盖完整 RAG 链路&lt;/Text&gt;&#10;            &lt;Text style={{ color: '#4A5568', fontSize: 15, lineHeight: 1.5, marginTop: 6 }}&gt;解析 → 检索 → 重排 → 生成 → 溯源 → 评估&lt;/Text&gt;&#10;          &lt;/Box&gt;&#10;        &lt;/Box&gt;&#10;        {/* 补充：核心价值小结，填满左侧下方 */}&#10;        &lt;Box style={{ padding: 18, background: '#0E3F8C', borderRadius: 8 }}&gt;&#10;          &lt;Text style={{ color: '#FFFFFF', fontSize: 18, fontWeight: 'bold' }}&gt;核心目标&lt;/Text&gt;&#10;          &lt;Text style={{ color: '#D6E4F7', fontSize: 15, lineHeight: 1.6, marginTop: 8 }}&gt;&#10;            生成的参数真实可用、可核对、可追溯，而非仅供演示的玩具 Demo。&#10;          &lt;/Text&gt;&#10;        &lt;/Box&gt;&#10;      &lt;/Box&gt;&#10;&#10;      {/* 右：五项功能卡片（纵向列表） */}&#10;      &lt;Box style={{ flex: 1, flexDirection: 'column', gap: 14 }}&gt;&#10;        {[&#10;          { n: '①', t: '文档格式解析', d: '解析工艺 PDF 的文字、表格、页码与版面结构' },&#10;          { n: '②', t: '稠密 + 稀疏混合召回', d: 'BGE-M3 稠密向量检索 + BM25 关键词检索，RRF 融合' },&#10;          { n: '③', t: '重排序模块', d: 'Cross-encoder（bge-reranker）二次精排，提升检索精度' },&#10;          { n: '④', t: '多轮对话 + 引用溯源', d: '上下文追问、查询改写；每条参数标注来源页码' },&#10;          { n: '⑤', t: '多文档测试（人工评估）', d: '多份文档构建测试集，人工评估准确率' },&#10;        ].map((item) =&gt; (&#10;          &lt;Box key={item.n} style={{ flexDirection: 'row', alignItems: 'center', gap: 20, padding: 16, background: '#F7F9FC', borderRadius: 10, border: '1px solid #E5E7EB' }}&gt;&#10;            &lt;Box style={{ width: 44, height: 44, background: '#1E4FA8', borderRadius: 22, alignItems: 'center', justifyContent: 'center' }}&gt;&#10;              &lt;Text style={{ color: '#FFFFFF', fontSize: 20, fontWeight: 'bold' }}&gt;{item.n}&lt;/Text&gt;&#10;            &lt;/Box&gt;&#10;            &lt;Box style={{ flex: 1, flexDirection: 'column', gap: 4 }}&gt;&#10;              &lt;Text style={{ color: '#1A2230', fontSize: 22, fontWeight: 'bold' }}&gt;{item.t}&lt;/Text&gt;&#10;              &lt;Text style={{ color: '#4A5568', fontSize: 16, lineHeight: 1.4 }}&gt;{item.d}&lt;/Text&gt;&#10;            &lt;/Box&gt;&#10;          &lt;/Box&gt;&#10;        ))}&#10;      &lt;/Box&gt;&#10;    &lt;/Box&gt;&#10;&#10;    {/* 页脚 */}&#10;    &lt;Box style={{ height: 40, flexDirection: 'row', alignItems: 'center', justifyContent: 'space-between', paddingLeft: 40, paddingRight: 40 }}&gt;&#10;      &lt;Text style={{ color: '#8B97A8', fontSize: 14 }}&gt;中国科学技术大学软件学院&lt;/Text&gt;&#10;      &lt;Text style={{ color: '#1E4FA8', fontSize: 16, fontWeight: 'bold' }}&gt;06 / 15&lt;/Text&gt;&#10;    &lt;/Box&gt;&#10;  &lt;/Box&gt;&#10;&lt;/Slide&gt;&#10;"/>
+        <p:cNvPr id="313" name=""/>
         <p:cNvGrpSpPr/>
         <p:nvPr/>
       </p:nvGrpSpPr>
@@ -10474,7 +13382,7 @@
       </p:grpSpPr>
       <p:sp>
         <p:nvSpPr>
-          <p:cNvPr id="243" name=""/>
+          <p:cNvPr id="314" name=""/>
           <p:cNvSpPr/>
           <p:nvPr/>
         </p:nvSpPr>
@@ -10493,12 +13401,15 @@
         </p:spPr>
         <p:txBody>
           <a:bodyPr/>
-          <a:p/>
-        </p:txBody>
-      </p:sp>
-      <p:sp>
-        <p:nvSpPr>
-          <p:cNvPr id="244" name=""/>
+          <a:p>
+            <a:pPr/>
+            <a:endParaRPr/>
+          </a:p>
+        </p:txBody>
+      </p:sp>
+      <p:sp>
+        <p:nvSpPr>
+          <p:cNvPr id="315" name=""/>
           <p:cNvSpPr/>
           <p:nvPr/>
         </p:nvSpPr>
@@ -10517,12 +13428,15 @@
         </p:spPr>
         <p:txBody>
           <a:bodyPr/>
-          <a:p/>
-        </p:txBody>
-      </p:sp>
-      <p:sp>
-        <p:nvSpPr>
-          <p:cNvPr id="245" name="" descr="{&quot;isTemplate&quot;:true,&quot;type&quot;:&quot;text&quot;}"/>
+          <a:p>
+            <a:pPr/>
+            <a:endParaRPr/>
+          </a:p>
+        </p:txBody>
+      </p:sp>
+      <p:sp>
+        <p:nvSpPr>
+          <p:cNvPr id="316" name="" descr="{&quot;isTemplate&quot;:true,&quot;type&quot;:&quot;text&quot;}"/>
           <p:cNvSpPr txBox="1"/>
           <p:nvPr/>
         </p:nvSpPr>
@@ -10577,7 +13491,7 @@
       </p:sp>
       <p:sp>
         <p:nvSpPr>
-          <p:cNvPr id="246" name="" descr="{&quot;isTemplate&quot;:true,&quot;type&quot;:&quot;text&quot;}"/>
+          <p:cNvPr id="317" name="" descr="{&quot;isTemplate&quot;:true,&quot;type&quot;:&quot;text&quot;}"/>
           <p:cNvSpPr txBox="1"/>
           <p:nvPr/>
         </p:nvSpPr>
@@ -10614,7 +13528,7 @@
       </p:sp>
       <p:sp>
         <p:nvSpPr>
-          <p:cNvPr id="247" name=""/>
+          <p:cNvPr id="318" name=""/>
           <p:cNvSpPr/>
           <p:nvPr/>
         </p:nvSpPr>
@@ -10635,12 +13549,15 @@
         </p:spPr>
         <p:txBody>
           <a:bodyPr/>
-          <a:p/>
-        </p:txBody>
-      </p:sp>
-      <p:sp>
-        <p:nvSpPr>
-          <p:cNvPr id="248" name="" descr="{&quot;isTemplate&quot;:true,&quot;type&quot;:&quot;text&quot;}"/>
+          <a:p>
+            <a:pPr/>
+            <a:endParaRPr/>
+          </a:p>
+        </p:txBody>
+      </p:sp>
+      <p:sp>
+        <p:nvSpPr>
+          <p:cNvPr id="319" name="" descr="{&quot;isTemplate&quot;:true,&quot;type&quot;:&quot;text&quot;}"/>
           <p:cNvSpPr txBox="1"/>
           <p:nvPr/>
         </p:nvSpPr>
@@ -10675,7 +13592,7 @@
       </p:sp>
       <p:sp>
         <p:nvSpPr>
-          <p:cNvPr id="249" name="" descr="{&quot;isTemplate&quot;:true,&quot;type&quot;:&quot;text&quot;}"/>
+          <p:cNvPr id="320" name="" descr="{&quot;isTemplate&quot;:true,&quot;type&quot;:&quot;text&quot;}"/>
           <p:cNvSpPr txBox="1"/>
           <p:nvPr/>
         </p:nvSpPr>
@@ -10710,7 +13627,7 @@
       </p:sp>
       <p:sp>
         <p:nvSpPr>
-          <p:cNvPr id="250" name=""/>
+          <p:cNvPr id="321" name=""/>
           <p:cNvSpPr/>
           <p:nvPr/>
         </p:nvSpPr>
@@ -10731,12 +13648,15 @@
         </p:spPr>
         <p:txBody>
           <a:bodyPr/>
-          <a:p/>
-        </p:txBody>
-      </p:sp>
-      <p:sp>
-        <p:nvSpPr>
-          <p:cNvPr id="251" name="" descr="{&quot;isTemplate&quot;:true,&quot;type&quot;:&quot;text&quot;}"/>
+          <a:p>
+            <a:pPr/>
+            <a:endParaRPr/>
+          </a:p>
+        </p:txBody>
+      </p:sp>
+      <p:sp>
+        <p:nvSpPr>
+          <p:cNvPr id="322" name="" descr="{&quot;isTemplate&quot;:true,&quot;type&quot;:&quot;text&quot;}"/>
           <p:cNvSpPr txBox="1"/>
           <p:nvPr/>
         </p:nvSpPr>
@@ -10791,7 +13711,7 @@
       </p:sp>
       <p:sp>
         <p:nvSpPr>
-          <p:cNvPr id="252" name="" descr="{&quot;isTemplate&quot;:true,&quot;type&quot;:&quot;text&quot;}"/>
+          <p:cNvPr id="323" name="" descr="{&quot;isTemplate&quot;:true,&quot;type&quot;:&quot;text&quot;}"/>
           <p:cNvSpPr txBox="1"/>
           <p:nvPr/>
         </p:nvSpPr>
@@ -10928,7 +13848,7 @@
       </p:sp>
       <p:sp>
         <p:nvSpPr>
-          <p:cNvPr id="253" name=""/>
+          <p:cNvPr id="324" name=""/>
           <p:cNvSpPr/>
           <p:nvPr/>
         </p:nvSpPr>
@@ -10949,12 +13869,15 @@
         </p:spPr>
         <p:txBody>
           <a:bodyPr/>
-          <a:p/>
-        </p:txBody>
-      </p:sp>
-      <p:sp>
-        <p:nvSpPr>
-          <p:cNvPr id="254" name="" descr="{&quot;isTemplate&quot;:true,&quot;type&quot;:&quot;text&quot;}"/>
+          <a:p>
+            <a:pPr/>
+            <a:endParaRPr/>
+          </a:p>
+        </p:txBody>
+      </p:sp>
+      <p:sp>
+        <p:nvSpPr>
+          <p:cNvPr id="325" name="" descr="{&quot;isTemplate&quot;:true,&quot;type&quot;:&quot;text&quot;}"/>
           <p:cNvSpPr txBox="1"/>
           <p:nvPr/>
         </p:nvSpPr>
@@ -10989,7 +13912,7 @@
       </p:sp>
       <p:sp>
         <p:nvSpPr>
-          <p:cNvPr id="255" name="" descr="{&quot;isTemplate&quot;:true,&quot;type&quot;:&quot;text&quot;}"/>
+          <p:cNvPr id="326" name="" descr="{&quot;isTemplate&quot;:true,&quot;type&quot;:&quot;text&quot;}"/>
           <p:cNvSpPr txBox="1"/>
           <p:nvPr/>
         </p:nvSpPr>
@@ -11046,7 +13969,7 @@
       </p:sp>
       <p:sp>
         <p:nvSpPr>
-          <p:cNvPr id="256" name=""/>
+          <p:cNvPr id="327" name=""/>
           <p:cNvSpPr/>
           <p:nvPr/>
         </p:nvSpPr>
@@ -11072,12 +13995,15 @@
         </p:spPr>
         <p:txBody>
           <a:bodyPr/>
-          <a:p/>
-        </p:txBody>
-      </p:sp>
-      <p:sp>
-        <p:nvSpPr>
-          <p:cNvPr id="257" name=""/>
+          <a:p>
+            <a:pPr/>
+            <a:endParaRPr/>
+          </a:p>
+        </p:txBody>
+      </p:sp>
+      <p:sp>
+        <p:nvSpPr>
+          <p:cNvPr id="328" name=""/>
           <p:cNvSpPr/>
           <p:nvPr/>
         </p:nvSpPr>
@@ -11098,12 +14024,15 @@
         </p:spPr>
         <p:txBody>
           <a:bodyPr/>
-          <a:p/>
-        </p:txBody>
-      </p:sp>
-      <p:sp>
-        <p:nvSpPr>
-          <p:cNvPr id="258" name="" descr="{&quot;isTemplate&quot;:true,&quot;type&quot;:&quot;text&quot;}"/>
+          <a:p>
+            <a:pPr/>
+            <a:endParaRPr/>
+          </a:p>
+        </p:txBody>
+      </p:sp>
+      <p:sp>
+        <p:nvSpPr>
+          <p:cNvPr id="329" name="" descr="{&quot;isTemplate&quot;:true,&quot;type&quot;:&quot;text&quot;}"/>
           <p:cNvSpPr txBox="1"/>
           <p:nvPr/>
         </p:nvSpPr>
@@ -11138,7 +14067,7 @@
       </p:sp>
       <p:sp>
         <p:nvSpPr>
-          <p:cNvPr id="259" name="" descr="{&quot;isTemplate&quot;:true,&quot;type&quot;:&quot;text&quot;}"/>
+          <p:cNvPr id="330" name="" descr="{&quot;isTemplate&quot;:true,&quot;type&quot;:&quot;text&quot;}"/>
           <p:cNvSpPr txBox="1"/>
           <p:nvPr/>
         </p:nvSpPr>
@@ -11173,7 +14102,7 @@
       </p:sp>
       <p:sp>
         <p:nvSpPr>
-          <p:cNvPr id="260" name="" descr="{&quot;isTemplate&quot;:true,&quot;type&quot;:&quot;text&quot;}"/>
+          <p:cNvPr id="331" name="" descr="{&quot;isTemplate&quot;:true,&quot;type&quot;:&quot;text&quot;}"/>
           <p:cNvSpPr txBox="1"/>
           <p:nvPr/>
         </p:nvSpPr>
@@ -11228,7 +14157,7 @@
       </p:sp>
       <p:sp>
         <p:nvSpPr>
-          <p:cNvPr id="261" name=""/>
+          <p:cNvPr id="332" name=""/>
           <p:cNvSpPr/>
           <p:nvPr/>
         </p:nvSpPr>
@@ -11254,12 +14183,15 @@
         </p:spPr>
         <p:txBody>
           <a:bodyPr/>
-          <a:p/>
-        </p:txBody>
-      </p:sp>
-      <p:sp>
-        <p:nvSpPr>
-          <p:cNvPr id="262" name=""/>
+          <a:p>
+            <a:pPr/>
+            <a:endParaRPr/>
+          </a:p>
+        </p:txBody>
+      </p:sp>
+      <p:sp>
+        <p:nvSpPr>
+          <p:cNvPr id="333" name=""/>
           <p:cNvSpPr/>
           <p:nvPr/>
         </p:nvSpPr>
@@ -11280,12 +14212,15 @@
         </p:spPr>
         <p:txBody>
           <a:bodyPr/>
-          <a:p/>
-        </p:txBody>
-      </p:sp>
-      <p:sp>
-        <p:nvSpPr>
-          <p:cNvPr id="263" name="" descr="{&quot;isTemplate&quot;:true,&quot;type&quot;:&quot;text&quot;}"/>
+          <a:p>
+            <a:pPr/>
+            <a:endParaRPr/>
+          </a:p>
+        </p:txBody>
+      </p:sp>
+      <p:sp>
+        <p:nvSpPr>
+          <p:cNvPr id="334" name="" descr="{&quot;isTemplate&quot;:true,&quot;type&quot;:&quot;text&quot;}"/>
           <p:cNvSpPr txBox="1"/>
           <p:nvPr/>
         </p:nvSpPr>
@@ -11320,7 +14255,7 @@
       </p:sp>
       <p:sp>
         <p:nvSpPr>
-          <p:cNvPr id="264" name="" descr="{&quot;isTemplate&quot;:true,&quot;type&quot;:&quot;text&quot;}"/>
+          <p:cNvPr id="335" name="" descr="{&quot;isTemplate&quot;:true,&quot;type&quot;:&quot;text&quot;}"/>
           <p:cNvSpPr txBox="1"/>
           <p:nvPr/>
         </p:nvSpPr>
@@ -11375,7 +14310,7 @@
       </p:sp>
       <p:sp>
         <p:nvSpPr>
-          <p:cNvPr id="265" name="" descr="{&quot;isTemplate&quot;:true,&quot;type&quot;:&quot;text&quot;}"/>
+          <p:cNvPr id="336" name="" descr="{&quot;isTemplate&quot;:true,&quot;type&quot;:&quot;text&quot;}"/>
           <p:cNvSpPr txBox="1"/>
           <p:nvPr/>
         </p:nvSpPr>
@@ -11460,7 +14395,7 @@
       </p:sp>
       <p:sp>
         <p:nvSpPr>
-          <p:cNvPr id="266" name=""/>
+          <p:cNvPr id="337" name=""/>
           <p:cNvSpPr/>
           <p:nvPr/>
         </p:nvSpPr>
@@ -11486,12 +14421,15 @@
         </p:spPr>
         <p:txBody>
           <a:bodyPr/>
-          <a:p/>
-        </p:txBody>
-      </p:sp>
-      <p:sp>
-        <p:nvSpPr>
-          <p:cNvPr id="267" name=""/>
+          <a:p>
+            <a:pPr/>
+            <a:endParaRPr/>
+          </a:p>
+        </p:txBody>
+      </p:sp>
+      <p:sp>
+        <p:nvSpPr>
+          <p:cNvPr id="338" name=""/>
           <p:cNvSpPr/>
           <p:nvPr/>
         </p:nvSpPr>
@@ -11512,12 +14450,15 @@
         </p:spPr>
         <p:txBody>
           <a:bodyPr/>
-          <a:p/>
-        </p:txBody>
-      </p:sp>
-      <p:sp>
-        <p:nvSpPr>
-          <p:cNvPr id="268" name="" descr="{&quot;isTemplate&quot;:true,&quot;type&quot;:&quot;text&quot;}"/>
+          <a:p>
+            <a:pPr/>
+            <a:endParaRPr/>
+          </a:p>
+        </p:txBody>
+      </p:sp>
+      <p:sp>
+        <p:nvSpPr>
+          <p:cNvPr id="339" name="" descr="{&quot;isTemplate&quot;:true,&quot;type&quot;:&quot;text&quot;}"/>
           <p:cNvSpPr txBox="1"/>
           <p:nvPr/>
         </p:nvSpPr>
@@ -11552,7 +14493,7 @@
       </p:sp>
       <p:sp>
         <p:nvSpPr>
-          <p:cNvPr id="269" name="" descr="{&quot;isTemplate&quot;:true,&quot;type&quot;:&quot;text&quot;}"/>
+          <p:cNvPr id="340" name="" descr="{&quot;isTemplate&quot;:true,&quot;type&quot;:&quot;text&quot;}"/>
           <p:cNvSpPr txBox="1"/>
           <p:nvPr/>
         </p:nvSpPr>
@@ -11587,7 +14528,7 @@
       </p:sp>
       <p:sp>
         <p:nvSpPr>
-          <p:cNvPr id="270" name="" descr="{&quot;isTemplate&quot;:true,&quot;type&quot;:&quot;text&quot;}"/>
+          <p:cNvPr id="341" name="" descr="{&quot;isTemplate&quot;:true,&quot;type&quot;:&quot;text&quot;}"/>
           <p:cNvSpPr txBox="1"/>
           <p:nvPr/>
         </p:nvSpPr>
@@ -11652,7 +14593,7 @@
       </p:sp>
       <p:sp>
         <p:nvSpPr>
-          <p:cNvPr id="271" name=""/>
+          <p:cNvPr id="342" name=""/>
           <p:cNvSpPr/>
           <p:nvPr/>
         </p:nvSpPr>
@@ -11678,12 +14619,15 @@
         </p:spPr>
         <p:txBody>
           <a:bodyPr/>
-          <a:p/>
-        </p:txBody>
-      </p:sp>
-      <p:sp>
-        <p:nvSpPr>
-          <p:cNvPr id="272" name=""/>
+          <a:p>
+            <a:pPr/>
+            <a:endParaRPr/>
+          </a:p>
+        </p:txBody>
+      </p:sp>
+      <p:sp>
+        <p:nvSpPr>
+          <p:cNvPr id="343" name=""/>
           <p:cNvSpPr/>
           <p:nvPr/>
         </p:nvSpPr>
@@ -11704,12 +14648,15 @@
         </p:spPr>
         <p:txBody>
           <a:bodyPr/>
-          <a:p/>
-        </p:txBody>
-      </p:sp>
-      <p:sp>
-        <p:nvSpPr>
-          <p:cNvPr id="273" name="" descr="{&quot;isTemplate&quot;:true,&quot;type&quot;:&quot;text&quot;}"/>
+          <a:p>
+            <a:pPr/>
+            <a:endParaRPr/>
+          </a:p>
+        </p:txBody>
+      </p:sp>
+      <p:sp>
+        <p:nvSpPr>
+          <p:cNvPr id="344" name="" descr="{&quot;isTemplate&quot;:true,&quot;type&quot;:&quot;text&quot;}"/>
           <p:cNvSpPr txBox="1"/>
           <p:nvPr/>
         </p:nvSpPr>
@@ -11744,7 +14691,7 @@
       </p:sp>
       <p:sp>
         <p:nvSpPr>
-          <p:cNvPr id="274" name="" descr="{&quot;isTemplate&quot;:true,&quot;type&quot;:&quot;text&quot;}"/>
+          <p:cNvPr id="345" name="" descr="{&quot;isTemplate&quot;:true,&quot;type&quot;:&quot;text&quot;}"/>
           <p:cNvSpPr txBox="1"/>
           <p:nvPr/>
         </p:nvSpPr>
@@ -11799,7 +14746,7 @@
       </p:sp>
       <p:sp>
         <p:nvSpPr>
-          <p:cNvPr id="275" name="" descr="{&quot;isTemplate&quot;:true,&quot;type&quot;:&quot;text&quot;}"/>
+          <p:cNvPr id="346" name="" descr="{&quot;isTemplate&quot;:true,&quot;type&quot;:&quot;text&quot;}"/>
           <p:cNvSpPr txBox="1"/>
           <p:nvPr/>
         </p:nvSpPr>
@@ -11834,7 +14781,7 @@
       </p:sp>
       <p:sp>
         <p:nvSpPr>
-          <p:cNvPr id="276" name=""/>
+          <p:cNvPr id="347" name=""/>
           <p:cNvSpPr/>
           <p:nvPr/>
         </p:nvSpPr>
@@ -11860,12 +14807,15 @@
         </p:spPr>
         <p:txBody>
           <a:bodyPr/>
-          <a:p/>
-        </p:txBody>
-      </p:sp>
-      <p:sp>
-        <p:nvSpPr>
-          <p:cNvPr id="277" name=""/>
+          <a:p>
+            <a:pPr/>
+            <a:endParaRPr/>
+          </a:p>
+        </p:txBody>
+      </p:sp>
+      <p:sp>
+        <p:nvSpPr>
+          <p:cNvPr id="348" name=""/>
           <p:cNvSpPr/>
           <p:nvPr/>
         </p:nvSpPr>
@@ -11886,12 +14836,15 @@
         </p:spPr>
         <p:txBody>
           <a:bodyPr/>
-          <a:p/>
-        </p:txBody>
-      </p:sp>
-      <p:sp>
-        <p:nvSpPr>
-          <p:cNvPr id="278" name="" descr="{&quot;isTemplate&quot;:true,&quot;type&quot;:&quot;text&quot;}"/>
+          <a:p>
+            <a:pPr/>
+            <a:endParaRPr/>
+          </a:p>
+        </p:txBody>
+      </p:sp>
+      <p:sp>
+        <p:nvSpPr>
+          <p:cNvPr id="349" name="" descr="{&quot;isTemplate&quot;:true,&quot;type&quot;:&quot;text&quot;}"/>
           <p:cNvSpPr txBox="1"/>
           <p:nvPr/>
         </p:nvSpPr>
@@ -11926,7 +14879,7 @@
       </p:sp>
       <p:sp>
         <p:nvSpPr>
-          <p:cNvPr id="279" name="" descr="{&quot;isTemplate&quot;:true,&quot;type&quot;:&quot;text&quot;}"/>
+          <p:cNvPr id="350" name="" descr="{&quot;isTemplate&quot;:true,&quot;type&quot;:&quot;text&quot;}"/>
           <p:cNvSpPr txBox="1"/>
           <p:nvPr/>
         </p:nvSpPr>
@@ -11961,7 +14914,7 @@
       </p:sp>
       <p:sp>
         <p:nvSpPr>
-          <p:cNvPr id="280" name="" descr="{&quot;isTemplate&quot;:true,&quot;type&quot;:&quot;text&quot;}"/>
+          <p:cNvPr id="351" name="" descr="{&quot;isTemplate&quot;:true,&quot;type&quot;:&quot;text&quot;}"/>
           <p:cNvSpPr txBox="1"/>
           <p:nvPr/>
         </p:nvSpPr>
@@ -11996,7 +14949,7 @@
       </p:sp>
       <p:sp>
         <p:nvSpPr>
-          <p:cNvPr id="281" name="" descr="{&quot;isTemplate&quot;:true,&quot;type&quot;:&quot;text&quot;}"/>
+          <p:cNvPr id="352" name="" descr="{&quot;isTemplate&quot;:true,&quot;type&quot;:&quot;text&quot;}"/>
           <p:cNvSpPr txBox="1"/>
           <p:nvPr/>
         </p:nvSpPr>
@@ -12031,7 +14984,7 @@
       </p:sp>
       <p:sp>
         <p:nvSpPr>
-          <p:cNvPr id="282" name="" descr="{&quot;isTemplate&quot;:true,&quot;type&quot;:&quot;text&quot;}"/>
+          <p:cNvPr id="353" name="" descr="{&quot;isTemplate&quot;:true,&quot;type&quot;:&quot;text&quot;}"/>
           <p:cNvSpPr txBox="1"/>
           <p:nvPr/>
         </p:nvSpPr>
@@ -12058,7 +15011,7 @@
                 <a:latin typeface="Microsoft YaHei"/>
                 <a:ea typeface="Microsoft YaHei"/>
               </a:rPr>
-              <a:t>06 / 15</a:t>
+              <a:t>06 / 17</a:t>
             </a:r>
             <a:endParaRPr/>
           </a:p>
@@ -12074,7 +15027,7 @@
   <p:cSld>
     <p:spTree>
       <p:nvGrpSpPr>
-        <p:cNvPr id="283" name="" descr="&lt;Slide&gt;&#10;  &lt;Box style={{ width: '1280px', height: '720px', background: '#FFFFFF', flexDirection: 'column' }}&gt;&#10;    {/* 页眉 */}&#10;    &lt;Box style={{ height: 72, background: '#1E4FA8', flexDirection: 'row', alignItems: 'center', justifyContent: 'space-between', paddingLeft: 40, paddingRight: 40 }}&gt;&#10;      &lt;Text style={{ color: '#FFFFFF', fontSize: 16 }}&gt;基于 RAG 的轻量级企业工艺生成系统&lt;/Text&gt;&#10;      &lt;Text style={{ color: 'rgba(255,255,255,0.85)', fontSize: 14 }}&gt;技术方案&lt;/Text&gt;&#10;    &lt;/Box&gt;&#10;&#10;    {/* 主标题 */}&#10;    &lt;Box style={{ paddingLeft: 40, paddingRight: 40, paddingTop: 22, paddingBottom: 8 }}&gt;&#10;      &lt;Text style={{ color: '#1A2230', fontSize: 34, fontWeight: 'bold' }}&gt;系统总体架构：双链路&lt;/Text&gt;&#10;    &lt;/Box&gt;&#10;&#10;    {/* 架构图（大图 anchor） */}&#10;    &lt;Box style={{ flex: 1, paddingLeft: 40, paddingRight: 40, paddingBottom: 8, alignItems: 'center', justifyContent: 'center' }}&gt;&#10;      &lt;svg width={1180} height={510} viewBox='0 0 1180 510'&gt;&#10;        {/* 离线建库链路（上） */}&#10;        &lt;rect x='0' y='6' width='1180' height='165' rx='12' fill='#F0F5FC' stroke='#D6DCE5' strokeWidth='1.5' /&gt;&#10;        &lt;text x='30' y='40' font-size='20' font-weight='bold' fill='#0E3F8C'&gt;离线建库链路（一次构建）&lt;/text&gt;&#10;&#10;        {/* 离线节点 */}&#10;        &lt;g font-size='15' fill='#1A2230' text-anchor='middle'&gt;&#10;          &lt;rect x='45' y='72' width='158' height='66' rx='8' fill='#FFFFFF' stroke='#1E4FA8' strokeWidth='1.5' /&gt;&#10;          &lt;text x='124' y='100' font-weight='bold'&gt;工艺 PDF&lt;/text&gt;&#10;          &lt;text x='124' y='122' fill='#8B97A8'&gt;原始文档&lt;/text&gt;&#10;&#10;          &lt;rect x='263' y='72' width='158' height='66' rx='8' fill='#FFFFFF' stroke='#1E4FA8' strokeWidth='1.5' /&gt;&#10;          &lt;text x='342' y='100' font-weight='bold'&gt;解析&lt;/text&gt;&#10;          &lt;text x='342' y='122' fill='#8B97A8'&gt;PyMuPDF + pdfplumber&lt;/text&gt;&#10;&#10;          &lt;rect x='481' y='72' width='158' height='66' rx='8' fill='#FFFFFF' stroke='#1E4FA8' strokeWidth='1.5' /&gt;&#10;          &lt;text x='560' y='100' font-weight='bold'&gt;分块&lt;/text&gt;&#10;          &lt;text x='560' y='122' fill='#8B97A8'&gt;递归 + 表格保护&lt;/text&gt;&#10;&#10;          &lt;rect x='699' y='72' width='158' height='66' rx='8' fill='#FFFFFF' stroke='#1E4FA8' strokeWidth='1.5' /&gt;&#10;          &lt;text x='778' y='100' font-weight='bold'&gt;向量化&lt;/text&gt;&#10;          &lt;text x='778' y='122' fill='#8B97A8'&gt;BGE-M3 嵌入&lt;/text&gt;&#10;&#10;          &lt;rect x='917' y='72' width='158' height='66' rx='8' fill='#1E4FA8' /&gt;&#10;          &lt;text x='996' y='100' font-weight='bold' fill='#FFFFFF'&gt;索引入库&lt;/text&gt;&#10;          &lt;text x='996' y='122' fill='#D6E4F7'&gt;Chroma + BM25&lt;/text&gt;&#10;        &lt;/g&gt;&#10;        {/* 离线箭头 */}&#10;        &lt;g stroke='#3D7BD9' stroke-width='2.5' fill='#3D7BD9'&gt;&#10;          &lt;path d='M203 105 L258 105' /&gt;&#10;          &lt;path d='M421 105 L476 105' /&gt;&#10;          &lt;path d='M639 105 L694 105' /&gt;&#10;          &lt;path d='M857 105 L912 105' /&gt;&#10;          &lt;path d='M258 105 l-8 -6 v12 z' /&gt;&#10;          &lt;path d='M476 105 l-8 -6 v12 z' /&gt;&#10;          &lt;path d='M694 105 l-8 -6 v12 z' /&gt;&#10;          &lt;path d='M912 105 l-8 -6 v12 z' /&gt;&#10;        &lt;/g&gt;&#10;&#10;        {/* 知识库（中间，上接离线、下接在线） */}&#10;        &lt;rect x='360' y='208' width='460' height='56' rx='28' fill='#0E3F8C' /&gt;&#10;        &lt;text x='590' y='242' font-size='19' font-weight='bold' fill='#FFFFFF' text-anchor='middle'&gt;工艺知识库（稠密向量 + 稀疏索引）&lt;/text&gt;&#10;        &lt;g stroke='#3D7BD9' stroke-width='2.5' fill='#3D7BD9'&gt;&#10;          {/* 索引入库 → 知识库 */}&#10;          &lt;path d='M996 138 L996 185 L700 220' /&gt;&#10;          &lt;path d='M700 220 l-12 -8 v16 z' /&gt;&#10;          {/* 知识库 → 混合召回 */}&#10;          &lt;path d='M480 264 L380 330' /&gt;&#10;          &lt;path d='M380 330 l-2 12 h4 z' /&gt;&#10;        &lt;/g&gt;&#10;&#10;        {/* 在线问答链路（下） */}&#10;        &lt;rect x='0' y='342' width='1180' height='160' rx='12' fill='#F0F5FC' stroke='#D6DCE5' strokeWidth='1.5' /&gt;&#10;        &lt;text x='30' y='376' font-size='20' font-weight='bold' fill='#0E3F8C'&gt;在线问答链路（每次提问）&lt;/text&gt;&#10;&#10;        &lt;g font-size='14' fill='#1A2230' text-anchor='middle'&gt;&#10;          &lt;rect x='45' y='404' width='150' height='62' rx='8' fill='#FFFFFF' stroke='#1E4FA8' strokeWidth='1.5' /&gt;&#10;          &lt;text x='120' y='430' font-weight='bold'&gt;用户问题&lt;/text&gt;&#10;          &lt;text x='120' y='450' fill='#8B97A8'&gt;查询改写&lt;/text&gt;&#10;&#10;          &lt;rect x='255' y='404' width='150' height='62' rx='8' fill='#FFFFFF' stroke='#1E4FA8' strokeWidth='1.5' /&gt;&#10;          &lt;text x='330' y='430' font-weight='bold'&gt;混合召回&lt;/text&gt;&#10;          &lt;text x='330' y='450' fill='#8B97A8'&gt;稠密 + 稀疏&lt;/text&gt;&#10;&#10;          &lt;rect x='465' y='404' width='150' height='62' rx='8' fill='#FFFFFF' stroke='#1E4FA8' strokeWidth='1.5' /&gt;&#10;          &lt;text x='540' y='430' font-weight='bold'&gt;RRF 融合&lt;/text&gt;&#10;          &lt;text x='540' y='450' fill='#8B97A8'&gt;k=60 去重&lt;/text&gt;&#10;&#10;          &lt;rect x='675' y='404' width='150' height='62' rx='8' fill='#FFFFFF' stroke='#1E4FA8' strokeWidth='1.5' /&gt;&#10;          &lt;text x='750' y='430' font-weight='bold'&gt;重排序&lt;/text&gt;&#10;          &lt;text x='750' y='450' fill='#8B97A8'&gt;bge-reranker&lt;/text&gt;&#10;&#10;          &lt;rect x='885' y='404' width='150' height='62' rx='8' fill='#FFFFFF' stroke='#1E4FA8' strokeWidth='1.5' /&gt;&#10;          &lt;text x='960' y='430' font-weight='bold'&gt;生成&lt;/text&gt;&#10;          &lt;text x='960' y='450' fill='#8B97A8'&gt;大模型 API&lt;/text&gt;&#10;        &lt;/g&gt;&#10;        {/* 加工指令（右侧终点） */}&#10;        &lt;rect x='1050' y='404' width='115' height='62' rx='8' fill='#1E4FA8' /&gt;&#10;        &lt;text x='1107' y='430' font-size='14' font-weight='bold' fill='#FFFFFF' text-anchor='middle'&gt;加工指令&lt;/text&gt;&#10;        &lt;text x='1107' y='450' font-size='14' fill='#D6E4F7' text-anchor='middle'&gt;带引用&lt;/text&gt;&#10;&#10;        &lt;g stroke='#3D7BD9' stroke-width='2.5' fill='#3D7BD9'&gt;&#10;          &lt;path d='M195 435 L250 435' /&gt;&#10;          &lt;path d='M405 435 L460 435' /&gt;&#10;          &lt;path d='M615 435 L670 435' /&gt;&#10;          &lt;path d='M825 435 L880 435' /&gt;&#10;          &lt;path d='M1035 435 L1045 435' /&gt;&#10;          &lt;path d='M250 435 l-8 -6 v12 z' /&gt;&#10;          &lt;path d='M460 435 l-8 -6 v12 z' /&gt;&#10;          &lt;path d='M670 435 l-8 -6 v12 z' /&gt;&#10;          &lt;path d='M880 435 l-8 -6 v12 z' /&gt;&#10;          &lt;path d='M1045 435 l-8 -6 v12 z' /&gt;&#10;        &lt;/g&gt;&#10;      &lt;/svg&gt;&#10;    &lt;/Box&gt;&#10;&#10;    {/* 页脚 */}&#10;    &lt;Box style={{ height: 40, flexDirection: 'row', alignItems: 'center', justifyContent: 'space-between', paddingLeft: 40, paddingRight: 40 }}&gt;&#10;      &lt;Text style={{ color: '#8B97A8', fontSize: 14 }}&gt;中国科学技术大学软件学院&lt;/Text&gt;&#10;      &lt;Text style={{ color: '#1E4FA8', fontSize: 16, fontWeight: 'bold' }}&gt;07 / 15&lt;/Text&gt;&#10;    &lt;/Box&gt;&#10;  &lt;/Box&gt;&#10;&lt;/Slide&gt;&#10;"/>
+        <p:cNvPr id="354" name=""/>
         <p:cNvGrpSpPr/>
         <p:nvPr/>
       </p:nvGrpSpPr>
@@ -12088,7 +15041,7 @@
       </p:grpSpPr>
       <p:sp>
         <p:nvSpPr>
-          <p:cNvPr id="284" name=""/>
+          <p:cNvPr id="355" name=""/>
           <p:cNvSpPr/>
           <p:nvPr/>
         </p:nvSpPr>
@@ -12107,12 +15060,15 @@
         </p:spPr>
         <p:txBody>
           <a:bodyPr/>
-          <a:p/>
-        </p:txBody>
-      </p:sp>
-      <p:sp>
-        <p:nvSpPr>
-          <p:cNvPr id="285" name=""/>
+          <a:p>
+            <a:pPr/>
+            <a:endParaRPr/>
+          </a:p>
+        </p:txBody>
+      </p:sp>
+      <p:sp>
+        <p:nvSpPr>
+          <p:cNvPr id="356" name=""/>
           <p:cNvSpPr/>
           <p:nvPr/>
         </p:nvSpPr>
@@ -12131,12 +15087,15 @@
         </p:spPr>
         <p:txBody>
           <a:bodyPr/>
-          <a:p/>
-        </p:txBody>
-      </p:sp>
-      <p:sp>
-        <p:nvSpPr>
-          <p:cNvPr id="286" name="" descr="{&quot;isTemplate&quot;:true,&quot;type&quot;:&quot;text&quot;}"/>
+          <a:p>
+            <a:pPr/>
+            <a:endParaRPr/>
+          </a:p>
+        </p:txBody>
+      </p:sp>
+      <p:sp>
+        <p:nvSpPr>
+          <p:cNvPr id="357" name="" descr="{&quot;isTemplate&quot;:true,&quot;type&quot;:&quot;text&quot;}"/>
           <p:cNvSpPr txBox="1"/>
           <p:nvPr/>
         </p:nvSpPr>
@@ -12191,7 +15150,7 @@
       </p:sp>
       <p:sp>
         <p:nvSpPr>
-          <p:cNvPr id="287" name="" descr="{&quot;isTemplate&quot;:true,&quot;type&quot;:&quot;text&quot;}"/>
+          <p:cNvPr id="358" name="" descr="{&quot;isTemplate&quot;:true,&quot;type&quot;:&quot;text&quot;}"/>
           <p:cNvSpPr txBox="1"/>
           <p:nvPr/>
         </p:nvSpPr>
@@ -12220,22 +15179,22 @@
                 <a:latin typeface="Microsoft YaHei"/>
                 <a:ea typeface="Microsoft YaHei"/>
               </a:rPr>
-              <a:t>技术方案</a:t>
-            </a:r>
-            <a:endParaRPr/>
-          </a:p>
-        </p:txBody>
-      </p:sp>
-      <p:sp>
-        <p:nvSpPr>
-          <p:cNvPr id="288" name="" descr="{&quot;isTemplate&quot;:true,&quot;type&quot;:&quot;text&quot;}"/>
+              <a:t>项目目标</a:t>
+            </a:r>
+            <a:endParaRPr/>
+          </a:p>
+        </p:txBody>
+      </p:sp>
+      <p:sp>
+        <p:nvSpPr>
+          <p:cNvPr id="359" name="" descr="{&quot;isTemplate&quot;:true,&quot;type&quot;:&quot;text&quot;}"/>
           <p:cNvSpPr txBox="1"/>
           <p:nvPr/>
         </p:nvSpPr>
         <p:spPr>
           <a:xfrm rot="0" flipH="0" flipV="0">
             <a:off x="381000" y="895350"/>
-            <a:ext cx="11430000" cy="390525"/>
+            <a:ext cx="3028950" cy="390525"/>
           </a:xfrm>
           <a:prstGeom prst="rect"/>
         </p:spPr>
@@ -12255,7 +15214,72 @@
                 <a:latin typeface="Microsoft YaHei"/>
                 <a:ea typeface="Microsoft YaHei"/>
               </a:rPr>
-              <a:t>系统总体架构：双链路</a:t>
+              <a:t>系统用例图（</a:t>
+            </a:r>
+            <a:r>
+              <a:rPr lang="en-US" sz="2550" b="1">
+                <a:solidFill>
+                  <a:srgbClr val="1A2230"/>
+                </a:solidFill>
+                <a:latin typeface="Microsoft YaHei"/>
+                <a:ea typeface="Microsoft YaHei"/>
+              </a:rPr>
+              <a:t>UML</a:t>
+            </a:r>
+            <a:r>
+              <a:rPr lang="zh-CN" sz="2550" b="1">
+                <a:solidFill>
+                  <a:srgbClr val="1A2230"/>
+                </a:solidFill>
+                <a:latin typeface="Microsoft YaHei"/>
+                <a:ea typeface="Microsoft YaHei"/>
+              </a:rPr>
+              <a:t>）</a:t>
+            </a:r>
+            <a:endParaRPr/>
+          </a:p>
+        </p:txBody>
+      </p:sp>
+      <p:sp>
+        <p:nvSpPr>
+          <p:cNvPr id="360" name="" descr="{&quot;isTemplate&quot;:true,&quot;type&quot;:&quot;text&quot;}"/>
+          <p:cNvSpPr txBox="1"/>
+          <p:nvPr/>
+        </p:nvSpPr>
+        <p:spPr>
+          <a:xfrm rot="0" flipH="0" flipV="0">
+            <a:off x="3562350" y="895350"/>
+            <a:ext cx="2066925" cy="390525"/>
+          </a:xfrm>
+          <a:prstGeom prst="rect"/>
+        </p:spPr>
+        <p:txBody>
+          <a:bodyPr wrap="none" lIns="0" tIns="0" rIns="0" bIns="0"/>
+          <a:p>
+            <a:pPr>
+              <a:lnSpc>
+                <a:spcPct val="100000"/>
+              </a:lnSpc>
+            </a:pPr>
+            <a:r>
+              <a:rPr lang="en-US" sz="1200">
+                <a:solidFill>
+                  <a:srgbClr val="8B97A8"/>
+                </a:solidFill>
+                <a:latin typeface="Microsoft YaHei"/>
+                <a:ea typeface="Microsoft YaHei"/>
+              </a:rPr>
+              <a:t xml:space="preserve">Use Case Diagram · </a:t>
+            </a:r>
+            <a:r>
+              <a:rPr lang="zh-CN" sz="1200">
+                <a:solidFill>
+                  <a:srgbClr val="8B97A8"/>
+                </a:solidFill>
+                <a:latin typeface="Microsoft YaHei"/>
+                <a:ea typeface="Microsoft YaHei"/>
+              </a:rPr>
+              <a:t>需求分析</a:t>
             </a:r>
             <a:endParaRPr/>
           </a:p>
@@ -12263,7 +15287,7 @@
       </p:sp>
       <p:pic>
         <p:nvPicPr>
-          <p:cNvPr id="289" name=""/>
+          <p:cNvPr id="361" name=""/>
           <p:cNvPicPr>
             <a:picLocks noChangeAspect="1"/>
           </p:cNvPicPr>
@@ -12283,8 +15307,8 @@
         </p:blipFill>
         <p:spPr>
           <a:xfrm rot="0" flipH="0" flipV="0">
-            <a:off x="476250" y="1457325"/>
-            <a:ext cx="11239500" cy="4857750"/>
+            <a:off x="476250" y="1428750"/>
+            <a:ext cx="11239500" cy="4953000"/>
           </a:xfrm>
           <a:prstGeom prst="rect">
             <a:avLst/>
@@ -12294,7 +15318,7 @@
       </p:pic>
       <p:sp>
         <p:nvSpPr>
-          <p:cNvPr id="290" name="" descr="{&quot;isTemplate&quot;:true,&quot;type&quot;:&quot;text&quot;}"/>
+          <p:cNvPr id="362" name="" descr="{&quot;isTemplate&quot;:true,&quot;type&quot;:&quot;text&quot;}"/>
           <p:cNvSpPr txBox="1"/>
           <p:nvPr/>
         </p:nvSpPr>
@@ -12329,7 +15353,7 @@
       </p:sp>
       <p:sp>
         <p:nvSpPr>
-          <p:cNvPr id="291" name="" descr="{&quot;isTemplate&quot;:true,&quot;type&quot;:&quot;text&quot;}"/>
+          <p:cNvPr id="363" name="" descr="{&quot;isTemplate&quot;:true,&quot;type&quot;:&quot;text&quot;}"/>
           <p:cNvSpPr txBox="1"/>
           <p:nvPr/>
         </p:nvSpPr>
@@ -12356,7 +15380,7 @@
                 <a:latin typeface="Microsoft YaHei"/>
                 <a:ea typeface="Microsoft YaHei"/>
               </a:rPr>
-              <a:t>07 / 15</a:t>
+              <a:t>07 / 17</a:t>
             </a:r>
             <a:endParaRPr/>
           </a:p>
@@ -12368,11 +15392,11 @@
 </file>
 
 <file path=ppt/slides/slide8.xml><?xml version="1.0" encoding="utf-8"?>
-<p:sld xmlns:p="http://schemas.openxmlformats.org/presentationml/2006/main" xmlns:a="http://schemas.openxmlformats.org/drawingml/2006/main">
+<p:sld xmlns:p="http://schemas.openxmlformats.org/presentationml/2006/main" xmlns:a="http://schemas.openxmlformats.org/drawingml/2006/main" xmlns:asvg="http://schemas.microsoft.com/office/drawing/2016/SVG/main" xmlns:r="http://schemas.openxmlformats.org/officeDocument/2006/relationships" xmlns:mc="http://schemas.openxmlformats.org/markup-compatibility/2006" mc:Ignorable="asvg">
   <p:cSld>
     <p:spTree>
       <p:nvGrpSpPr>
-        <p:cNvPr id="292" name="" descr="&lt;Slide&gt;&#10;  &lt;Box style={{ width: '1280px', height: '720px', background: '#FFFFFF', flexDirection: 'column' }}&gt;&#10;    {/* 页眉 */}&#10;    &lt;Box style={{ height: 72, background: '#1E4FA8', flexDirection: 'row', alignItems: 'center', justifyContent: 'space-between', paddingLeft: 40, paddingRight: 40 }}&gt;&#10;      &lt;Text style={{ color: '#FFFFFF', fontSize: 16 }}&gt;基于 RAG 的轻量级企业工艺生成系统&lt;/Text&gt;&#10;      &lt;Text style={{ color: 'rgba(255,255,255,0.85)', fontSize: 14 }}&gt;技术方案&lt;/Text&gt;&#10;    &lt;/Box&gt;&#10;&#10;    {/* 左标题栏 + 右流程 */}&#10;    &lt;Box style={{ flex: 1, flexDirection: 'row', paddingLeft: 40, paddingRight: 40, paddingTop: 28, paddingBottom: 16, gap: 40 }}&gt;&#10;      {/* 左标题栏 */}&#10;      &lt;Box style={{ width: 300, flexDirection: 'column', justifyContent: 'space-between', gap: 16 }}&gt;&#10;        &lt;Box style={{ flexDirection: 'column', gap: 16 }}&gt;&#10;          &lt;Box style={{ width: 48, height: 4, background: '#3D7BD9', borderRadius: 2 }} /&gt;&#10;          &lt;Text style={{ color: '#1A2230', fontSize: 34, fontWeight: 'bold', lineHeight: 1.3 }}&gt;离线建库链路&lt;/Text&gt;&#10;          &lt;Text style={{ color: '#8B97A8', fontSize: 16, lineHeight: 1.5 }}&gt;一次构建，为在线问答准备可检索的知识库&lt;/Text&gt;&#10;        &lt;/Box&gt;&#10;        &lt;Box style={{ padding: 18, background: '#0E3F8C', borderRadius: 8 }}&gt;&#10;          &lt;Text style={{ color: '#FFFFFF', fontSize: 18, fontWeight: 'bold' }}&gt;关键点&lt;/Text&gt;&#10;          &lt;Text style={{ color: '#D6E4F7', fontSize: 15, lineHeight: 1.6, marginTop: 8 }}&gt;&#10;            表格保护：解析保留表格结构，分块保护完整表格，块记录来源文档、页码、章节元数据。&#10;          &lt;/Text&gt;&#10;        &lt;/Box&gt;&#10;      &lt;/Box&gt;&#10;&#10;      {/* 右：流程节点串（纵向，撑满） */}&#10;      &lt;Box style={{ flex: 1, flexDirection: 'column', justifyContent: 'space-between' }}&gt;&#10;        {[&#10;          { t: '文档解析', d: 'PyMuPDF 提取文字/页码/版面，pdfplumber 抽取表格结构', n: '1' },&#10;          { t: '文档分块', d: '递归字符分块 + 表格保护 + 相邻块重叠', n: '2' },&#10;          { t: '向量化', d: 'BGE-M3 嵌入模型生成稠密向量', n: '3' },&#10;          { t: '索引入库', d: 'Chroma 写入稠密向量，rank_bm25 构建稀疏索引', n: '4' },&#10;        ].map((item) =&gt; (&#10;          &lt;Box key={item.n} style={{ flexDirection: 'row', alignItems: 'center', gap: 20, padding: 22, background: '#F7F9FC', borderRadius: 10, border: '1px solid #E5E7EB' }}&gt;&#10;            &lt;Box style={{ width: 46, height: 46, background: '#1E4FA8', borderRadius: 23, alignItems: 'center', justifyContent: 'center' }}&gt;&#10;              &lt;Text style={{ color: '#FFFFFF', fontSize: 20, fontWeight: 'bold' }}&gt;{item.n}&lt;/Text&gt;&#10;            &lt;/Box&gt;&#10;            &lt;Box style={{ flex: 1, flexDirection: 'column', gap: 6 }}&gt;&#10;              &lt;Text style={{ color: '#1A2230', fontSize: 22, fontWeight: 'bold' }}&gt;{item.t}&lt;/Text&gt;&#10;              &lt;Text style={{ color: '#4A5568', fontSize: 16, lineHeight: 1.5 }}&gt;{item.d}&lt;/Text&gt;&#10;            &lt;/Box&gt;&#10;          &lt;/Box&gt;&#10;        ))}&#10;      &lt;/Box&gt;&#10;    &lt;/Box&gt;&#10;&#10;    {/* 页脚 */}&#10;    &lt;Box style={{ height: 40, flexDirection: 'row', alignItems: 'center', justifyContent: 'space-between', paddingLeft: 40, paddingRight: 40 }}&gt;&#10;      &lt;Text style={{ color: '#8B97A8', fontSize: 14 }}&gt;中国科学技术大学软件学院&lt;/Text&gt;&#10;      &lt;Text style={{ color: '#1E4FA8', fontSize: 16, fontWeight: 'bold' }}&gt;08 / 15&lt;/Text&gt;&#10;    &lt;/Box&gt;&#10;  &lt;/Box&gt;&#10;&lt;/Slide&gt;&#10;"/>
+        <p:cNvPr id="364" name=""/>
         <p:cNvGrpSpPr/>
         <p:nvPr/>
       </p:nvGrpSpPr>
@@ -12386,7 +15410,7 @@
       </p:grpSpPr>
       <p:sp>
         <p:nvSpPr>
-          <p:cNvPr id="293" name=""/>
+          <p:cNvPr id="365" name=""/>
           <p:cNvSpPr/>
           <p:nvPr/>
         </p:nvSpPr>
@@ -12405,12 +15429,15 @@
         </p:spPr>
         <p:txBody>
           <a:bodyPr/>
-          <a:p/>
-        </p:txBody>
-      </p:sp>
-      <p:sp>
-        <p:nvSpPr>
-          <p:cNvPr id="294" name=""/>
+          <a:p>
+            <a:pPr/>
+            <a:endParaRPr/>
+          </a:p>
+        </p:txBody>
+      </p:sp>
+      <p:sp>
+        <p:nvSpPr>
+          <p:cNvPr id="366" name=""/>
           <p:cNvSpPr/>
           <p:nvPr/>
         </p:nvSpPr>
@@ -12429,12 +15456,15 @@
         </p:spPr>
         <p:txBody>
           <a:bodyPr/>
-          <a:p/>
-        </p:txBody>
-      </p:sp>
-      <p:sp>
-        <p:nvSpPr>
-          <p:cNvPr id="295" name="" descr="{&quot;isTemplate&quot;:true,&quot;type&quot;:&quot;text&quot;}"/>
+          <a:p>
+            <a:pPr/>
+            <a:endParaRPr/>
+          </a:p>
+        </p:txBody>
+      </p:sp>
+      <p:sp>
+        <p:nvSpPr>
+          <p:cNvPr id="367" name="" descr="{&quot;isTemplate&quot;:true,&quot;type&quot;:&quot;text&quot;}"/>
           <p:cNvSpPr txBox="1"/>
           <p:nvPr/>
         </p:nvSpPr>
@@ -12489,7 +15519,7 @@
       </p:sp>
       <p:sp>
         <p:nvSpPr>
-          <p:cNvPr id="296" name="" descr="{&quot;isTemplate&quot;:true,&quot;type&quot;:&quot;text&quot;}"/>
+          <p:cNvPr id="368" name="" descr="{&quot;isTemplate&quot;:true,&quot;type&quot;:&quot;text&quot;}"/>
           <p:cNvSpPr txBox="1"/>
           <p:nvPr/>
         </p:nvSpPr>
@@ -12526,1001 +15556,73 @@
       </p:sp>
       <p:sp>
         <p:nvSpPr>
-          <p:cNvPr id="297" name=""/>
-          <p:cNvSpPr/>
-          <p:nvPr/>
-        </p:nvSpPr>
-        <p:spPr>
-          <a:xfrm rot="0" flipH="0" flipV="0">
-            <a:off x="381000" y="952500"/>
-            <a:ext cx="457200" cy="38100"/>
-          </a:xfrm>
-          <a:prstGeom prst="roundRect">
-            <a:avLst>
-              <a:gd name="adj" fmla="val 50000"/>
-            </a:avLst>
+          <p:cNvPr id="369" name="" descr="{&quot;isTemplate&quot;:true,&quot;type&quot;:&quot;text&quot;}"/>
+          <p:cNvSpPr txBox="1"/>
+          <p:nvPr/>
+        </p:nvSpPr>
+        <p:spPr>
+          <a:xfrm rot="0" flipH="0" flipV="0">
+            <a:off x="381000" y="895350"/>
+            <a:ext cx="11430000" cy="390525"/>
+          </a:xfrm>
+          <a:prstGeom prst="rect"/>
+        </p:spPr>
+        <p:txBody>
+          <a:bodyPr wrap="none" lIns="0" tIns="0" rIns="0" bIns="0"/>
+          <a:p>
+            <a:pPr>
+              <a:lnSpc>
+                <a:spcPct val="100000"/>
+              </a:lnSpc>
+            </a:pPr>
+            <a:r>
+              <a:rPr lang="zh-CN" sz="2550" b="1">
+                <a:solidFill>
+                  <a:srgbClr val="1A2230"/>
+                </a:solidFill>
+                <a:latin typeface="Microsoft YaHei"/>
+                <a:ea typeface="Microsoft YaHei"/>
+              </a:rPr>
+              <a:t>系统总体架构：双链路</a:t>
+            </a:r>
+            <a:endParaRPr/>
+          </a:p>
+        </p:txBody>
+      </p:sp>
+      <p:pic>
+        <p:nvPicPr>
+          <p:cNvPr id="370" name=""/>
+          <p:cNvPicPr>
+            <a:picLocks noChangeAspect="1"/>
+          </p:cNvPicPr>
+          <p:nvPr/>
+        </p:nvPicPr>
+        <p:blipFill>
+          <a:blip>
+            <a:extLst>
+              <a:ext uri="{96DAC541-7B7A-43D3-8B79-37D633B846F1}">
+                <asvg:svgBlip r:embed="rId1"/>
+              </a:ext>
+            </a:extLst>
+          </a:blip>
+          <a:stretch>
+            <a:fillRect/>
+          </a:stretch>
+        </p:blipFill>
+        <p:spPr>
+          <a:xfrm rot="0" flipH="0" flipV="0">
+            <a:off x="476250" y="1457325"/>
+            <a:ext cx="11239500" cy="4857750"/>
+          </a:xfrm>
+          <a:prstGeom prst="rect">
+            <a:avLst/>
           </a:prstGeom>
-          <a:solidFill>
-            <a:srgbClr val="3D7BD9"/>
-          </a:solidFill>
           <a:ln/>
         </p:spPr>
-        <p:txBody>
-          <a:bodyPr/>
-          <a:p/>
-        </p:txBody>
-      </p:sp>
-      <p:sp>
-        <p:nvSpPr>
-          <p:cNvPr id="298" name="" descr="{&quot;isTemplate&quot;:true,&quot;type&quot;:&quot;text&quot;}"/>
-          <p:cNvSpPr txBox="1"/>
-          <p:nvPr/>
-        </p:nvSpPr>
-        <p:spPr>
-          <a:xfrm rot="0" flipH="0" flipV="0">
-            <a:off x="381000" y="1143000"/>
-            <a:ext cx="2857500" cy="514350"/>
-          </a:xfrm>
-          <a:prstGeom prst="rect"/>
-        </p:spPr>
-        <p:txBody>
-          <a:bodyPr wrap="none" lIns="0" tIns="0" rIns="0" bIns="0"/>
-          <a:p>
-            <a:pPr>
-              <a:lnSpc>
-                <a:spcPct val="130000"/>
-              </a:lnSpc>
-            </a:pPr>
-            <a:r>
-              <a:rPr lang="zh-CN" sz="2550" b="1">
-                <a:solidFill>
-                  <a:srgbClr val="1A2230"/>
-                </a:solidFill>
-                <a:latin typeface="Microsoft YaHei"/>
-                <a:ea typeface="Microsoft YaHei"/>
-              </a:rPr>
-              <a:t>离线建库链路</a:t>
-            </a:r>
-            <a:endParaRPr/>
-          </a:p>
-        </p:txBody>
-      </p:sp>
-      <p:sp>
-        <p:nvSpPr>
-          <p:cNvPr id="299" name="" descr="{&quot;isTemplate&quot;:true,&quot;type&quot;:&quot;text&quot;}"/>
-          <p:cNvSpPr txBox="1"/>
-          <p:nvPr/>
-        </p:nvSpPr>
-        <p:spPr>
-          <a:xfrm rot="0" flipH="0" flipV="0">
-            <a:off x="381000" y="1809750"/>
-            <a:ext cx="2857500" cy="552450"/>
-          </a:xfrm>
-          <a:prstGeom prst="rect"/>
-        </p:spPr>
-        <p:txBody>
-          <a:bodyPr wrap="square" lIns="0" tIns="0" rIns="0" bIns="0">
-            <a:normAutofit/>
-          </a:bodyPr>
-          <a:p>
-            <a:pPr>
-              <a:lnSpc>
-                <a:spcPct val="150000"/>
-              </a:lnSpc>
-            </a:pPr>
-            <a:r>
-              <a:rPr lang="zh-CN" sz="1200">
-                <a:solidFill>
-                  <a:srgbClr val="8B97A8"/>
-                </a:solidFill>
-                <a:latin typeface="Microsoft YaHei"/>
-                <a:ea typeface="Microsoft YaHei"/>
-              </a:rPr>
-              <a:t>一次构建，为在线问答准备可检索的知识库</a:t>
-            </a:r>
-            <a:endParaRPr/>
-          </a:p>
-        </p:txBody>
-      </p:sp>
-      <p:sp>
-        <p:nvSpPr>
-          <p:cNvPr id="300" name=""/>
-          <p:cNvSpPr/>
-          <p:nvPr/>
-        </p:nvSpPr>
-        <p:spPr>
-          <a:xfrm rot="0" flipH="0" flipV="0">
-            <a:off x="381000" y="4867275"/>
-            <a:ext cx="2857500" cy="1457325"/>
-          </a:xfrm>
-          <a:prstGeom prst="roundRect">
-            <a:avLst>
-              <a:gd name="adj" fmla="val 5229"/>
-            </a:avLst>
-          </a:prstGeom>
-          <a:solidFill>
-            <a:srgbClr val="0E3F8C"/>
-          </a:solidFill>
-          <a:ln/>
-        </p:spPr>
-        <p:txBody>
-          <a:bodyPr/>
-          <a:p/>
-        </p:txBody>
-      </p:sp>
-      <p:sp>
-        <p:nvSpPr>
-          <p:cNvPr id="301" name="" descr="{&quot;isTemplate&quot;:true,&quot;type&quot;:&quot;text&quot;}"/>
-          <p:cNvSpPr txBox="1"/>
-          <p:nvPr/>
-        </p:nvSpPr>
-        <p:spPr>
-          <a:xfrm rot="0" flipH="0" flipV="0">
-            <a:off x="552450" y="5038725"/>
-            <a:ext cx="2514600" cy="209550"/>
-          </a:xfrm>
-          <a:prstGeom prst="rect"/>
-        </p:spPr>
-        <p:txBody>
-          <a:bodyPr wrap="none" lIns="0" tIns="0" rIns="0" bIns="0"/>
-          <a:p>
-            <a:pPr>
-              <a:lnSpc>
-                <a:spcPct val="100000"/>
-              </a:lnSpc>
-            </a:pPr>
-            <a:r>
-              <a:rPr lang="zh-CN" sz="1350" b="1">
-                <a:solidFill>
-                  <a:srgbClr val="FFFFFF"/>
-                </a:solidFill>
-                <a:latin typeface="Microsoft YaHei"/>
-                <a:ea typeface="Microsoft YaHei"/>
-              </a:rPr>
-              <a:t>关键点</a:t>
-            </a:r>
-            <a:endParaRPr/>
-          </a:p>
-        </p:txBody>
-      </p:sp>
-      <p:sp>
-        <p:nvSpPr>
-          <p:cNvPr id="302" name="" descr="{&quot;isTemplate&quot;:true,&quot;type&quot;:&quot;text&quot;}"/>
-          <p:cNvSpPr txBox="1"/>
-          <p:nvPr/>
-        </p:nvSpPr>
-        <p:spPr>
-          <a:xfrm rot="0" flipH="0" flipV="0">
-            <a:off x="552450" y="5324475"/>
-            <a:ext cx="2514600" cy="828675"/>
-          </a:xfrm>
-          <a:prstGeom prst="rect"/>
-        </p:spPr>
-        <p:txBody>
-          <a:bodyPr wrap="square" lIns="0" tIns="0" rIns="0" bIns="0">
-            <a:normAutofit/>
-          </a:bodyPr>
-          <a:p>
-            <a:pPr>
-              <a:lnSpc>
-                <a:spcPct val="160000"/>
-              </a:lnSpc>
-            </a:pPr>
-            <a:r>
-              <a:rPr lang="zh-CN" sz="1125">
-                <a:solidFill>
-                  <a:srgbClr val="D6E4F7"/>
-                </a:solidFill>
-                <a:latin typeface="Microsoft YaHei"/>
-                <a:ea typeface="Microsoft YaHei"/>
-              </a:rPr>
-              <a:t>表格保护：解析保留表格结构，分块保护完整表格，块记录来源文档、页码、章节元数据。</a:t>
-            </a:r>
-            <a:endParaRPr/>
-          </a:p>
-        </p:txBody>
-      </p:sp>
-      <p:sp>
-        <p:nvSpPr>
-          <p:cNvPr id="303" name=""/>
-          <p:cNvSpPr/>
-          <p:nvPr/>
-        </p:nvSpPr>
-        <p:spPr>
-          <a:xfrm rot="0" flipH="0" flipV="0">
-            <a:off x="3619500" y="952500"/>
-            <a:ext cx="8191500" cy="1009650"/>
-          </a:xfrm>
-          <a:prstGeom prst="roundRect">
-            <a:avLst>
-              <a:gd name="adj" fmla="val 9434"/>
-            </a:avLst>
-          </a:prstGeom>
-          <a:solidFill>
-            <a:srgbClr val="F7F9FC"/>
-          </a:solidFill>
-          <a:ln w="12700">
-            <a:solidFill>
-              <a:srgbClr val="E5E7EB"/>
-            </a:solidFill>
-            <a:prstDash val="solid"/>
-          </a:ln>
-        </p:spPr>
-        <p:txBody>
-          <a:bodyPr/>
-          <a:p/>
-        </p:txBody>
-      </p:sp>
-      <p:sp>
-        <p:nvSpPr>
-          <p:cNvPr id="304" name=""/>
-          <p:cNvSpPr/>
-          <p:nvPr/>
-        </p:nvSpPr>
-        <p:spPr>
-          <a:xfrm rot="0" flipH="0" flipV="0">
-            <a:off x="3829050" y="1238250"/>
-            <a:ext cx="438150" cy="438150"/>
-          </a:xfrm>
-          <a:prstGeom prst="roundRect">
-            <a:avLst>
-              <a:gd name="adj" fmla="val 50000"/>
-            </a:avLst>
-          </a:prstGeom>
-          <a:solidFill>
-            <a:srgbClr val="1E4FA8"/>
-          </a:solidFill>
-          <a:ln/>
-        </p:spPr>
-        <p:txBody>
-          <a:bodyPr/>
-          <a:p/>
-        </p:txBody>
-      </p:sp>
-      <p:sp>
-        <p:nvSpPr>
-          <p:cNvPr id="305" name="" descr="{&quot;isTemplate&quot;:true,&quot;type&quot;:&quot;text&quot;}"/>
-          <p:cNvSpPr txBox="1"/>
-          <p:nvPr/>
-        </p:nvSpPr>
-        <p:spPr>
-          <a:xfrm rot="0" flipH="0" flipV="0">
-            <a:off x="3990975" y="1343025"/>
-            <a:ext cx="123825" cy="228600"/>
-          </a:xfrm>
-          <a:prstGeom prst="rect"/>
-        </p:spPr>
-        <p:txBody>
-          <a:bodyPr wrap="none" lIns="0" tIns="0" rIns="0" bIns="0"/>
-          <a:p>
-            <a:pPr>
-              <a:lnSpc>
-                <a:spcPct val="100000"/>
-              </a:lnSpc>
-            </a:pPr>
-            <a:r>
-              <a:rPr lang="en-US" sz="1500" b="1">
-                <a:solidFill>
-                  <a:srgbClr val="FFFFFF"/>
-                </a:solidFill>
-                <a:latin typeface="Microsoft YaHei"/>
-                <a:ea typeface="Microsoft YaHei"/>
-              </a:rPr>
-              <a:t>1</a:t>
-            </a:r>
-            <a:endParaRPr/>
-          </a:p>
-        </p:txBody>
-      </p:sp>
-      <p:sp>
-        <p:nvSpPr>
-          <p:cNvPr id="306" name="" descr="{&quot;isTemplate&quot;:true,&quot;type&quot;:&quot;text&quot;}"/>
-          <p:cNvSpPr txBox="1"/>
-          <p:nvPr/>
-        </p:nvSpPr>
-        <p:spPr>
-          <a:xfrm rot="0" flipH="0" flipV="0">
-            <a:off x="4457700" y="1162050"/>
-            <a:ext cx="7143750" cy="257175"/>
-          </a:xfrm>
-          <a:prstGeom prst="rect"/>
-        </p:spPr>
-        <p:txBody>
-          <a:bodyPr wrap="none" lIns="0" tIns="0" rIns="0" bIns="0"/>
-          <a:p>
-            <a:pPr>
-              <a:lnSpc>
-                <a:spcPct val="100000"/>
-              </a:lnSpc>
-            </a:pPr>
-            <a:r>
-              <a:rPr lang="zh-CN" sz="1650" b="1">
-                <a:solidFill>
-                  <a:srgbClr val="1A2230"/>
-                </a:solidFill>
-                <a:latin typeface="Microsoft YaHei"/>
-                <a:ea typeface="Microsoft YaHei"/>
-              </a:rPr>
-              <a:t>文档解析</a:t>
-            </a:r>
-            <a:endParaRPr/>
-          </a:p>
-        </p:txBody>
-      </p:sp>
-      <p:sp>
-        <p:nvSpPr>
-          <p:cNvPr id="307" name="" descr="{&quot;isTemplate&quot;:true,&quot;type&quot;:&quot;text&quot;}"/>
-          <p:cNvSpPr txBox="1"/>
-          <p:nvPr/>
-        </p:nvSpPr>
-        <p:spPr>
-          <a:xfrm rot="0" flipH="0" flipV="0">
-            <a:off x="4457700" y="1476375"/>
-            <a:ext cx="7143750" cy="276225"/>
-          </a:xfrm>
-          <a:prstGeom prst="rect"/>
-        </p:spPr>
-        <p:txBody>
-          <a:bodyPr wrap="none" lIns="0" tIns="0" rIns="0" bIns="0"/>
-          <a:p>
-            <a:pPr>
-              <a:lnSpc>
-                <a:spcPct val="150000"/>
-              </a:lnSpc>
-            </a:pPr>
-            <a:r>
-              <a:rPr lang="en-US" sz="1200">
-                <a:solidFill>
-                  <a:srgbClr val="4A5568"/>
-                </a:solidFill>
-                <a:latin typeface="Microsoft YaHei"/>
-                <a:ea typeface="Microsoft YaHei"/>
-              </a:rPr>
-              <a:t xml:space="preserve">PyMuPDF </a:t>
-            </a:r>
-            <a:r>
-              <a:rPr lang="zh-CN" sz="1200">
-                <a:solidFill>
-                  <a:srgbClr val="4A5568"/>
-                </a:solidFill>
-                <a:latin typeface="Microsoft YaHei"/>
-                <a:ea typeface="Microsoft YaHei"/>
-              </a:rPr>
-              <a:t>提取文字</a:t>
-            </a:r>
-            <a:r>
-              <a:rPr lang="en-US" sz="1200">
-                <a:solidFill>
-                  <a:srgbClr val="4A5568"/>
-                </a:solidFill>
-                <a:latin typeface="Microsoft YaHei"/>
-                <a:ea typeface="Microsoft YaHei"/>
-              </a:rPr>
-              <a:t>/</a:t>
-            </a:r>
-            <a:r>
-              <a:rPr lang="zh-CN" sz="1200">
-                <a:solidFill>
-                  <a:srgbClr val="4A5568"/>
-                </a:solidFill>
-                <a:latin typeface="Microsoft YaHei"/>
-                <a:ea typeface="Microsoft YaHei"/>
-              </a:rPr>
-              <a:t>页码</a:t>
-            </a:r>
-            <a:r>
-              <a:rPr lang="en-US" sz="1200">
-                <a:solidFill>
-                  <a:srgbClr val="4A5568"/>
-                </a:solidFill>
-                <a:latin typeface="Microsoft YaHei"/>
-                <a:ea typeface="Microsoft YaHei"/>
-              </a:rPr>
-              <a:t>/</a:t>
-            </a:r>
-            <a:r>
-              <a:rPr lang="zh-CN" sz="1200">
-                <a:solidFill>
-                  <a:srgbClr val="4A5568"/>
-                </a:solidFill>
-                <a:latin typeface="Microsoft YaHei"/>
-                <a:ea typeface="Microsoft YaHei"/>
-              </a:rPr>
-              <a:t>版面，</a:t>
-            </a:r>
-            <a:r>
-              <a:rPr lang="en-US" sz="1200">
-                <a:solidFill>
-                  <a:srgbClr val="4A5568"/>
-                </a:solidFill>
-                <a:latin typeface="Microsoft YaHei"/>
-                <a:ea typeface="Microsoft YaHei"/>
-              </a:rPr>
-              <a:t xml:space="preserve">pdfplumber </a:t>
-            </a:r>
-            <a:r>
-              <a:rPr lang="zh-CN" sz="1200">
-                <a:solidFill>
-                  <a:srgbClr val="4A5568"/>
-                </a:solidFill>
-                <a:latin typeface="Microsoft YaHei"/>
-                <a:ea typeface="Microsoft YaHei"/>
-              </a:rPr>
-              <a:t>抽取表格结构</a:t>
-            </a:r>
-            <a:endParaRPr/>
-          </a:p>
-        </p:txBody>
-      </p:sp>
-      <p:sp>
-        <p:nvSpPr>
-          <p:cNvPr id="308" name=""/>
-          <p:cNvSpPr/>
-          <p:nvPr/>
-        </p:nvSpPr>
-        <p:spPr>
-          <a:xfrm rot="0" flipH="0" flipV="0">
-            <a:off x="3619500" y="2409825"/>
-            <a:ext cx="8191500" cy="1009650"/>
-          </a:xfrm>
-          <a:prstGeom prst="roundRect">
-            <a:avLst>
-              <a:gd name="adj" fmla="val 9434"/>
-            </a:avLst>
-          </a:prstGeom>
-          <a:solidFill>
-            <a:srgbClr val="F7F9FC"/>
-          </a:solidFill>
-          <a:ln w="12700">
-            <a:solidFill>
-              <a:srgbClr val="E5E7EB"/>
-            </a:solidFill>
-            <a:prstDash val="solid"/>
-          </a:ln>
-        </p:spPr>
-        <p:txBody>
-          <a:bodyPr/>
-          <a:p/>
-        </p:txBody>
-      </p:sp>
-      <p:sp>
-        <p:nvSpPr>
-          <p:cNvPr id="309" name=""/>
-          <p:cNvSpPr/>
-          <p:nvPr/>
-        </p:nvSpPr>
-        <p:spPr>
-          <a:xfrm rot="0" flipH="0" flipV="0">
-            <a:off x="3829050" y="2695575"/>
-            <a:ext cx="438150" cy="438150"/>
-          </a:xfrm>
-          <a:prstGeom prst="roundRect">
-            <a:avLst>
-              <a:gd name="adj" fmla="val 50000"/>
-            </a:avLst>
-          </a:prstGeom>
-          <a:solidFill>
-            <a:srgbClr val="1E4FA8"/>
-          </a:solidFill>
-          <a:ln/>
-        </p:spPr>
-        <p:txBody>
-          <a:bodyPr/>
-          <a:p/>
-        </p:txBody>
-      </p:sp>
-      <p:sp>
-        <p:nvSpPr>
-          <p:cNvPr id="310" name="" descr="{&quot;isTemplate&quot;:true,&quot;type&quot;:&quot;text&quot;}"/>
-          <p:cNvSpPr txBox="1"/>
-          <p:nvPr/>
-        </p:nvSpPr>
-        <p:spPr>
-          <a:xfrm rot="0" flipH="0" flipV="0">
-            <a:off x="3990975" y="2800350"/>
-            <a:ext cx="123825" cy="228600"/>
-          </a:xfrm>
-          <a:prstGeom prst="rect"/>
-        </p:spPr>
-        <p:txBody>
-          <a:bodyPr wrap="none" lIns="0" tIns="0" rIns="0" bIns="0"/>
-          <a:p>
-            <a:pPr>
-              <a:lnSpc>
-                <a:spcPct val="100000"/>
-              </a:lnSpc>
-            </a:pPr>
-            <a:r>
-              <a:rPr lang="en-US" sz="1500" b="1">
-                <a:solidFill>
-                  <a:srgbClr val="FFFFFF"/>
-                </a:solidFill>
-                <a:latin typeface="Microsoft YaHei"/>
-                <a:ea typeface="Microsoft YaHei"/>
-              </a:rPr>
-              <a:t>2</a:t>
-            </a:r>
-            <a:endParaRPr/>
-          </a:p>
-        </p:txBody>
-      </p:sp>
-      <p:sp>
-        <p:nvSpPr>
-          <p:cNvPr id="311" name="" descr="{&quot;isTemplate&quot;:true,&quot;type&quot;:&quot;text&quot;}"/>
-          <p:cNvSpPr txBox="1"/>
-          <p:nvPr/>
-        </p:nvSpPr>
-        <p:spPr>
-          <a:xfrm rot="0" flipH="0" flipV="0">
-            <a:off x="4457700" y="2619375"/>
-            <a:ext cx="7143750" cy="257175"/>
-          </a:xfrm>
-          <a:prstGeom prst="rect"/>
-        </p:spPr>
-        <p:txBody>
-          <a:bodyPr wrap="none" lIns="0" tIns="0" rIns="0" bIns="0"/>
-          <a:p>
-            <a:pPr>
-              <a:lnSpc>
-                <a:spcPct val="100000"/>
-              </a:lnSpc>
-            </a:pPr>
-            <a:r>
-              <a:rPr lang="zh-CN" sz="1650" b="1">
-                <a:solidFill>
-                  <a:srgbClr val="1A2230"/>
-                </a:solidFill>
-                <a:latin typeface="Microsoft YaHei"/>
-                <a:ea typeface="Microsoft YaHei"/>
-              </a:rPr>
-              <a:t>文档分块</a:t>
-            </a:r>
-            <a:endParaRPr/>
-          </a:p>
-        </p:txBody>
-      </p:sp>
-      <p:sp>
-        <p:nvSpPr>
-          <p:cNvPr id="312" name="" descr="{&quot;isTemplate&quot;:true,&quot;type&quot;:&quot;text&quot;}"/>
-          <p:cNvSpPr txBox="1"/>
-          <p:nvPr/>
-        </p:nvSpPr>
-        <p:spPr>
-          <a:xfrm rot="0" flipH="0" flipV="0">
-            <a:off x="4457700" y="2933700"/>
-            <a:ext cx="7143750" cy="276225"/>
-          </a:xfrm>
-          <a:prstGeom prst="rect"/>
-        </p:spPr>
-        <p:txBody>
-          <a:bodyPr wrap="none" lIns="0" tIns="0" rIns="0" bIns="0"/>
-          <a:p>
-            <a:pPr>
-              <a:lnSpc>
-                <a:spcPct val="150000"/>
-              </a:lnSpc>
-            </a:pPr>
-            <a:r>
-              <a:rPr lang="zh-CN" sz="1200">
-                <a:solidFill>
-                  <a:srgbClr val="4A5568"/>
-                </a:solidFill>
-                <a:latin typeface="Microsoft YaHei"/>
-                <a:ea typeface="Microsoft YaHei"/>
-              </a:rPr>
-              <a:t>递归字符分块</a:t>
-            </a:r>
-            <a:r>
-              <a:rPr lang="en-US" sz="1200">
-                <a:solidFill>
-                  <a:srgbClr val="4A5568"/>
-                </a:solidFill>
-                <a:latin typeface="Microsoft YaHei"/>
-                <a:ea typeface="Microsoft YaHei"/>
-              </a:rPr>
-              <a:t xml:space="preserve"> + </a:t>
-            </a:r>
-            <a:r>
-              <a:rPr lang="zh-CN" sz="1200">
-                <a:solidFill>
-                  <a:srgbClr val="4A5568"/>
-                </a:solidFill>
-                <a:latin typeface="Microsoft YaHei"/>
-                <a:ea typeface="Microsoft YaHei"/>
-              </a:rPr>
-              <a:t>表格保护</a:t>
-            </a:r>
-            <a:r>
-              <a:rPr lang="en-US" sz="1200">
-                <a:solidFill>
-                  <a:srgbClr val="4A5568"/>
-                </a:solidFill>
-                <a:latin typeface="Microsoft YaHei"/>
-                <a:ea typeface="Microsoft YaHei"/>
-              </a:rPr>
-              <a:t xml:space="preserve"> + </a:t>
-            </a:r>
-            <a:r>
-              <a:rPr lang="zh-CN" sz="1200">
-                <a:solidFill>
-                  <a:srgbClr val="4A5568"/>
-                </a:solidFill>
-                <a:latin typeface="Microsoft YaHei"/>
-                <a:ea typeface="Microsoft YaHei"/>
-              </a:rPr>
-              <a:t>相邻块重叠</a:t>
-            </a:r>
-            <a:endParaRPr/>
-          </a:p>
-        </p:txBody>
-      </p:sp>
-      <p:sp>
-        <p:nvSpPr>
-          <p:cNvPr id="313" name=""/>
-          <p:cNvSpPr/>
-          <p:nvPr/>
-        </p:nvSpPr>
-        <p:spPr>
-          <a:xfrm rot="0" flipH="0" flipV="0">
-            <a:off x="3619500" y="3857625"/>
-            <a:ext cx="8191500" cy="1009650"/>
-          </a:xfrm>
-          <a:prstGeom prst="roundRect">
-            <a:avLst>
-              <a:gd name="adj" fmla="val 9434"/>
-            </a:avLst>
-          </a:prstGeom>
-          <a:solidFill>
-            <a:srgbClr val="F7F9FC"/>
-          </a:solidFill>
-          <a:ln w="12700">
-            <a:solidFill>
-              <a:srgbClr val="E5E7EB"/>
-            </a:solidFill>
-            <a:prstDash val="solid"/>
-          </a:ln>
-        </p:spPr>
-        <p:txBody>
-          <a:bodyPr/>
-          <a:p/>
-        </p:txBody>
-      </p:sp>
-      <p:sp>
-        <p:nvSpPr>
-          <p:cNvPr id="314" name=""/>
-          <p:cNvSpPr/>
-          <p:nvPr/>
-        </p:nvSpPr>
-        <p:spPr>
-          <a:xfrm rot="0" flipH="0" flipV="0">
-            <a:off x="3829050" y="4143375"/>
-            <a:ext cx="438150" cy="438150"/>
-          </a:xfrm>
-          <a:prstGeom prst="roundRect">
-            <a:avLst>
-              <a:gd name="adj" fmla="val 50000"/>
-            </a:avLst>
-          </a:prstGeom>
-          <a:solidFill>
-            <a:srgbClr val="1E4FA8"/>
-          </a:solidFill>
-          <a:ln/>
-        </p:spPr>
-        <p:txBody>
-          <a:bodyPr/>
-          <a:p/>
-        </p:txBody>
-      </p:sp>
-      <p:sp>
-        <p:nvSpPr>
-          <p:cNvPr id="315" name="" descr="{&quot;isTemplate&quot;:true,&quot;type&quot;:&quot;text&quot;}"/>
-          <p:cNvSpPr txBox="1"/>
-          <p:nvPr/>
-        </p:nvSpPr>
-        <p:spPr>
-          <a:xfrm rot="0" flipH="0" flipV="0">
-            <a:off x="3990975" y="4248150"/>
-            <a:ext cx="123825" cy="228600"/>
-          </a:xfrm>
-          <a:prstGeom prst="rect"/>
-        </p:spPr>
-        <p:txBody>
-          <a:bodyPr wrap="none" lIns="0" tIns="0" rIns="0" bIns="0"/>
-          <a:p>
-            <a:pPr>
-              <a:lnSpc>
-                <a:spcPct val="100000"/>
-              </a:lnSpc>
-            </a:pPr>
-            <a:r>
-              <a:rPr lang="en-US" sz="1500" b="1">
-                <a:solidFill>
-                  <a:srgbClr val="FFFFFF"/>
-                </a:solidFill>
-                <a:latin typeface="Microsoft YaHei"/>
-                <a:ea typeface="Microsoft YaHei"/>
-              </a:rPr>
-              <a:t>3</a:t>
-            </a:r>
-            <a:endParaRPr/>
-          </a:p>
-        </p:txBody>
-      </p:sp>
-      <p:sp>
-        <p:nvSpPr>
-          <p:cNvPr id="316" name="" descr="{&quot;isTemplate&quot;:true,&quot;type&quot;:&quot;text&quot;}"/>
-          <p:cNvSpPr txBox="1"/>
-          <p:nvPr/>
-        </p:nvSpPr>
-        <p:spPr>
-          <a:xfrm rot="0" flipH="0" flipV="0">
-            <a:off x="4457700" y="4067175"/>
-            <a:ext cx="7143750" cy="257175"/>
-          </a:xfrm>
-          <a:prstGeom prst="rect"/>
-        </p:spPr>
-        <p:txBody>
-          <a:bodyPr wrap="none" lIns="0" tIns="0" rIns="0" bIns="0"/>
-          <a:p>
-            <a:pPr>
-              <a:lnSpc>
-                <a:spcPct val="100000"/>
-              </a:lnSpc>
-            </a:pPr>
-            <a:r>
-              <a:rPr lang="zh-CN" sz="1650" b="1">
-                <a:solidFill>
-                  <a:srgbClr val="1A2230"/>
-                </a:solidFill>
-                <a:latin typeface="Microsoft YaHei"/>
-                <a:ea typeface="Microsoft YaHei"/>
-              </a:rPr>
-              <a:t>向量化</a:t>
-            </a:r>
-            <a:endParaRPr/>
-          </a:p>
-        </p:txBody>
-      </p:sp>
-      <p:sp>
-        <p:nvSpPr>
-          <p:cNvPr id="317" name="" descr="{&quot;isTemplate&quot;:true,&quot;type&quot;:&quot;text&quot;}"/>
-          <p:cNvSpPr txBox="1"/>
-          <p:nvPr/>
-        </p:nvSpPr>
-        <p:spPr>
-          <a:xfrm rot="0" flipH="0" flipV="0">
-            <a:off x="4457700" y="4381500"/>
-            <a:ext cx="7143750" cy="276225"/>
-          </a:xfrm>
-          <a:prstGeom prst="rect"/>
-        </p:spPr>
-        <p:txBody>
-          <a:bodyPr wrap="none" lIns="0" tIns="0" rIns="0" bIns="0"/>
-          <a:p>
-            <a:pPr>
-              <a:lnSpc>
-                <a:spcPct val="150000"/>
-              </a:lnSpc>
-            </a:pPr>
-            <a:r>
-              <a:rPr lang="en-US" sz="1200">
-                <a:solidFill>
-                  <a:srgbClr val="4A5568"/>
-                </a:solidFill>
-                <a:latin typeface="Microsoft YaHei"/>
-                <a:ea typeface="Microsoft YaHei"/>
-              </a:rPr>
-              <a:t xml:space="preserve">BGE-M3 </a:t>
-            </a:r>
-            <a:r>
-              <a:rPr lang="zh-CN" sz="1200">
-                <a:solidFill>
-                  <a:srgbClr val="4A5568"/>
-                </a:solidFill>
-                <a:latin typeface="Microsoft YaHei"/>
-                <a:ea typeface="Microsoft YaHei"/>
-              </a:rPr>
-              <a:t>嵌入模型生成稠密向量</a:t>
-            </a:r>
-            <a:endParaRPr/>
-          </a:p>
-        </p:txBody>
-      </p:sp>
-      <p:sp>
-        <p:nvSpPr>
-          <p:cNvPr id="318" name=""/>
-          <p:cNvSpPr/>
-          <p:nvPr/>
-        </p:nvSpPr>
-        <p:spPr>
-          <a:xfrm rot="0" flipH="0" flipV="0">
-            <a:off x="3619500" y="5314950"/>
-            <a:ext cx="8191500" cy="1009650"/>
-          </a:xfrm>
-          <a:prstGeom prst="roundRect">
-            <a:avLst>
-              <a:gd name="adj" fmla="val 9434"/>
-            </a:avLst>
-          </a:prstGeom>
-          <a:solidFill>
-            <a:srgbClr val="F7F9FC"/>
-          </a:solidFill>
-          <a:ln w="12700">
-            <a:solidFill>
-              <a:srgbClr val="E5E7EB"/>
-            </a:solidFill>
-            <a:prstDash val="solid"/>
-          </a:ln>
-        </p:spPr>
-        <p:txBody>
-          <a:bodyPr/>
-          <a:p/>
-        </p:txBody>
-      </p:sp>
-      <p:sp>
-        <p:nvSpPr>
-          <p:cNvPr id="319" name=""/>
-          <p:cNvSpPr/>
-          <p:nvPr/>
-        </p:nvSpPr>
-        <p:spPr>
-          <a:xfrm rot="0" flipH="0" flipV="0">
-            <a:off x="3829050" y="5600700"/>
-            <a:ext cx="438150" cy="438150"/>
-          </a:xfrm>
-          <a:prstGeom prst="roundRect">
-            <a:avLst>
-              <a:gd name="adj" fmla="val 50000"/>
-            </a:avLst>
-          </a:prstGeom>
-          <a:solidFill>
-            <a:srgbClr val="1E4FA8"/>
-          </a:solidFill>
-          <a:ln/>
-        </p:spPr>
-        <p:txBody>
-          <a:bodyPr/>
-          <a:p/>
-        </p:txBody>
-      </p:sp>
-      <p:sp>
-        <p:nvSpPr>
-          <p:cNvPr id="320" name="" descr="{&quot;isTemplate&quot;:true,&quot;type&quot;:&quot;text&quot;}"/>
-          <p:cNvSpPr txBox="1"/>
-          <p:nvPr/>
-        </p:nvSpPr>
-        <p:spPr>
-          <a:xfrm rot="0" flipH="0" flipV="0">
-            <a:off x="3990975" y="5705475"/>
-            <a:ext cx="123825" cy="228600"/>
-          </a:xfrm>
-          <a:prstGeom prst="rect"/>
-        </p:spPr>
-        <p:txBody>
-          <a:bodyPr wrap="none" lIns="0" tIns="0" rIns="0" bIns="0"/>
-          <a:p>
-            <a:pPr>
-              <a:lnSpc>
-                <a:spcPct val="100000"/>
-              </a:lnSpc>
-            </a:pPr>
-            <a:r>
-              <a:rPr lang="en-US" sz="1500" b="1">
-                <a:solidFill>
-                  <a:srgbClr val="FFFFFF"/>
-                </a:solidFill>
-                <a:latin typeface="Microsoft YaHei"/>
-                <a:ea typeface="Microsoft YaHei"/>
-              </a:rPr>
-              <a:t>4</a:t>
-            </a:r>
-            <a:endParaRPr/>
-          </a:p>
-        </p:txBody>
-      </p:sp>
-      <p:sp>
-        <p:nvSpPr>
-          <p:cNvPr id="321" name="" descr="{&quot;isTemplate&quot;:true,&quot;type&quot;:&quot;text&quot;}"/>
-          <p:cNvSpPr txBox="1"/>
-          <p:nvPr/>
-        </p:nvSpPr>
-        <p:spPr>
-          <a:xfrm rot="0" flipH="0" flipV="0">
-            <a:off x="4457700" y="5524500"/>
-            <a:ext cx="7143750" cy="257175"/>
-          </a:xfrm>
-          <a:prstGeom prst="rect"/>
-        </p:spPr>
-        <p:txBody>
-          <a:bodyPr wrap="none" lIns="0" tIns="0" rIns="0" bIns="0"/>
-          <a:p>
-            <a:pPr>
-              <a:lnSpc>
-                <a:spcPct val="100000"/>
-              </a:lnSpc>
-            </a:pPr>
-            <a:r>
-              <a:rPr lang="zh-CN" sz="1650" b="1">
-                <a:solidFill>
-                  <a:srgbClr val="1A2230"/>
-                </a:solidFill>
-                <a:latin typeface="Microsoft YaHei"/>
-                <a:ea typeface="Microsoft YaHei"/>
-              </a:rPr>
-              <a:t>索引入库</a:t>
-            </a:r>
-            <a:endParaRPr/>
-          </a:p>
-        </p:txBody>
-      </p:sp>
-      <p:sp>
-        <p:nvSpPr>
-          <p:cNvPr id="322" name="" descr="{&quot;isTemplate&quot;:true,&quot;type&quot;:&quot;text&quot;}"/>
-          <p:cNvSpPr txBox="1"/>
-          <p:nvPr/>
-        </p:nvSpPr>
-        <p:spPr>
-          <a:xfrm rot="0" flipH="0" flipV="0">
-            <a:off x="4457700" y="5838825"/>
-            <a:ext cx="7143750" cy="276225"/>
-          </a:xfrm>
-          <a:prstGeom prst="rect"/>
-        </p:spPr>
-        <p:txBody>
-          <a:bodyPr wrap="none" lIns="0" tIns="0" rIns="0" bIns="0"/>
-          <a:p>
-            <a:pPr>
-              <a:lnSpc>
-                <a:spcPct val="150000"/>
-              </a:lnSpc>
-            </a:pPr>
-            <a:r>
-              <a:rPr lang="en-US" sz="1200">
-                <a:solidFill>
-                  <a:srgbClr val="4A5568"/>
-                </a:solidFill>
-                <a:latin typeface="Microsoft YaHei"/>
-                <a:ea typeface="Microsoft YaHei"/>
-              </a:rPr>
-              <a:t xml:space="preserve">Chroma </a:t>
-            </a:r>
-            <a:r>
-              <a:rPr lang="zh-CN" sz="1200">
-                <a:solidFill>
-                  <a:srgbClr val="4A5568"/>
-                </a:solidFill>
-                <a:latin typeface="Microsoft YaHei"/>
-                <a:ea typeface="Microsoft YaHei"/>
-              </a:rPr>
-              <a:t>写入稠密向量，</a:t>
-            </a:r>
-            <a:r>
-              <a:rPr lang="en-US" sz="1200">
-                <a:solidFill>
-                  <a:srgbClr val="4A5568"/>
-                </a:solidFill>
-                <a:latin typeface="Microsoft YaHei"/>
-                <a:ea typeface="Microsoft YaHei"/>
-              </a:rPr>
-              <a:t xml:space="preserve">rank_bm25 </a:t>
-            </a:r>
-            <a:r>
-              <a:rPr lang="zh-CN" sz="1200">
-                <a:solidFill>
-                  <a:srgbClr val="4A5568"/>
-                </a:solidFill>
-                <a:latin typeface="Microsoft YaHei"/>
-                <a:ea typeface="Microsoft YaHei"/>
-              </a:rPr>
-              <a:t>构建稀疏索引</a:t>
-            </a:r>
-            <a:endParaRPr/>
-          </a:p>
-        </p:txBody>
-      </p:sp>
-      <p:sp>
-        <p:nvSpPr>
-          <p:cNvPr id="323" name="" descr="{&quot;isTemplate&quot;:true,&quot;type&quot;:&quot;text&quot;}"/>
+      </p:pic>
+      <p:sp>
+        <p:nvSpPr>
+          <p:cNvPr id="371" name="" descr="{&quot;isTemplate&quot;:true,&quot;type&quot;:&quot;text&quot;}"/>
           <p:cNvSpPr txBox="1"/>
           <p:nvPr/>
         </p:nvSpPr>
@@ -13555,7 +15657,7 @@
       </p:sp>
       <p:sp>
         <p:nvSpPr>
-          <p:cNvPr id="324" name="" descr="{&quot;isTemplate&quot;:true,&quot;type&quot;:&quot;text&quot;}"/>
+          <p:cNvPr id="372" name="" descr="{&quot;isTemplate&quot;:true,&quot;type&quot;:&quot;text&quot;}"/>
           <p:cNvSpPr txBox="1"/>
           <p:nvPr/>
         </p:nvSpPr>
@@ -13582,7 +15684,7 @@
                 <a:latin typeface="Microsoft YaHei"/>
                 <a:ea typeface="Microsoft YaHei"/>
               </a:rPr>
-              <a:t>08 / 15</a:t>
+              <a:t>08 / 17</a:t>
             </a:r>
             <a:endParaRPr/>
           </a:p>
@@ -13594,11 +15696,11 @@
 </file>
 
 <file path=ppt/slides/slide9.xml><?xml version="1.0" encoding="utf-8"?>
-<p:sld xmlns:p="http://schemas.openxmlformats.org/presentationml/2006/main" xmlns:a="http://schemas.openxmlformats.org/drawingml/2006/main">
+<p:sld xmlns:p="http://schemas.openxmlformats.org/presentationml/2006/main" xmlns:a="http://schemas.openxmlformats.org/drawingml/2006/main" xmlns:asvg="http://schemas.microsoft.com/office/drawing/2016/SVG/main" xmlns:r="http://schemas.openxmlformats.org/officeDocument/2006/relationships" xmlns:mc="http://schemas.openxmlformats.org/markup-compatibility/2006" mc:Ignorable="asvg">
   <p:cSld>
     <p:spTree>
       <p:nvGrpSpPr>
-        <p:cNvPr id="325" name="" descr="&lt;Slide&gt;&#10;  &lt;Box style={{ width: '1280px', height: '720px', background: '#FFFFFF', flexDirection: 'column' }}&gt;&#10;    {/* 页眉 */}&#10;    &lt;Box style={{ height: 72, background: '#1E4FA8', flexDirection: 'row', alignItems: 'center', justifyContent: 'space-between', paddingLeft: 40, paddingRight: 40 }}&gt;&#10;      &lt;Text style={{ color: '#FFFFFF', fontSize: 16 }}&gt;基于 RAG 的轻量级企业工艺生成系统&lt;/Text&gt;&#10;      &lt;Text style={{ color: 'rgba(255,255,255,0.85)', fontSize: 14 }}&gt;技术方案&lt;/Text&gt;&#10;    &lt;/Box&gt;&#10;&#10;    {/* 左标题栏 + 右流程 */}&#10;    &lt;Box style={{ flex: 1, flexDirection: 'row', paddingLeft: 40, paddingRight: 40, paddingTop: 28, paddingBottom: 16, gap: 40 }}&gt;&#10;      {/* 左标题栏 */}&#10;      &lt;Box style={{ width: 300, flexDirection: 'column', justifyContent: 'space-between', gap: 16 }}&gt;&#10;        &lt;Box style={{ flexDirection: 'column', gap: 16 }}&gt;&#10;          &lt;Box style={{ width: 48, height: 4, background: '#3D7BD9', borderRadius: 2 }} /&gt;&#10;          &lt;Text style={{ color: '#1A2230', fontSize: 34, fontWeight: 'bold', lineHeight: 1.3 }}&gt;在线问答链路&lt;/Text&gt;&#10;          &lt;Text style={{ color: '#8B97A8', fontSize: 16, lineHeight: 1.5 }}&gt;每次提问，从知识库检索并生成带引用的加工指令&lt;/Text&gt;&#10;        &lt;/Box&gt;&#10;        &lt;Box style={{ padding: 18, background: '#0E3F8C', borderRadius: 8 }}&gt;&#10;          &lt;Text style={{ color: '#FFFFFF', fontSize: 18, fontWeight: 'bold' }}&gt;关键点&lt;/Text&gt;&#10;          &lt;Text style={{ color: '#D6E4F7', fontSize: 15, lineHeight: 1.6, marginTop: 8 }}&gt;&#10;            多轮查询改写：把含代词、省略的追问补全为独立问题，再走检索链路。&#10;          &lt;/Text&gt;&#10;        &lt;/Box&gt;&#10;      &lt;/Box&gt;&#10;&#10;      {/* 右：流程节点串（纵向，撑满） */}&#10;      &lt;Box style={{ flex: 1, flexDirection: 'column', justifyContent: 'space-between' }}&gt;&#10;        {[&#10;          { t: '查询改写', d: '记录历史，将追问补全为独立问题', n: '1' },&#10;          { t: '混合召回', d: '并行执行向量检索 + BM25 检索', n: '2' },&#10;          { t: 'RRF 融合', d: 'k=60 合并两路结果并去重', n: '3' },&#10;          { t: '重排序', d: 'bge-reranker-v2-m3 精排，取 top 3~5', n: '4' },&#10;          { t: '生成 + 溯源', d: '拼装 Prompt 调用大模型，生成带引用的结构化指令', n: '5' },&#10;        ].map((item) =&gt; (&#10;          &lt;Box key={item.n} style={{ flexDirection: 'row', alignItems: 'center', gap: 20, padding: 16, background: '#F7F9FC', borderRadius: 10, border: '1px solid #E5E7EB' }}&gt;&#10;            &lt;Box style={{ width: 46, height: 46, background: '#1E4FA8', borderRadius: 23, alignItems: 'center', justifyContent: 'center' }}&gt;&#10;              &lt;Text style={{ color: '#FFFFFF', fontSize: 20, fontWeight: 'bold' }}&gt;{item.n}&lt;/Text&gt;&#10;            &lt;/Box&gt;&#10;            &lt;Box style={{ flex: 1, flexDirection: 'column', gap: 6 }}&gt;&#10;              &lt;Text style={{ color: '#1A2230', fontSize: 22, fontWeight: 'bold' }}&gt;{item.t}&lt;/Text&gt;&#10;              &lt;Text style={{ color: '#4A5568', fontSize: 16, lineHeight: 1.5 }}&gt;{item.d}&lt;/Text&gt;&#10;            &lt;/Box&gt;&#10;          &lt;/Box&gt;&#10;        ))}&#10;      &lt;/Box&gt;&#10;    &lt;/Box&gt;&#10;&#10;    {/* 页脚 */}&#10;    &lt;Box style={{ height: 40, flexDirection: 'row', alignItems: 'center', justifyContent: 'space-between', paddingLeft: 40, paddingRight: 40 }}&gt;&#10;      &lt;Text style={{ color: '#8B97A8', fontSize: 14 }}&gt;中国科学技术大学软件学院&lt;/Text&gt;&#10;      &lt;Text style={{ color: '#1E4FA8', fontSize: 16, fontWeight: 'bold' }}&gt;09 / 15&lt;/Text&gt;&#10;    &lt;/Box&gt;&#10;  &lt;/Box&gt;&#10;&lt;/Slide&gt;&#10;"/>
+        <p:cNvPr id="373" name="" descr="&lt;Slide&gt;&#10;  &lt;Box style={{ width: '1280px', height: '720px', background: '#FFFFFF', flexDirection: 'column' }}&gt;&#10;    {/* 页眉 */}&#10;    &lt;Box style={{ height: 72, background: '#1E4FA8', flexDirection: 'row', alignItems: 'center', justifyContent: 'space-between', paddingLeft: 40, paddingRight: 40 }}&gt;&#10;      &lt;Text style={{ color: '#FFFFFF', fontSize: 16 }}&gt;基于 RAG 的轻量级企业工艺生成系统&lt;/Text&gt;&#10;      &lt;Text style={{ color: 'rgba(255,255,255,0.85)', fontSize: 14 }}&gt;技术方案&lt;/Text&gt;&#10;    &lt;/Box&gt;&#10;&#10;    {/* 主标题 */}&#10;    &lt;Box style={{ paddingLeft: 40, paddingRight: 40, paddingTop: 22, paddingBottom: 8, flexDirection: 'row', alignItems: 'baseline', gap: 16 }}&gt;&#10;      &lt;Text style={{ color: '#1A2230', fontSize: 34, fontWeight: 'bold' }}&gt;系统组件图（UML）&lt;/Text&gt;&#10;      &lt;Text style={{ color: '#8B97A8', fontSize: 16 }}&gt;Component Diagram · 概要设计&lt;/Text&gt;&#10;    &lt;/Box&gt;&#10;&#10;    {/* 组件图（大图 anchor） */}&#10;    &lt;Box style={{ flex: 1, paddingLeft: 40, paddingRight: 40, paddingBottom: 4, alignItems: 'center', justifyContent: 'center' }}&gt;&#10;      &lt;svg width={1180} height={520} viewBox='0 0 1180 520'&gt;&#10;        {/* 离线建库链路（一组组件，用虚线框表示逻辑分组，非泳道） */}&#10;        &lt;text x='40' y='50' font-size='19' font-weight='bold' fill='#0E3F8C'&gt;离线建库（一次构建）&lt;/text&gt;&#10;&#10;        &lt;g&gt;&#10;          &lt;rect x='40' y='70' width='220' height='95' rx='6' fill='#FFFFFF' stroke='#1E4FA8' strokeWidth='2' /&gt;&#10;          &lt;rect x='226' y='62' width='22' height='12' rx='2' fill='#FFFFFF' stroke='#1E4FA8' strokeWidth='1.5' /&gt;&#10;          &lt;rect x='234' y='58' width='12' height='8' rx='2' fill='#FFFFFF' stroke='#1E4FA8' strokeWidth='1.5' /&gt;&#10;          &lt;text x='150' y='105' text-anchor='middle' font-size='17' font-weight='bold' fill='#1A2230'&gt;文档解析&lt;/text&gt;&#10;          &lt;text x='150' y='127' text-anchor='middle' font-size='12' fill='#8B97A8'&gt;«component»&lt;/text&gt;&#10;          &lt;text x='150' y='149' text-anchor='middle' font-size='12' fill='#4A5568'&gt;PyMuPDF + pdfplumber&lt;/text&gt;&#10;&#10;          &lt;rect x='320' y='70' width='220' height='95' rx='6' fill='#FFFFFF' stroke='#1E4FA8' strokeWidth='2' /&gt;&#10;          &lt;rect x='506' y='62' width='22' height='12' rx='2' fill='#FFFFFF' stroke='#1E4FA8' strokeWidth='1.5' /&gt;&#10;          &lt;rect x='514' y='58' width='12' height='8' rx='2' fill='#FFFFFF' stroke='#1E4FA8' strokeWidth='1.5' /&gt;&#10;          &lt;text x='430' y='105' text-anchor='middle' font-size='17' font-weight='bold' fill='#1A2230'&gt;文档分块&lt;/text&gt;&#10;          &lt;text x='430' y='127' text-anchor='middle' font-size='12' fill='#8B97A8'&gt;«component»&lt;/text&gt;&#10;          &lt;text x='430' y='149' text-anchor='middle' font-size='12' fill='#4A5568'&gt;递归分块 + 表格保护&lt;/text&gt;&#10;&#10;          &lt;rect x='600' y='70' width='220' height='95' rx='6' fill='#FFFFFF' stroke='#1E4FA8' strokeWidth='2' /&gt;&#10;          &lt;rect x='786' y='62' width='22' height='12' rx='2' fill='#FFFFFF' stroke='#1E4FA8' strokeWidth='1.5' /&gt;&#10;          &lt;rect x='794' y='58' width='12' height='8' rx='2' fill='#FFFFFF' stroke='#1E4FA8' strokeWidth='1.5' /&gt;&#10;          &lt;text x='710' y='105' text-anchor='middle' font-size='17' font-weight='bold' fill='#1A2230'&gt;向量化&lt;/text&gt;&#10;          &lt;text x='710' y='127' text-anchor='middle' font-size='12' fill='#8B97A8'&gt;«component»&lt;/text&gt;&#10;          &lt;text x='710' y='149' text-anchor='middle' font-size='12' fill='#4A5568'&gt;BGE-M3 嵌入&lt;/text&gt;&#10;&#10;          &lt;rect x='880' y='70' width='220' height='95' rx='6' fill='#1E4FA8' /&gt;&#10;          &lt;rect x='1066' y='62' width='22' height='12' rx='2' fill='#1E4FA8' stroke='#FFFFFF' strokeWidth='1.5' /&gt;&#10;          &lt;rect x='1074' y='58' width='12' height='8' rx='2' fill='#1E4FA8' stroke='#FFFFFF' strokeWidth='1.5' /&gt;&#10;          &lt;text x='990' y='105' text-anchor='middle' font-size='17' font-weight='bold' fill='#FFFFFF'&gt;索引构建&lt;/text&gt;&#10;          &lt;text x='990' y='127' text-anchor='middle' font-size='12' fill='#D6E4F7'&gt;«component»&lt;/text&gt;&#10;          &lt;text x='990' y='149' text-anchor='middle' font-size='12' fill='#D6E4F7'&gt;Chroma + BM25&lt;/text&gt;&#10;        &lt;/g&gt;&#10;        {/* 离线依赖箭头（虚线开放箭头 = UML 依赖） */}&#10;        &lt;g stroke='#3D7BD9' stroke-width='2' fill='none' stroke-dasharray='6 4'&gt;&#10;          &lt;path d='M260 117 L312 117' /&gt;&#10;          &lt;path d='M540 117 L592 117' /&gt;&#10;          &lt;path d='M820 117 L872 117' /&gt;&#10;        &lt;/g&gt;&#10;        &lt;g stroke='#3D7BD9' stroke-width='2' fill='#3D7BD9'&gt;&#10;          &lt;path d='M312 117 l-8 -6 v12 z' /&gt;&#10;          &lt;path d='M592 117 l-8 -6 v12 z' /&gt;&#10;          &lt;path d='M872 117 l-8 -6 v12 z' /&gt;&#10;        &lt;/g&gt;&#10;        {/* 接口名（棒棒糖 lollipop，标注在依赖关系上） */}&#10;        &lt;g font-size='11' fill='#3D7BD9'&gt;&#10;          &lt;text x='286' y='108'&gt;IChunk&lt;/text&gt;&#10;          &lt;text x='566' y='108'&gt;IVector&lt;/text&gt;&#10;          &lt;text x='846' y='108'&gt;IIndex&lt;/text&gt;&#10;        &lt;/g&gt;&#10;&#10;        {/* 在线问答链路（一组组件） */}&#10;        &lt;text x='40' y='245' font-size='19' font-weight='bold' fill='#0E3F8C'&gt;在线问答（每次提问）&lt;/text&gt;&#10;&#10;        &lt;g&gt;&#10;          &lt;rect x='40' y='265' width='165' height='95' rx='6' fill='#FFFFFF' stroke='#1E4FA8' strokeWidth='2' /&gt;&#10;          &lt;rect x='171' y='257' width='22' height='12' rx='2' fill='#FFFFFF' stroke='#1E4FA8' strokeWidth='1.5' /&gt;&#10;          &lt;rect x='179' y='253' width='12' height='8' rx='2' fill='#FFFFFF' stroke='#1E4FA8' strokeWidth='1.5' /&gt;&#10;          &lt;text x='122' y='300' text-anchor='middle' font-size='16' font-weight='bold' fill='#1A2230'&gt;对话管理&lt;/text&gt;&#10;          &lt;text x='122' y='322' text-anchor='middle' font-size='12' fill='#8B97A8'&gt;«component»&lt;/text&gt;&#10;          &lt;text x='122' y='344' text-anchor='middle' font-size='12' fill='#4A5568'&gt;查询改写&lt;/text&gt;&#10;&#10;          &lt;rect x='243' y='265' width='165' height='95' rx='6' fill='#FFFFFF' stroke='#1E4FA8' strokeWidth='2' /&gt;&#10;          &lt;rect x='374' y='257' width='22' height='12' rx='2' fill='#FFFFFF' stroke='#1E4FA8' strokeWidth='1.5' /&gt;&#10;          &lt;rect x='382' y='253' width='12' height='8' rx='2' fill='#FFFFFF' stroke='#1E4FA8' strokeWidth='1.5' /&gt;&#10;          &lt;text x='325' y='300' text-anchor='middle' font-size='16' font-weight='bold' fill='#1A2230'&gt;混合检索&lt;/text&gt;&#10;          &lt;text x='325' y='322' text-anchor='middle' font-size='12' fill='#8B97A8'&gt;«component»&lt;/text&gt;&#10;          &lt;text x='325' y='344' text-anchor='middle' font-size='12' fill='#4A5568'&gt;稠密 + 稀疏&lt;/text&gt;&#10;&#10;          &lt;rect x='446' y='265' width='165' height='95' rx='6' fill='#FFFFFF' stroke='#1E4FA8' strokeWidth='2' /&gt;&#10;          &lt;rect x='577' y='257' width='22' height='12' rx='2' fill='#FFFFFF' stroke='#1E4FA8' strokeWidth='1.5' /&gt;&#10;          &lt;rect x='585' y='253' width='12' height='8' rx='2' fill='#FFFFFF' stroke='#1E4FA8' strokeWidth='1.5' /&gt;&#10;          &lt;text x='528' y='300' text-anchor='middle' font-size='16' font-weight='bold' fill='#1A2230'&gt;重排序&lt;/text&gt;&#10;          &lt;text x='528' y='322' text-anchor='middle' font-size='12' fill='#8B97A8'&gt;«component»&lt;/text&gt;&#10;          &lt;text x='528' y='344' text-anchor='middle' font-size='12' fill='#4A5568'&gt;bge-reranker&lt;/text&gt;&#10;&#10;          &lt;rect x='649' y='265' width='165' height='95' rx='6' fill='#FFFFFF' stroke='#1E4FA8' strokeWidth='2' /&gt;&#10;          &lt;rect x='780' y='257' width='22' height='12' rx='2' fill='#FFFFFF' stroke='#1E4FA8' strokeWidth='1.5' /&gt;&#10;          &lt;rect x='788' y='253' width='12' height='8' rx='2' fill='#FFFFFF' stroke='#1E4FA8' strokeWidth='1.5' /&gt;&#10;          &lt;text x='731' y='300' text-anchor='middle' font-size='16' font-weight='bold' fill='#1A2230'&gt;生成&lt;/text&gt;&#10;          &lt;text x='731' y='322' text-anchor='middle' font-size='12' fill='#8B97A8'&gt;«component»&lt;/text&gt;&#10;          &lt;text x='731' y='344' text-anchor='middle' font-size='12' fill='#4A5568'&gt;大模型 API&lt;/text&gt;&#10;&#10;          &lt;rect x='852' y='265' width='165' height='95' rx='6' fill='#FFFFFF' stroke='#1E4FA8' strokeWidth='2' /&gt;&#10;          &lt;rect x='983' y='257' width='22' height='12' rx='2' fill='#FFFFFF' stroke='#1E4FA8' strokeWidth='1.5' /&gt;&#10;          &lt;rect x='991' y='253' width='12' height='8' rx='2' fill='#FFFFFF' stroke='#1E4FA8' strokeWidth='1.5' /&gt;&#10;          &lt;text x='934' y='300' text-anchor='middle' font-size='16' font-weight='bold' fill='#1A2230'&gt;引用溯源&lt;/text&gt;&#10;          &lt;text x='934' y='322' text-anchor='middle' font-size='12' fill='#8B97A8'&gt;«component»&lt;/text&gt;&#10;          &lt;text x='934' y='344' text-anchor='middle' font-size='12' fill='#4A5568'&gt;页码定位&lt;/text&gt;&#10;&#10;          &lt;rect x='1055' y='265' width='165' height='95' rx='6' fill='#1E4FA8' /&gt;&#10;          &lt;rect x='1186' y='257' width='22' height='12' rx='2' fill='#1E4FA8' stroke='#FFFFFF' strokeWidth='1.5' /&gt;&#10;          &lt;rect x='1194' y='253' width='12' height='8' rx='2' fill='#1E4FA8' stroke='#FFFFFF' strokeWidth='1.5' /&gt;&#10;          &lt;text x='1137' y='300' text-anchor='middle' font-size='16' font-weight='bold' fill='#FFFFFF'&gt;Web 界面&lt;/text&gt;&#10;          &lt;text x='1137' y='322' text-anchor='middle' font-size='12' fill='#D6E4F7'&gt;«component»&lt;/text&gt;&#10;          &lt;text x='1137' y='344' text-anchor='middle' font-size='12' fill='#D6E4F7'&gt;Gradio&lt;/text&gt;&#10;        &lt;/g&gt;&#10;        {/* 在线依赖箭头（虚线开放箭头 = UML 依赖） */}&#10;        &lt;g stroke='#3D7BD9' stroke-width='2' fill='none' stroke-dasharray='6 4'&gt;&#10;          &lt;path d='M205 312 L235 312' /&gt;&#10;          &lt;path d='M408 312 L438 312' /&gt;&#10;          &lt;path d='M611 312 L641 312' /&gt;&#10;          &lt;path d='M814 312 L844 312' /&gt;&#10;          &lt;path d='M1017 312 L1047 312' /&gt;&#10;        &lt;/g&gt;&#10;        &lt;g stroke='#3D7BD9' stroke-width='2' fill='#3D7BD9'&gt;&#10;          &lt;path d='M235 312 l-8 -6 v12 z' /&gt;&#10;          &lt;path d='M438 312 l-8 -6 v12 z' /&gt;&#10;          &lt;path d='M641 312 l-8 -6 v12 z' /&gt;&#10;          &lt;path d='M844 312 l-8 -6 v12 z' /&gt;&#10;          &lt;path d='M1047 312 l-8 -6 v12 z' /&gt;&#10;        &lt;/g&gt;&#10;        {/* 接口名 */}&#10;        &lt;g font-size='11' fill='#3D7BD9'&gt;&#10;          &lt;text x='220' y='303'&gt;IQuery&lt;/text&gt;&#10;          &lt;text x='423' y='303'&gt;IRetrieve&lt;/text&gt;&#10;          &lt;text x='626' y='303'&gt;IRerank&lt;/text&gt;&#10;          &lt;text x='829' y='303'&gt;IGenerate&lt;/text&gt;&#10;          &lt;text x='1032' y='303'&gt;ICite&lt;/text&gt;&#10;        &lt;/g&gt;&#10;&#10;        {/* 依赖关系：在线检索依赖离线索引组件（虚线开放箭头） */}&#10;        &lt;path d='M240 360 C240 470 990 470 990 178' fill='none' stroke='#3D7BD9' stroke-width='2' stroke-dasharray='6 4' /&gt;&#10;        &lt;path d='M990 178 l-8 6 v-12 z' fill='#3D7BD9' stroke='#3D7BD9' stroke-width='2' /&gt;&#10;        &lt;text x='600' y='462' text-anchor='middle' font-size='12' fill='#3D7BD9'&gt;«use» IIndex&lt;/text&gt;&#10;&#10;        {/* 底部说明 */}&#10;        &lt;text x='40' y='512' font-size='14' fill='#8B97A8'&gt;虚线开放箭头表示组件间依赖；右上角图标与 «component» 为 UML 组件符号，接口以名称标注。&lt;/text&gt;&#10;      &lt;/svg&gt;&#10;    &lt;/Box&gt;&#10;&#10;    {/* 页脚 */}&#10;    &lt;Box style={{ height: 40, flexDirection: 'row', alignItems: 'center', justifyContent: 'space-between', paddingLeft: 40, paddingRight: 40 }}&gt;&#10;      &lt;Text style={{ color: '#8B97A8', fontSize: 14 }}&gt;中国科学技术大学软件学院&lt;/Text&gt;&#10;      &lt;Text style={{ color: '#1E4FA8', fontSize: 16, fontWeight: 'bold' }}&gt;09 / 17&lt;/Text&gt;&#10;    &lt;/Box&gt;&#10;  &lt;/Box&gt;&#10;&lt;/Slide&gt;&#10;"/>
         <p:cNvGrpSpPr/>
         <p:nvPr/>
       </p:nvGrpSpPr>
@@ -13612,7 +15714,7 @@
       </p:grpSpPr>
       <p:sp>
         <p:nvSpPr>
-          <p:cNvPr id="326" name=""/>
+          <p:cNvPr id="374" name=""/>
           <p:cNvSpPr/>
           <p:nvPr/>
         </p:nvSpPr>
@@ -13636,7 +15738,7 @@
       </p:sp>
       <p:sp>
         <p:nvSpPr>
-          <p:cNvPr id="327" name=""/>
+          <p:cNvPr id="375" name=""/>
           <p:cNvSpPr/>
           <p:nvPr/>
         </p:nvSpPr>
@@ -13660,7 +15762,7 @@
       </p:sp>
       <p:sp>
         <p:nvSpPr>
-          <p:cNvPr id="328" name="" descr="{&quot;isTemplate&quot;:true,&quot;type&quot;:&quot;text&quot;}"/>
+          <p:cNvPr id="376" name="" descr="{&quot;isTemplate&quot;:true,&quot;type&quot;:&quot;text&quot;}"/>
           <p:cNvSpPr txBox="1"/>
           <p:nvPr/>
         </p:nvSpPr>
@@ -13715,7 +15817,7 @@
       </p:sp>
       <p:sp>
         <p:nvSpPr>
-          <p:cNvPr id="329" name="" descr="{&quot;isTemplate&quot;:true,&quot;type&quot;:&quot;text&quot;}"/>
+          <p:cNvPr id="377" name="" descr="{&quot;isTemplate&quot;:true,&quot;type&quot;:&quot;text&quot;}"/>
           <p:cNvSpPr txBox="1"/>
           <p:nvPr/>
         </p:nvSpPr>
@@ -13752,1113 +15854,138 @@
       </p:sp>
       <p:sp>
         <p:nvSpPr>
-          <p:cNvPr id="330" name=""/>
-          <p:cNvSpPr/>
-          <p:nvPr/>
-        </p:nvSpPr>
-        <p:spPr>
-          <a:xfrm rot="0" flipH="0" flipV="0">
-            <a:off x="381000" y="952500"/>
-            <a:ext cx="457200" cy="38100"/>
-          </a:xfrm>
-          <a:prstGeom prst="roundRect">
-            <a:avLst>
-              <a:gd name="adj" fmla="val 50000"/>
-            </a:avLst>
+          <p:cNvPr id="378" name="" descr="{&quot;isTemplate&quot;:true,&quot;type&quot;:&quot;text&quot;}"/>
+          <p:cNvSpPr txBox="1"/>
+          <p:nvPr/>
+        </p:nvSpPr>
+        <p:spPr>
+          <a:xfrm rot="0" flipH="0" flipV="0">
+            <a:off x="381000" y="895350"/>
+            <a:ext cx="3028950" cy="390525"/>
+          </a:xfrm>
+          <a:prstGeom prst="rect"/>
+        </p:spPr>
+        <p:txBody>
+          <a:bodyPr wrap="none" lIns="0" tIns="0" rIns="0" bIns="0"/>
+          <a:p>
+            <a:pPr>
+              <a:lnSpc>
+                <a:spcPct val="100000"/>
+              </a:lnSpc>
+            </a:pPr>
+            <a:r>
+              <a:rPr lang="zh-CN" sz="2550" b="1">
+                <a:solidFill>
+                  <a:srgbClr val="1A2230"/>
+                </a:solidFill>
+                <a:latin typeface="Microsoft YaHei"/>
+                <a:ea typeface="Microsoft YaHei"/>
+              </a:rPr>
+              <a:t>系统组件图（</a:t>
+            </a:r>
+            <a:r>
+              <a:rPr lang="en-US" sz="2550" b="1">
+                <a:solidFill>
+                  <a:srgbClr val="1A2230"/>
+                </a:solidFill>
+                <a:latin typeface="Microsoft YaHei"/>
+                <a:ea typeface="Microsoft YaHei"/>
+              </a:rPr>
+              <a:t>UML</a:t>
+            </a:r>
+            <a:r>
+              <a:rPr lang="zh-CN" sz="2550" b="1">
+                <a:solidFill>
+                  <a:srgbClr val="1A2230"/>
+                </a:solidFill>
+                <a:latin typeface="Microsoft YaHei"/>
+                <a:ea typeface="Microsoft YaHei"/>
+              </a:rPr>
+              <a:t>）</a:t>
+            </a:r>
+            <a:endParaRPr/>
+          </a:p>
+        </p:txBody>
+      </p:sp>
+      <p:sp>
+        <p:nvSpPr>
+          <p:cNvPr id="379" name="" descr="{&quot;isTemplate&quot;:true,&quot;type&quot;:&quot;text&quot;}"/>
+          <p:cNvSpPr txBox="1"/>
+          <p:nvPr/>
+        </p:nvSpPr>
+        <p:spPr>
+          <a:xfrm rot="0" flipH="0" flipV="0">
+            <a:off x="3562350" y="895350"/>
+            <a:ext cx="2276475" cy="390525"/>
+          </a:xfrm>
+          <a:prstGeom prst="rect"/>
+        </p:spPr>
+        <p:txBody>
+          <a:bodyPr wrap="none" lIns="0" tIns="0" rIns="0" bIns="0"/>
+          <a:p>
+            <a:pPr>
+              <a:lnSpc>
+                <a:spcPct val="100000"/>
+              </a:lnSpc>
+            </a:pPr>
+            <a:r>
+              <a:rPr lang="en-US" sz="1200">
+                <a:solidFill>
+                  <a:srgbClr val="8B97A8"/>
+                </a:solidFill>
+                <a:latin typeface="Microsoft YaHei"/>
+                <a:ea typeface="Microsoft YaHei"/>
+              </a:rPr>
+              <a:t xml:space="preserve">Component Diagram · </a:t>
+            </a:r>
+            <a:r>
+              <a:rPr lang="zh-CN" sz="1200">
+                <a:solidFill>
+                  <a:srgbClr val="8B97A8"/>
+                </a:solidFill>
+                <a:latin typeface="Microsoft YaHei"/>
+                <a:ea typeface="Microsoft YaHei"/>
+              </a:rPr>
+              <a:t>概要设计</a:t>
+            </a:r>
+            <a:endParaRPr/>
+          </a:p>
+        </p:txBody>
+      </p:sp>
+      <p:pic>
+        <p:nvPicPr>
+          <p:cNvPr id="380" name=""/>
+          <p:cNvPicPr>
+            <a:picLocks noChangeAspect="1"/>
+          </p:cNvPicPr>
+          <p:nvPr/>
+        </p:nvPicPr>
+        <p:blipFill>
+          <a:blip>
+            <a:extLst>
+              <a:ext uri="{96DAC541-7B7A-43D3-8B79-37D633B846F1}">
+                <asvg:svgBlip r:embed="rId1"/>
+              </a:ext>
+            </a:extLst>
+          </a:blip>
+          <a:stretch>
+            <a:fillRect/>
+          </a:stretch>
+        </p:blipFill>
+        <p:spPr>
+          <a:xfrm rot="0" flipH="0" flipV="0">
+            <a:off x="476250" y="1428750"/>
+            <a:ext cx="11239500" cy="4953000"/>
+          </a:xfrm>
+          <a:prstGeom prst="rect">
+            <a:avLst/>
           </a:prstGeom>
-          <a:solidFill>
-            <a:srgbClr val="3D7BD9"/>
-          </a:solidFill>
           <a:ln/>
         </p:spPr>
-        <p:txBody>
-          <a:bodyPr/>
-          <a:p/>
-        </p:txBody>
-      </p:sp>
-      <p:sp>
-        <p:nvSpPr>
-          <p:cNvPr id="331" name="" descr="{&quot;isTemplate&quot;:true,&quot;type&quot;:&quot;text&quot;}"/>
-          <p:cNvSpPr txBox="1"/>
-          <p:nvPr/>
-        </p:nvSpPr>
-        <p:spPr>
-          <a:xfrm rot="0" flipH="0" flipV="0">
-            <a:off x="381000" y="1143000"/>
-            <a:ext cx="2857500" cy="514350"/>
-          </a:xfrm>
-          <a:prstGeom prst="rect"/>
-        </p:spPr>
-        <p:txBody>
-          <a:bodyPr wrap="none" lIns="0" tIns="0" rIns="0" bIns="0"/>
-          <a:p>
-            <a:pPr>
-              <a:lnSpc>
-                <a:spcPct val="130000"/>
-              </a:lnSpc>
-            </a:pPr>
-            <a:r>
-              <a:rPr lang="zh-CN" sz="2550" b="1">
-                <a:solidFill>
-                  <a:srgbClr val="1A2230"/>
-                </a:solidFill>
-                <a:latin typeface="Microsoft YaHei"/>
-                <a:ea typeface="Microsoft YaHei"/>
-              </a:rPr>
-              <a:t>在线问答链路</a:t>
-            </a:r>
-            <a:endParaRPr/>
-          </a:p>
-        </p:txBody>
-      </p:sp>
-      <p:sp>
-        <p:nvSpPr>
-          <p:cNvPr id="332" name="" descr="{&quot;isTemplate&quot;:true,&quot;type&quot;:&quot;text&quot;}"/>
-          <p:cNvSpPr txBox="1"/>
-          <p:nvPr/>
-        </p:nvSpPr>
-        <p:spPr>
-          <a:xfrm rot="0" flipH="0" flipV="0">
-            <a:off x="381000" y="1809750"/>
-            <a:ext cx="2857500" cy="552450"/>
-          </a:xfrm>
-          <a:prstGeom prst="rect"/>
-        </p:spPr>
-        <p:txBody>
-          <a:bodyPr wrap="square" lIns="0" tIns="0" rIns="0" bIns="0">
-            <a:normAutofit/>
-          </a:bodyPr>
-          <a:p>
-            <a:pPr>
-              <a:lnSpc>
-                <a:spcPct val="150000"/>
-              </a:lnSpc>
-            </a:pPr>
-            <a:r>
-              <a:rPr lang="zh-CN" sz="1200">
-                <a:solidFill>
-                  <a:srgbClr val="8B97A8"/>
-                </a:solidFill>
-                <a:latin typeface="Microsoft YaHei"/>
-                <a:ea typeface="Microsoft YaHei"/>
-              </a:rPr>
-              <a:t>每次提问，从知识库检索并生成带引用的加工指令</a:t>
-            </a:r>
-            <a:endParaRPr/>
-          </a:p>
-        </p:txBody>
-      </p:sp>
-      <p:sp>
-        <p:nvSpPr>
-          <p:cNvPr id="333" name=""/>
-          <p:cNvSpPr/>
-          <p:nvPr/>
-        </p:nvSpPr>
-        <p:spPr>
-          <a:xfrm rot="0" flipH="0" flipV="0">
-            <a:off x="381000" y="5143500"/>
-            <a:ext cx="2857500" cy="1181100"/>
-          </a:xfrm>
-          <a:prstGeom prst="roundRect">
-            <a:avLst>
-              <a:gd name="adj" fmla="val 6452"/>
-            </a:avLst>
-          </a:prstGeom>
-          <a:solidFill>
-            <a:srgbClr val="0E3F8C"/>
-          </a:solidFill>
-          <a:ln/>
-        </p:spPr>
-        <p:txBody>
-          <a:bodyPr/>
-          <a:p/>
-        </p:txBody>
-      </p:sp>
-      <p:sp>
-        <p:nvSpPr>
-          <p:cNvPr id="334" name="" descr="{&quot;isTemplate&quot;:true,&quot;type&quot;:&quot;text&quot;}"/>
-          <p:cNvSpPr txBox="1"/>
-          <p:nvPr/>
-        </p:nvSpPr>
-        <p:spPr>
-          <a:xfrm rot="0" flipH="0" flipV="0">
-            <a:off x="552450" y="5314950"/>
-            <a:ext cx="2514600" cy="209550"/>
-          </a:xfrm>
-          <a:prstGeom prst="rect"/>
-        </p:spPr>
-        <p:txBody>
-          <a:bodyPr wrap="none" lIns="0" tIns="0" rIns="0" bIns="0"/>
-          <a:p>
-            <a:pPr>
-              <a:lnSpc>
-                <a:spcPct val="100000"/>
-              </a:lnSpc>
-            </a:pPr>
-            <a:r>
-              <a:rPr lang="zh-CN" sz="1350" b="1">
-                <a:solidFill>
-                  <a:srgbClr val="FFFFFF"/>
-                </a:solidFill>
-                <a:latin typeface="Microsoft YaHei"/>
-                <a:ea typeface="Microsoft YaHei"/>
-              </a:rPr>
-              <a:t>关键点</a:t>
-            </a:r>
-            <a:endParaRPr/>
-          </a:p>
-        </p:txBody>
-      </p:sp>
-      <p:sp>
-        <p:nvSpPr>
-          <p:cNvPr id="335" name="" descr="{&quot;isTemplate&quot;:true,&quot;type&quot;:&quot;text&quot;}"/>
-          <p:cNvSpPr txBox="1"/>
-          <p:nvPr/>
-        </p:nvSpPr>
-        <p:spPr>
-          <a:xfrm rot="0" flipH="0" flipV="0">
-            <a:off x="552450" y="5600700"/>
-            <a:ext cx="2514600" cy="552450"/>
-          </a:xfrm>
-          <a:prstGeom prst="rect"/>
-        </p:spPr>
-        <p:txBody>
-          <a:bodyPr wrap="square" lIns="0" tIns="0" rIns="0" bIns="0">
-            <a:normAutofit/>
-          </a:bodyPr>
-          <a:p>
-            <a:pPr>
-              <a:lnSpc>
-                <a:spcPct val="160000"/>
-              </a:lnSpc>
-            </a:pPr>
-            <a:r>
-              <a:rPr lang="zh-CN" sz="1125">
-                <a:solidFill>
-                  <a:srgbClr val="D6E4F7"/>
-                </a:solidFill>
-                <a:latin typeface="Microsoft YaHei"/>
-                <a:ea typeface="Microsoft YaHei"/>
-              </a:rPr>
-              <a:t>多轮查询改写：把含代词、省略的追问补全为独立问题，再走检索链路。</a:t>
-            </a:r>
-            <a:endParaRPr/>
-          </a:p>
-        </p:txBody>
-      </p:sp>
-      <p:sp>
-        <p:nvSpPr>
-          <p:cNvPr id="336" name=""/>
-          <p:cNvSpPr/>
-          <p:nvPr/>
-        </p:nvSpPr>
-        <p:spPr>
-          <a:xfrm rot="0" flipH="0" flipV="0">
-            <a:off x="3619500" y="952500"/>
-            <a:ext cx="8191500" cy="895350"/>
-          </a:xfrm>
-          <a:prstGeom prst="roundRect">
-            <a:avLst>
-              <a:gd name="adj" fmla="val 10638"/>
-            </a:avLst>
-          </a:prstGeom>
-          <a:solidFill>
-            <a:srgbClr val="F7F9FC"/>
-          </a:solidFill>
-          <a:ln w="12700">
-            <a:solidFill>
-              <a:srgbClr val="E5E7EB"/>
-            </a:solidFill>
-            <a:prstDash val="solid"/>
-          </a:ln>
-        </p:spPr>
-        <p:txBody>
-          <a:bodyPr/>
-          <a:p/>
-        </p:txBody>
-      </p:sp>
-      <p:sp>
-        <p:nvSpPr>
-          <p:cNvPr id="337" name=""/>
-          <p:cNvSpPr/>
-          <p:nvPr/>
-        </p:nvSpPr>
-        <p:spPr>
-          <a:xfrm rot="0" flipH="0" flipV="0">
-            <a:off x="3771900" y="1181100"/>
-            <a:ext cx="438150" cy="438150"/>
-          </a:xfrm>
-          <a:prstGeom prst="roundRect">
-            <a:avLst>
-              <a:gd name="adj" fmla="val 50000"/>
-            </a:avLst>
-          </a:prstGeom>
-          <a:solidFill>
-            <a:srgbClr val="1E4FA8"/>
-          </a:solidFill>
-          <a:ln/>
-        </p:spPr>
-        <p:txBody>
-          <a:bodyPr/>
-          <a:p/>
-        </p:txBody>
-      </p:sp>
-      <p:sp>
-        <p:nvSpPr>
-          <p:cNvPr id="338" name="" descr="{&quot;isTemplate&quot;:true,&quot;type&quot;:&quot;text&quot;}"/>
-          <p:cNvSpPr txBox="1"/>
-          <p:nvPr/>
-        </p:nvSpPr>
-        <p:spPr>
-          <a:xfrm rot="0" flipH="0" flipV="0">
-            <a:off x="3933825" y="1285875"/>
-            <a:ext cx="123825" cy="228600"/>
-          </a:xfrm>
-          <a:prstGeom prst="rect"/>
-        </p:spPr>
-        <p:txBody>
-          <a:bodyPr wrap="none" lIns="0" tIns="0" rIns="0" bIns="0"/>
-          <a:p>
-            <a:pPr>
-              <a:lnSpc>
-                <a:spcPct val="100000"/>
-              </a:lnSpc>
-            </a:pPr>
-            <a:r>
-              <a:rPr lang="en-US" sz="1500" b="1">
-                <a:solidFill>
-                  <a:srgbClr val="FFFFFF"/>
-                </a:solidFill>
-                <a:latin typeface="Microsoft YaHei"/>
-                <a:ea typeface="Microsoft YaHei"/>
-              </a:rPr>
-              <a:t>1</a:t>
-            </a:r>
-            <a:endParaRPr/>
-          </a:p>
-        </p:txBody>
-      </p:sp>
-      <p:sp>
-        <p:nvSpPr>
-          <p:cNvPr id="339" name="" descr="{&quot;isTemplate&quot;:true,&quot;type&quot;:&quot;text&quot;}"/>
-          <p:cNvSpPr txBox="1"/>
-          <p:nvPr/>
-        </p:nvSpPr>
-        <p:spPr>
-          <a:xfrm rot="0" flipH="0" flipV="0">
-            <a:off x="4400550" y="1104900"/>
-            <a:ext cx="7258050" cy="257175"/>
-          </a:xfrm>
-          <a:prstGeom prst="rect"/>
-        </p:spPr>
-        <p:txBody>
-          <a:bodyPr wrap="none" lIns="0" tIns="0" rIns="0" bIns="0"/>
-          <a:p>
-            <a:pPr>
-              <a:lnSpc>
-                <a:spcPct val="100000"/>
-              </a:lnSpc>
-            </a:pPr>
-            <a:r>
-              <a:rPr lang="zh-CN" sz="1650" b="1">
-                <a:solidFill>
-                  <a:srgbClr val="1A2230"/>
-                </a:solidFill>
-                <a:latin typeface="Microsoft YaHei"/>
-                <a:ea typeface="Microsoft YaHei"/>
-              </a:rPr>
-              <a:t>查询改写</a:t>
-            </a:r>
-            <a:endParaRPr/>
-          </a:p>
-        </p:txBody>
-      </p:sp>
-      <p:sp>
-        <p:nvSpPr>
-          <p:cNvPr id="340" name="" descr="{&quot;isTemplate&quot;:true,&quot;type&quot;:&quot;text&quot;}"/>
-          <p:cNvSpPr txBox="1"/>
-          <p:nvPr/>
-        </p:nvSpPr>
-        <p:spPr>
-          <a:xfrm rot="0" flipH="0" flipV="0">
-            <a:off x="4400550" y="1419225"/>
-            <a:ext cx="7258050" cy="276225"/>
-          </a:xfrm>
-          <a:prstGeom prst="rect"/>
-        </p:spPr>
-        <p:txBody>
-          <a:bodyPr wrap="none" lIns="0" tIns="0" rIns="0" bIns="0"/>
-          <a:p>
-            <a:pPr>
-              <a:lnSpc>
-                <a:spcPct val="150000"/>
-              </a:lnSpc>
-            </a:pPr>
-            <a:r>
-              <a:rPr lang="zh-CN" sz="1200">
-                <a:solidFill>
-                  <a:srgbClr val="4A5568"/>
-                </a:solidFill>
-                <a:latin typeface="Microsoft YaHei"/>
-                <a:ea typeface="Microsoft YaHei"/>
-              </a:rPr>
-              <a:t>记录历史，将追问补全为独立问题</a:t>
-            </a:r>
-            <a:endParaRPr/>
-          </a:p>
-        </p:txBody>
-      </p:sp>
-      <p:sp>
-        <p:nvSpPr>
-          <p:cNvPr id="341" name=""/>
-          <p:cNvSpPr/>
-          <p:nvPr/>
-        </p:nvSpPr>
-        <p:spPr>
-          <a:xfrm rot="0" flipH="0" flipV="0">
-            <a:off x="3619500" y="2076450"/>
-            <a:ext cx="8191500" cy="895350"/>
-          </a:xfrm>
-          <a:prstGeom prst="roundRect">
-            <a:avLst>
-              <a:gd name="adj" fmla="val 10638"/>
-            </a:avLst>
-          </a:prstGeom>
-          <a:solidFill>
-            <a:srgbClr val="F7F9FC"/>
-          </a:solidFill>
-          <a:ln w="12700">
-            <a:solidFill>
-              <a:srgbClr val="E5E7EB"/>
-            </a:solidFill>
-            <a:prstDash val="solid"/>
-          </a:ln>
-        </p:spPr>
-        <p:txBody>
-          <a:bodyPr/>
-          <a:p/>
-        </p:txBody>
-      </p:sp>
-      <p:sp>
-        <p:nvSpPr>
-          <p:cNvPr id="342" name=""/>
-          <p:cNvSpPr/>
-          <p:nvPr/>
-        </p:nvSpPr>
-        <p:spPr>
-          <a:xfrm rot="0" flipH="0" flipV="0">
-            <a:off x="3771900" y="2305050"/>
-            <a:ext cx="438150" cy="438150"/>
-          </a:xfrm>
-          <a:prstGeom prst="roundRect">
-            <a:avLst>
-              <a:gd name="adj" fmla="val 50000"/>
-            </a:avLst>
-          </a:prstGeom>
-          <a:solidFill>
-            <a:srgbClr val="1E4FA8"/>
-          </a:solidFill>
-          <a:ln/>
-        </p:spPr>
-        <p:txBody>
-          <a:bodyPr/>
-          <a:p/>
-        </p:txBody>
-      </p:sp>
-      <p:sp>
-        <p:nvSpPr>
-          <p:cNvPr id="343" name="" descr="{&quot;isTemplate&quot;:true,&quot;type&quot;:&quot;text&quot;}"/>
-          <p:cNvSpPr txBox="1"/>
-          <p:nvPr/>
-        </p:nvSpPr>
-        <p:spPr>
-          <a:xfrm rot="0" flipH="0" flipV="0">
-            <a:off x="3933825" y="2409825"/>
-            <a:ext cx="123825" cy="228600"/>
-          </a:xfrm>
-          <a:prstGeom prst="rect"/>
-        </p:spPr>
-        <p:txBody>
-          <a:bodyPr wrap="none" lIns="0" tIns="0" rIns="0" bIns="0"/>
-          <a:p>
-            <a:pPr>
-              <a:lnSpc>
-                <a:spcPct val="100000"/>
-              </a:lnSpc>
-            </a:pPr>
-            <a:r>
-              <a:rPr lang="en-US" sz="1500" b="1">
-                <a:solidFill>
-                  <a:srgbClr val="FFFFFF"/>
-                </a:solidFill>
-                <a:latin typeface="Microsoft YaHei"/>
-                <a:ea typeface="Microsoft YaHei"/>
-              </a:rPr>
-              <a:t>2</a:t>
-            </a:r>
-            <a:endParaRPr/>
-          </a:p>
-        </p:txBody>
-      </p:sp>
-      <p:sp>
-        <p:nvSpPr>
-          <p:cNvPr id="344" name="" descr="{&quot;isTemplate&quot;:true,&quot;type&quot;:&quot;text&quot;}"/>
-          <p:cNvSpPr txBox="1"/>
-          <p:nvPr/>
-        </p:nvSpPr>
-        <p:spPr>
-          <a:xfrm rot="0" flipH="0" flipV="0">
-            <a:off x="4400550" y="2228850"/>
-            <a:ext cx="7258050" cy="257175"/>
-          </a:xfrm>
-          <a:prstGeom prst="rect"/>
-        </p:spPr>
-        <p:txBody>
-          <a:bodyPr wrap="none" lIns="0" tIns="0" rIns="0" bIns="0"/>
-          <a:p>
-            <a:pPr>
-              <a:lnSpc>
-                <a:spcPct val="100000"/>
-              </a:lnSpc>
-            </a:pPr>
-            <a:r>
-              <a:rPr lang="zh-CN" sz="1650" b="1">
-                <a:solidFill>
-                  <a:srgbClr val="1A2230"/>
-                </a:solidFill>
-                <a:latin typeface="Microsoft YaHei"/>
-                <a:ea typeface="Microsoft YaHei"/>
-              </a:rPr>
-              <a:t>混合召回</a:t>
-            </a:r>
-            <a:endParaRPr/>
-          </a:p>
-        </p:txBody>
-      </p:sp>
-      <p:sp>
-        <p:nvSpPr>
-          <p:cNvPr id="345" name="" descr="{&quot;isTemplate&quot;:true,&quot;type&quot;:&quot;text&quot;}"/>
-          <p:cNvSpPr txBox="1"/>
-          <p:nvPr/>
-        </p:nvSpPr>
-        <p:spPr>
-          <a:xfrm rot="0" flipH="0" flipV="0">
-            <a:off x="4400550" y="2543175"/>
-            <a:ext cx="7258050" cy="276225"/>
-          </a:xfrm>
-          <a:prstGeom prst="rect"/>
-        </p:spPr>
-        <p:txBody>
-          <a:bodyPr wrap="none" lIns="0" tIns="0" rIns="0" bIns="0"/>
-          <a:p>
-            <a:pPr>
-              <a:lnSpc>
-                <a:spcPct val="150000"/>
-              </a:lnSpc>
-            </a:pPr>
-            <a:r>
-              <a:rPr lang="zh-CN" sz="1200">
-                <a:solidFill>
-                  <a:srgbClr val="4A5568"/>
-                </a:solidFill>
-                <a:latin typeface="Microsoft YaHei"/>
-                <a:ea typeface="Microsoft YaHei"/>
-              </a:rPr>
-              <a:t>并行执行向量检索</a:t>
-            </a:r>
-            <a:r>
-              <a:rPr lang="en-US" sz="1200">
-                <a:solidFill>
-                  <a:srgbClr val="4A5568"/>
-                </a:solidFill>
-                <a:latin typeface="Microsoft YaHei"/>
-                <a:ea typeface="Microsoft YaHei"/>
-              </a:rPr>
-              <a:t xml:space="preserve"> + BM25 </a:t>
-            </a:r>
-            <a:r>
-              <a:rPr lang="zh-CN" sz="1200">
-                <a:solidFill>
-                  <a:srgbClr val="4A5568"/>
-                </a:solidFill>
-                <a:latin typeface="Microsoft YaHei"/>
-                <a:ea typeface="Microsoft YaHei"/>
-              </a:rPr>
-              <a:t>检索</a:t>
-            </a:r>
-            <a:endParaRPr/>
-          </a:p>
-        </p:txBody>
-      </p:sp>
-      <p:sp>
-        <p:nvSpPr>
-          <p:cNvPr id="346" name=""/>
-          <p:cNvSpPr/>
-          <p:nvPr/>
-        </p:nvSpPr>
-        <p:spPr>
-          <a:xfrm rot="0" flipH="0" flipV="0">
-            <a:off x="3619500" y="3190875"/>
-            <a:ext cx="8191500" cy="895350"/>
-          </a:xfrm>
-          <a:prstGeom prst="roundRect">
-            <a:avLst>
-              <a:gd name="adj" fmla="val 10638"/>
-            </a:avLst>
-          </a:prstGeom>
-          <a:solidFill>
-            <a:srgbClr val="F7F9FC"/>
-          </a:solidFill>
-          <a:ln w="12700">
-            <a:solidFill>
-              <a:srgbClr val="E5E7EB"/>
-            </a:solidFill>
-            <a:prstDash val="solid"/>
-          </a:ln>
-        </p:spPr>
-        <p:txBody>
-          <a:bodyPr/>
-          <a:p/>
-        </p:txBody>
-      </p:sp>
-      <p:sp>
-        <p:nvSpPr>
-          <p:cNvPr id="347" name=""/>
-          <p:cNvSpPr/>
-          <p:nvPr/>
-        </p:nvSpPr>
-        <p:spPr>
-          <a:xfrm rot="0" flipH="0" flipV="0">
-            <a:off x="3771900" y="3419475"/>
-            <a:ext cx="438150" cy="438150"/>
-          </a:xfrm>
-          <a:prstGeom prst="roundRect">
-            <a:avLst>
-              <a:gd name="adj" fmla="val 50000"/>
-            </a:avLst>
-          </a:prstGeom>
-          <a:solidFill>
-            <a:srgbClr val="1E4FA8"/>
-          </a:solidFill>
-          <a:ln/>
-        </p:spPr>
-        <p:txBody>
-          <a:bodyPr/>
-          <a:p/>
-        </p:txBody>
-      </p:sp>
-      <p:sp>
-        <p:nvSpPr>
-          <p:cNvPr id="348" name="" descr="{&quot;isTemplate&quot;:true,&quot;type&quot;:&quot;text&quot;}"/>
-          <p:cNvSpPr txBox="1"/>
-          <p:nvPr/>
-        </p:nvSpPr>
-        <p:spPr>
-          <a:xfrm rot="0" flipH="0" flipV="0">
-            <a:off x="3933825" y="3524250"/>
-            <a:ext cx="123825" cy="228600"/>
-          </a:xfrm>
-          <a:prstGeom prst="rect"/>
-        </p:spPr>
-        <p:txBody>
-          <a:bodyPr wrap="none" lIns="0" tIns="0" rIns="0" bIns="0"/>
-          <a:p>
-            <a:pPr>
-              <a:lnSpc>
-                <a:spcPct val="100000"/>
-              </a:lnSpc>
-            </a:pPr>
-            <a:r>
-              <a:rPr lang="en-US" sz="1500" b="1">
-                <a:solidFill>
-                  <a:srgbClr val="FFFFFF"/>
-                </a:solidFill>
-                <a:latin typeface="Microsoft YaHei"/>
-                <a:ea typeface="Microsoft YaHei"/>
-              </a:rPr>
-              <a:t>3</a:t>
-            </a:r>
-            <a:endParaRPr/>
-          </a:p>
-        </p:txBody>
-      </p:sp>
-      <p:sp>
-        <p:nvSpPr>
-          <p:cNvPr id="349" name="" descr="{&quot;isTemplate&quot;:true,&quot;type&quot;:&quot;text&quot;}"/>
-          <p:cNvSpPr txBox="1"/>
-          <p:nvPr/>
-        </p:nvSpPr>
-        <p:spPr>
-          <a:xfrm rot="0" flipH="0" flipV="0">
-            <a:off x="4400550" y="3343275"/>
-            <a:ext cx="7258050" cy="257175"/>
-          </a:xfrm>
-          <a:prstGeom prst="rect"/>
-        </p:spPr>
-        <p:txBody>
-          <a:bodyPr wrap="none" lIns="0" tIns="0" rIns="0" bIns="0"/>
-          <a:p>
-            <a:pPr>
-              <a:lnSpc>
-                <a:spcPct val="100000"/>
-              </a:lnSpc>
-            </a:pPr>
-            <a:r>
-              <a:rPr lang="en-US" sz="1650" b="1">
-                <a:solidFill>
-                  <a:srgbClr val="1A2230"/>
-                </a:solidFill>
-                <a:latin typeface="Microsoft YaHei"/>
-                <a:ea typeface="Microsoft YaHei"/>
-              </a:rPr>
-              <a:t xml:space="preserve">RRF </a:t>
-            </a:r>
-            <a:r>
-              <a:rPr lang="zh-CN" sz="1650" b="1">
-                <a:solidFill>
-                  <a:srgbClr val="1A2230"/>
-                </a:solidFill>
-                <a:latin typeface="Microsoft YaHei"/>
-                <a:ea typeface="Microsoft YaHei"/>
-              </a:rPr>
-              <a:t>融合</a:t>
-            </a:r>
-            <a:endParaRPr/>
-          </a:p>
-        </p:txBody>
-      </p:sp>
-      <p:sp>
-        <p:nvSpPr>
-          <p:cNvPr id="350" name="" descr="{&quot;isTemplate&quot;:true,&quot;type&quot;:&quot;text&quot;}"/>
-          <p:cNvSpPr txBox="1"/>
-          <p:nvPr/>
-        </p:nvSpPr>
-        <p:spPr>
-          <a:xfrm rot="0" flipH="0" flipV="0">
-            <a:off x="4400550" y="3657600"/>
-            <a:ext cx="7258050" cy="276225"/>
-          </a:xfrm>
-          <a:prstGeom prst="rect"/>
-        </p:spPr>
-        <p:txBody>
-          <a:bodyPr wrap="none" lIns="0" tIns="0" rIns="0" bIns="0"/>
-          <a:p>
-            <a:pPr>
-              <a:lnSpc>
-                <a:spcPct val="150000"/>
-              </a:lnSpc>
-            </a:pPr>
-            <a:r>
-              <a:rPr lang="en-US" sz="1200">
-                <a:solidFill>
-                  <a:srgbClr val="4A5568"/>
-                </a:solidFill>
-                <a:latin typeface="Microsoft YaHei"/>
-                <a:ea typeface="Microsoft YaHei"/>
-              </a:rPr>
-              <a:t xml:space="preserve">k=60 </a:t>
-            </a:r>
-            <a:r>
-              <a:rPr lang="zh-CN" sz="1200">
-                <a:solidFill>
-                  <a:srgbClr val="4A5568"/>
-                </a:solidFill>
-                <a:latin typeface="Microsoft YaHei"/>
-                <a:ea typeface="Microsoft YaHei"/>
-              </a:rPr>
-              <a:t>合并两路结果并去重</a:t>
-            </a:r>
-            <a:endParaRPr/>
-          </a:p>
-        </p:txBody>
-      </p:sp>
-      <p:sp>
-        <p:nvSpPr>
-          <p:cNvPr id="351" name=""/>
-          <p:cNvSpPr/>
-          <p:nvPr/>
-        </p:nvSpPr>
-        <p:spPr>
-          <a:xfrm rot="0" flipH="0" flipV="0">
-            <a:off x="3619500" y="4314825"/>
-            <a:ext cx="8191500" cy="895350"/>
-          </a:xfrm>
-          <a:prstGeom prst="roundRect">
-            <a:avLst>
-              <a:gd name="adj" fmla="val 10638"/>
-            </a:avLst>
-          </a:prstGeom>
-          <a:solidFill>
-            <a:srgbClr val="F7F9FC"/>
-          </a:solidFill>
-          <a:ln w="12700">
-            <a:solidFill>
-              <a:srgbClr val="E5E7EB"/>
-            </a:solidFill>
-            <a:prstDash val="solid"/>
-          </a:ln>
-        </p:spPr>
-        <p:txBody>
-          <a:bodyPr/>
-          <a:p/>
-        </p:txBody>
-      </p:sp>
-      <p:sp>
-        <p:nvSpPr>
-          <p:cNvPr id="352" name=""/>
-          <p:cNvSpPr/>
-          <p:nvPr/>
-        </p:nvSpPr>
-        <p:spPr>
-          <a:xfrm rot="0" flipH="0" flipV="0">
-            <a:off x="3771900" y="4543425"/>
-            <a:ext cx="438150" cy="438150"/>
-          </a:xfrm>
-          <a:prstGeom prst="roundRect">
-            <a:avLst>
-              <a:gd name="adj" fmla="val 50000"/>
-            </a:avLst>
-          </a:prstGeom>
-          <a:solidFill>
-            <a:srgbClr val="1E4FA8"/>
-          </a:solidFill>
-          <a:ln/>
-        </p:spPr>
-        <p:txBody>
-          <a:bodyPr/>
-          <a:p/>
-        </p:txBody>
-      </p:sp>
-      <p:sp>
-        <p:nvSpPr>
-          <p:cNvPr id="353" name="" descr="{&quot;isTemplate&quot;:true,&quot;type&quot;:&quot;text&quot;}"/>
-          <p:cNvSpPr txBox="1"/>
-          <p:nvPr/>
-        </p:nvSpPr>
-        <p:spPr>
-          <a:xfrm rot="0" flipH="0" flipV="0">
-            <a:off x="3933825" y="4648200"/>
-            <a:ext cx="123825" cy="228600"/>
-          </a:xfrm>
-          <a:prstGeom prst="rect"/>
-        </p:spPr>
-        <p:txBody>
-          <a:bodyPr wrap="none" lIns="0" tIns="0" rIns="0" bIns="0"/>
-          <a:p>
-            <a:pPr>
-              <a:lnSpc>
-                <a:spcPct val="100000"/>
-              </a:lnSpc>
-            </a:pPr>
-            <a:r>
-              <a:rPr lang="en-US" sz="1500" b="1">
-                <a:solidFill>
-                  <a:srgbClr val="FFFFFF"/>
-                </a:solidFill>
-                <a:latin typeface="Microsoft YaHei"/>
-                <a:ea typeface="Microsoft YaHei"/>
-              </a:rPr>
-              <a:t>4</a:t>
-            </a:r>
-            <a:endParaRPr/>
-          </a:p>
-        </p:txBody>
-      </p:sp>
-      <p:sp>
-        <p:nvSpPr>
-          <p:cNvPr id="354" name="" descr="{&quot;isTemplate&quot;:true,&quot;type&quot;:&quot;text&quot;}"/>
-          <p:cNvSpPr txBox="1"/>
-          <p:nvPr/>
-        </p:nvSpPr>
-        <p:spPr>
-          <a:xfrm rot="0" flipH="0" flipV="0">
-            <a:off x="4400550" y="4467225"/>
-            <a:ext cx="7258050" cy="257175"/>
-          </a:xfrm>
-          <a:prstGeom prst="rect"/>
-        </p:spPr>
-        <p:txBody>
-          <a:bodyPr wrap="none" lIns="0" tIns="0" rIns="0" bIns="0"/>
-          <a:p>
-            <a:pPr>
-              <a:lnSpc>
-                <a:spcPct val="100000"/>
-              </a:lnSpc>
-            </a:pPr>
-            <a:r>
-              <a:rPr lang="zh-CN" sz="1650" b="1">
-                <a:solidFill>
-                  <a:srgbClr val="1A2230"/>
-                </a:solidFill>
-                <a:latin typeface="Microsoft YaHei"/>
-                <a:ea typeface="Microsoft YaHei"/>
-              </a:rPr>
-              <a:t>重排序</a:t>
-            </a:r>
-            <a:endParaRPr/>
-          </a:p>
-        </p:txBody>
-      </p:sp>
-      <p:sp>
-        <p:nvSpPr>
-          <p:cNvPr id="355" name="" descr="{&quot;isTemplate&quot;:true,&quot;type&quot;:&quot;text&quot;}"/>
-          <p:cNvSpPr txBox="1"/>
-          <p:nvPr/>
-        </p:nvSpPr>
-        <p:spPr>
-          <a:xfrm rot="0" flipH="0" flipV="0">
-            <a:off x="4400550" y="4781550"/>
-            <a:ext cx="7258050" cy="276225"/>
-          </a:xfrm>
-          <a:prstGeom prst="rect"/>
-        </p:spPr>
-        <p:txBody>
-          <a:bodyPr wrap="none" lIns="0" tIns="0" rIns="0" bIns="0"/>
-          <a:p>
-            <a:pPr>
-              <a:lnSpc>
-                <a:spcPct val="150000"/>
-              </a:lnSpc>
-            </a:pPr>
-            <a:r>
-              <a:rPr lang="en-US" sz="1200">
-                <a:solidFill>
-                  <a:srgbClr val="4A5568"/>
-                </a:solidFill>
-                <a:latin typeface="Microsoft YaHei"/>
-                <a:ea typeface="Microsoft YaHei"/>
-              </a:rPr>
-              <a:t xml:space="preserve">bge-reranker-v2-m3 </a:t>
-            </a:r>
-            <a:r>
-              <a:rPr lang="zh-CN" sz="1200">
-                <a:solidFill>
-                  <a:srgbClr val="4A5568"/>
-                </a:solidFill>
-                <a:latin typeface="Microsoft YaHei"/>
-                <a:ea typeface="Microsoft YaHei"/>
-              </a:rPr>
-              <a:t>精排，取</a:t>
-            </a:r>
-            <a:r>
-              <a:rPr lang="en-US" sz="1200">
-                <a:solidFill>
-                  <a:srgbClr val="4A5568"/>
-                </a:solidFill>
-                <a:latin typeface="Microsoft YaHei"/>
-                <a:ea typeface="Microsoft YaHei"/>
-              </a:rPr>
-              <a:t xml:space="preserve"> top 3~5</a:t>
-            </a:r>
-            <a:endParaRPr/>
-          </a:p>
-        </p:txBody>
-      </p:sp>
-      <p:sp>
-        <p:nvSpPr>
-          <p:cNvPr id="356" name=""/>
-          <p:cNvSpPr/>
-          <p:nvPr/>
-        </p:nvSpPr>
-        <p:spPr>
-          <a:xfrm rot="0" flipH="0" flipV="0">
-            <a:off x="3619500" y="5429250"/>
-            <a:ext cx="8191500" cy="895350"/>
-          </a:xfrm>
-          <a:prstGeom prst="roundRect">
-            <a:avLst>
-              <a:gd name="adj" fmla="val 10638"/>
-            </a:avLst>
-          </a:prstGeom>
-          <a:solidFill>
-            <a:srgbClr val="F7F9FC"/>
-          </a:solidFill>
-          <a:ln w="12700">
-            <a:solidFill>
-              <a:srgbClr val="E5E7EB"/>
-            </a:solidFill>
-            <a:prstDash val="solid"/>
-          </a:ln>
-        </p:spPr>
-        <p:txBody>
-          <a:bodyPr/>
-          <a:p/>
-        </p:txBody>
-      </p:sp>
-      <p:sp>
-        <p:nvSpPr>
-          <p:cNvPr id="357" name=""/>
-          <p:cNvSpPr/>
-          <p:nvPr/>
-        </p:nvSpPr>
-        <p:spPr>
-          <a:xfrm rot="0" flipH="0" flipV="0">
-            <a:off x="3771900" y="5657850"/>
-            <a:ext cx="438150" cy="438150"/>
-          </a:xfrm>
-          <a:prstGeom prst="roundRect">
-            <a:avLst>
-              <a:gd name="adj" fmla="val 50000"/>
-            </a:avLst>
-          </a:prstGeom>
-          <a:solidFill>
-            <a:srgbClr val="1E4FA8"/>
-          </a:solidFill>
-          <a:ln/>
-        </p:spPr>
-        <p:txBody>
-          <a:bodyPr/>
-          <a:p/>
-        </p:txBody>
-      </p:sp>
-      <p:sp>
-        <p:nvSpPr>
-          <p:cNvPr id="358" name="" descr="{&quot;isTemplate&quot;:true,&quot;type&quot;:&quot;text&quot;}"/>
-          <p:cNvSpPr txBox="1"/>
-          <p:nvPr/>
-        </p:nvSpPr>
-        <p:spPr>
-          <a:xfrm rot="0" flipH="0" flipV="0">
-            <a:off x="3933825" y="5762625"/>
-            <a:ext cx="123825" cy="228600"/>
-          </a:xfrm>
-          <a:prstGeom prst="rect"/>
-        </p:spPr>
-        <p:txBody>
-          <a:bodyPr wrap="none" lIns="0" tIns="0" rIns="0" bIns="0"/>
-          <a:p>
-            <a:pPr>
-              <a:lnSpc>
-                <a:spcPct val="100000"/>
-              </a:lnSpc>
-            </a:pPr>
-            <a:r>
-              <a:rPr lang="en-US" sz="1500" b="1">
-                <a:solidFill>
-                  <a:srgbClr val="FFFFFF"/>
-                </a:solidFill>
-                <a:latin typeface="Microsoft YaHei"/>
-                <a:ea typeface="Microsoft YaHei"/>
-              </a:rPr>
-              <a:t>5</a:t>
-            </a:r>
-            <a:endParaRPr/>
-          </a:p>
-        </p:txBody>
-      </p:sp>
-      <p:sp>
-        <p:nvSpPr>
-          <p:cNvPr id="359" name="" descr="{&quot;isTemplate&quot;:true,&quot;type&quot;:&quot;text&quot;}"/>
-          <p:cNvSpPr txBox="1"/>
-          <p:nvPr/>
-        </p:nvSpPr>
-        <p:spPr>
-          <a:xfrm rot="0" flipH="0" flipV="0">
-            <a:off x="4400550" y="5581650"/>
-            <a:ext cx="7258050" cy="257175"/>
-          </a:xfrm>
-          <a:prstGeom prst="rect"/>
-        </p:spPr>
-        <p:txBody>
-          <a:bodyPr wrap="none" lIns="0" tIns="0" rIns="0" bIns="0"/>
-          <a:p>
-            <a:pPr>
-              <a:lnSpc>
-                <a:spcPct val="100000"/>
-              </a:lnSpc>
-            </a:pPr>
-            <a:r>
-              <a:rPr lang="zh-CN" sz="1650" b="1">
-                <a:solidFill>
-                  <a:srgbClr val="1A2230"/>
-                </a:solidFill>
-                <a:latin typeface="Microsoft YaHei"/>
-                <a:ea typeface="Microsoft YaHei"/>
-              </a:rPr>
-              <a:t>生成</a:t>
-            </a:r>
-            <a:r>
-              <a:rPr lang="en-US" sz="1650" b="1">
-                <a:solidFill>
-                  <a:srgbClr val="1A2230"/>
-                </a:solidFill>
-                <a:latin typeface="Microsoft YaHei"/>
-                <a:ea typeface="Microsoft YaHei"/>
-              </a:rPr>
-              <a:t xml:space="preserve"> + </a:t>
-            </a:r>
-            <a:r>
-              <a:rPr lang="zh-CN" sz="1650" b="1">
-                <a:solidFill>
-                  <a:srgbClr val="1A2230"/>
-                </a:solidFill>
-                <a:latin typeface="Microsoft YaHei"/>
-                <a:ea typeface="Microsoft YaHei"/>
-              </a:rPr>
-              <a:t>溯源</a:t>
-            </a:r>
-            <a:endParaRPr/>
-          </a:p>
-        </p:txBody>
-      </p:sp>
-      <p:sp>
-        <p:nvSpPr>
-          <p:cNvPr id="360" name="" descr="{&quot;isTemplate&quot;:true,&quot;type&quot;:&quot;text&quot;}"/>
-          <p:cNvSpPr txBox="1"/>
-          <p:nvPr/>
-        </p:nvSpPr>
-        <p:spPr>
-          <a:xfrm rot="0" flipH="0" flipV="0">
-            <a:off x="4400550" y="5895975"/>
-            <a:ext cx="7258050" cy="276225"/>
-          </a:xfrm>
-          <a:prstGeom prst="rect"/>
-        </p:spPr>
-        <p:txBody>
-          <a:bodyPr wrap="none" lIns="0" tIns="0" rIns="0" bIns="0"/>
-          <a:p>
-            <a:pPr>
-              <a:lnSpc>
-                <a:spcPct val="150000"/>
-              </a:lnSpc>
-            </a:pPr>
-            <a:r>
-              <a:rPr lang="zh-CN" sz="1200">
-                <a:solidFill>
-                  <a:srgbClr val="4A5568"/>
-                </a:solidFill>
-                <a:latin typeface="Microsoft YaHei"/>
-                <a:ea typeface="Microsoft YaHei"/>
-              </a:rPr>
-              <a:t>拼装</a:t>
-            </a:r>
-            <a:r>
-              <a:rPr lang="en-US" sz="1200">
-                <a:solidFill>
-                  <a:srgbClr val="4A5568"/>
-                </a:solidFill>
-                <a:latin typeface="Microsoft YaHei"/>
-                <a:ea typeface="Microsoft YaHei"/>
-              </a:rPr>
-              <a:t xml:space="preserve"> Prompt </a:t>
-            </a:r>
-            <a:r>
-              <a:rPr lang="zh-CN" sz="1200">
-                <a:solidFill>
-                  <a:srgbClr val="4A5568"/>
-                </a:solidFill>
-                <a:latin typeface="Microsoft YaHei"/>
-                <a:ea typeface="Microsoft YaHei"/>
-              </a:rPr>
-              <a:t>调用大模型，生成带引用的结构化指令</a:t>
-            </a:r>
-            <a:endParaRPr/>
-          </a:p>
-        </p:txBody>
-      </p:sp>
-      <p:sp>
-        <p:nvSpPr>
-          <p:cNvPr id="361" name="" descr="{&quot;isTemplate&quot;:true,&quot;type&quot;:&quot;text&quot;}"/>
+      </p:pic>
+      <p:sp>
+        <p:nvSpPr>
+          <p:cNvPr id="381" name="" descr="{&quot;isTemplate&quot;:true,&quot;type&quot;:&quot;text&quot;}"/>
           <p:cNvSpPr txBox="1"/>
           <p:nvPr/>
         </p:nvSpPr>
@@ -14893,7 +16020,7 @@
       </p:sp>
       <p:sp>
         <p:nvSpPr>
-          <p:cNvPr id="362" name="" descr="{&quot;isTemplate&quot;:true,&quot;type&quot;:&quot;text&quot;}"/>
+          <p:cNvPr id="382" name="" descr="{&quot;isTemplate&quot;:true,&quot;type&quot;:&quot;text&quot;}"/>
           <p:cNvSpPr txBox="1"/>
           <p:nvPr/>
         </p:nvSpPr>
@@ -14920,7 +16047,7 @@
                 <a:latin typeface="Microsoft YaHei"/>
                 <a:ea typeface="Microsoft YaHei"/>
               </a:rPr>
-              <a:t>09 / 15</a:t>
+              <a:t>09 / 17</a:t>
             </a:r>
             <a:endParaRPr/>
           </a:p>

--- a/学校要求与提交材料/开题答辩.pptx
+++ b/学校要求与提交材料/开题答辩.pptx
@@ -5,7 +5,7 @@
     <p:sldMasterId id="2147483648" r:id="rId0"/>
   </p:sldMasterIdLst>
   <p:notesMasterIdLst>
-    <p:notesMasterId r:id="rId18"/>
+    <p:notesMasterId r:id="rId16"/>
   </p:notesMasterIdLst>
   <p:sldIdLst>
     <p:sldId id="256" r:id="rId1"/>
@@ -23,8 +23,6 @@
     <p:sldId id="268" r:id="rId13"/>
     <p:sldId id="269" r:id="rId14"/>
     <p:sldId id="270" r:id="rId15"/>
-    <p:sldId id="271" r:id="rId16"/>
-    <p:sldId id="272" r:id="rId17"/>
   </p:sldIdLst>
   <p:sldSz cx="12192000" cy="6858000"/>
   <p:notesSz cx="6858000" cy="12192000"/>
@@ -1368,14 +1366,301 @@
       </p:sp>
       <p:sp>
         <p:nvSpPr>
-          <p:cNvPr id="22" name=""/>
+          <p:cNvPr id="22" name="" descr="{&quot;isTemplate&quot;:true,&quot;type&quot;:&quot;text&quot;}"/>
+          <p:cNvSpPr txBox="1"/>
+          <p:nvPr/>
+        </p:nvSpPr>
+        <p:spPr>
+          <a:xfrm rot="0" flipH="0" flipV="0">
+            <a:off x="381000" y="933450"/>
+            <a:ext cx="11430000" cy="390525"/>
+          </a:xfrm>
+          <a:prstGeom prst="rect"/>
+        </p:spPr>
+        <p:txBody>
+          <a:bodyPr wrap="none" lIns="0" tIns="0" rIns="0" bIns="0"/>
+          <a:p>
+            <a:pPr>
+              <a:lnSpc>
+                <a:spcPct val="100000"/>
+              </a:lnSpc>
+            </a:pPr>
+            <a:r>
+              <a:rPr lang="zh-CN" sz="2550" b="1">
+                <a:solidFill>
+                  <a:srgbClr val="1A2230"/>
+                </a:solidFill>
+                <a:latin typeface="Microsoft YaHei"/>
+                <a:ea typeface="Microsoft YaHei"/>
+              </a:rPr>
+              <a:t>两大关键技术特色</a:t>
+            </a:r>
+            <a:endParaRPr/>
+          </a:p>
+        </p:txBody>
+      </p:sp>
+      <p:sp>
+        <p:nvSpPr>
+          <p:cNvPr id="23" name=""/>
           <p:cNvSpPr/>
           <p:nvPr/>
         </p:nvSpPr>
         <p:spPr>
           <a:xfrm rot="0" flipH="0" flipV="0">
-            <a:off x="381000" y="952500"/>
-            <a:ext cx="457200" cy="38100"/>
+            <a:off x="381000" y="1457325"/>
+            <a:ext cx="6391275" cy="4829175"/>
+          </a:xfrm>
+          <a:prstGeom prst="roundRect">
+            <a:avLst>
+              <a:gd name="adj" fmla="val 2761"/>
+            </a:avLst>
+          </a:prstGeom>
+          <a:solidFill>
+            <a:srgbClr val="0E3F8C"/>
+          </a:solidFill>
+          <a:ln/>
+        </p:spPr>
+        <p:txBody>
+          <a:bodyPr/>
+          <a:p>
+            <a:pPr/>
+            <a:endParaRPr/>
+          </a:p>
+        </p:txBody>
+      </p:sp>
+      <p:sp>
+        <p:nvSpPr>
+          <p:cNvPr id="24" name=""/>
+          <p:cNvSpPr/>
+          <p:nvPr/>
+        </p:nvSpPr>
+        <p:spPr>
+          <a:xfrm rot="0" flipH="0" flipV="0">
+            <a:off x="666750" y="1743075"/>
+            <a:ext cx="342900" cy="342900"/>
+          </a:xfrm>
+          <a:prstGeom prst="roundRect">
+            <a:avLst>
+              <a:gd name="adj" fmla="val 22222"/>
+            </a:avLst>
+          </a:prstGeom>
+          <a:solidFill>
+            <a:srgbClr val="3D7BD9"/>
+          </a:solidFill>
+          <a:ln/>
+        </p:spPr>
+        <p:txBody>
+          <a:bodyPr/>
+          <a:p>
+            <a:pPr/>
+            <a:endParaRPr/>
+          </a:p>
+        </p:txBody>
+      </p:sp>
+      <p:sp>
+        <p:nvSpPr>
+          <p:cNvPr id="25" name="" descr="{&quot;isTemplate&quot;:true,&quot;type&quot;:&quot;text&quot;}"/>
+          <p:cNvSpPr txBox="1"/>
+          <p:nvPr/>
+        </p:nvSpPr>
+        <p:spPr>
+          <a:xfrm rot="0" flipH="0" flipV="0">
+            <a:off x="781050" y="1800225"/>
+            <a:ext cx="123825" cy="228600"/>
+          </a:xfrm>
+          <a:prstGeom prst="rect"/>
+        </p:spPr>
+        <p:txBody>
+          <a:bodyPr wrap="none" lIns="0" tIns="0" rIns="0" bIns="0"/>
+          <a:p>
+            <a:pPr>
+              <a:lnSpc>
+                <a:spcPct val="100000"/>
+              </a:lnSpc>
+            </a:pPr>
+            <a:r>
+              <a:rPr lang="en-US" sz="1500" b="1">
+                <a:solidFill>
+                  <a:srgbClr val="FFFFFF"/>
+                </a:solidFill>
+                <a:latin typeface="Microsoft YaHei"/>
+                <a:ea typeface="Microsoft YaHei"/>
+              </a:rPr>
+              <a:t>1</a:t>
+            </a:r>
+            <a:endParaRPr/>
+          </a:p>
+        </p:txBody>
+      </p:sp>
+      <p:sp>
+        <p:nvSpPr>
+          <p:cNvPr id="26" name="" descr="{&quot;isTemplate&quot;:true,&quot;type&quot;:&quot;text&quot;}"/>
+          <p:cNvSpPr txBox="1"/>
+          <p:nvPr/>
+        </p:nvSpPr>
+        <p:spPr>
+          <a:xfrm rot="0" flipH="0" flipV="0">
+            <a:off x="1123950" y="1762125"/>
+            <a:ext cx="3314700" cy="304800"/>
+          </a:xfrm>
+          <a:prstGeom prst="rect"/>
+        </p:spPr>
+        <p:txBody>
+          <a:bodyPr wrap="none" lIns="0" tIns="0" rIns="0" bIns="0"/>
+          <a:p>
+            <a:pPr>
+              <a:lnSpc>
+                <a:spcPct val="100000"/>
+              </a:lnSpc>
+            </a:pPr>
+            <a:r>
+              <a:rPr lang="zh-CN" sz="1950" b="1">
+                <a:solidFill>
+                  <a:srgbClr val="FFFFFF"/>
+                </a:solidFill>
+                <a:latin typeface="Microsoft YaHei"/>
+                <a:ea typeface="Microsoft YaHei"/>
+              </a:rPr>
+              <a:t>混合召回</a:t>
+            </a:r>
+            <a:r>
+              <a:rPr lang="en-US" sz="1950" b="1">
+                <a:solidFill>
+                  <a:srgbClr val="FFFFFF"/>
+                </a:solidFill>
+                <a:latin typeface="Microsoft YaHei"/>
+                <a:ea typeface="Microsoft YaHei"/>
+              </a:rPr>
+              <a:t xml:space="preserve"> + </a:t>
+            </a:r>
+            <a:r>
+              <a:rPr lang="zh-CN" sz="1950" b="1">
+                <a:solidFill>
+                  <a:srgbClr val="FFFFFF"/>
+                </a:solidFill>
+                <a:latin typeface="Microsoft YaHei"/>
+                <a:ea typeface="Microsoft YaHei"/>
+              </a:rPr>
+              <a:t>重排序的两级检索</a:t>
+            </a:r>
+            <a:endParaRPr/>
+          </a:p>
+        </p:txBody>
+      </p:sp>
+      <p:sp>
+        <p:nvSpPr>
+          <p:cNvPr id="27" name="" descr="{&quot;isTemplate&quot;:true,&quot;type&quot;:&quot;text&quot;}"/>
+          <p:cNvSpPr txBox="1"/>
+          <p:nvPr/>
+        </p:nvSpPr>
+        <p:spPr>
+          <a:xfrm rot="0" flipH="0" flipV="0">
+            <a:off x="666750" y="2867025"/>
+            <a:ext cx="5819775" cy="742950"/>
+          </a:xfrm>
+          <a:prstGeom prst="rect"/>
+        </p:spPr>
+        <p:txBody>
+          <a:bodyPr wrap="square" lIns="0" tIns="0" rIns="0" bIns="0">
+            <a:normAutofit/>
+          </a:bodyPr>
+          <a:p>
+            <a:pPr>
+              <a:lnSpc>
+                <a:spcPct val="170000"/>
+              </a:lnSpc>
+            </a:pPr>
+            <a:r>
+              <a:rPr lang="zh-CN" sz="1425">
+                <a:solidFill>
+                  <a:srgbClr val="D6E4F7"/>
+                </a:solidFill>
+                <a:latin typeface="Microsoft YaHei"/>
+                <a:ea typeface="Microsoft YaHei"/>
+              </a:rPr>
+              <a:t>双路召回保证「不遗漏」：稠密向量负责语义理解，</a:t>
+            </a:r>
+            <a:r>
+              <a:rPr lang="en-US" sz="1425">
+                <a:solidFill>
+                  <a:srgbClr val="D6E4F7"/>
+                </a:solidFill>
+                <a:latin typeface="Microsoft YaHei"/>
+                <a:ea typeface="Microsoft YaHei"/>
+              </a:rPr>
+              <a:t xml:space="preserve">BM25 </a:t>
+            </a:r>
+            <a:r>
+              <a:rPr lang="zh-CN" sz="1425">
+                <a:solidFill>
+                  <a:srgbClr val="D6E4F7"/>
+                </a:solidFill>
+                <a:latin typeface="Microsoft YaHei"/>
+                <a:ea typeface="Microsoft YaHei"/>
+              </a:rPr>
+              <a:t>负责型号、数字等精确匹配；</a:t>
+            </a:r>
+            <a:endParaRPr/>
+          </a:p>
+        </p:txBody>
+      </p:sp>
+      <p:sp>
+        <p:nvSpPr>
+          <p:cNvPr id="28" name="" descr="{&quot;isTemplate&quot;:true,&quot;type&quot;:&quot;text&quot;}"/>
+          <p:cNvSpPr txBox="1"/>
+          <p:nvPr/>
+        </p:nvSpPr>
+        <p:spPr>
+          <a:xfrm rot="0" flipH="0" flipV="0">
+            <a:off x="666750" y="4305300"/>
+            <a:ext cx="5819775" cy="742950"/>
+          </a:xfrm>
+          <a:prstGeom prst="rect"/>
+        </p:spPr>
+        <p:txBody>
+          <a:bodyPr wrap="square" lIns="0" tIns="0" rIns="0" bIns="0">
+            <a:normAutofit/>
+          </a:bodyPr>
+          <a:p>
+            <a:pPr>
+              <a:lnSpc>
+                <a:spcPct val="170000"/>
+              </a:lnSpc>
+            </a:pPr>
+            <a:r>
+              <a:rPr lang="en-US" sz="1425">
+                <a:solidFill>
+                  <a:srgbClr val="D6E4F7"/>
+                </a:solidFill>
+                <a:latin typeface="Microsoft YaHei"/>
+                <a:ea typeface="Microsoft YaHei"/>
+              </a:rPr>
+              <a:t xml:space="preserve">Cross-encoder </a:t>
+            </a:r>
+            <a:r>
+              <a:rPr lang="zh-CN" sz="1425">
+                <a:solidFill>
+                  <a:srgbClr val="D6E4F7"/>
+                </a:solidFill>
+                <a:latin typeface="Microsoft YaHei"/>
+                <a:ea typeface="Microsoft YaHei"/>
+              </a:rPr>
+              <a:t>精排保证「准确」：在有限候选中二次排序，兼顾检索质量与响应速度。</a:t>
+            </a:r>
+            <a:endParaRPr/>
+          </a:p>
+        </p:txBody>
+      </p:sp>
+      <p:sp>
+        <p:nvSpPr>
+          <p:cNvPr id="29" name=""/>
+          <p:cNvSpPr/>
+          <p:nvPr/>
+        </p:nvSpPr>
+        <p:spPr>
+          <a:xfrm rot="0" flipH="0" flipV="0">
+            <a:off x="666750" y="5867400"/>
+            <a:ext cx="95250" cy="95250"/>
           </a:xfrm>
           <a:prstGeom prst="roundRect">
             <a:avLst>
@@ -1397,2936 +1682,7 @@
       </p:sp>
       <p:sp>
         <p:nvSpPr>
-          <p:cNvPr id="23" name="" descr="{&quot;isTemplate&quot;:true,&quot;type&quot;:&quot;text&quot;}"/>
-          <p:cNvSpPr txBox="1"/>
-          <p:nvPr/>
-        </p:nvSpPr>
-        <p:spPr>
-          <a:xfrm rot="0" flipH="0" flipV="0">
-            <a:off x="381000" y="1143000"/>
-            <a:ext cx="2857500" cy="514350"/>
-          </a:xfrm>
-          <a:prstGeom prst="rect"/>
-        </p:spPr>
-        <p:txBody>
-          <a:bodyPr wrap="none" lIns="0" tIns="0" rIns="0" bIns="0"/>
-          <a:p>
-            <a:pPr>
-              <a:lnSpc>
-                <a:spcPct val="130000"/>
-              </a:lnSpc>
-            </a:pPr>
-            <a:r>
-              <a:rPr lang="zh-CN" sz="2550" b="1">
-                <a:solidFill>
-                  <a:srgbClr val="1A2230"/>
-                </a:solidFill>
-                <a:latin typeface="Microsoft YaHei"/>
-                <a:ea typeface="Microsoft YaHei"/>
-              </a:rPr>
-              <a:t>离线建库链路</a:t>
-            </a:r>
-            <a:endParaRPr/>
-          </a:p>
-        </p:txBody>
-      </p:sp>
-      <p:sp>
-        <p:nvSpPr>
-          <p:cNvPr id="24" name="" descr="{&quot;isTemplate&quot;:true,&quot;type&quot;:&quot;text&quot;}"/>
-          <p:cNvSpPr txBox="1"/>
-          <p:nvPr/>
-        </p:nvSpPr>
-        <p:spPr>
-          <a:xfrm rot="0" flipH="0" flipV="0">
-            <a:off x="381000" y="1809750"/>
-            <a:ext cx="2857500" cy="552450"/>
-          </a:xfrm>
-          <a:prstGeom prst="rect"/>
-        </p:spPr>
-        <p:txBody>
-          <a:bodyPr wrap="square" lIns="0" tIns="0" rIns="0" bIns="0">
-            <a:normAutofit/>
-          </a:bodyPr>
-          <a:p>
-            <a:pPr>
-              <a:lnSpc>
-                <a:spcPct val="150000"/>
-              </a:lnSpc>
-            </a:pPr>
-            <a:r>
-              <a:rPr lang="zh-CN" sz="1200">
-                <a:solidFill>
-                  <a:srgbClr val="8B97A8"/>
-                </a:solidFill>
-                <a:latin typeface="Microsoft YaHei"/>
-                <a:ea typeface="Microsoft YaHei"/>
-              </a:rPr>
-              <a:t>一次构建，为在线问答准备可检索的知识库</a:t>
-            </a:r>
-            <a:endParaRPr/>
-          </a:p>
-        </p:txBody>
-      </p:sp>
-      <p:sp>
-        <p:nvSpPr>
-          <p:cNvPr id="25" name=""/>
-          <p:cNvSpPr/>
-          <p:nvPr/>
-        </p:nvSpPr>
-        <p:spPr>
-          <a:xfrm rot="0" flipH="0" flipV="0">
-            <a:off x="381000" y="4867275"/>
-            <a:ext cx="2857500" cy="1457325"/>
-          </a:xfrm>
-          <a:prstGeom prst="roundRect">
-            <a:avLst>
-              <a:gd name="adj" fmla="val 5229"/>
-            </a:avLst>
-          </a:prstGeom>
-          <a:solidFill>
-            <a:srgbClr val="0E3F8C"/>
-          </a:solidFill>
-          <a:ln/>
-        </p:spPr>
-        <p:txBody>
-          <a:bodyPr/>
-          <a:p>
-            <a:pPr/>
-            <a:endParaRPr/>
-          </a:p>
-        </p:txBody>
-      </p:sp>
-      <p:sp>
-        <p:nvSpPr>
-          <p:cNvPr id="26" name="" descr="{&quot;isTemplate&quot;:true,&quot;type&quot;:&quot;text&quot;}"/>
-          <p:cNvSpPr txBox="1"/>
-          <p:nvPr/>
-        </p:nvSpPr>
-        <p:spPr>
-          <a:xfrm rot="0" flipH="0" flipV="0">
-            <a:off x="552450" y="5038725"/>
-            <a:ext cx="2514600" cy="209550"/>
-          </a:xfrm>
-          <a:prstGeom prst="rect"/>
-        </p:spPr>
-        <p:txBody>
-          <a:bodyPr wrap="none" lIns="0" tIns="0" rIns="0" bIns="0"/>
-          <a:p>
-            <a:pPr>
-              <a:lnSpc>
-                <a:spcPct val="100000"/>
-              </a:lnSpc>
-            </a:pPr>
-            <a:r>
-              <a:rPr lang="zh-CN" sz="1350" b="1">
-                <a:solidFill>
-                  <a:srgbClr val="FFFFFF"/>
-                </a:solidFill>
-                <a:latin typeface="Microsoft YaHei"/>
-                <a:ea typeface="Microsoft YaHei"/>
-              </a:rPr>
-              <a:t>关键点</a:t>
-            </a:r>
-            <a:endParaRPr/>
-          </a:p>
-        </p:txBody>
-      </p:sp>
-      <p:sp>
-        <p:nvSpPr>
-          <p:cNvPr id="27" name="" descr="{&quot;isTemplate&quot;:true,&quot;type&quot;:&quot;text&quot;}"/>
-          <p:cNvSpPr txBox="1"/>
-          <p:nvPr/>
-        </p:nvSpPr>
-        <p:spPr>
-          <a:xfrm rot="0" flipH="0" flipV="0">
-            <a:off x="552450" y="5324475"/>
-            <a:ext cx="2514600" cy="828675"/>
-          </a:xfrm>
-          <a:prstGeom prst="rect"/>
-        </p:spPr>
-        <p:txBody>
-          <a:bodyPr wrap="square" lIns="0" tIns="0" rIns="0" bIns="0">
-            <a:normAutofit/>
-          </a:bodyPr>
-          <a:p>
-            <a:pPr>
-              <a:lnSpc>
-                <a:spcPct val="160000"/>
-              </a:lnSpc>
-            </a:pPr>
-            <a:r>
-              <a:rPr lang="zh-CN" sz="1125">
-                <a:solidFill>
-                  <a:srgbClr val="D6E4F7"/>
-                </a:solidFill>
-                <a:latin typeface="Microsoft YaHei"/>
-                <a:ea typeface="Microsoft YaHei"/>
-              </a:rPr>
-              <a:t>表格保护：解析保留表格结构，分块保护完整表格，块记录来源文档、页码、章节元数据。</a:t>
-            </a:r>
-            <a:endParaRPr/>
-          </a:p>
-        </p:txBody>
-      </p:sp>
-      <p:sp>
-        <p:nvSpPr>
-          <p:cNvPr id="28" name=""/>
-          <p:cNvSpPr/>
-          <p:nvPr/>
-        </p:nvSpPr>
-        <p:spPr>
-          <a:xfrm rot="0" flipH="0" flipV="0">
-            <a:off x="3619500" y="952500"/>
-            <a:ext cx="8191500" cy="1009650"/>
-          </a:xfrm>
-          <a:prstGeom prst="roundRect">
-            <a:avLst>
-              <a:gd name="adj" fmla="val 9434"/>
-            </a:avLst>
-          </a:prstGeom>
-          <a:solidFill>
-            <a:srgbClr val="F7F9FC"/>
-          </a:solidFill>
-          <a:ln w="12700">
-            <a:solidFill>
-              <a:srgbClr val="E5E7EB"/>
-            </a:solidFill>
-            <a:prstDash val="solid"/>
-          </a:ln>
-        </p:spPr>
-        <p:txBody>
-          <a:bodyPr/>
-          <a:p>
-            <a:pPr/>
-            <a:endParaRPr/>
-          </a:p>
-        </p:txBody>
-      </p:sp>
-      <p:sp>
-        <p:nvSpPr>
-          <p:cNvPr id="29" name=""/>
-          <p:cNvSpPr/>
-          <p:nvPr/>
-        </p:nvSpPr>
-        <p:spPr>
-          <a:xfrm rot="0" flipH="0" flipV="0">
-            <a:off x="3829050" y="1238250"/>
-            <a:ext cx="438150" cy="438150"/>
-          </a:xfrm>
-          <a:prstGeom prst="roundRect">
-            <a:avLst>
-              <a:gd name="adj" fmla="val 50000"/>
-            </a:avLst>
-          </a:prstGeom>
-          <a:solidFill>
-            <a:srgbClr val="1E4FA8"/>
-          </a:solidFill>
-          <a:ln/>
-        </p:spPr>
-        <p:txBody>
-          <a:bodyPr/>
-          <a:p>
-            <a:pPr/>
-            <a:endParaRPr/>
-          </a:p>
-        </p:txBody>
-      </p:sp>
-      <p:sp>
-        <p:nvSpPr>
           <p:cNvPr id="30" name="" descr="{&quot;isTemplate&quot;:true,&quot;type&quot;:&quot;text&quot;}"/>
-          <p:cNvSpPr txBox="1"/>
-          <p:nvPr/>
-        </p:nvSpPr>
-        <p:spPr>
-          <a:xfrm rot="0" flipH="0" flipV="0">
-            <a:off x="3990975" y="1343025"/>
-            <a:ext cx="123825" cy="228600"/>
-          </a:xfrm>
-          <a:prstGeom prst="rect"/>
-        </p:spPr>
-        <p:txBody>
-          <a:bodyPr wrap="none" lIns="0" tIns="0" rIns="0" bIns="0"/>
-          <a:p>
-            <a:pPr>
-              <a:lnSpc>
-                <a:spcPct val="100000"/>
-              </a:lnSpc>
-            </a:pPr>
-            <a:r>
-              <a:rPr lang="en-US" sz="1500" b="1">
-                <a:solidFill>
-                  <a:srgbClr val="FFFFFF"/>
-                </a:solidFill>
-                <a:latin typeface="Microsoft YaHei"/>
-                <a:ea typeface="Microsoft YaHei"/>
-              </a:rPr>
-              <a:t>1</a:t>
-            </a:r>
-            <a:endParaRPr/>
-          </a:p>
-        </p:txBody>
-      </p:sp>
-      <p:sp>
-        <p:nvSpPr>
-          <p:cNvPr id="31" name="" descr="{&quot;isTemplate&quot;:true,&quot;type&quot;:&quot;text&quot;}"/>
-          <p:cNvSpPr txBox="1"/>
-          <p:nvPr/>
-        </p:nvSpPr>
-        <p:spPr>
-          <a:xfrm rot="0" flipH="0" flipV="0">
-            <a:off x="4457700" y="1162050"/>
-            <a:ext cx="7143750" cy="257175"/>
-          </a:xfrm>
-          <a:prstGeom prst="rect"/>
-        </p:spPr>
-        <p:txBody>
-          <a:bodyPr wrap="none" lIns="0" tIns="0" rIns="0" bIns="0"/>
-          <a:p>
-            <a:pPr>
-              <a:lnSpc>
-                <a:spcPct val="100000"/>
-              </a:lnSpc>
-            </a:pPr>
-            <a:r>
-              <a:rPr lang="zh-CN" sz="1650" b="1">
-                <a:solidFill>
-                  <a:srgbClr val="1A2230"/>
-                </a:solidFill>
-                <a:latin typeface="Microsoft YaHei"/>
-                <a:ea typeface="Microsoft YaHei"/>
-              </a:rPr>
-              <a:t>文档解析</a:t>
-            </a:r>
-            <a:endParaRPr/>
-          </a:p>
-        </p:txBody>
-      </p:sp>
-      <p:sp>
-        <p:nvSpPr>
-          <p:cNvPr id="32" name="" descr="{&quot;isTemplate&quot;:true,&quot;type&quot;:&quot;text&quot;}"/>
-          <p:cNvSpPr txBox="1"/>
-          <p:nvPr/>
-        </p:nvSpPr>
-        <p:spPr>
-          <a:xfrm rot="0" flipH="0" flipV="0">
-            <a:off x="4457700" y="1476375"/>
-            <a:ext cx="7143750" cy="276225"/>
-          </a:xfrm>
-          <a:prstGeom prst="rect"/>
-        </p:spPr>
-        <p:txBody>
-          <a:bodyPr wrap="none" lIns="0" tIns="0" rIns="0" bIns="0"/>
-          <a:p>
-            <a:pPr>
-              <a:lnSpc>
-                <a:spcPct val="150000"/>
-              </a:lnSpc>
-            </a:pPr>
-            <a:r>
-              <a:rPr lang="en-US" sz="1200">
-                <a:solidFill>
-                  <a:srgbClr val="4A5568"/>
-                </a:solidFill>
-                <a:latin typeface="Microsoft YaHei"/>
-                <a:ea typeface="Microsoft YaHei"/>
-              </a:rPr>
-              <a:t xml:space="preserve">PyMuPDF </a:t>
-            </a:r>
-            <a:r>
-              <a:rPr lang="zh-CN" sz="1200">
-                <a:solidFill>
-                  <a:srgbClr val="4A5568"/>
-                </a:solidFill>
-                <a:latin typeface="Microsoft YaHei"/>
-                <a:ea typeface="Microsoft YaHei"/>
-              </a:rPr>
-              <a:t>提取文字</a:t>
-            </a:r>
-            <a:r>
-              <a:rPr lang="en-US" sz="1200">
-                <a:solidFill>
-                  <a:srgbClr val="4A5568"/>
-                </a:solidFill>
-                <a:latin typeface="Microsoft YaHei"/>
-                <a:ea typeface="Microsoft YaHei"/>
-              </a:rPr>
-              <a:t>/</a:t>
-            </a:r>
-            <a:r>
-              <a:rPr lang="zh-CN" sz="1200">
-                <a:solidFill>
-                  <a:srgbClr val="4A5568"/>
-                </a:solidFill>
-                <a:latin typeface="Microsoft YaHei"/>
-                <a:ea typeface="Microsoft YaHei"/>
-              </a:rPr>
-              <a:t>页码</a:t>
-            </a:r>
-            <a:r>
-              <a:rPr lang="en-US" sz="1200">
-                <a:solidFill>
-                  <a:srgbClr val="4A5568"/>
-                </a:solidFill>
-                <a:latin typeface="Microsoft YaHei"/>
-                <a:ea typeface="Microsoft YaHei"/>
-              </a:rPr>
-              <a:t>/</a:t>
-            </a:r>
-            <a:r>
-              <a:rPr lang="zh-CN" sz="1200">
-                <a:solidFill>
-                  <a:srgbClr val="4A5568"/>
-                </a:solidFill>
-                <a:latin typeface="Microsoft YaHei"/>
-                <a:ea typeface="Microsoft YaHei"/>
-              </a:rPr>
-              <a:t>版面，</a:t>
-            </a:r>
-            <a:r>
-              <a:rPr lang="en-US" sz="1200">
-                <a:solidFill>
-                  <a:srgbClr val="4A5568"/>
-                </a:solidFill>
-                <a:latin typeface="Microsoft YaHei"/>
-                <a:ea typeface="Microsoft YaHei"/>
-              </a:rPr>
-              <a:t xml:space="preserve">pdfplumber </a:t>
-            </a:r>
-            <a:r>
-              <a:rPr lang="zh-CN" sz="1200">
-                <a:solidFill>
-                  <a:srgbClr val="4A5568"/>
-                </a:solidFill>
-                <a:latin typeface="Microsoft YaHei"/>
-                <a:ea typeface="Microsoft YaHei"/>
-              </a:rPr>
-              <a:t>抽取表格结构</a:t>
-            </a:r>
-            <a:endParaRPr/>
-          </a:p>
-        </p:txBody>
-      </p:sp>
-      <p:sp>
-        <p:nvSpPr>
-          <p:cNvPr id="33" name=""/>
-          <p:cNvSpPr/>
-          <p:nvPr/>
-        </p:nvSpPr>
-        <p:spPr>
-          <a:xfrm rot="0" flipH="0" flipV="0">
-            <a:off x="3619500" y="2409825"/>
-            <a:ext cx="8191500" cy="1009650"/>
-          </a:xfrm>
-          <a:prstGeom prst="roundRect">
-            <a:avLst>
-              <a:gd name="adj" fmla="val 9434"/>
-            </a:avLst>
-          </a:prstGeom>
-          <a:solidFill>
-            <a:srgbClr val="F7F9FC"/>
-          </a:solidFill>
-          <a:ln w="12700">
-            <a:solidFill>
-              <a:srgbClr val="E5E7EB"/>
-            </a:solidFill>
-            <a:prstDash val="solid"/>
-          </a:ln>
-        </p:spPr>
-        <p:txBody>
-          <a:bodyPr/>
-          <a:p>
-            <a:pPr/>
-            <a:endParaRPr/>
-          </a:p>
-        </p:txBody>
-      </p:sp>
-      <p:sp>
-        <p:nvSpPr>
-          <p:cNvPr id="34" name=""/>
-          <p:cNvSpPr/>
-          <p:nvPr/>
-        </p:nvSpPr>
-        <p:spPr>
-          <a:xfrm rot="0" flipH="0" flipV="0">
-            <a:off x="3829050" y="2695575"/>
-            <a:ext cx="438150" cy="438150"/>
-          </a:xfrm>
-          <a:prstGeom prst="roundRect">
-            <a:avLst>
-              <a:gd name="adj" fmla="val 50000"/>
-            </a:avLst>
-          </a:prstGeom>
-          <a:solidFill>
-            <a:srgbClr val="1E4FA8"/>
-          </a:solidFill>
-          <a:ln/>
-        </p:spPr>
-        <p:txBody>
-          <a:bodyPr/>
-          <a:p>
-            <a:pPr/>
-            <a:endParaRPr/>
-          </a:p>
-        </p:txBody>
-      </p:sp>
-      <p:sp>
-        <p:nvSpPr>
-          <p:cNvPr id="35" name="" descr="{&quot;isTemplate&quot;:true,&quot;type&quot;:&quot;text&quot;}"/>
-          <p:cNvSpPr txBox="1"/>
-          <p:nvPr/>
-        </p:nvSpPr>
-        <p:spPr>
-          <a:xfrm rot="0" flipH="0" flipV="0">
-            <a:off x="3990975" y="2800350"/>
-            <a:ext cx="123825" cy="228600"/>
-          </a:xfrm>
-          <a:prstGeom prst="rect"/>
-        </p:spPr>
-        <p:txBody>
-          <a:bodyPr wrap="none" lIns="0" tIns="0" rIns="0" bIns="0"/>
-          <a:p>
-            <a:pPr>
-              <a:lnSpc>
-                <a:spcPct val="100000"/>
-              </a:lnSpc>
-            </a:pPr>
-            <a:r>
-              <a:rPr lang="en-US" sz="1500" b="1">
-                <a:solidFill>
-                  <a:srgbClr val="FFFFFF"/>
-                </a:solidFill>
-                <a:latin typeface="Microsoft YaHei"/>
-                <a:ea typeface="Microsoft YaHei"/>
-              </a:rPr>
-              <a:t>2</a:t>
-            </a:r>
-            <a:endParaRPr/>
-          </a:p>
-        </p:txBody>
-      </p:sp>
-      <p:sp>
-        <p:nvSpPr>
-          <p:cNvPr id="36" name="" descr="{&quot;isTemplate&quot;:true,&quot;type&quot;:&quot;text&quot;}"/>
-          <p:cNvSpPr txBox="1"/>
-          <p:nvPr/>
-        </p:nvSpPr>
-        <p:spPr>
-          <a:xfrm rot="0" flipH="0" flipV="0">
-            <a:off x="4457700" y="2619375"/>
-            <a:ext cx="7143750" cy="257175"/>
-          </a:xfrm>
-          <a:prstGeom prst="rect"/>
-        </p:spPr>
-        <p:txBody>
-          <a:bodyPr wrap="none" lIns="0" tIns="0" rIns="0" bIns="0"/>
-          <a:p>
-            <a:pPr>
-              <a:lnSpc>
-                <a:spcPct val="100000"/>
-              </a:lnSpc>
-            </a:pPr>
-            <a:r>
-              <a:rPr lang="zh-CN" sz="1650" b="1">
-                <a:solidFill>
-                  <a:srgbClr val="1A2230"/>
-                </a:solidFill>
-                <a:latin typeface="Microsoft YaHei"/>
-                <a:ea typeface="Microsoft YaHei"/>
-              </a:rPr>
-              <a:t>文档分块</a:t>
-            </a:r>
-            <a:endParaRPr/>
-          </a:p>
-        </p:txBody>
-      </p:sp>
-      <p:sp>
-        <p:nvSpPr>
-          <p:cNvPr id="37" name="" descr="{&quot;isTemplate&quot;:true,&quot;type&quot;:&quot;text&quot;}"/>
-          <p:cNvSpPr txBox="1"/>
-          <p:nvPr/>
-        </p:nvSpPr>
-        <p:spPr>
-          <a:xfrm rot="0" flipH="0" flipV="0">
-            <a:off x="4457700" y="2933700"/>
-            <a:ext cx="7143750" cy="276225"/>
-          </a:xfrm>
-          <a:prstGeom prst="rect"/>
-        </p:spPr>
-        <p:txBody>
-          <a:bodyPr wrap="none" lIns="0" tIns="0" rIns="0" bIns="0"/>
-          <a:p>
-            <a:pPr>
-              <a:lnSpc>
-                <a:spcPct val="150000"/>
-              </a:lnSpc>
-            </a:pPr>
-            <a:r>
-              <a:rPr lang="zh-CN" sz="1200">
-                <a:solidFill>
-                  <a:srgbClr val="4A5568"/>
-                </a:solidFill>
-                <a:latin typeface="Microsoft YaHei"/>
-                <a:ea typeface="Microsoft YaHei"/>
-              </a:rPr>
-              <a:t>递归字符分块</a:t>
-            </a:r>
-            <a:r>
-              <a:rPr lang="en-US" sz="1200">
-                <a:solidFill>
-                  <a:srgbClr val="4A5568"/>
-                </a:solidFill>
-                <a:latin typeface="Microsoft YaHei"/>
-                <a:ea typeface="Microsoft YaHei"/>
-              </a:rPr>
-              <a:t xml:space="preserve"> + </a:t>
-            </a:r>
-            <a:r>
-              <a:rPr lang="zh-CN" sz="1200">
-                <a:solidFill>
-                  <a:srgbClr val="4A5568"/>
-                </a:solidFill>
-                <a:latin typeface="Microsoft YaHei"/>
-                <a:ea typeface="Microsoft YaHei"/>
-              </a:rPr>
-              <a:t>表格保护</a:t>
-            </a:r>
-            <a:r>
-              <a:rPr lang="en-US" sz="1200">
-                <a:solidFill>
-                  <a:srgbClr val="4A5568"/>
-                </a:solidFill>
-                <a:latin typeface="Microsoft YaHei"/>
-                <a:ea typeface="Microsoft YaHei"/>
-              </a:rPr>
-              <a:t xml:space="preserve"> + </a:t>
-            </a:r>
-            <a:r>
-              <a:rPr lang="zh-CN" sz="1200">
-                <a:solidFill>
-                  <a:srgbClr val="4A5568"/>
-                </a:solidFill>
-                <a:latin typeface="Microsoft YaHei"/>
-                <a:ea typeface="Microsoft YaHei"/>
-              </a:rPr>
-              <a:t>相邻块重叠</a:t>
-            </a:r>
-            <a:endParaRPr/>
-          </a:p>
-        </p:txBody>
-      </p:sp>
-      <p:sp>
-        <p:nvSpPr>
-          <p:cNvPr id="38" name=""/>
-          <p:cNvSpPr/>
-          <p:nvPr/>
-        </p:nvSpPr>
-        <p:spPr>
-          <a:xfrm rot="0" flipH="0" flipV="0">
-            <a:off x="3619500" y="3857625"/>
-            <a:ext cx="8191500" cy="1009650"/>
-          </a:xfrm>
-          <a:prstGeom prst="roundRect">
-            <a:avLst>
-              <a:gd name="adj" fmla="val 9434"/>
-            </a:avLst>
-          </a:prstGeom>
-          <a:solidFill>
-            <a:srgbClr val="F7F9FC"/>
-          </a:solidFill>
-          <a:ln w="12700">
-            <a:solidFill>
-              <a:srgbClr val="E5E7EB"/>
-            </a:solidFill>
-            <a:prstDash val="solid"/>
-          </a:ln>
-        </p:spPr>
-        <p:txBody>
-          <a:bodyPr/>
-          <a:p>
-            <a:pPr/>
-            <a:endParaRPr/>
-          </a:p>
-        </p:txBody>
-      </p:sp>
-      <p:sp>
-        <p:nvSpPr>
-          <p:cNvPr id="39" name=""/>
-          <p:cNvSpPr/>
-          <p:nvPr/>
-        </p:nvSpPr>
-        <p:spPr>
-          <a:xfrm rot="0" flipH="0" flipV="0">
-            <a:off x="3829050" y="4143375"/>
-            <a:ext cx="438150" cy="438150"/>
-          </a:xfrm>
-          <a:prstGeom prst="roundRect">
-            <a:avLst>
-              <a:gd name="adj" fmla="val 50000"/>
-            </a:avLst>
-          </a:prstGeom>
-          <a:solidFill>
-            <a:srgbClr val="1E4FA8"/>
-          </a:solidFill>
-          <a:ln/>
-        </p:spPr>
-        <p:txBody>
-          <a:bodyPr/>
-          <a:p>
-            <a:pPr/>
-            <a:endParaRPr/>
-          </a:p>
-        </p:txBody>
-      </p:sp>
-      <p:sp>
-        <p:nvSpPr>
-          <p:cNvPr id="40" name="" descr="{&quot;isTemplate&quot;:true,&quot;type&quot;:&quot;text&quot;}"/>
-          <p:cNvSpPr txBox="1"/>
-          <p:nvPr/>
-        </p:nvSpPr>
-        <p:spPr>
-          <a:xfrm rot="0" flipH="0" flipV="0">
-            <a:off x="3990975" y="4248150"/>
-            <a:ext cx="123825" cy="228600"/>
-          </a:xfrm>
-          <a:prstGeom prst="rect"/>
-        </p:spPr>
-        <p:txBody>
-          <a:bodyPr wrap="none" lIns="0" tIns="0" rIns="0" bIns="0"/>
-          <a:p>
-            <a:pPr>
-              <a:lnSpc>
-                <a:spcPct val="100000"/>
-              </a:lnSpc>
-            </a:pPr>
-            <a:r>
-              <a:rPr lang="en-US" sz="1500" b="1">
-                <a:solidFill>
-                  <a:srgbClr val="FFFFFF"/>
-                </a:solidFill>
-                <a:latin typeface="Microsoft YaHei"/>
-                <a:ea typeface="Microsoft YaHei"/>
-              </a:rPr>
-              <a:t>3</a:t>
-            </a:r>
-            <a:endParaRPr/>
-          </a:p>
-        </p:txBody>
-      </p:sp>
-      <p:sp>
-        <p:nvSpPr>
-          <p:cNvPr id="41" name="" descr="{&quot;isTemplate&quot;:true,&quot;type&quot;:&quot;text&quot;}"/>
-          <p:cNvSpPr txBox="1"/>
-          <p:nvPr/>
-        </p:nvSpPr>
-        <p:spPr>
-          <a:xfrm rot="0" flipH="0" flipV="0">
-            <a:off x="4457700" y="4067175"/>
-            <a:ext cx="7143750" cy="257175"/>
-          </a:xfrm>
-          <a:prstGeom prst="rect"/>
-        </p:spPr>
-        <p:txBody>
-          <a:bodyPr wrap="none" lIns="0" tIns="0" rIns="0" bIns="0"/>
-          <a:p>
-            <a:pPr>
-              <a:lnSpc>
-                <a:spcPct val="100000"/>
-              </a:lnSpc>
-            </a:pPr>
-            <a:r>
-              <a:rPr lang="zh-CN" sz="1650" b="1">
-                <a:solidFill>
-                  <a:srgbClr val="1A2230"/>
-                </a:solidFill>
-                <a:latin typeface="Microsoft YaHei"/>
-                <a:ea typeface="Microsoft YaHei"/>
-              </a:rPr>
-              <a:t>向量化</a:t>
-            </a:r>
-            <a:endParaRPr/>
-          </a:p>
-        </p:txBody>
-      </p:sp>
-      <p:sp>
-        <p:nvSpPr>
-          <p:cNvPr id="42" name="" descr="{&quot;isTemplate&quot;:true,&quot;type&quot;:&quot;text&quot;}"/>
-          <p:cNvSpPr txBox="1"/>
-          <p:nvPr/>
-        </p:nvSpPr>
-        <p:spPr>
-          <a:xfrm rot="0" flipH="0" flipV="0">
-            <a:off x="4457700" y="4381500"/>
-            <a:ext cx="7143750" cy="276225"/>
-          </a:xfrm>
-          <a:prstGeom prst="rect"/>
-        </p:spPr>
-        <p:txBody>
-          <a:bodyPr wrap="none" lIns="0" tIns="0" rIns="0" bIns="0"/>
-          <a:p>
-            <a:pPr>
-              <a:lnSpc>
-                <a:spcPct val="150000"/>
-              </a:lnSpc>
-            </a:pPr>
-            <a:r>
-              <a:rPr lang="en-US" sz="1200">
-                <a:solidFill>
-                  <a:srgbClr val="4A5568"/>
-                </a:solidFill>
-                <a:latin typeface="Microsoft YaHei"/>
-                <a:ea typeface="Microsoft YaHei"/>
-              </a:rPr>
-              <a:t xml:space="preserve">BGE-M3 </a:t>
-            </a:r>
-            <a:r>
-              <a:rPr lang="zh-CN" sz="1200">
-                <a:solidFill>
-                  <a:srgbClr val="4A5568"/>
-                </a:solidFill>
-                <a:latin typeface="Microsoft YaHei"/>
-                <a:ea typeface="Microsoft YaHei"/>
-              </a:rPr>
-              <a:t>嵌入模型生成稠密向量</a:t>
-            </a:r>
-            <a:endParaRPr/>
-          </a:p>
-        </p:txBody>
-      </p:sp>
-      <p:sp>
-        <p:nvSpPr>
-          <p:cNvPr id="43" name=""/>
-          <p:cNvSpPr/>
-          <p:nvPr/>
-        </p:nvSpPr>
-        <p:spPr>
-          <a:xfrm rot="0" flipH="0" flipV="0">
-            <a:off x="3619500" y="5314950"/>
-            <a:ext cx="8191500" cy="1009650"/>
-          </a:xfrm>
-          <a:prstGeom prst="roundRect">
-            <a:avLst>
-              <a:gd name="adj" fmla="val 9434"/>
-            </a:avLst>
-          </a:prstGeom>
-          <a:solidFill>
-            <a:srgbClr val="F7F9FC"/>
-          </a:solidFill>
-          <a:ln w="12700">
-            <a:solidFill>
-              <a:srgbClr val="E5E7EB"/>
-            </a:solidFill>
-            <a:prstDash val="solid"/>
-          </a:ln>
-        </p:spPr>
-        <p:txBody>
-          <a:bodyPr/>
-          <a:p>
-            <a:pPr/>
-            <a:endParaRPr/>
-          </a:p>
-        </p:txBody>
-      </p:sp>
-      <p:sp>
-        <p:nvSpPr>
-          <p:cNvPr id="44" name=""/>
-          <p:cNvSpPr/>
-          <p:nvPr/>
-        </p:nvSpPr>
-        <p:spPr>
-          <a:xfrm rot="0" flipH="0" flipV="0">
-            <a:off x="3829050" y="5600700"/>
-            <a:ext cx="438150" cy="438150"/>
-          </a:xfrm>
-          <a:prstGeom prst="roundRect">
-            <a:avLst>
-              <a:gd name="adj" fmla="val 50000"/>
-            </a:avLst>
-          </a:prstGeom>
-          <a:solidFill>
-            <a:srgbClr val="1E4FA8"/>
-          </a:solidFill>
-          <a:ln/>
-        </p:spPr>
-        <p:txBody>
-          <a:bodyPr/>
-          <a:p>
-            <a:pPr/>
-            <a:endParaRPr/>
-          </a:p>
-        </p:txBody>
-      </p:sp>
-      <p:sp>
-        <p:nvSpPr>
-          <p:cNvPr id="45" name="" descr="{&quot;isTemplate&quot;:true,&quot;type&quot;:&quot;text&quot;}"/>
-          <p:cNvSpPr txBox="1"/>
-          <p:nvPr/>
-        </p:nvSpPr>
-        <p:spPr>
-          <a:xfrm rot="0" flipH="0" flipV="0">
-            <a:off x="3990975" y="5705475"/>
-            <a:ext cx="123825" cy="228600"/>
-          </a:xfrm>
-          <a:prstGeom prst="rect"/>
-        </p:spPr>
-        <p:txBody>
-          <a:bodyPr wrap="none" lIns="0" tIns="0" rIns="0" bIns="0"/>
-          <a:p>
-            <a:pPr>
-              <a:lnSpc>
-                <a:spcPct val="100000"/>
-              </a:lnSpc>
-            </a:pPr>
-            <a:r>
-              <a:rPr lang="en-US" sz="1500" b="1">
-                <a:solidFill>
-                  <a:srgbClr val="FFFFFF"/>
-                </a:solidFill>
-                <a:latin typeface="Microsoft YaHei"/>
-                <a:ea typeface="Microsoft YaHei"/>
-              </a:rPr>
-              <a:t>4</a:t>
-            </a:r>
-            <a:endParaRPr/>
-          </a:p>
-        </p:txBody>
-      </p:sp>
-      <p:sp>
-        <p:nvSpPr>
-          <p:cNvPr id="46" name="" descr="{&quot;isTemplate&quot;:true,&quot;type&quot;:&quot;text&quot;}"/>
-          <p:cNvSpPr txBox="1"/>
-          <p:nvPr/>
-        </p:nvSpPr>
-        <p:spPr>
-          <a:xfrm rot="0" flipH="0" flipV="0">
-            <a:off x="4457700" y="5524500"/>
-            <a:ext cx="7143750" cy="257175"/>
-          </a:xfrm>
-          <a:prstGeom prst="rect"/>
-        </p:spPr>
-        <p:txBody>
-          <a:bodyPr wrap="none" lIns="0" tIns="0" rIns="0" bIns="0"/>
-          <a:p>
-            <a:pPr>
-              <a:lnSpc>
-                <a:spcPct val="100000"/>
-              </a:lnSpc>
-            </a:pPr>
-            <a:r>
-              <a:rPr lang="zh-CN" sz="1650" b="1">
-                <a:solidFill>
-                  <a:srgbClr val="1A2230"/>
-                </a:solidFill>
-                <a:latin typeface="Microsoft YaHei"/>
-                <a:ea typeface="Microsoft YaHei"/>
-              </a:rPr>
-              <a:t>索引入库</a:t>
-            </a:r>
-            <a:endParaRPr/>
-          </a:p>
-        </p:txBody>
-      </p:sp>
-      <p:sp>
-        <p:nvSpPr>
-          <p:cNvPr id="47" name="" descr="{&quot;isTemplate&quot;:true,&quot;type&quot;:&quot;text&quot;}"/>
-          <p:cNvSpPr txBox="1"/>
-          <p:nvPr/>
-        </p:nvSpPr>
-        <p:spPr>
-          <a:xfrm rot="0" flipH="0" flipV="0">
-            <a:off x="4457700" y="5838825"/>
-            <a:ext cx="7143750" cy="276225"/>
-          </a:xfrm>
-          <a:prstGeom prst="rect"/>
-        </p:spPr>
-        <p:txBody>
-          <a:bodyPr wrap="none" lIns="0" tIns="0" rIns="0" bIns="0"/>
-          <a:p>
-            <a:pPr>
-              <a:lnSpc>
-                <a:spcPct val="150000"/>
-              </a:lnSpc>
-            </a:pPr>
-            <a:r>
-              <a:rPr lang="en-US" sz="1200">
-                <a:solidFill>
-                  <a:srgbClr val="4A5568"/>
-                </a:solidFill>
-                <a:latin typeface="Microsoft YaHei"/>
-                <a:ea typeface="Microsoft YaHei"/>
-              </a:rPr>
-              <a:t xml:space="preserve">Chroma </a:t>
-            </a:r>
-            <a:r>
-              <a:rPr lang="zh-CN" sz="1200">
-                <a:solidFill>
-                  <a:srgbClr val="4A5568"/>
-                </a:solidFill>
-                <a:latin typeface="Microsoft YaHei"/>
-                <a:ea typeface="Microsoft YaHei"/>
-              </a:rPr>
-              <a:t>写入稠密向量，</a:t>
-            </a:r>
-            <a:r>
-              <a:rPr lang="en-US" sz="1200">
-                <a:solidFill>
-                  <a:srgbClr val="4A5568"/>
-                </a:solidFill>
-                <a:latin typeface="Microsoft YaHei"/>
-                <a:ea typeface="Microsoft YaHei"/>
-              </a:rPr>
-              <a:t xml:space="preserve">rank_bm25 </a:t>
-            </a:r>
-            <a:r>
-              <a:rPr lang="zh-CN" sz="1200">
-                <a:solidFill>
-                  <a:srgbClr val="4A5568"/>
-                </a:solidFill>
-                <a:latin typeface="Microsoft YaHei"/>
-                <a:ea typeface="Microsoft YaHei"/>
-              </a:rPr>
-              <a:t>构建稀疏索引</a:t>
-            </a:r>
-            <a:endParaRPr/>
-          </a:p>
-        </p:txBody>
-      </p:sp>
-      <p:sp>
-        <p:nvSpPr>
-          <p:cNvPr id="48" name="" descr="{&quot;isTemplate&quot;:true,&quot;type&quot;:&quot;text&quot;}"/>
-          <p:cNvSpPr txBox="1"/>
-          <p:nvPr/>
-        </p:nvSpPr>
-        <p:spPr>
-          <a:xfrm rot="0" flipH="0" flipV="0">
-            <a:off x="381000" y="6591300"/>
-            <a:ext cx="1600200" cy="161925"/>
-          </a:xfrm>
-          <a:prstGeom prst="rect"/>
-        </p:spPr>
-        <p:txBody>
-          <a:bodyPr wrap="none" lIns="0" tIns="0" rIns="0" bIns="0"/>
-          <a:p>
-            <a:pPr>
-              <a:lnSpc>
-                <a:spcPct val="100000"/>
-              </a:lnSpc>
-            </a:pPr>
-            <a:r>
-              <a:rPr lang="zh-CN" sz="1050">
-                <a:solidFill>
-                  <a:srgbClr val="8B97A8"/>
-                </a:solidFill>
-                <a:latin typeface="Microsoft YaHei"/>
-                <a:ea typeface="Microsoft YaHei"/>
-              </a:rPr>
-              <a:t>中国科学技术大学软件学院</a:t>
-            </a:r>
-            <a:endParaRPr/>
-          </a:p>
-        </p:txBody>
-      </p:sp>
-      <p:sp>
-        <p:nvSpPr>
-          <p:cNvPr id="49" name="" descr="{&quot;isTemplate&quot;:true,&quot;type&quot;:&quot;text&quot;}"/>
-          <p:cNvSpPr txBox="1"/>
-          <p:nvPr/>
-        </p:nvSpPr>
-        <p:spPr>
-          <a:xfrm rot="0" flipH="0" flipV="0">
-            <a:off x="11268075" y="6572250"/>
-            <a:ext cx="542925" cy="190500"/>
-          </a:xfrm>
-          <a:prstGeom prst="rect"/>
-        </p:spPr>
-        <p:txBody>
-          <a:bodyPr wrap="none" lIns="0" tIns="0" rIns="0" bIns="0"/>
-          <a:p>
-            <a:pPr>
-              <a:lnSpc>
-                <a:spcPct val="100000"/>
-              </a:lnSpc>
-            </a:pPr>
-            <a:r>
-              <a:rPr lang="en-US" sz="1200" b="1">
-                <a:solidFill>
-                  <a:srgbClr val="1E4FA8"/>
-                </a:solidFill>
-                <a:latin typeface="Microsoft YaHei"/>
-                <a:ea typeface="Microsoft YaHei"/>
-              </a:rPr>
-              <a:t>10 / 17</a:t>
-            </a:r>
-            <a:endParaRPr/>
-          </a:p>
-        </p:txBody>
-      </p:sp>
-    </p:spTree>
-  </p:cSld>
-</p:sld>
-</file>
-
-<file path=ppt/slides/slide11.xml><?xml version="1.0" encoding="utf-8"?>
-<p:sld xmlns:p="http://schemas.openxmlformats.org/presentationml/2006/main" xmlns:a="http://schemas.openxmlformats.org/drawingml/2006/main">
-  <p:cSld>
-    <p:spTree>
-      <p:nvGrpSpPr>
-        <p:cNvPr id="50" name=""/>
-        <p:cNvGrpSpPr/>
-        <p:nvPr/>
-      </p:nvGrpSpPr>
-      <p:grpSpPr>
-        <a:xfrm>
-          <a:off x="0" y="0"/>
-          <a:ext cx="0" cy="0"/>
-          <a:chOff x="0" y="0"/>
-          <a:chExt cx="0" cy="0"/>
-        </a:xfrm>
-      </p:grpSpPr>
-      <p:sp>
-        <p:nvSpPr>
-          <p:cNvPr id="51" name=""/>
-          <p:cNvSpPr/>
-          <p:nvPr/>
-        </p:nvSpPr>
-        <p:spPr>
-          <a:xfrm rot="0" flipH="0" flipV="0">
-            <a:off x="0" y="0"/>
-            <a:ext cx="12192000" cy="6858000"/>
-          </a:xfrm>
-          <a:prstGeom prst="rect">
-            <a:avLst/>
-          </a:prstGeom>
-          <a:solidFill>
-            <a:srgbClr val="FFFFFF"/>
-          </a:solidFill>
-          <a:ln/>
-        </p:spPr>
-        <p:txBody>
-          <a:bodyPr/>
-          <a:p>
-            <a:pPr/>
-            <a:endParaRPr/>
-          </a:p>
-        </p:txBody>
-      </p:sp>
-      <p:sp>
-        <p:nvSpPr>
-          <p:cNvPr id="52" name=""/>
-          <p:cNvSpPr/>
-          <p:nvPr/>
-        </p:nvSpPr>
-        <p:spPr>
-          <a:xfrm rot="0" flipH="0" flipV="0">
-            <a:off x="0" y="0"/>
-            <a:ext cx="12192000" cy="685800"/>
-          </a:xfrm>
-          <a:prstGeom prst="rect">
-            <a:avLst/>
-          </a:prstGeom>
-          <a:solidFill>
-            <a:srgbClr val="1E4FA8"/>
-          </a:solidFill>
-          <a:ln/>
-        </p:spPr>
-        <p:txBody>
-          <a:bodyPr/>
-          <a:p>
-            <a:pPr/>
-            <a:endParaRPr/>
-          </a:p>
-        </p:txBody>
-      </p:sp>
-      <p:sp>
-        <p:nvSpPr>
-          <p:cNvPr id="53" name="" descr="{&quot;isTemplate&quot;:true,&quot;type&quot;:&quot;text&quot;}"/>
-          <p:cNvSpPr txBox="1"/>
-          <p:nvPr/>
-        </p:nvSpPr>
-        <p:spPr>
-          <a:xfrm rot="0" flipH="0" flipV="0">
-            <a:off x="381000" y="247650"/>
-            <a:ext cx="2543175" cy="190500"/>
-          </a:xfrm>
-          <a:prstGeom prst="rect"/>
-        </p:spPr>
-        <p:txBody>
-          <a:bodyPr wrap="none" lIns="0" tIns="0" rIns="0" bIns="0"/>
-          <a:p>
-            <a:pPr>
-              <a:lnSpc>
-                <a:spcPct val="100000"/>
-              </a:lnSpc>
-            </a:pPr>
-            <a:r>
-              <a:rPr lang="zh-CN" sz="1200">
-                <a:solidFill>
-                  <a:srgbClr val="FFFFFF"/>
-                </a:solidFill>
-                <a:latin typeface="Microsoft YaHei"/>
-                <a:ea typeface="Microsoft YaHei"/>
-              </a:rPr>
-              <a:t>基于</a:t>
-            </a:r>
-            <a:r>
-              <a:rPr lang="en-US" sz="1200">
-                <a:solidFill>
-                  <a:srgbClr val="FFFFFF"/>
-                </a:solidFill>
-                <a:latin typeface="Microsoft YaHei"/>
-                <a:ea typeface="Microsoft YaHei"/>
-              </a:rPr>
-              <a:t xml:space="preserve"> RAG </a:t>
-            </a:r>
-            <a:r>
-              <a:rPr lang="zh-CN" sz="1200">
-                <a:solidFill>
-                  <a:srgbClr val="FFFFFF"/>
-                </a:solidFill>
-                <a:latin typeface="Microsoft YaHei"/>
-                <a:ea typeface="Microsoft YaHei"/>
-              </a:rPr>
-              <a:t>的轻量级企业工艺生成系统</a:t>
-            </a:r>
-            <a:endParaRPr/>
-          </a:p>
-        </p:txBody>
-      </p:sp>
-      <p:sp>
-        <p:nvSpPr>
-          <p:cNvPr id="54" name="" descr="{&quot;isTemplate&quot;:true,&quot;type&quot;:&quot;text&quot;}"/>
-          <p:cNvSpPr txBox="1"/>
-          <p:nvPr/>
-        </p:nvSpPr>
-        <p:spPr>
-          <a:xfrm rot="0" flipH="0" flipV="0">
-            <a:off x="11277600" y="266700"/>
-            <a:ext cx="533400" cy="161925"/>
-          </a:xfrm>
-          <a:prstGeom prst="rect"/>
-        </p:spPr>
-        <p:txBody>
-          <a:bodyPr wrap="none" lIns="0" tIns="0" rIns="0" bIns="0"/>
-          <a:p>
-            <a:pPr>
-              <a:lnSpc>
-                <a:spcPct val="100000"/>
-              </a:lnSpc>
-            </a:pPr>
-            <a:r>
-              <a:rPr lang="zh-CN" sz="1050">
-                <a:solidFill>
-                  <a:srgbClr val="FFFFFF">
-                    <a:alpha val="85000"/>
-                  </a:srgbClr>
-                </a:solidFill>
-                <a:latin typeface="Microsoft YaHei"/>
-                <a:ea typeface="Microsoft YaHei"/>
-              </a:rPr>
-              <a:t>技术方案</a:t>
-            </a:r>
-            <a:endParaRPr/>
-          </a:p>
-        </p:txBody>
-      </p:sp>
-      <p:sp>
-        <p:nvSpPr>
-          <p:cNvPr id="55" name=""/>
-          <p:cNvSpPr/>
-          <p:nvPr/>
-        </p:nvSpPr>
-        <p:spPr>
-          <a:xfrm rot="0" flipH="0" flipV="0">
-            <a:off x="381000" y="952500"/>
-            <a:ext cx="457200" cy="38100"/>
-          </a:xfrm>
-          <a:prstGeom prst="roundRect">
-            <a:avLst>
-              <a:gd name="adj" fmla="val 50000"/>
-            </a:avLst>
-          </a:prstGeom>
-          <a:solidFill>
-            <a:srgbClr val="3D7BD9"/>
-          </a:solidFill>
-          <a:ln/>
-        </p:spPr>
-        <p:txBody>
-          <a:bodyPr/>
-          <a:p>
-            <a:pPr/>
-            <a:endParaRPr/>
-          </a:p>
-        </p:txBody>
-      </p:sp>
-      <p:sp>
-        <p:nvSpPr>
-          <p:cNvPr id="56" name="" descr="{&quot;isTemplate&quot;:true,&quot;type&quot;:&quot;text&quot;}"/>
-          <p:cNvSpPr txBox="1"/>
-          <p:nvPr/>
-        </p:nvSpPr>
-        <p:spPr>
-          <a:xfrm rot="0" flipH="0" flipV="0">
-            <a:off x="381000" y="1143000"/>
-            <a:ext cx="2857500" cy="514350"/>
-          </a:xfrm>
-          <a:prstGeom prst="rect"/>
-        </p:spPr>
-        <p:txBody>
-          <a:bodyPr wrap="none" lIns="0" tIns="0" rIns="0" bIns="0"/>
-          <a:p>
-            <a:pPr>
-              <a:lnSpc>
-                <a:spcPct val="130000"/>
-              </a:lnSpc>
-            </a:pPr>
-            <a:r>
-              <a:rPr lang="zh-CN" sz="2550" b="1">
-                <a:solidFill>
-                  <a:srgbClr val="1A2230"/>
-                </a:solidFill>
-                <a:latin typeface="Microsoft YaHei"/>
-                <a:ea typeface="Microsoft YaHei"/>
-              </a:rPr>
-              <a:t>在线问答链路</a:t>
-            </a:r>
-            <a:endParaRPr/>
-          </a:p>
-        </p:txBody>
-      </p:sp>
-      <p:sp>
-        <p:nvSpPr>
-          <p:cNvPr id="57" name="" descr="{&quot;isTemplate&quot;:true,&quot;type&quot;:&quot;text&quot;}"/>
-          <p:cNvSpPr txBox="1"/>
-          <p:nvPr/>
-        </p:nvSpPr>
-        <p:spPr>
-          <a:xfrm rot="0" flipH="0" flipV="0">
-            <a:off x="381000" y="1809750"/>
-            <a:ext cx="2857500" cy="552450"/>
-          </a:xfrm>
-          <a:prstGeom prst="rect"/>
-        </p:spPr>
-        <p:txBody>
-          <a:bodyPr wrap="square" lIns="0" tIns="0" rIns="0" bIns="0">
-            <a:normAutofit/>
-          </a:bodyPr>
-          <a:p>
-            <a:pPr>
-              <a:lnSpc>
-                <a:spcPct val="150000"/>
-              </a:lnSpc>
-            </a:pPr>
-            <a:r>
-              <a:rPr lang="zh-CN" sz="1200">
-                <a:solidFill>
-                  <a:srgbClr val="8B97A8"/>
-                </a:solidFill>
-                <a:latin typeface="Microsoft YaHei"/>
-                <a:ea typeface="Microsoft YaHei"/>
-              </a:rPr>
-              <a:t>每次提问，从知识库检索并生成带引用的加工指令</a:t>
-            </a:r>
-            <a:endParaRPr/>
-          </a:p>
-        </p:txBody>
-      </p:sp>
-      <p:sp>
-        <p:nvSpPr>
-          <p:cNvPr id="58" name=""/>
-          <p:cNvSpPr/>
-          <p:nvPr/>
-        </p:nvSpPr>
-        <p:spPr>
-          <a:xfrm rot="0" flipH="0" flipV="0">
-            <a:off x="381000" y="5143500"/>
-            <a:ext cx="2857500" cy="1181100"/>
-          </a:xfrm>
-          <a:prstGeom prst="roundRect">
-            <a:avLst>
-              <a:gd name="adj" fmla="val 6452"/>
-            </a:avLst>
-          </a:prstGeom>
-          <a:solidFill>
-            <a:srgbClr val="0E3F8C"/>
-          </a:solidFill>
-          <a:ln/>
-        </p:spPr>
-        <p:txBody>
-          <a:bodyPr/>
-          <a:p>
-            <a:pPr/>
-            <a:endParaRPr/>
-          </a:p>
-        </p:txBody>
-      </p:sp>
-      <p:sp>
-        <p:nvSpPr>
-          <p:cNvPr id="59" name="" descr="{&quot;isTemplate&quot;:true,&quot;type&quot;:&quot;text&quot;}"/>
-          <p:cNvSpPr txBox="1"/>
-          <p:nvPr/>
-        </p:nvSpPr>
-        <p:spPr>
-          <a:xfrm rot="0" flipH="0" flipV="0">
-            <a:off x="552450" y="5314950"/>
-            <a:ext cx="2514600" cy="209550"/>
-          </a:xfrm>
-          <a:prstGeom prst="rect"/>
-        </p:spPr>
-        <p:txBody>
-          <a:bodyPr wrap="none" lIns="0" tIns="0" rIns="0" bIns="0"/>
-          <a:p>
-            <a:pPr>
-              <a:lnSpc>
-                <a:spcPct val="100000"/>
-              </a:lnSpc>
-            </a:pPr>
-            <a:r>
-              <a:rPr lang="zh-CN" sz="1350" b="1">
-                <a:solidFill>
-                  <a:srgbClr val="FFFFFF"/>
-                </a:solidFill>
-                <a:latin typeface="Microsoft YaHei"/>
-                <a:ea typeface="Microsoft YaHei"/>
-              </a:rPr>
-              <a:t>关键点</a:t>
-            </a:r>
-            <a:endParaRPr/>
-          </a:p>
-        </p:txBody>
-      </p:sp>
-      <p:sp>
-        <p:nvSpPr>
-          <p:cNvPr id="60" name="" descr="{&quot;isTemplate&quot;:true,&quot;type&quot;:&quot;text&quot;}"/>
-          <p:cNvSpPr txBox="1"/>
-          <p:nvPr/>
-        </p:nvSpPr>
-        <p:spPr>
-          <a:xfrm rot="0" flipH="0" flipV="0">
-            <a:off x="552450" y="5600700"/>
-            <a:ext cx="2514600" cy="552450"/>
-          </a:xfrm>
-          <a:prstGeom prst="rect"/>
-        </p:spPr>
-        <p:txBody>
-          <a:bodyPr wrap="square" lIns="0" tIns="0" rIns="0" bIns="0">
-            <a:normAutofit/>
-          </a:bodyPr>
-          <a:p>
-            <a:pPr>
-              <a:lnSpc>
-                <a:spcPct val="160000"/>
-              </a:lnSpc>
-            </a:pPr>
-            <a:r>
-              <a:rPr lang="zh-CN" sz="1125">
-                <a:solidFill>
-                  <a:srgbClr val="D6E4F7"/>
-                </a:solidFill>
-                <a:latin typeface="Microsoft YaHei"/>
-                <a:ea typeface="Microsoft YaHei"/>
-              </a:rPr>
-              <a:t>多轮查询改写：把含代词、省略的追问补全为独立问题，再走检索链路。</a:t>
-            </a:r>
-            <a:endParaRPr/>
-          </a:p>
-        </p:txBody>
-      </p:sp>
-      <p:sp>
-        <p:nvSpPr>
-          <p:cNvPr id="61" name=""/>
-          <p:cNvSpPr/>
-          <p:nvPr/>
-        </p:nvSpPr>
-        <p:spPr>
-          <a:xfrm rot="0" flipH="0" flipV="0">
-            <a:off x="3619500" y="952500"/>
-            <a:ext cx="8191500" cy="895350"/>
-          </a:xfrm>
-          <a:prstGeom prst="roundRect">
-            <a:avLst>
-              <a:gd name="adj" fmla="val 10638"/>
-            </a:avLst>
-          </a:prstGeom>
-          <a:solidFill>
-            <a:srgbClr val="F7F9FC"/>
-          </a:solidFill>
-          <a:ln w="12700">
-            <a:solidFill>
-              <a:srgbClr val="E5E7EB"/>
-            </a:solidFill>
-            <a:prstDash val="solid"/>
-          </a:ln>
-        </p:spPr>
-        <p:txBody>
-          <a:bodyPr/>
-          <a:p>
-            <a:pPr/>
-            <a:endParaRPr/>
-          </a:p>
-        </p:txBody>
-      </p:sp>
-      <p:sp>
-        <p:nvSpPr>
-          <p:cNvPr id="62" name=""/>
-          <p:cNvSpPr/>
-          <p:nvPr/>
-        </p:nvSpPr>
-        <p:spPr>
-          <a:xfrm rot="0" flipH="0" flipV="0">
-            <a:off x="3771900" y="1181100"/>
-            <a:ext cx="438150" cy="438150"/>
-          </a:xfrm>
-          <a:prstGeom prst="roundRect">
-            <a:avLst>
-              <a:gd name="adj" fmla="val 50000"/>
-            </a:avLst>
-          </a:prstGeom>
-          <a:solidFill>
-            <a:srgbClr val="1E4FA8"/>
-          </a:solidFill>
-          <a:ln/>
-        </p:spPr>
-        <p:txBody>
-          <a:bodyPr/>
-          <a:p>
-            <a:pPr/>
-            <a:endParaRPr/>
-          </a:p>
-        </p:txBody>
-      </p:sp>
-      <p:sp>
-        <p:nvSpPr>
-          <p:cNvPr id="63" name="" descr="{&quot;isTemplate&quot;:true,&quot;type&quot;:&quot;text&quot;}"/>
-          <p:cNvSpPr txBox="1"/>
-          <p:nvPr/>
-        </p:nvSpPr>
-        <p:spPr>
-          <a:xfrm rot="0" flipH="0" flipV="0">
-            <a:off x="3933825" y="1285875"/>
-            <a:ext cx="123825" cy="228600"/>
-          </a:xfrm>
-          <a:prstGeom prst="rect"/>
-        </p:spPr>
-        <p:txBody>
-          <a:bodyPr wrap="none" lIns="0" tIns="0" rIns="0" bIns="0"/>
-          <a:p>
-            <a:pPr>
-              <a:lnSpc>
-                <a:spcPct val="100000"/>
-              </a:lnSpc>
-            </a:pPr>
-            <a:r>
-              <a:rPr lang="en-US" sz="1500" b="1">
-                <a:solidFill>
-                  <a:srgbClr val="FFFFFF"/>
-                </a:solidFill>
-                <a:latin typeface="Microsoft YaHei"/>
-                <a:ea typeface="Microsoft YaHei"/>
-              </a:rPr>
-              <a:t>1</a:t>
-            </a:r>
-            <a:endParaRPr/>
-          </a:p>
-        </p:txBody>
-      </p:sp>
-      <p:sp>
-        <p:nvSpPr>
-          <p:cNvPr id="64" name="" descr="{&quot;isTemplate&quot;:true,&quot;type&quot;:&quot;text&quot;}"/>
-          <p:cNvSpPr txBox="1"/>
-          <p:nvPr/>
-        </p:nvSpPr>
-        <p:spPr>
-          <a:xfrm rot="0" flipH="0" flipV="0">
-            <a:off x="4400550" y="1104900"/>
-            <a:ext cx="7258050" cy="257175"/>
-          </a:xfrm>
-          <a:prstGeom prst="rect"/>
-        </p:spPr>
-        <p:txBody>
-          <a:bodyPr wrap="none" lIns="0" tIns="0" rIns="0" bIns="0"/>
-          <a:p>
-            <a:pPr>
-              <a:lnSpc>
-                <a:spcPct val="100000"/>
-              </a:lnSpc>
-            </a:pPr>
-            <a:r>
-              <a:rPr lang="zh-CN" sz="1650" b="1">
-                <a:solidFill>
-                  <a:srgbClr val="1A2230"/>
-                </a:solidFill>
-                <a:latin typeface="Microsoft YaHei"/>
-                <a:ea typeface="Microsoft YaHei"/>
-              </a:rPr>
-              <a:t>查询改写</a:t>
-            </a:r>
-            <a:endParaRPr/>
-          </a:p>
-        </p:txBody>
-      </p:sp>
-      <p:sp>
-        <p:nvSpPr>
-          <p:cNvPr id="65" name="" descr="{&quot;isTemplate&quot;:true,&quot;type&quot;:&quot;text&quot;}"/>
-          <p:cNvSpPr txBox="1"/>
-          <p:nvPr/>
-        </p:nvSpPr>
-        <p:spPr>
-          <a:xfrm rot="0" flipH="0" flipV="0">
-            <a:off x="4400550" y="1419225"/>
-            <a:ext cx="7258050" cy="276225"/>
-          </a:xfrm>
-          <a:prstGeom prst="rect"/>
-        </p:spPr>
-        <p:txBody>
-          <a:bodyPr wrap="none" lIns="0" tIns="0" rIns="0" bIns="0"/>
-          <a:p>
-            <a:pPr>
-              <a:lnSpc>
-                <a:spcPct val="150000"/>
-              </a:lnSpc>
-            </a:pPr>
-            <a:r>
-              <a:rPr lang="zh-CN" sz="1200">
-                <a:solidFill>
-                  <a:srgbClr val="4A5568"/>
-                </a:solidFill>
-                <a:latin typeface="Microsoft YaHei"/>
-                <a:ea typeface="Microsoft YaHei"/>
-              </a:rPr>
-              <a:t>记录历史，将追问补全为独立问题</a:t>
-            </a:r>
-            <a:endParaRPr/>
-          </a:p>
-        </p:txBody>
-      </p:sp>
-      <p:sp>
-        <p:nvSpPr>
-          <p:cNvPr id="66" name=""/>
-          <p:cNvSpPr/>
-          <p:nvPr/>
-        </p:nvSpPr>
-        <p:spPr>
-          <a:xfrm rot="0" flipH="0" flipV="0">
-            <a:off x="3619500" y="2076450"/>
-            <a:ext cx="8191500" cy="895350"/>
-          </a:xfrm>
-          <a:prstGeom prst="roundRect">
-            <a:avLst>
-              <a:gd name="adj" fmla="val 10638"/>
-            </a:avLst>
-          </a:prstGeom>
-          <a:solidFill>
-            <a:srgbClr val="F7F9FC"/>
-          </a:solidFill>
-          <a:ln w="12700">
-            <a:solidFill>
-              <a:srgbClr val="E5E7EB"/>
-            </a:solidFill>
-            <a:prstDash val="solid"/>
-          </a:ln>
-        </p:spPr>
-        <p:txBody>
-          <a:bodyPr/>
-          <a:p>
-            <a:pPr/>
-            <a:endParaRPr/>
-          </a:p>
-        </p:txBody>
-      </p:sp>
-      <p:sp>
-        <p:nvSpPr>
-          <p:cNvPr id="67" name=""/>
-          <p:cNvSpPr/>
-          <p:nvPr/>
-        </p:nvSpPr>
-        <p:spPr>
-          <a:xfrm rot="0" flipH="0" flipV="0">
-            <a:off x="3771900" y="2305050"/>
-            <a:ext cx="438150" cy="438150"/>
-          </a:xfrm>
-          <a:prstGeom prst="roundRect">
-            <a:avLst>
-              <a:gd name="adj" fmla="val 50000"/>
-            </a:avLst>
-          </a:prstGeom>
-          <a:solidFill>
-            <a:srgbClr val="1E4FA8"/>
-          </a:solidFill>
-          <a:ln/>
-        </p:spPr>
-        <p:txBody>
-          <a:bodyPr/>
-          <a:p>
-            <a:pPr/>
-            <a:endParaRPr/>
-          </a:p>
-        </p:txBody>
-      </p:sp>
-      <p:sp>
-        <p:nvSpPr>
-          <p:cNvPr id="68" name="" descr="{&quot;isTemplate&quot;:true,&quot;type&quot;:&quot;text&quot;}"/>
-          <p:cNvSpPr txBox="1"/>
-          <p:nvPr/>
-        </p:nvSpPr>
-        <p:spPr>
-          <a:xfrm rot="0" flipH="0" flipV="0">
-            <a:off x="3933825" y="2409825"/>
-            <a:ext cx="123825" cy="228600"/>
-          </a:xfrm>
-          <a:prstGeom prst="rect"/>
-        </p:spPr>
-        <p:txBody>
-          <a:bodyPr wrap="none" lIns="0" tIns="0" rIns="0" bIns="0"/>
-          <a:p>
-            <a:pPr>
-              <a:lnSpc>
-                <a:spcPct val="100000"/>
-              </a:lnSpc>
-            </a:pPr>
-            <a:r>
-              <a:rPr lang="en-US" sz="1500" b="1">
-                <a:solidFill>
-                  <a:srgbClr val="FFFFFF"/>
-                </a:solidFill>
-                <a:latin typeface="Microsoft YaHei"/>
-                <a:ea typeface="Microsoft YaHei"/>
-              </a:rPr>
-              <a:t>2</a:t>
-            </a:r>
-            <a:endParaRPr/>
-          </a:p>
-        </p:txBody>
-      </p:sp>
-      <p:sp>
-        <p:nvSpPr>
-          <p:cNvPr id="69" name="" descr="{&quot;isTemplate&quot;:true,&quot;type&quot;:&quot;text&quot;}"/>
-          <p:cNvSpPr txBox="1"/>
-          <p:nvPr/>
-        </p:nvSpPr>
-        <p:spPr>
-          <a:xfrm rot="0" flipH="0" flipV="0">
-            <a:off x="4400550" y="2228850"/>
-            <a:ext cx="7258050" cy="257175"/>
-          </a:xfrm>
-          <a:prstGeom prst="rect"/>
-        </p:spPr>
-        <p:txBody>
-          <a:bodyPr wrap="none" lIns="0" tIns="0" rIns="0" bIns="0"/>
-          <a:p>
-            <a:pPr>
-              <a:lnSpc>
-                <a:spcPct val="100000"/>
-              </a:lnSpc>
-            </a:pPr>
-            <a:r>
-              <a:rPr lang="zh-CN" sz="1650" b="1">
-                <a:solidFill>
-                  <a:srgbClr val="1A2230"/>
-                </a:solidFill>
-                <a:latin typeface="Microsoft YaHei"/>
-                <a:ea typeface="Microsoft YaHei"/>
-              </a:rPr>
-              <a:t>混合召回</a:t>
-            </a:r>
-            <a:endParaRPr/>
-          </a:p>
-        </p:txBody>
-      </p:sp>
-      <p:sp>
-        <p:nvSpPr>
-          <p:cNvPr id="70" name="" descr="{&quot;isTemplate&quot;:true,&quot;type&quot;:&quot;text&quot;}"/>
-          <p:cNvSpPr txBox="1"/>
-          <p:nvPr/>
-        </p:nvSpPr>
-        <p:spPr>
-          <a:xfrm rot="0" flipH="0" flipV="0">
-            <a:off x="4400550" y="2543175"/>
-            <a:ext cx="7258050" cy="276225"/>
-          </a:xfrm>
-          <a:prstGeom prst="rect"/>
-        </p:spPr>
-        <p:txBody>
-          <a:bodyPr wrap="none" lIns="0" tIns="0" rIns="0" bIns="0"/>
-          <a:p>
-            <a:pPr>
-              <a:lnSpc>
-                <a:spcPct val="150000"/>
-              </a:lnSpc>
-            </a:pPr>
-            <a:r>
-              <a:rPr lang="zh-CN" sz="1200">
-                <a:solidFill>
-                  <a:srgbClr val="4A5568"/>
-                </a:solidFill>
-                <a:latin typeface="Microsoft YaHei"/>
-                <a:ea typeface="Microsoft YaHei"/>
-              </a:rPr>
-              <a:t>并行执行向量检索</a:t>
-            </a:r>
-            <a:r>
-              <a:rPr lang="en-US" sz="1200">
-                <a:solidFill>
-                  <a:srgbClr val="4A5568"/>
-                </a:solidFill>
-                <a:latin typeface="Microsoft YaHei"/>
-                <a:ea typeface="Microsoft YaHei"/>
-              </a:rPr>
-              <a:t xml:space="preserve"> + BM25 </a:t>
-            </a:r>
-            <a:r>
-              <a:rPr lang="zh-CN" sz="1200">
-                <a:solidFill>
-                  <a:srgbClr val="4A5568"/>
-                </a:solidFill>
-                <a:latin typeface="Microsoft YaHei"/>
-                <a:ea typeface="Microsoft YaHei"/>
-              </a:rPr>
-              <a:t>检索</a:t>
-            </a:r>
-            <a:endParaRPr/>
-          </a:p>
-        </p:txBody>
-      </p:sp>
-      <p:sp>
-        <p:nvSpPr>
-          <p:cNvPr id="71" name=""/>
-          <p:cNvSpPr/>
-          <p:nvPr/>
-        </p:nvSpPr>
-        <p:spPr>
-          <a:xfrm rot="0" flipH="0" flipV="0">
-            <a:off x="3619500" y="3190875"/>
-            <a:ext cx="8191500" cy="895350"/>
-          </a:xfrm>
-          <a:prstGeom prst="roundRect">
-            <a:avLst>
-              <a:gd name="adj" fmla="val 10638"/>
-            </a:avLst>
-          </a:prstGeom>
-          <a:solidFill>
-            <a:srgbClr val="F7F9FC"/>
-          </a:solidFill>
-          <a:ln w="12700">
-            <a:solidFill>
-              <a:srgbClr val="E5E7EB"/>
-            </a:solidFill>
-            <a:prstDash val="solid"/>
-          </a:ln>
-        </p:spPr>
-        <p:txBody>
-          <a:bodyPr/>
-          <a:p>
-            <a:pPr/>
-            <a:endParaRPr/>
-          </a:p>
-        </p:txBody>
-      </p:sp>
-      <p:sp>
-        <p:nvSpPr>
-          <p:cNvPr id="72" name=""/>
-          <p:cNvSpPr/>
-          <p:nvPr/>
-        </p:nvSpPr>
-        <p:spPr>
-          <a:xfrm rot="0" flipH="0" flipV="0">
-            <a:off x="3771900" y="3419475"/>
-            <a:ext cx="438150" cy="438150"/>
-          </a:xfrm>
-          <a:prstGeom prst="roundRect">
-            <a:avLst>
-              <a:gd name="adj" fmla="val 50000"/>
-            </a:avLst>
-          </a:prstGeom>
-          <a:solidFill>
-            <a:srgbClr val="1E4FA8"/>
-          </a:solidFill>
-          <a:ln/>
-        </p:spPr>
-        <p:txBody>
-          <a:bodyPr/>
-          <a:p>
-            <a:pPr/>
-            <a:endParaRPr/>
-          </a:p>
-        </p:txBody>
-      </p:sp>
-      <p:sp>
-        <p:nvSpPr>
-          <p:cNvPr id="73" name="" descr="{&quot;isTemplate&quot;:true,&quot;type&quot;:&quot;text&quot;}"/>
-          <p:cNvSpPr txBox="1"/>
-          <p:nvPr/>
-        </p:nvSpPr>
-        <p:spPr>
-          <a:xfrm rot="0" flipH="0" flipV="0">
-            <a:off x="3933825" y="3524250"/>
-            <a:ext cx="123825" cy="228600"/>
-          </a:xfrm>
-          <a:prstGeom prst="rect"/>
-        </p:spPr>
-        <p:txBody>
-          <a:bodyPr wrap="none" lIns="0" tIns="0" rIns="0" bIns="0"/>
-          <a:p>
-            <a:pPr>
-              <a:lnSpc>
-                <a:spcPct val="100000"/>
-              </a:lnSpc>
-            </a:pPr>
-            <a:r>
-              <a:rPr lang="en-US" sz="1500" b="1">
-                <a:solidFill>
-                  <a:srgbClr val="FFFFFF"/>
-                </a:solidFill>
-                <a:latin typeface="Microsoft YaHei"/>
-                <a:ea typeface="Microsoft YaHei"/>
-              </a:rPr>
-              <a:t>3</a:t>
-            </a:r>
-            <a:endParaRPr/>
-          </a:p>
-        </p:txBody>
-      </p:sp>
-      <p:sp>
-        <p:nvSpPr>
-          <p:cNvPr id="74" name="" descr="{&quot;isTemplate&quot;:true,&quot;type&quot;:&quot;text&quot;}"/>
-          <p:cNvSpPr txBox="1"/>
-          <p:nvPr/>
-        </p:nvSpPr>
-        <p:spPr>
-          <a:xfrm rot="0" flipH="0" flipV="0">
-            <a:off x="4400550" y="3343275"/>
-            <a:ext cx="7258050" cy="257175"/>
-          </a:xfrm>
-          <a:prstGeom prst="rect"/>
-        </p:spPr>
-        <p:txBody>
-          <a:bodyPr wrap="none" lIns="0" tIns="0" rIns="0" bIns="0"/>
-          <a:p>
-            <a:pPr>
-              <a:lnSpc>
-                <a:spcPct val="100000"/>
-              </a:lnSpc>
-            </a:pPr>
-            <a:r>
-              <a:rPr lang="en-US" sz="1650" b="1">
-                <a:solidFill>
-                  <a:srgbClr val="1A2230"/>
-                </a:solidFill>
-                <a:latin typeface="Microsoft YaHei"/>
-                <a:ea typeface="Microsoft YaHei"/>
-              </a:rPr>
-              <a:t xml:space="preserve">RRF </a:t>
-            </a:r>
-            <a:r>
-              <a:rPr lang="zh-CN" sz="1650" b="1">
-                <a:solidFill>
-                  <a:srgbClr val="1A2230"/>
-                </a:solidFill>
-                <a:latin typeface="Microsoft YaHei"/>
-                <a:ea typeface="Microsoft YaHei"/>
-              </a:rPr>
-              <a:t>融合</a:t>
-            </a:r>
-            <a:endParaRPr/>
-          </a:p>
-        </p:txBody>
-      </p:sp>
-      <p:sp>
-        <p:nvSpPr>
-          <p:cNvPr id="75" name="" descr="{&quot;isTemplate&quot;:true,&quot;type&quot;:&quot;text&quot;}"/>
-          <p:cNvSpPr txBox="1"/>
-          <p:nvPr/>
-        </p:nvSpPr>
-        <p:spPr>
-          <a:xfrm rot="0" flipH="0" flipV="0">
-            <a:off x="4400550" y="3657600"/>
-            <a:ext cx="7258050" cy="276225"/>
-          </a:xfrm>
-          <a:prstGeom prst="rect"/>
-        </p:spPr>
-        <p:txBody>
-          <a:bodyPr wrap="none" lIns="0" tIns="0" rIns="0" bIns="0"/>
-          <a:p>
-            <a:pPr>
-              <a:lnSpc>
-                <a:spcPct val="150000"/>
-              </a:lnSpc>
-            </a:pPr>
-            <a:r>
-              <a:rPr lang="en-US" sz="1200">
-                <a:solidFill>
-                  <a:srgbClr val="4A5568"/>
-                </a:solidFill>
-                <a:latin typeface="Microsoft YaHei"/>
-                <a:ea typeface="Microsoft YaHei"/>
-              </a:rPr>
-              <a:t xml:space="preserve">k=60 </a:t>
-            </a:r>
-            <a:r>
-              <a:rPr lang="zh-CN" sz="1200">
-                <a:solidFill>
-                  <a:srgbClr val="4A5568"/>
-                </a:solidFill>
-                <a:latin typeface="Microsoft YaHei"/>
-                <a:ea typeface="Microsoft YaHei"/>
-              </a:rPr>
-              <a:t>合并两路结果并去重</a:t>
-            </a:r>
-            <a:endParaRPr/>
-          </a:p>
-        </p:txBody>
-      </p:sp>
-      <p:sp>
-        <p:nvSpPr>
-          <p:cNvPr id="76" name=""/>
-          <p:cNvSpPr/>
-          <p:nvPr/>
-        </p:nvSpPr>
-        <p:spPr>
-          <a:xfrm rot="0" flipH="0" flipV="0">
-            <a:off x="3619500" y="4314825"/>
-            <a:ext cx="8191500" cy="895350"/>
-          </a:xfrm>
-          <a:prstGeom prst="roundRect">
-            <a:avLst>
-              <a:gd name="adj" fmla="val 10638"/>
-            </a:avLst>
-          </a:prstGeom>
-          <a:solidFill>
-            <a:srgbClr val="F7F9FC"/>
-          </a:solidFill>
-          <a:ln w="12700">
-            <a:solidFill>
-              <a:srgbClr val="E5E7EB"/>
-            </a:solidFill>
-            <a:prstDash val="solid"/>
-          </a:ln>
-        </p:spPr>
-        <p:txBody>
-          <a:bodyPr/>
-          <a:p>
-            <a:pPr/>
-            <a:endParaRPr/>
-          </a:p>
-        </p:txBody>
-      </p:sp>
-      <p:sp>
-        <p:nvSpPr>
-          <p:cNvPr id="77" name=""/>
-          <p:cNvSpPr/>
-          <p:nvPr/>
-        </p:nvSpPr>
-        <p:spPr>
-          <a:xfrm rot="0" flipH="0" flipV="0">
-            <a:off x="3771900" y="4543425"/>
-            <a:ext cx="438150" cy="438150"/>
-          </a:xfrm>
-          <a:prstGeom prst="roundRect">
-            <a:avLst>
-              <a:gd name="adj" fmla="val 50000"/>
-            </a:avLst>
-          </a:prstGeom>
-          <a:solidFill>
-            <a:srgbClr val="1E4FA8"/>
-          </a:solidFill>
-          <a:ln/>
-        </p:spPr>
-        <p:txBody>
-          <a:bodyPr/>
-          <a:p>
-            <a:pPr/>
-            <a:endParaRPr/>
-          </a:p>
-        </p:txBody>
-      </p:sp>
-      <p:sp>
-        <p:nvSpPr>
-          <p:cNvPr id="78" name="" descr="{&quot;isTemplate&quot;:true,&quot;type&quot;:&quot;text&quot;}"/>
-          <p:cNvSpPr txBox="1"/>
-          <p:nvPr/>
-        </p:nvSpPr>
-        <p:spPr>
-          <a:xfrm rot="0" flipH="0" flipV="0">
-            <a:off x="3933825" y="4648200"/>
-            <a:ext cx="123825" cy="228600"/>
-          </a:xfrm>
-          <a:prstGeom prst="rect"/>
-        </p:spPr>
-        <p:txBody>
-          <a:bodyPr wrap="none" lIns="0" tIns="0" rIns="0" bIns="0"/>
-          <a:p>
-            <a:pPr>
-              <a:lnSpc>
-                <a:spcPct val="100000"/>
-              </a:lnSpc>
-            </a:pPr>
-            <a:r>
-              <a:rPr lang="en-US" sz="1500" b="1">
-                <a:solidFill>
-                  <a:srgbClr val="FFFFFF"/>
-                </a:solidFill>
-                <a:latin typeface="Microsoft YaHei"/>
-                <a:ea typeface="Microsoft YaHei"/>
-              </a:rPr>
-              <a:t>4</a:t>
-            </a:r>
-            <a:endParaRPr/>
-          </a:p>
-        </p:txBody>
-      </p:sp>
-      <p:sp>
-        <p:nvSpPr>
-          <p:cNvPr id="79" name="" descr="{&quot;isTemplate&quot;:true,&quot;type&quot;:&quot;text&quot;}"/>
-          <p:cNvSpPr txBox="1"/>
-          <p:nvPr/>
-        </p:nvSpPr>
-        <p:spPr>
-          <a:xfrm rot="0" flipH="0" flipV="0">
-            <a:off x="4400550" y="4467225"/>
-            <a:ext cx="7258050" cy="257175"/>
-          </a:xfrm>
-          <a:prstGeom prst="rect"/>
-        </p:spPr>
-        <p:txBody>
-          <a:bodyPr wrap="none" lIns="0" tIns="0" rIns="0" bIns="0"/>
-          <a:p>
-            <a:pPr>
-              <a:lnSpc>
-                <a:spcPct val="100000"/>
-              </a:lnSpc>
-            </a:pPr>
-            <a:r>
-              <a:rPr lang="zh-CN" sz="1650" b="1">
-                <a:solidFill>
-                  <a:srgbClr val="1A2230"/>
-                </a:solidFill>
-                <a:latin typeface="Microsoft YaHei"/>
-                <a:ea typeface="Microsoft YaHei"/>
-              </a:rPr>
-              <a:t>重排序</a:t>
-            </a:r>
-            <a:endParaRPr/>
-          </a:p>
-        </p:txBody>
-      </p:sp>
-      <p:sp>
-        <p:nvSpPr>
-          <p:cNvPr id="80" name="" descr="{&quot;isTemplate&quot;:true,&quot;type&quot;:&quot;text&quot;}"/>
-          <p:cNvSpPr txBox="1"/>
-          <p:nvPr/>
-        </p:nvSpPr>
-        <p:spPr>
-          <a:xfrm rot="0" flipH="0" flipV="0">
-            <a:off x="4400550" y="4781550"/>
-            <a:ext cx="7258050" cy="276225"/>
-          </a:xfrm>
-          <a:prstGeom prst="rect"/>
-        </p:spPr>
-        <p:txBody>
-          <a:bodyPr wrap="none" lIns="0" tIns="0" rIns="0" bIns="0"/>
-          <a:p>
-            <a:pPr>
-              <a:lnSpc>
-                <a:spcPct val="150000"/>
-              </a:lnSpc>
-            </a:pPr>
-            <a:r>
-              <a:rPr lang="en-US" sz="1200">
-                <a:solidFill>
-                  <a:srgbClr val="4A5568"/>
-                </a:solidFill>
-                <a:latin typeface="Microsoft YaHei"/>
-                <a:ea typeface="Microsoft YaHei"/>
-              </a:rPr>
-              <a:t xml:space="preserve">bge-reranker-v2-m3 </a:t>
-            </a:r>
-            <a:r>
-              <a:rPr lang="zh-CN" sz="1200">
-                <a:solidFill>
-                  <a:srgbClr val="4A5568"/>
-                </a:solidFill>
-                <a:latin typeface="Microsoft YaHei"/>
-                <a:ea typeface="Microsoft YaHei"/>
-              </a:rPr>
-              <a:t>精排，取</a:t>
-            </a:r>
-            <a:r>
-              <a:rPr lang="en-US" sz="1200">
-                <a:solidFill>
-                  <a:srgbClr val="4A5568"/>
-                </a:solidFill>
-                <a:latin typeface="Microsoft YaHei"/>
-                <a:ea typeface="Microsoft YaHei"/>
-              </a:rPr>
-              <a:t xml:space="preserve"> top 3~5</a:t>
-            </a:r>
-            <a:endParaRPr/>
-          </a:p>
-        </p:txBody>
-      </p:sp>
-      <p:sp>
-        <p:nvSpPr>
-          <p:cNvPr id="81" name=""/>
-          <p:cNvSpPr/>
-          <p:nvPr/>
-        </p:nvSpPr>
-        <p:spPr>
-          <a:xfrm rot="0" flipH="0" flipV="0">
-            <a:off x="3619500" y="5429250"/>
-            <a:ext cx="8191500" cy="895350"/>
-          </a:xfrm>
-          <a:prstGeom prst="roundRect">
-            <a:avLst>
-              <a:gd name="adj" fmla="val 10638"/>
-            </a:avLst>
-          </a:prstGeom>
-          <a:solidFill>
-            <a:srgbClr val="F7F9FC"/>
-          </a:solidFill>
-          <a:ln w="12700">
-            <a:solidFill>
-              <a:srgbClr val="E5E7EB"/>
-            </a:solidFill>
-            <a:prstDash val="solid"/>
-          </a:ln>
-        </p:spPr>
-        <p:txBody>
-          <a:bodyPr/>
-          <a:p>
-            <a:pPr/>
-            <a:endParaRPr/>
-          </a:p>
-        </p:txBody>
-      </p:sp>
-      <p:sp>
-        <p:nvSpPr>
-          <p:cNvPr id="82" name=""/>
-          <p:cNvSpPr/>
-          <p:nvPr/>
-        </p:nvSpPr>
-        <p:spPr>
-          <a:xfrm rot="0" flipH="0" flipV="0">
-            <a:off x="3771900" y="5657850"/>
-            <a:ext cx="438150" cy="438150"/>
-          </a:xfrm>
-          <a:prstGeom prst="roundRect">
-            <a:avLst>
-              <a:gd name="adj" fmla="val 50000"/>
-            </a:avLst>
-          </a:prstGeom>
-          <a:solidFill>
-            <a:srgbClr val="1E4FA8"/>
-          </a:solidFill>
-          <a:ln/>
-        </p:spPr>
-        <p:txBody>
-          <a:bodyPr/>
-          <a:p>
-            <a:pPr/>
-            <a:endParaRPr/>
-          </a:p>
-        </p:txBody>
-      </p:sp>
-      <p:sp>
-        <p:nvSpPr>
-          <p:cNvPr id="83" name="" descr="{&quot;isTemplate&quot;:true,&quot;type&quot;:&quot;text&quot;}"/>
-          <p:cNvSpPr txBox="1"/>
-          <p:nvPr/>
-        </p:nvSpPr>
-        <p:spPr>
-          <a:xfrm rot="0" flipH="0" flipV="0">
-            <a:off x="3933825" y="5762625"/>
-            <a:ext cx="123825" cy="228600"/>
-          </a:xfrm>
-          <a:prstGeom prst="rect"/>
-        </p:spPr>
-        <p:txBody>
-          <a:bodyPr wrap="none" lIns="0" tIns="0" rIns="0" bIns="0"/>
-          <a:p>
-            <a:pPr>
-              <a:lnSpc>
-                <a:spcPct val="100000"/>
-              </a:lnSpc>
-            </a:pPr>
-            <a:r>
-              <a:rPr lang="en-US" sz="1500" b="1">
-                <a:solidFill>
-                  <a:srgbClr val="FFFFFF"/>
-                </a:solidFill>
-                <a:latin typeface="Microsoft YaHei"/>
-                <a:ea typeface="Microsoft YaHei"/>
-              </a:rPr>
-              <a:t>5</a:t>
-            </a:r>
-            <a:endParaRPr/>
-          </a:p>
-        </p:txBody>
-      </p:sp>
-      <p:sp>
-        <p:nvSpPr>
-          <p:cNvPr id="84" name="" descr="{&quot;isTemplate&quot;:true,&quot;type&quot;:&quot;text&quot;}"/>
-          <p:cNvSpPr txBox="1"/>
-          <p:nvPr/>
-        </p:nvSpPr>
-        <p:spPr>
-          <a:xfrm rot="0" flipH="0" flipV="0">
-            <a:off x="4400550" y="5581650"/>
-            <a:ext cx="7258050" cy="257175"/>
-          </a:xfrm>
-          <a:prstGeom prst="rect"/>
-        </p:spPr>
-        <p:txBody>
-          <a:bodyPr wrap="none" lIns="0" tIns="0" rIns="0" bIns="0"/>
-          <a:p>
-            <a:pPr>
-              <a:lnSpc>
-                <a:spcPct val="100000"/>
-              </a:lnSpc>
-            </a:pPr>
-            <a:r>
-              <a:rPr lang="zh-CN" sz="1650" b="1">
-                <a:solidFill>
-                  <a:srgbClr val="1A2230"/>
-                </a:solidFill>
-                <a:latin typeface="Microsoft YaHei"/>
-                <a:ea typeface="Microsoft YaHei"/>
-              </a:rPr>
-              <a:t>生成</a:t>
-            </a:r>
-            <a:r>
-              <a:rPr lang="en-US" sz="1650" b="1">
-                <a:solidFill>
-                  <a:srgbClr val="1A2230"/>
-                </a:solidFill>
-                <a:latin typeface="Microsoft YaHei"/>
-                <a:ea typeface="Microsoft YaHei"/>
-              </a:rPr>
-              <a:t xml:space="preserve"> + </a:t>
-            </a:r>
-            <a:r>
-              <a:rPr lang="zh-CN" sz="1650" b="1">
-                <a:solidFill>
-                  <a:srgbClr val="1A2230"/>
-                </a:solidFill>
-                <a:latin typeface="Microsoft YaHei"/>
-                <a:ea typeface="Microsoft YaHei"/>
-              </a:rPr>
-              <a:t>溯源</a:t>
-            </a:r>
-            <a:endParaRPr/>
-          </a:p>
-        </p:txBody>
-      </p:sp>
-      <p:sp>
-        <p:nvSpPr>
-          <p:cNvPr id="85" name="" descr="{&quot;isTemplate&quot;:true,&quot;type&quot;:&quot;text&quot;}"/>
-          <p:cNvSpPr txBox="1"/>
-          <p:nvPr/>
-        </p:nvSpPr>
-        <p:spPr>
-          <a:xfrm rot="0" flipH="0" flipV="0">
-            <a:off x="4400550" y="5895975"/>
-            <a:ext cx="7258050" cy="276225"/>
-          </a:xfrm>
-          <a:prstGeom prst="rect"/>
-        </p:spPr>
-        <p:txBody>
-          <a:bodyPr wrap="none" lIns="0" tIns="0" rIns="0" bIns="0"/>
-          <a:p>
-            <a:pPr>
-              <a:lnSpc>
-                <a:spcPct val="150000"/>
-              </a:lnSpc>
-            </a:pPr>
-            <a:r>
-              <a:rPr lang="zh-CN" sz="1200">
-                <a:solidFill>
-                  <a:srgbClr val="4A5568"/>
-                </a:solidFill>
-                <a:latin typeface="Microsoft YaHei"/>
-                <a:ea typeface="Microsoft YaHei"/>
-              </a:rPr>
-              <a:t>拼装</a:t>
-            </a:r>
-            <a:r>
-              <a:rPr lang="en-US" sz="1200">
-                <a:solidFill>
-                  <a:srgbClr val="4A5568"/>
-                </a:solidFill>
-                <a:latin typeface="Microsoft YaHei"/>
-                <a:ea typeface="Microsoft YaHei"/>
-              </a:rPr>
-              <a:t xml:space="preserve"> Prompt </a:t>
-            </a:r>
-            <a:r>
-              <a:rPr lang="zh-CN" sz="1200">
-                <a:solidFill>
-                  <a:srgbClr val="4A5568"/>
-                </a:solidFill>
-                <a:latin typeface="Microsoft YaHei"/>
-                <a:ea typeface="Microsoft YaHei"/>
-              </a:rPr>
-              <a:t>调用大模型，生成带引用的结构化指令</a:t>
-            </a:r>
-            <a:endParaRPr/>
-          </a:p>
-        </p:txBody>
-      </p:sp>
-      <p:sp>
-        <p:nvSpPr>
-          <p:cNvPr id="86" name="" descr="{&quot;isTemplate&quot;:true,&quot;type&quot;:&quot;text&quot;}"/>
-          <p:cNvSpPr txBox="1"/>
-          <p:nvPr/>
-        </p:nvSpPr>
-        <p:spPr>
-          <a:xfrm rot="0" flipH="0" flipV="0">
-            <a:off x="381000" y="6591300"/>
-            <a:ext cx="1600200" cy="161925"/>
-          </a:xfrm>
-          <a:prstGeom prst="rect"/>
-        </p:spPr>
-        <p:txBody>
-          <a:bodyPr wrap="none" lIns="0" tIns="0" rIns="0" bIns="0"/>
-          <a:p>
-            <a:pPr>
-              <a:lnSpc>
-                <a:spcPct val="100000"/>
-              </a:lnSpc>
-            </a:pPr>
-            <a:r>
-              <a:rPr lang="zh-CN" sz="1050">
-                <a:solidFill>
-                  <a:srgbClr val="8B97A8"/>
-                </a:solidFill>
-                <a:latin typeface="Microsoft YaHei"/>
-                <a:ea typeface="Microsoft YaHei"/>
-              </a:rPr>
-              <a:t>中国科学技术大学软件学院</a:t>
-            </a:r>
-            <a:endParaRPr/>
-          </a:p>
-        </p:txBody>
-      </p:sp>
-      <p:sp>
-        <p:nvSpPr>
-          <p:cNvPr id="87" name="" descr="{&quot;isTemplate&quot;:true,&quot;type&quot;:&quot;text&quot;}"/>
-          <p:cNvSpPr txBox="1"/>
-          <p:nvPr/>
-        </p:nvSpPr>
-        <p:spPr>
-          <a:xfrm rot="0" flipH="0" flipV="0">
-            <a:off x="11268075" y="6572250"/>
-            <a:ext cx="542925" cy="190500"/>
-          </a:xfrm>
-          <a:prstGeom prst="rect"/>
-        </p:spPr>
-        <p:txBody>
-          <a:bodyPr wrap="none" lIns="0" tIns="0" rIns="0" bIns="0"/>
-          <a:p>
-            <a:pPr>
-              <a:lnSpc>
-                <a:spcPct val="100000"/>
-              </a:lnSpc>
-            </a:pPr>
-            <a:r>
-              <a:rPr lang="en-US" sz="1200" b="1">
-                <a:solidFill>
-                  <a:srgbClr val="1E4FA8"/>
-                </a:solidFill>
-                <a:latin typeface="Microsoft YaHei"/>
-                <a:ea typeface="Microsoft YaHei"/>
-              </a:rPr>
-              <a:t>11 / 17</a:t>
-            </a:r>
-            <a:endParaRPr/>
-          </a:p>
-        </p:txBody>
-      </p:sp>
-    </p:spTree>
-  </p:cSld>
-</p:sld>
-</file>
-
-<file path=ppt/slides/slide12.xml><?xml version="1.0" encoding="utf-8"?>
-<p:sld xmlns:p="http://schemas.openxmlformats.org/presentationml/2006/main" xmlns:a="http://schemas.openxmlformats.org/drawingml/2006/main">
-  <p:cSld>
-    <p:spTree>
-      <p:nvGrpSpPr>
-        <p:cNvPr id="88" name=""/>
-        <p:cNvGrpSpPr/>
-        <p:nvPr/>
-      </p:nvGrpSpPr>
-      <p:grpSpPr>
-        <a:xfrm>
-          <a:off x="0" y="0"/>
-          <a:ext cx="0" cy="0"/>
-          <a:chOff x="0" y="0"/>
-          <a:chExt cx="0" cy="0"/>
-        </a:xfrm>
-      </p:grpSpPr>
-      <p:sp>
-        <p:nvSpPr>
-          <p:cNvPr id="89" name=""/>
-          <p:cNvSpPr/>
-          <p:nvPr/>
-        </p:nvSpPr>
-        <p:spPr>
-          <a:xfrm rot="0" flipH="0" flipV="0">
-            <a:off x="0" y="0"/>
-            <a:ext cx="12192000" cy="6858000"/>
-          </a:xfrm>
-          <a:prstGeom prst="rect">
-            <a:avLst/>
-          </a:prstGeom>
-          <a:solidFill>
-            <a:srgbClr val="FFFFFF"/>
-          </a:solidFill>
-          <a:ln/>
-        </p:spPr>
-        <p:txBody>
-          <a:bodyPr/>
-          <a:p>
-            <a:pPr/>
-            <a:endParaRPr/>
-          </a:p>
-        </p:txBody>
-      </p:sp>
-      <p:sp>
-        <p:nvSpPr>
-          <p:cNvPr id="90" name=""/>
-          <p:cNvSpPr/>
-          <p:nvPr/>
-        </p:nvSpPr>
-        <p:spPr>
-          <a:xfrm rot="0" flipH="0" flipV="0">
-            <a:off x="0" y="0"/>
-            <a:ext cx="12192000" cy="685800"/>
-          </a:xfrm>
-          <a:prstGeom prst="rect">
-            <a:avLst/>
-          </a:prstGeom>
-          <a:solidFill>
-            <a:srgbClr val="1E4FA8"/>
-          </a:solidFill>
-          <a:ln/>
-        </p:spPr>
-        <p:txBody>
-          <a:bodyPr/>
-          <a:p>
-            <a:pPr/>
-            <a:endParaRPr/>
-          </a:p>
-        </p:txBody>
-      </p:sp>
-      <p:sp>
-        <p:nvSpPr>
-          <p:cNvPr id="91" name="" descr="{&quot;isTemplate&quot;:true,&quot;type&quot;:&quot;text&quot;}"/>
-          <p:cNvSpPr txBox="1"/>
-          <p:nvPr/>
-        </p:nvSpPr>
-        <p:spPr>
-          <a:xfrm rot="0" flipH="0" flipV="0">
-            <a:off x="381000" y="247650"/>
-            <a:ext cx="2543175" cy="190500"/>
-          </a:xfrm>
-          <a:prstGeom prst="rect"/>
-        </p:spPr>
-        <p:txBody>
-          <a:bodyPr wrap="none" lIns="0" tIns="0" rIns="0" bIns="0"/>
-          <a:p>
-            <a:pPr>
-              <a:lnSpc>
-                <a:spcPct val="100000"/>
-              </a:lnSpc>
-            </a:pPr>
-            <a:r>
-              <a:rPr lang="zh-CN" sz="1200">
-                <a:solidFill>
-                  <a:srgbClr val="FFFFFF"/>
-                </a:solidFill>
-                <a:latin typeface="Microsoft YaHei"/>
-                <a:ea typeface="Microsoft YaHei"/>
-              </a:rPr>
-              <a:t>基于</a:t>
-            </a:r>
-            <a:r>
-              <a:rPr lang="en-US" sz="1200">
-                <a:solidFill>
-                  <a:srgbClr val="FFFFFF"/>
-                </a:solidFill>
-                <a:latin typeface="Microsoft YaHei"/>
-                <a:ea typeface="Microsoft YaHei"/>
-              </a:rPr>
-              <a:t xml:space="preserve"> RAG </a:t>
-            </a:r>
-            <a:r>
-              <a:rPr lang="zh-CN" sz="1200">
-                <a:solidFill>
-                  <a:srgbClr val="FFFFFF"/>
-                </a:solidFill>
-                <a:latin typeface="Microsoft YaHei"/>
-                <a:ea typeface="Microsoft YaHei"/>
-              </a:rPr>
-              <a:t>的轻量级企业工艺生成系统</a:t>
-            </a:r>
-            <a:endParaRPr/>
-          </a:p>
-        </p:txBody>
-      </p:sp>
-      <p:sp>
-        <p:nvSpPr>
-          <p:cNvPr id="92" name="" descr="{&quot;isTemplate&quot;:true,&quot;type&quot;:&quot;text&quot;}"/>
-          <p:cNvSpPr txBox="1"/>
-          <p:nvPr/>
-        </p:nvSpPr>
-        <p:spPr>
-          <a:xfrm rot="0" flipH="0" flipV="0">
-            <a:off x="11277600" y="266700"/>
-            <a:ext cx="533400" cy="161925"/>
-          </a:xfrm>
-          <a:prstGeom prst="rect"/>
-        </p:spPr>
-        <p:txBody>
-          <a:bodyPr wrap="none" lIns="0" tIns="0" rIns="0" bIns="0"/>
-          <a:p>
-            <a:pPr>
-              <a:lnSpc>
-                <a:spcPct val="100000"/>
-              </a:lnSpc>
-            </a:pPr>
-            <a:r>
-              <a:rPr lang="zh-CN" sz="1050">
-                <a:solidFill>
-                  <a:srgbClr val="FFFFFF">
-                    <a:alpha val="85000"/>
-                  </a:srgbClr>
-                </a:solidFill>
-                <a:latin typeface="Microsoft YaHei"/>
-                <a:ea typeface="Microsoft YaHei"/>
-              </a:rPr>
-              <a:t>技术方案</a:t>
-            </a:r>
-            <a:endParaRPr/>
-          </a:p>
-        </p:txBody>
-      </p:sp>
-      <p:sp>
-        <p:nvSpPr>
-          <p:cNvPr id="93" name="" descr="{&quot;isTemplate&quot;:true,&quot;type&quot;:&quot;text&quot;}"/>
-          <p:cNvSpPr txBox="1"/>
-          <p:nvPr/>
-        </p:nvSpPr>
-        <p:spPr>
-          <a:xfrm rot="0" flipH="0" flipV="0">
-            <a:off x="381000" y="933450"/>
-            <a:ext cx="11430000" cy="390525"/>
-          </a:xfrm>
-          <a:prstGeom prst="rect"/>
-        </p:spPr>
-        <p:txBody>
-          <a:bodyPr wrap="none" lIns="0" tIns="0" rIns="0" bIns="0"/>
-          <a:p>
-            <a:pPr>
-              <a:lnSpc>
-                <a:spcPct val="100000"/>
-              </a:lnSpc>
-            </a:pPr>
-            <a:r>
-              <a:rPr lang="zh-CN" sz="2550" b="1">
-                <a:solidFill>
-                  <a:srgbClr val="1A2230"/>
-                </a:solidFill>
-                <a:latin typeface="Microsoft YaHei"/>
-                <a:ea typeface="Microsoft YaHei"/>
-              </a:rPr>
-              <a:t>两大关键技术特色</a:t>
-            </a:r>
-            <a:endParaRPr/>
-          </a:p>
-        </p:txBody>
-      </p:sp>
-      <p:sp>
-        <p:nvSpPr>
-          <p:cNvPr id="94" name=""/>
-          <p:cNvSpPr/>
-          <p:nvPr/>
-        </p:nvSpPr>
-        <p:spPr>
-          <a:xfrm rot="0" flipH="0" flipV="0">
-            <a:off x="381000" y="1457325"/>
-            <a:ext cx="6391275" cy="4829175"/>
-          </a:xfrm>
-          <a:prstGeom prst="roundRect">
-            <a:avLst>
-              <a:gd name="adj" fmla="val 2761"/>
-            </a:avLst>
-          </a:prstGeom>
-          <a:solidFill>
-            <a:srgbClr val="0E3F8C"/>
-          </a:solidFill>
-          <a:ln/>
-        </p:spPr>
-        <p:txBody>
-          <a:bodyPr/>
-          <a:p>
-            <a:pPr/>
-            <a:endParaRPr/>
-          </a:p>
-        </p:txBody>
-      </p:sp>
-      <p:sp>
-        <p:nvSpPr>
-          <p:cNvPr id="95" name=""/>
-          <p:cNvSpPr/>
-          <p:nvPr/>
-        </p:nvSpPr>
-        <p:spPr>
-          <a:xfrm rot="0" flipH="0" flipV="0">
-            <a:off x="666750" y="1743075"/>
-            <a:ext cx="342900" cy="342900"/>
-          </a:xfrm>
-          <a:prstGeom prst="roundRect">
-            <a:avLst>
-              <a:gd name="adj" fmla="val 22222"/>
-            </a:avLst>
-          </a:prstGeom>
-          <a:solidFill>
-            <a:srgbClr val="3D7BD9"/>
-          </a:solidFill>
-          <a:ln/>
-        </p:spPr>
-        <p:txBody>
-          <a:bodyPr/>
-          <a:p>
-            <a:pPr/>
-            <a:endParaRPr/>
-          </a:p>
-        </p:txBody>
-      </p:sp>
-      <p:sp>
-        <p:nvSpPr>
-          <p:cNvPr id="96" name="" descr="{&quot;isTemplate&quot;:true,&quot;type&quot;:&quot;text&quot;}"/>
-          <p:cNvSpPr txBox="1"/>
-          <p:nvPr/>
-        </p:nvSpPr>
-        <p:spPr>
-          <a:xfrm rot="0" flipH="0" flipV="0">
-            <a:off x="781050" y="1800225"/>
-            <a:ext cx="123825" cy="228600"/>
-          </a:xfrm>
-          <a:prstGeom prst="rect"/>
-        </p:spPr>
-        <p:txBody>
-          <a:bodyPr wrap="none" lIns="0" tIns="0" rIns="0" bIns="0"/>
-          <a:p>
-            <a:pPr>
-              <a:lnSpc>
-                <a:spcPct val="100000"/>
-              </a:lnSpc>
-            </a:pPr>
-            <a:r>
-              <a:rPr lang="en-US" sz="1500" b="1">
-                <a:solidFill>
-                  <a:srgbClr val="FFFFFF"/>
-                </a:solidFill>
-                <a:latin typeface="Microsoft YaHei"/>
-                <a:ea typeface="Microsoft YaHei"/>
-              </a:rPr>
-              <a:t>1</a:t>
-            </a:r>
-            <a:endParaRPr/>
-          </a:p>
-        </p:txBody>
-      </p:sp>
-      <p:sp>
-        <p:nvSpPr>
-          <p:cNvPr id="97" name="" descr="{&quot;isTemplate&quot;:true,&quot;type&quot;:&quot;text&quot;}"/>
-          <p:cNvSpPr txBox="1"/>
-          <p:nvPr/>
-        </p:nvSpPr>
-        <p:spPr>
-          <a:xfrm rot="0" flipH="0" flipV="0">
-            <a:off x="1123950" y="1762125"/>
-            <a:ext cx="3314700" cy="304800"/>
-          </a:xfrm>
-          <a:prstGeom prst="rect"/>
-        </p:spPr>
-        <p:txBody>
-          <a:bodyPr wrap="none" lIns="0" tIns="0" rIns="0" bIns="0"/>
-          <a:p>
-            <a:pPr>
-              <a:lnSpc>
-                <a:spcPct val="100000"/>
-              </a:lnSpc>
-            </a:pPr>
-            <a:r>
-              <a:rPr lang="zh-CN" sz="1950" b="1">
-                <a:solidFill>
-                  <a:srgbClr val="FFFFFF"/>
-                </a:solidFill>
-                <a:latin typeface="Microsoft YaHei"/>
-                <a:ea typeface="Microsoft YaHei"/>
-              </a:rPr>
-              <a:t>混合召回</a:t>
-            </a:r>
-            <a:r>
-              <a:rPr lang="en-US" sz="1950" b="1">
-                <a:solidFill>
-                  <a:srgbClr val="FFFFFF"/>
-                </a:solidFill>
-                <a:latin typeface="Microsoft YaHei"/>
-                <a:ea typeface="Microsoft YaHei"/>
-              </a:rPr>
-              <a:t xml:space="preserve"> + </a:t>
-            </a:r>
-            <a:r>
-              <a:rPr lang="zh-CN" sz="1950" b="1">
-                <a:solidFill>
-                  <a:srgbClr val="FFFFFF"/>
-                </a:solidFill>
-                <a:latin typeface="Microsoft YaHei"/>
-                <a:ea typeface="Microsoft YaHei"/>
-              </a:rPr>
-              <a:t>重排序的两级检索</a:t>
-            </a:r>
-            <a:endParaRPr/>
-          </a:p>
-        </p:txBody>
-      </p:sp>
-      <p:sp>
-        <p:nvSpPr>
-          <p:cNvPr id="98" name="" descr="{&quot;isTemplate&quot;:true,&quot;type&quot;:&quot;text&quot;}"/>
-          <p:cNvSpPr txBox="1"/>
-          <p:nvPr/>
-        </p:nvSpPr>
-        <p:spPr>
-          <a:xfrm rot="0" flipH="0" flipV="0">
-            <a:off x="666750" y="2867025"/>
-            <a:ext cx="5819775" cy="742950"/>
-          </a:xfrm>
-          <a:prstGeom prst="rect"/>
-        </p:spPr>
-        <p:txBody>
-          <a:bodyPr wrap="square" lIns="0" tIns="0" rIns="0" bIns="0">
-            <a:normAutofit/>
-          </a:bodyPr>
-          <a:p>
-            <a:pPr>
-              <a:lnSpc>
-                <a:spcPct val="170000"/>
-              </a:lnSpc>
-            </a:pPr>
-            <a:r>
-              <a:rPr lang="zh-CN" sz="1425">
-                <a:solidFill>
-                  <a:srgbClr val="D6E4F7"/>
-                </a:solidFill>
-                <a:latin typeface="Microsoft YaHei"/>
-                <a:ea typeface="Microsoft YaHei"/>
-              </a:rPr>
-              <a:t>双路召回保证「不遗漏」：稠密向量负责语义理解，</a:t>
-            </a:r>
-            <a:r>
-              <a:rPr lang="en-US" sz="1425">
-                <a:solidFill>
-                  <a:srgbClr val="D6E4F7"/>
-                </a:solidFill>
-                <a:latin typeface="Microsoft YaHei"/>
-                <a:ea typeface="Microsoft YaHei"/>
-              </a:rPr>
-              <a:t xml:space="preserve">BM25 </a:t>
-            </a:r>
-            <a:r>
-              <a:rPr lang="zh-CN" sz="1425">
-                <a:solidFill>
-                  <a:srgbClr val="D6E4F7"/>
-                </a:solidFill>
-                <a:latin typeface="Microsoft YaHei"/>
-                <a:ea typeface="Microsoft YaHei"/>
-              </a:rPr>
-              <a:t>负责型号、数字等精确匹配；</a:t>
-            </a:r>
-            <a:endParaRPr/>
-          </a:p>
-        </p:txBody>
-      </p:sp>
-      <p:sp>
-        <p:nvSpPr>
-          <p:cNvPr id="99" name="" descr="{&quot;isTemplate&quot;:true,&quot;type&quot;:&quot;text&quot;}"/>
-          <p:cNvSpPr txBox="1"/>
-          <p:nvPr/>
-        </p:nvSpPr>
-        <p:spPr>
-          <a:xfrm rot="0" flipH="0" flipV="0">
-            <a:off x="666750" y="4305300"/>
-            <a:ext cx="5819775" cy="742950"/>
-          </a:xfrm>
-          <a:prstGeom prst="rect"/>
-        </p:spPr>
-        <p:txBody>
-          <a:bodyPr wrap="square" lIns="0" tIns="0" rIns="0" bIns="0">
-            <a:normAutofit/>
-          </a:bodyPr>
-          <a:p>
-            <a:pPr>
-              <a:lnSpc>
-                <a:spcPct val="170000"/>
-              </a:lnSpc>
-            </a:pPr>
-            <a:r>
-              <a:rPr lang="en-US" sz="1425">
-                <a:solidFill>
-                  <a:srgbClr val="D6E4F7"/>
-                </a:solidFill>
-                <a:latin typeface="Microsoft YaHei"/>
-                <a:ea typeface="Microsoft YaHei"/>
-              </a:rPr>
-              <a:t xml:space="preserve">Cross-encoder </a:t>
-            </a:r>
-            <a:r>
-              <a:rPr lang="zh-CN" sz="1425">
-                <a:solidFill>
-                  <a:srgbClr val="D6E4F7"/>
-                </a:solidFill>
-                <a:latin typeface="Microsoft YaHei"/>
-                <a:ea typeface="Microsoft YaHei"/>
-              </a:rPr>
-              <a:t>精排保证「准确」：在有限候选中二次排序，兼顾检索质量与响应速度。</a:t>
-            </a:r>
-            <a:endParaRPr/>
-          </a:p>
-        </p:txBody>
-      </p:sp>
-      <p:sp>
-        <p:nvSpPr>
-          <p:cNvPr id="100" name=""/>
-          <p:cNvSpPr/>
-          <p:nvPr/>
-        </p:nvSpPr>
-        <p:spPr>
-          <a:xfrm rot="0" flipH="0" flipV="0">
-            <a:off x="666750" y="5867400"/>
-            <a:ext cx="95250" cy="95250"/>
-          </a:xfrm>
-          <a:prstGeom prst="roundRect">
-            <a:avLst>
-              <a:gd name="adj" fmla="val 50000"/>
-            </a:avLst>
-          </a:prstGeom>
-          <a:solidFill>
-            <a:srgbClr val="3D7BD9"/>
-          </a:solidFill>
-          <a:ln/>
-        </p:spPr>
-        <p:txBody>
-          <a:bodyPr/>
-          <a:p>
-            <a:pPr/>
-            <a:endParaRPr/>
-          </a:p>
-        </p:txBody>
-      </p:sp>
-      <p:sp>
-        <p:nvSpPr>
-          <p:cNvPr id="101" name="" descr="{&quot;isTemplate&quot;:true,&quot;type&quot;:&quot;text&quot;}"/>
           <p:cNvSpPr txBox="1"/>
           <p:nvPr/>
         </p:nvSpPr>
@@ -4361,7 +1717,7 @@
       </p:sp>
       <p:sp>
         <p:nvSpPr>
-          <p:cNvPr id="102" name=""/>
+          <p:cNvPr id="31" name=""/>
           <p:cNvSpPr/>
           <p:nvPr/>
         </p:nvSpPr>
@@ -4395,7 +1751,7 @@
       </p:sp>
       <p:sp>
         <p:nvSpPr>
-          <p:cNvPr id="103" name=""/>
+          <p:cNvPr id="32" name=""/>
           <p:cNvSpPr/>
           <p:nvPr/>
         </p:nvSpPr>
@@ -4424,7 +1780,7 @@
       </p:sp>
       <p:sp>
         <p:nvSpPr>
-          <p:cNvPr id="104" name="" descr="{&quot;isTemplate&quot;:true,&quot;type&quot;:&quot;text&quot;}"/>
+          <p:cNvPr id="33" name="" descr="{&quot;isTemplate&quot;:true,&quot;type&quot;:&quot;text&quot;}"/>
           <p:cNvSpPr txBox="1"/>
           <p:nvPr/>
         </p:nvSpPr>
@@ -4459,7 +1815,7 @@
       </p:sp>
       <p:sp>
         <p:nvSpPr>
-          <p:cNvPr id="105" name="" descr="{&quot;isTemplate&quot;:true,&quot;type&quot;:&quot;text&quot;}"/>
+          <p:cNvPr id="34" name="" descr="{&quot;isTemplate&quot;:true,&quot;type&quot;:&quot;text&quot;}"/>
           <p:cNvSpPr txBox="1"/>
           <p:nvPr/>
         </p:nvSpPr>
@@ -4514,7 +1870,7 @@
       </p:sp>
       <p:sp>
         <p:nvSpPr>
-          <p:cNvPr id="106" name="" descr="{&quot;isTemplate&quot;:true,&quot;type&quot;:&quot;text&quot;}"/>
+          <p:cNvPr id="35" name="" descr="{&quot;isTemplate&quot;:true,&quot;type&quot;:&quot;text&quot;}"/>
           <p:cNvSpPr txBox="1"/>
           <p:nvPr/>
         </p:nvSpPr>
@@ -4549,7 +1905,7 @@
       </p:sp>
       <p:sp>
         <p:nvSpPr>
-          <p:cNvPr id="107" name="" descr="{&quot;isTemplate&quot;:true,&quot;type&quot;:&quot;text&quot;}"/>
+          <p:cNvPr id="36" name="" descr="{&quot;isTemplate&quot;:true,&quot;type&quot;:&quot;text&quot;}"/>
           <p:cNvSpPr txBox="1"/>
           <p:nvPr/>
         </p:nvSpPr>
@@ -4606,7 +1962,7 @@
       </p:sp>
       <p:sp>
         <p:nvSpPr>
-          <p:cNvPr id="108" name="" descr="{&quot;isTemplate&quot;:true,&quot;type&quot;:&quot;text&quot;}"/>
+          <p:cNvPr id="37" name="" descr="{&quot;isTemplate&quot;:true,&quot;type&quot;:&quot;text&quot;}"/>
           <p:cNvSpPr txBox="1"/>
           <p:nvPr/>
         </p:nvSpPr>
@@ -4641,7 +1997,7 @@
       </p:sp>
       <p:sp>
         <p:nvSpPr>
-          <p:cNvPr id="109" name="" descr="{&quot;isTemplate&quot;:true,&quot;type&quot;:&quot;text&quot;}"/>
+          <p:cNvPr id="38" name="" descr="{&quot;isTemplate&quot;:true,&quot;type&quot;:&quot;text&quot;}"/>
           <p:cNvSpPr txBox="1"/>
           <p:nvPr/>
         </p:nvSpPr>
@@ -4688,7 +2044,7 @@
       </p:sp>
       <p:sp>
         <p:nvSpPr>
-          <p:cNvPr id="110" name=""/>
+          <p:cNvPr id="39" name=""/>
           <p:cNvSpPr/>
           <p:nvPr/>
         </p:nvSpPr>
@@ -4717,7 +2073,7 @@
       </p:sp>
       <p:sp>
         <p:nvSpPr>
-          <p:cNvPr id="111" name="" descr="{&quot;isTemplate&quot;:true,&quot;type&quot;:&quot;text&quot;}"/>
+          <p:cNvPr id="40" name="" descr="{&quot;isTemplate&quot;:true,&quot;type&quot;:&quot;text&quot;}"/>
           <p:cNvSpPr txBox="1"/>
           <p:nvPr/>
         </p:nvSpPr>
@@ -4752,7 +2108,7 @@
       </p:sp>
       <p:sp>
         <p:nvSpPr>
-          <p:cNvPr id="112" name="" descr="{&quot;isTemplate&quot;:true,&quot;type&quot;:&quot;text&quot;}"/>
+          <p:cNvPr id="41" name="" descr="{&quot;isTemplate&quot;:true,&quot;type&quot;:&quot;text&quot;}"/>
           <p:cNvSpPr txBox="1"/>
           <p:nvPr/>
         </p:nvSpPr>
@@ -4787,7 +2143,7 @@
       </p:sp>
       <p:sp>
         <p:nvSpPr>
-          <p:cNvPr id="113" name="" descr="{&quot;isTemplate&quot;:true,&quot;type&quot;:&quot;text&quot;}"/>
+          <p:cNvPr id="42" name="" descr="{&quot;isTemplate&quot;:true,&quot;type&quot;:&quot;text&quot;}"/>
           <p:cNvSpPr txBox="1"/>
           <p:nvPr/>
         </p:nvSpPr>
@@ -4814,7 +2170,7 @@
                 <a:latin typeface="Microsoft YaHei"/>
                 <a:ea typeface="Microsoft YaHei"/>
               </a:rPr>
-              <a:t>12 / 17</a:t>
+              <a:t>10 / 15</a:t>
             </a:r>
             <a:endParaRPr/>
           </a:p>
@@ -4825,12 +2181,12 @@
 </p:sld>
 </file>
 
-<file path=ppt/slides/slide13.xml><?xml version="1.0" encoding="utf-8"?>
+<file path=ppt/slides/slide11.xml><?xml version="1.0" encoding="utf-8"?>
 <p:sld xmlns:p="http://schemas.openxmlformats.org/presentationml/2006/main" xmlns:a="http://schemas.openxmlformats.org/drawingml/2006/main" xmlns:a16="http://schemas.microsoft.com/office/drawing/2014/main" xmlns:mc="http://schemas.openxmlformats.org/markup-compatibility/2006" mc:Ignorable="a16">
   <p:cSld>
     <p:spTree>
       <p:nvGrpSpPr>
-        <p:cNvPr id="114" name=""/>
+        <p:cNvPr id="43" name=""/>
         <p:cNvGrpSpPr/>
         <p:nvPr/>
       </p:nvGrpSpPr>
@@ -4844,7 +2200,7 @@
       </p:grpSpPr>
       <p:sp>
         <p:nvSpPr>
-          <p:cNvPr id="115" name=""/>
+          <p:cNvPr id="44" name=""/>
           <p:cNvSpPr/>
           <p:nvPr/>
         </p:nvSpPr>
@@ -4871,7 +2227,7 @@
       </p:sp>
       <p:sp>
         <p:nvSpPr>
-          <p:cNvPr id="116" name=""/>
+          <p:cNvPr id="45" name=""/>
           <p:cNvSpPr/>
           <p:nvPr/>
         </p:nvSpPr>
@@ -4898,7 +2254,7 @@
       </p:sp>
       <p:sp>
         <p:nvSpPr>
-          <p:cNvPr id="117" name="" descr="{&quot;isTemplate&quot;:true,&quot;type&quot;:&quot;text&quot;}"/>
+          <p:cNvPr id="46" name="" descr="{&quot;isTemplate&quot;:true,&quot;type&quot;:&quot;text&quot;}"/>
           <p:cNvSpPr txBox="1"/>
           <p:nvPr/>
         </p:nvSpPr>
@@ -4953,7 +2309,7 @@
       </p:sp>
       <p:sp>
         <p:nvSpPr>
-          <p:cNvPr id="118" name="" descr="{&quot;isTemplate&quot;:true,&quot;type&quot;:&quot;text&quot;}"/>
+          <p:cNvPr id="47" name="" descr="{&quot;isTemplate&quot;:true,&quot;type&quot;:&quot;text&quot;}"/>
           <p:cNvSpPr txBox="1"/>
           <p:nvPr/>
         </p:nvSpPr>
@@ -4990,7 +2346,7 @@
       </p:sp>
       <p:sp>
         <p:nvSpPr>
-          <p:cNvPr id="119" name=""/>
+          <p:cNvPr id="48" name=""/>
           <p:cNvSpPr/>
           <p:nvPr/>
         </p:nvSpPr>
@@ -5019,7 +2375,7 @@
       </p:sp>
       <p:sp>
         <p:nvSpPr>
-          <p:cNvPr id="120" name="" descr="{&quot;isTemplate&quot;:true,&quot;type&quot;:&quot;text&quot;}"/>
+          <p:cNvPr id="49" name="" descr="{&quot;isTemplate&quot;:true,&quot;type&quot;:&quot;text&quot;}"/>
           <p:cNvSpPr txBox="1"/>
           <p:nvPr/>
         </p:nvSpPr>
@@ -5054,7 +2410,7 @@
       </p:sp>
       <p:sp>
         <p:nvSpPr>
-          <p:cNvPr id="121" name="" descr="{&quot;isTemplate&quot;:true,&quot;type&quot;:&quot;text&quot;}"/>
+          <p:cNvPr id="50" name="" descr="{&quot;isTemplate&quot;:true,&quot;type&quot;:&quot;text&quot;}"/>
           <p:cNvSpPr txBox="1"/>
           <p:nvPr/>
         </p:nvSpPr>
@@ -5091,7 +2447,7 @@
       </p:sp>
       <p:sp>
         <p:nvSpPr>
-          <p:cNvPr id="122" name=""/>
+          <p:cNvPr id="51" name=""/>
           <p:cNvSpPr/>
           <p:nvPr/>
         </p:nvSpPr>
@@ -5120,7 +2476,7 @@
       </p:sp>
       <p:sp>
         <p:nvSpPr>
-          <p:cNvPr id="123" name="" descr="{&quot;isTemplate&quot;:true,&quot;type&quot;:&quot;text&quot;}"/>
+          <p:cNvPr id="52" name="" descr="{&quot;isTemplate&quot;:true,&quot;type&quot;:&quot;text&quot;}"/>
           <p:cNvSpPr txBox="1"/>
           <p:nvPr/>
         </p:nvSpPr>
@@ -5155,7 +2511,7 @@
       </p:sp>
       <p:sp>
         <p:nvSpPr>
-          <p:cNvPr id="124" name="" descr="{&quot;isTemplate&quot;:true,&quot;type&quot;:&quot;text&quot;}"/>
+          <p:cNvPr id="53" name="" descr="{&quot;isTemplate&quot;:true,&quot;type&quot;:&quot;text&quot;}"/>
           <p:cNvSpPr txBox="1"/>
           <p:nvPr/>
         </p:nvSpPr>
@@ -5192,7 +2548,7 @@
       </p:sp>
       <p:graphicFrame>
         <p:nvGraphicFramePr>
-          <p:cNvPr id="125" name=""/>
+          <p:cNvPr id="54" name=""/>
           <p:cNvGraphicFramePr/>
           <p:nvPr/>
         </p:nvGraphicFramePr>
@@ -6166,7 +3522,7 @@
       </p:graphicFrame>
       <p:sp>
         <p:nvSpPr>
-          <p:cNvPr id="126" name=""/>
+          <p:cNvPr id="55" name=""/>
           <p:cNvSpPr/>
           <p:nvPr/>
         </p:nvSpPr>
@@ -6195,7 +3551,7 @@
       </p:sp>
       <p:sp>
         <p:nvSpPr>
-          <p:cNvPr id="127" name=""/>
+          <p:cNvPr id="56" name=""/>
           <p:cNvSpPr/>
           <p:nvPr/>
         </p:nvSpPr>
@@ -6224,7 +3580,7 @@
       </p:sp>
       <p:sp>
         <p:nvSpPr>
-          <p:cNvPr id="128" name="" descr="{&quot;isTemplate&quot;:true,&quot;type&quot;:&quot;text&quot;}"/>
+          <p:cNvPr id="57" name="" descr="{&quot;isTemplate&quot;:true,&quot;type&quot;:&quot;text&quot;}"/>
           <p:cNvSpPr txBox="1"/>
           <p:nvPr/>
         </p:nvSpPr>
@@ -6279,7 +3635,7 @@
       </p:sp>
       <p:sp>
         <p:nvSpPr>
-          <p:cNvPr id="129" name="" descr="{&quot;isTemplate&quot;:true,&quot;type&quot;:&quot;text&quot;}"/>
+          <p:cNvPr id="58" name="" descr="{&quot;isTemplate&quot;:true,&quot;type&quot;:&quot;text&quot;}"/>
           <p:cNvSpPr txBox="1"/>
           <p:nvPr/>
         </p:nvSpPr>
@@ -6314,7 +3670,7 @@
       </p:sp>
       <p:sp>
         <p:nvSpPr>
-          <p:cNvPr id="130" name="" descr="{&quot;isTemplate&quot;:true,&quot;type&quot;:&quot;text&quot;}"/>
+          <p:cNvPr id="59" name="" descr="{&quot;isTemplate&quot;:true,&quot;type&quot;:&quot;text&quot;}"/>
           <p:cNvSpPr txBox="1"/>
           <p:nvPr/>
         </p:nvSpPr>
@@ -6341,7 +3697,7 @@
                 <a:latin typeface="Microsoft YaHei"/>
                 <a:ea typeface="Microsoft YaHei"/>
               </a:rPr>
-              <a:t>13 / 17</a:t>
+              <a:t>11 / 15</a:t>
             </a:r>
             <a:endParaRPr/>
           </a:p>
@@ -6352,12 +3708,12 @@
 </p:sld>
 </file>
 
-<file path=ppt/slides/slide14.xml><?xml version="1.0" encoding="utf-8"?>
+<file path=ppt/slides/slide12.xml><?xml version="1.0" encoding="utf-8"?>
 <p:sld xmlns:p="http://schemas.openxmlformats.org/presentationml/2006/main" xmlns:a="http://schemas.openxmlformats.org/drawingml/2006/main">
   <p:cSld>
     <p:spTree>
       <p:nvGrpSpPr>
-        <p:cNvPr id="131" name=""/>
+        <p:cNvPr id="60" name=""/>
         <p:cNvGrpSpPr/>
         <p:nvPr/>
       </p:nvGrpSpPr>
@@ -6371,7 +3727,7 @@
       </p:grpSpPr>
       <p:sp>
         <p:nvSpPr>
-          <p:cNvPr id="132" name=""/>
+          <p:cNvPr id="61" name=""/>
           <p:cNvSpPr/>
           <p:nvPr/>
         </p:nvSpPr>
@@ -6398,7 +3754,7 @@
       </p:sp>
       <p:sp>
         <p:nvSpPr>
-          <p:cNvPr id="133" name=""/>
+          <p:cNvPr id="62" name=""/>
           <p:cNvSpPr/>
           <p:nvPr/>
         </p:nvSpPr>
@@ -6425,7 +3781,7 @@
       </p:sp>
       <p:sp>
         <p:nvSpPr>
-          <p:cNvPr id="134" name="" descr="{&quot;isTemplate&quot;:true,&quot;type&quot;:&quot;text&quot;}"/>
+          <p:cNvPr id="63" name="" descr="{&quot;isTemplate&quot;:true,&quot;type&quot;:&quot;text&quot;}"/>
           <p:cNvSpPr txBox="1"/>
           <p:nvPr/>
         </p:nvSpPr>
@@ -6460,7 +3816,7 @@
       </p:sp>
       <p:sp>
         <p:nvSpPr>
-          <p:cNvPr id="135" name=""/>
+          <p:cNvPr id="64" name=""/>
           <p:cNvSpPr/>
           <p:nvPr/>
         </p:nvSpPr>
@@ -6489,7 +3845,7 @@
       </p:sp>
       <p:sp>
         <p:nvSpPr>
-          <p:cNvPr id="136" name="" descr="{&quot;isTemplate&quot;:true,&quot;type&quot;:&quot;text&quot;}"/>
+          <p:cNvPr id="65" name="" descr="{&quot;isTemplate&quot;:true,&quot;type&quot;:&quot;text&quot;}"/>
           <p:cNvSpPr txBox="1"/>
           <p:nvPr/>
         </p:nvSpPr>
@@ -6524,7 +3880,7 @@
       </p:sp>
       <p:sp>
         <p:nvSpPr>
-          <p:cNvPr id="137" name="" descr="{&quot;isTemplate&quot;:true,&quot;type&quot;:&quot;text&quot;}"/>
+          <p:cNvPr id="66" name="" descr="{&quot;isTemplate&quot;:true,&quot;type&quot;:&quot;text&quot;}"/>
           <p:cNvSpPr txBox="1"/>
           <p:nvPr/>
         </p:nvSpPr>
@@ -6579,7 +3935,7 @@
       </p:sp>
       <p:sp>
         <p:nvSpPr>
-          <p:cNvPr id="138" name=""/>
+          <p:cNvPr id="67" name=""/>
           <p:cNvSpPr/>
           <p:nvPr/>
         </p:nvSpPr>
@@ -6608,7 +3964,7 @@
       </p:sp>
       <p:sp>
         <p:nvSpPr>
-          <p:cNvPr id="139" name="" descr="{&quot;isTemplate&quot;:true,&quot;type&quot;:&quot;text&quot;}"/>
+          <p:cNvPr id="68" name="" descr="{&quot;isTemplate&quot;:true,&quot;type&quot;:&quot;text&quot;}"/>
           <p:cNvSpPr txBox="1"/>
           <p:nvPr/>
         </p:nvSpPr>
@@ -6643,7 +3999,7 @@
       </p:sp>
       <p:sp>
         <p:nvSpPr>
-          <p:cNvPr id="140" name="" descr="{&quot;isTemplate&quot;:true,&quot;type&quot;:&quot;text&quot;}"/>
+          <p:cNvPr id="69" name="" descr="{&quot;isTemplate&quot;:true,&quot;type&quot;:&quot;text&quot;}"/>
           <p:cNvSpPr txBox="1"/>
           <p:nvPr/>
         </p:nvSpPr>
@@ -6778,7 +4134,7 @@
       </p:sp>
       <p:sp>
         <p:nvSpPr>
-          <p:cNvPr id="141" name=""/>
+          <p:cNvPr id="70" name=""/>
           <p:cNvSpPr/>
           <p:nvPr/>
         </p:nvSpPr>
@@ -6807,7 +4163,7 @@
       </p:sp>
       <p:sp>
         <p:nvSpPr>
-          <p:cNvPr id="142" name="" descr="{&quot;isTemplate&quot;:true,&quot;type&quot;:&quot;text&quot;}"/>
+          <p:cNvPr id="71" name="" descr="{&quot;isTemplate&quot;:true,&quot;type&quot;:&quot;text&quot;}"/>
           <p:cNvSpPr txBox="1"/>
           <p:nvPr/>
         </p:nvSpPr>
@@ -6842,7 +4198,7 @@
       </p:sp>
       <p:sp>
         <p:nvSpPr>
-          <p:cNvPr id="143" name="" descr="{&quot;isTemplate&quot;:true,&quot;type&quot;:&quot;text&quot;}"/>
+          <p:cNvPr id="72" name="" descr="{&quot;isTemplate&quot;:true,&quot;type&quot;:&quot;text&quot;}"/>
           <p:cNvSpPr txBox="1"/>
           <p:nvPr/>
         </p:nvSpPr>
@@ -6897,7 +4253,7 @@
       </p:sp>
       <p:sp>
         <p:nvSpPr>
-          <p:cNvPr id="144" name=""/>
+          <p:cNvPr id="73" name=""/>
           <p:cNvSpPr/>
           <p:nvPr/>
         </p:nvSpPr>
@@ -6926,7 +4282,7 @@
       </p:sp>
       <p:sp>
         <p:nvSpPr>
-          <p:cNvPr id="145" name="" descr="{&quot;isTemplate&quot;:true,&quot;type&quot;:&quot;text&quot;}"/>
+          <p:cNvPr id="74" name="" descr="{&quot;isTemplate&quot;:true,&quot;type&quot;:&quot;text&quot;}"/>
           <p:cNvSpPr txBox="1"/>
           <p:nvPr/>
         </p:nvSpPr>
@@ -6981,7 +4337,7 @@
       </p:sp>
       <p:sp>
         <p:nvSpPr>
-          <p:cNvPr id="146" name="" descr="{&quot;isTemplate&quot;:true,&quot;type&quot;:&quot;text&quot;}"/>
+          <p:cNvPr id="75" name="" descr="{&quot;isTemplate&quot;:true,&quot;type&quot;:&quot;text&quot;}"/>
           <p:cNvSpPr txBox="1"/>
           <p:nvPr/>
         </p:nvSpPr>
@@ -7016,7 +4372,7 @@
       </p:sp>
       <p:sp>
         <p:nvSpPr>
-          <p:cNvPr id="147" name=""/>
+          <p:cNvPr id="76" name=""/>
           <p:cNvSpPr/>
           <p:nvPr/>
         </p:nvSpPr>
@@ -7045,7 +4401,7 @@
       </p:sp>
       <p:sp>
         <p:nvSpPr>
-          <p:cNvPr id="148" name="" descr="{&quot;isTemplate&quot;:true,&quot;type&quot;:&quot;text&quot;}"/>
+          <p:cNvPr id="77" name="" descr="{&quot;isTemplate&quot;:true,&quot;type&quot;:&quot;text&quot;}"/>
           <p:cNvSpPr txBox="1"/>
           <p:nvPr/>
         </p:nvSpPr>
@@ -7080,7 +4436,7 @@
       </p:sp>
       <p:sp>
         <p:nvSpPr>
-          <p:cNvPr id="149" name="" descr="{&quot;isTemplate&quot;:true,&quot;type&quot;:&quot;text&quot;}"/>
+          <p:cNvPr id="78" name="" descr="{&quot;isTemplate&quot;:true,&quot;type&quot;:&quot;text&quot;}"/>
           <p:cNvSpPr txBox="1"/>
           <p:nvPr/>
         </p:nvSpPr>
@@ -7195,7 +4551,7 @@
       </p:sp>
       <p:sp>
         <p:nvSpPr>
-          <p:cNvPr id="150" name=""/>
+          <p:cNvPr id="79" name=""/>
           <p:cNvSpPr/>
           <p:nvPr/>
         </p:nvSpPr>
@@ -7224,7 +4580,7 @@
       </p:sp>
       <p:sp>
         <p:nvSpPr>
-          <p:cNvPr id="151" name=""/>
+          <p:cNvPr id="80" name=""/>
           <p:cNvSpPr/>
           <p:nvPr/>
         </p:nvSpPr>
@@ -7253,7 +4609,7 @@
       </p:sp>
       <p:sp>
         <p:nvSpPr>
-          <p:cNvPr id="152" name="" descr="{&quot;isTemplate&quot;:true,&quot;type&quot;:&quot;text&quot;}"/>
+          <p:cNvPr id="81" name="" descr="{&quot;isTemplate&quot;:true,&quot;type&quot;:&quot;text&quot;}"/>
           <p:cNvSpPr txBox="1"/>
           <p:nvPr/>
         </p:nvSpPr>
@@ -7291,12 +4647,12 @@
 </p:sld>
 </file>
 
-<file path=ppt/slides/slide15.xml><?xml version="1.0" encoding="utf-8"?>
+<file path=ppt/slides/slide13.xml><?xml version="1.0" encoding="utf-8"?>
 <p:sld xmlns:p="http://schemas.openxmlformats.org/presentationml/2006/main" xmlns:a="http://schemas.openxmlformats.org/drawingml/2006/main" xmlns:asvg="http://schemas.microsoft.com/office/drawing/2016/SVG/main" xmlns:r="http://schemas.openxmlformats.org/officeDocument/2006/relationships" xmlns:mc="http://schemas.openxmlformats.org/markup-compatibility/2006" mc:Ignorable="asvg">
   <p:cSld>
     <p:spTree>
       <p:nvGrpSpPr>
-        <p:cNvPr id="153" name=""/>
+        <p:cNvPr id="82" name=""/>
         <p:cNvGrpSpPr/>
         <p:nvPr/>
       </p:nvGrpSpPr>
@@ -7310,7 +4666,7 @@
       </p:grpSpPr>
       <p:sp>
         <p:nvSpPr>
-          <p:cNvPr id="154" name=""/>
+          <p:cNvPr id="83" name=""/>
           <p:cNvSpPr/>
           <p:nvPr/>
         </p:nvSpPr>
@@ -7337,7 +4693,7 @@
       </p:sp>
       <p:sp>
         <p:nvSpPr>
-          <p:cNvPr id="155" name=""/>
+          <p:cNvPr id="84" name=""/>
           <p:cNvSpPr/>
           <p:nvPr/>
         </p:nvSpPr>
@@ -7364,7 +4720,7 @@
       </p:sp>
       <p:sp>
         <p:nvSpPr>
-          <p:cNvPr id="156" name="" descr="{&quot;isTemplate&quot;:true,&quot;type&quot;:&quot;text&quot;}"/>
+          <p:cNvPr id="85" name="" descr="{&quot;isTemplate&quot;:true,&quot;type&quot;:&quot;text&quot;}"/>
           <p:cNvSpPr txBox="1"/>
           <p:nvPr/>
         </p:nvSpPr>
@@ -7419,7 +4775,7 @@
       </p:sp>
       <p:sp>
         <p:nvSpPr>
-          <p:cNvPr id="157" name="" descr="{&quot;isTemplate&quot;:true,&quot;type&quot;:&quot;text&quot;}"/>
+          <p:cNvPr id="86" name="" descr="{&quot;isTemplate&quot;:true,&quot;type&quot;:&quot;text&quot;}"/>
           <p:cNvSpPr txBox="1"/>
           <p:nvPr/>
         </p:nvSpPr>
@@ -7456,7 +4812,7 @@
       </p:sp>
       <p:sp>
         <p:nvSpPr>
-          <p:cNvPr id="158" name="" descr="{&quot;isTemplate&quot;:true,&quot;type&quot;:&quot;text&quot;}"/>
+          <p:cNvPr id="87" name="" descr="{&quot;isTemplate&quot;:true,&quot;type&quot;:&quot;text&quot;}"/>
           <p:cNvSpPr txBox="1"/>
           <p:nvPr/>
         </p:nvSpPr>
@@ -7511,7 +4867,7 @@
       </p:sp>
       <p:pic>
         <p:nvPicPr>
-          <p:cNvPr id="159" name=""/>
+          <p:cNvPr id="88" name=""/>
           <p:cNvPicPr>
             <a:picLocks noChangeAspect="1"/>
           </p:cNvPicPr>
@@ -7542,7 +4898,7 @@
       </p:pic>
       <p:sp>
         <p:nvSpPr>
-          <p:cNvPr id="160" name=""/>
+          <p:cNvPr id="89" name=""/>
           <p:cNvSpPr/>
           <p:nvPr/>
         </p:nvSpPr>
@@ -7571,7 +4927,7 @@
       </p:sp>
       <p:sp>
         <p:nvSpPr>
-          <p:cNvPr id="161" name=""/>
+          <p:cNvPr id="90" name=""/>
           <p:cNvSpPr/>
           <p:nvPr/>
         </p:nvSpPr>
@@ -7600,7 +4956,7 @@
       </p:sp>
       <p:sp>
         <p:nvSpPr>
-          <p:cNvPr id="162" name="" descr="{&quot;isTemplate&quot;:true,&quot;type&quot;:&quot;text&quot;}"/>
+          <p:cNvPr id="91" name="" descr="{&quot;isTemplate&quot;:true,&quot;type&quot;:&quot;text&quot;}"/>
           <p:cNvSpPr txBox="1"/>
           <p:nvPr/>
         </p:nvSpPr>
@@ -7635,7 +4991,7 @@
       </p:sp>
       <p:sp>
         <p:nvSpPr>
-          <p:cNvPr id="163" name="" descr="{&quot;isTemplate&quot;:true,&quot;type&quot;:&quot;text&quot;}"/>
+          <p:cNvPr id="92" name="" descr="{&quot;isTemplate&quot;:true,&quot;type&quot;:&quot;text&quot;}"/>
           <p:cNvSpPr txBox="1"/>
           <p:nvPr/>
         </p:nvSpPr>
@@ -7690,7 +5046,7 @@
       </p:sp>
       <p:sp>
         <p:nvSpPr>
-          <p:cNvPr id="164" name="" descr="{&quot;isTemplate&quot;:true,&quot;type&quot;:&quot;text&quot;}"/>
+          <p:cNvPr id="93" name="" descr="{&quot;isTemplate&quot;:true,&quot;type&quot;:&quot;text&quot;}"/>
           <p:cNvSpPr txBox="1"/>
           <p:nvPr/>
         </p:nvSpPr>
@@ -7785,7 +5141,7 @@
       </p:sp>
       <p:sp>
         <p:nvSpPr>
-          <p:cNvPr id="165" name=""/>
+          <p:cNvPr id="94" name=""/>
           <p:cNvSpPr/>
           <p:nvPr/>
         </p:nvSpPr>
@@ -7819,7 +5175,7 @@
       </p:sp>
       <p:sp>
         <p:nvSpPr>
-          <p:cNvPr id="166" name="" descr="{&quot;isTemplate&quot;:true,&quot;type&quot;:&quot;text&quot;}"/>
+          <p:cNvPr id="95" name="" descr="{&quot;isTemplate&quot;:true,&quot;type&quot;:&quot;text&quot;}"/>
           <p:cNvSpPr txBox="1"/>
           <p:nvPr/>
         </p:nvSpPr>
@@ -7864,7 +5220,7 @@
       </p:sp>
       <p:sp>
         <p:nvSpPr>
-          <p:cNvPr id="167" name=""/>
+          <p:cNvPr id="96" name=""/>
           <p:cNvSpPr/>
           <p:nvPr/>
         </p:nvSpPr>
@@ -7893,7 +5249,7 @@
       </p:sp>
       <p:sp>
         <p:nvSpPr>
-          <p:cNvPr id="168" name="" descr="{&quot;isTemplate&quot;:true,&quot;type&quot;:&quot;text&quot;}"/>
+          <p:cNvPr id="97" name="" descr="{&quot;isTemplate&quot;:true,&quot;type&quot;:&quot;text&quot;}"/>
           <p:cNvSpPr txBox="1"/>
           <p:nvPr/>
         </p:nvSpPr>
@@ -7948,7 +5304,7 @@
       </p:sp>
       <p:sp>
         <p:nvSpPr>
-          <p:cNvPr id="169" name="" descr="{&quot;isTemplate&quot;:true,&quot;type&quot;:&quot;text&quot;}"/>
+          <p:cNvPr id="98" name="" descr="{&quot;isTemplate&quot;:true,&quot;type&quot;:&quot;text&quot;}"/>
           <p:cNvSpPr txBox="1"/>
           <p:nvPr/>
         </p:nvSpPr>
@@ -8005,7 +5361,7 @@
       </p:sp>
       <p:sp>
         <p:nvSpPr>
-          <p:cNvPr id="170" name=""/>
+          <p:cNvPr id="99" name=""/>
           <p:cNvSpPr/>
           <p:nvPr/>
         </p:nvSpPr>
@@ -8039,7 +5395,7 @@
       </p:sp>
       <p:sp>
         <p:nvSpPr>
-          <p:cNvPr id="171" name="" descr="{&quot;isTemplate&quot;:true,&quot;type&quot;:&quot;text&quot;}"/>
+          <p:cNvPr id="100" name="" descr="{&quot;isTemplate&quot;:true,&quot;type&quot;:&quot;text&quot;}"/>
           <p:cNvSpPr txBox="1"/>
           <p:nvPr/>
         </p:nvSpPr>
@@ -8084,7 +5440,7 @@
       </p:sp>
       <p:sp>
         <p:nvSpPr>
-          <p:cNvPr id="172" name=""/>
+          <p:cNvPr id="101" name=""/>
           <p:cNvSpPr/>
           <p:nvPr/>
         </p:nvSpPr>
@@ -8113,7 +5469,7 @@
       </p:sp>
       <p:sp>
         <p:nvSpPr>
-          <p:cNvPr id="173" name="" descr="{&quot;isTemplate&quot;:true,&quot;type&quot;:&quot;text&quot;}"/>
+          <p:cNvPr id="102" name="" descr="{&quot;isTemplate&quot;:true,&quot;type&quot;:&quot;text&quot;}"/>
           <p:cNvSpPr txBox="1"/>
           <p:nvPr/>
         </p:nvSpPr>
@@ -8168,7 +5524,7 @@
       </p:sp>
       <p:sp>
         <p:nvSpPr>
-          <p:cNvPr id="174" name="" descr="{&quot;isTemplate&quot;:true,&quot;type&quot;:&quot;text&quot;}"/>
+          <p:cNvPr id="103" name="" descr="{&quot;isTemplate&quot;:true,&quot;type&quot;:&quot;text&quot;}"/>
           <p:cNvSpPr txBox="1"/>
           <p:nvPr/>
         </p:nvSpPr>
@@ -8205,7 +5561,7 @@
       </p:sp>
       <p:sp>
         <p:nvSpPr>
-          <p:cNvPr id="175" name=""/>
+          <p:cNvPr id="104" name=""/>
           <p:cNvSpPr/>
           <p:nvPr/>
         </p:nvSpPr>
@@ -8239,7 +5595,7 @@
       </p:sp>
       <p:sp>
         <p:nvSpPr>
-          <p:cNvPr id="176" name="" descr="{&quot;isTemplate&quot;:true,&quot;type&quot;:&quot;text&quot;}"/>
+          <p:cNvPr id="105" name="" descr="{&quot;isTemplate&quot;:true,&quot;type&quot;:&quot;text&quot;}"/>
           <p:cNvSpPr txBox="1"/>
           <p:nvPr/>
         </p:nvSpPr>
@@ -8284,7 +5640,7 @@
       </p:sp>
       <p:sp>
         <p:nvSpPr>
-          <p:cNvPr id="177" name=""/>
+          <p:cNvPr id="106" name=""/>
           <p:cNvSpPr/>
           <p:nvPr/>
         </p:nvSpPr>
@@ -8313,7 +5669,7 @@
       </p:sp>
       <p:sp>
         <p:nvSpPr>
-          <p:cNvPr id="178" name="" descr="{&quot;isTemplate&quot;:true,&quot;type&quot;:&quot;text&quot;}"/>
+          <p:cNvPr id="107" name="" descr="{&quot;isTemplate&quot;:true,&quot;type&quot;:&quot;text&quot;}"/>
           <p:cNvSpPr txBox="1"/>
           <p:nvPr/>
         </p:nvSpPr>
@@ -8368,7 +5724,7 @@
       </p:sp>
       <p:sp>
         <p:nvSpPr>
-          <p:cNvPr id="179" name="" descr="{&quot;isTemplate&quot;:true,&quot;type&quot;:&quot;text&quot;}"/>
+          <p:cNvPr id="108" name="" descr="{&quot;isTemplate&quot;:true,&quot;type&quot;:&quot;text&quot;}"/>
           <p:cNvSpPr txBox="1"/>
           <p:nvPr/>
         </p:nvSpPr>
@@ -8403,7 +5759,7 @@
       </p:sp>
       <p:sp>
         <p:nvSpPr>
-          <p:cNvPr id="180" name="" descr="{&quot;isTemplate&quot;:true,&quot;type&quot;:&quot;text&quot;}"/>
+          <p:cNvPr id="109" name="" descr="{&quot;isTemplate&quot;:true,&quot;type&quot;:&quot;text&quot;}"/>
           <p:cNvSpPr txBox="1"/>
           <p:nvPr/>
         </p:nvSpPr>
@@ -8438,7 +5794,7 @@
       </p:sp>
       <p:sp>
         <p:nvSpPr>
-          <p:cNvPr id="181" name="" descr="{&quot;isTemplate&quot;:true,&quot;type&quot;:&quot;text&quot;}"/>
+          <p:cNvPr id="110" name="" descr="{&quot;isTemplate&quot;:true,&quot;type&quot;:&quot;text&quot;}"/>
           <p:cNvSpPr txBox="1"/>
           <p:nvPr/>
         </p:nvSpPr>
@@ -8465,7 +5821,7 @@
                 <a:latin typeface="Microsoft YaHei"/>
                 <a:ea typeface="Microsoft YaHei"/>
               </a:rPr>
-              <a:t>15 / 17</a:t>
+              <a:t>13 / 15</a:t>
             </a:r>
             <a:endParaRPr/>
           </a:p>
@@ -8476,12 +5832,12 @@
 </p:sld>
 </file>
 
-<file path=ppt/slides/slide16.xml><?xml version="1.0" encoding="utf-8"?>
+<file path=ppt/slides/slide14.xml><?xml version="1.0" encoding="utf-8"?>
 <p:sld xmlns:p="http://schemas.openxmlformats.org/presentationml/2006/main" xmlns:a="http://schemas.openxmlformats.org/drawingml/2006/main">
   <p:cSld>
     <p:spTree>
       <p:nvGrpSpPr>
-        <p:cNvPr id="182" name=""/>
+        <p:cNvPr id="111" name=""/>
         <p:cNvGrpSpPr/>
         <p:nvPr/>
       </p:nvGrpSpPr>
@@ -8495,7 +5851,7 @@
       </p:grpSpPr>
       <p:sp>
         <p:nvSpPr>
-          <p:cNvPr id="183" name=""/>
+          <p:cNvPr id="112" name=""/>
           <p:cNvSpPr/>
           <p:nvPr/>
         </p:nvSpPr>
@@ -8522,7 +5878,7 @@
       </p:sp>
       <p:sp>
         <p:nvSpPr>
-          <p:cNvPr id="184" name=""/>
+          <p:cNvPr id="113" name=""/>
           <p:cNvSpPr/>
           <p:nvPr/>
         </p:nvSpPr>
@@ -8549,7 +5905,7 @@
       </p:sp>
       <p:sp>
         <p:nvSpPr>
-          <p:cNvPr id="185" name="" descr="{&quot;isTemplate&quot;:true,&quot;type&quot;:&quot;text&quot;}"/>
+          <p:cNvPr id="114" name="" descr="{&quot;isTemplate&quot;:true,&quot;type&quot;:&quot;text&quot;}"/>
           <p:cNvSpPr txBox="1"/>
           <p:nvPr/>
         </p:nvSpPr>
@@ -8584,7 +5940,7 @@
       </p:sp>
       <p:sp>
         <p:nvSpPr>
-          <p:cNvPr id="186" name="" descr="{&quot;isTemplate&quot;:true,&quot;type&quot;:&quot;text&quot;}"/>
+          <p:cNvPr id="115" name="" descr="{&quot;isTemplate&quot;:true,&quot;type&quot;:&quot;text&quot;}"/>
           <p:cNvSpPr txBox="1"/>
           <p:nvPr/>
         </p:nvSpPr>
@@ -8619,7 +5975,7 @@
       </p:sp>
       <p:sp>
         <p:nvSpPr>
-          <p:cNvPr id="187" name="" descr="{&quot;isTemplate&quot;:true,&quot;type&quot;:&quot;text&quot;}"/>
+          <p:cNvPr id="116" name="" descr="{&quot;isTemplate&quot;:true,&quot;type&quot;:&quot;text&quot;}"/>
           <p:cNvSpPr txBox="1"/>
           <p:nvPr/>
         </p:nvSpPr>
@@ -8674,7 +6030,7 @@
       </p:sp>
       <p:sp>
         <p:nvSpPr>
-          <p:cNvPr id="188" name=""/>
+          <p:cNvPr id="117" name=""/>
           <p:cNvSpPr/>
           <p:nvPr/>
         </p:nvSpPr>
@@ -8703,7 +6059,7 @@
       </p:sp>
       <p:sp>
         <p:nvSpPr>
-          <p:cNvPr id="189" name="" descr="{&quot;isTemplate&quot;:true,&quot;type&quot;:&quot;text&quot;}"/>
+          <p:cNvPr id="118" name="" descr="{&quot;isTemplate&quot;:true,&quot;type&quot;:&quot;text&quot;}"/>
           <p:cNvSpPr txBox="1"/>
           <p:nvPr/>
         </p:nvSpPr>
@@ -8738,7 +6094,7 @@
       </p:sp>
       <p:sp>
         <p:nvSpPr>
-          <p:cNvPr id="190" name="" descr="{&quot;isTemplate&quot;:true,&quot;type&quot;:&quot;text&quot;}"/>
+          <p:cNvPr id="119" name="" descr="{&quot;isTemplate&quot;:true,&quot;type&quot;:&quot;text&quot;}"/>
           <p:cNvSpPr txBox="1"/>
           <p:nvPr/>
         </p:nvSpPr>
@@ -8773,7 +6129,7 @@
       </p:sp>
       <p:sp>
         <p:nvSpPr>
-          <p:cNvPr id="191" name=""/>
+          <p:cNvPr id="120" name=""/>
           <p:cNvSpPr/>
           <p:nvPr/>
         </p:nvSpPr>
@@ -8807,7 +6163,7 @@
       </p:sp>
       <p:sp>
         <p:nvSpPr>
-          <p:cNvPr id="192" name=""/>
+          <p:cNvPr id="121" name=""/>
           <p:cNvSpPr/>
           <p:nvPr/>
         </p:nvSpPr>
@@ -8836,7 +6192,7 @@
       </p:sp>
       <p:sp>
         <p:nvSpPr>
-          <p:cNvPr id="193" name="" descr="{&quot;isTemplate&quot;:true,&quot;type&quot;:&quot;text&quot;}"/>
+          <p:cNvPr id="122" name="" descr="{&quot;isTemplate&quot;:true,&quot;type&quot;:&quot;text&quot;}"/>
           <p:cNvSpPr txBox="1"/>
           <p:nvPr/>
         </p:nvSpPr>
@@ -8871,7 +6227,7 @@
       </p:sp>
       <p:sp>
         <p:nvSpPr>
-          <p:cNvPr id="194" name="" descr="{&quot;isTemplate&quot;:true,&quot;type&quot;:&quot;text&quot;}"/>
+          <p:cNvPr id="123" name="" descr="{&quot;isTemplate&quot;:true,&quot;type&quot;:&quot;text&quot;}"/>
           <p:cNvSpPr txBox="1"/>
           <p:nvPr/>
         </p:nvSpPr>
@@ -8906,7 +6262,7 @@
       </p:sp>
       <p:sp>
         <p:nvSpPr>
-          <p:cNvPr id="195" name="" descr="{&quot;isTemplate&quot;:true,&quot;type&quot;:&quot;text&quot;}"/>
+          <p:cNvPr id="124" name="" descr="{&quot;isTemplate&quot;:true,&quot;type&quot;:&quot;text&quot;}"/>
           <p:cNvSpPr txBox="1"/>
           <p:nvPr/>
         </p:nvSpPr>
@@ -8961,7 +6317,7 @@
       </p:sp>
       <p:sp>
         <p:nvSpPr>
-          <p:cNvPr id="196" name=""/>
+          <p:cNvPr id="125" name=""/>
           <p:cNvSpPr/>
           <p:nvPr/>
         </p:nvSpPr>
@@ -8995,7 +6351,7 @@
       </p:sp>
       <p:sp>
         <p:nvSpPr>
-          <p:cNvPr id="197" name=""/>
+          <p:cNvPr id="126" name=""/>
           <p:cNvSpPr/>
           <p:nvPr/>
         </p:nvSpPr>
@@ -9024,7 +6380,7 @@
       </p:sp>
       <p:sp>
         <p:nvSpPr>
-          <p:cNvPr id="198" name="" descr="{&quot;isTemplate&quot;:true,&quot;type&quot;:&quot;text&quot;}"/>
+          <p:cNvPr id="127" name="" descr="{&quot;isTemplate&quot;:true,&quot;type&quot;:&quot;text&quot;}"/>
           <p:cNvSpPr txBox="1"/>
           <p:nvPr/>
         </p:nvSpPr>
@@ -9059,7 +6415,7 @@
       </p:sp>
       <p:sp>
         <p:nvSpPr>
-          <p:cNvPr id="199" name="" descr="{&quot;isTemplate&quot;:true,&quot;type&quot;:&quot;text&quot;}"/>
+          <p:cNvPr id="128" name="" descr="{&quot;isTemplate&quot;:true,&quot;type&quot;:&quot;text&quot;}"/>
           <p:cNvSpPr txBox="1"/>
           <p:nvPr/>
         </p:nvSpPr>
@@ -9094,7 +6450,7 @@
       </p:sp>
       <p:sp>
         <p:nvSpPr>
-          <p:cNvPr id="200" name="" descr="{&quot;isTemplate&quot;:true,&quot;type&quot;:&quot;text&quot;}"/>
+          <p:cNvPr id="129" name="" descr="{&quot;isTemplate&quot;:true,&quot;type&quot;:&quot;text&quot;}"/>
           <p:cNvSpPr txBox="1"/>
           <p:nvPr/>
         </p:nvSpPr>
@@ -9129,7 +6485,7 @@
       </p:sp>
       <p:sp>
         <p:nvSpPr>
-          <p:cNvPr id="201" name=""/>
+          <p:cNvPr id="130" name=""/>
           <p:cNvSpPr/>
           <p:nvPr/>
         </p:nvSpPr>
@@ -9163,7 +6519,7 @@
       </p:sp>
       <p:sp>
         <p:nvSpPr>
-          <p:cNvPr id="202" name=""/>
+          <p:cNvPr id="131" name=""/>
           <p:cNvSpPr/>
           <p:nvPr/>
         </p:nvSpPr>
@@ -9192,7 +6548,7 @@
       </p:sp>
       <p:sp>
         <p:nvSpPr>
-          <p:cNvPr id="203" name="" descr="{&quot;isTemplate&quot;:true,&quot;type&quot;:&quot;text&quot;}"/>
+          <p:cNvPr id="132" name="" descr="{&quot;isTemplate&quot;:true,&quot;type&quot;:&quot;text&quot;}"/>
           <p:cNvSpPr txBox="1"/>
           <p:nvPr/>
         </p:nvSpPr>
@@ -9227,7 +6583,7 @@
       </p:sp>
       <p:sp>
         <p:nvSpPr>
-          <p:cNvPr id="204" name="" descr="{&quot;isTemplate&quot;:true,&quot;type&quot;:&quot;text&quot;}"/>
+          <p:cNvPr id="133" name="" descr="{&quot;isTemplate&quot;:true,&quot;type&quot;:&quot;text&quot;}"/>
           <p:cNvSpPr txBox="1"/>
           <p:nvPr/>
         </p:nvSpPr>
@@ -9262,7 +6618,7 @@
       </p:sp>
       <p:sp>
         <p:nvSpPr>
-          <p:cNvPr id="205" name="" descr="{&quot;isTemplate&quot;:true,&quot;type&quot;:&quot;text&quot;}"/>
+          <p:cNvPr id="134" name="" descr="{&quot;isTemplate&quot;:true,&quot;type&quot;:&quot;text&quot;}"/>
           <p:cNvSpPr txBox="1"/>
           <p:nvPr/>
         </p:nvSpPr>
@@ -9317,7 +6673,7 @@
       </p:sp>
       <p:sp>
         <p:nvSpPr>
-          <p:cNvPr id="206" name=""/>
+          <p:cNvPr id="135" name=""/>
           <p:cNvSpPr/>
           <p:nvPr/>
         </p:nvSpPr>
@@ -9351,7 +6707,7 @@
       </p:sp>
       <p:sp>
         <p:nvSpPr>
-          <p:cNvPr id="207" name=""/>
+          <p:cNvPr id="136" name=""/>
           <p:cNvSpPr/>
           <p:nvPr/>
         </p:nvSpPr>
@@ -9380,7 +6736,7 @@
       </p:sp>
       <p:sp>
         <p:nvSpPr>
-          <p:cNvPr id="208" name="" descr="{&quot;isTemplate&quot;:true,&quot;type&quot;:&quot;text&quot;}"/>
+          <p:cNvPr id="137" name="" descr="{&quot;isTemplate&quot;:true,&quot;type&quot;:&quot;text&quot;}"/>
           <p:cNvSpPr txBox="1"/>
           <p:nvPr/>
         </p:nvSpPr>
@@ -9415,7 +6771,7 @@
       </p:sp>
       <p:sp>
         <p:nvSpPr>
-          <p:cNvPr id="209" name="" descr="{&quot;isTemplate&quot;:true,&quot;type&quot;:&quot;text&quot;}"/>
+          <p:cNvPr id="138" name="" descr="{&quot;isTemplate&quot;:true,&quot;type&quot;:&quot;text&quot;}"/>
           <p:cNvSpPr txBox="1"/>
           <p:nvPr/>
         </p:nvSpPr>
@@ -9450,7 +6806,7 @@
       </p:sp>
       <p:sp>
         <p:nvSpPr>
-          <p:cNvPr id="210" name="" descr="{&quot;isTemplate&quot;:true,&quot;type&quot;:&quot;text&quot;}"/>
+          <p:cNvPr id="139" name="" descr="{&quot;isTemplate&quot;:true,&quot;type&quot;:&quot;text&quot;}"/>
           <p:cNvSpPr txBox="1"/>
           <p:nvPr/>
         </p:nvSpPr>
@@ -9485,7 +6841,7 @@
       </p:sp>
       <p:sp>
         <p:nvSpPr>
-          <p:cNvPr id="211" name=""/>
+          <p:cNvPr id="140" name=""/>
           <p:cNvSpPr/>
           <p:nvPr/>
         </p:nvSpPr>
@@ -9519,7 +6875,7 @@
       </p:sp>
       <p:sp>
         <p:nvSpPr>
-          <p:cNvPr id="212" name=""/>
+          <p:cNvPr id="141" name=""/>
           <p:cNvSpPr/>
           <p:nvPr/>
         </p:nvSpPr>
@@ -9548,7 +6904,7 @@
       </p:sp>
       <p:sp>
         <p:nvSpPr>
-          <p:cNvPr id="213" name="" descr="{&quot;isTemplate&quot;:true,&quot;type&quot;:&quot;text&quot;}"/>
+          <p:cNvPr id="142" name="" descr="{&quot;isTemplate&quot;:true,&quot;type&quot;:&quot;text&quot;}"/>
           <p:cNvSpPr txBox="1"/>
           <p:nvPr/>
         </p:nvSpPr>
@@ -9583,7 +6939,7 @@
       </p:sp>
       <p:sp>
         <p:nvSpPr>
-          <p:cNvPr id="214" name="" descr="{&quot;isTemplate&quot;:true,&quot;type&quot;:&quot;text&quot;}"/>
+          <p:cNvPr id="143" name="" descr="{&quot;isTemplate&quot;:true,&quot;type&quot;:&quot;text&quot;}"/>
           <p:cNvSpPr txBox="1"/>
           <p:nvPr/>
         </p:nvSpPr>
@@ -9618,7 +6974,7 @@
       </p:sp>
       <p:sp>
         <p:nvSpPr>
-          <p:cNvPr id="215" name="" descr="{&quot;isTemplate&quot;:true,&quot;type&quot;:&quot;text&quot;}"/>
+          <p:cNvPr id="144" name="" descr="{&quot;isTemplate&quot;:true,&quot;type&quot;:&quot;text&quot;}"/>
           <p:cNvSpPr txBox="1"/>
           <p:nvPr/>
         </p:nvSpPr>
@@ -9653,7 +7009,7 @@
       </p:sp>
       <p:sp>
         <p:nvSpPr>
-          <p:cNvPr id="216" name=""/>
+          <p:cNvPr id="145" name=""/>
           <p:cNvSpPr/>
           <p:nvPr/>
         </p:nvSpPr>
@@ -9682,7 +7038,7 @@
       </p:sp>
       <p:sp>
         <p:nvSpPr>
-          <p:cNvPr id="217" name=""/>
+          <p:cNvPr id="146" name=""/>
           <p:cNvSpPr/>
           <p:nvPr/>
         </p:nvSpPr>
@@ -9711,7 +7067,7 @@
       </p:sp>
       <p:sp>
         <p:nvSpPr>
-          <p:cNvPr id="218" name="" descr="{&quot;isTemplate&quot;:true,&quot;type&quot;:&quot;text&quot;}"/>
+          <p:cNvPr id="147" name="" descr="{&quot;isTemplate&quot;:true,&quot;type&quot;:&quot;text&quot;}"/>
           <p:cNvSpPr txBox="1"/>
           <p:nvPr/>
         </p:nvSpPr>
@@ -9749,12 +7105,12 @@
 </p:sld>
 </file>
 
-<file path=ppt/slides/slide17.xml><?xml version="1.0" encoding="utf-8"?>
+<file path=ppt/slides/slide15.xml><?xml version="1.0" encoding="utf-8"?>
 <p:sld xmlns:p="http://schemas.openxmlformats.org/presentationml/2006/main" xmlns:a="http://schemas.openxmlformats.org/drawingml/2006/main" xmlns:asvg="http://schemas.microsoft.com/office/drawing/2016/SVG/main" xmlns:r="http://schemas.openxmlformats.org/officeDocument/2006/relationships" xmlns:mc="http://schemas.openxmlformats.org/markup-compatibility/2006" mc:Ignorable="asvg">
   <p:cSld>
     <p:spTree>
       <p:nvGrpSpPr>
-        <p:cNvPr id="219" name=""/>
+        <p:cNvPr id="148" name=""/>
         <p:cNvGrpSpPr/>
         <p:nvPr/>
       </p:nvGrpSpPr>
@@ -9768,7 +7124,7 @@
       </p:grpSpPr>
       <p:sp>
         <p:nvSpPr>
-          <p:cNvPr id="220" name=""/>
+          <p:cNvPr id="149" name=""/>
           <p:cNvSpPr/>
           <p:nvPr/>
         </p:nvSpPr>
@@ -9795,7 +7151,7 @@
       </p:sp>
       <p:sp>
         <p:nvSpPr>
-          <p:cNvPr id="221" name=""/>
+          <p:cNvPr id="150" name=""/>
           <p:cNvSpPr/>
           <p:nvPr/>
         </p:nvSpPr>
@@ -9824,7 +7180,7 @@
       </p:sp>
       <p:sp>
         <p:nvSpPr>
-          <p:cNvPr id="222" name="" descr="{&quot;isTemplate&quot;:true,&quot;type&quot;:&quot;text&quot;}"/>
+          <p:cNvPr id="151" name="" descr="{&quot;isTemplate&quot;:true,&quot;type&quot;:&quot;text&quot;}"/>
           <p:cNvSpPr txBox="1"/>
           <p:nvPr/>
         </p:nvSpPr>
@@ -9859,7 +7215,7 @@
       </p:sp>
       <p:sp>
         <p:nvSpPr>
-          <p:cNvPr id="223" name="" descr="{&quot;isTemplate&quot;:true,&quot;type&quot;:&quot;text&quot;}"/>
+          <p:cNvPr id="152" name="" descr="{&quot;isTemplate&quot;:true,&quot;type&quot;:&quot;text&quot;}"/>
           <p:cNvSpPr txBox="1"/>
           <p:nvPr/>
         </p:nvSpPr>
@@ -9894,7 +7250,7 @@
       </p:sp>
       <p:sp>
         <p:nvSpPr>
-          <p:cNvPr id="224" name="" descr="{&quot;isTemplate&quot;:true,&quot;type&quot;:&quot;text&quot;}"/>
+          <p:cNvPr id="153" name="" descr="{&quot;isTemplate&quot;:true,&quot;type&quot;:&quot;text&quot;}"/>
           <p:cNvSpPr txBox="1"/>
           <p:nvPr/>
         </p:nvSpPr>
@@ -9989,7 +7345,7 @@
       </p:sp>
       <p:sp>
         <p:nvSpPr>
-          <p:cNvPr id="225" name=""/>
+          <p:cNvPr id="154" name=""/>
           <p:cNvSpPr/>
           <p:nvPr/>
         </p:nvSpPr>
@@ -10018,7 +7374,7 @@
       </p:sp>
       <p:sp>
         <p:nvSpPr>
-          <p:cNvPr id="226" name="" descr="{&quot;isTemplate&quot;:true,&quot;type&quot;:&quot;text&quot;}"/>
+          <p:cNvPr id="155" name="" descr="{&quot;isTemplate&quot;:true,&quot;type&quot;:&quot;text&quot;}"/>
           <p:cNvSpPr txBox="1"/>
           <p:nvPr/>
         </p:nvSpPr>
@@ -10073,7 +7429,7 @@
       </p:sp>
       <p:pic>
         <p:nvPicPr>
-          <p:cNvPr id="227" name=""/>
+          <p:cNvPr id="156" name=""/>
           <p:cNvPicPr>
             <a:picLocks noChangeAspect="1"/>
           </p:cNvPicPr>
@@ -10105,7 +7461,7 @@
       </p:pic>
       <p:sp>
         <p:nvSpPr>
-          <p:cNvPr id="228" name="" descr="{&quot;isTemplate&quot;:true,&quot;type&quot;:&quot;text&quot;}"/>
+          <p:cNvPr id="157" name="" descr="{&quot;isTemplate&quot;:true,&quot;type&quot;:&quot;text&quot;}"/>
           <p:cNvSpPr txBox="1"/>
           <p:nvPr/>
         </p:nvSpPr>
@@ -10160,7 +7516,7 @@
       </p:sp>
       <p:sp>
         <p:nvSpPr>
-          <p:cNvPr id="229" name="" descr="{&quot;isTemplate&quot;:true,&quot;type&quot;:&quot;text&quot;}"/>
+          <p:cNvPr id="158" name="" descr="{&quot;isTemplate&quot;:true,&quot;type&quot;:&quot;text&quot;}"/>
           <p:cNvSpPr txBox="1"/>
           <p:nvPr/>
         </p:nvSpPr>
@@ -10253,7 +7609,7 @@
   <p:cSld>
     <p:spTree>
       <p:nvGrpSpPr>
-        <p:cNvPr id="230" name=""/>
+        <p:cNvPr id="159" name=""/>
         <p:cNvGrpSpPr/>
         <p:nvPr/>
       </p:nvGrpSpPr>
@@ -10267,7 +7623,7 @@
       </p:grpSpPr>
       <p:sp>
         <p:nvSpPr>
-          <p:cNvPr id="231" name=""/>
+          <p:cNvPr id="160" name=""/>
           <p:cNvSpPr/>
           <p:nvPr/>
         </p:nvSpPr>
@@ -10294,7 +7650,7 @@
       </p:sp>
       <p:sp>
         <p:nvSpPr>
-          <p:cNvPr id="232" name=""/>
+          <p:cNvPr id="161" name=""/>
           <p:cNvSpPr/>
           <p:nvPr/>
         </p:nvSpPr>
@@ -10321,7 +7677,7 @@
       </p:sp>
       <p:sp>
         <p:nvSpPr>
-          <p:cNvPr id="233" name=""/>
+          <p:cNvPr id="162" name=""/>
           <p:cNvSpPr/>
           <p:nvPr/>
         </p:nvSpPr>
@@ -10350,7 +7706,7 @@
       </p:sp>
       <p:sp>
         <p:nvSpPr>
-          <p:cNvPr id="234" name="" descr="{&quot;isTemplate&quot;:true,&quot;type&quot;:&quot;text&quot;}"/>
+          <p:cNvPr id="163" name="" descr="{&quot;isTemplate&quot;:true,&quot;type&quot;:&quot;text&quot;}"/>
           <p:cNvSpPr txBox="1"/>
           <p:nvPr/>
         </p:nvSpPr>
@@ -10385,7 +7741,7 @@
       </p:sp>
       <p:sp>
         <p:nvSpPr>
-          <p:cNvPr id="235" name="" descr="{&quot;isTemplate&quot;:true,&quot;type&quot;:&quot;text&quot;}"/>
+          <p:cNvPr id="164" name="" descr="{&quot;isTemplate&quot;:true,&quot;type&quot;:&quot;text&quot;}"/>
           <p:cNvSpPr txBox="1"/>
           <p:nvPr/>
         </p:nvSpPr>
@@ -10420,7 +7776,7 @@
       </p:sp>
       <p:sp>
         <p:nvSpPr>
-          <p:cNvPr id="236" name=""/>
+          <p:cNvPr id="165" name=""/>
           <p:cNvSpPr/>
           <p:nvPr/>
         </p:nvSpPr>
@@ -10463,7 +7819,7 @@
       </p:sp>
       <p:sp>
         <p:nvSpPr>
-          <p:cNvPr id="237" name=""/>
+          <p:cNvPr id="166" name=""/>
           <p:cNvSpPr/>
           <p:nvPr/>
         </p:nvSpPr>
@@ -10492,7 +7848,7 @@
       </p:sp>
       <p:sp>
         <p:nvSpPr>
-          <p:cNvPr id="238" name="" descr="{&quot;isTemplate&quot;:true,&quot;type&quot;:&quot;text&quot;}"/>
+          <p:cNvPr id="167" name="" descr="{&quot;isTemplate&quot;:true,&quot;type&quot;:&quot;text&quot;}"/>
           <p:cNvSpPr txBox="1"/>
           <p:nvPr/>
         </p:nvSpPr>
@@ -10527,7 +7883,7 @@
       </p:sp>
       <p:sp>
         <p:nvSpPr>
-          <p:cNvPr id="239" name="" descr="{&quot;isTemplate&quot;:true,&quot;type&quot;:&quot;text&quot;}"/>
+          <p:cNvPr id="168" name="" descr="{&quot;isTemplate&quot;:true,&quot;type&quot;:&quot;text&quot;}"/>
           <p:cNvSpPr txBox="1"/>
           <p:nvPr/>
         </p:nvSpPr>
@@ -10562,7 +7918,7 @@
       </p:sp>
       <p:sp>
         <p:nvSpPr>
-          <p:cNvPr id="240" name="" descr="{&quot;isTemplate&quot;:true,&quot;type&quot;:&quot;text&quot;}"/>
+          <p:cNvPr id="169" name="" descr="{&quot;isTemplate&quot;:true,&quot;type&quot;:&quot;text&quot;}"/>
           <p:cNvSpPr txBox="1"/>
           <p:nvPr/>
         </p:nvSpPr>
@@ -10617,7 +7973,7 @@
       </p:sp>
       <p:sp>
         <p:nvSpPr>
-          <p:cNvPr id="241" name=""/>
+          <p:cNvPr id="170" name=""/>
           <p:cNvSpPr/>
           <p:nvPr/>
         </p:nvSpPr>
@@ -10660,7 +8016,7 @@
       </p:sp>
       <p:sp>
         <p:nvSpPr>
-          <p:cNvPr id="242" name=""/>
+          <p:cNvPr id="171" name=""/>
           <p:cNvSpPr/>
           <p:nvPr/>
         </p:nvSpPr>
@@ -10689,7 +8045,7 @@
       </p:sp>
       <p:sp>
         <p:nvSpPr>
-          <p:cNvPr id="243" name="" descr="{&quot;isTemplate&quot;:true,&quot;type&quot;:&quot;text&quot;}"/>
+          <p:cNvPr id="172" name="" descr="{&quot;isTemplate&quot;:true,&quot;type&quot;:&quot;text&quot;}"/>
           <p:cNvSpPr txBox="1"/>
           <p:nvPr/>
         </p:nvSpPr>
@@ -10724,7 +8080,7 @@
       </p:sp>
       <p:sp>
         <p:nvSpPr>
-          <p:cNvPr id="244" name="" descr="{&quot;isTemplate&quot;:true,&quot;type&quot;:&quot;text&quot;}"/>
+          <p:cNvPr id="173" name="" descr="{&quot;isTemplate&quot;:true,&quot;type&quot;:&quot;text&quot;}"/>
           <p:cNvSpPr txBox="1"/>
           <p:nvPr/>
         </p:nvSpPr>
@@ -10759,7 +8115,7 @@
       </p:sp>
       <p:sp>
         <p:nvSpPr>
-          <p:cNvPr id="245" name="" descr="{&quot;isTemplate&quot;:true,&quot;type&quot;:&quot;text&quot;}"/>
+          <p:cNvPr id="174" name="" descr="{&quot;isTemplate&quot;:true,&quot;type&quot;:&quot;text&quot;}"/>
           <p:cNvSpPr txBox="1"/>
           <p:nvPr/>
         </p:nvSpPr>
@@ -10814,7 +8170,7 @@
       </p:sp>
       <p:sp>
         <p:nvSpPr>
-          <p:cNvPr id="246" name=""/>
+          <p:cNvPr id="175" name=""/>
           <p:cNvSpPr/>
           <p:nvPr/>
         </p:nvSpPr>
@@ -10857,7 +8213,7 @@
       </p:sp>
       <p:sp>
         <p:nvSpPr>
-          <p:cNvPr id="247" name=""/>
+          <p:cNvPr id="176" name=""/>
           <p:cNvSpPr/>
           <p:nvPr/>
         </p:nvSpPr>
@@ -10886,7 +8242,7 @@
       </p:sp>
       <p:sp>
         <p:nvSpPr>
-          <p:cNvPr id="248" name="" descr="{&quot;isTemplate&quot;:true,&quot;type&quot;:&quot;text&quot;}"/>
+          <p:cNvPr id="177" name="" descr="{&quot;isTemplate&quot;:true,&quot;type&quot;:&quot;text&quot;}"/>
           <p:cNvSpPr txBox="1"/>
           <p:nvPr/>
         </p:nvSpPr>
@@ -10921,7 +8277,7 @@
       </p:sp>
       <p:sp>
         <p:nvSpPr>
-          <p:cNvPr id="249" name="" descr="{&quot;isTemplate&quot;:true,&quot;type&quot;:&quot;text&quot;}"/>
+          <p:cNvPr id="178" name="" descr="{&quot;isTemplate&quot;:true,&quot;type&quot;:&quot;text&quot;}"/>
           <p:cNvSpPr txBox="1"/>
           <p:nvPr/>
         </p:nvSpPr>
@@ -10956,7 +8312,7 @@
       </p:sp>
       <p:sp>
         <p:nvSpPr>
-          <p:cNvPr id="250" name="" descr="{&quot;isTemplate&quot;:true,&quot;type&quot;:&quot;text&quot;}"/>
+          <p:cNvPr id="179" name="" descr="{&quot;isTemplate&quot;:true,&quot;type&quot;:&quot;text&quot;}"/>
           <p:cNvSpPr txBox="1"/>
           <p:nvPr/>
         </p:nvSpPr>
@@ -11031,7 +8387,7 @@
       </p:sp>
       <p:sp>
         <p:nvSpPr>
-          <p:cNvPr id="251" name=""/>
+          <p:cNvPr id="180" name=""/>
           <p:cNvSpPr/>
           <p:nvPr/>
         </p:nvSpPr>
@@ -11074,7 +8430,7 @@
       </p:sp>
       <p:sp>
         <p:nvSpPr>
-          <p:cNvPr id="252" name=""/>
+          <p:cNvPr id="181" name=""/>
           <p:cNvSpPr/>
           <p:nvPr/>
         </p:nvSpPr>
@@ -11103,7 +8459,7 @@
       </p:sp>
       <p:sp>
         <p:nvSpPr>
-          <p:cNvPr id="253" name="" descr="{&quot;isTemplate&quot;:true,&quot;type&quot;:&quot;text&quot;}"/>
+          <p:cNvPr id="182" name="" descr="{&quot;isTemplate&quot;:true,&quot;type&quot;:&quot;text&quot;}"/>
           <p:cNvSpPr txBox="1"/>
           <p:nvPr/>
         </p:nvSpPr>
@@ -11138,7 +8494,7 @@
       </p:sp>
       <p:sp>
         <p:nvSpPr>
-          <p:cNvPr id="254" name="" descr="{&quot;isTemplate&quot;:true,&quot;type&quot;:&quot;text&quot;}"/>
+          <p:cNvPr id="183" name="" descr="{&quot;isTemplate&quot;:true,&quot;type&quot;:&quot;text&quot;}"/>
           <p:cNvSpPr txBox="1"/>
           <p:nvPr/>
         </p:nvSpPr>
@@ -11173,7 +8529,7 @@
       </p:sp>
       <p:sp>
         <p:nvSpPr>
-          <p:cNvPr id="255" name="" descr="{&quot;isTemplate&quot;:true,&quot;type&quot;:&quot;text&quot;}"/>
+          <p:cNvPr id="184" name="" descr="{&quot;isTemplate&quot;:true,&quot;type&quot;:&quot;text&quot;}"/>
           <p:cNvSpPr txBox="1"/>
           <p:nvPr/>
         </p:nvSpPr>
@@ -11248,7 +8604,7 @@
       </p:sp>
       <p:sp>
         <p:nvSpPr>
-          <p:cNvPr id="256" name=""/>
+          <p:cNvPr id="185" name=""/>
           <p:cNvSpPr/>
           <p:nvPr/>
         </p:nvSpPr>
@@ -11291,7 +8647,7 @@
       </p:sp>
       <p:sp>
         <p:nvSpPr>
-          <p:cNvPr id="257" name=""/>
+          <p:cNvPr id="186" name=""/>
           <p:cNvSpPr/>
           <p:nvPr/>
         </p:nvSpPr>
@@ -11320,7 +8676,7 @@
       </p:sp>
       <p:sp>
         <p:nvSpPr>
-          <p:cNvPr id="258" name="" descr="{&quot;isTemplate&quot;:true,&quot;type&quot;:&quot;text&quot;}"/>
+          <p:cNvPr id="187" name="" descr="{&quot;isTemplate&quot;:true,&quot;type&quot;:&quot;text&quot;}"/>
           <p:cNvSpPr txBox="1"/>
           <p:nvPr/>
         </p:nvSpPr>
@@ -11355,7 +8711,7 @@
       </p:sp>
       <p:sp>
         <p:nvSpPr>
-          <p:cNvPr id="259" name="" descr="{&quot;isTemplate&quot;:true,&quot;type&quot;:&quot;text&quot;}"/>
+          <p:cNvPr id="188" name="" descr="{&quot;isTemplate&quot;:true,&quot;type&quot;:&quot;text&quot;}"/>
           <p:cNvSpPr txBox="1"/>
           <p:nvPr/>
         </p:nvSpPr>
@@ -11390,7 +8746,7 @@
       </p:sp>
       <p:sp>
         <p:nvSpPr>
-          <p:cNvPr id="260" name="" descr="{&quot;isTemplate&quot;:true,&quot;type&quot;:&quot;text&quot;}"/>
+          <p:cNvPr id="189" name="" descr="{&quot;isTemplate&quot;:true,&quot;type&quot;:&quot;text&quot;}"/>
           <p:cNvSpPr txBox="1"/>
           <p:nvPr/>
         </p:nvSpPr>
@@ -11493,7 +8849,7 @@
   <p:cSld>
     <p:spTree>
       <p:nvGrpSpPr>
-        <p:cNvPr id="261" name=""/>
+        <p:cNvPr id="190" name=""/>
         <p:cNvGrpSpPr/>
         <p:nvPr/>
       </p:nvGrpSpPr>
@@ -11507,7 +8863,7 @@
       </p:grpSpPr>
       <p:sp>
         <p:nvSpPr>
-          <p:cNvPr id="262" name=""/>
+          <p:cNvPr id="191" name=""/>
           <p:cNvSpPr/>
           <p:nvPr/>
         </p:nvSpPr>
@@ -11534,7 +8890,7 @@
       </p:sp>
       <p:sp>
         <p:nvSpPr>
-          <p:cNvPr id="263" name=""/>
+          <p:cNvPr id="192" name=""/>
           <p:cNvSpPr/>
           <p:nvPr/>
         </p:nvSpPr>
@@ -11561,7 +8917,7 @@
       </p:sp>
       <p:sp>
         <p:nvSpPr>
-          <p:cNvPr id="264" name="" descr="{&quot;isTemplate&quot;:true,&quot;type&quot;:&quot;text&quot;}"/>
+          <p:cNvPr id="193" name="" descr="{&quot;isTemplate&quot;:true,&quot;type&quot;:&quot;text&quot;}"/>
           <p:cNvSpPr txBox="1"/>
           <p:nvPr/>
         </p:nvSpPr>
@@ -11596,7 +8952,7 @@
       </p:sp>
       <p:sp>
         <p:nvSpPr>
-          <p:cNvPr id="265" name=""/>
+          <p:cNvPr id="194" name=""/>
           <p:cNvSpPr/>
           <p:nvPr/>
         </p:nvSpPr>
@@ -11625,7 +8981,7 @@
       </p:sp>
       <p:sp>
         <p:nvSpPr>
-          <p:cNvPr id="266" name="" descr="{&quot;isTemplate&quot;:true,&quot;type&quot;:&quot;text&quot;}"/>
+          <p:cNvPr id="195" name="" descr="{&quot;isTemplate&quot;:true,&quot;type&quot;:&quot;text&quot;}"/>
           <p:cNvSpPr txBox="1"/>
           <p:nvPr/>
         </p:nvSpPr>
@@ -11660,7 +9016,7 @@
       </p:sp>
       <p:sp>
         <p:nvSpPr>
-          <p:cNvPr id="267" name="" descr="{&quot;isTemplate&quot;:true,&quot;type&quot;:&quot;text&quot;}"/>
+          <p:cNvPr id="196" name="" descr="{&quot;isTemplate&quot;:true,&quot;type&quot;:&quot;text&quot;}"/>
           <p:cNvSpPr txBox="1"/>
           <p:nvPr/>
         </p:nvSpPr>
@@ -11735,7 +9091,7 @@
       </p:sp>
       <p:sp>
         <p:nvSpPr>
-          <p:cNvPr id="268" name=""/>
+          <p:cNvPr id="197" name=""/>
           <p:cNvSpPr/>
           <p:nvPr/>
         </p:nvSpPr>
@@ -11764,7 +9120,7 @@
       </p:sp>
       <p:sp>
         <p:nvSpPr>
-          <p:cNvPr id="269" name="" descr="{&quot;isTemplate&quot;:true,&quot;type&quot;:&quot;text&quot;}"/>
+          <p:cNvPr id="198" name="" descr="{&quot;isTemplate&quot;:true,&quot;type&quot;:&quot;text&quot;}"/>
           <p:cNvSpPr txBox="1"/>
           <p:nvPr/>
         </p:nvSpPr>
@@ -11799,7 +9155,7 @@
       </p:sp>
       <p:sp>
         <p:nvSpPr>
-          <p:cNvPr id="270" name=""/>
+          <p:cNvPr id="199" name=""/>
           <p:cNvSpPr/>
           <p:nvPr/>
         </p:nvSpPr>
@@ -11828,7 +9184,7 @@
       </p:sp>
       <p:sp>
         <p:nvSpPr>
-          <p:cNvPr id="271" name="" descr="{&quot;isTemplate&quot;:true,&quot;type&quot;:&quot;text&quot;}"/>
+          <p:cNvPr id="200" name="" descr="{&quot;isTemplate&quot;:true,&quot;type&quot;:&quot;text&quot;}"/>
           <p:cNvSpPr txBox="1"/>
           <p:nvPr/>
         </p:nvSpPr>
@@ -11863,7 +9219,7 @@
       </p:sp>
       <p:sp>
         <p:nvSpPr>
-          <p:cNvPr id="272" name=""/>
+          <p:cNvPr id="201" name=""/>
           <p:cNvSpPr/>
           <p:nvPr/>
         </p:nvSpPr>
@@ -11892,7 +9248,7 @@
       </p:sp>
       <p:sp>
         <p:nvSpPr>
-          <p:cNvPr id="273" name="" descr="{&quot;isTemplate&quot;:true,&quot;type&quot;:&quot;text&quot;}"/>
+          <p:cNvPr id="202" name="" descr="{&quot;isTemplate&quot;:true,&quot;type&quot;:&quot;text&quot;}"/>
           <p:cNvSpPr txBox="1"/>
           <p:nvPr/>
         </p:nvSpPr>
@@ -11935,7 +9291,7 @@
   <p:cSld>
     <p:spTree>
       <p:nvGrpSpPr>
-        <p:cNvPr id="274" name=""/>
+        <p:cNvPr id="203" name=""/>
         <p:cNvGrpSpPr/>
         <p:nvPr/>
       </p:nvGrpSpPr>
@@ -11949,7 +9305,7 @@
       </p:grpSpPr>
       <p:sp>
         <p:nvSpPr>
-          <p:cNvPr id="275" name=""/>
+          <p:cNvPr id="204" name=""/>
           <p:cNvSpPr/>
           <p:nvPr/>
         </p:nvSpPr>
@@ -11976,7 +9332,7 @@
       </p:sp>
       <p:sp>
         <p:nvSpPr>
-          <p:cNvPr id="276" name=""/>
+          <p:cNvPr id="205" name=""/>
           <p:cNvSpPr/>
           <p:nvPr/>
         </p:nvSpPr>
@@ -12003,7 +9359,7 @@
       </p:sp>
       <p:sp>
         <p:nvSpPr>
-          <p:cNvPr id="277" name="" descr="{&quot;isTemplate&quot;:true,&quot;type&quot;:&quot;text&quot;}"/>
+          <p:cNvPr id="206" name="" descr="{&quot;isTemplate&quot;:true,&quot;type&quot;:&quot;text&quot;}"/>
           <p:cNvSpPr txBox="1"/>
           <p:nvPr/>
         </p:nvSpPr>
@@ -12058,7 +9414,7 @@
       </p:sp>
       <p:sp>
         <p:nvSpPr>
-          <p:cNvPr id="278" name="" descr="{&quot;isTemplate&quot;:true,&quot;type&quot;:&quot;text&quot;}"/>
+          <p:cNvPr id="207" name="" descr="{&quot;isTemplate&quot;:true,&quot;type&quot;:&quot;text&quot;}"/>
           <p:cNvSpPr txBox="1"/>
           <p:nvPr/>
         </p:nvSpPr>
@@ -12095,7 +9451,7 @@
       </p:sp>
       <p:sp>
         <p:nvSpPr>
-          <p:cNvPr id="279" name="" descr="{&quot;isTemplate&quot;:true,&quot;type&quot;:&quot;text&quot;}"/>
+          <p:cNvPr id="208" name="" descr="{&quot;isTemplate&quot;:true,&quot;type&quot;:&quot;text&quot;}"/>
           <p:cNvSpPr txBox="1"/>
           <p:nvPr/>
         </p:nvSpPr>
@@ -12130,7 +9486,7 @@
       </p:sp>
       <p:sp>
         <p:nvSpPr>
-          <p:cNvPr id="280" name=""/>
+          <p:cNvPr id="209" name=""/>
           <p:cNvSpPr/>
           <p:nvPr/>
         </p:nvSpPr>
@@ -12164,7 +9520,7 @@
       </p:sp>
       <p:sp>
         <p:nvSpPr>
-          <p:cNvPr id="281" name=""/>
+          <p:cNvPr id="210" name=""/>
           <p:cNvSpPr/>
           <p:nvPr/>
         </p:nvSpPr>
@@ -12193,7 +9549,7 @@
       </p:sp>
       <p:sp>
         <p:nvSpPr>
-          <p:cNvPr id="282" name="" descr="{&quot;isTemplate&quot;:true,&quot;type&quot;:&quot;text&quot;}"/>
+          <p:cNvPr id="211" name="" descr="{&quot;isTemplate&quot;:true,&quot;type&quot;:&quot;text&quot;}"/>
           <p:cNvSpPr txBox="1"/>
           <p:nvPr/>
         </p:nvSpPr>
@@ -12228,7 +9584,7 @@
       </p:sp>
       <p:sp>
         <p:nvSpPr>
-          <p:cNvPr id="283" name="" descr="{&quot;isTemplate&quot;:true,&quot;type&quot;:&quot;text&quot;}"/>
+          <p:cNvPr id="212" name="" descr="{&quot;isTemplate&quot;:true,&quot;type&quot;:&quot;text&quot;}"/>
           <p:cNvSpPr txBox="1"/>
           <p:nvPr/>
         </p:nvSpPr>
@@ -12263,7 +9619,7 @@
       </p:sp>
       <p:sp>
         <p:nvSpPr>
-          <p:cNvPr id="284" name="" descr="{&quot;isTemplate&quot;:true,&quot;type&quot;:&quot;text&quot;}"/>
+          <p:cNvPr id="213" name="" descr="{&quot;isTemplate&quot;:true,&quot;type&quot;:&quot;text&quot;}"/>
           <p:cNvSpPr txBox="1"/>
           <p:nvPr/>
         </p:nvSpPr>
@@ -12318,7 +9674,7 @@
       </p:sp>
       <p:sp>
         <p:nvSpPr>
-          <p:cNvPr id="285" name=""/>
+          <p:cNvPr id="214" name=""/>
           <p:cNvSpPr/>
           <p:nvPr/>
         </p:nvSpPr>
@@ -12352,7 +9708,7 @@
       </p:sp>
       <p:sp>
         <p:nvSpPr>
-          <p:cNvPr id="286" name=""/>
+          <p:cNvPr id="215" name=""/>
           <p:cNvSpPr/>
           <p:nvPr/>
         </p:nvSpPr>
@@ -12381,7 +9737,7 @@
       </p:sp>
       <p:sp>
         <p:nvSpPr>
-          <p:cNvPr id="287" name="" descr="{&quot;isTemplate&quot;:true,&quot;type&quot;:&quot;text&quot;}"/>
+          <p:cNvPr id="216" name="" descr="{&quot;isTemplate&quot;:true,&quot;type&quot;:&quot;text&quot;}"/>
           <p:cNvSpPr txBox="1"/>
           <p:nvPr/>
         </p:nvSpPr>
@@ -12416,7 +9772,7 @@
       </p:sp>
       <p:sp>
         <p:nvSpPr>
-          <p:cNvPr id="288" name="" descr="{&quot;isTemplate&quot;:true,&quot;type&quot;:&quot;text&quot;}"/>
+          <p:cNvPr id="217" name="" descr="{&quot;isTemplate&quot;:true,&quot;type&quot;:&quot;text&quot;}"/>
           <p:cNvSpPr txBox="1"/>
           <p:nvPr/>
         </p:nvSpPr>
@@ -12471,7 +9827,7 @@
       </p:sp>
       <p:sp>
         <p:nvSpPr>
-          <p:cNvPr id="289" name="" descr="{&quot;isTemplate&quot;:true,&quot;type&quot;:&quot;text&quot;}"/>
+          <p:cNvPr id="218" name="" descr="{&quot;isTemplate&quot;:true,&quot;type&quot;:&quot;text&quot;}"/>
           <p:cNvSpPr txBox="1"/>
           <p:nvPr/>
         </p:nvSpPr>
@@ -12546,7 +9902,7 @@
       </p:sp>
       <p:sp>
         <p:nvSpPr>
-          <p:cNvPr id="290" name=""/>
+          <p:cNvPr id="219" name=""/>
           <p:cNvSpPr/>
           <p:nvPr/>
         </p:nvSpPr>
@@ -12580,7 +9936,7 @@
       </p:sp>
       <p:sp>
         <p:nvSpPr>
-          <p:cNvPr id="291" name=""/>
+          <p:cNvPr id="220" name=""/>
           <p:cNvSpPr/>
           <p:nvPr/>
         </p:nvSpPr>
@@ -12609,7 +9965,7 @@
       </p:sp>
       <p:sp>
         <p:nvSpPr>
-          <p:cNvPr id="292" name="" descr="{&quot;isTemplate&quot;:true,&quot;type&quot;:&quot;text&quot;}"/>
+          <p:cNvPr id="221" name="" descr="{&quot;isTemplate&quot;:true,&quot;type&quot;:&quot;text&quot;}"/>
           <p:cNvSpPr txBox="1"/>
           <p:nvPr/>
         </p:nvSpPr>
@@ -12644,7 +10000,7 @@
       </p:sp>
       <p:sp>
         <p:nvSpPr>
-          <p:cNvPr id="293" name="" descr="{&quot;isTemplate&quot;:true,&quot;type&quot;:&quot;text&quot;}"/>
+          <p:cNvPr id="222" name="" descr="{&quot;isTemplate&quot;:true,&quot;type&quot;:&quot;text&quot;}"/>
           <p:cNvSpPr txBox="1"/>
           <p:nvPr/>
         </p:nvSpPr>
@@ -12679,7 +10035,7 @@
       </p:sp>
       <p:sp>
         <p:nvSpPr>
-          <p:cNvPr id="294" name="" descr="{&quot;isTemplate&quot;:true,&quot;type&quot;:&quot;text&quot;}"/>
+          <p:cNvPr id="223" name="" descr="{&quot;isTemplate&quot;:true,&quot;type&quot;:&quot;text&quot;}"/>
           <p:cNvSpPr txBox="1"/>
           <p:nvPr/>
         </p:nvSpPr>
@@ -12714,7 +10070,7 @@
       </p:sp>
       <p:sp>
         <p:nvSpPr>
-          <p:cNvPr id="295" name=""/>
+          <p:cNvPr id="224" name=""/>
           <p:cNvSpPr/>
           <p:nvPr/>
         </p:nvSpPr>
@@ -12743,7 +10099,7 @@
       </p:sp>
       <p:sp>
         <p:nvSpPr>
-          <p:cNvPr id="296" name="" descr="{&quot;isTemplate&quot;:true,&quot;type&quot;:&quot;text&quot;}"/>
+          <p:cNvPr id="225" name="" descr="{&quot;isTemplate&quot;:true,&quot;type&quot;:&quot;text&quot;}"/>
           <p:cNvSpPr txBox="1"/>
           <p:nvPr/>
         </p:nvSpPr>
@@ -12778,7 +10134,7 @@
       </p:sp>
       <p:sp>
         <p:nvSpPr>
-          <p:cNvPr id="297" name="" descr="{&quot;isTemplate&quot;:true,&quot;type&quot;:&quot;text&quot;}"/>
+          <p:cNvPr id="226" name="" descr="{&quot;isTemplate&quot;:true,&quot;type&quot;:&quot;text&quot;}"/>
           <p:cNvSpPr txBox="1"/>
           <p:nvPr/>
         </p:nvSpPr>
@@ -12833,7 +10189,7 @@
       </p:sp>
       <p:sp>
         <p:nvSpPr>
-          <p:cNvPr id="298" name="" descr="{&quot;isTemplate&quot;:true,&quot;type&quot;:&quot;text&quot;}"/>
+          <p:cNvPr id="227" name="" descr="{&quot;isTemplate&quot;:true,&quot;type&quot;:&quot;text&quot;}"/>
           <p:cNvSpPr txBox="1"/>
           <p:nvPr/>
         </p:nvSpPr>
@@ -12870,7 +10226,7 @@
       </p:sp>
       <p:sp>
         <p:nvSpPr>
-          <p:cNvPr id="299" name=""/>
+          <p:cNvPr id="228" name=""/>
           <p:cNvSpPr/>
           <p:nvPr/>
         </p:nvSpPr>
@@ -12899,7 +10255,7 @@
       </p:sp>
       <p:sp>
         <p:nvSpPr>
-          <p:cNvPr id="300" name="" descr="{&quot;isTemplate&quot;:true,&quot;type&quot;:&quot;text&quot;}"/>
+          <p:cNvPr id="229" name="" descr="{&quot;isTemplate&quot;:true,&quot;type&quot;:&quot;text&quot;}"/>
           <p:cNvSpPr txBox="1"/>
           <p:nvPr/>
         </p:nvSpPr>
@@ -12934,7 +10290,7 @@
       </p:sp>
       <p:sp>
         <p:nvSpPr>
-          <p:cNvPr id="301" name="" descr="{&quot;isTemplate&quot;:true,&quot;type&quot;:&quot;text&quot;}"/>
+          <p:cNvPr id="230" name="" descr="{&quot;isTemplate&quot;:true,&quot;type&quot;:&quot;text&quot;}"/>
           <p:cNvSpPr txBox="1"/>
           <p:nvPr/>
         </p:nvSpPr>
@@ -12969,7 +10325,7 @@
       </p:sp>
       <p:sp>
         <p:nvSpPr>
-          <p:cNvPr id="302" name="" descr="{&quot;isTemplate&quot;:true,&quot;type&quot;:&quot;text&quot;}"/>
+          <p:cNvPr id="231" name="" descr="{&quot;isTemplate&quot;:true,&quot;type&quot;:&quot;text&quot;}"/>
           <p:cNvSpPr txBox="1"/>
           <p:nvPr/>
         </p:nvSpPr>
@@ -12996,7 +10352,7 @@
                 <a:latin typeface="Microsoft YaHei"/>
                 <a:ea typeface="Microsoft YaHei"/>
               </a:rPr>
-              <a:t>04 / 17</a:t>
+              <a:t>04 / 15</a:t>
             </a:r>
             <a:endParaRPr/>
           </a:p>
@@ -13012,7 +10368,7 @@
   <p:cSld>
     <p:spTree>
       <p:nvGrpSpPr>
-        <p:cNvPr id="303" name=""/>
+        <p:cNvPr id="232" name=""/>
         <p:cNvGrpSpPr/>
         <p:nvPr/>
       </p:nvGrpSpPr>
@@ -13026,7 +10382,7 @@
       </p:grpSpPr>
       <p:sp>
         <p:nvSpPr>
-          <p:cNvPr id="304" name=""/>
+          <p:cNvPr id="233" name=""/>
           <p:cNvSpPr/>
           <p:nvPr/>
         </p:nvSpPr>
@@ -13053,7 +10409,7 @@
       </p:sp>
       <p:sp>
         <p:nvSpPr>
-          <p:cNvPr id="305" name=""/>
+          <p:cNvPr id="234" name=""/>
           <p:cNvSpPr/>
           <p:nvPr/>
         </p:nvSpPr>
@@ -13080,7 +10436,7 @@
       </p:sp>
       <p:sp>
         <p:nvSpPr>
-          <p:cNvPr id="306" name="" descr="{&quot;isTemplate&quot;:true,&quot;type&quot;:&quot;text&quot;}"/>
+          <p:cNvPr id="235" name="" descr="{&quot;isTemplate&quot;:true,&quot;type&quot;:&quot;text&quot;}"/>
           <p:cNvSpPr txBox="1"/>
           <p:nvPr/>
         </p:nvSpPr>
@@ -13115,7 +10471,7 @@
       </p:sp>
       <p:sp>
         <p:nvSpPr>
-          <p:cNvPr id="307" name=""/>
+          <p:cNvPr id="236" name=""/>
           <p:cNvSpPr/>
           <p:nvPr/>
         </p:nvSpPr>
@@ -13144,7 +10500,7 @@
       </p:sp>
       <p:sp>
         <p:nvSpPr>
-          <p:cNvPr id="308" name="" descr="{&quot;isTemplate&quot;:true,&quot;type&quot;:&quot;text&quot;}"/>
+          <p:cNvPr id="237" name="" descr="{&quot;isTemplate&quot;:true,&quot;type&quot;:&quot;text&quot;}"/>
           <p:cNvSpPr txBox="1"/>
           <p:nvPr/>
         </p:nvSpPr>
@@ -13179,7 +10535,7 @@
       </p:sp>
       <p:sp>
         <p:nvSpPr>
-          <p:cNvPr id="309" name="" descr="{&quot;isTemplate&quot;:true,&quot;type&quot;:&quot;text&quot;}"/>
+          <p:cNvPr id="238" name="" descr="{&quot;isTemplate&quot;:true,&quot;type&quot;:&quot;text&quot;}"/>
           <p:cNvSpPr txBox="1"/>
           <p:nvPr/>
         </p:nvSpPr>
@@ -13234,7 +10590,7 @@
       </p:sp>
       <p:sp>
         <p:nvSpPr>
-          <p:cNvPr id="310" name=""/>
+          <p:cNvPr id="239" name=""/>
           <p:cNvSpPr/>
           <p:nvPr/>
         </p:nvSpPr>
@@ -13268,7 +10624,7 @@
       </p:sp>
       <p:sp>
         <p:nvSpPr>
-          <p:cNvPr id="311" name="" descr="{&quot;isTemplate&quot;:true,&quot;type&quot;:&quot;text&quot;}"/>
+          <p:cNvPr id="240" name="" descr="{&quot;isTemplate&quot;:true,&quot;type&quot;:&quot;text&quot;}"/>
           <p:cNvSpPr txBox="1"/>
           <p:nvPr/>
         </p:nvSpPr>
@@ -13323,7 +10679,7 @@
       </p:sp>
       <p:sp>
         <p:nvSpPr>
-          <p:cNvPr id="312" name="" descr="{&quot;isTemplate&quot;:true,&quot;type&quot;:&quot;text&quot;}"/>
+          <p:cNvPr id="241" name="" descr="{&quot;isTemplate&quot;:true,&quot;type&quot;:&quot;text&quot;}"/>
           <p:cNvSpPr txBox="1"/>
           <p:nvPr/>
         </p:nvSpPr>
@@ -13368,7 +10724,7 @@
   <p:cSld>
     <p:spTree>
       <p:nvGrpSpPr>
-        <p:cNvPr id="313" name=""/>
+        <p:cNvPr id="242" name=""/>
         <p:cNvGrpSpPr/>
         <p:nvPr/>
       </p:nvGrpSpPr>
@@ -13382,7 +10738,7 @@
       </p:grpSpPr>
       <p:sp>
         <p:nvSpPr>
-          <p:cNvPr id="314" name=""/>
+          <p:cNvPr id="243" name=""/>
           <p:cNvSpPr/>
           <p:nvPr/>
         </p:nvSpPr>
@@ -13409,7 +10765,7 @@
       </p:sp>
       <p:sp>
         <p:nvSpPr>
-          <p:cNvPr id="315" name=""/>
+          <p:cNvPr id="244" name=""/>
           <p:cNvSpPr/>
           <p:nvPr/>
         </p:nvSpPr>
@@ -13436,7 +10792,7 @@
       </p:sp>
       <p:sp>
         <p:nvSpPr>
-          <p:cNvPr id="316" name="" descr="{&quot;isTemplate&quot;:true,&quot;type&quot;:&quot;text&quot;}"/>
+          <p:cNvPr id="245" name="" descr="{&quot;isTemplate&quot;:true,&quot;type&quot;:&quot;text&quot;}"/>
           <p:cNvSpPr txBox="1"/>
           <p:nvPr/>
         </p:nvSpPr>
@@ -13491,7 +10847,7 @@
       </p:sp>
       <p:sp>
         <p:nvSpPr>
-          <p:cNvPr id="317" name="" descr="{&quot;isTemplate&quot;:true,&quot;type&quot;:&quot;text&quot;}"/>
+          <p:cNvPr id="246" name="" descr="{&quot;isTemplate&quot;:true,&quot;type&quot;:&quot;text&quot;}"/>
           <p:cNvSpPr txBox="1"/>
           <p:nvPr/>
         </p:nvSpPr>
@@ -13528,7 +10884,7 @@
       </p:sp>
       <p:sp>
         <p:nvSpPr>
-          <p:cNvPr id="318" name=""/>
+          <p:cNvPr id="247" name=""/>
           <p:cNvSpPr/>
           <p:nvPr/>
         </p:nvSpPr>
@@ -13557,7 +10913,7 @@
       </p:sp>
       <p:sp>
         <p:nvSpPr>
-          <p:cNvPr id="319" name="" descr="{&quot;isTemplate&quot;:true,&quot;type&quot;:&quot;text&quot;}"/>
+          <p:cNvPr id="248" name="" descr="{&quot;isTemplate&quot;:true,&quot;type&quot;:&quot;text&quot;}"/>
           <p:cNvSpPr txBox="1"/>
           <p:nvPr/>
         </p:nvSpPr>
@@ -13592,7 +10948,7 @@
       </p:sp>
       <p:sp>
         <p:nvSpPr>
-          <p:cNvPr id="320" name="" descr="{&quot;isTemplate&quot;:true,&quot;type&quot;:&quot;text&quot;}"/>
+          <p:cNvPr id="249" name="" descr="{&quot;isTemplate&quot;:true,&quot;type&quot;:&quot;text&quot;}"/>
           <p:cNvSpPr txBox="1"/>
           <p:nvPr/>
         </p:nvSpPr>
@@ -13627,7 +10983,7 @@
       </p:sp>
       <p:sp>
         <p:nvSpPr>
-          <p:cNvPr id="321" name=""/>
+          <p:cNvPr id="250" name=""/>
           <p:cNvSpPr/>
           <p:nvPr/>
         </p:nvSpPr>
@@ -13656,7 +11012,7 @@
       </p:sp>
       <p:sp>
         <p:nvSpPr>
-          <p:cNvPr id="322" name="" descr="{&quot;isTemplate&quot;:true,&quot;type&quot;:&quot;text&quot;}"/>
+          <p:cNvPr id="251" name="" descr="{&quot;isTemplate&quot;:true,&quot;type&quot;:&quot;text&quot;}"/>
           <p:cNvSpPr txBox="1"/>
           <p:nvPr/>
         </p:nvSpPr>
@@ -13711,7 +11067,7 @@
       </p:sp>
       <p:sp>
         <p:nvSpPr>
-          <p:cNvPr id="323" name="" descr="{&quot;isTemplate&quot;:true,&quot;type&quot;:&quot;text&quot;}"/>
+          <p:cNvPr id="252" name="" descr="{&quot;isTemplate&quot;:true,&quot;type&quot;:&quot;text&quot;}"/>
           <p:cNvSpPr txBox="1"/>
           <p:nvPr/>
         </p:nvSpPr>
@@ -13848,7 +11204,7 @@
       </p:sp>
       <p:sp>
         <p:nvSpPr>
-          <p:cNvPr id="324" name=""/>
+          <p:cNvPr id="253" name=""/>
           <p:cNvSpPr/>
           <p:nvPr/>
         </p:nvSpPr>
@@ -13877,7 +11233,7 @@
       </p:sp>
       <p:sp>
         <p:nvSpPr>
-          <p:cNvPr id="325" name="" descr="{&quot;isTemplate&quot;:true,&quot;type&quot;:&quot;text&quot;}"/>
+          <p:cNvPr id="254" name="" descr="{&quot;isTemplate&quot;:true,&quot;type&quot;:&quot;text&quot;}"/>
           <p:cNvSpPr txBox="1"/>
           <p:nvPr/>
         </p:nvSpPr>
@@ -13912,7 +11268,7 @@
       </p:sp>
       <p:sp>
         <p:nvSpPr>
-          <p:cNvPr id="326" name="" descr="{&quot;isTemplate&quot;:true,&quot;type&quot;:&quot;text&quot;}"/>
+          <p:cNvPr id="255" name="" descr="{&quot;isTemplate&quot;:true,&quot;type&quot;:&quot;text&quot;}"/>
           <p:cNvSpPr txBox="1"/>
           <p:nvPr/>
         </p:nvSpPr>
@@ -13969,7 +11325,7 @@
       </p:sp>
       <p:sp>
         <p:nvSpPr>
-          <p:cNvPr id="327" name=""/>
+          <p:cNvPr id="256" name=""/>
           <p:cNvSpPr/>
           <p:nvPr/>
         </p:nvSpPr>
@@ -14003,7 +11359,7 @@
       </p:sp>
       <p:sp>
         <p:nvSpPr>
-          <p:cNvPr id="328" name=""/>
+          <p:cNvPr id="257" name=""/>
           <p:cNvSpPr/>
           <p:nvPr/>
         </p:nvSpPr>
@@ -14032,7 +11388,7 @@
       </p:sp>
       <p:sp>
         <p:nvSpPr>
-          <p:cNvPr id="329" name="" descr="{&quot;isTemplate&quot;:true,&quot;type&quot;:&quot;text&quot;}"/>
+          <p:cNvPr id="258" name="" descr="{&quot;isTemplate&quot;:true,&quot;type&quot;:&quot;text&quot;}"/>
           <p:cNvSpPr txBox="1"/>
           <p:nvPr/>
         </p:nvSpPr>
@@ -14067,7 +11423,7 @@
       </p:sp>
       <p:sp>
         <p:nvSpPr>
-          <p:cNvPr id="330" name="" descr="{&quot;isTemplate&quot;:true,&quot;type&quot;:&quot;text&quot;}"/>
+          <p:cNvPr id="259" name="" descr="{&quot;isTemplate&quot;:true,&quot;type&quot;:&quot;text&quot;}"/>
           <p:cNvSpPr txBox="1"/>
           <p:nvPr/>
         </p:nvSpPr>
@@ -14102,7 +11458,7 @@
       </p:sp>
       <p:sp>
         <p:nvSpPr>
-          <p:cNvPr id="331" name="" descr="{&quot;isTemplate&quot;:true,&quot;type&quot;:&quot;text&quot;}"/>
+          <p:cNvPr id="260" name="" descr="{&quot;isTemplate&quot;:true,&quot;type&quot;:&quot;text&quot;}"/>
           <p:cNvSpPr txBox="1"/>
           <p:nvPr/>
         </p:nvSpPr>
@@ -14157,7 +11513,7 @@
       </p:sp>
       <p:sp>
         <p:nvSpPr>
-          <p:cNvPr id="332" name=""/>
+          <p:cNvPr id="261" name=""/>
           <p:cNvSpPr/>
           <p:nvPr/>
         </p:nvSpPr>
@@ -14191,7 +11547,7 @@
       </p:sp>
       <p:sp>
         <p:nvSpPr>
-          <p:cNvPr id="333" name=""/>
+          <p:cNvPr id="262" name=""/>
           <p:cNvSpPr/>
           <p:nvPr/>
         </p:nvSpPr>
@@ -14220,7 +11576,7 @@
       </p:sp>
       <p:sp>
         <p:nvSpPr>
-          <p:cNvPr id="334" name="" descr="{&quot;isTemplate&quot;:true,&quot;type&quot;:&quot;text&quot;}"/>
+          <p:cNvPr id="263" name="" descr="{&quot;isTemplate&quot;:true,&quot;type&quot;:&quot;text&quot;}"/>
           <p:cNvSpPr txBox="1"/>
           <p:nvPr/>
         </p:nvSpPr>
@@ -14255,7 +11611,7 @@
       </p:sp>
       <p:sp>
         <p:nvSpPr>
-          <p:cNvPr id="335" name="" descr="{&quot;isTemplate&quot;:true,&quot;type&quot;:&quot;text&quot;}"/>
+          <p:cNvPr id="264" name="" descr="{&quot;isTemplate&quot;:true,&quot;type&quot;:&quot;text&quot;}"/>
           <p:cNvSpPr txBox="1"/>
           <p:nvPr/>
         </p:nvSpPr>
@@ -14310,7 +11666,7 @@
       </p:sp>
       <p:sp>
         <p:nvSpPr>
-          <p:cNvPr id="336" name="" descr="{&quot;isTemplate&quot;:true,&quot;type&quot;:&quot;text&quot;}"/>
+          <p:cNvPr id="265" name="" descr="{&quot;isTemplate&quot;:true,&quot;type&quot;:&quot;text&quot;}"/>
           <p:cNvSpPr txBox="1"/>
           <p:nvPr/>
         </p:nvSpPr>
@@ -14395,7 +11751,7 @@
       </p:sp>
       <p:sp>
         <p:nvSpPr>
-          <p:cNvPr id="337" name=""/>
+          <p:cNvPr id="266" name=""/>
           <p:cNvSpPr/>
           <p:nvPr/>
         </p:nvSpPr>
@@ -14429,7 +11785,7 @@
       </p:sp>
       <p:sp>
         <p:nvSpPr>
-          <p:cNvPr id="338" name=""/>
+          <p:cNvPr id="267" name=""/>
           <p:cNvSpPr/>
           <p:nvPr/>
         </p:nvSpPr>
@@ -14458,7 +11814,7 @@
       </p:sp>
       <p:sp>
         <p:nvSpPr>
-          <p:cNvPr id="339" name="" descr="{&quot;isTemplate&quot;:true,&quot;type&quot;:&quot;text&quot;}"/>
+          <p:cNvPr id="268" name="" descr="{&quot;isTemplate&quot;:true,&quot;type&quot;:&quot;text&quot;}"/>
           <p:cNvSpPr txBox="1"/>
           <p:nvPr/>
         </p:nvSpPr>
@@ -14493,7 +11849,7 @@
       </p:sp>
       <p:sp>
         <p:nvSpPr>
-          <p:cNvPr id="340" name="" descr="{&quot;isTemplate&quot;:true,&quot;type&quot;:&quot;text&quot;}"/>
+          <p:cNvPr id="269" name="" descr="{&quot;isTemplate&quot;:true,&quot;type&quot;:&quot;text&quot;}"/>
           <p:cNvSpPr txBox="1"/>
           <p:nvPr/>
         </p:nvSpPr>
@@ -14528,7 +11884,7 @@
       </p:sp>
       <p:sp>
         <p:nvSpPr>
-          <p:cNvPr id="341" name="" descr="{&quot;isTemplate&quot;:true,&quot;type&quot;:&quot;text&quot;}"/>
+          <p:cNvPr id="270" name="" descr="{&quot;isTemplate&quot;:true,&quot;type&quot;:&quot;text&quot;}"/>
           <p:cNvSpPr txBox="1"/>
           <p:nvPr/>
         </p:nvSpPr>
@@ -14593,7 +11949,7 @@
       </p:sp>
       <p:sp>
         <p:nvSpPr>
-          <p:cNvPr id="342" name=""/>
+          <p:cNvPr id="271" name=""/>
           <p:cNvSpPr/>
           <p:nvPr/>
         </p:nvSpPr>
@@ -14627,7 +11983,7 @@
       </p:sp>
       <p:sp>
         <p:nvSpPr>
-          <p:cNvPr id="343" name=""/>
+          <p:cNvPr id="272" name=""/>
           <p:cNvSpPr/>
           <p:nvPr/>
         </p:nvSpPr>
@@ -14656,7 +12012,7 @@
       </p:sp>
       <p:sp>
         <p:nvSpPr>
-          <p:cNvPr id="344" name="" descr="{&quot;isTemplate&quot;:true,&quot;type&quot;:&quot;text&quot;}"/>
+          <p:cNvPr id="273" name="" descr="{&quot;isTemplate&quot;:true,&quot;type&quot;:&quot;text&quot;}"/>
           <p:cNvSpPr txBox="1"/>
           <p:nvPr/>
         </p:nvSpPr>
@@ -14691,7 +12047,7 @@
       </p:sp>
       <p:sp>
         <p:nvSpPr>
-          <p:cNvPr id="345" name="" descr="{&quot;isTemplate&quot;:true,&quot;type&quot;:&quot;text&quot;}"/>
+          <p:cNvPr id="274" name="" descr="{&quot;isTemplate&quot;:true,&quot;type&quot;:&quot;text&quot;}"/>
           <p:cNvSpPr txBox="1"/>
           <p:nvPr/>
         </p:nvSpPr>
@@ -14746,7 +12102,7 @@
       </p:sp>
       <p:sp>
         <p:nvSpPr>
-          <p:cNvPr id="346" name="" descr="{&quot;isTemplate&quot;:true,&quot;type&quot;:&quot;text&quot;}"/>
+          <p:cNvPr id="275" name="" descr="{&quot;isTemplate&quot;:true,&quot;type&quot;:&quot;text&quot;}"/>
           <p:cNvSpPr txBox="1"/>
           <p:nvPr/>
         </p:nvSpPr>
@@ -14781,7 +12137,7 @@
       </p:sp>
       <p:sp>
         <p:nvSpPr>
-          <p:cNvPr id="347" name=""/>
+          <p:cNvPr id="276" name=""/>
           <p:cNvSpPr/>
           <p:nvPr/>
         </p:nvSpPr>
@@ -14815,7 +12171,7 @@
       </p:sp>
       <p:sp>
         <p:nvSpPr>
-          <p:cNvPr id="348" name=""/>
+          <p:cNvPr id="277" name=""/>
           <p:cNvSpPr/>
           <p:nvPr/>
         </p:nvSpPr>
@@ -14844,7 +12200,7 @@
       </p:sp>
       <p:sp>
         <p:nvSpPr>
-          <p:cNvPr id="349" name="" descr="{&quot;isTemplate&quot;:true,&quot;type&quot;:&quot;text&quot;}"/>
+          <p:cNvPr id="278" name="" descr="{&quot;isTemplate&quot;:true,&quot;type&quot;:&quot;text&quot;}"/>
           <p:cNvSpPr txBox="1"/>
           <p:nvPr/>
         </p:nvSpPr>
@@ -14879,7 +12235,7 @@
       </p:sp>
       <p:sp>
         <p:nvSpPr>
-          <p:cNvPr id="350" name="" descr="{&quot;isTemplate&quot;:true,&quot;type&quot;:&quot;text&quot;}"/>
+          <p:cNvPr id="279" name="" descr="{&quot;isTemplate&quot;:true,&quot;type&quot;:&quot;text&quot;}"/>
           <p:cNvSpPr txBox="1"/>
           <p:nvPr/>
         </p:nvSpPr>
@@ -14914,7 +12270,7 @@
       </p:sp>
       <p:sp>
         <p:nvSpPr>
-          <p:cNvPr id="351" name="" descr="{&quot;isTemplate&quot;:true,&quot;type&quot;:&quot;text&quot;}"/>
+          <p:cNvPr id="280" name="" descr="{&quot;isTemplate&quot;:true,&quot;type&quot;:&quot;text&quot;}"/>
           <p:cNvSpPr txBox="1"/>
           <p:nvPr/>
         </p:nvSpPr>
@@ -14949,7 +12305,7 @@
       </p:sp>
       <p:sp>
         <p:nvSpPr>
-          <p:cNvPr id="352" name="" descr="{&quot;isTemplate&quot;:true,&quot;type&quot;:&quot;text&quot;}"/>
+          <p:cNvPr id="281" name="" descr="{&quot;isTemplate&quot;:true,&quot;type&quot;:&quot;text&quot;}"/>
           <p:cNvSpPr txBox="1"/>
           <p:nvPr/>
         </p:nvSpPr>
@@ -14984,7 +12340,7 @@
       </p:sp>
       <p:sp>
         <p:nvSpPr>
-          <p:cNvPr id="353" name="" descr="{&quot;isTemplate&quot;:true,&quot;type&quot;:&quot;text&quot;}"/>
+          <p:cNvPr id="282" name="" descr="{&quot;isTemplate&quot;:true,&quot;type&quot;:&quot;text&quot;}"/>
           <p:cNvSpPr txBox="1"/>
           <p:nvPr/>
         </p:nvSpPr>
@@ -15011,7 +12367,7 @@
                 <a:latin typeface="Microsoft YaHei"/>
                 <a:ea typeface="Microsoft YaHei"/>
               </a:rPr>
-              <a:t>06 / 17</a:t>
+              <a:t>06 / 15</a:t>
             </a:r>
             <a:endParaRPr/>
           </a:p>
@@ -15027,7 +12383,7 @@
   <p:cSld>
     <p:spTree>
       <p:nvGrpSpPr>
-        <p:cNvPr id="354" name=""/>
+        <p:cNvPr id="283" name=""/>
         <p:cNvGrpSpPr/>
         <p:nvPr/>
       </p:nvGrpSpPr>
@@ -15041,7 +12397,7 @@
       </p:grpSpPr>
       <p:sp>
         <p:nvSpPr>
-          <p:cNvPr id="355" name=""/>
+          <p:cNvPr id="284" name=""/>
           <p:cNvSpPr/>
           <p:nvPr/>
         </p:nvSpPr>
@@ -15068,7 +12424,7 @@
       </p:sp>
       <p:sp>
         <p:nvSpPr>
-          <p:cNvPr id="356" name=""/>
+          <p:cNvPr id="285" name=""/>
           <p:cNvSpPr/>
           <p:nvPr/>
         </p:nvSpPr>
@@ -15095,7 +12451,7 @@
       </p:sp>
       <p:sp>
         <p:nvSpPr>
-          <p:cNvPr id="357" name="" descr="{&quot;isTemplate&quot;:true,&quot;type&quot;:&quot;text&quot;}"/>
+          <p:cNvPr id="286" name="" descr="{&quot;isTemplate&quot;:true,&quot;type&quot;:&quot;text&quot;}"/>
           <p:cNvSpPr txBox="1"/>
           <p:nvPr/>
         </p:nvSpPr>
@@ -15150,7 +12506,7 @@
       </p:sp>
       <p:sp>
         <p:nvSpPr>
-          <p:cNvPr id="358" name="" descr="{&quot;isTemplate&quot;:true,&quot;type&quot;:&quot;text&quot;}"/>
+          <p:cNvPr id="287" name="" descr="{&quot;isTemplate&quot;:true,&quot;type&quot;:&quot;text&quot;}"/>
           <p:cNvSpPr txBox="1"/>
           <p:nvPr/>
         </p:nvSpPr>
@@ -15179,22 +12535,22 @@
                 <a:latin typeface="Microsoft YaHei"/>
                 <a:ea typeface="Microsoft YaHei"/>
               </a:rPr>
-              <a:t>项目目标</a:t>
-            </a:r>
-            <a:endParaRPr/>
-          </a:p>
-        </p:txBody>
-      </p:sp>
-      <p:sp>
-        <p:nvSpPr>
-          <p:cNvPr id="359" name="" descr="{&quot;isTemplate&quot;:true,&quot;type&quot;:&quot;text&quot;}"/>
+              <a:t>技术方案</a:t>
+            </a:r>
+            <a:endParaRPr/>
+          </a:p>
+        </p:txBody>
+      </p:sp>
+      <p:sp>
+        <p:nvSpPr>
+          <p:cNvPr id="288" name="" descr="{&quot;isTemplate&quot;:true,&quot;type&quot;:&quot;text&quot;}"/>
           <p:cNvSpPr txBox="1"/>
           <p:nvPr/>
         </p:nvSpPr>
         <p:spPr>
           <a:xfrm rot="0" flipH="0" flipV="0">
             <a:off x="381000" y="895350"/>
-            <a:ext cx="3028950" cy="390525"/>
+            <a:ext cx="11430000" cy="390525"/>
           </a:xfrm>
           <a:prstGeom prst="rect"/>
         </p:spPr>
@@ -15214,72 +12570,7 @@
                 <a:latin typeface="Microsoft YaHei"/>
                 <a:ea typeface="Microsoft YaHei"/>
               </a:rPr>
-              <a:t>系统用例图（</a:t>
-            </a:r>
-            <a:r>
-              <a:rPr lang="en-US" sz="2550" b="1">
-                <a:solidFill>
-                  <a:srgbClr val="1A2230"/>
-                </a:solidFill>
-                <a:latin typeface="Microsoft YaHei"/>
-                <a:ea typeface="Microsoft YaHei"/>
-              </a:rPr>
-              <a:t>UML</a:t>
-            </a:r>
-            <a:r>
-              <a:rPr lang="zh-CN" sz="2550" b="1">
-                <a:solidFill>
-                  <a:srgbClr val="1A2230"/>
-                </a:solidFill>
-                <a:latin typeface="Microsoft YaHei"/>
-                <a:ea typeface="Microsoft YaHei"/>
-              </a:rPr>
-              <a:t>）</a:t>
-            </a:r>
-            <a:endParaRPr/>
-          </a:p>
-        </p:txBody>
-      </p:sp>
-      <p:sp>
-        <p:nvSpPr>
-          <p:cNvPr id="360" name="" descr="{&quot;isTemplate&quot;:true,&quot;type&quot;:&quot;text&quot;}"/>
-          <p:cNvSpPr txBox="1"/>
-          <p:nvPr/>
-        </p:nvSpPr>
-        <p:spPr>
-          <a:xfrm rot="0" flipH="0" flipV="0">
-            <a:off x="3562350" y="895350"/>
-            <a:ext cx="2066925" cy="390525"/>
-          </a:xfrm>
-          <a:prstGeom prst="rect"/>
-        </p:spPr>
-        <p:txBody>
-          <a:bodyPr wrap="none" lIns="0" tIns="0" rIns="0" bIns="0"/>
-          <a:p>
-            <a:pPr>
-              <a:lnSpc>
-                <a:spcPct val="100000"/>
-              </a:lnSpc>
-            </a:pPr>
-            <a:r>
-              <a:rPr lang="en-US" sz="1200">
-                <a:solidFill>
-                  <a:srgbClr val="8B97A8"/>
-                </a:solidFill>
-                <a:latin typeface="Microsoft YaHei"/>
-                <a:ea typeface="Microsoft YaHei"/>
-              </a:rPr>
-              <a:t xml:space="preserve">Use Case Diagram · </a:t>
-            </a:r>
-            <a:r>
-              <a:rPr lang="zh-CN" sz="1200">
-                <a:solidFill>
-                  <a:srgbClr val="8B97A8"/>
-                </a:solidFill>
-                <a:latin typeface="Microsoft YaHei"/>
-                <a:ea typeface="Microsoft YaHei"/>
-              </a:rPr>
-              <a:t>需求分析</a:t>
+              <a:t>系统总体架构：双链路</a:t>
             </a:r>
             <a:endParaRPr/>
           </a:p>
@@ -15287,7 +12578,7 @@
       </p:sp>
       <p:pic>
         <p:nvPicPr>
-          <p:cNvPr id="361" name=""/>
+          <p:cNvPr id="289" name=""/>
           <p:cNvPicPr>
             <a:picLocks noChangeAspect="1"/>
           </p:cNvPicPr>
@@ -15307,8 +12598,8 @@
         </p:blipFill>
         <p:spPr>
           <a:xfrm rot="0" flipH="0" flipV="0">
-            <a:off x="476250" y="1428750"/>
-            <a:ext cx="11239500" cy="4953000"/>
+            <a:off x="476250" y="1457325"/>
+            <a:ext cx="11239500" cy="4857750"/>
           </a:xfrm>
           <a:prstGeom prst="rect">
             <a:avLst/>
@@ -15318,7 +12609,7 @@
       </p:pic>
       <p:sp>
         <p:nvSpPr>
-          <p:cNvPr id="362" name="" descr="{&quot;isTemplate&quot;:true,&quot;type&quot;:&quot;text&quot;}"/>
+          <p:cNvPr id="290" name="" descr="{&quot;isTemplate&quot;:true,&quot;type&quot;:&quot;text&quot;}"/>
           <p:cNvSpPr txBox="1"/>
           <p:nvPr/>
         </p:nvSpPr>
@@ -15353,7 +12644,7 @@
       </p:sp>
       <p:sp>
         <p:nvSpPr>
-          <p:cNvPr id="363" name="" descr="{&quot;isTemplate&quot;:true,&quot;type&quot;:&quot;text&quot;}"/>
+          <p:cNvPr id="291" name="" descr="{&quot;isTemplate&quot;:true,&quot;type&quot;:&quot;text&quot;}"/>
           <p:cNvSpPr txBox="1"/>
           <p:nvPr/>
         </p:nvSpPr>
@@ -15380,7 +12671,7 @@
                 <a:latin typeface="Microsoft YaHei"/>
                 <a:ea typeface="Microsoft YaHei"/>
               </a:rPr>
-              <a:t>07 / 17</a:t>
+              <a:t>07 / 15</a:t>
             </a:r>
             <a:endParaRPr/>
           </a:p>
@@ -15396,7 +12687,7 @@
   <p:cSld>
     <p:spTree>
       <p:nvGrpSpPr>
-        <p:cNvPr id="364" name=""/>
+        <p:cNvPr id="292" name="" descr="&lt;Slide&gt;&#10;  &lt;Box style={{ width: '1280px', height: '720px', background: '#FFFFFF', flexDirection: 'column' }}&gt;&#10;    {/* 页眉 */}&#10;    &lt;Box style={{ height: 72, background: '#1E4FA8', flexDirection: 'row', alignItems: 'center', justifyContent: 'space-between', paddingLeft: 40, paddingRight: 40 }}&gt;&#10;      &lt;Text style={{ color: '#FFFFFF', fontSize: 16 }}&gt;基于 RAG 的轻量级企业工艺生成系统&lt;/Text&gt;&#10;      &lt;Text style={{ color: 'rgba(255,255,255,0.85)', fontSize: 14 }}&gt;技术方案&lt;/Text&gt;&#10;    &lt;/Box&gt;&#10;&#10;    {/* 主标题 */}&#10;    &lt;Box style={{ paddingLeft: 40, paddingRight: 40, paddingTop: 22, paddingBottom: 8 }}&gt;&#10;      &lt;Text style={{ color: '#1A2230', fontSize: 34, fontWeight: 'bold' }}&gt;系统总体架构：双链路&lt;/Text&gt;&#10;    &lt;/Box&gt;&#10;&#10;    {/* 架构图（大图 anchor） */}&#10;    &lt;Box style={{ flex: 1, paddingLeft: 40, paddingRight: 40, paddingBottom: 8, alignItems: 'center', justifyContent: 'center' }}&gt;&#10;      &lt;svg width={1180} height={510} viewBox='0 0 1180 510'&gt;&#10;        {/* 离线建库链路（上） */}&#10;        &lt;rect x='0' y='6' width='1180' height='165' rx='12' fill='#F0F5FC' stroke='#D6DCE5' strokeWidth='1.5' /&gt;&#10;        &lt;text x='30' y='40' font-size='20' font-weight='bold' fill='#0E3F8C'&gt;离线建库链路（一次构建）&lt;/text&gt;&#10;&#10;        {/* 离线节点 */}&#10;        &lt;g font-size='15' fill='#1A2230' text-anchor='middle'&gt;&#10;          &lt;rect x='45' y='72' width='158' height='66' rx='8' fill='#FFFFFF' stroke='#1E4FA8' strokeWidth='1.5' /&gt;&#10;          &lt;text x='124' y='100' font-weight='bold'&gt;工艺 PDF&lt;/text&gt;&#10;          &lt;text x='124' y='122' fill='#8B97A8'&gt;原始文档&lt;/text&gt;&#10;&#10;          &lt;rect x='263' y='72' width='158' height='66' rx='8' fill='#FFFFFF' stroke='#1E4FA8' strokeWidth='1.5' /&gt;&#10;          &lt;text x='342' y='100' font-weight='bold'&gt;解析&lt;/text&gt;&#10;          &lt;text x='342' y='122' fill='#8B97A8'&gt;PyMuPDF + pdfplumber&lt;/text&gt;&#10;&#10;          &lt;rect x='481' y='72' width='158' height='66' rx='8' fill='#FFFFFF' stroke='#1E4FA8' strokeWidth='1.5' /&gt;&#10;          &lt;text x='560' y='100' font-weight='bold'&gt;分块&lt;/text&gt;&#10;          &lt;text x='560' y='122' fill='#8B97A8'&gt;递归 + 表格保护&lt;/text&gt;&#10;&#10;          &lt;rect x='699' y='72' width='158' height='66' rx='8' fill='#FFFFFF' stroke='#1E4FA8' strokeWidth='1.5' /&gt;&#10;          &lt;text x='778' y='100' font-weight='bold'&gt;向量化&lt;/text&gt;&#10;          &lt;text x='778' y='122' fill='#8B97A8'&gt;BGE-M3 嵌入&lt;/text&gt;&#10;&#10;          &lt;rect x='917' y='72' width='158' height='66' rx='8' fill='#1E4FA8' /&gt;&#10;          &lt;text x='996' y='100' font-weight='bold' fill='#FFFFFF'&gt;索引入库&lt;/text&gt;&#10;          &lt;text x='996' y='122' fill='#D6E4F7'&gt;Chroma + BM25&lt;/text&gt;&#10;        &lt;/g&gt;&#10;        {/* 离线箭头 */}&#10;        &lt;g stroke='#3D7BD9' stroke-width='2.5' fill='#3D7BD9'&gt;&#10;          &lt;path d='M203 105 L258 105' /&gt;&#10;          &lt;path d='M421 105 L476 105' /&gt;&#10;          &lt;path d='M639 105 L694 105' /&gt;&#10;          &lt;path d='M857 105 L912 105' /&gt;&#10;          &lt;path d='M258 105 l-8 -6 v12 z' /&gt;&#10;          &lt;path d='M476 105 l-8 -6 v12 z' /&gt;&#10;          &lt;path d='M694 105 l-8 -6 v12 z' /&gt;&#10;          &lt;path d='M912 105 l-8 -6 v12 z' /&gt;&#10;        &lt;/g&gt;&#10;&#10;        {/* 知识库（中间，上接离线、下接在线） */}&#10;        &lt;rect x='360' y='208' width='460' height='56' rx='28' fill='#0E3F8C' /&gt;&#10;        &lt;text x='590' y='242' font-size='19' font-weight='bold' fill='#FFFFFF' text-anchor='middle'&gt;工艺知识库（稠密向量 + 稀疏索引）&lt;/text&gt;&#10;        &lt;g&gt;&#10;          {/* 索引入库 → 知识库（L 形折线：下→左→下，接入知识库顶边正中） */}&#10;          &lt;path d='M996 138 L996 173 L590 173 L590 206' stroke='#3D7BD9' stroke-width='2.5' fill='none' /&gt;&#10;          &lt;path d='M590 206 l-8 12 l16 0 z' fill='#3D7BD9' /&gt;&#10;          &lt;text x='800' y='166' font-size='13' fill='#3D7BD9'&gt;写入索引&lt;/text&gt;&#10;          {/* 知识库 → 混合召回（L 形折线：下→左→下，接入混合召回顶边正中） */}&#10;          &lt;path d='M590 264 L590 330 L330 330 L330 402' stroke='#3D7BD9' stroke-width='2.5' fill='none' /&gt;&#10;          &lt;path d='M330 402 l-8 12 l16 0 z' fill='#3D7BD9' /&gt;&#10;          &lt;text x='350' y='322' font-size='13' fill='#3D7BD9'&gt;供在线检索&lt;/text&gt;&#10;        &lt;/g&gt;&#10;&#10;        {/* 在线问答链路（下） */}&#10;        &lt;rect x='0' y='342' width='1180' height='160' rx='12' fill='#F0F5FC' stroke='#D6DCE5' strokeWidth='1.5' /&gt;&#10;        &lt;text x='30' y='376' font-size='20' font-weight='bold' fill='#0E3F8C'&gt;在线问答链路（每次提问）&lt;/text&gt;&#10;&#10;        &lt;g font-size='14' fill='#1A2230' text-anchor='middle'&gt;&#10;          &lt;rect x='45' y='404' width='150' height='62' rx='8' fill='#FFFFFF' stroke='#1E4FA8' strokeWidth='1.5' /&gt;&#10;          &lt;text x='120' y='430' font-weight='bold'&gt;用户问题&lt;/text&gt;&#10;          &lt;text x='120' y='450' fill='#8B97A8'&gt;查询改写&lt;/text&gt;&#10;&#10;          &lt;rect x='255' y='404' width='150' height='62' rx='8' fill='#FFFFFF' stroke='#1E4FA8' strokeWidth='1.5' /&gt;&#10;          &lt;text x='330' y='430' font-weight='bold'&gt;混合召回&lt;/text&gt;&#10;          &lt;text x='330' y='450' fill='#8B97A8'&gt;稠密 + 稀疏&lt;/text&gt;&#10;&#10;          &lt;rect x='465' y='404' width='150' height='62' rx='8' fill='#FFFFFF' stroke='#1E4FA8' strokeWidth='1.5' /&gt;&#10;          &lt;text x='540' y='430' font-weight='bold'&gt;RRF 融合&lt;/text&gt;&#10;          &lt;text x='540' y='450' fill='#8B97A8'&gt;k=60 去重&lt;/text&gt;&#10;&#10;          &lt;rect x='675' y='404' width='150' height='62' rx='8' fill='#FFFFFF' stroke='#1E4FA8' strokeWidth='1.5' /&gt;&#10;          &lt;text x='750' y='430' font-weight='bold'&gt;重排序&lt;/text&gt;&#10;          &lt;text x='750' y='450' fill='#8B97A8'&gt;bge-reranker&lt;/text&gt;&#10;&#10;          &lt;rect x='885' y='404' width='150' height='62' rx='8' fill='#FFFFFF' stroke='#1E4FA8' strokeWidth='1.5' /&gt;&#10;          &lt;text x='960' y='430' font-weight='bold'&gt;生成&lt;/text&gt;&#10;          &lt;text x='960' y='450' fill='#8B97A8'&gt;大模型 API&lt;/text&gt;&#10;        &lt;/g&gt;&#10;        {/* 加工指令（右侧终点） */}&#10;        &lt;rect x='1050' y='404' width='115' height='62' rx='8' fill='#1E4FA8' /&gt;&#10;        &lt;text x='1107' y='430' font-size='14' font-weight='bold' fill='#FFFFFF' text-anchor='middle'&gt;加工指令&lt;/text&gt;&#10;        &lt;text x='1107' y='450' font-size='14' fill='#D6E4F7' text-anchor='middle'&gt;带引用&lt;/text&gt;&#10;&#10;        &lt;g stroke='#3D7BD9' stroke-width='2.5' fill='#3D7BD9'&gt;&#10;          &lt;path d='M195 435 L250 435' /&gt;&#10;          &lt;path d='M405 435 L460 435' /&gt;&#10;          &lt;path d='M615 435 L670 435' /&gt;&#10;          &lt;path d='M825 435 L880 435' /&gt;&#10;          &lt;path d='M1035 435 L1045 435' /&gt;&#10;          &lt;path d='M250 435 l-8 -6 v12 z' /&gt;&#10;          &lt;path d='M460 435 l-8 -6 v12 z' /&gt;&#10;          &lt;path d='M670 435 l-8 -6 v12 z' /&gt;&#10;          &lt;path d='M880 435 l-8 -6 v12 z' /&gt;&#10;          &lt;path d='M1045 435 l-8 -6 v12 z' /&gt;&#10;        &lt;/g&gt;&#10;      &lt;/svg&gt;&#10;    &lt;/Box&gt;&#10;&#10;    {/* 页脚 */}&#10;    &lt;Box style={{ height: 40, flexDirection: 'row', alignItems: 'center', justifyContent: 'space-between', paddingLeft: 40, paddingRight: 40 }}&gt;&#10;      &lt;Text style={{ color: '#8B97A8', fontSize: 14 }}&gt;中国科学技术大学软件学院&lt;/Text&gt;&#10;      &lt;Text style={{ color: '#1E4FA8', fontSize: 16, fontWeight: 'bold' }}&gt;08 / 17&lt;/Text&gt;&#10;    &lt;/Box&gt;&#10;  &lt;/Box&gt;&#10;&lt;/Slide&gt;&#10;"/>
         <p:cNvGrpSpPr/>
         <p:nvPr/>
       </p:nvGrpSpPr>
@@ -15410,7 +12701,7 @@
       </p:grpSpPr>
       <p:sp>
         <p:nvSpPr>
-          <p:cNvPr id="365" name=""/>
+          <p:cNvPr id="293" name=""/>
           <p:cNvSpPr/>
           <p:nvPr/>
         </p:nvSpPr>
@@ -15429,15 +12720,12 @@
         </p:spPr>
         <p:txBody>
           <a:bodyPr/>
-          <a:p>
-            <a:pPr/>
-            <a:endParaRPr/>
-          </a:p>
-        </p:txBody>
-      </p:sp>
-      <p:sp>
-        <p:nvSpPr>
-          <p:cNvPr id="366" name=""/>
+          <a:p/>
+        </p:txBody>
+      </p:sp>
+      <p:sp>
+        <p:nvSpPr>
+          <p:cNvPr id="294" name=""/>
           <p:cNvSpPr/>
           <p:nvPr/>
         </p:nvSpPr>
@@ -15456,15 +12744,12 @@
         </p:spPr>
         <p:txBody>
           <a:bodyPr/>
-          <a:p>
-            <a:pPr/>
-            <a:endParaRPr/>
-          </a:p>
-        </p:txBody>
-      </p:sp>
-      <p:sp>
-        <p:nvSpPr>
-          <p:cNvPr id="367" name="" descr="{&quot;isTemplate&quot;:true,&quot;type&quot;:&quot;text&quot;}"/>
+          <a:p/>
+        </p:txBody>
+      </p:sp>
+      <p:sp>
+        <p:nvSpPr>
+          <p:cNvPr id="295" name="" descr="{&quot;isTemplate&quot;:true,&quot;type&quot;:&quot;text&quot;}"/>
           <p:cNvSpPr txBox="1"/>
           <p:nvPr/>
         </p:nvSpPr>
@@ -15519,7 +12804,7 @@
       </p:sp>
       <p:sp>
         <p:nvSpPr>
-          <p:cNvPr id="368" name="" descr="{&quot;isTemplate&quot;:true,&quot;type&quot;:&quot;text&quot;}"/>
+          <p:cNvPr id="296" name="" descr="{&quot;isTemplate&quot;:true,&quot;type&quot;:&quot;text&quot;}"/>
           <p:cNvSpPr txBox="1"/>
           <p:nvPr/>
         </p:nvSpPr>
@@ -15556,7 +12841,7 @@
       </p:sp>
       <p:sp>
         <p:nvSpPr>
-          <p:cNvPr id="369" name="" descr="{&quot;isTemplate&quot;:true,&quot;type&quot;:&quot;text&quot;}"/>
+          <p:cNvPr id="297" name="" descr="{&quot;isTemplate&quot;:true,&quot;type&quot;:&quot;text&quot;}"/>
           <p:cNvSpPr txBox="1"/>
           <p:nvPr/>
         </p:nvSpPr>
@@ -15591,7 +12876,7 @@
       </p:sp>
       <p:pic>
         <p:nvPicPr>
-          <p:cNvPr id="370" name=""/>
+          <p:cNvPr id="298" name=""/>
           <p:cNvPicPr>
             <a:picLocks noChangeAspect="1"/>
           </p:cNvPicPr>
@@ -15622,7 +12907,7 @@
       </p:pic>
       <p:sp>
         <p:nvSpPr>
-          <p:cNvPr id="371" name="" descr="{&quot;isTemplate&quot;:true,&quot;type&quot;:&quot;text&quot;}"/>
+          <p:cNvPr id="299" name="" descr="{&quot;isTemplate&quot;:true,&quot;type&quot;:&quot;text&quot;}"/>
           <p:cNvSpPr txBox="1"/>
           <p:nvPr/>
         </p:nvSpPr>
@@ -15657,7 +12942,7 @@
       </p:sp>
       <p:sp>
         <p:nvSpPr>
-          <p:cNvPr id="372" name="" descr="{&quot;isTemplate&quot;:true,&quot;type&quot;:&quot;text&quot;}"/>
+          <p:cNvPr id="300" name="" descr="{&quot;isTemplate&quot;:true,&quot;type&quot;:&quot;text&quot;}"/>
           <p:cNvSpPr txBox="1"/>
           <p:nvPr/>
         </p:nvSpPr>
@@ -15696,11 +12981,11 @@
 </file>
 
 <file path=ppt/slides/slide9.xml><?xml version="1.0" encoding="utf-8"?>
-<p:sld xmlns:p="http://schemas.openxmlformats.org/presentationml/2006/main" xmlns:a="http://schemas.openxmlformats.org/drawingml/2006/main" xmlns:asvg="http://schemas.microsoft.com/office/drawing/2016/SVG/main" xmlns:r="http://schemas.openxmlformats.org/officeDocument/2006/relationships" xmlns:mc="http://schemas.openxmlformats.org/markup-compatibility/2006" mc:Ignorable="asvg">
+<p:sld xmlns:p="http://schemas.openxmlformats.org/presentationml/2006/main" xmlns:a="http://schemas.openxmlformats.org/drawingml/2006/main">
   <p:cSld>
     <p:spTree>
       <p:nvGrpSpPr>
-        <p:cNvPr id="373" name="" descr="&lt;Slide&gt;&#10;  &lt;Box style={{ width: '1280px', height: '720px', background: '#FFFFFF', flexDirection: 'column' }}&gt;&#10;    {/* 页眉 */}&#10;    &lt;Box style={{ height: 72, background: '#1E4FA8', flexDirection: 'row', alignItems: 'center', justifyContent: 'space-between', paddingLeft: 40, paddingRight: 40 }}&gt;&#10;      &lt;Text style={{ color: '#FFFFFF', fontSize: 16 }}&gt;基于 RAG 的轻量级企业工艺生成系统&lt;/Text&gt;&#10;      &lt;Text style={{ color: 'rgba(255,255,255,0.85)', fontSize: 14 }}&gt;技术方案&lt;/Text&gt;&#10;    &lt;/Box&gt;&#10;&#10;    {/* 主标题 */}&#10;    &lt;Box style={{ paddingLeft: 40, paddingRight: 40, paddingTop: 22, paddingBottom: 8, flexDirection: 'row', alignItems: 'baseline', gap: 16 }}&gt;&#10;      &lt;Text style={{ color: '#1A2230', fontSize: 34, fontWeight: 'bold' }}&gt;系统组件图（UML）&lt;/Text&gt;&#10;      &lt;Text style={{ color: '#8B97A8', fontSize: 16 }}&gt;Component Diagram · 概要设计&lt;/Text&gt;&#10;    &lt;/Box&gt;&#10;&#10;    {/* 组件图（大图 anchor） */}&#10;    &lt;Box style={{ flex: 1, paddingLeft: 40, paddingRight: 40, paddingBottom: 4, alignItems: 'center', justifyContent: 'center' }}&gt;&#10;      &lt;svg width={1180} height={520} viewBox='0 0 1180 520'&gt;&#10;        {/* 离线建库链路（一组组件，用虚线框表示逻辑分组，非泳道） */}&#10;        &lt;text x='40' y='50' font-size='19' font-weight='bold' fill='#0E3F8C'&gt;离线建库（一次构建）&lt;/text&gt;&#10;&#10;        &lt;g&gt;&#10;          &lt;rect x='40' y='70' width='220' height='95' rx='6' fill='#FFFFFF' stroke='#1E4FA8' strokeWidth='2' /&gt;&#10;          &lt;rect x='226' y='62' width='22' height='12' rx='2' fill='#FFFFFF' stroke='#1E4FA8' strokeWidth='1.5' /&gt;&#10;          &lt;rect x='234' y='58' width='12' height='8' rx='2' fill='#FFFFFF' stroke='#1E4FA8' strokeWidth='1.5' /&gt;&#10;          &lt;text x='150' y='105' text-anchor='middle' font-size='17' font-weight='bold' fill='#1A2230'&gt;文档解析&lt;/text&gt;&#10;          &lt;text x='150' y='127' text-anchor='middle' font-size='12' fill='#8B97A8'&gt;«component»&lt;/text&gt;&#10;          &lt;text x='150' y='149' text-anchor='middle' font-size='12' fill='#4A5568'&gt;PyMuPDF + pdfplumber&lt;/text&gt;&#10;&#10;          &lt;rect x='320' y='70' width='220' height='95' rx='6' fill='#FFFFFF' stroke='#1E4FA8' strokeWidth='2' /&gt;&#10;          &lt;rect x='506' y='62' width='22' height='12' rx='2' fill='#FFFFFF' stroke='#1E4FA8' strokeWidth='1.5' /&gt;&#10;          &lt;rect x='514' y='58' width='12' height='8' rx='2' fill='#FFFFFF' stroke='#1E4FA8' strokeWidth='1.5' /&gt;&#10;          &lt;text x='430' y='105' text-anchor='middle' font-size='17' font-weight='bold' fill='#1A2230'&gt;文档分块&lt;/text&gt;&#10;          &lt;text x='430' y='127' text-anchor='middle' font-size='12' fill='#8B97A8'&gt;«component»&lt;/text&gt;&#10;          &lt;text x='430' y='149' text-anchor='middle' font-size='12' fill='#4A5568'&gt;递归分块 + 表格保护&lt;/text&gt;&#10;&#10;          &lt;rect x='600' y='70' width='220' height='95' rx='6' fill='#FFFFFF' stroke='#1E4FA8' strokeWidth='2' /&gt;&#10;          &lt;rect x='786' y='62' width='22' height='12' rx='2' fill='#FFFFFF' stroke='#1E4FA8' strokeWidth='1.5' /&gt;&#10;          &lt;rect x='794' y='58' width='12' height='8' rx='2' fill='#FFFFFF' stroke='#1E4FA8' strokeWidth='1.5' /&gt;&#10;          &lt;text x='710' y='105' text-anchor='middle' font-size='17' font-weight='bold' fill='#1A2230'&gt;向量化&lt;/text&gt;&#10;          &lt;text x='710' y='127' text-anchor='middle' font-size='12' fill='#8B97A8'&gt;«component»&lt;/text&gt;&#10;          &lt;text x='710' y='149' text-anchor='middle' font-size='12' fill='#4A5568'&gt;BGE-M3 嵌入&lt;/text&gt;&#10;&#10;          &lt;rect x='880' y='70' width='220' height='95' rx='6' fill='#1E4FA8' /&gt;&#10;          &lt;rect x='1066' y='62' width='22' height='12' rx='2' fill='#1E4FA8' stroke='#FFFFFF' strokeWidth='1.5' /&gt;&#10;          &lt;rect x='1074' y='58' width='12' height='8' rx='2' fill='#1E4FA8' stroke='#FFFFFF' strokeWidth='1.5' /&gt;&#10;          &lt;text x='990' y='105' text-anchor='middle' font-size='17' font-weight='bold' fill='#FFFFFF'&gt;索引构建&lt;/text&gt;&#10;          &lt;text x='990' y='127' text-anchor='middle' font-size='12' fill='#D6E4F7'&gt;«component»&lt;/text&gt;&#10;          &lt;text x='990' y='149' text-anchor='middle' font-size='12' fill='#D6E4F7'&gt;Chroma + BM25&lt;/text&gt;&#10;        &lt;/g&gt;&#10;        {/* 离线依赖箭头（虚线开放箭头 = UML 依赖） */}&#10;        &lt;g stroke='#3D7BD9' stroke-width='2' fill='none' stroke-dasharray='6 4'&gt;&#10;          &lt;path d='M260 117 L312 117' /&gt;&#10;          &lt;path d='M540 117 L592 117' /&gt;&#10;          &lt;path d='M820 117 L872 117' /&gt;&#10;        &lt;/g&gt;&#10;        &lt;g stroke='#3D7BD9' stroke-width='2' fill='#3D7BD9'&gt;&#10;          &lt;path d='M312 117 l-8 -6 v12 z' /&gt;&#10;          &lt;path d='M592 117 l-8 -6 v12 z' /&gt;&#10;          &lt;path d='M872 117 l-8 -6 v12 z' /&gt;&#10;        &lt;/g&gt;&#10;        {/* 接口名（棒棒糖 lollipop，标注在依赖关系上） */}&#10;        &lt;g font-size='11' fill='#3D7BD9'&gt;&#10;          &lt;text x='286' y='108'&gt;IChunk&lt;/text&gt;&#10;          &lt;text x='566' y='108'&gt;IVector&lt;/text&gt;&#10;          &lt;text x='846' y='108'&gt;IIndex&lt;/text&gt;&#10;        &lt;/g&gt;&#10;&#10;        {/* 在线问答链路（一组组件） */}&#10;        &lt;text x='40' y='245' font-size='19' font-weight='bold' fill='#0E3F8C'&gt;在线问答（每次提问）&lt;/text&gt;&#10;&#10;        &lt;g&gt;&#10;          &lt;rect x='40' y='265' width='165' height='95' rx='6' fill='#FFFFFF' stroke='#1E4FA8' strokeWidth='2' /&gt;&#10;          &lt;rect x='171' y='257' width='22' height='12' rx='2' fill='#FFFFFF' stroke='#1E4FA8' strokeWidth='1.5' /&gt;&#10;          &lt;rect x='179' y='253' width='12' height='8' rx='2' fill='#FFFFFF' stroke='#1E4FA8' strokeWidth='1.5' /&gt;&#10;          &lt;text x='122' y='300' text-anchor='middle' font-size='16' font-weight='bold' fill='#1A2230'&gt;对话管理&lt;/text&gt;&#10;          &lt;text x='122' y='322' text-anchor='middle' font-size='12' fill='#8B97A8'&gt;«component»&lt;/text&gt;&#10;          &lt;text x='122' y='344' text-anchor='middle' font-size='12' fill='#4A5568'&gt;查询改写&lt;/text&gt;&#10;&#10;          &lt;rect x='243' y='265' width='165' height='95' rx='6' fill='#FFFFFF' stroke='#1E4FA8' strokeWidth='2' /&gt;&#10;          &lt;rect x='374' y='257' width='22' height='12' rx='2' fill='#FFFFFF' stroke='#1E4FA8' strokeWidth='1.5' /&gt;&#10;          &lt;rect x='382' y='253' width='12' height='8' rx='2' fill='#FFFFFF' stroke='#1E4FA8' strokeWidth='1.5' /&gt;&#10;          &lt;text x='325' y='300' text-anchor='middle' font-size='16' font-weight='bold' fill='#1A2230'&gt;混合检索&lt;/text&gt;&#10;          &lt;text x='325' y='322' text-anchor='middle' font-size='12' fill='#8B97A8'&gt;«component»&lt;/text&gt;&#10;          &lt;text x='325' y='344' text-anchor='middle' font-size='12' fill='#4A5568'&gt;稠密 + 稀疏&lt;/text&gt;&#10;&#10;          &lt;rect x='446' y='265' width='165' height='95' rx='6' fill='#FFFFFF' stroke='#1E4FA8' strokeWidth='2' /&gt;&#10;          &lt;rect x='577' y='257' width='22' height='12' rx='2' fill='#FFFFFF' stroke='#1E4FA8' strokeWidth='1.5' /&gt;&#10;          &lt;rect x='585' y='253' width='12' height='8' rx='2' fill='#FFFFFF' stroke='#1E4FA8' strokeWidth='1.5' /&gt;&#10;          &lt;text x='528' y='300' text-anchor='middle' font-size='16' font-weight='bold' fill='#1A2230'&gt;重排序&lt;/text&gt;&#10;          &lt;text x='528' y='322' text-anchor='middle' font-size='12' fill='#8B97A8'&gt;«component»&lt;/text&gt;&#10;          &lt;text x='528' y='344' text-anchor='middle' font-size='12' fill='#4A5568'&gt;bge-reranker&lt;/text&gt;&#10;&#10;          &lt;rect x='649' y='265' width='165' height='95' rx='6' fill='#FFFFFF' stroke='#1E4FA8' strokeWidth='2' /&gt;&#10;          &lt;rect x='780' y='257' width='22' height='12' rx='2' fill='#FFFFFF' stroke='#1E4FA8' strokeWidth='1.5' /&gt;&#10;          &lt;rect x='788' y='253' width='12' height='8' rx='2' fill='#FFFFFF' stroke='#1E4FA8' strokeWidth='1.5' /&gt;&#10;          &lt;text x='731' y='300' text-anchor='middle' font-size='16' font-weight='bold' fill='#1A2230'&gt;生成&lt;/text&gt;&#10;          &lt;text x='731' y='322' text-anchor='middle' font-size='12' fill='#8B97A8'&gt;«component»&lt;/text&gt;&#10;          &lt;text x='731' y='344' text-anchor='middle' font-size='12' fill='#4A5568'&gt;大模型 API&lt;/text&gt;&#10;&#10;          &lt;rect x='852' y='265' width='165' height='95' rx='6' fill='#FFFFFF' stroke='#1E4FA8' strokeWidth='2' /&gt;&#10;          &lt;rect x='983' y='257' width='22' height='12' rx='2' fill='#FFFFFF' stroke='#1E4FA8' strokeWidth='1.5' /&gt;&#10;          &lt;rect x='991' y='253' width='12' height='8' rx='2' fill='#FFFFFF' stroke='#1E4FA8' strokeWidth='1.5' /&gt;&#10;          &lt;text x='934' y='300' text-anchor='middle' font-size='16' font-weight='bold' fill='#1A2230'&gt;引用溯源&lt;/text&gt;&#10;          &lt;text x='934' y='322' text-anchor='middle' font-size='12' fill='#8B97A8'&gt;«component»&lt;/text&gt;&#10;          &lt;text x='934' y='344' text-anchor='middle' font-size='12' fill='#4A5568'&gt;页码定位&lt;/text&gt;&#10;&#10;          &lt;rect x='1055' y='265' width='165' height='95' rx='6' fill='#1E4FA8' /&gt;&#10;          &lt;rect x='1186' y='257' width='22' height='12' rx='2' fill='#1E4FA8' stroke='#FFFFFF' strokeWidth='1.5' /&gt;&#10;          &lt;rect x='1194' y='253' width='12' height='8' rx='2' fill='#1E4FA8' stroke='#FFFFFF' strokeWidth='1.5' /&gt;&#10;          &lt;text x='1137' y='300' text-anchor='middle' font-size='16' font-weight='bold' fill='#FFFFFF'&gt;Web 界面&lt;/text&gt;&#10;          &lt;text x='1137' y='322' text-anchor='middle' font-size='12' fill='#D6E4F7'&gt;«component»&lt;/text&gt;&#10;          &lt;text x='1137' y='344' text-anchor='middle' font-size='12' fill='#D6E4F7'&gt;Gradio&lt;/text&gt;&#10;        &lt;/g&gt;&#10;        {/* 在线依赖箭头（虚线开放箭头 = UML 依赖） */}&#10;        &lt;g stroke='#3D7BD9' stroke-width='2' fill='none' stroke-dasharray='6 4'&gt;&#10;          &lt;path d='M205 312 L235 312' /&gt;&#10;          &lt;path d='M408 312 L438 312' /&gt;&#10;          &lt;path d='M611 312 L641 312' /&gt;&#10;          &lt;path d='M814 312 L844 312' /&gt;&#10;          &lt;path d='M1017 312 L1047 312' /&gt;&#10;        &lt;/g&gt;&#10;        &lt;g stroke='#3D7BD9' stroke-width='2' fill='#3D7BD9'&gt;&#10;          &lt;path d='M235 312 l-8 -6 v12 z' /&gt;&#10;          &lt;path d='M438 312 l-8 -6 v12 z' /&gt;&#10;          &lt;path d='M641 312 l-8 -6 v12 z' /&gt;&#10;          &lt;path d='M844 312 l-8 -6 v12 z' /&gt;&#10;          &lt;path d='M1047 312 l-8 -6 v12 z' /&gt;&#10;        &lt;/g&gt;&#10;        {/* 接口名 */}&#10;        &lt;g font-size='11' fill='#3D7BD9'&gt;&#10;          &lt;text x='220' y='303'&gt;IQuery&lt;/text&gt;&#10;          &lt;text x='423' y='303'&gt;IRetrieve&lt;/text&gt;&#10;          &lt;text x='626' y='303'&gt;IRerank&lt;/text&gt;&#10;          &lt;text x='829' y='303'&gt;IGenerate&lt;/text&gt;&#10;          &lt;text x='1032' y='303'&gt;ICite&lt;/text&gt;&#10;        &lt;/g&gt;&#10;&#10;        {/* 依赖关系：在线检索依赖离线索引组件（虚线开放箭头） */}&#10;        &lt;path d='M240 360 C240 470 990 470 990 178' fill='none' stroke='#3D7BD9' stroke-width='2' stroke-dasharray='6 4' /&gt;&#10;        &lt;path d='M990 178 l-8 6 v-12 z' fill='#3D7BD9' stroke='#3D7BD9' stroke-width='2' /&gt;&#10;        &lt;text x='600' y='462' text-anchor='middle' font-size='12' fill='#3D7BD9'&gt;«use» IIndex&lt;/text&gt;&#10;&#10;        {/* 底部说明 */}&#10;        &lt;text x='40' y='512' font-size='14' fill='#8B97A8'&gt;虚线开放箭头表示组件间依赖；右上角图标与 «component» 为 UML 组件符号，接口以名称标注。&lt;/text&gt;&#10;      &lt;/svg&gt;&#10;    &lt;/Box&gt;&#10;&#10;    {/* 页脚 */}&#10;    &lt;Box style={{ height: 40, flexDirection: 'row', alignItems: 'center', justifyContent: 'space-between', paddingLeft: 40, paddingRight: 40 }}&gt;&#10;      &lt;Text style={{ color: '#8B97A8', fontSize: 14 }}&gt;中国科学技术大学软件学院&lt;/Text&gt;&#10;      &lt;Text style={{ color: '#1E4FA8', fontSize: 16, fontWeight: 'bold' }}&gt;09 / 17&lt;/Text&gt;&#10;    &lt;/Box&gt;&#10;  &lt;/Box&gt;&#10;&lt;/Slide&gt;&#10;"/>
+        <p:cNvPr id="301" name=""/>
         <p:cNvGrpSpPr/>
         <p:nvPr/>
       </p:nvGrpSpPr>
@@ -15714,7 +12999,7 @@
       </p:grpSpPr>
       <p:sp>
         <p:nvSpPr>
-          <p:cNvPr id="374" name=""/>
+          <p:cNvPr id="302" name=""/>
           <p:cNvSpPr/>
           <p:nvPr/>
         </p:nvSpPr>
@@ -15733,12 +13018,15 @@
         </p:spPr>
         <p:txBody>
           <a:bodyPr/>
-          <a:p/>
-        </p:txBody>
-      </p:sp>
-      <p:sp>
-        <p:nvSpPr>
-          <p:cNvPr id="375" name=""/>
+          <a:p>
+            <a:pPr/>
+            <a:endParaRPr/>
+          </a:p>
+        </p:txBody>
+      </p:sp>
+      <p:sp>
+        <p:nvSpPr>
+          <p:cNvPr id="303" name=""/>
           <p:cNvSpPr/>
           <p:nvPr/>
         </p:nvSpPr>
@@ -15757,12 +13045,15 @@
         </p:spPr>
         <p:txBody>
           <a:bodyPr/>
-          <a:p/>
-        </p:txBody>
-      </p:sp>
-      <p:sp>
-        <p:nvSpPr>
-          <p:cNvPr id="376" name="" descr="{&quot;isTemplate&quot;:true,&quot;type&quot;:&quot;text&quot;}"/>
+          <a:p>
+            <a:pPr/>
+            <a:endParaRPr/>
+          </a:p>
+        </p:txBody>
+      </p:sp>
+      <p:sp>
+        <p:nvSpPr>
+          <p:cNvPr id="304" name="" descr="{&quot;isTemplate&quot;:true,&quot;type&quot;:&quot;text&quot;}"/>
           <p:cNvSpPr txBox="1"/>
           <p:nvPr/>
         </p:nvSpPr>
@@ -15817,7 +13108,7 @@
       </p:sp>
       <p:sp>
         <p:nvSpPr>
-          <p:cNvPr id="377" name="" descr="{&quot;isTemplate&quot;:true,&quot;type&quot;:&quot;text&quot;}"/>
+          <p:cNvPr id="305" name="" descr="{&quot;isTemplate&quot;:true,&quot;type&quot;:&quot;text&quot;}"/>
           <p:cNvSpPr txBox="1"/>
           <p:nvPr/>
         </p:nvSpPr>
@@ -15854,14 +13145,144 @@
       </p:sp>
       <p:sp>
         <p:nvSpPr>
-          <p:cNvPr id="378" name="" descr="{&quot;isTemplate&quot;:true,&quot;type&quot;:&quot;text&quot;}"/>
-          <p:cNvSpPr txBox="1"/>
-          <p:nvPr/>
-        </p:nvSpPr>
-        <p:spPr>
-          <a:xfrm rot="0" flipH="0" flipV="0">
-            <a:off x="381000" y="895350"/>
-            <a:ext cx="3028950" cy="390525"/>
+          <p:cNvPr id="306" name=""/>
+          <p:cNvSpPr/>
+          <p:nvPr/>
+        </p:nvSpPr>
+        <p:spPr>
+          <a:xfrm rot="0" flipH="0" flipV="0">
+            <a:off x="381000" y="952500"/>
+            <a:ext cx="457200" cy="38100"/>
+          </a:xfrm>
+          <a:prstGeom prst="roundRect">
+            <a:avLst>
+              <a:gd name="adj" fmla="val 50000"/>
+            </a:avLst>
+          </a:prstGeom>
+          <a:solidFill>
+            <a:srgbClr val="3D7BD9"/>
+          </a:solidFill>
+          <a:ln/>
+        </p:spPr>
+        <p:txBody>
+          <a:bodyPr/>
+          <a:p>
+            <a:pPr/>
+            <a:endParaRPr/>
+          </a:p>
+        </p:txBody>
+      </p:sp>
+      <p:sp>
+        <p:nvSpPr>
+          <p:cNvPr id="307" name="" descr="{&quot;isTemplate&quot;:true,&quot;type&quot;:&quot;text&quot;}"/>
+          <p:cNvSpPr txBox="1"/>
+          <p:nvPr/>
+        </p:nvSpPr>
+        <p:spPr>
+          <a:xfrm rot="0" flipH="0" flipV="0">
+            <a:off x="381000" y="1143000"/>
+            <a:ext cx="2857500" cy="514350"/>
+          </a:xfrm>
+          <a:prstGeom prst="rect"/>
+        </p:spPr>
+        <p:txBody>
+          <a:bodyPr wrap="none" lIns="0" tIns="0" rIns="0" bIns="0"/>
+          <a:p>
+            <a:pPr>
+              <a:lnSpc>
+                <a:spcPct val="130000"/>
+              </a:lnSpc>
+            </a:pPr>
+            <a:r>
+              <a:rPr lang="zh-CN" sz="2550" b="1">
+                <a:solidFill>
+                  <a:srgbClr val="1A2230"/>
+                </a:solidFill>
+                <a:latin typeface="Microsoft YaHei"/>
+                <a:ea typeface="Microsoft YaHei"/>
+              </a:rPr>
+              <a:t>在线问答链路</a:t>
+            </a:r>
+            <a:endParaRPr/>
+          </a:p>
+        </p:txBody>
+      </p:sp>
+      <p:sp>
+        <p:nvSpPr>
+          <p:cNvPr id="308" name="" descr="{&quot;isTemplate&quot;:true,&quot;type&quot;:&quot;text&quot;}"/>
+          <p:cNvSpPr txBox="1"/>
+          <p:nvPr/>
+        </p:nvSpPr>
+        <p:spPr>
+          <a:xfrm rot="0" flipH="0" flipV="0">
+            <a:off x="381000" y="1809750"/>
+            <a:ext cx="2857500" cy="552450"/>
+          </a:xfrm>
+          <a:prstGeom prst="rect"/>
+        </p:spPr>
+        <p:txBody>
+          <a:bodyPr wrap="square" lIns="0" tIns="0" rIns="0" bIns="0">
+            <a:normAutofit/>
+          </a:bodyPr>
+          <a:p>
+            <a:pPr>
+              <a:lnSpc>
+                <a:spcPct val="150000"/>
+              </a:lnSpc>
+            </a:pPr>
+            <a:r>
+              <a:rPr lang="zh-CN" sz="1200">
+                <a:solidFill>
+                  <a:srgbClr val="8B97A8"/>
+                </a:solidFill>
+                <a:latin typeface="Microsoft YaHei"/>
+                <a:ea typeface="Microsoft YaHei"/>
+              </a:rPr>
+              <a:t>每次提问，从知识库检索并生成带引用的加工指令</a:t>
+            </a:r>
+            <a:endParaRPr/>
+          </a:p>
+        </p:txBody>
+      </p:sp>
+      <p:sp>
+        <p:nvSpPr>
+          <p:cNvPr id="309" name=""/>
+          <p:cNvSpPr/>
+          <p:nvPr/>
+        </p:nvSpPr>
+        <p:spPr>
+          <a:xfrm rot="0" flipH="0" flipV="0">
+            <a:off x="381000" y="5143500"/>
+            <a:ext cx="2857500" cy="1181100"/>
+          </a:xfrm>
+          <a:prstGeom prst="roundRect">
+            <a:avLst>
+              <a:gd name="adj" fmla="val 6452"/>
+            </a:avLst>
+          </a:prstGeom>
+          <a:solidFill>
+            <a:srgbClr val="0E3F8C"/>
+          </a:solidFill>
+          <a:ln/>
+        </p:spPr>
+        <p:txBody>
+          <a:bodyPr/>
+          <a:p>
+            <a:pPr/>
+            <a:endParaRPr/>
+          </a:p>
+        </p:txBody>
+      </p:sp>
+      <p:sp>
+        <p:nvSpPr>
+          <p:cNvPr id="310" name="" descr="{&quot;isTemplate&quot;:true,&quot;type&quot;:&quot;text&quot;}"/>
+          <p:cNvSpPr txBox="1"/>
+          <p:nvPr/>
+        </p:nvSpPr>
+        <p:spPr>
+          <a:xfrm rot="0" flipH="0" flipV="0">
+            <a:off x="552450" y="5314950"/>
+            <a:ext cx="2514600" cy="209550"/>
           </a:xfrm>
           <a:prstGeom prst="rect"/>
         </p:spPr>
@@ -15874,49 +13295,673 @@
               </a:lnSpc>
             </a:pPr>
             <a:r>
-              <a:rPr lang="zh-CN" sz="2550" b="1">
+              <a:rPr lang="zh-CN" sz="1350" b="1">
+                <a:solidFill>
+                  <a:srgbClr val="FFFFFF"/>
+                </a:solidFill>
+                <a:latin typeface="Microsoft YaHei"/>
+                <a:ea typeface="Microsoft YaHei"/>
+              </a:rPr>
+              <a:t>关键点</a:t>
+            </a:r>
+            <a:endParaRPr/>
+          </a:p>
+        </p:txBody>
+      </p:sp>
+      <p:sp>
+        <p:nvSpPr>
+          <p:cNvPr id="311" name="" descr="{&quot;isTemplate&quot;:true,&quot;type&quot;:&quot;text&quot;}"/>
+          <p:cNvSpPr txBox="1"/>
+          <p:nvPr/>
+        </p:nvSpPr>
+        <p:spPr>
+          <a:xfrm rot="0" flipH="0" flipV="0">
+            <a:off x="552450" y="5600700"/>
+            <a:ext cx="2514600" cy="552450"/>
+          </a:xfrm>
+          <a:prstGeom prst="rect"/>
+        </p:spPr>
+        <p:txBody>
+          <a:bodyPr wrap="square" lIns="0" tIns="0" rIns="0" bIns="0">
+            <a:normAutofit/>
+          </a:bodyPr>
+          <a:p>
+            <a:pPr>
+              <a:lnSpc>
+                <a:spcPct val="160000"/>
+              </a:lnSpc>
+            </a:pPr>
+            <a:r>
+              <a:rPr lang="zh-CN" sz="1125">
+                <a:solidFill>
+                  <a:srgbClr val="D6E4F7"/>
+                </a:solidFill>
+                <a:latin typeface="Microsoft YaHei"/>
+                <a:ea typeface="Microsoft YaHei"/>
+              </a:rPr>
+              <a:t>多轮查询改写：把含代词、省略的追问补全为独立问题，再走检索链路。</a:t>
+            </a:r>
+            <a:endParaRPr/>
+          </a:p>
+        </p:txBody>
+      </p:sp>
+      <p:sp>
+        <p:nvSpPr>
+          <p:cNvPr id="312" name=""/>
+          <p:cNvSpPr/>
+          <p:nvPr/>
+        </p:nvSpPr>
+        <p:spPr>
+          <a:xfrm rot="0" flipH="0" flipV="0">
+            <a:off x="3619500" y="952500"/>
+            <a:ext cx="8191500" cy="895350"/>
+          </a:xfrm>
+          <a:prstGeom prst="roundRect">
+            <a:avLst>
+              <a:gd name="adj" fmla="val 10638"/>
+            </a:avLst>
+          </a:prstGeom>
+          <a:solidFill>
+            <a:srgbClr val="F7F9FC"/>
+          </a:solidFill>
+          <a:ln w="12700">
+            <a:solidFill>
+              <a:srgbClr val="E5E7EB"/>
+            </a:solidFill>
+            <a:prstDash val="solid"/>
+          </a:ln>
+        </p:spPr>
+        <p:txBody>
+          <a:bodyPr/>
+          <a:p>
+            <a:pPr/>
+            <a:endParaRPr/>
+          </a:p>
+        </p:txBody>
+      </p:sp>
+      <p:sp>
+        <p:nvSpPr>
+          <p:cNvPr id="313" name=""/>
+          <p:cNvSpPr/>
+          <p:nvPr/>
+        </p:nvSpPr>
+        <p:spPr>
+          <a:xfrm rot="0" flipH="0" flipV="0">
+            <a:off x="3771900" y="1181100"/>
+            <a:ext cx="438150" cy="438150"/>
+          </a:xfrm>
+          <a:prstGeom prst="roundRect">
+            <a:avLst>
+              <a:gd name="adj" fmla="val 50000"/>
+            </a:avLst>
+          </a:prstGeom>
+          <a:solidFill>
+            <a:srgbClr val="1E4FA8"/>
+          </a:solidFill>
+          <a:ln/>
+        </p:spPr>
+        <p:txBody>
+          <a:bodyPr/>
+          <a:p>
+            <a:pPr/>
+            <a:endParaRPr/>
+          </a:p>
+        </p:txBody>
+      </p:sp>
+      <p:sp>
+        <p:nvSpPr>
+          <p:cNvPr id="314" name="" descr="{&quot;isTemplate&quot;:true,&quot;type&quot;:&quot;text&quot;}"/>
+          <p:cNvSpPr txBox="1"/>
+          <p:nvPr/>
+        </p:nvSpPr>
+        <p:spPr>
+          <a:xfrm rot="0" flipH="0" flipV="0">
+            <a:off x="3933825" y="1285875"/>
+            <a:ext cx="123825" cy="228600"/>
+          </a:xfrm>
+          <a:prstGeom prst="rect"/>
+        </p:spPr>
+        <p:txBody>
+          <a:bodyPr wrap="none" lIns="0" tIns="0" rIns="0" bIns="0"/>
+          <a:p>
+            <a:pPr>
+              <a:lnSpc>
+                <a:spcPct val="100000"/>
+              </a:lnSpc>
+            </a:pPr>
+            <a:r>
+              <a:rPr lang="en-US" sz="1500" b="1">
+                <a:solidFill>
+                  <a:srgbClr val="FFFFFF"/>
+                </a:solidFill>
+                <a:latin typeface="Microsoft YaHei"/>
+                <a:ea typeface="Microsoft YaHei"/>
+              </a:rPr>
+              <a:t>1</a:t>
+            </a:r>
+            <a:endParaRPr/>
+          </a:p>
+        </p:txBody>
+      </p:sp>
+      <p:sp>
+        <p:nvSpPr>
+          <p:cNvPr id="315" name="" descr="{&quot;isTemplate&quot;:true,&quot;type&quot;:&quot;text&quot;}"/>
+          <p:cNvSpPr txBox="1"/>
+          <p:nvPr/>
+        </p:nvSpPr>
+        <p:spPr>
+          <a:xfrm rot="0" flipH="0" flipV="0">
+            <a:off x="4400550" y="1104900"/>
+            <a:ext cx="7258050" cy="257175"/>
+          </a:xfrm>
+          <a:prstGeom prst="rect"/>
+        </p:spPr>
+        <p:txBody>
+          <a:bodyPr wrap="none" lIns="0" tIns="0" rIns="0" bIns="0"/>
+          <a:p>
+            <a:pPr>
+              <a:lnSpc>
+                <a:spcPct val="100000"/>
+              </a:lnSpc>
+            </a:pPr>
+            <a:r>
+              <a:rPr lang="zh-CN" sz="1650" b="1">
                 <a:solidFill>
                   <a:srgbClr val="1A2230"/>
                 </a:solidFill>
                 <a:latin typeface="Microsoft YaHei"/>
                 <a:ea typeface="Microsoft YaHei"/>
               </a:rPr>
-              <a:t>系统组件图（</a:t>
-            </a:r>
-            <a:r>
-              <a:rPr lang="en-US" sz="2550" b="1">
+              <a:t>查询改写</a:t>
+            </a:r>
+            <a:endParaRPr/>
+          </a:p>
+        </p:txBody>
+      </p:sp>
+      <p:sp>
+        <p:nvSpPr>
+          <p:cNvPr id="316" name="" descr="{&quot;isTemplate&quot;:true,&quot;type&quot;:&quot;text&quot;}"/>
+          <p:cNvSpPr txBox="1"/>
+          <p:nvPr/>
+        </p:nvSpPr>
+        <p:spPr>
+          <a:xfrm rot="0" flipH="0" flipV="0">
+            <a:off x="4400550" y="1419225"/>
+            <a:ext cx="7258050" cy="276225"/>
+          </a:xfrm>
+          <a:prstGeom prst="rect"/>
+        </p:spPr>
+        <p:txBody>
+          <a:bodyPr wrap="none" lIns="0" tIns="0" rIns="0" bIns="0"/>
+          <a:p>
+            <a:pPr>
+              <a:lnSpc>
+                <a:spcPct val="150000"/>
+              </a:lnSpc>
+            </a:pPr>
+            <a:r>
+              <a:rPr lang="zh-CN" sz="1200">
+                <a:solidFill>
+                  <a:srgbClr val="4A5568"/>
+                </a:solidFill>
+                <a:latin typeface="Microsoft YaHei"/>
+                <a:ea typeface="Microsoft YaHei"/>
+              </a:rPr>
+              <a:t>记录历史，将追问补全为独立问题</a:t>
+            </a:r>
+            <a:endParaRPr/>
+          </a:p>
+        </p:txBody>
+      </p:sp>
+      <p:sp>
+        <p:nvSpPr>
+          <p:cNvPr id="317" name=""/>
+          <p:cNvSpPr/>
+          <p:nvPr/>
+        </p:nvSpPr>
+        <p:spPr>
+          <a:xfrm rot="0" flipH="0" flipV="0">
+            <a:off x="3619500" y="2076450"/>
+            <a:ext cx="8191500" cy="895350"/>
+          </a:xfrm>
+          <a:prstGeom prst="roundRect">
+            <a:avLst>
+              <a:gd name="adj" fmla="val 10638"/>
+            </a:avLst>
+          </a:prstGeom>
+          <a:solidFill>
+            <a:srgbClr val="F7F9FC"/>
+          </a:solidFill>
+          <a:ln w="12700">
+            <a:solidFill>
+              <a:srgbClr val="E5E7EB"/>
+            </a:solidFill>
+            <a:prstDash val="solid"/>
+          </a:ln>
+        </p:spPr>
+        <p:txBody>
+          <a:bodyPr/>
+          <a:p>
+            <a:pPr/>
+            <a:endParaRPr/>
+          </a:p>
+        </p:txBody>
+      </p:sp>
+      <p:sp>
+        <p:nvSpPr>
+          <p:cNvPr id="318" name=""/>
+          <p:cNvSpPr/>
+          <p:nvPr/>
+        </p:nvSpPr>
+        <p:spPr>
+          <a:xfrm rot="0" flipH="0" flipV="0">
+            <a:off x="3771900" y="2305050"/>
+            <a:ext cx="438150" cy="438150"/>
+          </a:xfrm>
+          <a:prstGeom prst="roundRect">
+            <a:avLst>
+              <a:gd name="adj" fmla="val 50000"/>
+            </a:avLst>
+          </a:prstGeom>
+          <a:solidFill>
+            <a:srgbClr val="1E4FA8"/>
+          </a:solidFill>
+          <a:ln/>
+        </p:spPr>
+        <p:txBody>
+          <a:bodyPr/>
+          <a:p>
+            <a:pPr/>
+            <a:endParaRPr/>
+          </a:p>
+        </p:txBody>
+      </p:sp>
+      <p:sp>
+        <p:nvSpPr>
+          <p:cNvPr id="319" name="" descr="{&quot;isTemplate&quot;:true,&quot;type&quot;:&quot;text&quot;}"/>
+          <p:cNvSpPr txBox="1"/>
+          <p:nvPr/>
+        </p:nvSpPr>
+        <p:spPr>
+          <a:xfrm rot="0" flipH="0" flipV="0">
+            <a:off x="3933825" y="2409825"/>
+            <a:ext cx="123825" cy="228600"/>
+          </a:xfrm>
+          <a:prstGeom prst="rect"/>
+        </p:spPr>
+        <p:txBody>
+          <a:bodyPr wrap="none" lIns="0" tIns="0" rIns="0" bIns="0"/>
+          <a:p>
+            <a:pPr>
+              <a:lnSpc>
+                <a:spcPct val="100000"/>
+              </a:lnSpc>
+            </a:pPr>
+            <a:r>
+              <a:rPr lang="en-US" sz="1500" b="1">
+                <a:solidFill>
+                  <a:srgbClr val="FFFFFF"/>
+                </a:solidFill>
+                <a:latin typeface="Microsoft YaHei"/>
+                <a:ea typeface="Microsoft YaHei"/>
+              </a:rPr>
+              <a:t>2</a:t>
+            </a:r>
+            <a:endParaRPr/>
+          </a:p>
+        </p:txBody>
+      </p:sp>
+      <p:sp>
+        <p:nvSpPr>
+          <p:cNvPr id="320" name="" descr="{&quot;isTemplate&quot;:true,&quot;type&quot;:&quot;text&quot;}"/>
+          <p:cNvSpPr txBox="1"/>
+          <p:nvPr/>
+        </p:nvSpPr>
+        <p:spPr>
+          <a:xfrm rot="0" flipH="0" flipV="0">
+            <a:off x="4400550" y="2228850"/>
+            <a:ext cx="7258050" cy="257175"/>
+          </a:xfrm>
+          <a:prstGeom prst="rect"/>
+        </p:spPr>
+        <p:txBody>
+          <a:bodyPr wrap="none" lIns="0" tIns="0" rIns="0" bIns="0"/>
+          <a:p>
+            <a:pPr>
+              <a:lnSpc>
+                <a:spcPct val="100000"/>
+              </a:lnSpc>
+            </a:pPr>
+            <a:r>
+              <a:rPr lang="zh-CN" sz="1650" b="1">
                 <a:solidFill>
                   <a:srgbClr val="1A2230"/>
                 </a:solidFill>
                 <a:latin typeface="Microsoft YaHei"/>
                 <a:ea typeface="Microsoft YaHei"/>
               </a:rPr>
-              <a:t>UML</a:t>
-            </a:r>
-            <a:r>
-              <a:rPr lang="zh-CN" sz="2550" b="1">
+              <a:t>混合召回</a:t>
+            </a:r>
+            <a:endParaRPr/>
+          </a:p>
+        </p:txBody>
+      </p:sp>
+      <p:sp>
+        <p:nvSpPr>
+          <p:cNvPr id="321" name="" descr="{&quot;isTemplate&quot;:true,&quot;type&quot;:&quot;text&quot;}"/>
+          <p:cNvSpPr txBox="1"/>
+          <p:nvPr/>
+        </p:nvSpPr>
+        <p:spPr>
+          <a:xfrm rot="0" flipH="0" flipV="0">
+            <a:off x="4400550" y="2543175"/>
+            <a:ext cx="7258050" cy="276225"/>
+          </a:xfrm>
+          <a:prstGeom prst="rect"/>
+        </p:spPr>
+        <p:txBody>
+          <a:bodyPr wrap="none" lIns="0" tIns="0" rIns="0" bIns="0"/>
+          <a:p>
+            <a:pPr>
+              <a:lnSpc>
+                <a:spcPct val="150000"/>
+              </a:lnSpc>
+            </a:pPr>
+            <a:r>
+              <a:rPr lang="zh-CN" sz="1200">
+                <a:solidFill>
+                  <a:srgbClr val="4A5568"/>
+                </a:solidFill>
+                <a:latin typeface="Microsoft YaHei"/>
+                <a:ea typeface="Microsoft YaHei"/>
+              </a:rPr>
+              <a:t>并行执行向量检索</a:t>
+            </a:r>
+            <a:r>
+              <a:rPr lang="en-US" sz="1200">
+                <a:solidFill>
+                  <a:srgbClr val="4A5568"/>
+                </a:solidFill>
+                <a:latin typeface="Microsoft YaHei"/>
+                <a:ea typeface="Microsoft YaHei"/>
+              </a:rPr>
+              <a:t xml:space="preserve"> + BM25 </a:t>
+            </a:r>
+            <a:r>
+              <a:rPr lang="zh-CN" sz="1200">
+                <a:solidFill>
+                  <a:srgbClr val="4A5568"/>
+                </a:solidFill>
+                <a:latin typeface="Microsoft YaHei"/>
+                <a:ea typeface="Microsoft YaHei"/>
+              </a:rPr>
+              <a:t>检索</a:t>
+            </a:r>
+            <a:endParaRPr/>
+          </a:p>
+        </p:txBody>
+      </p:sp>
+      <p:sp>
+        <p:nvSpPr>
+          <p:cNvPr id="322" name=""/>
+          <p:cNvSpPr/>
+          <p:nvPr/>
+        </p:nvSpPr>
+        <p:spPr>
+          <a:xfrm rot="0" flipH="0" flipV="0">
+            <a:off x="3619500" y="3190875"/>
+            <a:ext cx="8191500" cy="895350"/>
+          </a:xfrm>
+          <a:prstGeom prst="roundRect">
+            <a:avLst>
+              <a:gd name="adj" fmla="val 10638"/>
+            </a:avLst>
+          </a:prstGeom>
+          <a:solidFill>
+            <a:srgbClr val="F7F9FC"/>
+          </a:solidFill>
+          <a:ln w="12700">
+            <a:solidFill>
+              <a:srgbClr val="E5E7EB"/>
+            </a:solidFill>
+            <a:prstDash val="solid"/>
+          </a:ln>
+        </p:spPr>
+        <p:txBody>
+          <a:bodyPr/>
+          <a:p>
+            <a:pPr/>
+            <a:endParaRPr/>
+          </a:p>
+        </p:txBody>
+      </p:sp>
+      <p:sp>
+        <p:nvSpPr>
+          <p:cNvPr id="323" name=""/>
+          <p:cNvSpPr/>
+          <p:nvPr/>
+        </p:nvSpPr>
+        <p:spPr>
+          <a:xfrm rot="0" flipH="0" flipV="0">
+            <a:off x="3771900" y="3419475"/>
+            <a:ext cx="438150" cy="438150"/>
+          </a:xfrm>
+          <a:prstGeom prst="roundRect">
+            <a:avLst>
+              <a:gd name="adj" fmla="val 50000"/>
+            </a:avLst>
+          </a:prstGeom>
+          <a:solidFill>
+            <a:srgbClr val="1E4FA8"/>
+          </a:solidFill>
+          <a:ln/>
+        </p:spPr>
+        <p:txBody>
+          <a:bodyPr/>
+          <a:p>
+            <a:pPr/>
+            <a:endParaRPr/>
+          </a:p>
+        </p:txBody>
+      </p:sp>
+      <p:sp>
+        <p:nvSpPr>
+          <p:cNvPr id="324" name="" descr="{&quot;isTemplate&quot;:true,&quot;type&quot;:&quot;text&quot;}"/>
+          <p:cNvSpPr txBox="1"/>
+          <p:nvPr/>
+        </p:nvSpPr>
+        <p:spPr>
+          <a:xfrm rot="0" flipH="0" flipV="0">
+            <a:off x="3933825" y="3524250"/>
+            <a:ext cx="123825" cy="228600"/>
+          </a:xfrm>
+          <a:prstGeom prst="rect"/>
+        </p:spPr>
+        <p:txBody>
+          <a:bodyPr wrap="none" lIns="0" tIns="0" rIns="0" bIns="0"/>
+          <a:p>
+            <a:pPr>
+              <a:lnSpc>
+                <a:spcPct val="100000"/>
+              </a:lnSpc>
+            </a:pPr>
+            <a:r>
+              <a:rPr lang="en-US" sz="1500" b="1">
+                <a:solidFill>
+                  <a:srgbClr val="FFFFFF"/>
+                </a:solidFill>
+                <a:latin typeface="Microsoft YaHei"/>
+                <a:ea typeface="Microsoft YaHei"/>
+              </a:rPr>
+              <a:t>3</a:t>
+            </a:r>
+            <a:endParaRPr/>
+          </a:p>
+        </p:txBody>
+      </p:sp>
+      <p:sp>
+        <p:nvSpPr>
+          <p:cNvPr id="325" name="" descr="{&quot;isTemplate&quot;:true,&quot;type&quot;:&quot;text&quot;}"/>
+          <p:cNvSpPr txBox="1"/>
+          <p:nvPr/>
+        </p:nvSpPr>
+        <p:spPr>
+          <a:xfrm rot="0" flipH="0" flipV="0">
+            <a:off x="4400550" y="3343275"/>
+            <a:ext cx="7258050" cy="257175"/>
+          </a:xfrm>
+          <a:prstGeom prst="rect"/>
+        </p:spPr>
+        <p:txBody>
+          <a:bodyPr wrap="none" lIns="0" tIns="0" rIns="0" bIns="0"/>
+          <a:p>
+            <a:pPr>
+              <a:lnSpc>
+                <a:spcPct val="100000"/>
+              </a:lnSpc>
+            </a:pPr>
+            <a:r>
+              <a:rPr lang="en-US" sz="1650" b="1">
                 <a:solidFill>
                   <a:srgbClr val="1A2230"/>
                 </a:solidFill>
                 <a:latin typeface="Microsoft YaHei"/>
                 <a:ea typeface="Microsoft YaHei"/>
               </a:rPr>
-              <a:t>）</a:t>
-            </a:r>
-            <a:endParaRPr/>
-          </a:p>
-        </p:txBody>
-      </p:sp>
-      <p:sp>
-        <p:nvSpPr>
-          <p:cNvPr id="379" name="" descr="{&quot;isTemplate&quot;:true,&quot;type&quot;:&quot;text&quot;}"/>
-          <p:cNvSpPr txBox="1"/>
-          <p:nvPr/>
-        </p:nvSpPr>
-        <p:spPr>
-          <a:xfrm rot="0" flipH="0" flipV="0">
-            <a:off x="3562350" y="895350"/>
-            <a:ext cx="2276475" cy="390525"/>
+              <a:t xml:space="preserve">RRF </a:t>
+            </a:r>
+            <a:r>
+              <a:rPr lang="zh-CN" sz="1650" b="1">
+                <a:solidFill>
+                  <a:srgbClr val="1A2230"/>
+                </a:solidFill>
+                <a:latin typeface="Microsoft YaHei"/>
+                <a:ea typeface="Microsoft YaHei"/>
+              </a:rPr>
+              <a:t>融合</a:t>
+            </a:r>
+            <a:endParaRPr/>
+          </a:p>
+        </p:txBody>
+      </p:sp>
+      <p:sp>
+        <p:nvSpPr>
+          <p:cNvPr id="326" name="" descr="{&quot;isTemplate&quot;:true,&quot;type&quot;:&quot;text&quot;}"/>
+          <p:cNvSpPr txBox="1"/>
+          <p:nvPr/>
+        </p:nvSpPr>
+        <p:spPr>
+          <a:xfrm rot="0" flipH="0" flipV="0">
+            <a:off x="4400550" y="3657600"/>
+            <a:ext cx="7258050" cy="276225"/>
+          </a:xfrm>
+          <a:prstGeom prst="rect"/>
+        </p:spPr>
+        <p:txBody>
+          <a:bodyPr wrap="none" lIns="0" tIns="0" rIns="0" bIns="0"/>
+          <a:p>
+            <a:pPr>
+              <a:lnSpc>
+                <a:spcPct val="150000"/>
+              </a:lnSpc>
+            </a:pPr>
+            <a:r>
+              <a:rPr lang="en-US" sz="1200">
+                <a:solidFill>
+                  <a:srgbClr val="4A5568"/>
+                </a:solidFill>
+                <a:latin typeface="Microsoft YaHei"/>
+                <a:ea typeface="Microsoft YaHei"/>
+              </a:rPr>
+              <a:t xml:space="preserve">k=60 </a:t>
+            </a:r>
+            <a:r>
+              <a:rPr lang="zh-CN" sz="1200">
+                <a:solidFill>
+                  <a:srgbClr val="4A5568"/>
+                </a:solidFill>
+                <a:latin typeface="Microsoft YaHei"/>
+                <a:ea typeface="Microsoft YaHei"/>
+              </a:rPr>
+              <a:t>合并两路结果并去重</a:t>
+            </a:r>
+            <a:endParaRPr/>
+          </a:p>
+        </p:txBody>
+      </p:sp>
+      <p:sp>
+        <p:nvSpPr>
+          <p:cNvPr id="327" name=""/>
+          <p:cNvSpPr/>
+          <p:nvPr/>
+        </p:nvSpPr>
+        <p:spPr>
+          <a:xfrm rot="0" flipH="0" flipV="0">
+            <a:off x="3619500" y="4314825"/>
+            <a:ext cx="8191500" cy="895350"/>
+          </a:xfrm>
+          <a:prstGeom prst="roundRect">
+            <a:avLst>
+              <a:gd name="adj" fmla="val 10638"/>
+            </a:avLst>
+          </a:prstGeom>
+          <a:solidFill>
+            <a:srgbClr val="F7F9FC"/>
+          </a:solidFill>
+          <a:ln w="12700">
+            <a:solidFill>
+              <a:srgbClr val="E5E7EB"/>
+            </a:solidFill>
+            <a:prstDash val="solid"/>
+          </a:ln>
+        </p:spPr>
+        <p:txBody>
+          <a:bodyPr/>
+          <a:p>
+            <a:pPr/>
+            <a:endParaRPr/>
+          </a:p>
+        </p:txBody>
+      </p:sp>
+      <p:sp>
+        <p:nvSpPr>
+          <p:cNvPr id="328" name=""/>
+          <p:cNvSpPr/>
+          <p:nvPr/>
+        </p:nvSpPr>
+        <p:spPr>
+          <a:xfrm rot="0" flipH="0" flipV="0">
+            <a:off x="3771900" y="4543425"/>
+            <a:ext cx="438150" cy="438150"/>
+          </a:xfrm>
+          <a:prstGeom prst="roundRect">
+            <a:avLst>
+              <a:gd name="adj" fmla="val 50000"/>
+            </a:avLst>
+          </a:prstGeom>
+          <a:solidFill>
+            <a:srgbClr val="1E4FA8"/>
+          </a:solidFill>
+          <a:ln/>
+        </p:spPr>
+        <p:txBody>
+          <a:bodyPr/>
+          <a:p>
+            <a:pPr/>
+            <a:endParaRPr/>
+          </a:p>
+        </p:txBody>
+      </p:sp>
+      <p:sp>
+        <p:nvSpPr>
+          <p:cNvPr id="329" name="" descr="{&quot;isTemplate&quot;:true,&quot;type&quot;:&quot;text&quot;}"/>
+          <p:cNvSpPr txBox="1"/>
+          <p:nvPr/>
+        </p:nvSpPr>
+        <p:spPr>
+          <a:xfrm rot="0" flipH="0" flipV="0">
+            <a:off x="3933825" y="4648200"/>
+            <a:ext cx="123825" cy="228600"/>
           </a:xfrm>
           <a:prstGeom prst="rect"/>
         </p:spPr>
@@ -15929,63 +13974,320 @@
               </a:lnSpc>
             </a:pPr>
             <a:r>
+              <a:rPr lang="en-US" sz="1500" b="1">
+                <a:solidFill>
+                  <a:srgbClr val="FFFFFF"/>
+                </a:solidFill>
+                <a:latin typeface="Microsoft YaHei"/>
+                <a:ea typeface="Microsoft YaHei"/>
+              </a:rPr>
+              <a:t>4</a:t>
+            </a:r>
+            <a:endParaRPr/>
+          </a:p>
+        </p:txBody>
+      </p:sp>
+      <p:sp>
+        <p:nvSpPr>
+          <p:cNvPr id="330" name="" descr="{&quot;isTemplate&quot;:true,&quot;type&quot;:&quot;text&quot;}"/>
+          <p:cNvSpPr txBox="1"/>
+          <p:nvPr/>
+        </p:nvSpPr>
+        <p:spPr>
+          <a:xfrm rot="0" flipH="0" flipV="0">
+            <a:off x="4400550" y="4467225"/>
+            <a:ext cx="7258050" cy="257175"/>
+          </a:xfrm>
+          <a:prstGeom prst="rect"/>
+        </p:spPr>
+        <p:txBody>
+          <a:bodyPr wrap="none" lIns="0" tIns="0" rIns="0" bIns="0"/>
+          <a:p>
+            <a:pPr>
+              <a:lnSpc>
+                <a:spcPct val="100000"/>
+              </a:lnSpc>
+            </a:pPr>
+            <a:r>
+              <a:rPr lang="zh-CN" sz="1650" b="1">
+                <a:solidFill>
+                  <a:srgbClr val="1A2230"/>
+                </a:solidFill>
+                <a:latin typeface="Microsoft YaHei"/>
+                <a:ea typeface="Microsoft YaHei"/>
+              </a:rPr>
+              <a:t>重排序</a:t>
+            </a:r>
+            <a:endParaRPr/>
+          </a:p>
+        </p:txBody>
+      </p:sp>
+      <p:sp>
+        <p:nvSpPr>
+          <p:cNvPr id="331" name="" descr="{&quot;isTemplate&quot;:true,&quot;type&quot;:&quot;text&quot;}"/>
+          <p:cNvSpPr txBox="1"/>
+          <p:nvPr/>
+        </p:nvSpPr>
+        <p:spPr>
+          <a:xfrm rot="0" flipH="0" flipV="0">
+            <a:off x="4400550" y="4781550"/>
+            <a:ext cx="7258050" cy="276225"/>
+          </a:xfrm>
+          <a:prstGeom prst="rect"/>
+        </p:spPr>
+        <p:txBody>
+          <a:bodyPr wrap="none" lIns="0" tIns="0" rIns="0" bIns="0"/>
+          <a:p>
+            <a:pPr>
+              <a:lnSpc>
+                <a:spcPct val="150000"/>
+              </a:lnSpc>
+            </a:pPr>
+            <a:r>
               <a:rPr lang="en-US" sz="1200">
                 <a:solidFill>
-                  <a:srgbClr val="8B97A8"/>
-                </a:solidFill>
-                <a:latin typeface="Microsoft YaHei"/>
-                <a:ea typeface="Microsoft YaHei"/>
-              </a:rPr>
-              <a:t xml:space="preserve">Component Diagram · </a:t>
+                  <a:srgbClr val="4A5568"/>
+                </a:solidFill>
+                <a:latin typeface="Microsoft YaHei"/>
+                <a:ea typeface="Microsoft YaHei"/>
+              </a:rPr>
+              <a:t xml:space="preserve">bge-reranker-v2-m3 </a:t>
             </a:r>
             <a:r>
               <a:rPr lang="zh-CN" sz="1200">
                 <a:solidFill>
-                  <a:srgbClr val="8B97A8"/>
-                </a:solidFill>
-                <a:latin typeface="Microsoft YaHei"/>
-                <a:ea typeface="Microsoft YaHei"/>
-              </a:rPr>
-              <a:t>概要设计</a:t>
-            </a:r>
-            <a:endParaRPr/>
-          </a:p>
-        </p:txBody>
-      </p:sp>
-      <p:pic>
-        <p:nvPicPr>
-          <p:cNvPr id="380" name=""/>
-          <p:cNvPicPr>
-            <a:picLocks noChangeAspect="1"/>
-          </p:cNvPicPr>
-          <p:nvPr/>
-        </p:nvPicPr>
-        <p:blipFill>
-          <a:blip>
-            <a:extLst>
-              <a:ext uri="{96DAC541-7B7A-43D3-8B79-37D633B846F1}">
-                <asvg:svgBlip r:embed="rId1"/>
-              </a:ext>
-            </a:extLst>
-          </a:blip>
-          <a:stretch>
-            <a:fillRect/>
-          </a:stretch>
-        </p:blipFill>
-        <p:spPr>
-          <a:xfrm rot="0" flipH="0" flipV="0">
-            <a:off x="476250" y="1428750"/>
-            <a:ext cx="11239500" cy="4953000"/>
-          </a:xfrm>
-          <a:prstGeom prst="rect">
-            <a:avLst/>
+                  <a:srgbClr val="4A5568"/>
+                </a:solidFill>
+                <a:latin typeface="Microsoft YaHei"/>
+                <a:ea typeface="Microsoft YaHei"/>
+              </a:rPr>
+              <a:t>精排，取</a:t>
+            </a:r>
+            <a:r>
+              <a:rPr lang="en-US" sz="1200">
+                <a:solidFill>
+                  <a:srgbClr val="4A5568"/>
+                </a:solidFill>
+                <a:latin typeface="Microsoft YaHei"/>
+                <a:ea typeface="Microsoft YaHei"/>
+              </a:rPr>
+              <a:t xml:space="preserve"> top 3~5</a:t>
+            </a:r>
+            <a:endParaRPr/>
+          </a:p>
+        </p:txBody>
+      </p:sp>
+      <p:sp>
+        <p:nvSpPr>
+          <p:cNvPr id="332" name=""/>
+          <p:cNvSpPr/>
+          <p:nvPr/>
+        </p:nvSpPr>
+        <p:spPr>
+          <a:xfrm rot="0" flipH="0" flipV="0">
+            <a:off x="3619500" y="5429250"/>
+            <a:ext cx="8191500" cy="895350"/>
+          </a:xfrm>
+          <a:prstGeom prst="roundRect">
+            <a:avLst>
+              <a:gd name="adj" fmla="val 10638"/>
+            </a:avLst>
           </a:prstGeom>
+          <a:solidFill>
+            <a:srgbClr val="F7F9FC"/>
+          </a:solidFill>
+          <a:ln w="12700">
+            <a:solidFill>
+              <a:srgbClr val="E5E7EB"/>
+            </a:solidFill>
+            <a:prstDash val="solid"/>
+          </a:ln>
+        </p:spPr>
+        <p:txBody>
+          <a:bodyPr/>
+          <a:p>
+            <a:pPr/>
+            <a:endParaRPr/>
+          </a:p>
+        </p:txBody>
+      </p:sp>
+      <p:sp>
+        <p:nvSpPr>
+          <p:cNvPr id="333" name=""/>
+          <p:cNvSpPr/>
+          <p:nvPr/>
+        </p:nvSpPr>
+        <p:spPr>
+          <a:xfrm rot="0" flipH="0" flipV="0">
+            <a:off x="3771900" y="5657850"/>
+            <a:ext cx="438150" cy="438150"/>
+          </a:xfrm>
+          <a:prstGeom prst="roundRect">
+            <a:avLst>
+              <a:gd name="adj" fmla="val 50000"/>
+            </a:avLst>
+          </a:prstGeom>
+          <a:solidFill>
+            <a:srgbClr val="1E4FA8"/>
+          </a:solidFill>
           <a:ln/>
         </p:spPr>
-      </p:pic>
-      <p:sp>
-        <p:nvSpPr>
-          <p:cNvPr id="381" name="" descr="{&quot;isTemplate&quot;:true,&quot;type&quot;:&quot;text&quot;}"/>
+        <p:txBody>
+          <a:bodyPr/>
+          <a:p>
+            <a:pPr/>
+            <a:endParaRPr/>
+          </a:p>
+        </p:txBody>
+      </p:sp>
+      <p:sp>
+        <p:nvSpPr>
+          <p:cNvPr id="334" name="" descr="{&quot;isTemplate&quot;:true,&quot;type&quot;:&quot;text&quot;}"/>
+          <p:cNvSpPr txBox="1"/>
+          <p:nvPr/>
+        </p:nvSpPr>
+        <p:spPr>
+          <a:xfrm rot="0" flipH="0" flipV="0">
+            <a:off x="3933825" y="5762625"/>
+            <a:ext cx="123825" cy="228600"/>
+          </a:xfrm>
+          <a:prstGeom prst="rect"/>
+        </p:spPr>
+        <p:txBody>
+          <a:bodyPr wrap="none" lIns="0" tIns="0" rIns="0" bIns="0"/>
+          <a:p>
+            <a:pPr>
+              <a:lnSpc>
+                <a:spcPct val="100000"/>
+              </a:lnSpc>
+            </a:pPr>
+            <a:r>
+              <a:rPr lang="en-US" sz="1500" b="1">
+                <a:solidFill>
+                  <a:srgbClr val="FFFFFF"/>
+                </a:solidFill>
+                <a:latin typeface="Microsoft YaHei"/>
+                <a:ea typeface="Microsoft YaHei"/>
+              </a:rPr>
+              <a:t>5</a:t>
+            </a:r>
+            <a:endParaRPr/>
+          </a:p>
+        </p:txBody>
+      </p:sp>
+      <p:sp>
+        <p:nvSpPr>
+          <p:cNvPr id="335" name="" descr="{&quot;isTemplate&quot;:true,&quot;type&quot;:&quot;text&quot;}"/>
+          <p:cNvSpPr txBox="1"/>
+          <p:nvPr/>
+        </p:nvSpPr>
+        <p:spPr>
+          <a:xfrm rot="0" flipH="0" flipV="0">
+            <a:off x="4400550" y="5581650"/>
+            <a:ext cx="7258050" cy="257175"/>
+          </a:xfrm>
+          <a:prstGeom prst="rect"/>
+        </p:spPr>
+        <p:txBody>
+          <a:bodyPr wrap="none" lIns="0" tIns="0" rIns="0" bIns="0"/>
+          <a:p>
+            <a:pPr>
+              <a:lnSpc>
+                <a:spcPct val="100000"/>
+              </a:lnSpc>
+            </a:pPr>
+            <a:r>
+              <a:rPr lang="zh-CN" sz="1650" b="1">
+                <a:solidFill>
+                  <a:srgbClr val="1A2230"/>
+                </a:solidFill>
+                <a:latin typeface="Microsoft YaHei"/>
+                <a:ea typeface="Microsoft YaHei"/>
+              </a:rPr>
+              <a:t>生成</a:t>
+            </a:r>
+            <a:r>
+              <a:rPr lang="en-US" sz="1650" b="1">
+                <a:solidFill>
+                  <a:srgbClr val="1A2230"/>
+                </a:solidFill>
+                <a:latin typeface="Microsoft YaHei"/>
+                <a:ea typeface="Microsoft YaHei"/>
+              </a:rPr>
+              <a:t xml:space="preserve"> + </a:t>
+            </a:r>
+            <a:r>
+              <a:rPr lang="zh-CN" sz="1650" b="1">
+                <a:solidFill>
+                  <a:srgbClr val="1A2230"/>
+                </a:solidFill>
+                <a:latin typeface="Microsoft YaHei"/>
+                <a:ea typeface="Microsoft YaHei"/>
+              </a:rPr>
+              <a:t>溯源</a:t>
+            </a:r>
+            <a:endParaRPr/>
+          </a:p>
+        </p:txBody>
+      </p:sp>
+      <p:sp>
+        <p:nvSpPr>
+          <p:cNvPr id="336" name="" descr="{&quot;isTemplate&quot;:true,&quot;type&quot;:&quot;text&quot;}"/>
+          <p:cNvSpPr txBox="1"/>
+          <p:nvPr/>
+        </p:nvSpPr>
+        <p:spPr>
+          <a:xfrm rot="0" flipH="0" flipV="0">
+            <a:off x="4400550" y="5895975"/>
+            <a:ext cx="7258050" cy="276225"/>
+          </a:xfrm>
+          <a:prstGeom prst="rect"/>
+        </p:spPr>
+        <p:txBody>
+          <a:bodyPr wrap="none" lIns="0" tIns="0" rIns="0" bIns="0"/>
+          <a:p>
+            <a:pPr>
+              <a:lnSpc>
+                <a:spcPct val="150000"/>
+              </a:lnSpc>
+            </a:pPr>
+            <a:r>
+              <a:rPr lang="zh-CN" sz="1200">
+                <a:solidFill>
+                  <a:srgbClr val="4A5568"/>
+                </a:solidFill>
+                <a:latin typeface="Microsoft YaHei"/>
+                <a:ea typeface="Microsoft YaHei"/>
+              </a:rPr>
+              <a:t>拼装</a:t>
+            </a:r>
+            <a:r>
+              <a:rPr lang="en-US" sz="1200">
+                <a:solidFill>
+                  <a:srgbClr val="4A5568"/>
+                </a:solidFill>
+                <a:latin typeface="Microsoft YaHei"/>
+                <a:ea typeface="Microsoft YaHei"/>
+              </a:rPr>
+              <a:t xml:space="preserve"> Prompt </a:t>
+            </a:r>
+            <a:r>
+              <a:rPr lang="zh-CN" sz="1200">
+                <a:solidFill>
+                  <a:srgbClr val="4A5568"/>
+                </a:solidFill>
+                <a:latin typeface="Microsoft YaHei"/>
+                <a:ea typeface="Microsoft YaHei"/>
+              </a:rPr>
+              <a:t>调用大模型，生成带引用的结构化指令</a:t>
+            </a:r>
+            <a:endParaRPr/>
+          </a:p>
+        </p:txBody>
+      </p:sp>
+      <p:sp>
+        <p:nvSpPr>
+          <p:cNvPr id="337" name="" descr="{&quot;isTemplate&quot;:true,&quot;type&quot;:&quot;text&quot;}"/>
           <p:cNvSpPr txBox="1"/>
           <p:nvPr/>
         </p:nvSpPr>
@@ -16020,7 +14322,7 @@
       </p:sp>
       <p:sp>
         <p:nvSpPr>
-          <p:cNvPr id="382" name="" descr="{&quot;isTemplate&quot;:true,&quot;type&quot;:&quot;text&quot;}"/>
+          <p:cNvPr id="338" name="" descr="{&quot;isTemplate&quot;:true,&quot;type&quot;:&quot;text&quot;}"/>
           <p:cNvSpPr txBox="1"/>
           <p:nvPr/>
         </p:nvSpPr>
@@ -16047,7 +14349,7 @@
                 <a:latin typeface="Microsoft YaHei"/>
                 <a:ea typeface="Microsoft YaHei"/>
               </a:rPr>
-              <a:t>09 / 17</a:t>
+              <a:t>09 / 15</a:t>
             </a:r>
             <a:endParaRPr/>
           </a:p>

--- a/学校要求与提交材料/开题答辩.pptx
+++ b/学校要求与提交材料/开题答辩.pptx
@@ -5,7 +5,7 @@
     <p:sldMasterId id="2147483648" r:id="rId0"/>
   </p:sldMasterIdLst>
   <p:notesMasterIdLst>
-    <p:notesMasterId r:id="rId16"/>
+    <p:notesMasterId r:id="rId18"/>
   </p:notesMasterIdLst>
   <p:sldIdLst>
     <p:sldId id="256" r:id="rId1"/>
@@ -23,6 +23,8 @@
     <p:sldId id="268" r:id="rId13"/>
     <p:sldId id="269" r:id="rId14"/>
     <p:sldId id="270" r:id="rId15"/>
+    <p:sldId id="271" r:id="rId16"/>
+    <p:sldId id="272" r:id="rId17"/>
   </p:sldIdLst>
   <p:sldSz cx="12192000" cy="6858000"/>
   <p:notesSz cx="6858000" cy="12192000"/>
@@ -558,7 +560,7 @@
   <p:cSld>
     <p:spTree>
       <p:nvGrpSpPr>
-        <p:cNvPr id="1" name=""/>
+        <p:cNvPr id="1" name="" descr="&lt;Slide&gt;&#10;  &lt;Box style={{ width: '1280px', height: '720px', background: '#0E3F8C', position: 'relative', overflow: 'hidden' }}&gt;&#10;    {/* 背景装饰：科技节点线稿 */}&#10;    &lt;Box style={{ position: 'absolute', top: 0, right: 0, width: 700, height: 720, opacity: 0.12 }}&gt;&#10;      &lt;svg width={700} height={720} viewBox='0 0 700 720'&gt;&#10;        &lt;g stroke='#FFFFFF' strokeWidth='1.5' fill='none'&gt;&#10;          &lt;circle cx='120' cy='140' r='40' /&gt;&#10;          &lt;circle cx='320' cy='90' r='55' /&gt;&#10;          &lt;circle cx='540' cy='200' r='35' /&gt;&#10;          &lt;circle cx='180' cy='380' r='50' /&gt;&#10;          &lt;circle cx='430' cy='420' r='60' /&gt;&#10;          &lt;circle cx='580' cy='560' r='45' /&gt;&#10;          &lt;circle cx='260' cy='610' r='35' /&gt;&#10;          &lt;path d='M120 140 L320 90 L540 200 L430 420 L180 380 Z' /&gt;&#10;          &lt;path d='M320 90 L430 420 M540 200 L580 560 M430 420 L580 560 M180 380 L260 610 M120 140 L180 380' /&gt;&#10;        &lt;/g&gt;&#10;        &lt;g fill='#FFFFFF'&gt;&#10;          &lt;circle cx='120' cy='140' r='5' /&gt;&#10;          &lt;circle cx='320' cy='90' r='6' /&gt;&#10;          &lt;circle cx='540' cy='200' r='4' /&gt;&#10;          &lt;circle cx='180' cy='380' r='5' /&gt;&#10;          &lt;circle cx='430' cy='420' r='7' /&gt;&#10;          &lt;circle cx='580' cy='560' r='5' /&gt;&#10;          &lt;circle cx='260' cy='610' r='4' /&gt;&#10;        &lt;/g&gt;&#10;      &lt;/svg&gt;&#10;    &lt;/Box&gt;&#10;&#10;    {/* 顶部单位 */}&#10;    &lt;Box style={{ position: 'absolute', top: 48, left: 60, right: 60, flexDirection: 'row', justifyContent: 'space-between', alignItems: 'center' }}&gt;&#10;      &lt;Text style={{ color: '#8FB3E8', fontSize: 18, letterSpacing: 2 }}&gt;中国科学技术大学软件学院&lt;/Text&gt;&#10;      &lt;Text style={{ color: '#8FB3E8', fontSize: 16 }}&gt;软件工程实践 · 开题答辩&lt;/Text&gt;&#10;    &lt;/Box&gt;&#10;&#10;    {/* 中央主标题 */}&#10;    &lt;Box style={{ position: 'absolute', top: 0, left: 0, right: 0, bottom: 0, flexDirection: 'column', alignItems: 'center', justifyContent: 'center', paddingTop: 40 }}&gt;&#10;      &lt;Box style={{ width: 78, height: 4, background: '#3D7BD9', borderRadius: 2, marginBottom: 32 }} /&gt;&#10;      &lt;Text style={{ color: '#FFFFFF', fontSize: 56, fontWeight: 'bold', textAlign: 'center', letterSpacing: 2 }}&gt;&#10;        基于 RAG 的轻量级&#10;      &lt;/Text&gt;&#10;      &lt;Text style={{ color: '#FFFFFF', fontSize: 56, fontWeight: 'bold', textAlign: 'center', letterSpacing: 2, marginTop: 8 }}&gt;&#10;        企业工艺生成系统&#10;      &lt;/Text&gt;&#10;      &lt;Text style={{ color: '#8FB3E8', fontSize: 22, textAlign: 'center', marginTop: 28, letterSpacing: 1 }}&gt;&#10;        A Lightweight Enterprise Manufacturing Process Generation System Based on RAG&#10;      &lt;/Text&gt;&#10;    &lt;/Box&gt;&#10;&#10;    {/* 底部信息条 */}&#10;    &lt;Box style={{ position: 'absolute', bottom: 0, left: 0, right: 0, height: 120, background: 'rgba(0,0,0,0.18)', flexDirection: 'row', alignItems: 'center', paddingLeft: 60, paddingRight: 60 }}&gt;&#10;      &lt;Box style={{ flexDirection: 'row', alignItems: 'center', gap: 40, flex: 1 }}&gt;&#10;        &lt;Box style={{ flexDirection: 'column', gap: 6 }}&gt;&#10;          &lt;Text style={{ color: '#8FB3E8', fontSize: 14 }}&gt;团队成员&lt;/Text&gt;&#10;          &lt;Text style={{ color: '#FFFFFF', fontSize: 20, fontWeight: 'bold' }}&gt;熊佳昀 · 齐梦伟 · 张承伟 · 资唯&lt;/Text&gt;&#10;        &lt;/Box&gt;&#10;        &lt;Box style={{ width: 1, height: 44, background: 'rgba(255,255,255,0.3)' }} /&gt;&#10;        &lt;Box style={{ flexDirection: 'column', gap: 6 }}&gt;&#10;          &lt;Text style={{ color: '#8FB3E8', fontSize: 14 }}&gt;指导教师&lt;/Text&gt;&#10;          &lt;Text style={{ color: '#FFFFFF', fontSize: 20, fontWeight: 'bold' }}&gt;丁箐&lt;/Text&gt;&#10;        &lt;/Box&gt;&#10;      &lt;/Box&gt;&#10;      &lt;Text style={{ color: '#8FB3E8', fontSize: 18 }}&gt;2026 年 10 月&lt;/Text&gt;&#10;    &lt;/Box&gt;&#10;  &lt;/Box&gt;&#10;&lt;/Slide&gt;&#10;"/>
         <p:cNvGrpSpPr/>
         <p:nvPr/>
       </p:nvGrpSpPr>
@@ -591,10 +593,7 @@
         </p:spPr>
         <p:txBody>
           <a:bodyPr/>
-          <a:p>
-            <a:pPr/>
-            <a:endParaRPr/>
-          </a:p>
+          <a:p/>
         </p:txBody>
       </p:sp>
       <p:pic>
@@ -742,10 +741,7 @@
         </p:spPr>
         <p:txBody>
           <a:bodyPr/>
-          <a:p>
-            <a:pPr/>
-            <a:endParaRPr/>
-          </a:p>
+          <a:p/>
         </p:txBody>
       </p:sp>
       <p:sp>
@@ -896,10 +892,7 @@
         </p:spPr>
         <p:txBody>
           <a:bodyPr/>
-          <a:p>
-            <a:pPr/>
-            <a:endParaRPr/>
-          </a:p>
+          <a:p/>
         </p:txBody>
       </p:sp>
       <p:sp>
@@ -1055,10 +1048,7 @@
         </p:spPr>
         <p:txBody>
           <a:bodyPr/>
-          <a:p>
-            <a:pPr/>
-            <a:endParaRPr/>
-          </a:p>
+          <a:p/>
         </p:txBody>
       </p:sp>
       <p:sp>
@@ -1206,7 +1196,7 @@
   <p:cSld>
     <p:spTree>
       <p:nvGrpSpPr>
-        <p:cNvPr id="17" name=""/>
+        <p:cNvPr id="17" name="" descr="&lt;Slide&gt;&#10;  &lt;Box style={{ width: '1280px', height: '720px', background: '#FFFFFF', flexDirection: 'column' }}&gt;&#10;    {/* 页眉 */}&#10;    &lt;Box style={{ height: 72, background: '#1E4FA8', flexDirection: 'row', alignItems: 'center', justifyContent: 'space-between', paddingLeft: 40, paddingRight: 40 }}&gt;&#10;      &lt;Text style={{ color: '#FFFFFF', fontSize: 16 }}&gt;基于 RAG 的轻量级企业工艺生成系统&lt;/Text&gt;&#10;      &lt;Text style={{ color: 'rgba(255,255,255,0.85)', fontSize: 14 }}&gt;技术方案&lt;/Text&gt;&#10;    &lt;/Box&gt;&#10;&#10;    {/* 左标题栏 + 右流程 */}&#10;    &lt;Box style={{ flex: 1, flexDirection: 'row', paddingLeft: 40, paddingRight: 40, paddingTop: 28, paddingBottom: 16, gap: 40 }}&gt;&#10;      {/* 左标题栏 */}&#10;      &lt;Box style={{ width: 300, flexDirection: 'column', justifyContent: 'space-between', gap: 16 }}&gt;&#10;        &lt;Box style={{ flexDirection: 'column', gap: 16 }}&gt;&#10;          &lt;Box style={{ width: 48, height: 4, background: '#3D7BD9', borderRadius: 2 }} /&gt;&#10;          &lt;Text style={{ color: '#1A2230', fontSize: 34, fontWeight: 'bold', lineHeight: 1.3 }}&gt;离线建库链路&lt;/Text&gt;&#10;          &lt;Text style={{ color: '#8B97A8', fontSize: 16, lineHeight: 1.5 }}&gt;一次构建，为在线问答准备可检索的知识库&lt;/Text&gt;&#10;        &lt;/Box&gt;&#10;        &lt;Box style={{ padding: 18, background: '#0E3F8C', borderRadius: 8 }}&gt;&#10;          &lt;Text style={{ color: '#FFFFFF', fontSize: 18, fontWeight: 'bold' }}&gt;关键点&lt;/Text&gt;&#10;          &lt;Text style={{ color: '#D6E4F7', fontSize: 15, lineHeight: 1.6, marginTop: 8 }}&gt;&#10;            表格保护：解析保留表格结构，分块保护完整表格，块记录来源文档、页码、章节元数据。&#10;          &lt;/Text&gt;&#10;        &lt;/Box&gt;&#10;      &lt;/Box&gt;&#10;&#10;      {/* 右：流程节点串（纵向，撑满） */}&#10;      &lt;Box style={{ flex: 1, flexDirection: 'column', justifyContent: 'space-between' }}&gt;&#10;        {[&#10;          { t: '文档解析', d: 'PyMuPDF 提取文字/页码/版面，pdfplumber 抽取表格结构', n: '1' },&#10;          { t: '文档分块', d: '递归字符分块 + 表格保护 + 相邻块重叠', n: '2' },&#10;          { t: '向量化', d: 'BGE-M3 嵌入模型生成稠密向量', n: '3' },&#10;          { t: '索引入库', d: 'Chroma 写入稠密向量，rank_bm25 构建稀疏索引', n: '4' },&#10;        ].map((item) =&gt; (&#10;          &lt;Box key={item.n} style={{ flexDirection: 'row', alignItems: 'center', gap: 20, padding: 22, background: '#F7F9FC', borderRadius: 10, border: '1px solid #E5E7EB' }}&gt;&#10;            &lt;Box style={{ width: 46, height: 46, background: '#1E4FA8', borderRadius: 23, alignItems: 'center', justifyContent: 'center' }}&gt;&#10;              &lt;Text style={{ color: '#FFFFFF', fontSize: 20, fontWeight: 'bold' }}&gt;{item.n}&lt;/Text&gt;&#10;            &lt;/Box&gt;&#10;            &lt;Box style={{ flex: 1, flexDirection: 'column', gap: 6 }}&gt;&#10;              &lt;Text style={{ color: '#1A2230', fontSize: 22, fontWeight: 'bold' }}&gt;{item.t}&lt;/Text&gt;&#10;              &lt;Text style={{ color: '#4A5568', fontSize: 16, lineHeight: 1.5 }}&gt;{item.d}&lt;/Text&gt;&#10;            &lt;/Box&gt;&#10;          &lt;/Box&gt;&#10;        ))}&#10;      &lt;/Box&gt;&#10;    &lt;/Box&gt;&#10;&#10;    {/* 页脚 */}&#10;    &lt;Box style={{ height: 40, flexDirection: 'row', alignItems: 'center', justifyContent: 'space-between', paddingLeft: 40, paddingRight: 40 }}&gt;&#10;      &lt;Text style={{ color: '#8B97A8', fontSize: 14 }}&gt;中国科学技术大学软件学院&lt;/Text&gt;&#10;      &lt;Text style={{ color: '#1E4FA8', fontSize: 16, fontWeight: 'bold' }}&gt;10 / 17&lt;/Text&gt;&#10;    &lt;/Box&gt;&#10;  &lt;/Box&gt;&#10;&lt;/Slide&gt;&#10;"/>
         <p:cNvGrpSpPr/>
         <p:nvPr/>
       </p:nvGrpSpPr>
@@ -1239,10 +1229,7 @@
         </p:spPr>
         <p:txBody>
           <a:bodyPr/>
-          <a:p>
-            <a:pPr/>
-            <a:endParaRPr/>
-          </a:p>
+          <a:p/>
         </p:txBody>
       </p:sp>
       <p:sp>
@@ -1266,10 +1253,7 @@
         </p:spPr>
         <p:txBody>
           <a:bodyPr/>
-          <a:p>
-            <a:pPr/>
-            <a:endParaRPr/>
-          </a:p>
+          <a:p/>
         </p:txBody>
       </p:sp>
       <p:sp>
@@ -1366,7 +1350,2571 @@
       </p:sp>
       <p:sp>
         <p:nvSpPr>
-          <p:cNvPr id="22" name="" descr="{&quot;isTemplate&quot;:true,&quot;type&quot;:&quot;text&quot;}"/>
+          <p:cNvPr id="22" name=""/>
+          <p:cNvSpPr/>
+          <p:nvPr/>
+        </p:nvSpPr>
+        <p:spPr>
+          <a:xfrm rot="0" flipH="0" flipV="0">
+            <a:off x="381000" y="952500"/>
+            <a:ext cx="457200" cy="38100"/>
+          </a:xfrm>
+          <a:prstGeom prst="roundRect">
+            <a:avLst>
+              <a:gd name="adj" fmla="val 50000"/>
+            </a:avLst>
+          </a:prstGeom>
+          <a:solidFill>
+            <a:srgbClr val="3D7BD9"/>
+          </a:solidFill>
+          <a:ln/>
+        </p:spPr>
+        <p:txBody>
+          <a:bodyPr/>
+          <a:p/>
+        </p:txBody>
+      </p:sp>
+      <p:sp>
+        <p:nvSpPr>
+          <p:cNvPr id="23" name="" descr="{&quot;isTemplate&quot;:true,&quot;type&quot;:&quot;text&quot;}"/>
+          <p:cNvSpPr txBox="1"/>
+          <p:nvPr/>
+        </p:nvSpPr>
+        <p:spPr>
+          <a:xfrm rot="0" flipH="0" flipV="0">
+            <a:off x="381000" y="1143000"/>
+            <a:ext cx="2857500" cy="514350"/>
+          </a:xfrm>
+          <a:prstGeom prst="rect"/>
+        </p:spPr>
+        <p:txBody>
+          <a:bodyPr wrap="none" lIns="0" tIns="0" rIns="0" bIns="0"/>
+          <a:p>
+            <a:pPr>
+              <a:lnSpc>
+                <a:spcPct val="130000"/>
+              </a:lnSpc>
+            </a:pPr>
+            <a:r>
+              <a:rPr lang="zh-CN" sz="2550" b="1">
+                <a:solidFill>
+                  <a:srgbClr val="1A2230"/>
+                </a:solidFill>
+                <a:latin typeface="Microsoft YaHei"/>
+                <a:ea typeface="Microsoft YaHei"/>
+              </a:rPr>
+              <a:t>离线建库链路</a:t>
+            </a:r>
+            <a:endParaRPr/>
+          </a:p>
+        </p:txBody>
+      </p:sp>
+      <p:sp>
+        <p:nvSpPr>
+          <p:cNvPr id="24" name="" descr="{&quot;isTemplate&quot;:true,&quot;type&quot;:&quot;text&quot;}"/>
+          <p:cNvSpPr txBox="1"/>
+          <p:nvPr/>
+        </p:nvSpPr>
+        <p:spPr>
+          <a:xfrm rot="0" flipH="0" flipV="0">
+            <a:off x="381000" y="1809750"/>
+            <a:ext cx="2857500" cy="552450"/>
+          </a:xfrm>
+          <a:prstGeom prst="rect"/>
+        </p:spPr>
+        <p:txBody>
+          <a:bodyPr wrap="square" lIns="0" tIns="0" rIns="0" bIns="0">
+            <a:normAutofit/>
+          </a:bodyPr>
+          <a:p>
+            <a:pPr>
+              <a:lnSpc>
+                <a:spcPct val="150000"/>
+              </a:lnSpc>
+            </a:pPr>
+            <a:r>
+              <a:rPr lang="zh-CN" sz="1200">
+                <a:solidFill>
+                  <a:srgbClr val="8B97A8"/>
+                </a:solidFill>
+                <a:latin typeface="Microsoft YaHei"/>
+                <a:ea typeface="Microsoft YaHei"/>
+              </a:rPr>
+              <a:t>一次构建，为在线问答准备可检索的知识库</a:t>
+            </a:r>
+            <a:endParaRPr/>
+          </a:p>
+        </p:txBody>
+      </p:sp>
+      <p:sp>
+        <p:nvSpPr>
+          <p:cNvPr id="25" name=""/>
+          <p:cNvSpPr/>
+          <p:nvPr/>
+        </p:nvSpPr>
+        <p:spPr>
+          <a:xfrm rot="0" flipH="0" flipV="0">
+            <a:off x="381000" y="4867275"/>
+            <a:ext cx="2857500" cy="1457325"/>
+          </a:xfrm>
+          <a:prstGeom prst="roundRect">
+            <a:avLst>
+              <a:gd name="adj" fmla="val 5229"/>
+            </a:avLst>
+          </a:prstGeom>
+          <a:solidFill>
+            <a:srgbClr val="0E3F8C"/>
+          </a:solidFill>
+          <a:ln/>
+        </p:spPr>
+        <p:txBody>
+          <a:bodyPr/>
+          <a:p/>
+        </p:txBody>
+      </p:sp>
+      <p:sp>
+        <p:nvSpPr>
+          <p:cNvPr id="26" name="" descr="{&quot;isTemplate&quot;:true,&quot;type&quot;:&quot;text&quot;}"/>
+          <p:cNvSpPr txBox="1"/>
+          <p:nvPr/>
+        </p:nvSpPr>
+        <p:spPr>
+          <a:xfrm rot="0" flipH="0" flipV="0">
+            <a:off x="552450" y="5038725"/>
+            <a:ext cx="2514600" cy="209550"/>
+          </a:xfrm>
+          <a:prstGeom prst="rect"/>
+        </p:spPr>
+        <p:txBody>
+          <a:bodyPr wrap="none" lIns="0" tIns="0" rIns="0" bIns="0"/>
+          <a:p>
+            <a:pPr>
+              <a:lnSpc>
+                <a:spcPct val="100000"/>
+              </a:lnSpc>
+            </a:pPr>
+            <a:r>
+              <a:rPr lang="zh-CN" sz="1350" b="1">
+                <a:solidFill>
+                  <a:srgbClr val="FFFFFF"/>
+                </a:solidFill>
+                <a:latin typeface="Microsoft YaHei"/>
+                <a:ea typeface="Microsoft YaHei"/>
+              </a:rPr>
+              <a:t>关键点</a:t>
+            </a:r>
+            <a:endParaRPr/>
+          </a:p>
+        </p:txBody>
+      </p:sp>
+      <p:sp>
+        <p:nvSpPr>
+          <p:cNvPr id="27" name="" descr="{&quot;isTemplate&quot;:true,&quot;type&quot;:&quot;text&quot;}"/>
+          <p:cNvSpPr txBox="1"/>
+          <p:nvPr/>
+        </p:nvSpPr>
+        <p:spPr>
+          <a:xfrm rot="0" flipH="0" flipV="0">
+            <a:off x="552450" y="5324475"/>
+            <a:ext cx="2514600" cy="828675"/>
+          </a:xfrm>
+          <a:prstGeom prst="rect"/>
+        </p:spPr>
+        <p:txBody>
+          <a:bodyPr wrap="square" lIns="0" tIns="0" rIns="0" bIns="0">
+            <a:normAutofit/>
+          </a:bodyPr>
+          <a:p>
+            <a:pPr>
+              <a:lnSpc>
+                <a:spcPct val="160000"/>
+              </a:lnSpc>
+            </a:pPr>
+            <a:r>
+              <a:rPr lang="zh-CN" sz="1125">
+                <a:solidFill>
+                  <a:srgbClr val="D6E4F7"/>
+                </a:solidFill>
+                <a:latin typeface="Microsoft YaHei"/>
+                <a:ea typeface="Microsoft YaHei"/>
+              </a:rPr>
+              <a:t>表格保护：解析保留表格结构，分块保护完整表格，块记录来源文档、页码、章节元数据。</a:t>
+            </a:r>
+            <a:endParaRPr/>
+          </a:p>
+        </p:txBody>
+      </p:sp>
+      <p:sp>
+        <p:nvSpPr>
+          <p:cNvPr id="28" name=""/>
+          <p:cNvSpPr/>
+          <p:nvPr/>
+        </p:nvSpPr>
+        <p:spPr>
+          <a:xfrm rot="0" flipH="0" flipV="0">
+            <a:off x="3619500" y="952500"/>
+            <a:ext cx="8191500" cy="1009650"/>
+          </a:xfrm>
+          <a:prstGeom prst="roundRect">
+            <a:avLst>
+              <a:gd name="adj" fmla="val 9434"/>
+            </a:avLst>
+          </a:prstGeom>
+          <a:solidFill>
+            <a:srgbClr val="F7F9FC"/>
+          </a:solidFill>
+          <a:ln w="12700">
+            <a:solidFill>
+              <a:srgbClr val="E5E7EB"/>
+            </a:solidFill>
+            <a:prstDash val="solid"/>
+          </a:ln>
+        </p:spPr>
+        <p:txBody>
+          <a:bodyPr/>
+          <a:p/>
+        </p:txBody>
+      </p:sp>
+      <p:sp>
+        <p:nvSpPr>
+          <p:cNvPr id="29" name=""/>
+          <p:cNvSpPr/>
+          <p:nvPr/>
+        </p:nvSpPr>
+        <p:spPr>
+          <a:xfrm rot="0" flipH="0" flipV="0">
+            <a:off x="3829050" y="1238250"/>
+            <a:ext cx="438150" cy="438150"/>
+          </a:xfrm>
+          <a:prstGeom prst="roundRect">
+            <a:avLst>
+              <a:gd name="adj" fmla="val 50000"/>
+            </a:avLst>
+          </a:prstGeom>
+          <a:solidFill>
+            <a:srgbClr val="1E4FA8"/>
+          </a:solidFill>
+          <a:ln/>
+        </p:spPr>
+        <p:txBody>
+          <a:bodyPr/>
+          <a:p/>
+        </p:txBody>
+      </p:sp>
+      <p:sp>
+        <p:nvSpPr>
+          <p:cNvPr id="30" name="" descr="{&quot;isTemplate&quot;:true,&quot;type&quot;:&quot;text&quot;}"/>
+          <p:cNvSpPr txBox="1"/>
+          <p:nvPr/>
+        </p:nvSpPr>
+        <p:spPr>
+          <a:xfrm rot="0" flipH="0" flipV="0">
+            <a:off x="3990975" y="1343025"/>
+            <a:ext cx="123825" cy="228600"/>
+          </a:xfrm>
+          <a:prstGeom prst="rect"/>
+        </p:spPr>
+        <p:txBody>
+          <a:bodyPr wrap="none" lIns="0" tIns="0" rIns="0" bIns="0"/>
+          <a:p>
+            <a:pPr>
+              <a:lnSpc>
+                <a:spcPct val="100000"/>
+              </a:lnSpc>
+            </a:pPr>
+            <a:r>
+              <a:rPr lang="en-US" sz="1500" b="1">
+                <a:solidFill>
+                  <a:srgbClr val="FFFFFF"/>
+                </a:solidFill>
+                <a:latin typeface="Microsoft YaHei"/>
+                <a:ea typeface="Microsoft YaHei"/>
+              </a:rPr>
+              <a:t>1</a:t>
+            </a:r>
+            <a:endParaRPr/>
+          </a:p>
+        </p:txBody>
+      </p:sp>
+      <p:sp>
+        <p:nvSpPr>
+          <p:cNvPr id="31" name="" descr="{&quot;isTemplate&quot;:true,&quot;type&quot;:&quot;text&quot;}"/>
+          <p:cNvSpPr txBox="1"/>
+          <p:nvPr/>
+        </p:nvSpPr>
+        <p:spPr>
+          <a:xfrm rot="0" flipH="0" flipV="0">
+            <a:off x="4457700" y="1162050"/>
+            <a:ext cx="7143750" cy="257175"/>
+          </a:xfrm>
+          <a:prstGeom prst="rect"/>
+        </p:spPr>
+        <p:txBody>
+          <a:bodyPr wrap="none" lIns="0" tIns="0" rIns="0" bIns="0"/>
+          <a:p>
+            <a:pPr>
+              <a:lnSpc>
+                <a:spcPct val="100000"/>
+              </a:lnSpc>
+            </a:pPr>
+            <a:r>
+              <a:rPr lang="zh-CN" sz="1650" b="1">
+                <a:solidFill>
+                  <a:srgbClr val="1A2230"/>
+                </a:solidFill>
+                <a:latin typeface="Microsoft YaHei"/>
+                <a:ea typeface="Microsoft YaHei"/>
+              </a:rPr>
+              <a:t>文档解析</a:t>
+            </a:r>
+            <a:endParaRPr/>
+          </a:p>
+        </p:txBody>
+      </p:sp>
+      <p:sp>
+        <p:nvSpPr>
+          <p:cNvPr id="32" name="" descr="{&quot;isTemplate&quot;:true,&quot;type&quot;:&quot;text&quot;}"/>
+          <p:cNvSpPr txBox="1"/>
+          <p:nvPr/>
+        </p:nvSpPr>
+        <p:spPr>
+          <a:xfrm rot="0" flipH="0" flipV="0">
+            <a:off x="4457700" y="1476375"/>
+            <a:ext cx="7143750" cy="276225"/>
+          </a:xfrm>
+          <a:prstGeom prst="rect"/>
+        </p:spPr>
+        <p:txBody>
+          <a:bodyPr wrap="none" lIns="0" tIns="0" rIns="0" bIns="0"/>
+          <a:p>
+            <a:pPr>
+              <a:lnSpc>
+                <a:spcPct val="150000"/>
+              </a:lnSpc>
+            </a:pPr>
+            <a:r>
+              <a:rPr lang="en-US" sz="1200">
+                <a:solidFill>
+                  <a:srgbClr val="4A5568"/>
+                </a:solidFill>
+                <a:latin typeface="Microsoft YaHei"/>
+                <a:ea typeface="Microsoft YaHei"/>
+              </a:rPr>
+              <a:t xml:space="preserve">PyMuPDF </a:t>
+            </a:r>
+            <a:r>
+              <a:rPr lang="zh-CN" sz="1200">
+                <a:solidFill>
+                  <a:srgbClr val="4A5568"/>
+                </a:solidFill>
+                <a:latin typeface="Microsoft YaHei"/>
+                <a:ea typeface="Microsoft YaHei"/>
+              </a:rPr>
+              <a:t>提取文字</a:t>
+            </a:r>
+            <a:r>
+              <a:rPr lang="en-US" sz="1200">
+                <a:solidFill>
+                  <a:srgbClr val="4A5568"/>
+                </a:solidFill>
+                <a:latin typeface="Microsoft YaHei"/>
+                <a:ea typeface="Microsoft YaHei"/>
+              </a:rPr>
+              <a:t>/</a:t>
+            </a:r>
+            <a:r>
+              <a:rPr lang="zh-CN" sz="1200">
+                <a:solidFill>
+                  <a:srgbClr val="4A5568"/>
+                </a:solidFill>
+                <a:latin typeface="Microsoft YaHei"/>
+                <a:ea typeface="Microsoft YaHei"/>
+              </a:rPr>
+              <a:t>页码</a:t>
+            </a:r>
+            <a:r>
+              <a:rPr lang="en-US" sz="1200">
+                <a:solidFill>
+                  <a:srgbClr val="4A5568"/>
+                </a:solidFill>
+                <a:latin typeface="Microsoft YaHei"/>
+                <a:ea typeface="Microsoft YaHei"/>
+              </a:rPr>
+              <a:t>/</a:t>
+            </a:r>
+            <a:r>
+              <a:rPr lang="zh-CN" sz="1200">
+                <a:solidFill>
+                  <a:srgbClr val="4A5568"/>
+                </a:solidFill>
+                <a:latin typeface="Microsoft YaHei"/>
+                <a:ea typeface="Microsoft YaHei"/>
+              </a:rPr>
+              <a:t>版面，</a:t>
+            </a:r>
+            <a:r>
+              <a:rPr lang="en-US" sz="1200">
+                <a:solidFill>
+                  <a:srgbClr val="4A5568"/>
+                </a:solidFill>
+                <a:latin typeface="Microsoft YaHei"/>
+                <a:ea typeface="Microsoft YaHei"/>
+              </a:rPr>
+              <a:t xml:space="preserve">pdfplumber </a:t>
+            </a:r>
+            <a:r>
+              <a:rPr lang="zh-CN" sz="1200">
+                <a:solidFill>
+                  <a:srgbClr val="4A5568"/>
+                </a:solidFill>
+                <a:latin typeface="Microsoft YaHei"/>
+                <a:ea typeface="Microsoft YaHei"/>
+              </a:rPr>
+              <a:t>抽取表格结构</a:t>
+            </a:r>
+            <a:endParaRPr/>
+          </a:p>
+        </p:txBody>
+      </p:sp>
+      <p:sp>
+        <p:nvSpPr>
+          <p:cNvPr id="33" name=""/>
+          <p:cNvSpPr/>
+          <p:nvPr/>
+        </p:nvSpPr>
+        <p:spPr>
+          <a:xfrm rot="0" flipH="0" flipV="0">
+            <a:off x="3619500" y="2409825"/>
+            <a:ext cx="8191500" cy="1009650"/>
+          </a:xfrm>
+          <a:prstGeom prst="roundRect">
+            <a:avLst>
+              <a:gd name="adj" fmla="val 9434"/>
+            </a:avLst>
+          </a:prstGeom>
+          <a:solidFill>
+            <a:srgbClr val="F7F9FC"/>
+          </a:solidFill>
+          <a:ln w="12700">
+            <a:solidFill>
+              <a:srgbClr val="E5E7EB"/>
+            </a:solidFill>
+            <a:prstDash val="solid"/>
+          </a:ln>
+        </p:spPr>
+        <p:txBody>
+          <a:bodyPr/>
+          <a:p/>
+        </p:txBody>
+      </p:sp>
+      <p:sp>
+        <p:nvSpPr>
+          <p:cNvPr id="34" name=""/>
+          <p:cNvSpPr/>
+          <p:nvPr/>
+        </p:nvSpPr>
+        <p:spPr>
+          <a:xfrm rot="0" flipH="0" flipV="0">
+            <a:off x="3829050" y="2695575"/>
+            <a:ext cx="438150" cy="438150"/>
+          </a:xfrm>
+          <a:prstGeom prst="roundRect">
+            <a:avLst>
+              <a:gd name="adj" fmla="val 50000"/>
+            </a:avLst>
+          </a:prstGeom>
+          <a:solidFill>
+            <a:srgbClr val="1E4FA8"/>
+          </a:solidFill>
+          <a:ln/>
+        </p:spPr>
+        <p:txBody>
+          <a:bodyPr/>
+          <a:p/>
+        </p:txBody>
+      </p:sp>
+      <p:sp>
+        <p:nvSpPr>
+          <p:cNvPr id="35" name="" descr="{&quot;isTemplate&quot;:true,&quot;type&quot;:&quot;text&quot;}"/>
+          <p:cNvSpPr txBox="1"/>
+          <p:nvPr/>
+        </p:nvSpPr>
+        <p:spPr>
+          <a:xfrm rot="0" flipH="0" flipV="0">
+            <a:off x="3990975" y="2800350"/>
+            <a:ext cx="123825" cy="228600"/>
+          </a:xfrm>
+          <a:prstGeom prst="rect"/>
+        </p:spPr>
+        <p:txBody>
+          <a:bodyPr wrap="none" lIns="0" tIns="0" rIns="0" bIns="0"/>
+          <a:p>
+            <a:pPr>
+              <a:lnSpc>
+                <a:spcPct val="100000"/>
+              </a:lnSpc>
+            </a:pPr>
+            <a:r>
+              <a:rPr lang="en-US" sz="1500" b="1">
+                <a:solidFill>
+                  <a:srgbClr val="FFFFFF"/>
+                </a:solidFill>
+                <a:latin typeface="Microsoft YaHei"/>
+                <a:ea typeface="Microsoft YaHei"/>
+              </a:rPr>
+              <a:t>2</a:t>
+            </a:r>
+            <a:endParaRPr/>
+          </a:p>
+        </p:txBody>
+      </p:sp>
+      <p:sp>
+        <p:nvSpPr>
+          <p:cNvPr id="36" name="" descr="{&quot;isTemplate&quot;:true,&quot;type&quot;:&quot;text&quot;}"/>
+          <p:cNvSpPr txBox="1"/>
+          <p:nvPr/>
+        </p:nvSpPr>
+        <p:spPr>
+          <a:xfrm rot="0" flipH="0" flipV="0">
+            <a:off x="4457700" y="2619375"/>
+            <a:ext cx="7143750" cy="257175"/>
+          </a:xfrm>
+          <a:prstGeom prst="rect"/>
+        </p:spPr>
+        <p:txBody>
+          <a:bodyPr wrap="none" lIns="0" tIns="0" rIns="0" bIns="0"/>
+          <a:p>
+            <a:pPr>
+              <a:lnSpc>
+                <a:spcPct val="100000"/>
+              </a:lnSpc>
+            </a:pPr>
+            <a:r>
+              <a:rPr lang="zh-CN" sz="1650" b="1">
+                <a:solidFill>
+                  <a:srgbClr val="1A2230"/>
+                </a:solidFill>
+                <a:latin typeface="Microsoft YaHei"/>
+                <a:ea typeface="Microsoft YaHei"/>
+              </a:rPr>
+              <a:t>文档分块</a:t>
+            </a:r>
+            <a:endParaRPr/>
+          </a:p>
+        </p:txBody>
+      </p:sp>
+      <p:sp>
+        <p:nvSpPr>
+          <p:cNvPr id="37" name="" descr="{&quot;isTemplate&quot;:true,&quot;type&quot;:&quot;text&quot;}"/>
+          <p:cNvSpPr txBox="1"/>
+          <p:nvPr/>
+        </p:nvSpPr>
+        <p:spPr>
+          <a:xfrm rot="0" flipH="0" flipV="0">
+            <a:off x="4457700" y="2933700"/>
+            <a:ext cx="7143750" cy="276225"/>
+          </a:xfrm>
+          <a:prstGeom prst="rect"/>
+        </p:spPr>
+        <p:txBody>
+          <a:bodyPr wrap="none" lIns="0" tIns="0" rIns="0" bIns="0"/>
+          <a:p>
+            <a:pPr>
+              <a:lnSpc>
+                <a:spcPct val="150000"/>
+              </a:lnSpc>
+            </a:pPr>
+            <a:r>
+              <a:rPr lang="zh-CN" sz="1200">
+                <a:solidFill>
+                  <a:srgbClr val="4A5568"/>
+                </a:solidFill>
+                <a:latin typeface="Microsoft YaHei"/>
+                <a:ea typeface="Microsoft YaHei"/>
+              </a:rPr>
+              <a:t>递归字符分块</a:t>
+            </a:r>
+            <a:r>
+              <a:rPr lang="en-US" sz="1200">
+                <a:solidFill>
+                  <a:srgbClr val="4A5568"/>
+                </a:solidFill>
+                <a:latin typeface="Microsoft YaHei"/>
+                <a:ea typeface="Microsoft YaHei"/>
+              </a:rPr>
+              <a:t xml:space="preserve"> + </a:t>
+            </a:r>
+            <a:r>
+              <a:rPr lang="zh-CN" sz="1200">
+                <a:solidFill>
+                  <a:srgbClr val="4A5568"/>
+                </a:solidFill>
+                <a:latin typeface="Microsoft YaHei"/>
+                <a:ea typeface="Microsoft YaHei"/>
+              </a:rPr>
+              <a:t>表格保护</a:t>
+            </a:r>
+            <a:r>
+              <a:rPr lang="en-US" sz="1200">
+                <a:solidFill>
+                  <a:srgbClr val="4A5568"/>
+                </a:solidFill>
+                <a:latin typeface="Microsoft YaHei"/>
+                <a:ea typeface="Microsoft YaHei"/>
+              </a:rPr>
+              <a:t xml:space="preserve"> + </a:t>
+            </a:r>
+            <a:r>
+              <a:rPr lang="zh-CN" sz="1200">
+                <a:solidFill>
+                  <a:srgbClr val="4A5568"/>
+                </a:solidFill>
+                <a:latin typeface="Microsoft YaHei"/>
+                <a:ea typeface="Microsoft YaHei"/>
+              </a:rPr>
+              <a:t>相邻块重叠</a:t>
+            </a:r>
+            <a:endParaRPr/>
+          </a:p>
+        </p:txBody>
+      </p:sp>
+      <p:sp>
+        <p:nvSpPr>
+          <p:cNvPr id="38" name=""/>
+          <p:cNvSpPr/>
+          <p:nvPr/>
+        </p:nvSpPr>
+        <p:spPr>
+          <a:xfrm rot="0" flipH="0" flipV="0">
+            <a:off x="3619500" y="3857625"/>
+            <a:ext cx="8191500" cy="1009650"/>
+          </a:xfrm>
+          <a:prstGeom prst="roundRect">
+            <a:avLst>
+              <a:gd name="adj" fmla="val 9434"/>
+            </a:avLst>
+          </a:prstGeom>
+          <a:solidFill>
+            <a:srgbClr val="F7F9FC"/>
+          </a:solidFill>
+          <a:ln w="12700">
+            <a:solidFill>
+              <a:srgbClr val="E5E7EB"/>
+            </a:solidFill>
+            <a:prstDash val="solid"/>
+          </a:ln>
+        </p:spPr>
+        <p:txBody>
+          <a:bodyPr/>
+          <a:p/>
+        </p:txBody>
+      </p:sp>
+      <p:sp>
+        <p:nvSpPr>
+          <p:cNvPr id="39" name=""/>
+          <p:cNvSpPr/>
+          <p:nvPr/>
+        </p:nvSpPr>
+        <p:spPr>
+          <a:xfrm rot="0" flipH="0" flipV="0">
+            <a:off x="3829050" y="4143375"/>
+            <a:ext cx="438150" cy="438150"/>
+          </a:xfrm>
+          <a:prstGeom prst="roundRect">
+            <a:avLst>
+              <a:gd name="adj" fmla="val 50000"/>
+            </a:avLst>
+          </a:prstGeom>
+          <a:solidFill>
+            <a:srgbClr val="1E4FA8"/>
+          </a:solidFill>
+          <a:ln/>
+        </p:spPr>
+        <p:txBody>
+          <a:bodyPr/>
+          <a:p/>
+        </p:txBody>
+      </p:sp>
+      <p:sp>
+        <p:nvSpPr>
+          <p:cNvPr id="40" name="" descr="{&quot;isTemplate&quot;:true,&quot;type&quot;:&quot;text&quot;}"/>
+          <p:cNvSpPr txBox="1"/>
+          <p:nvPr/>
+        </p:nvSpPr>
+        <p:spPr>
+          <a:xfrm rot="0" flipH="0" flipV="0">
+            <a:off x="3990975" y="4248150"/>
+            <a:ext cx="123825" cy="228600"/>
+          </a:xfrm>
+          <a:prstGeom prst="rect"/>
+        </p:spPr>
+        <p:txBody>
+          <a:bodyPr wrap="none" lIns="0" tIns="0" rIns="0" bIns="0"/>
+          <a:p>
+            <a:pPr>
+              <a:lnSpc>
+                <a:spcPct val="100000"/>
+              </a:lnSpc>
+            </a:pPr>
+            <a:r>
+              <a:rPr lang="en-US" sz="1500" b="1">
+                <a:solidFill>
+                  <a:srgbClr val="FFFFFF"/>
+                </a:solidFill>
+                <a:latin typeface="Microsoft YaHei"/>
+                <a:ea typeface="Microsoft YaHei"/>
+              </a:rPr>
+              <a:t>3</a:t>
+            </a:r>
+            <a:endParaRPr/>
+          </a:p>
+        </p:txBody>
+      </p:sp>
+      <p:sp>
+        <p:nvSpPr>
+          <p:cNvPr id="41" name="" descr="{&quot;isTemplate&quot;:true,&quot;type&quot;:&quot;text&quot;}"/>
+          <p:cNvSpPr txBox="1"/>
+          <p:nvPr/>
+        </p:nvSpPr>
+        <p:spPr>
+          <a:xfrm rot="0" flipH="0" flipV="0">
+            <a:off x="4457700" y="4067175"/>
+            <a:ext cx="7143750" cy="257175"/>
+          </a:xfrm>
+          <a:prstGeom prst="rect"/>
+        </p:spPr>
+        <p:txBody>
+          <a:bodyPr wrap="none" lIns="0" tIns="0" rIns="0" bIns="0"/>
+          <a:p>
+            <a:pPr>
+              <a:lnSpc>
+                <a:spcPct val="100000"/>
+              </a:lnSpc>
+            </a:pPr>
+            <a:r>
+              <a:rPr lang="zh-CN" sz="1650" b="1">
+                <a:solidFill>
+                  <a:srgbClr val="1A2230"/>
+                </a:solidFill>
+                <a:latin typeface="Microsoft YaHei"/>
+                <a:ea typeface="Microsoft YaHei"/>
+              </a:rPr>
+              <a:t>向量化</a:t>
+            </a:r>
+            <a:endParaRPr/>
+          </a:p>
+        </p:txBody>
+      </p:sp>
+      <p:sp>
+        <p:nvSpPr>
+          <p:cNvPr id="42" name="" descr="{&quot;isTemplate&quot;:true,&quot;type&quot;:&quot;text&quot;}"/>
+          <p:cNvSpPr txBox="1"/>
+          <p:nvPr/>
+        </p:nvSpPr>
+        <p:spPr>
+          <a:xfrm rot="0" flipH="0" flipV="0">
+            <a:off x="4457700" y="4381500"/>
+            <a:ext cx="7143750" cy="276225"/>
+          </a:xfrm>
+          <a:prstGeom prst="rect"/>
+        </p:spPr>
+        <p:txBody>
+          <a:bodyPr wrap="none" lIns="0" tIns="0" rIns="0" bIns="0"/>
+          <a:p>
+            <a:pPr>
+              <a:lnSpc>
+                <a:spcPct val="150000"/>
+              </a:lnSpc>
+            </a:pPr>
+            <a:r>
+              <a:rPr lang="en-US" sz="1200">
+                <a:solidFill>
+                  <a:srgbClr val="4A5568"/>
+                </a:solidFill>
+                <a:latin typeface="Microsoft YaHei"/>
+                <a:ea typeface="Microsoft YaHei"/>
+              </a:rPr>
+              <a:t xml:space="preserve">BGE-M3 </a:t>
+            </a:r>
+            <a:r>
+              <a:rPr lang="zh-CN" sz="1200">
+                <a:solidFill>
+                  <a:srgbClr val="4A5568"/>
+                </a:solidFill>
+                <a:latin typeface="Microsoft YaHei"/>
+                <a:ea typeface="Microsoft YaHei"/>
+              </a:rPr>
+              <a:t>嵌入模型生成稠密向量</a:t>
+            </a:r>
+            <a:endParaRPr/>
+          </a:p>
+        </p:txBody>
+      </p:sp>
+      <p:sp>
+        <p:nvSpPr>
+          <p:cNvPr id="43" name=""/>
+          <p:cNvSpPr/>
+          <p:nvPr/>
+        </p:nvSpPr>
+        <p:spPr>
+          <a:xfrm rot="0" flipH="0" flipV="0">
+            <a:off x="3619500" y="5314950"/>
+            <a:ext cx="8191500" cy="1009650"/>
+          </a:xfrm>
+          <a:prstGeom prst="roundRect">
+            <a:avLst>
+              <a:gd name="adj" fmla="val 9434"/>
+            </a:avLst>
+          </a:prstGeom>
+          <a:solidFill>
+            <a:srgbClr val="F7F9FC"/>
+          </a:solidFill>
+          <a:ln w="12700">
+            <a:solidFill>
+              <a:srgbClr val="E5E7EB"/>
+            </a:solidFill>
+            <a:prstDash val="solid"/>
+          </a:ln>
+        </p:spPr>
+        <p:txBody>
+          <a:bodyPr/>
+          <a:p/>
+        </p:txBody>
+      </p:sp>
+      <p:sp>
+        <p:nvSpPr>
+          <p:cNvPr id="44" name=""/>
+          <p:cNvSpPr/>
+          <p:nvPr/>
+        </p:nvSpPr>
+        <p:spPr>
+          <a:xfrm rot="0" flipH="0" flipV="0">
+            <a:off x="3829050" y="5600700"/>
+            <a:ext cx="438150" cy="438150"/>
+          </a:xfrm>
+          <a:prstGeom prst="roundRect">
+            <a:avLst>
+              <a:gd name="adj" fmla="val 50000"/>
+            </a:avLst>
+          </a:prstGeom>
+          <a:solidFill>
+            <a:srgbClr val="1E4FA8"/>
+          </a:solidFill>
+          <a:ln/>
+        </p:spPr>
+        <p:txBody>
+          <a:bodyPr/>
+          <a:p/>
+        </p:txBody>
+      </p:sp>
+      <p:sp>
+        <p:nvSpPr>
+          <p:cNvPr id="45" name="" descr="{&quot;isTemplate&quot;:true,&quot;type&quot;:&quot;text&quot;}"/>
+          <p:cNvSpPr txBox="1"/>
+          <p:nvPr/>
+        </p:nvSpPr>
+        <p:spPr>
+          <a:xfrm rot="0" flipH="0" flipV="0">
+            <a:off x="3990975" y="5705475"/>
+            <a:ext cx="123825" cy="228600"/>
+          </a:xfrm>
+          <a:prstGeom prst="rect"/>
+        </p:spPr>
+        <p:txBody>
+          <a:bodyPr wrap="none" lIns="0" tIns="0" rIns="0" bIns="0"/>
+          <a:p>
+            <a:pPr>
+              <a:lnSpc>
+                <a:spcPct val="100000"/>
+              </a:lnSpc>
+            </a:pPr>
+            <a:r>
+              <a:rPr lang="en-US" sz="1500" b="1">
+                <a:solidFill>
+                  <a:srgbClr val="FFFFFF"/>
+                </a:solidFill>
+                <a:latin typeface="Microsoft YaHei"/>
+                <a:ea typeface="Microsoft YaHei"/>
+              </a:rPr>
+              <a:t>4</a:t>
+            </a:r>
+            <a:endParaRPr/>
+          </a:p>
+        </p:txBody>
+      </p:sp>
+      <p:sp>
+        <p:nvSpPr>
+          <p:cNvPr id="46" name="" descr="{&quot;isTemplate&quot;:true,&quot;type&quot;:&quot;text&quot;}"/>
+          <p:cNvSpPr txBox="1"/>
+          <p:nvPr/>
+        </p:nvSpPr>
+        <p:spPr>
+          <a:xfrm rot="0" flipH="0" flipV="0">
+            <a:off x="4457700" y="5524500"/>
+            <a:ext cx="7143750" cy="257175"/>
+          </a:xfrm>
+          <a:prstGeom prst="rect"/>
+        </p:spPr>
+        <p:txBody>
+          <a:bodyPr wrap="none" lIns="0" tIns="0" rIns="0" bIns="0"/>
+          <a:p>
+            <a:pPr>
+              <a:lnSpc>
+                <a:spcPct val="100000"/>
+              </a:lnSpc>
+            </a:pPr>
+            <a:r>
+              <a:rPr lang="zh-CN" sz="1650" b="1">
+                <a:solidFill>
+                  <a:srgbClr val="1A2230"/>
+                </a:solidFill>
+                <a:latin typeface="Microsoft YaHei"/>
+                <a:ea typeface="Microsoft YaHei"/>
+              </a:rPr>
+              <a:t>索引入库</a:t>
+            </a:r>
+            <a:endParaRPr/>
+          </a:p>
+        </p:txBody>
+      </p:sp>
+      <p:sp>
+        <p:nvSpPr>
+          <p:cNvPr id="47" name="" descr="{&quot;isTemplate&quot;:true,&quot;type&quot;:&quot;text&quot;}"/>
+          <p:cNvSpPr txBox="1"/>
+          <p:nvPr/>
+        </p:nvSpPr>
+        <p:spPr>
+          <a:xfrm rot="0" flipH="0" flipV="0">
+            <a:off x="4457700" y="5838825"/>
+            <a:ext cx="7143750" cy="276225"/>
+          </a:xfrm>
+          <a:prstGeom prst="rect"/>
+        </p:spPr>
+        <p:txBody>
+          <a:bodyPr wrap="none" lIns="0" tIns="0" rIns="0" bIns="0"/>
+          <a:p>
+            <a:pPr>
+              <a:lnSpc>
+                <a:spcPct val="150000"/>
+              </a:lnSpc>
+            </a:pPr>
+            <a:r>
+              <a:rPr lang="en-US" sz="1200">
+                <a:solidFill>
+                  <a:srgbClr val="4A5568"/>
+                </a:solidFill>
+                <a:latin typeface="Microsoft YaHei"/>
+                <a:ea typeface="Microsoft YaHei"/>
+              </a:rPr>
+              <a:t xml:space="preserve">Chroma </a:t>
+            </a:r>
+            <a:r>
+              <a:rPr lang="zh-CN" sz="1200">
+                <a:solidFill>
+                  <a:srgbClr val="4A5568"/>
+                </a:solidFill>
+                <a:latin typeface="Microsoft YaHei"/>
+                <a:ea typeface="Microsoft YaHei"/>
+              </a:rPr>
+              <a:t>写入稠密向量，</a:t>
+            </a:r>
+            <a:r>
+              <a:rPr lang="en-US" sz="1200">
+                <a:solidFill>
+                  <a:srgbClr val="4A5568"/>
+                </a:solidFill>
+                <a:latin typeface="Microsoft YaHei"/>
+                <a:ea typeface="Microsoft YaHei"/>
+              </a:rPr>
+              <a:t xml:space="preserve">rank_bm25 </a:t>
+            </a:r>
+            <a:r>
+              <a:rPr lang="zh-CN" sz="1200">
+                <a:solidFill>
+                  <a:srgbClr val="4A5568"/>
+                </a:solidFill>
+                <a:latin typeface="Microsoft YaHei"/>
+                <a:ea typeface="Microsoft YaHei"/>
+              </a:rPr>
+              <a:t>构建稀疏索引</a:t>
+            </a:r>
+            <a:endParaRPr/>
+          </a:p>
+        </p:txBody>
+      </p:sp>
+      <p:sp>
+        <p:nvSpPr>
+          <p:cNvPr id="48" name="" descr="{&quot;isTemplate&quot;:true,&quot;type&quot;:&quot;text&quot;}"/>
+          <p:cNvSpPr txBox="1"/>
+          <p:nvPr/>
+        </p:nvSpPr>
+        <p:spPr>
+          <a:xfrm rot="0" flipH="0" flipV="0">
+            <a:off x="381000" y="6591300"/>
+            <a:ext cx="1600200" cy="161925"/>
+          </a:xfrm>
+          <a:prstGeom prst="rect"/>
+        </p:spPr>
+        <p:txBody>
+          <a:bodyPr wrap="none" lIns="0" tIns="0" rIns="0" bIns="0"/>
+          <a:p>
+            <a:pPr>
+              <a:lnSpc>
+                <a:spcPct val="100000"/>
+              </a:lnSpc>
+            </a:pPr>
+            <a:r>
+              <a:rPr lang="zh-CN" sz="1050">
+                <a:solidFill>
+                  <a:srgbClr val="8B97A8"/>
+                </a:solidFill>
+                <a:latin typeface="Microsoft YaHei"/>
+                <a:ea typeface="Microsoft YaHei"/>
+              </a:rPr>
+              <a:t>中国科学技术大学软件学院</a:t>
+            </a:r>
+            <a:endParaRPr/>
+          </a:p>
+        </p:txBody>
+      </p:sp>
+      <p:sp>
+        <p:nvSpPr>
+          <p:cNvPr id="49" name="" descr="{&quot;isTemplate&quot;:true,&quot;type&quot;:&quot;text&quot;}"/>
+          <p:cNvSpPr txBox="1"/>
+          <p:nvPr/>
+        </p:nvSpPr>
+        <p:spPr>
+          <a:xfrm rot="0" flipH="0" flipV="0">
+            <a:off x="11268075" y="6572250"/>
+            <a:ext cx="542925" cy="190500"/>
+          </a:xfrm>
+          <a:prstGeom prst="rect"/>
+        </p:spPr>
+        <p:txBody>
+          <a:bodyPr wrap="none" lIns="0" tIns="0" rIns="0" bIns="0"/>
+          <a:p>
+            <a:pPr>
+              <a:lnSpc>
+                <a:spcPct val="100000"/>
+              </a:lnSpc>
+            </a:pPr>
+            <a:r>
+              <a:rPr lang="en-US" sz="1200" b="1">
+                <a:solidFill>
+                  <a:srgbClr val="1E4FA8"/>
+                </a:solidFill>
+                <a:latin typeface="Microsoft YaHei"/>
+                <a:ea typeface="Microsoft YaHei"/>
+              </a:rPr>
+              <a:t>10 / 17</a:t>
+            </a:r>
+            <a:endParaRPr/>
+          </a:p>
+        </p:txBody>
+      </p:sp>
+    </p:spTree>
+  </p:cSld>
+</p:sld>
+</file>
+
+<file path=ppt/slides/slide11.xml><?xml version="1.0" encoding="utf-8"?>
+<p:sld xmlns:p="http://schemas.openxmlformats.org/presentationml/2006/main" xmlns:a="http://schemas.openxmlformats.org/drawingml/2006/main">
+  <p:cSld>
+    <p:spTree>
+      <p:nvGrpSpPr>
+        <p:cNvPr id="50" name="" descr="&lt;Slide&gt;&#10;  &lt;Box style={{ width: '1280px', height: '720px', background: '#FFFFFF', flexDirection: 'column' }}&gt;&#10;    {/* 页眉 */}&#10;    &lt;Box style={{ height: 72, background: '#1E4FA8', flexDirection: 'row', alignItems: 'center', justifyContent: 'space-between', paddingLeft: 40, paddingRight: 40 }}&gt;&#10;      &lt;Text style={{ color: '#FFFFFF', fontSize: 16 }}&gt;基于 RAG 的轻量级企业工艺生成系统&lt;/Text&gt;&#10;      &lt;Text style={{ color: 'rgba(255,255,255,0.85)', fontSize: 14 }}&gt;技术方案&lt;/Text&gt;&#10;    &lt;/Box&gt;&#10;&#10;    {/* 左标题栏 + 右流程 */}&#10;    &lt;Box style={{ flex: 1, flexDirection: 'row', paddingLeft: 40, paddingRight: 40, paddingTop: 28, paddingBottom: 16, gap: 40 }}&gt;&#10;      {/* 左标题栏 */}&#10;      &lt;Box style={{ width: 300, flexDirection: 'column', justifyContent: 'space-between', gap: 16 }}&gt;&#10;        &lt;Box style={{ flexDirection: 'column', gap: 16 }}&gt;&#10;          &lt;Box style={{ width: 48, height: 4, background: '#3D7BD9', borderRadius: 2 }} /&gt;&#10;          &lt;Text style={{ color: '#1A2230', fontSize: 34, fontWeight: 'bold', lineHeight: 1.3 }}&gt;在线问答链路&lt;/Text&gt;&#10;          &lt;Text style={{ color: '#8B97A8', fontSize: 16, lineHeight: 1.5 }}&gt;每次提问，从知识库检索并生成带引用的加工指令&lt;/Text&gt;&#10;        &lt;/Box&gt;&#10;        &lt;Box style={{ padding: 18, background: '#0E3F8C', borderRadius: 8 }}&gt;&#10;          &lt;Text style={{ color: '#FFFFFF', fontSize: 18, fontWeight: 'bold' }}&gt;关键点&lt;/Text&gt;&#10;          &lt;Text style={{ color: '#D6E4F7', fontSize: 15, lineHeight: 1.6, marginTop: 8 }}&gt;&#10;            多轮查询改写：把含代词、省略的追问补全为独立问题，再走检索链路。&#10;          &lt;/Text&gt;&#10;        &lt;/Box&gt;&#10;      &lt;/Box&gt;&#10;&#10;      {/* 右：流程节点串（纵向，撑满） */}&#10;      &lt;Box style={{ flex: 1, flexDirection: 'column', justifyContent: 'space-between' }}&gt;&#10;        {[&#10;          { t: '查询改写', d: '记录历史，将追问补全为独立问题', n: '1' },&#10;          { t: '混合召回', d: '并行执行向量检索 + BM25 检索', n: '2' },&#10;          { t: 'RRF 融合', d: 'k=60 合并两路结果并去重', n: '3' },&#10;          { t: '重排序', d: 'bge-reranker-v2-m3 精排，取 top 3~5', n: '4' },&#10;          { t: '生成 + 溯源', d: '拼装 Prompt 调用大模型，生成带引用的结构化指令', n: '5' },&#10;        ].map((item) =&gt; (&#10;          &lt;Box key={item.n} style={{ flexDirection: 'row', alignItems: 'center', gap: 20, padding: 16, background: '#F7F9FC', borderRadius: 10, border: '1px solid #E5E7EB' }}&gt;&#10;            &lt;Box style={{ width: 46, height: 46, background: '#1E4FA8', borderRadius: 23, alignItems: 'center', justifyContent: 'center' }}&gt;&#10;              &lt;Text style={{ color: '#FFFFFF', fontSize: 20, fontWeight: 'bold' }}&gt;{item.n}&lt;/Text&gt;&#10;            &lt;/Box&gt;&#10;            &lt;Box style={{ flex: 1, flexDirection: 'column', gap: 6 }}&gt;&#10;              &lt;Text style={{ color: '#1A2230', fontSize: 22, fontWeight: 'bold' }}&gt;{item.t}&lt;/Text&gt;&#10;              &lt;Text style={{ color: '#4A5568', fontSize: 16, lineHeight: 1.5 }}&gt;{item.d}&lt;/Text&gt;&#10;            &lt;/Box&gt;&#10;          &lt;/Box&gt;&#10;        ))}&#10;      &lt;/Box&gt;&#10;    &lt;/Box&gt;&#10;&#10;    {/* 页脚 */}&#10;    &lt;Box style={{ height: 40, flexDirection: 'row', alignItems: 'center', justifyContent: 'space-between', paddingLeft: 40, paddingRight: 40 }}&gt;&#10;      &lt;Text style={{ color: '#8B97A8', fontSize: 14 }}&gt;中国科学技术大学软件学院&lt;/Text&gt;&#10;      &lt;Text style={{ color: '#1E4FA8', fontSize: 16, fontWeight: 'bold' }}&gt;11 / 17&lt;/Text&gt;&#10;    &lt;/Box&gt;&#10;  &lt;/Box&gt;&#10;&lt;/Slide&gt;&#10;"/>
+        <p:cNvGrpSpPr/>
+        <p:nvPr/>
+      </p:nvGrpSpPr>
+      <p:grpSpPr>
+        <a:xfrm>
+          <a:off x="0" y="0"/>
+          <a:ext cx="0" cy="0"/>
+          <a:chOff x="0" y="0"/>
+          <a:chExt cx="0" cy="0"/>
+        </a:xfrm>
+      </p:grpSpPr>
+      <p:sp>
+        <p:nvSpPr>
+          <p:cNvPr id="51" name=""/>
+          <p:cNvSpPr/>
+          <p:nvPr/>
+        </p:nvSpPr>
+        <p:spPr>
+          <a:xfrm rot="0" flipH="0" flipV="0">
+            <a:off x="0" y="0"/>
+            <a:ext cx="12192000" cy="6858000"/>
+          </a:xfrm>
+          <a:prstGeom prst="rect">
+            <a:avLst/>
+          </a:prstGeom>
+          <a:solidFill>
+            <a:srgbClr val="FFFFFF"/>
+          </a:solidFill>
+          <a:ln/>
+        </p:spPr>
+        <p:txBody>
+          <a:bodyPr/>
+          <a:p/>
+        </p:txBody>
+      </p:sp>
+      <p:sp>
+        <p:nvSpPr>
+          <p:cNvPr id="52" name=""/>
+          <p:cNvSpPr/>
+          <p:nvPr/>
+        </p:nvSpPr>
+        <p:spPr>
+          <a:xfrm rot="0" flipH="0" flipV="0">
+            <a:off x="0" y="0"/>
+            <a:ext cx="12192000" cy="685800"/>
+          </a:xfrm>
+          <a:prstGeom prst="rect">
+            <a:avLst/>
+          </a:prstGeom>
+          <a:solidFill>
+            <a:srgbClr val="1E4FA8"/>
+          </a:solidFill>
+          <a:ln/>
+        </p:spPr>
+        <p:txBody>
+          <a:bodyPr/>
+          <a:p/>
+        </p:txBody>
+      </p:sp>
+      <p:sp>
+        <p:nvSpPr>
+          <p:cNvPr id="53" name="" descr="{&quot;isTemplate&quot;:true,&quot;type&quot;:&quot;text&quot;}"/>
+          <p:cNvSpPr txBox="1"/>
+          <p:nvPr/>
+        </p:nvSpPr>
+        <p:spPr>
+          <a:xfrm rot="0" flipH="0" flipV="0">
+            <a:off x="381000" y="247650"/>
+            <a:ext cx="2543175" cy="190500"/>
+          </a:xfrm>
+          <a:prstGeom prst="rect"/>
+        </p:spPr>
+        <p:txBody>
+          <a:bodyPr wrap="none" lIns="0" tIns="0" rIns="0" bIns="0"/>
+          <a:p>
+            <a:pPr>
+              <a:lnSpc>
+                <a:spcPct val="100000"/>
+              </a:lnSpc>
+            </a:pPr>
+            <a:r>
+              <a:rPr lang="zh-CN" sz="1200">
+                <a:solidFill>
+                  <a:srgbClr val="FFFFFF"/>
+                </a:solidFill>
+                <a:latin typeface="Microsoft YaHei"/>
+                <a:ea typeface="Microsoft YaHei"/>
+              </a:rPr>
+              <a:t>基于</a:t>
+            </a:r>
+            <a:r>
+              <a:rPr lang="en-US" sz="1200">
+                <a:solidFill>
+                  <a:srgbClr val="FFFFFF"/>
+                </a:solidFill>
+                <a:latin typeface="Microsoft YaHei"/>
+                <a:ea typeface="Microsoft YaHei"/>
+              </a:rPr>
+              <a:t xml:space="preserve"> RAG </a:t>
+            </a:r>
+            <a:r>
+              <a:rPr lang="zh-CN" sz="1200">
+                <a:solidFill>
+                  <a:srgbClr val="FFFFFF"/>
+                </a:solidFill>
+                <a:latin typeface="Microsoft YaHei"/>
+                <a:ea typeface="Microsoft YaHei"/>
+              </a:rPr>
+              <a:t>的轻量级企业工艺生成系统</a:t>
+            </a:r>
+            <a:endParaRPr/>
+          </a:p>
+        </p:txBody>
+      </p:sp>
+      <p:sp>
+        <p:nvSpPr>
+          <p:cNvPr id="54" name="" descr="{&quot;isTemplate&quot;:true,&quot;type&quot;:&quot;text&quot;}"/>
+          <p:cNvSpPr txBox="1"/>
+          <p:nvPr/>
+        </p:nvSpPr>
+        <p:spPr>
+          <a:xfrm rot="0" flipH="0" flipV="0">
+            <a:off x="11277600" y="266700"/>
+            <a:ext cx="533400" cy="161925"/>
+          </a:xfrm>
+          <a:prstGeom prst="rect"/>
+        </p:spPr>
+        <p:txBody>
+          <a:bodyPr wrap="none" lIns="0" tIns="0" rIns="0" bIns="0"/>
+          <a:p>
+            <a:pPr>
+              <a:lnSpc>
+                <a:spcPct val="100000"/>
+              </a:lnSpc>
+            </a:pPr>
+            <a:r>
+              <a:rPr lang="zh-CN" sz="1050">
+                <a:solidFill>
+                  <a:srgbClr val="FFFFFF">
+                    <a:alpha val="85000"/>
+                  </a:srgbClr>
+                </a:solidFill>
+                <a:latin typeface="Microsoft YaHei"/>
+                <a:ea typeface="Microsoft YaHei"/>
+              </a:rPr>
+              <a:t>技术方案</a:t>
+            </a:r>
+            <a:endParaRPr/>
+          </a:p>
+        </p:txBody>
+      </p:sp>
+      <p:sp>
+        <p:nvSpPr>
+          <p:cNvPr id="55" name=""/>
+          <p:cNvSpPr/>
+          <p:nvPr/>
+        </p:nvSpPr>
+        <p:spPr>
+          <a:xfrm rot="0" flipH="0" flipV="0">
+            <a:off x="381000" y="952500"/>
+            <a:ext cx="457200" cy="38100"/>
+          </a:xfrm>
+          <a:prstGeom prst="roundRect">
+            <a:avLst>
+              <a:gd name="adj" fmla="val 50000"/>
+            </a:avLst>
+          </a:prstGeom>
+          <a:solidFill>
+            <a:srgbClr val="3D7BD9"/>
+          </a:solidFill>
+          <a:ln/>
+        </p:spPr>
+        <p:txBody>
+          <a:bodyPr/>
+          <a:p/>
+        </p:txBody>
+      </p:sp>
+      <p:sp>
+        <p:nvSpPr>
+          <p:cNvPr id="56" name="" descr="{&quot;isTemplate&quot;:true,&quot;type&quot;:&quot;text&quot;}"/>
+          <p:cNvSpPr txBox="1"/>
+          <p:nvPr/>
+        </p:nvSpPr>
+        <p:spPr>
+          <a:xfrm rot="0" flipH="0" flipV="0">
+            <a:off x="381000" y="1143000"/>
+            <a:ext cx="2857500" cy="514350"/>
+          </a:xfrm>
+          <a:prstGeom prst="rect"/>
+        </p:spPr>
+        <p:txBody>
+          <a:bodyPr wrap="none" lIns="0" tIns="0" rIns="0" bIns="0"/>
+          <a:p>
+            <a:pPr>
+              <a:lnSpc>
+                <a:spcPct val="130000"/>
+              </a:lnSpc>
+            </a:pPr>
+            <a:r>
+              <a:rPr lang="zh-CN" sz="2550" b="1">
+                <a:solidFill>
+                  <a:srgbClr val="1A2230"/>
+                </a:solidFill>
+                <a:latin typeface="Microsoft YaHei"/>
+                <a:ea typeface="Microsoft YaHei"/>
+              </a:rPr>
+              <a:t>在线问答链路</a:t>
+            </a:r>
+            <a:endParaRPr/>
+          </a:p>
+        </p:txBody>
+      </p:sp>
+      <p:sp>
+        <p:nvSpPr>
+          <p:cNvPr id="57" name="" descr="{&quot;isTemplate&quot;:true,&quot;type&quot;:&quot;text&quot;}"/>
+          <p:cNvSpPr txBox="1"/>
+          <p:nvPr/>
+        </p:nvSpPr>
+        <p:spPr>
+          <a:xfrm rot="0" flipH="0" flipV="0">
+            <a:off x="381000" y="1809750"/>
+            <a:ext cx="2857500" cy="552450"/>
+          </a:xfrm>
+          <a:prstGeom prst="rect"/>
+        </p:spPr>
+        <p:txBody>
+          <a:bodyPr wrap="square" lIns="0" tIns="0" rIns="0" bIns="0">
+            <a:normAutofit/>
+          </a:bodyPr>
+          <a:p>
+            <a:pPr>
+              <a:lnSpc>
+                <a:spcPct val="150000"/>
+              </a:lnSpc>
+            </a:pPr>
+            <a:r>
+              <a:rPr lang="zh-CN" sz="1200">
+                <a:solidFill>
+                  <a:srgbClr val="8B97A8"/>
+                </a:solidFill>
+                <a:latin typeface="Microsoft YaHei"/>
+                <a:ea typeface="Microsoft YaHei"/>
+              </a:rPr>
+              <a:t>每次提问，从知识库检索并生成带引用的加工指令</a:t>
+            </a:r>
+            <a:endParaRPr/>
+          </a:p>
+        </p:txBody>
+      </p:sp>
+      <p:sp>
+        <p:nvSpPr>
+          <p:cNvPr id="58" name=""/>
+          <p:cNvSpPr/>
+          <p:nvPr/>
+        </p:nvSpPr>
+        <p:spPr>
+          <a:xfrm rot="0" flipH="0" flipV="0">
+            <a:off x="381000" y="5143500"/>
+            <a:ext cx="2857500" cy="1181100"/>
+          </a:xfrm>
+          <a:prstGeom prst="roundRect">
+            <a:avLst>
+              <a:gd name="adj" fmla="val 6452"/>
+            </a:avLst>
+          </a:prstGeom>
+          <a:solidFill>
+            <a:srgbClr val="0E3F8C"/>
+          </a:solidFill>
+          <a:ln/>
+        </p:spPr>
+        <p:txBody>
+          <a:bodyPr/>
+          <a:p/>
+        </p:txBody>
+      </p:sp>
+      <p:sp>
+        <p:nvSpPr>
+          <p:cNvPr id="59" name="" descr="{&quot;isTemplate&quot;:true,&quot;type&quot;:&quot;text&quot;}"/>
+          <p:cNvSpPr txBox="1"/>
+          <p:nvPr/>
+        </p:nvSpPr>
+        <p:spPr>
+          <a:xfrm rot="0" flipH="0" flipV="0">
+            <a:off x="552450" y="5314950"/>
+            <a:ext cx="2514600" cy="209550"/>
+          </a:xfrm>
+          <a:prstGeom prst="rect"/>
+        </p:spPr>
+        <p:txBody>
+          <a:bodyPr wrap="none" lIns="0" tIns="0" rIns="0" bIns="0"/>
+          <a:p>
+            <a:pPr>
+              <a:lnSpc>
+                <a:spcPct val="100000"/>
+              </a:lnSpc>
+            </a:pPr>
+            <a:r>
+              <a:rPr lang="zh-CN" sz="1350" b="1">
+                <a:solidFill>
+                  <a:srgbClr val="FFFFFF"/>
+                </a:solidFill>
+                <a:latin typeface="Microsoft YaHei"/>
+                <a:ea typeface="Microsoft YaHei"/>
+              </a:rPr>
+              <a:t>关键点</a:t>
+            </a:r>
+            <a:endParaRPr/>
+          </a:p>
+        </p:txBody>
+      </p:sp>
+      <p:sp>
+        <p:nvSpPr>
+          <p:cNvPr id="60" name="" descr="{&quot;isTemplate&quot;:true,&quot;type&quot;:&quot;text&quot;}"/>
+          <p:cNvSpPr txBox="1"/>
+          <p:nvPr/>
+        </p:nvSpPr>
+        <p:spPr>
+          <a:xfrm rot="0" flipH="0" flipV="0">
+            <a:off x="552450" y="5600700"/>
+            <a:ext cx="2514600" cy="552450"/>
+          </a:xfrm>
+          <a:prstGeom prst="rect"/>
+        </p:spPr>
+        <p:txBody>
+          <a:bodyPr wrap="square" lIns="0" tIns="0" rIns="0" bIns="0">
+            <a:normAutofit/>
+          </a:bodyPr>
+          <a:p>
+            <a:pPr>
+              <a:lnSpc>
+                <a:spcPct val="160000"/>
+              </a:lnSpc>
+            </a:pPr>
+            <a:r>
+              <a:rPr lang="zh-CN" sz="1125">
+                <a:solidFill>
+                  <a:srgbClr val="D6E4F7"/>
+                </a:solidFill>
+                <a:latin typeface="Microsoft YaHei"/>
+                <a:ea typeface="Microsoft YaHei"/>
+              </a:rPr>
+              <a:t>多轮查询改写：把含代词、省略的追问补全为独立问题，再走检索链路。</a:t>
+            </a:r>
+            <a:endParaRPr/>
+          </a:p>
+        </p:txBody>
+      </p:sp>
+      <p:sp>
+        <p:nvSpPr>
+          <p:cNvPr id="61" name=""/>
+          <p:cNvSpPr/>
+          <p:nvPr/>
+        </p:nvSpPr>
+        <p:spPr>
+          <a:xfrm rot="0" flipH="0" flipV="0">
+            <a:off x="3619500" y="952500"/>
+            <a:ext cx="8191500" cy="895350"/>
+          </a:xfrm>
+          <a:prstGeom prst="roundRect">
+            <a:avLst>
+              <a:gd name="adj" fmla="val 10638"/>
+            </a:avLst>
+          </a:prstGeom>
+          <a:solidFill>
+            <a:srgbClr val="F7F9FC"/>
+          </a:solidFill>
+          <a:ln w="12700">
+            <a:solidFill>
+              <a:srgbClr val="E5E7EB"/>
+            </a:solidFill>
+            <a:prstDash val="solid"/>
+          </a:ln>
+        </p:spPr>
+        <p:txBody>
+          <a:bodyPr/>
+          <a:p/>
+        </p:txBody>
+      </p:sp>
+      <p:sp>
+        <p:nvSpPr>
+          <p:cNvPr id="62" name=""/>
+          <p:cNvSpPr/>
+          <p:nvPr/>
+        </p:nvSpPr>
+        <p:spPr>
+          <a:xfrm rot="0" flipH="0" flipV="0">
+            <a:off x="3771900" y="1181100"/>
+            <a:ext cx="438150" cy="438150"/>
+          </a:xfrm>
+          <a:prstGeom prst="roundRect">
+            <a:avLst>
+              <a:gd name="adj" fmla="val 50000"/>
+            </a:avLst>
+          </a:prstGeom>
+          <a:solidFill>
+            <a:srgbClr val="1E4FA8"/>
+          </a:solidFill>
+          <a:ln/>
+        </p:spPr>
+        <p:txBody>
+          <a:bodyPr/>
+          <a:p/>
+        </p:txBody>
+      </p:sp>
+      <p:sp>
+        <p:nvSpPr>
+          <p:cNvPr id="63" name="" descr="{&quot;isTemplate&quot;:true,&quot;type&quot;:&quot;text&quot;}"/>
+          <p:cNvSpPr txBox="1"/>
+          <p:nvPr/>
+        </p:nvSpPr>
+        <p:spPr>
+          <a:xfrm rot="0" flipH="0" flipV="0">
+            <a:off x="3933825" y="1285875"/>
+            <a:ext cx="123825" cy="228600"/>
+          </a:xfrm>
+          <a:prstGeom prst="rect"/>
+        </p:spPr>
+        <p:txBody>
+          <a:bodyPr wrap="none" lIns="0" tIns="0" rIns="0" bIns="0"/>
+          <a:p>
+            <a:pPr>
+              <a:lnSpc>
+                <a:spcPct val="100000"/>
+              </a:lnSpc>
+            </a:pPr>
+            <a:r>
+              <a:rPr lang="en-US" sz="1500" b="1">
+                <a:solidFill>
+                  <a:srgbClr val="FFFFFF"/>
+                </a:solidFill>
+                <a:latin typeface="Microsoft YaHei"/>
+                <a:ea typeface="Microsoft YaHei"/>
+              </a:rPr>
+              <a:t>1</a:t>
+            </a:r>
+            <a:endParaRPr/>
+          </a:p>
+        </p:txBody>
+      </p:sp>
+      <p:sp>
+        <p:nvSpPr>
+          <p:cNvPr id="64" name="" descr="{&quot;isTemplate&quot;:true,&quot;type&quot;:&quot;text&quot;}"/>
+          <p:cNvSpPr txBox="1"/>
+          <p:nvPr/>
+        </p:nvSpPr>
+        <p:spPr>
+          <a:xfrm rot="0" flipH="0" flipV="0">
+            <a:off x="4400550" y="1104900"/>
+            <a:ext cx="7258050" cy="257175"/>
+          </a:xfrm>
+          <a:prstGeom prst="rect"/>
+        </p:spPr>
+        <p:txBody>
+          <a:bodyPr wrap="none" lIns="0" tIns="0" rIns="0" bIns="0"/>
+          <a:p>
+            <a:pPr>
+              <a:lnSpc>
+                <a:spcPct val="100000"/>
+              </a:lnSpc>
+            </a:pPr>
+            <a:r>
+              <a:rPr lang="zh-CN" sz="1650" b="1">
+                <a:solidFill>
+                  <a:srgbClr val="1A2230"/>
+                </a:solidFill>
+                <a:latin typeface="Microsoft YaHei"/>
+                <a:ea typeface="Microsoft YaHei"/>
+              </a:rPr>
+              <a:t>查询改写</a:t>
+            </a:r>
+            <a:endParaRPr/>
+          </a:p>
+        </p:txBody>
+      </p:sp>
+      <p:sp>
+        <p:nvSpPr>
+          <p:cNvPr id="65" name="" descr="{&quot;isTemplate&quot;:true,&quot;type&quot;:&quot;text&quot;}"/>
+          <p:cNvSpPr txBox="1"/>
+          <p:nvPr/>
+        </p:nvSpPr>
+        <p:spPr>
+          <a:xfrm rot="0" flipH="0" flipV="0">
+            <a:off x="4400550" y="1419225"/>
+            <a:ext cx="7258050" cy="276225"/>
+          </a:xfrm>
+          <a:prstGeom prst="rect"/>
+        </p:spPr>
+        <p:txBody>
+          <a:bodyPr wrap="none" lIns="0" tIns="0" rIns="0" bIns="0"/>
+          <a:p>
+            <a:pPr>
+              <a:lnSpc>
+                <a:spcPct val="150000"/>
+              </a:lnSpc>
+            </a:pPr>
+            <a:r>
+              <a:rPr lang="zh-CN" sz="1200">
+                <a:solidFill>
+                  <a:srgbClr val="4A5568"/>
+                </a:solidFill>
+                <a:latin typeface="Microsoft YaHei"/>
+                <a:ea typeface="Microsoft YaHei"/>
+              </a:rPr>
+              <a:t>记录历史，将追问补全为独立问题</a:t>
+            </a:r>
+            <a:endParaRPr/>
+          </a:p>
+        </p:txBody>
+      </p:sp>
+      <p:sp>
+        <p:nvSpPr>
+          <p:cNvPr id="66" name=""/>
+          <p:cNvSpPr/>
+          <p:nvPr/>
+        </p:nvSpPr>
+        <p:spPr>
+          <a:xfrm rot="0" flipH="0" flipV="0">
+            <a:off x="3619500" y="2076450"/>
+            <a:ext cx="8191500" cy="895350"/>
+          </a:xfrm>
+          <a:prstGeom prst="roundRect">
+            <a:avLst>
+              <a:gd name="adj" fmla="val 10638"/>
+            </a:avLst>
+          </a:prstGeom>
+          <a:solidFill>
+            <a:srgbClr val="F7F9FC"/>
+          </a:solidFill>
+          <a:ln w="12700">
+            <a:solidFill>
+              <a:srgbClr val="E5E7EB"/>
+            </a:solidFill>
+            <a:prstDash val="solid"/>
+          </a:ln>
+        </p:spPr>
+        <p:txBody>
+          <a:bodyPr/>
+          <a:p/>
+        </p:txBody>
+      </p:sp>
+      <p:sp>
+        <p:nvSpPr>
+          <p:cNvPr id="67" name=""/>
+          <p:cNvSpPr/>
+          <p:nvPr/>
+        </p:nvSpPr>
+        <p:spPr>
+          <a:xfrm rot="0" flipH="0" flipV="0">
+            <a:off x="3771900" y="2305050"/>
+            <a:ext cx="438150" cy="438150"/>
+          </a:xfrm>
+          <a:prstGeom prst="roundRect">
+            <a:avLst>
+              <a:gd name="adj" fmla="val 50000"/>
+            </a:avLst>
+          </a:prstGeom>
+          <a:solidFill>
+            <a:srgbClr val="1E4FA8"/>
+          </a:solidFill>
+          <a:ln/>
+        </p:spPr>
+        <p:txBody>
+          <a:bodyPr/>
+          <a:p/>
+        </p:txBody>
+      </p:sp>
+      <p:sp>
+        <p:nvSpPr>
+          <p:cNvPr id="68" name="" descr="{&quot;isTemplate&quot;:true,&quot;type&quot;:&quot;text&quot;}"/>
+          <p:cNvSpPr txBox="1"/>
+          <p:nvPr/>
+        </p:nvSpPr>
+        <p:spPr>
+          <a:xfrm rot="0" flipH="0" flipV="0">
+            <a:off x="3933825" y="2409825"/>
+            <a:ext cx="123825" cy="228600"/>
+          </a:xfrm>
+          <a:prstGeom prst="rect"/>
+        </p:spPr>
+        <p:txBody>
+          <a:bodyPr wrap="none" lIns="0" tIns="0" rIns="0" bIns="0"/>
+          <a:p>
+            <a:pPr>
+              <a:lnSpc>
+                <a:spcPct val="100000"/>
+              </a:lnSpc>
+            </a:pPr>
+            <a:r>
+              <a:rPr lang="en-US" sz="1500" b="1">
+                <a:solidFill>
+                  <a:srgbClr val="FFFFFF"/>
+                </a:solidFill>
+                <a:latin typeface="Microsoft YaHei"/>
+                <a:ea typeface="Microsoft YaHei"/>
+              </a:rPr>
+              <a:t>2</a:t>
+            </a:r>
+            <a:endParaRPr/>
+          </a:p>
+        </p:txBody>
+      </p:sp>
+      <p:sp>
+        <p:nvSpPr>
+          <p:cNvPr id="69" name="" descr="{&quot;isTemplate&quot;:true,&quot;type&quot;:&quot;text&quot;}"/>
+          <p:cNvSpPr txBox="1"/>
+          <p:nvPr/>
+        </p:nvSpPr>
+        <p:spPr>
+          <a:xfrm rot="0" flipH="0" flipV="0">
+            <a:off x="4400550" y="2228850"/>
+            <a:ext cx="7258050" cy="257175"/>
+          </a:xfrm>
+          <a:prstGeom prst="rect"/>
+        </p:spPr>
+        <p:txBody>
+          <a:bodyPr wrap="none" lIns="0" tIns="0" rIns="0" bIns="0"/>
+          <a:p>
+            <a:pPr>
+              <a:lnSpc>
+                <a:spcPct val="100000"/>
+              </a:lnSpc>
+            </a:pPr>
+            <a:r>
+              <a:rPr lang="zh-CN" sz="1650" b="1">
+                <a:solidFill>
+                  <a:srgbClr val="1A2230"/>
+                </a:solidFill>
+                <a:latin typeface="Microsoft YaHei"/>
+                <a:ea typeface="Microsoft YaHei"/>
+              </a:rPr>
+              <a:t>混合召回</a:t>
+            </a:r>
+            <a:endParaRPr/>
+          </a:p>
+        </p:txBody>
+      </p:sp>
+      <p:sp>
+        <p:nvSpPr>
+          <p:cNvPr id="70" name="" descr="{&quot;isTemplate&quot;:true,&quot;type&quot;:&quot;text&quot;}"/>
+          <p:cNvSpPr txBox="1"/>
+          <p:nvPr/>
+        </p:nvSpPr>
+        <p:spPr>
+          <a:xfrm rot="0" flipH="0" flipV="0">
+            <a:off x="4400550" y="2543175"/>
+            <a:ext cx="7258050" cy="276225"/>
+          </a:xfrm>
+          <a:prstGeom prst="rect"/>
+        </p:spPr>
+        <p:txBody>
+          <a:bodyPr wrap="none" lIns="0" tIns="0" rIns="0" bIns="0"/>
+          <a:p>
+            <a:pPr>
+              <a:lnSpc>
+                <a:spcPct val="150000"/>
+              </a:lnSpc>
+            </a:pPr>
+            <a:r>
+              <a:rPr lang="zh-CN" sz="1200">
+                <a:solidFill>
+                  <a:srgbClr val="4A5568"/>
+                </a:solidFill>
+                <a:latin typeface="Microsoft YaHei"/>
+                <a:ea typeface="Microsoft YaHei"/>
+              </a:rPr>
+              <a:t>并行执行向量检索</a:t>
+            </a:r>
+            <a:r>
+              <a:rPr lang="en-US" sz="1200">
+                <a:solidFill>
+                  <a:srgbClr val="4A5568"/>
+                </a:solidFill>
+                <a:latin typeface="Microsoft YaHei"/>
+                <a:ea typeface="Microsoft YaHei"/>
+              </a:rPr>
+              <a:t xml:space="preserve"> + BM25 </a:t>
+            </a:r>
+            <a:r>
+              <a:rPr lang="zh-CN" sz="1200">
+                <a:solidFill>
+                  <a:srgbClr val="4A5568"/>
+                </a:solidFill>
+                <a:latin typeface="Microsoft YaHei"/>
+                <a:ea typeface="Microsoft YaHei"/>
+              </a:rPr>
+              <a:t>检索</a:t>
+            </a:r>
+            <a:endParaRPr/>
+          </a:p>
+        </p:txBody>
+      </p:sp>
+      <p:sp>
+        <p:nvSpPr>
+          <p:cNvPr id="71" name=""/>
+          <p:cNvSpPr/>
+          <p:nvPr/>
+        </p:nvSpPr>
+        <p:spPr>
+          <a:xfrm rot="0" flipH="0" flipV="0">
+            <a:off x="3619500" y="3190875"/>
+            <a:ext cx="8191500" cy="895350"/>
+          </a:xfrm>
+          <a:prstGeom prst="roundRect">
+            <a:avLst>
+              <a:gd name="adj" fmla="val 10638"/>
+            </a:avLst>
+          </a:prstGeom>
+          <a:solidFill>
+            <a:srgbClr val="F7F9FC"/>
+          </a:solidFill>
+          <a:ln w="12700">
+            <a:solidFill>
+              <a:srgbClr val="E5E7EB"/>
+            </a:solidFill>
+            <a:prstDash val="solid"/>
+          </a:ln>
+        </p:spPr>
+        <p:txBody>
+          <a:bodyPr/>
+          <a:p/>
+        </p:txBody>
+      </p:sp>
+      <p:sp>
+        <p:nvSpPr>
+          <p:cNvPr id="72" name=""/>
+          <p:cNvSpPr/>
+          <p:nvPr/>
+        </p:nvSpPr>
+        <p:spPr>
+          <a:xfrm rot="0" flipH="0" flipV="0">
+            <a:off x="3771900" y="3419475"/>
+            <a:ext cx="438150" cy="438150"/>
+          </a:xfrm>
+          <a:prstGeom prst="roundRect">
+            <a:avLst>
+              <a:gd name="adj" fmla="val 50000"/>
+            </a:avLst>
+          </a:prstGeom>
+          <a:solidFill>
+            <a:srgbClr val="1E4FA8"/>
+          </a:solidFill>
+          <a:ln/>
+        </p:spPr>
+        <p:txBody>
+          <a:bodyPr/>
+          <a:p/>
+        </p:txBody>
+      </p:sp>
+      <p:sp>
+        <p:nvSpPr>
+          <p:cNvPr id="73" name="" descr="{&quot;isTemplate&quot;:true,&quot;type&quot;:&quot;text&quot;}"/>
+          <p:cNvSpPr txBox="1"/>
+          <p:nvPr/>
+        </p:nvSpPr>
+        <p:spPr>
+          <a:xfrm rot="0" flipH="0" flipV="0">
+            <a:off x="3933825" y="3524250"/>
+            <a:ext cx="123825" cy="228600"/>
+          </a:xfrm>
+          <a:prstGeom prst="rect"/>
+        </p:spPr>
+        <p:txBody>
+          <a:bodyPr wrap="none" lIns="0" tIns="0" rIns="0" bIns="0"/>
+          <a:p>
+            <a:pPr>
+              <a:lnSpc>
+                <a:spcPct val="100000"/>
+              </a:lnSpc>
+            </a:pPr>
+            <a:r>
+              <a:rPr lang="en-US" sz="1500" b="1">
+                <a:solidFill>
+                  <a:srgbClr val="FFFFFF"/>
+                </a:solidFill>
+                <a:latin typeface="Microsoft YaHei"/>
+                <a:ea typeface="Microsoft YaHei"/>
+              </a:rPr>
+              <a:t>3</a:t>
+            </a:r>
+            <a:endParaRPr/>
+          </a:p>
+        </p:txBody>
+      </p:sp>
+      <p:sp>
+        <p:nvSpPr>
+          <p:cNvPr id="74" name="" descr="{&quot;isTemplate&quot;:true,&quot;type&quot;:&quot;text&quot;}"/>
+          <p:cNvSpPr txBox="1"/>
+          <p:nvPr/>
+        </p:nvSpPr>
+        <p:spPr>
+          <a:xfrm rot="0" flipH="0" flipV="0">
+            <a:off x="4400550" y="3343275"/>
+            <a:ext cx="7258050" cy="257175"/>
+          </a:xfrm>
+          <a:prstGeom prst="rect"/>
+        </p:spPr>
+        <p:txBody>
+          <a:bodyPr wrap="none" lIns="0" tIns="0" rIns="0" bIns="0"/>
+          <a:p>
+            <a:pPr>
+              <a:lnSpc>
+                <a:spcPct val="100000"/>
+              </a:lnSpc>
+            </a:pPr>
+            <a:r>
+              <a:rPr lang="en-US" sz="1650" b="1">
+                <a:solidFill>
+                  <a:srgbClr val="1A2230"/>
+                </a:solidFill>
+                <a:latin typeface="Microsoft YaHei"/>
+                <a:ea typeface="Microsoft YaHei"/>
+              </a:rPr>
+              <a:t xml:space="preserve">RRF </a:t>
+            </a:r>
+            <a:r>
+              <a:rPr lang="zh-CN" sz="1650" b="1">
+                <a:solidFill>
+                  <a:srgbClr val="1A2230"/>
+                </a:solidFill>
+                <a:latin typeface="Microsoft YaHei"/>
+                <a:ea typeface="Microsoft YaHei"/>
+              </a:rPr>
+              <a:t>融合</a:t>
+            </a:r>
+            <a:endParaRPr/>
+          </a:p>
+        </p:txBody>
+      </p:sp>
+      <p:sp>
+        <p:nvSpPr>
+          <p:cNvPr id="75" name="" descr="{&quot;isTemplate&quot;:true,&quot;type&quot;:&quot;text&quot;}"/>
+          <p:cNvSpPr txBox="1"/>
+          <p:nvPr/>
+        </p:nvSpPr>
+        <p:spPr>
+          <a:xfrm rot="0" flipH="0" flipV="0">
+            <a:off x="4400550" y="3657600"/>
+            <a:ext cx="7258050" cy="276225"/>
+          </a:xfrm>
+          <a:prstGeom prst="rect"/>
+        </p:spPr>
+        <p:txBody>
+          <a:bodyPr wrap="none" lIns="0" tIns="0" rIns="0" bIns="0"/>
+          <a:p>
+            <a:pPr>
+              <a:lnSpc>
+                <a:spcPct val="150000"/>
+              </a:lnSpc>
+            </a:pPr>
+            <a:r>
+              <a:rPr lang="en-US" sz="1200">
+                <a:solidFill>
+                  <a:srgbClr val="4A5568"/>
+                </a:solidFill>
+                <a:latin typeface="Microsoft YaHei"/>
+                <a:ea typeface="Microsoft YaHei"/>
+              </a:rPr>
+              <a:t xml:space="preserve">k=60 </a:t>
+            </a:r>
+            <a:r>
+              <a:rPr lang="zh-CN" sz="1200">
+                <a:solidFill>
+                  <a:srgbClr val="4A5568"/>
+                </a:solidFill>
+                <a:latin typeface="Microsoft YaHei"/>
+                <a:ea typeface="Microsoft YaHei"/>
+              </a:rPr>
+              <a:t>合并两路结果并去重</a:t>
+            </a:r>
+            <a:endParaRPr/>
+          </a:p>
+        </p:txBody>
+      </p:sp>
+      <p:sp>
+        <p:nvSpPr>
+          <p:cNvPr id="76" name=""/>
+          <p:cNvSpPr/>
+          <p:nvPr/>
+        </p:nvSpPr>
+        <p:spPr>
+          <a:xfrm rot="0" flipH="0" flipV="0">
+            <a:off x="3619500" y="4314825"/>
+            <a:ext cx="8191500" cy="895350"/>
+          </a:xfrm>
+          <a:prstGeom prst="roundRect">
+            <a:avLst>
+              <a:gd name="adj" fmla="val 10638"/>
+            </a:avLst>
+          </a:prstGeom>
+          <a:solidFill>
+            <a:srgbClr val="F7F9FC"/>
+          </a:solidFill>
+          <a:ln w="12700">
+            <a:solidFill>
+              <a:srgbClr val="E5E7EB"/>
+            </a:solidFill>
+            <a:prstDash val="solid"/>
+          </a:ln>
+        </p:spPr>
+        <p:txBody>
+          <a:bodyPr/>
+          <a:p/>
+        </p:txBody>
+      </p:sp>
+      <p:sp>
+        <p:nvSpPr>
+          <p:cNvPr id="77" name=""/>
+          <p:cNvSpPr/>
+          <p:nvPr/>
+        </p:nvSpPr>
+        <p:spPr>
+          <a:xfrm rot="0" flipH="0" flipV="0">
+            <a:off x="3771900" y="4543425"/>
+            <a:ext cx="438150" cy="438150"/>
+          </a:xfrm>
+          <a:prstGeom prst="roundRect">
+            <a:avLst>
+              <a:gd name="adj" fmla="val 50000"/>
+            </a:avLst>
+          </a:prstGeom>
+          <a:solidFill>
+            <a:srgbClr val="1E4FA8"/>
+          </a:solidFill>
+          <a:ln/>
+        </p:spPr>
+        <p:txBody>
+          <a:bodyPr/>
+          <a:p/>
+        </p:txBody>
+      </p:sp>
+      <p:sp>
+        <p:nvSpPr>
+          <p:cNvPr id="78" name="" descr="{&quot;isTemplate&quot;:true,&quot;type&quot;:&quot;text&quot;}"/>
+          <p:cNvSpPr txBox="1"/>
+          <p:nvPr/>
+        </p:nvSpPr>
+        <p:spPr>
+          <a:xfrm rot="0" flipH="0" flipV="0">
+            <a:off x="3933825" y="4648200"/>
+            <a:ext cx="123825" cy="228600"/>
+          </a:xfrm>
+          <a:prstGeom prst="rect"/>
+        </p:spPr>
+        <p:txBody>
+          <a:bodyPr wrap="none" lIns="0" tIns="0" rIns="0" bIns="0"/>
+          <a:p>
+            <a:pPr>
+              <a:lnSpc>
+                <a:spcPct val="100000"/>
+              </a:lnSpc>
+            </a:pPr>
+            <a:r>
+              <a:rPr lang="en-US" sz="1500" b="1">
+                <a:solidFill>
+                  <a:srgbClr val="FFFFFF"/>
+                </a:solidFill>
+                <a:latin typeface="Microsoft YaHei"/>
+                <a:ea typeface="Microsoft YaHei"/>
+              </a:rPr>
+              <a:t>4</a:t>
+            </a:r>
+            <a:endParaRPr/>
+          </a:p>
+        </p:txBody>
+      </p:sp>
+      <p:sp>
+        <p:nvSpPr>
+          <p:cNvPr id="79" name="" descr="{&quot;isTemplate&quot;:true,&quot;type&quot;:&quot;text&quot;}"/>
+          <p:cNvSpPr txBox="1"/>
+          <p:nvPr/>
+        </p:nvSpPr>
+        <p:spPr>
+          <a:xfrm rot="0" flipH="0" flipV="0">
+            <a:off x="4400550" y="4467225"/>
+            <a:ext cx="7258050" cy="257175"/>
+          </a:xfrm>
+          <a:prstGeom prst="rect"/>
+        </p:spPr>
+        <p:txBody>
+          <a:bodyPr wrap="none" lIns="0" tIns="0" rIns="0" bIns="0"/>
+          <a:p>
+            <a:pPr>
+              <a:lnSpc>
+                <a:spcPct val="100000"/>
+              </a:lnSpc>
+            </a:pPr>
+            <a:r>
+              <a:rPr lang="zh-CN" sz="1650" b="1">
+                <a:solidFill>
+                  <a:srgbClr val="1A2230"/>
+                </a:solidFill>
+                <a:latin typeface="Microsoft YaHei"/>
+                <a:ea typeface="Microsoft YaHei"/>
+              </a:rPr>
+              <a:t>重排序</a:t>
+            </a:r>
+            <a:endParaRPr/>
+          </a:p>
+        </p:txBody>
+      </p:sp>
+      <p:sp>
+        <p:nvSpPr>
+          <p:cNvPr id="80" name="" descr="{&quot;isTemplate&quot;:true,&quot;type&quot;:&quot;text&quot;}"/>
+          <p:cNvSpPr txBox="1"/>
+          <p:nvPr/>
+        </p:nvSpPr>
+        <p:spPr>
+          <a:xfrm rot="0" flipH="0" flipV="0">
+            <a:off x="4400550" y="4781550"/>
+            <a:ext cx="7258050" cy="276225"/>
+          </a:xfrm>
+          <a:prstGeom prst="rect"/>
+        </p:spPr>
+        <p:txBody>
+          <a:bodyPr wrap="none" lIns="0" tIns="0" rIns="0" bIns="0"/>
+          <a:p>
+            <a:pPr>
+              <a:lnSpc>
+                <a:spcPct val="150000"/>
+              </a:lnSpc>
+            </a:pPr>
+            <a:r>
+              <a:rPr lang="en-US" sz="1200">
+                <a:solidFill>
+                  <a:srgbClr val="4A5568"/>
+                </a:solidFill>
+                <a:latin typeface="Microsoft YaHei"/>
+                <a:ea typeface="Microsoft YaHei"/>
+              </a:rPr>
+              <a:t xml:space="preserve">bge-reranker-v2-m3 </a:t>
+            </a:r>
+            <a:r>
+              <a:rPr lang="zh-CN" sz="1200">
+                <a:solidFill>
+                  <a:srgbClr val="4A5568"/>
+                </a:solidFill>
+                <a:latin typeface="Microsoft YaHei"/>
+                <a:ea typeface="Microsoft YaHei"/>
+              </a:rPr>
+              <a:t>精排，取</a:t>
+            </a:r>
+            <a:r>
+              <a:rPr lang="en-US" sz="1200">
+                <a:solidFill>
+                  <a:srgbClr val="4A5568"/>
+                </a:solidFill>
+                <a:latin typeface="Microsoft YaHei"/>
+                <a:ea typeface="Microsoft YaHei"/>
+              </a:rPr>
+              <a:t xml:space="preserve"> top 3~5</a:t>
+            </a:r>
+            <a:endParaRPr/>
+          </a:p>
+        </p:txBody>
+      </p:sp>
+      <p:sp>
+        <p:nvSpPr>
+          <p:cNvPr id="81" name=""/>
+          <p:cNvSpPr/>
+          <p:nvPr/>
+        </p:nvSpPr>
+        <p:spPr>
+          <a:xfrm rot="0" flipH="0" flipV="0">
+            <a:off x="3619500" y="5429250"/>
+            <a:ext cx="8191500" cy="895350"/>
+          </a:xfrm>
+          <a:prstGeom prst="roundRect">
+            <a:avLst>
+              <a:gd name="adj" fmla="val 10638"/>
+            </a:avLst>
+          </a:prstGeom>
+          <a:solidFill>
+            <a:srgbClr val="F7F9FC"/>
+          </a:solidFill>
+          <a:ln w="12700">
+            <a:solidFill>
+              <a:srgbClr val="E5E7EB"/>
+            </a:solidFill>
+            <a:prstDash val="solid"/>
+          </a:ln>
+        </p:spPr>
+        <p:txBody>
+          <a:bodyPr/>
+          <a:p/>
+        </p:txBody>
+      </p:sp>
+      <p:sp>
+        <p:nvSpPr>
+          <p:cNvPr id="82" name=""/>
+          <p:cNvSpPr/>
+          <p:nvPr/>
+        </p:nvSpPr>
+        <p:spPr>
+          <a:xfrm rot="0" flipH="0" flipV="0">
+            <a:off x="3771900" y="5657850"/>
+            <a:ext cx="438150" cy="438150"/>
+          </a:xfrm>
+          <a:prstGeom prst="roundRect">
+            <a:avLst>
+              <a:gd name="adj" fmla="val 50000"/>
+            </a:avLst>
+          </a:prstGeom>
+          <a:solidFill>
+            <a:srgbClr val="1E4FA8"/>
+          </a:solidFill>
+          <a:ln/>
+        </p:spPr>
+        <p:txBody>
+          <a:bodyPr/>
+          <a:p/>
+        </p:txBody>
+      </p:sp>
+      <p:sp>
+        <p:nvSpPr>
+          <p:cNvPr id="83" name="" descr="{&quot;isTemplate&quot;:true,&quot;type&quot;:&quot;text&quot;}"/>
+          <p:cNvSpPr txBox="1"/>
+          <p:nvPr/>
+        </p:nvSpPr>
+        <p:spPr>
+          <a:xfrm rot="0" flipH="0" flipV="0">
+            <a:off x="3933825" y="5762625"/>
+            <a:ext cx="123825" cy="228600"/>
+          </a:xfrm>
+          <a:prstGeom prst="rect"/>
+        </p:spPr>
+        <p:txBody>
+          <a:bodyPr wrap="none" lIns="0" tIns="0" rIns="0" bIns="0"/>
+          <a:p>
+            <a:pPr>
+              <a:lnSpc>
+                <a:spcPct val="100000"/>
+              </a:lnSpc>
+            </a:pPr>
+            <a:r>
+              <a:rPr lang="en-US" sz="1500" b="1">
+                <a:solidFill>
+                  <a:srgbClr val="FFFFFF"/>
+                </a:solidFill>
+                <a:latin typeface="Microsoft YaHei"/>
+                <a:ea typeface="Microsoft YaHei"/>
+              </a:rPr>
+              <a:t>5</a:t>
+            </a:r>
+            <a:endParaRPr/>
+          </a:p>
+        </p:txBody>
+      </p:sp>
+      <p:sp>
+        <p:nvSpPr>
+          <p:cNvPr id="84" name="" descr="{&quot;isTemplate&quot;:true,&quot;type&quot;:&quot;text&quot;}"/>
+          <p:cNvSpPr txBox="1"/>
+          <p:nvPr/>
+        </p:nvSpPr>
+        <p:spPr>
+          <a:xfrm rot="0" flipH="0" flipV="0">
+            <a:off x="4400550" y="5581650"/>
+            <a:ext cx="7258050" cy="257175"/>
+          </a:xfrm>
+          <a:prstGeom prst="rect"/>
+        </p:spPr>
+        <p:txBody>
+          <a:bodyPr wrap="none" lIns="0" tIns="0" rIns="0" bIns="0"/>
+          <a:p>
+            <a:pPr>
+              <a:lnSpc>
+                <a:spcPct val="100000"/>
+              </a:lnSpc>
+            </a:pPr>
+            <a:r>
+              <a:rPr lang="zh-CN" sz="1650" b="1">
+                <a:solidFill>
+                  <a:srgbClr val="1A2230"/>
+                </a:solidFill>
+                <a:latin typeface="Microsoft YaHei"/>
+                <a:ea typeface="Microsoft YaHei"/>
+              </a:rPr>
+              <a:t>生成</a:t>
+            </a:r>
+            <a:r>
+              <a:rPr lang="en-US" sz="1650" b="1">
+                <a:solidFill>
+                  <a:srgbClr val="1A2230"/>
+                </a:solidFill>
+                <a:latin typeface="Microsoft YaHei"/>
+                <a:ea typeface="Microsoft YaHei"/>
+              </a:rPr>
+              <a:t xml:space="preserve"> + </a:t>
+            </a:r>
+            <a:r>
+              <a:rPr lang="zh-CN" sz="1650" b="1">
+                <a:solidFill>
+                  <a:srgbClr val="1A2230"/>
+                </a:solidFill>
+                <a:latin typeface="Microsoft YaHei"/>
+                <a:ea typeface="Microsoft YaHei"/>
+              </a:rPr>
+              <a:t>溯源</a:t>
+            </a:r>
+            <a:endParaRPr/>
+          </a:p>
+        </p:txBody>
+      </p:sp>
+      <p:sp>
+        <p:nvSpPr>
+          <p:cNvPr id="85" name="" descr="{&quot;isTemplate&quot;:true,&quot;type&quot;:&quot;text&quot;}"/>
+          <p:cNvSpPr txBox="1"/>
+          <p:nvPr/>
+        </p:nvSpPr>
+        <p:spPr>
+          <a:xfrm rot="0" flipH="0" flipV="0">
+            <a:off x="4400550" y="5895975"/>
+            <a:ext cx="7258050" cy="276225"/>
+          </a:xfrm>
+          <a:prstGeom prst="rect"/>
+        </p:spPr>
+        <p:txBody>
+          <a:bodyPr wrap="none" lIns="0" tIns="0" rIns="0" bIns="0"/>
+          <a:p>
+            <a:pPr>
+              <a:lnSpc>
+                <a:spcPct val="150000"/>
+              </a:lnSpc>
+            </a:pPr>
+            <a:r>
+              <a:rPr lang="zh-CN" sz="1200">
+                <a:solidFill>
+                  <a:srgbClr val="4A5568"/>
+                </a:solidFill>
+                <a:latin typeface="Microsoft YaHei"/>
+                <a:ea typeface="Microsoft YaHei"/>
+              </a:rPr>
+              <a:t>拼装</a:t>
+            </a:r>
+            <a:r>
+              <a:rPr lang="en-US" sz="1200">
+                <a:solidFill>
+                  <a:srgbClr val="4A5568"/>
+                </a:solidFill>
+                <a:latin typeface="Microsoft YaHei"/>
+                <a:ea typeface="Microsoft YaHei"/>
+              </a:rPr>
+              <a:t xml:space="preserve"> Prompt </a:t>
+            </a:r>
+            <a:r>
+              <a:rPr lang="zh-CN" sz="1200">
+                <a:solidFill>
+                  <a:srgbClr val="4A5568"/>
+                </a:solidFill>
+                <a:latin typeface="Microsoft YaHei"/>
+                <a:ea typeface="Microsoft YaHei"/>
+              </a:rPr>
+              <a:t>调用大模型，生成带引用的结构化指令</a:t>
+            </a:r>
+            <a:endParaRPr/>
+          </a:p>
+        </p:txBody>
+      </p:sp>
+      <p:sp>
+        <p:nvSpPr>
+          <p:cNvPr id="86" name="" descr="{&quot;isTemplate&quot;:true,&quot;type&quot;:&quot;text&quot;}"/>
+          <p:cNvSpPr txBox="1"/>
+          <p:nvPr/>
+        </p:nvSpPr>
+        <p:spPr>
+          <a:xfrm rot="0" flipH="0" flipV="0">
+            <a:off x="381000" y="6591300"/>
+            <a:ext cx="1600200" cy="161925"/>
+          </a:xfrm>
+          <a:prstGeom prst="rect"/>
+        </p:spPr>
+        <p:txBody>
+          <a:bodyPr wrap="none" lIns="0" tIns="0" rIns="0" bIns="0"/>
+          <a:p>
+            <a:pPr>
+              <a:lnSpc>
+                <a:spcPct val="100000"/>
+              </a:lnSpc>
+            </a:pPr>
+            <a:r>
+              <a:rPr lang="zh-CN" sz="1050">
+                <a:solidFill>
+                  <a:srgbClr val="8B97A8"/>
+                </a:solidFill>
+                <a:latin typeface="Microsoft YaHei"/>
+                <a:ea typeface="Microsoft YaHei"/>
+              </a:rPr>
+              <a:t>中国科学技术大学软件学院</a:t>
+            </a:r>
+            <a:endParaRPr/>
+          </a:p>
+        </p:txBody>
+      </p:sp>
+      <p:sp>
+        <p:nvSpPr>
+          <p:cNvPr id="87" name="" descr="{&quot;isTemplate&quot;:true,&quot;type&quot;:&quot;text&quot;}"/>
+          <p:cNvSpPr txBox="1"/>
+          <p:nvPr/>
+        </p:nvSpPr>
+        <p:spPr>
+          <a:xfrm rot="0" flipH="0" flipV="0">
+            <a:off x="11268075" y="6572250"/>
+            <a:ext cx="542925" cy="190500"/>
+          </a:xfrm>
+          <a:prstGeom prst="rect"/>
+        </p:spPr>
+        <p:txBody>
+          <a:bodyPr wrap="none" lIns="0" tIns="0" rIns="0" bIns="0"/>
+          <a:p>
+            <a:pPr>
+              <a:lnSpc>
+                <a:spcPct val="100000"/>
+              </a:lnSpc>
+            </a:pPr>
+            <a:r>
+              <a:rPr lang="en-US" sz="1200" b="1">
+                <a:solidFill>
+                  <a:srgbClr val="1E4FA8"/>
+                </a:solidFill>
+                <a:latin typeface="Microsoft YaHei"/>
+                <a:ea typeface="Microsoft YaHei"/>
+              </a:rPr>
+              <a:t>11 / 17</a:t>
+            </a:r>
+            <a:endParaRPr/>
+          </a:p>
+        </p:txBody>
+      </p:sp>
+    </p:spTree>
+  </p:cSld>
+</p:sld>
+</file>
+
+<file path=ppt/slides/slide12.xml><?xml version="1.0" encoding="utf-8"?>
+<p:sld xmlns:p="http://schemas.openxmlformats.org/presentationml/2006/main" xmlns:a="http://schemas.openxmlformats.org/drawingml/2006/main">
+  <p:cSld>
+    <p:spTree>
+      <p:nvGrpSpPr>
+        <p:cNvPr id="88" name="" descr="&lt;Slide&gt;&#10;  &lt;Box style={{ width: '1280px', height: '720px', background: '#FFFFFF', flexDirection: 'column' }}&gt;&#10;    {/* 页眉 */}&#10;    &lt;Box style={{ height: 72, background: '#1E4FA8', flexDirection: 'row', alignItems: 'center', justifyContent: 'space-between', paddingLeft: 40, paddingRight: 40 }}&gt;&#10;      &lt;Text style={{ color: '#FFFFFF', fontSize: 16 }}&gt;基于 RAG 的轻量级企业工艺生成系统&lt;/Text&gt;&#10;      &lt;Text style={{ color: 'rgba(255,255,255,0.85)', fontSize: 14 }}&gt;技术方案&lt;/Text&gt;&#10;    &lt;/Box&gt;&#10;&#10;    {/* 主标题 */}&#10;    &lt;Box style={{ paddingLeft: 40, paddingRight: 40, paddingTop: 26, paddingBottom: 14 }}&gt;&#10;      &lt;Text style={{ color: '#1A2230', fontSize: 34, fontWeight: 'bold' }}&gt;两大关键技术特色&lt;/Text&gt;&#10;    &lt;/Box&gt;&#10;&#10;    {/* 非对称双栏：左 55% 特色一，右 40% 特色二 */}&#10;    &lt;Box style={{ flex: 1, flexDirection: 'row', paddingLeft: 40, paddingRight: 40, gap: 32, paddingBottom: 20 }}&gt;&#10;      {/* 左：特色一 */}&#10;      &lt;Box style={{ flex: 1.35, flexDirection: 'column', padding: 30, background: '#0E3F8C', borderRadius: 14, justifyContent: 'space-between' }}&gt;&#10;        &lt;Box style={{ flexDirection: 'row', alignItems: 'center', gap: 12 }}&gt;&#10;          &lt;Box style={{ width: 36, height: 36, background: '#3D7BD9', borderRadius: 8, alignItems: 'center', justifyContent: 'center' }}&gt;&#10;            &lt;Text style={{ color: '#FFFFFF', fontSize: 20, fontWeight: 'bold' }}&gt;1&lt;/Text&gt;&#10;          &lt;/Box&gt;&#10;          &lt;Text style={{ color: '#FFFFFF', fontSize: 26, fontWeight: 'bold' }}&gt;混合召回 + 重排序的两级检索&lt;/Text&gt;&#10;        &lt;/Box&gt;&#10;        &lt;Text style={{ color: '#D6E4F7', fontSize: 19, lineHeight: 1.7, marginTop: 22 }}&gt;&#10;          双路召回保证「不遗漏」：稠密向量负责语义理解，BM25 负责型号、数字等精确匹配；&#10;        &lt;/Text&gt;&#10;        &lt;Text style={{ color: '#D6E4F7', fontSize: 19, lineHeight: 1.7, marginTop: 14 }}&gt;&#10;          Cross-encoder 精排保证「准确」：在有限候选中二次排序，兼顾检索质量与响应速度。&#10;        &lt;/Text&gt;&#10;        &lt;Box style={{ flexDirection: 'row', alignItems: 'center', gap: 10, paddingTop: 22 }}&gt;&#10;          &lt;Box style={{ width: 10, height: 10, background: '#3D7BD9', borderRadius: 5 }} /&gt;&#10;          &lt;Text style={{ color: '#8FB3E8', fontSize: 15 }}&gt;针对数字、牌号对精确匹配要求高的痛点&lt;/Text&gt;&#10;        &lt;/Box&gt;&#10;      &lt;/Box&gt;&#10;&#10;      {/* 右：特色二 */}&#10;      &lt;Box style={{ flex: 1, flexDirection: 'column', padding: 30, background: '#F7F9FC', borderRadius: 14, border: '1px solid #E5E7EB', justifyContent: 'space-between' }}&gt;&#10;        &lt;Box style={{ flexDirection: 'row', alignItems: 'center', gap: 12 }}&gt;&#10;          &lt;Box style={{ width: 36, height: 36, background: '#1E4FA8', borderRadius: 8, alignItems: 'center', justifyContent: 'center' }}&gt;&#10;            &lt;Text style={{ color: '#FFFFFF', fontSize: 20, fontWeight: 'bold' }}&gt;2&lt;/Text&gt;&#10;          &lt;/Box&gt;&#10;          &lt;Text style={{ color: '#1A2230', fontSize: 26, fontWeight: 'bold' }}&gt;表格处理 + 可信生成&lt;/Text&gt;&#10;        &lt;/Box&gt;&#10;        &lt;Box style={{ flexDirection: 'column', gap: 22, marginTop: 22 }}&gt;&#10;          &lt;Box style={{ flexDirection: 'column', gap: 6 }}&gt;&#10;            &lt;Text style={{ color: '#1E4FA8', fontSize: 18, fontWeight: 'bold' }}&gt;表格与参数处理&lt;/Text&gt;&#10;            &lt;Text style={{ color: '#4A5568', fontSize: 17, lineHeight: 1.6 }}&gt;解析保留表格结构，分块保护完整表格，BM25 精确匹配型号数字&lt;/Text&gt;&#10;          &lt;/Box&gt;&#10;          &lt;Box style={{ flexDirection: 'column', gap: 6 }}&gt;&#10;            &lt;Text style={{ color: '#1E4FA8', fontSize: 18, fontWeight: 'bold' }}&gt;强约束可信生成&lt;/Text&gt;&#10;            &lt;Text style={{ color: '#4A5568', fontSize: 17, lineHeight: 1.6 }}&gt;Prompt 约束「只依据资料作答、资料不足即声明」，参数与来源页码绑定，实现可核对、可追溯&lt;/Text&gt;&#10;          &lt;/Box&gt;&#10;        &lt;/Box&gt;&#10;        &lt;Box style={{ flexDirection: 'row', alignItems: 'center', gap: 10, paddingTop: 22 }}&gt;&#10;          &lt;Box style={{ width: 10, height: 10, background: '#1E4FA8', borderRadius: 5 }} /&gt;&#10;          &lt;Text style={{ color: '#1E4FA8', fontSize: 15 }}&gt;实现可核对、可追溯的加工指令&lt;/Text&gt;&#10;        &lt;/Box&gt;&#10;      &lt;/Box&gt;&#10;    &lt;/Box&gt;&#10;&#10;    {/* 页脚 */}&#10;    &lt;Box style={{ height: 40, flexDirection: 'row', alignItems: 'center', justifyContent: 'space-between', paddingLeft: 40, paddingRight: 40 }}&gt;&#10;      &lt;Text style={{ color: '#8B97A8', fontSize: 14 }}&gt;中国科学技术大学软件学院&lt;/Text&gt;&#10;      &lt;Text style={{ color: '#1E4FA8', fontSize: 16, fontWeight: 'bold' }}&gt;12 / 17&lt;/Text&gt;&#10;    &lt;/Box&gt;&#10;  &lt;/Box&gt;&#10;&lt;/Slide&gt;&#10;"/>
+        <p:cNvGrpSpPr/>
+        <p:nvPr/>
+      </p:nvGrpSpPr>
+      <p:grpSpPr>
+        <a:xfrm>
+          <a:off x="0" y="0"/>
+          <a:ext cx="0" cy="0"/>
+          <a:chOff x="0" y="0"/>
+          <a:chExt cx="0" cy="0"/>
+        </a:xfrm>
+      </p:grpSpPr>
+      <p:sp>
+        <p:nvSpPr>
+          <p:cNvPr id="89" name=""/>
+          <p:cNvSpPr/>
+          <p:nvPr/>
+        </p:nvSpPr>
+        <p:spPr>
+          <a:xfrm rot="0" flipH="0" flipV="0">
+            <a:off x="0" y="0"/>
+            <a:ext cx="12192000" cy="6858000"/>
+          </a:xfrm>
+          <a:prstGeom prst="rect">
+            <a:avLst/>
+          </a:prstGeom>
+          <a:solidFill>
+            <a:srgbClr val="FFFFFF"/>
+          </a:solidFill>
+          <a:ln/>
+        </p:spPr>
+        <p:txBody>
+          <a:bodyPr/>
+          <a:p/>
+        </p:txBody>
+      </p:sp>
+      <p:sp>
+        <p:nvSpPr>
+          <p:cNvPr id="90" name=""/>
+          <p:cNvSpPr/>
+          <p:nvPr/>
+        </p:nvSpPr>
+        <p:spPr>
+          <a:xfrm rot="0" flipH="0" flipV="0">
+            <a:off x="0" y="0"/>
+            <a:ext cx="12192000" cy="685800"/>
+          </a:xfrm>
+          <a:prstGeom prst="rect">
+            <a:avLst/>
+          </a:prstGeom>
+          <a:solidFill>
+            <a:srgbClr val="1E4FA8"/>
+          </a:solidFill>
+          <a:ln/>
+        </p:spPr>
+        <p:txBody>
+          <a:bodyPr/>
+          <a:p/>
+        </p:txBody>
+      </p:sp>
+      <p:sp>
+        <p:nvSpPr>
+          <p:cNvPr id="91" name="" descr="{&quot;isTemplate&quot;:true,&quot;type&quot;:&quot;text&quot;}"/>
+          <p:cNvSpPr txBox="1"/>
+          <p:nvPr/>
+        </p:nvSpPr>
+        <p:spPr>
+          <a:xfrm rot="0" flipH="0" flipV="0">
+            <a:off x="381000" y="247650"/>
+            <a:ext cx="2543175" cy="190500"/>
+          </a:xfrm>
+          <a:prstGeom prst="rect"/>
+        </p:spPr>
+        <p:txBody>
+          <a:bodyPr wrap="none" lIns="0" tIns="0" rIns="0" bIns="0"/>
+          <a:p>
+            <a:pPr>
+              <a:lnSpc>
+                <a:spcPct val="100000"/>
+              </a:lnSpc>
+            </a:pPr>
+            <a:r>
+              <a:rPr lang="zh-CN" sz="1200">
+                <a:solidFill>
+                  <a:srgbClr val="FFFFFF"/>
+                </a:solidFill>
+                <a:latin typeface="Microsoft YaHei"/>
+                <a:ea typeface="Microsoft YaHei"/>
+              </a:rPr>
+              <a:t>基于</a:t>
+            </a:r>
+            <a:r>
+              <a:rPr lang="en-US" sz="1200">
+                <a:solidFill>
+                  <a:srgbClr val="FFFFFF"/>
+                </a:solidFill>
+                <a:latin typeface="Microsoft YaHei"/>
+                <a:ea typeface="Microsoft YaHei"/>
+              </a:rPr>
+              <a:t xml:space="preserve"> RAG </a:t>
+            </a:r>
+            <a:r>
+              <a:rPr lang="zh-CN" sz="1200">
+                <a:solidFill>
+                  <a:srgbClr val="FFFFFF"/>
+                </a:solidFill>
+                <a:latin typeface="Microsoft YaHei"/>
+                <a:ea typeface="Microsoft YaHei"/>
+              </a:rPr>
+              <a:t>的轻量级企业工艺生成系统</a:t>
+            </a:r>
+            <a:endParaRPr/>
+          </a:p>
+        </p:txBody>
+      </p:sp>
+      <p:sp>
+        <p:nvSpPr>
+          <p:cNvPr id="92" name="" descr="{&quot;isTemplate&quot;:true,&quot;type&quot;:&quot;text&quot;}"/>
+          <p:cNvSpPr txBox="1"/>
+          <p:nvPr/>
+        </p:nvSpPr>
+        <p:spPr>
+          <a:xfrm rot="0" flipH="0" flipV="0">
+            <a:off x="11277600" y="266700"/>
+            <a:ext cx="533400" cy="161925"/>
+          </a:xfrm>
+          <a:prstGeom prst="rect"/>
+        </p:spPr>
+        <p:txBody>
+          <a:bodyPr wrap="none" lIns="0" tIns="0" rIns="0" bIns="0"/>
+          <a:p>
+            <a:pPr>
+              <a:lnSpc>
+                <a:spcPct val="100000"/>
+              </a:lnSpc>
+            </a:pPr>
+            <a:r>
+              <a:rPr lang="zh-CN" sz="1050">
+                <a:solidFill>
+                  <a:srgbClr val="FFFFFF">
+                    <a:alpha val="85000"/>
+                  </a:srgbClr>
+                </a:solidFill>
+                <a:latin typeface="Microsoft YaHei"/>
+                <a:ea typeface="Microsoft YaHei"/>
+              </a:rPr>
+              <a:t>技术方案</a:t>
+            </a:r>
+            <a:endParaRPr/>
+          </a:p>
+        </p:txBody>
+      </p:sp>
+      <p:sp>
+        <p:nvSpPr>
+          <p:cNvPr id="93" name="" descr="{&quot;isTemplate&quot;:true,&quot;type&quot;:&quot;text&quot;}"/>
           <p:cNvSpPr txBox="1"/>
           <p:nvPr/>
         </p:nvSpPr>
@@ -1401,7 +3949,7 @@
       </p:sp>
       <p:sp>
         <p:nvSpPr>
-          <p:cNvPr id="23" name=""/>
+          <p:cNvPr id="94" name=""/>
           <p:cNvSpPr/>
           <p:nvPr/>
         </p:nvSpPr>
@@ -1422,15 +3970,12 @@
         </p:spPr>
         <p:txBody>
           <a:bodyPr/>
-          <a:p>
-            <a:pPr/>
-            <a:endParaRPr/>
-          </a:p>
-        </p:txBody>
-      </p:sp>
-      <p:sp>
-        <p:nvSpPr>
-          <p:cNvPr id="24" name=""/>
+          <a:p/>
+        </p:txBody>
+      </p:sp>
+      <p:sp>
+        <p:nvSpPr>
+          <p:cNvPr id="95" name=""/>
           <p:cNvSpPr/>
           <p:nvPr/>
         </p:nvSpPr>
@@ -1451,15 +3996,12 @@
         </p:spPr>
         <p:txBody>
           <a:bodyPr/>
-          <a:p>
-            <a:pPr/>
-            <a:endParaRPr/>
-          </a:p>
-        </p:txBody>
-      </p:sp>
-      <p:sp>
-        <p:nvSpPr>
-          <p:cNvPr id="25" name="" descr="{&quot;isTemplate&quot;:true,&quot;type&quot;:&quot;text&quot;}"/>
+          <a:p/>
+        </p:txBody>
+      </p:sp>
+      <p:sp>
+        <p:nvSpPr>
+          <p:cNvPr id="96" name="" descr="{&quot;isTemplate&quot;:true,&quot;type&quot;:&quot;text&quot;}"/>
           <p:cNvSpPr txBox="1"/>
           <p:nvPr/>
         </p:nvSpPr>
@@ -1494,7 +4036,7 @@
       </p:sp>
       <p:sp>
         <p:nvSpPr>
-          <p:cNvPr id="26" name="" descr="{&quot;isTemplate&quot;:true,&quot;type&quot;:&quot;text&quot;}"/>
+          <p:cNvPr id="97" name="" descr="{&quot;isTemplate&quot;:true,&quot;type&quot;:&quot;text&quot;}"/>
           <p:cNvSpPr txBox="1"/>
           <p:nvPr/>
         </p:nvSpPr>
@@ -1549,7 +4091,7 @@
       </p:sp>
       <p:sp>
         <p:nvSpPr>
-          <p:cNvPr id="27" name="" descr="{&quot;isTemplate&quot;:true,&quot;type&quot;:&quot;text&quot;}"/>
+          <p:cNvPr id="98" name="" descr="{&quot;isTemplate&quot;:true,&quot;type&quot;:&quot;text&quot;}"/>
           <p:cNvSpPr txBox="1"/>
           <p:nvPr/>
         </p:nvSpPr>
@@ -1606,7 +4148,7 @@
       </p:sp>
       <p:sp>
         <p:nvSpPr>
-          <p:cNvPr id="28" name="" descr="{&quot;isTemplate&quot;:true,&quot;type&quot;:&quot;text&quot;}"/>
+          <p:cNvPr id="99" name="" descr="{&quot;isTemplate&quot;:true,&quot;type&quot;:&quot;text&quot;}"/>
           <p:cNvSpPr txBox="1"/>
           <p:nvPr/>
         </p:nvSpPr>
@@ -1653,7 +4195,7 @@
       </p:sp>
       <p:sp>
         <p:nvSpPr>
-          <p:cNvPr id="29" name=""/>
+          <p:cNvPr id="100" name=""/>
           <p:cNvSpPr/>
           <p:nvPr/>
         </p:nvSpPr>
@@ -1674,15 +4216,12 @@
         </p:spPr>
         <p:txBody>
           <a:bodyPr/>
-          <a:p>
-            <a:pPr/>
-            <a:endParaRPr/>
-          </a:p>
-        </p:txBody>
-      </p:sp>
-      <p:sp>
-        <p:nvSpPr>
-          <p:cNvPr id="30" name="" descr="{&quot;isTemplate&quot;:true,&quot;type&quot;:&quot;text&quot;}"/>
+          <a:p/>
+        </p:txBody>
+      </p:sp>
+      <p:sp>
+        <p:nvSpPr>
+          <p:cNvPr id="101" name="" descr="{&quot;isTemplate&quot;:true,&quot;type&quot;:&quot;text&quot;}"/>
           <p:cNvSpPr txBox="1"/>
           <p:nvPr/>
         </p:nvSpPr>
@@ -1717,7 +4256,7 @@
       </p:sp>
       <p:sp>
         <p:nvSpPr>
-          <p:cNvPr id="31" name=""/>
+          <p:cNvPr id="102" name=""/>
           <p:cNvSpPr/>
           <p:nvPr/>
         </p:nvSpPr>
@@ -1743,15 +4282,12 @@
         </p:spPr>
         <p:txBody>
           <a:bodyPr/>
-          <a:p>
-            <a:pPr/>
-            <a:endParaRPr/>
-          </a:p>
-        </p:txBody>
-      </p:sp>
-      <p:sp>
-        <p:nvSpPr>
-          <p:cNvPr id="32" name=""/>
+          <a:p/>
+        </p:txBody>
+      </p:sp>
+      <p:sp>
+        <p:nvSpPr>
+          <p:cNvPr id="103" name=""/>
           <p:cNvSpPr/>
           <p:nvPr/>
         </p:nvSpPr>
@@ -1772,15 +4308,12 @@
         </p:spPr>
         <p:txBody>
           <a:bodyPr/>
-          <a:p>
-            <a:pPr/>
-            <a:endParaRPr/>
-          </a:p>
-        </p:txBody>
-      </p:sp>
-      <p:sp>
-        <p:nvSpPr>
-          <p:cNvPr id="33" name="" descr="{&quot;isTemplate&quot;:true,&quot;type&quot;:&quot;text&quot;}"/>
+          <a:p/>
+        </p:txBody>
+      </p:sp>
+      <p:sp>
+        <p:nvSpPr>
+          <p:cNvPr id="104" name="" descr="{&quot;isTemplate&quot;:true,&quot;type&quot;:&quot;text&quot;}"/>
           <p:cNvSpPr txBox="1"/>
           <p:nvPr/>
         </p:nvSpPr>
@@ -1815,7 +4348,7 @@
       </p:sp>
       <p:sp>
         <p:nvSpPr>
-          <p:cNvPr id="34" name="" descr="{&quot;isTemplate&quot;:true,&quot;type&quot;:&quot;text&quot;}"/>
+          <p:cNvPr id="105" name="" descr="{&quot;isTemplate&quot;:true,&quot;type&quot;:&quot;text&quot;}"/>
           <p:cNvSpPr txBox="1"/>
           <p:nvPr/>
         </p:nvSpPr>
@@ -1870,7 +4403,7 @@
       </p:sp>
       <p:sp>
         <p:nvSpPr>
-          <p:cNvPr id="35" name="" descr="{&quot;isTemplate&quot;:true,&quot;type&quot;:&quot;text&quot;}"/>
+          <p:cNvPr id="106" name="" descr="{&quot;isTemplate&quot;:true,&quot;type&quot;:&quot;text&quot;}"/>
           <p:cNvSpPr txBox="1"/>
           <p:nvPr/>
         </p:nvSpPr>
@@ -1905,7 +4438,7 @@
       </p:sp>
       <p:sp>
         <p:nvSpPr>
-          <p:cNvPr id="36" name="" descr="{&quot;isTemplate&quot;:true,&quot;type&quot;:&quot;text&quot;}"/>
+          <p:cNvPr id="107" name="" descr="{&quot;isTemplate&quot;:true,&quot;type&quot;:&quot;text&quot;}"/>
           <p:cNvSpPr txBox="1"/>
           <p:nvPr/>
         </p:nvSpPr>
@@ -1962,7 +4495,7 @@
       </p:sp>
       <p:sp>
         <p:nvSpPr>
-          <p:cNvPr id="37" name="" descr="{&quot;isTemplate&quot;:true,&quot;type&quot;:&quot;text&quot;}"/>
+          <p:cNvPr id="108" name="" descr="{&quot;isTemplate&quot;:true,&quot;type&quot;:&quot;text&quot;}"/>
           <p:cNvSpPr txBox="1"/>
           <p:nvPr/>
         </p:nvSpPr>
@@ -1997,7 +4530,7 @@
       </p:sp>
       <p:sp>
         <p:nvSpPr>
-          <p:cNvPr id="38" name="" descr="{&quot;isTemplate&quot;:true,&quot;type&quot;:&quot;text&quot;}"/>
+          <p:cNvPr id="109" name="" descr="{&quot;isTemplate&quot;:true,&quot;type&quot;:&quot;text&quot;}"/>
           <p:cNvSpPr txBox="1"/>
           <p:nvPr/>
         </p:nvSpPr>
@@ -2044,7 +4577,7 @@
       </p:sp>
       <p:sp>
         <p:nvSpPr>
-          <p:cNvPr id="39" name=""/>
+          <p:cNvPr id="110" name=""/>
           <p:cNvSpPr/>
           <p:nvPr/>
         </p:nvSpPr>
@@ -2065,15 +4598,12 @@
         </p:spPr>
         <p:txBody>
           <a:bodyPr/>
-          <a:p>
-            <a:pPr/>
-            <a:endParaRPr/>
-          </a:p>
-        </p:txBody>
-      </p:sp>
-      <p:sp>
-        <p:nvSpPr>
-          <p:cNvPr id="40" name="" descr="{&quot;isTemplate&quot;:true,&quot;type&quot;:&quot;text&quot;}"/>
+          <a:p/>
+        </p:txBody>
+      </p:sp>
+      <p:sp>
+        <p:nvSpPr>
+          <p:cNvPr id="111" name="" descr="{&quot;isTemplate&quot;:true,&quot;type&quot;:&quot;text&quot;}"/>
           <p:cNvSpPr txBox="1"/>
           <p:nvPr/>
         </p:nvSpPr>
@@ -2108,7 +4638,7 @@
       </p:sp>
       <p:sp>
         <p:nvSpPr>
-          <p:cNvPr id="41" name="" descr="{&quot;isTemplate&quot;:true,&quot;type&quot;:&quot;text&quot;}"/>
+          <p:cNvPr id="112" name="" descr="{&quot;isTemplate&quot;:true,&quot;type&quot;:&quot;text&quot;}"/>
           <p:cNvSpPr txBox="1"/>
           <p:nvPr/>
         </p:nvSpPr>
@@ -2143,7 +4673,7 @@
       </p:sp>
       <p:sp>
         <p:nvSpPr>
-          <p:cNvPr id="42" name="" descr="{&quot;isTemplate&quot;:true,&quot;type&quot;:&quot;text&quot;}"/>
+          <p:cNvPr id="113" name="" descr="{&quot;isTemplate&quot;:true,&quot;type&quot;:&quot;text&quot;}"/>
           <p:cNvSpPr txBox="1"/>
           <p:nvPr/>
         </p:nvSpPr>
@@ -2170,7 +4700,7 @@
                 <a:latin typeface="Microsoft YaHei"/>
                 <a:ea typeface="Microsoft YaHei"/>
               </a:rPr>
-              <a:t>10 / 15</a:t>
+              <a:t>12 / 17</a:t>
             </a:r>
             <a:endParaRPr/>
           </a:p>
@@ -2181,12 +4711,12 @@
 </p:sld>
 </file>
 
-<file path=ppt/slides/slide11.xml><?xml version="1.0" encoding="utf-8"?>
+<file path=ppt/slides/slide13.xml><?xml version="1.0" encoding="utf-8"?>
 <p:sld xmlns:p="http://schemas.openxmlformats.org/presentationml/2006/main" xmlns:a="http://schemas.openxmlformats.org/drawingml/2006/main" xmlns:a16="http://schemas.microsoft.com/office/drawing/2014/main" xmlns:mc="http://schemas.openxmlformats.org/markup-compatibility/2006" mc:Ignorable="a16">
   <p:cSld>
     <p:spTree>
       <p:nvGrpSpPr>
-        <p:cNvPr id="43" name=""/>
+        <p:cNvPr id="114" name="" descr="&lt;Slide&gt;&#10;  &lt;Box style={{ width: '1280px', height: '720px', background: '#FFFFFF', flexDirection: 'column' }}&gt;&#10;    {/* 页眉 */}&#10;    &lt;Box style={{ height: 72, background: '#1E4FA8', flexDirection: 'row', alignItems: 'center', justifyContent: 'space-between', paddingLeft: 40, paddingRight: 40 }}&gt;&#10;      &lt;Text style={{ color: '#FFFFFF', fontSize: 16 }}&gt;基于 RAG 的轻量级企业工艺生成系统&lt;/Text&gt;&#10;      &lt;Text style={{ color: 'rgba(255,255,255,0.85)', fontSize: 14 }}&gt;技术方案&lt;/Text&gt;&#10;    &lt;/Box&gt;&#10;&#10;    {/* 左标题栏 + 右表格 */}&#10;    &lt;Box style={{ flex: 1, flexDirection: 'row', paddingLeft: 40, paddingRight: 40, paddingTop: 28, paddingBottom: 16, gap: 40 }}&gt;&#10;      {/* 左标题栏 */}&#10;      &lt;Box style={{ width: 300, flexDirection: 'column', justifyContent: 'space-between', gap: 16 }}&gt;&#10;        &lt;Box style={{ flexDirection: 'column', gap: 16 }}&gt;&#10;          &lt;Box style={{ width: 48, height: 4, background: '#3D7BD9', borderRadius: 2 }} /&gt;&#10;          &lt;Text style={{ color: '#1A2230', fontSize: 34, fontWeight: 'bold', lineHeight: 1.3 }}&gt;技术选型&lt;/Text&gt;&#10;          &lt;Text style={{ color: '#8B97A8', fontSize: 16, lineHeight: 1.5 }}&gt;全部基于开源、轻量组件，普通设备即可运行&lt;/Text&gt;&#10;        &lt;/Box&gt;&#10;        &lt;Box style={{ padding: 18, background: '#0E3F8C', borderRadius: 8 }}&gt;&#10;          &lt;Text style={{ color: '#FFFFFF', fontSize: 18, fontWeight: 'bold' }}&gt;选型原则&lt;/Text&gt;&#10;          &lt;Text style={{ color: '#D6E4F7', fontSize: 15, lineHeight: 1.6, marginTop: 8 }}&gt;&#10;            轻量、开源、零运维，契合「轻量级」定位，可平滑替换为企业内部知识库。&#10;          &lt;/Text&gt;&#10;        &lt;/Box&gt;&#10;      &lt;/Box&gt;&#10;&#10;      {/* 右：选型表 + 底部说明 */}&#10;      &lt;Box style={{ flex: 1, flexDirection: 'column', justifyContent: 'space-between' }}&gt;&#10;        &lt;Table&#10;          style={{ width: '100%', height: 440 }}&#10;          defaultTextStyle={{ fontSize: 17, textAlign: 'center', color: '#1A2230' }}&#10;          defaultCellStyle={{&#10;            border: {&#10;              left: { width: 1, color: '#D6DCE5' },&#10;              right: { width: 1, color: '#D6DCE5' },&#10;              top: { width: 1, color: '#D6DCE5' },&#10;              bottom: { width: 1, color: '#D6DCE5' },&#10;            },&#10;          }}&#10;          cells={[&#10;            [&#10;              { text: '模块', textStyle: { bold: true, color: '#FFFFFF' }, cellStyle: { background: { color: '#1E4FA8' } } },&#10;              { text: '技术选型', textStyle: { bold: true, color: '#FFFFFF' }, cellStyle: { background: { color: '#1E4FA8' } } },&#10;            ],&#10;            ['编程语言', 'Python 3.10+'],&#10;            ['RAG 框架', 'LangChain'],&#10;            ['向量数据库', 'Chroma'],&#10;            ['稀疏检索', 'rank_bm25（BM25）'],&#10;            ['嵌入模型', 'BGE-M3'],&#10;            ['重排序', 'bge-reranker-v2-m3'],&#10;            ['PDF 解析', 'PyMuPDF + pdfplumber'],&#10;            ['大模型', '开源大模型 API（OpenAI 兼容）'],&#10;            ['界面', 'Gradio'],&#10;            ['版本管理', 'Git + GitHub'],&#10;          ]}&#10;        /&gt;&#10;        &lt;Box style={{ flexDirection: 'row', alignItems: 'center', gap: 12, padding: 14, background: '#F0F5FC', borderRadius: 8 }}&gt;&#10;          &lt;Box style={{ width: 8, height: 8, background: '#1E4FA8', borderRadius: 4 }} /&gt;&#10;          &lt;Text style={{ color: '#4A5568', fontSize: 15, lineHeight: 1.5 }}&gt;嵌入与重排模型支持 API 或本地部署两种方式，可做对比实验&lt;/Text&gt;&#10;        &lt;/Box&gt;&#10;      &lt;/Box&gt;&#10;    &lt;/Box&gt;&#10;&#10;    {/* 页脚 */}&#10;    &lt;Box style={{ height: 40, flexDirection: 'row', alignItems: 'center', justifyContent: 'space-between', paddingLeft: 40, paddingRight: 40 }}&gt;&#10;      &lt;Text style={{ color: '#8B97A8', fontSize: 14 }}&gt;中国科学技术大学软件学院&lt;/Text&gt;&#10;      &lt;Text style={{ color: '#1E4FA8', fontSize: 16, fontWeight: 'bold' }}&gt;13 / 17&lt;/Text&gt;&#10;    &lt;/Box&gt;&#10;  &lt;/Box&gt;&#10;&lt;/Slide&gt;&#10;"/>
         <p:cNvGrpSpPr/>
         <p:nvPr/>
       </p:nvGrpSpPr>
@@ -2200,7 +4730,7 @@
       </p:grpSpPr>
       <p:sp>
         <p:nvSpPr>
-          <p:cNvPr id="44" name=""/>
+          <p:cNvPr id="115" name=""/>
           <p:cNvSpPr/>
           <p:nvPr/>
         </p:nvSpPr>
@@ -2219,15 +4749,12 @@
         </p:spPr>
         <p:txBody>
           <a:bodyPr/>
-          <a:p>
-            <a:pPr/>
-            <a:endParaRPr/>
-          </a:p>
-        </p:txBody>
-      </p:sp>
-      <p:sp>
-        <p:nvSpPr>
-          <p:cNvPr id="45" name=""/>
+          <a:p/>
+        </p:txBody>
+      </p:sp>
+      <p:sp>
+        <p:nvSpPr>
+          <p:cNvPr id="116" name=""/>
           <p:cNvSpPr/>
           <p:nvPr/>
         </p:nvSpPr>
@@ -2246,15 +4773,12 @@
         </p:spPr>
         <p:txBody>
           <a:bodyPr/>
-          <a:p>
-            <a:pPr/>
-            <a:endParaRPr/>
-          </a:p>
-        </p:txBody>
-      </p:sp>
-      <p:sp>
-        <p:nvSpPr>
-          <p:cNvPr id="46" name="" descr="{&quot;isTemplate&quot;:true,&quot;type&quot;:&quot;text&quot;}"/>
+          <a:p/>
+        </p:txBody>
+      </p:sp>
+      <p:sp>
+        <p:nvSpPr>
+          <p:cNvPr id="117" name="" descr="{&quot;isTemplate&quot;:true,&quot;type&quot;:&quot;text&quot;}"/>
           <p:cNvSpPr txBox="1"/>
           <p:nvPr/>
         </p:nvSpPr>
@@ -2309,7 +4833,7 @@
       </p:sp>
       <p:sp>
         <p:nvSpPr>
-          <p:cNvPr id="47" name="" descr="{&quot;isTemplate&quot;:true,&quot;type&quot;:&quot;text&quot;}"/>
+          <p:cNvPr id="118" name="" descr="{&quot;isTemplate&quot;:true,&quot;type&quot;:&quot;text&quot;}"/>
           <p:cNvSpPr txBox="1"/>
           <p:nvPr/>
         </p:nvSpPr>
@@ -2346,7 +4870,7 @@
       </p:sp>
       <p:sp>
         <p:nvSpPr>
-          <p:cNvPr id="48" name=""/>
+          <p:cNvPr id="119" name=""/>
           <p:cNvSpPr/>
           <p:nvPr/>
         </p:nvSpPr>
@@ -2367,15 +4891,12 @@
         </p:spPr>
         <p:txBody>
           <a:bodyPr/>
-          <a:p>
-            <a:pPr/>
-            <a:endParaRPr/>
-          </a:p>
-        </p:txBody>
-      </p:sp>
-      <p:sp>
-        <p:nvSpPr>
-          <p:cNvPr id="49" name="" descr="{&quot;isTemplate&quot;:true,&quot;type&quot;:&quot;text&quot;}"/>
+          <a:p/>
+        </p:txBody>
+      </p:sp>
+      <p:sp>
+        <p:nvSpPr>
+          <p:cNvPr id="120" name="" descr="{&quot;isTemplate&quot;:true,&quot;type&quot;:&quot;text&quot;}"/>
           <p:cNvSpPr txBox="1"/>
           <p:nvPr/>
         </p:nvSpPr>
@@ -2410,7 +4931,7 @@
       </p:sp>
       <p:sp>
         <p:nvSpPr>
-          <p:cNvPr id="50" name="" descr="{&quot;isTemplate&quot;:true,&quot;type&quot;:&quot;text&quot;}"/>
+          <p:cNvPr id="121" name="" descr="{&quot;isTemplate&quot;:true,&quot;type&quot;:&quot;text&quot;}"/>
           <p:cNvSpPr txBox="1"/>
           <p:nvPr/>
         </p:nvSpPr>
@@ -2447,7 +4968,7 @@
       </p:sp>
       <p:sp>
         <p:nvSpPr>
-          <p:cNvPr id="51" name=""/>
+          <p:cNvPr id="122" name=""/>
           <p:cNvSpPr/>
           <p:nvPr/>
         </p:nvSpPr>
@@ -2468,15 +4989,12 @@
         </p:spPr>
         <p:txBody>
           <a:bodyPr/>
-          <a:p>
-            <a:pPr/>
-            <a:endParaRPr/>
-          </a:p>
-        </p:txBody>
-      </p:sp>
-      <p:sp>
-        <p:nvSpPr>
-          <p:cNvPr id="52" name="" descr="{&quot;isTemplate&quot;:true,&quot;type&quot;:&quot;text&quot;}"/>
+          <a:p/>
+        </p:txBody>
+      </p:sp>
+      <p:sp>
+        <p:nvSpPr>
+          <p:cNvPr id="123" name="" descr="{&quot;isTemplate&quot;:true,&quot;type&quot;:&quot;text&quot;}"/>
           <p:cNvSpPr txBox="1"/>
           <p:nvPr/>
         </p:nvSpPr>
@@ -2511,7 +5029,7 @@
       </p:sp>
       <p:sp>
         <p:nvSpPr>
-          <p:cNvPr id="53" name="" descr="{&quot;isTemplate&quot;:true,&quot;type&quot;:&quot;text&quot;}"/>
+          <p:cNvPr id="124" name="" descr="{&quot;isTemplate&quot;:true,&quot;type&quot;:&quot;text&quot;}"/>
           <p:cNvSpPr txBox="1"/>
           <p:nvPr/>
         </p:nvSpPr>
@@ -2548,7 +5066,7 @@
       </p:sp>
       <p:graphicFrame>
         <p:nvGraphicFramePr>
-          <p:cNvPr id="54" name=""/>
+          <p:cNvPr id="125" name=""/>
           <p:cNvGraphicFramePr/>
           <p:nvPr/>
         </p:nvGraphicFramePr>
@@ -3522,7 +6040,7 @@
       </p:graphicFrame>
       <p:sp>
         <p:nvSpPr>
-          <p:cNvPr id="55" name=""/>
+          <p:cNvPr id="126" name=""/>
           <p:cNvSpPr/>
           <p:nvPr/>
         </p:nvSpPr>
@@ -3543,15 +6061,12 @@
         </p:spPr>
         <p:txBody>
           <a:bodyPr/>
-          <a:p>
-            <a:pPr/>
-            <a:endParaRPr/>
-          </a:p>
-        </p:txBody>
-      </p:sp>
-      <p:sp>
-        <p:nvSpPr>
-          <p:cNvPr id="56" name=""/>
+          <a:p/>
+        </p:txBody>
+      </p:sp>
+      <p:sp>
+        <p:nvSpPr>
+          <p:cNvPr id="127" name=""/>
           <p:cNvSpPr/>
           <p:nvPr/>
         </p:nvSpPr>
@@ -3572,15 +6087,12 @@
         </p:spPr>
         <p:txBody>
           <a:bodyPr/>
-          <a:p>
-            <a:pPr/>
-            <a:endParaRPr/>
-          </a:p>
-        </p:txBody>
-      </p:sp>
-      <p:sp>
-        <p:nvSpPr>
-          <p:cNvPr id="57" name="" descr="{&quot;isTemplate&quot;:true,&quot;type&quot;:&quot;text&quot;}"/>
+          <a:p/>
+        </p:txBody>
+      </p:sp>
+      <p:sp>
+        <p:nvSpPr>
+          <p:cNvPr id="128" name="" descr="{&quot;isTemplate&quot;:true,&quot;type&quot;:&quot;text&quot;}"/>
           <p:cNvSpPr txBox="1"/>
           <p:nvPr/>
         </p:nvSpPr>
@@ -3635,7 +6147,7 @@
       </p:sp>
       <p:sp>
         <p:nvSpPr>
-          <p:cNvPr id="58" name="" descr="{&quot;isTemplate&quot;:true,&quot;type&quot;:&quot;text&quot;}"/>
+          <p:cNvPr id="129" name="" descr="{&quot;isTemplate&quot;:true,&quot;type&quot;:&quot;text&quot;}"/>
           <p:cNvSpPr txBox="1"/>
           <p:nvPr/>
         </p:nvSpPr>
@@ -3670,7 +6182,7 @@
       </p:sp>
       <p:sp>
         <p:nvSpPr>
-          <p:cNvPr id="59" name="" descr="{&quot;isTemplate&quot;:true,&quot;type&quot;:&quot;text&quot;}"/>
+          <p:cNvPr id="130" name="" descr="{&quot;isTemplate&quot;:true,&quot;type&quot;:&quot;text&quot;}"/>
           <p:cNvSpPr txBox="1"/>
           <p:nvPr/>
         </p:nvSpPr>
@@ -3697,7 +6209,7 @@
                 <a:latin typeface="Microsoft YaHei"/>
                 <a:ea typeface="Microsoft YaHei"/>
               </a:rPr>
-              <a:t>11 / 15</a:t>
+              <a:t>13 / 17</a:t>
             </a:r>
             <a:endParaRPr/>
           </a:p>
@@ -3708,12 +6220,12 @@
 </p:sld>
 </file>
 
-<file path=ppt/slides/slide12.xml><?xml version="1.0" encoding="utf-8"?>
+<file path=ppt/slides/slide14.xml><?xml version="1.0" encoding="utf-8"?>
 <p:sld xmlns:p="http://schemas.openxmlformats.org/presentationml/2006/main" xmlns:a="http://schemas.openxmlformats.org/drawingml/2006/main">
   <p:cSld>
     <p:spTree>
       <p:nvGrpSpPr>
-        <p:cNvPr id="60" name=""/>
+        <p:cNvPr id="131" name="" descr="&lt;Slide&gt;&#10;  &lt;Box style={{ width: '1280px', height: '720px', background: '#FFFFFF', flexDirection: 'row', alignItems: 'center' }}&gt;&#10;    {/* 左侧大数字 */}&#10;    &lt;Box style={{ width: 360, height: 720, background: '#F0F5FC', alignItems: 'center', justifyContent: 'center' }}&gt;&#10;      &lt;Text style={{ color: '#0E3F8C', fontSize: 200, fontWeight: 'bold', lineHeight: 1 }}&gt;03&lt;/Text&gt;&#10;    &lt;/Box&gt;&#10;&#10;    {/* 右侧标题与要点 */}&#10;    &lt;Box style={{ flex: 1, height: 720, flexDirection: 'column', justifyContent: 'center', paddingLeft: 72, paddingRight: 60, gap: 24 }}&gt;&#10;      &lt;Box style={{ width: 48, height: 4, background: '#3D7BD9', borderRadius: 2 }} /&gt;&#10;      &lt;Text style={{ color: '#1A2230', fontSize: 48, fontWeight: 'bold' }}&gt;开发方法与测试&lt;/Text&gt;&#10;      &lt;Text style={{ color: '#8B97A8', fontSize: 20, letterSpacing: 1 }}&gt;模块化迭代开发 · 四类测试方案&lt;/Text&gt;&#10;&#10;      &lt;Box style={{ flexDirection: 'column', gap: 24, marginTop: 16 }}&gt;&#10;        {[&#10;          { t: '模块化、迭代式开发', d: '按解析建库 → 检索重排 → 生成对话 → 溯源界面 → 测试评估 分阶段推进，先单测后集成' },&#10;          { t: '功能测试', d: '验证 PDF 解析、表格抽取、混合检索、重排序、生成、溯源各模块正确性' },&#10;          { t: '多文档测试 + 人工评估', d: '构建典型工艺问题测试集，由评估人员对相关性、正确性、引用准确性打分' },&#10;          { t: '对比实验', d: '比较仅向量 / 向量+BM25 / 混合+重排 的召回与生成效果，分析各模块贡献' },&#10;        ].map((item, idx) =&gt; (&#10;          &lt;Box key={idx} style={{ flexDirection: 'row', alignItems: 'flex-start', gap: 16 }}&gt;&#10;            &lt;Box style={{ width: 8, height: 8, background: '#1E4FA8', borderRadius: 4, marginTop: 10 }} /&gt;&#10;            &lt;Box style={{ flexDirection: 'column', gap: 4 }}&gt;&#10;              &lt;Text style={{ color: '#1A2230', fontSize: 22, fontWeight: 'bold' }}&gt;{item.t}&lt;/Text&gt;&#10;              &lt;Text style={{ color: '#4A5568', fontSize: 18, lineHeight: 1.5 }}&gt;{item.d}&lt;/Text&gt;&#10;            &lt;/Box&gt;&#10;          &lt;/Box&gt;&#10;        ))}&#10;      &lt;/Box&gt;&#10;&#10;      &lt;Box style={{ flexDirection: 'row', alignItems: 'center', gap: 12, padding: 16, background: '#F0F5FC', borderRadius: 8, marginTop: 8 }}&gt;&#10;        &lt;Box style={{ width: 8, height: 8, background: '#1E4FA8', borderRadius: 4 }} /&gt;&#10;        &lt;Text style={{ color: '#1E4FA8', fontSize: 16, fontWeight: 'bold' }}&gt;评估结果用于反哺优化解析、分块与检索策略&lt;/Text&gt;&#10;      &lt;/Box&gt;&#10;    &lt;/Box&gt;&#10;  &lt;/Box&gt;&#10;&lt;/Slide&gt;&#10;"/>
         <p:cNvGrpSpPr/>
         <p:nvPr/>
       </p:nvGrpSpPr>
@@ -3727,7 +6239,7 @@
       </p:grpSpPr>
       <p:sp>
         <p:nvSpPr>
-          <p:cNvPr id="61" name=""/>
+          <p:cNvPr id="132" name=""/>
           <p:cNvSpPr/>
           <p:nvPr/>
         </p:nvSpPr>
@@ -3746,15 +6258,12 @@
         </p:spPr>
         <p:txBody>
           <a:bodyPr/>
-          <a:p>
-            <a:pPr/>
-            <a:endParaRPr/>
-          </a:p>
-        </p:txBody>
-      </p:sp>
-      <p:sp>
-        <p:nvSpPr>
-          <p:cNvPr id="62" name=""/>
+          <a:p/>
+        </p:txBody>
+      </p:sp>
+      <p:sp>
+        <p:nvSpPr>
+          <p:cNvPr id="133" name=""/>
           <p:cNvSpPr/>
           <p:nvPr/>
         </p:nvSpPr>
@@ -3773,15 +6282,12 @@
         </p:spPr>
         <p:txBody>
           <a:bodyPr/>
-          <a:p>
-            <a:pPr/>
-            <a:endParaRPr/>
-          </a:p>
-        </p:txBody>
-      </p:sp>
-      <p:sp>
-        <p:nvSpPr>
-          <p:cNvPr id="63" name="" descr="{&quot;isTemplate&quot;:true,&quot;type&quot;:&quot;text&quot;}"/>
+          <a:p/>
+        </p:txBody>
+      </p:sp>
+      <p:sp>
+        <p:nvSpPr>
+          <p:cNvPr id="134" name="" descr="{&quot;isTemplate&quot;:true,&quot;type&quot;:&quot;text&quot;}"/>
           <p:cNvSpPr txBox="1"/>
           <p:nvPr/>
         </p:nvSpPr>
@@ -3816,7 +6322,7 @@
       </p:sp>
       <p:sp>
         <p:nvSpPr>
-          <p:cNvPr id="64" name=""/>
+          <p:cNvPr id="135" name=""/>
           <p:cNvSpPr/>
           <p:nvPr/>
         </p:nvSpPr>
@@ -3837,15 +6343,12 @@
         </p:spPr>
         <p:txBody>
           <a:bodyPr/>
-          <a:p>
-            <a:pPr/>
-            <a:endParaRPr/>
-          </a:p>
-        </p:txBody>
-      </p:sp>
-      <p:sp>
-        <p:nvSpPr>
-          <p:cNvPr id="65" name="" descr="{&quot;isTemplate&quot;:true,&quot;type&quot;:&quot;text&quot;}"/>
+          <a:p/>
+        </p:txBody>
+      </p:sp>
+      <p:sp>
+        <p:nvSpPr>
+          <p:cNvPr id="136" name="" descr="{&quot;isTemplate&quot;:true,&quot;type&quot;:&quot;text&quot;}"/>
           <p:cNvSpPr txBox="1"/>
           <p:nvPr/>
         </p:nvSpPr>
@@ -3880,7 +6383,7 @@
       </p:sp>
       <p:sp>
         <p:nvSpPr>
-          <p:cNvPr id="66" name="" descr="{&quot;isTemplate&quot;:true,&quot;type&quot;:&quot;text&quot;}"/>
+          <p:cNvPr id="137" name="" descr="{&quot;isTemplate&quot;:true,&quot;type&quot;:&quot;text&quot;}"/>
           <p:cNvSpPr txBox="1"/>
           <p:nvPr/>
         </p:nvSpPr>
@@ -3935,7 +6438,7 @@
       </p:sp>
       <p:sp>
         <p:nvSpPr>
-          <p:cNvPr id="67" name=""/>
+          <p:cNvPr id="138" name=""/>
           <p:cNvSpPr/>
           <p:nvPr/>
         </p:nvSpPr>
@@ -3956,15 +6459,12 @@
         </p:spPr>
         <p:txBody>
           <a:bodyPr/>
-          <a:p>
-            <a:pPr/>
-            <a:endParaRPr/>
-          </a:p>
-        </p:txBody>
-      </p:sp>
-      <p:sp>
-        <p:nvSpPr>
-          <p:cNvPr id="68" name="" descr="{&quot;isTemplate&quot;:true,&quot;type&quot;:&quot;text&quot;}"/>
+          <a:p/>
+        </p:txBody>
+      </p:sp>
+      <p:sp>
+        <p:nvSpPr>
+          <p:cNvPr id="139" name="" descr="{&quot;isTemplate&quot;:true,&quot;type&quot;:&quot;text&quot;}"/>
           <p:cNvSpPr txBox="1"/>
           <p:nvPr/>
         </p:nvSpPr>
@@ -3999,7 +6499,7 @@
       </p:sp>
       <p:sp>
         <p:nvSpPr>
-          <p:cNvPr id="69" name="" descr="{&quot;isTemplate&quot;:true,&quot;type&quot;:&quot;text&quot;}"/>
+          <p:cNvPr id="140" name="" descr="{&quot;isTemplate&quot;:true,&quot;type&quot;:&quot;text&quot;}"/>
           <p:cNvSpPr txBox="1"/>
           <p:nvPr/>
         </p:nvSpPr>
@@ -4134,7 +6634,7 @@
       </p:sp>
       <p:sp>
         <p:nvSpPr>
-          <p:cNvPr id="70" name=""/>
+          <p:cNvPr id="141" name=""/>
           <p:cNvSpPr/>
           <p:nvPr/>
         </p:nvSpPr>
@@ -4155,15 +6655,12 @@
         </p:spPr>
         <p:txBody>
           <a:bodyPr/>
-          <a:p>
-            <a:pPr/>
-            <a:endParaRPr/>
-          </a:p>
-        </p:txBody>
-      </p:sp>
-      <p:sp>
-        <p:nvSpPr>
-          <p:cNvPr id="71" name="" descr="{&quot;isTemplate&quot;:true,&quot;type&quot;:&quot;text&quot;}"/>
+          <a:p/>
+        </p:txBody>
+      </p:sp>
+      <p:sp>
+        <p:nvSpPr>
+          <p:cNvPr id="142" name="" descr="{&quot;isTemplate&quot;:true,&quot;type&quot;:&quot;text&quot;}"/>
           <p:cNvSpPr txBox="1"/>
           <p:nvPr/>
         </p:nvSpPr>
@@ -4198,7 +6695,7 @@
       </p:sp>
       <p:sp>
         <p:nvSpPr>
-          <p:cNvPr id="72" name="" descr="{&quot;isTemplate&quot;:true,&quot;type&quot;:&quot;text&quot;}"/>
+          <p:cNvPr id="143" name="" descr="{&quot;isTemplate&quot;:true,&quot;type&quot;:&quot;text&quot;}"/>
           <p:cNvSpPr txBox="1"/>
           <p:nvPr/>
         </p:nvSpPr>
@@ -4253,7 +6750,7 @@
       </p:sp>
       <p:sp>
         <p:nvSpPr>
-          <p:cNvPr id="73" name=""/>
+          <p:cNvPr id="144" name=""/>
           <p:cNvSpPr/>
           <p:nvPr/>
         </p:nvSpPr>
@@ -4274,15 +6771,12 @@
         </p:spPr>
         <p:txBody>
           <a:bodyPr/>
-          <a:p>
-            <a:pPr/>
-            <a:endParaRPr/>
-          </a:p>
-        </p:txBody>
-      </p:sp>
-      <p:sp>
-        <p:nvSpPr>
-          <p:cNvPr id="74" name="" descr="{&quot;isTemplate&quot;:true,&quot;type&quot;:&quot;text&quot;}"/>
+          <a:p/>
+        </p:txBody>
+      </p:sp>
+      <p:sp>
+        <p:nvSpPr>
+          <p:cNvPr id="145" name="" descr="{&quot;isTemplate&quot;:true,&quot;type&quot;:&quot;text&quot;}"/>
           <p:cNvSpPr txBox="1"/>
           <p:nvPr/>
         </p:nvSpPr>
@@ -4337,7 +6831,7 @@
       </p:sp>
       <p:sp>
         <p:nvSpPr>
-          <p:cNvPr id="75" name="" descr="{&quot;isTemplate&quot;:true,&quot;type&quot;:&quot;text&quot;}"/>
+          <p:cNvPr id="146" name="" descr="{&quot;isTemplate&quot;:true,&quot;type&quot;:&quot;text&quot;}"/>
           <p:cNvSpPr txBox="1"/>
           <p:nvPr/>
         </p:nvSpPr>
@@ -4372,7 +6866,7 @@
       </p:sp>
       <p:sp>
         <p:nvSpPr>
-          <p:cNvPr id="76" name=""/>
+          <p:cNvPr id="147" name=""/>
           <p:cNvSpPr/>
           <p:nvPr/>
         </p:nvSpPr>
@@ -4393,15 +6887,12 @@
         </p:spPr>
         <p:txBody>
           <a:bodyPr/>
-          <a:p>
-            <a:pPr/>
-            <a:endParaRPr/>
-          </a:p>
-        </p:txBody>
-      </p:sp>
-      <p:sp>
-        <p:nvSpPr>
-          <p:cNvPr id="77" name="" descr="{&quot;isTemplate&quot;:true,&quot;type&quot;:&quot;text&quot;}"/>
+          <a:p/>
+        </p:txBody>
+      </p:sp>
+      <p:sp>
+        <p:nvSpPr>
+          <p:cNvPr id="148" name="" descr="{&quot;isTemplate&quot;:true,&quot;type&quot;:&quot;text&quot;}"/>
           <p:cNvSpPr txBox="1"/>
           <p:nvPr/>
         </p:nvSpPr>
@@ -4436,7 +6927,7 @@
       </p:sp>
       <p:sp>
         <p:nvSpPr>
-          <p:cNvPr id="78" name="" descr="{&quot;isTemplate&quot;:true,&quot;type&quot;:&quot;text&quot;}"/>
+          <p:cNvPr id="149" name="" descr="{&quot;isTemplate&quot;:true,&quot;type&quot;:&quot;text&quot;}"/>
           <p:cNvSpPr txBox="1"/>
           <p:nvPr/>
         </p:nvSpPr>
@@ -4551,7 +7042,7 @@
       </p:sp>
       <p:sp>
         <p:nvSpPr>
-          <p:cNvPr id="79" name=""/>
+          <p:cNvPr id="150" name=""/>
           <p:cNvSpPr/>
           <p:nvPr/>
         </p:nvSpPr>
@@ -4572,15 +7063,12 @@
         </p:spPr>
         <p:txBody>
           <a:bodyPr/>
-          <a:p>
-            <a:pPr/>
-            <a:endParaRPr/>
-          </a:p>
-        </p:txBody>
-      </p:sp>
-      <p:sp>
-        <p:nvSpPr>
-          <p:cNvPr id="80" name=""/>
+          <a:p/>
+        </p:txBody>
+      </p:sp>
+      <p:sp>
+        <p:nvSpPr>
+          <p:cNvPr id="151" name=""/>
           <p:cNvSpPr/>
           <p:nvPr/>
         </p:nvSpPr>
@@ -4601,15 +7089,12 @@
         </p:spPr>
         <p:txBody>
           <a:bodyPr/>
-          <a:p>
-            <a:pPr/>
-            <a:endParaRPr/>
-          </a:p>
-        </p:txBody>
-      </p:sp>
-      <p:sp>
-        <p:nvSpPr>
-          <p:cNvPr id="81" name="" descr="{&quot;isTemplate&quot;:true,&quot;type&quot;:&quot;text&quot;}"/>
+          <a:p/>
+        </p:txBody>
+      </p:sp>
+      <p:sp>
+        <p:nvSpPr>
+          <p:cNvPr id="152" name="" descr="{&quot;isTemplate&quot;:true,&quot;type&quot;:&quot;text&quot;}"/>
           <p:cNvSpPr txBox="1"/>
           <p:nvPr/>
         </p:nvSpPr>
@@ -4647,12 +7132,12 @@
 </p:sld>
 </file>
 
-<file path=ppt/slides/slide13.xml><?xml version="1.0" encoding="utf-8"?>
+<file path=ppt/slides/slide15.xml><?xml version="1.0" encoding="utf-8"?>
 <p:sld xmlns:p="http://schemas.openxmlformats.org/presentationml/2006/main" xmlns:a="http://schemas.openxmlformats.org/drawingml/2006/main" xmlns:asvg="http://schemas.microsoft.com/office/drawing/2016/SVG/main" xmlns:r="http://schemas.openxmlformats.org/officeDocument/2006/relationships" xmlns:mc="http://schemas.openxmlformats.org/markup-compatibility/2006" mc:Ignorable="asvg">
   <p:cSld>
     <p:spTree>
       <p:nvGrpSpPr>
-        <p:cNvPr id="82" name=""/>
+        <p:cNvPr id="153" name="" descr="&lt;Slide&gt;&#10;  &lt;Box style={{ width: '1280px', height: '720px', background: '#FFFFFF', flexDirection: 'column' }}&gt;&#10;    {/* 页眉 */}&#10;    &lt;Box style={{ height: 72, background: '#1E4FA8', flexDirection: 'row', alignItems: 'center', justifyContent: 'space-between', paddingLeft: 40, paddingRight: 40 }}&gt;&#10;      &lt;Text style={{ color: '#FFFFFF', fontSize: 16 }}&gt;基于 RAG 的轻量级企业工艺生成系统&lt;/Text&gt;&#10;      &lt;Text style={{ color: 'rgba(255,255,255,0.85)', fontSize: 14 }}&gt;方法进度&lt;/Text&gt;&#10;    &lt;/Box&gt;&#10;&#10;    {/* 主标题 */}&#10;    &lt;Box style={{ paddingLeft: 40, paddingRight: 40, paddingTop: 22, paddingBottom: 8 }}&gt;&#10;      &lt;Text style={{ color: '#1A2230', fontSize: 34, fontWeight: 'bold' }}&gt;进度安排（2026.10 — 2027.06）&lt;/Text&gt;&#10;    &lt;/Box&gt;&#10;&#10;    {/* 上：时间轴大图 */}&#10;    &lt;Box style={{ paddingLeft: 40, paddingRight: 40, paddingTop: 8 }}&gt;&#10;      &lt;svg width={1200} height={250} viewBox='0 0 1200 250'&gt;&#10;        {/* 时间轴线 */}&#10;        &lt;line x1='20' y1='85' x2='1180' y2='85' stroke='#3D7BD9' strokeWidth='3' /&gt;&#10;        {/* 7 个阶段节点 */}&#10;        &lt;g font-size='14' fill='#1A2230' text-anchor='middle'&gt;&#10;          {[&#10;            { x: 80, t: '文献调研\n需求分析', d: '2026.10-11', done: true },&#10;            { x: 265, t: '解析建库', d: '2026.11-12', done: false },&#10;            { x: 450, t: '检索重排', d: '2026.12-01', done: false },&#10;            { x: 635, t: '生成对话', d: '2027.02-03', done: false },&#10;            { x: 820, t: '溯源界面', d: '2027.03-04', done: false },&#10;            { x: 1005, t: '测试优化', d: '2027.04-05', done: false },&#10;            { x: 1135, t: '结题答辩', d: '2027.05-06', done: false },&#10;          ].map((s) =&gt; (&#10;            &lt;g key={s.x}&gt;&#10;              &lt;circle cx={s.x} cy='85' r='13' fill={s.done ? '#1E4FA8' : '#FFFFFF'} stroke='#1E4FA8' strokeWidth='3' /&gt;&#10;              {s.done &amp;&amp; &lt;circle cx={s.x} cy='85' r='5' fill='#FFFFFF' /&gt;}&#10;              &lt;text x={s.x} y='57' font-size='14' font-weight='bold' fill='#0E3F8C'&gt;{s.d.split(' ')[0]}&lt;/text&gt;&#10;              &lt;text x={s.x} y='133' font-size='15' font-weight='bold'&gt;{s.t.split('\n')[0]}&lt;/text&gt;&#10;              &lt;text x={s.x} y='155' font-size='14' fill='#8B97A8'&gt;{s.t.split('\n')[1]}&lt;/text&gt;&#10;            &lt;/g&gt;&#10;          ))}&#10;        &lt;/g&gt;&#10;        {/* 当前阶段标记 + 成果说明 */}&#10;        &lt;rect x='30' y='186' width='130' height='30' rx='15' fill='#E8EFF8' /&gt;&#10;        &lt;text x='95' y='206' font-size='13' fill='#1E4FA8' text-anchor='middle' font-weight='bold'&gt;当前：第 1 阶段&lt;/text&gt;&#10;        &lt;text x='180' y='206' font-size='15' fill='#4A5568'&gt;每阶段成果：开题报告 → 知识库 → 检索评测 → 问答原型 → 可演示系统 → 评估报告 → 结题文档&lt;/text&gt;&#10;      &lt;/svg&gt;&#10;    &lt;/Box&gt;&#10;&#10;    {/* 下方结论条 + 三列成果预览 */}&#10;    &lt;Box style={{ paddingLeft: 40, paddingRight: 40, paddingTop: 16, flex: 1, flexDirection: 'column', gap: 14 }}&gt;&#10;      &lt;Box style={{ flexDirection: 'row', alignItems: 'center', gap: 16, padding: 18, background: '#F0F5FC', borderRadius: 10 }}&gt;&#10;        &lt;Box style={{ width: 44, height: 44, background: '#1E4FA8', borderRadius: 8, alignItems: 'center', justifyContent: 'center' }}&gt;&#10;          &lt;Text style={{ color: '#FFFFFF', fontSize: 18, fontWeight: 'bold' }}&gt;7&lt;/Text&gt;&#10;        &lt;/Box&gt;&#10;        &lt;Box style={{ flex: 1, flexDirection: 'column', gap: 4 }}&gt;&#10;          &lt;Text style={{ color: '#1A2230', fontSize: 20, fontWeight: 'bold' }}&gt;七个阶段 · 阶段性成果可验收&lt;/Text&gt;&#10;          &lt;Text style={{ color: '#4A5568', fontSize: 16, lineHeight: 1.5 }}&gt;当前已完成第 1 阶段（文献调研、需求分析、开题报告、GitHub 仓库），即将进入第 2 阶段解析与离线建库&lt;/Text&gt;&#10;        &lt;/Box&gt;&#10;      &lt;/Box&gt;&#10;      &lt;Box style={{ flexDirection: 'row', gap: 16, flex: 1 }}&gt;&#10;        {[&#10;          { t: '阶段 1-2', s: '开题 · 建库', d: '文献调研与需求分析、开题报告、PDF 解析与知识库构建' },&#10;          { t: '阶段 3-4', s: '检索 · 原型', d: '混合检索与重排序、生成与多轮对话、可运行问答原型' },&#10;          { t: '阶段 5-7', s: '系统 · 结题', d: '溯源与界面、多文档测试评估、结题报告与答辩' },&#10;        ].map((item) =&gt; (&#10;          &lt;Box key={item.t} style={{ flex: 1, flexDirection: 'column', gap: 8, padding: 20, background: '#F7F9FC', borderRadius: 10, border: '1px solid #E5E7EB' }}&gt;&#10;            &lt;Box style={{ flexDirection: 'row', alignItems: 'center', gap: 8 }}&gt;&#10;              &lt;Text style={{ color: '#1E4FA8', fontSize: 18, fontWeight: 'bold' }}&gt;{item.t}&lt;/Text&gt;&#10;              &lt;Box style={{ paddingLeft: 8, paddingRight: 8, paddingTop: 2, paddingBottom: 2, background: '#E8EFF8', borderRadius: 4 }}&gt;&#10;                &lt;Text style={{ color: '#1E4FA8', fontSize: 13 }}&gt;{item.s}&lt;/Text&gt;&#10;              &lt;/Box&gt;&#10;            &lt;/Box&gt;&#10;            &lt;Text style={{ color: '#4A5568', fontSize: 15, lineHeight: 1.6 }}&gt;{item.d}&lt;/Text&gt;&#10;          &lt;/Box&gt;&#10;        ))}&#10;      &lt;/Box&gt;&#10;    &lt;/Box&gt;&#10;&#10;    {/* 页脚 */}&#10;    &lt;Box style={{ height: 40, flexDirection: 'row', alignItems: 'center', justifyContent: 'space-between', paddingLeft: 40, paddingRight: 40 }}&gt;&#10;      &lt;Text style={{ color: '#8B97A8', fontSize: 14 }}&gt;中国科学技术大学软件学院&lt;/Text&gt;&#10;      &lt;Text style={{ color: '#1E4FA8', fontSize: 16, fontWeight: 'bold' }}&gt;15 / 17&lt;/Text&gt;&#10;    &lt;/Box&gt;&#10;  &lt;/Box&gt;&#10;&lt;/Slide&gt;&#10;"/>
         <p:cNvGrpSpPr/>
         <p:nvPr/>
       </p:nvGrpSpPr>
@@ -4666,7 +7151,7 @@
       </p:grpSpPr>
       <p:sp>
         <p:nvSpPr>
-          <p:cNvPr id="83" name=""/>
+          <p:cNvPr id="154" name=""/>
           <p:cNvSpPr/>
           <p:nvPr/>
         </p:nvSpPr>
@@ -4685,15 +7170,12 @@
         </p:spPr>
         <p:txBody>
           <a:bodyPr/>
-          <a:p>
-            <a:pPr/>
-            <a:endParaRPr/>
-          </a:p>
-        </p:txBody>
-      </p:sp>
-      <p:sp>
-        <p:nvSpPr>
-          <p:cNvPr id="84" name=""/>
+          <a:p/>
+        </p:txBody>
+      </p:sp>
+      <p:sp>
+        <p:nvSpPr>
+          <p:cNvPr id="155" name=""/>
           <p:cNvSpPr/>
           <p:nvPr/>
         </p:nvSpPr>
@@ -4712,15 +7194,12 @@
         </p:spPr>
         <p:txBody>
           <a:bodyPr/>
-          <a:p>
-            <a:pPr/>
-            <a:endParaRPr/>
-          </a:p>
-        </p:txBody>
-      </p:sp>
-      <p:sp>
-        <p:nvSpPr>
-          <p:cNvPr id="85" name="" descr="{&quot;isTemplate&quot;:true,&quot;type&quot;:&quot;text&quot;}"/>
+          <a:p/>
+        </p:txBody>
+      </p:sp>
+      <p:sp>
+        <p:nvSpPr>
+          <p:cNvPr id="156" name="" descr="{&quot;isTemplate&quot;:true,&quot;type&quot;:&quot;text&quot;}"/>
           <p:cNvSpPr txBox="1"/>
           <p:nvPr/>
         </p:nvSpPr>
@@ -4775,7 +7254,7 @@
       </p:sp>
       <p:sp>
         <p:nvSpPr>
-          <p:cNvPr id="86" name="" descr="{&quot;isTemplate&quot;:true,&quot;type&quot;:&quot;text&quot;}"/>
+          <p:cNvPr id="157" name="" descr="{&quot;isTemplate&quot;:true,&quot;type&quot;:&quot;text&quot;}"/>
           <p:cNvSpPr txBox="1"/>
           <p:nvPr/>
         </p:nvSpPr>
@@ -4812,7 +7291,7 @@
       </p:sp>
       <p:sp>
         <p:nvSpPr>
-          <p:cNvPr id="87" name="" descr="{&quot;isTemplate&quot;:true,&quot;type&quot;:&quot;text&quot;}"/>
+          <p:cNvPr id="158" name="" descr="{&quot;isTemplate&quot;:true,&quot;type&quot;:&quot;text&quot;}"/>
           <p:cNvSpPr txBox="1"/>
           <p:nvPr/>
         </p:nvSpPr>
@@ -4867,7 +7346,7 @@
       </p:sp>
       <p:pic>
         <p:nvPicPr>
-          <p:cNvPr id="88" name=""/>
+          <p:cNvPr id="159" name=""/>
           <p:cNvPicPr>
             <a:picLocks noChangeAspect="1"/>
           </p:cNvPicPr>
@@ -4898,7 +7377,7 @@
       </p:pic>
       <p:sp>
         <p:nvSpPr>
-          <p:cNvPr id="89" name=""/>
+          <p:cNvPr id="160" name=""/>
           <p:cNvSpPr/>
           <p:nvPr/>
         </p:nvSpPr>
@@ -4919,15 +7398,12 @@
         </p:spPr>
         <p:txBody>
           <a:bodyPr/>
-          <a:p>
-            <a:pPr/>
-            <a:endParaRPr/>
-          </a:p>
-        </p:txBody>
-      </p:sp>
-      <p:sp>
-        <p:nvSpPr>
-          <p:cNvPr id="90" name=""/>
+          <a:p/>
+        </p:txBody>
+      </p:sp>
+      <p:sp>
+        <p:nvSpPr>
+          <p:cNvPr id="161" name=""/>
           <p:cNvSpPr/>
           <p:nvPr/>
         </p:nvSpPr>
@@ -4948,15 +7424,12 @@
         </p:spPr>
         <p:txBody>
           <a:bodyPr/>
-          <a:p>
-            <a:pPr/>
-            <a:endParaRPr/>
-          </a:p>
-        </p:txBody>
-      </p:sp>
-      <p:sp>
-        <p:nvSpPr>
-          <p:cNvPr id="91" name="" descr="{&quot;isTemplate&quot;:true,&quot;type&quot;:&quot;text&quot;}"/>
+          <a:p/>
+        </p:txBody>
+      </p:sp>
+      <p:sp>
+        <p:nvSpPr>
+          <p:cNvPr id="162" name="" descr="{&quot;isTemplate&quot;:true,&quot;type&quot;:&quot;text&quot;}"/>
           <p:cNvSpPr txBox="1"/>
           <p:nvPr/>
         </p:nvSpPr>
@@ -4991,7 +7464,7 @@
       </p:sp>
       <p:sp>
         <p:nvSpPr>
-          <p:cNvPr id="92" name="" descr="{&quot;isTemplate&quot;:true,&quot;type&quot;:&quot;text&quot;}"/>
+          <p:cNvPr id="163" name="" descr="{&quot;isTemplate&quot;:true,&quot;type&quot;:&quot;text&quot;}"/>
           <p:cNvSpPr txBox="1"/>
           <p:nvPr/>
         </p:nvSpPr>
@@ -5046,7 +7519,7 @@
       </p:sp>
       <p:sp>
         <p:nvSpPr>
-          <p:cNvPr id="93" name="" descr="{&quot;isTemplate&quot;:true,&quot;type&quot;:&quot;text&quot;}"/>
+          <p:cNvPr id="164" name="" descr="{&quot;isTemplate&quot;:true,&quot;type&quot;:&quot;text&quot;}"/>
           <p:cNvSpPr txBox="1"/>
           <p:nvPr/>
         </p:nvSpPr>
@@ -5141,7 +7614,7 @@
       </p:sp>
       <p:sp>
         <p:nvSpPr>
-          <p:cNvPr id="94" name=""/>
+          <p:cNvPr id="165" name=""/>
           <p:cNvSpPr/>
           <p:nvPr/>
         </p:nvSpPr>
@@ -5167,15 +7640,12 @@
         </p:spPr>
         <p:txBody>
           <a:bodyPr/>
-          <a:p>
-            <a:pPr/>
-            <a:endParaRPr/>
-          </a:p>
-        </p:txBody>
-      </p:sp>
-      <p:sp>
-        <p:nvSpPr>
-          <p:cNvPr id="95" name="" descr="{&quot;isTemplate&quot;:true,&quot;type&quot;:&quot;text&quot;}"/>
+          <a:p/>
+        </p:txBody>
+      </p:sp>
+      <p:sp>
+        <p:nvSpPr>
+          <p:cNvPr id="166" name="" descr="{&quot;isTemplate&quot;:true,&quot;type&quot;:&quot;text&quot;}"/>
           <p:cNvSpPr txBox="1"/>
           <p:nvPr/>
         </p:nvSpPr>
@@ -5220,7 +7690,7 @@
       </p:sp>
       <p:sp>
         <p:nvSpPr>
-          <p:cNvPr id="96" name=""/>
+          <p:cNvPr id="167" name=""/>
           <p:cNvSpPr/>
           <p:nvPr/>
         </p:nvSpPr>
@@ -5241,15 +7711,12 @@
         </p:spPr>
         <p:txBody>
           <a:bodyPr/>
-          <a:p>
-            <a:pPr/>
-            <a:endParaRPr/>
-          </a:p>
-        </p:txBody>
-      </p:sp>
-      <p:sp>
-        <p:nvSpPr>
-          <p:cNvPr id="97" name="" descr="{&quot;isTemplate&quot;:true,&quot;type&quot;:&quot;text&quot;}"/>
+          <a:p/>
+        </p:txBody>
+      </p:sp>
+      <p:sp>
+        <p:nvSpPr>
+          <p:cNvPr id="168" name="" descr="{&quot;isTemplate&quot;:true,&quot;type&quot;:&quot;text&quot;}"/>
           <p:cNvSpPr txBox="1"/>
           <p:nvPr/>
         </p:nvSpPr>
@@ -5304,7 +7771,7 @@
       </p:sp>
       <p:sp>
         <p:nvSpPr>
-          <p:cNvPr id="98" name="" descr="{&quot;isTemplate&quot;:true,&quot;type&quot;:&quot;text&quot;}"/>
+          <p:cNvPr id="169" name="" descr="{&quot;isTemplate&quot;:true,&quot;type&quot;:&quot;text&quot;}"/>
           <p:cNvSpPr txBox="1"/>
           <p:nvPr/>
         </p:nvSpPr>
@@ -5361,7 +7828,7 @@
       </p:sp>
       <p:sp>
         <p:nvSpPr>
-          <p:cNvPr id="99" name=""/>
+          <p:cNvPr id="170" name=""/>
           <p:cNvSpPr/>
           <p:nvPr/>
         </p:nvSpPr>
@@ -5387,15 +7854,12 @@
         </p:spPr>
         <p:txBody>
           <a:bodyPr/>
-          <a:p>
-            <a:pPr/>
-            <a:endParaRPr/>
-          </a:p>
-        </p:txBody>
-      </p:sp>
-      <p:sp>
-        <p:nvSpPr>
-          <p:cNvPr id="100" name="" descr="{&quot;isTemplate&quot;:true,&quot;type&quot;:&quot;text&quot;}"/>
+          <a:p/>
+        </p:txBody>
+      </p:sp>
+      <p:sp>
+        <p:nvSpPr>
+          <p:cNvPr id="171" name="" descr="{&quot;isTemplate&quot;:true,&quot;type&quot;:&quot;text&quot;}"/>
           <p:cNvSpPr txBox="1"/>
           <p:nvPr/>
         </p:nvSpPr>
@@ -5440,7 +7904,7 @@
       </p:sp>
       <p:sp>
         <p:nvSpPr>
-          <p:cNvPr id="101" name=""/>
+          <p:cNvPr id="172" name=""/>
           <p:cNvSpPr/>
           <p:nvPr/>
         </p:nvSpPr>
@@ -5461,15 +7925,12 @@
         </p:spPr>
         <p:txBody>
           <a:bodyPr/>
-          <a:p>
-            <a:pPr/>
-            <a:endParaRPr/>
-          </a:p>
-        </p:txBody>
-      </p:sp>
-      <p:sp>
-        <p:nvSpPr>
-          <p:cNvPr id="102" name="" descr="{&quot;isTemplate&quot;:true,&quot;type&quot;:&quot;text&quot;}"/>
+          <a:p/>
+        </p:txBody>
+      </p:sp>
+      <p:sp>
+        <p:nvSpPr>
+          <p:cNvPr id="173" name="" descr="{&quot;isTemplate&quot;:true,&quot;type&quot;:&quot;text&quot;}"/>
           <p:cNvSpPr txBox="1"/>
           <p:nvPr/>
         </p:nvSpPr>
@@ -5524,7 +7985,7 @@
       </p:sp>
       <p:sp>
         <p:nvSpPr>
-          <p:cNvPr id="103" name="" descr="{&quot;isTemplate&quot;:true,&quot;type&quot;:&quot;text&quot;}"/>
+          <p:cNvPr id="174" name="" descr="{&quot;isTemplate&quot;:true,&quot;type&quot;:&quot;text&quot;}"/>
           <p:cNvSpPr txBox="1"/>
           <p:nvPr/>
         </p:nvSpPr>
@@ -5561,7 +8022,7 @@
       </p:sp>
       <p:sp>
         <p:nvSpPr>
-          <p:cNvPr id="104" name=""/>
+          <p:cNvPr id="175" name=""/>
           <p:cNvSpPr/>
           <p:nvPr/>
         </p:nvSpPr>
@@ -5587,15 +8048,12 @@
         </p:spPr>
         <p:txBody>
           <a:bodyPr/>
-          <a:p>
-            <a:pPr/>
-            <a:endParaRPr/>
-          </a:p>
-        </p:txBody>
-      </p:sp>
-      <p:sp>
-        <p:nvSpPr>
-          <p:cNvPr id="105" name="" descr="{&quot;isTemplate&quot;:true,&quot;type&quot;:&quot;text&quot;}"/>
+          <a:p/>
+        </p:txBody>
+      </p:sp>
+      <p:sp>
+        <p:nvSpPr>
+          <p:cNvPr id="176" name="" descr="{&quot;isTemplate&quot;:true,&quot;type&quot;:&quot;text&quot;}"/>
           <p:cNvSpPr txBox="1"/>
           <p:nvPr/>
         </p:nvSpPr>
@@ -5640,7 +8098,7 @@
       </p:sp>
       <p:sp>
         <p:nvSpPr>
-          <p:cNvPr id="106" name=""/>
+          <p:cNvPr id="177" name=""/>
           <p:cNvSpPr/>
           <p:nvPr/>
         </p:nvSpPr>
@@ -5661,15 +8119,12 @@
         </p:spPr>
         <p:txBody>
           <a:bodyPr/>
-          <a:p>
-            <a:pPr/>
-            <a:endParaRPr/>
-          </a:p>
-        </p:txBody>
-      </p:sp>
-      <p:sp>
-        <p:nvSpPr>
-          <p:cNvPr id="107" name="" descr="{&quot;isTemplate&quot;:true,&quot;type&quot;:&quot;text&quot;}"/>
+          <a:p/>
+        </p:txBody>
+      </p:sp>
+      <p:sp>
+        <p:nvSpPr>
+          <p:cNvPr id="178" name="" descr="{&quot;isTemplate&quot;:true,&quot;type&quot;:&quot;text&quot;}"/>
           <p:cNvSpPr txBox="1"/>
           <p:nvPr/>
         </p:nvSpPr>
@@ -5724,7 +8179,7 @@
       </p:sp>
       <p:sp>
         <p:nvSpPr>
-          <p:cNvPr id="108" name="" descr="{&quot;isTemplate&quot;:true,&quot;type&quot;:&quot;text&quot;}"/>
+          <p:cNvPr id="179" name="" descr="{&quot;isTemplate&quot;:true,&quot;type&quot;:&quot;text&quot;}"/>
           <p:cNvSpPr txBox="1"/>
           <p:nvPr/>
         </p:nvSpPr>
@@ -5759,7 +8214,7 @@
       </p:sp>
       <p:sp>
         <p:nvSpPr>
-          <p:cNvPr id="109" name="" descr="{&quot;isTemplate&quot;:true,&quot;type&quot;:&quot;text&quot;}"/>
+          <p:cNvPr id="180" name="" descr="{&quot;isTemplate&quot;:true,&quot;type&quot;:&quot;text&quot;}"/>
           <p:cNvSpPr txBox="1"/>
           <p:nvPr/>
         </p:nvSpPr>
@@ -5794,7 +8249,7 @@
       </p:sp>
       <p:sp>
         <p:nvSpPr>
-          <p:cNvPr id="110" name="" descr="{&quot;isTemplate&quot;:true,&quot;type&quot;:&quot;text&quot;}"/>
+          <p:cNvPr id="181" name="" descr="{&quot;isTemplate&quot;:true,&quot;type&quot;:&quot;text&quot;}"/>
           <p:cNvSpPr txBox="1"/>
           <p:nvPr/>
         </p:nvSpPr>
@@ -5821,7 +8276,7 @@
                 <a:latin typeface="Microsoft YaHei"/>
                 <a:ea typeface="Microsoft YaHei"/>
               </a:rPr>
-              <a:t>13 / 15</a:t>
+              <a:t>15 / 17</a:t>
             </a:r>
             <a:endParaRPr/>
           </a:p>
@@ -5832,12 +8287,12 @@
 </p:sld>
 </file>
 
-<file path=ppt/slides/slide14.xml><?xml version="1.0" encoding="utf-8"?>
+<file path=ppt/slides/slide16.xml><?xml version="1.0" encoding="utf-8"?>
 <p:sld xmlns:p="http://schemas.openxmlformats.org/presentationml/2006/main" xmlns:a="http://schemas.openxmlformats.org/drawingml/2006/main">
   <p:cSld>
     <p:spTree>
       <p:nvGrpSpPr>
-        <p:cNvPr id="111" name=""/>
+        <p:cNvPr id="182" name="" descr="&lt;Slide&gt;&#10;  &lt;Box style={{ width: '1280px', height: '720px', background: '#FFFFFF', flexDirection: 'row', alignItems: 'center' }}&gt;&#10;    {/* 左侧大数字 */}&#10;    &lt;Box style={{ width: 360, height: 720, background: '#F0F5FC', alignItems: 'center', justifyContent: 'center', flexDirection: 'column', gap: 20 }}&gt;&#10;      &lt;Text style={{ color: '#8B97A8', fontSize: 18, letterSpacing: 4 }}&gt;CHAPTER&lt;/Text&gt;&#10;      &lt;Text style={{ color: '#0E3F8C', fontSize: 200, fontWeight: 'bold', lineHeight: 1 }}&gt;04&lt;/Text&gt;&#10;      &lt;Text style={{ color: '#8B97A8', fontSize: 16, letterSpacing: 2 }}&gt;预期成果 · 交付物&lt;/Text&gt;&#10;    &lt;/Box&gt;&#10;&#10;    {/* 右侧标题与要点 */}&#10;    &lt;Box style={{ flex: 1, height: 720, flexDirection: 'column', justifyContent: 'space-between', paddingTop: 48, paddingBottom: 48, paddingLeft: 72, paddingRight: 60 }}&gt;&#10;      &lt;Box style={{ flexDirection: 'column', gap: 14 }}&gt;&#10;        &lt;Box style={{ width: 48, height: 4, background: '#3D7BD9', borderRadius: 2 }} /&gt;&#10;        &lt;Text style={{ color: '#1A2230', fontSize: 44, fontWeight: 'bold' }}&gt;预期成果&lt;/Text&gt;&#10;        &lt;Text style={{ color: '#8B97A8', fontSize: 19, letterSpacing: 1 }}&gt;五项可验收成果&lt;/Text&gt;&#10;      &lt;/Box&gt;&#10;&#10;      &lt;Box style={{ flexDirection: 'column', gap: 12 }}&gt;&#10;        {[&#10;          { n: '1', t: '可运行系统', d: '覆盖解析、混合检索、重排、多轮对话、引用溯源，提供 Web 界面' },&#10;          { n: '2', t: '结构化加工指令', d: '参数忠实于资料、可定位原文页码，支持资料不足时的安全提示' },&#10;          { n: '3', t: '源码与工程文档', d: '代码托管 GitHub，模块结构清晰、附使用说明' },&#10;          { n: '4', t: '评估报告', d: '多文档测试问题集、人工评估结果、检索策略对比实验' },&#10;          { n: '5', t: '结题与技术报告', d: '总结系统设计、关键技术与改进方向' },&#10;        ].map((item) =&gt; (&#10;          &lt;Box key={item.n} style={{ flexDirection: 'row', alignItems: 'center', gap: 14, padding: 13, background: '#F7F9FC', borderRadius: 10, border: '1px solid #E5E7EB' }}&gt;&#10;            &lt;Box style={{ width: 32, height: 32, background: '#1E4FA8', borderRadius: 8, alignItems: 'center', justifyContent: 'center' }}&gt;&#10;              &lt;Text style={{ color: '#FFFFFF', fontSize: 16, fontWeight: 'bold' }}&gt;{item.n}&lt;/Text&gt;&#10;            &lt;/Box&gt;&#10;            &lt;Box style={{ flex: 1, flexDirection: 'column', gap: 3 }}&gt;&#10;              &lt;Text style={{ color: '#1A2230', fontSize: 19, fontWeight: 'bold' }}&gt;{item.t}&lt;/Text&gt;&#10;              &lt;Text style={{ color: '#4A5568', fontSize: 15, lineHeight: 1.45 }}&gt;{item.d}&lt;/Text&gt;&#10;            &lt;/Box&gt;&#10;          &lt;/Box&gt;&#10;        ))}&#10;      &lt;/Box&gt;&#10;&#10;      &lt;Box style={{ flexDirection: 'row', alignItems: 'center', gap: 12, padding: 14, background: '#0E3F8C', borderRadius: 8 }}&gt;&#10;        &lt;Box style={{ width: 8, height: 8, background: '#3D7BD9', borderRadius: 4 }} /&gt;&#10;        &lt;Text style={{ color: '#FFFFFF', fontSize: 16, fontWeight: 'bold' }}&gt;覆盖选题五条要求的完整闭环，成果可演示、可验收&lt;/Text&gt;&#10;      &lt;/Box&gt;&#10;    &lt;/Box&gt;&#10;  &lt;/Box&gt;&#10;&lt;/Slide&gt;&#10;"/>
         <p:cNvGrpSpPr/>
         <p:nvPr/>
       </p:nvGrpSpPr>
@@ -5851,7 +8306,7 @@
       </p:grpSpPr>
       <p:sp>
         <p:nvSpPr>
-          <p:cNvPr id="112" name=""/>
+          <p:cNvPr id="183" name=""/>
           <p:cNvSpPr/>
           <p:nvPr/>
         </p:nvSpPr>
@@ -5870,15 +8325,12 @@
         </p:spPr>
         <p:txBody>
           <a:bodyPr/>
-          <a:p>
-            <a:pPr/>
-            <a:endParaRPr/>
-          </a:p>
-        </p:txBody>
-      </p:sp>
-      <p:sp>
-        <p:nvSpPr>
-          <p:cNvPr id="113" name=""/>
+          <a:p/>
+        </p:txBody>
+      </p:sp>
+      <p:sp>
+        <p:nvSpPr>
+          <p:cNvPr id="184" name=""/>
           <p:cNvSpPr/>
           <p:nvPr/>
         </p:nvSpPr>
@@ -5897,15 +8349,12 @@
         </p:spPr>
         <p:txBody>
           <a:bodyPr/>
-          <a:p>
-            <a:pPr/>
-            <a:endParaRPr/>
-          </a:p>
-        </p:txBody>
-      </p:sp>
-      <p:sp>
-        <p:nvSpPr>
-          <p:cNvPr id="114" name="" descr="{&quot;isTemplate&quot;:true,&quot;type&quot;:&quot;text&quot;}"/>
+          <a:p/>
+        </p:txBody>
+      </p:sp>
+      <p:sp>
+        <p:nvSpPr>
+          <p:cNvPr id="185" name="" descr="{&quot;isTemplate&quot;:true,&quot;type&quot;:&quot;text&quot;}"/>
           <p:cNvSpPr txBox="1"/>
           <p:nvPr/>
         </p:nvSpPr>
@@ -5940,7 +8389,7 @@
       </p:sp>
       <p:sp>
         <p:nvSpPr>
-          <p:cNvPr id="115" name="" descr="{&quot;isTemplate&quot;:true,&quot;type&quot;:&quot;text&quot;}"/>
+          <p:cNvPr id="186" name="" descr="{&quot;isTemplate&quot;:true,&quot;type&quot;:&quot;text&quot;}"/>
           <p:cNvSpPr txBox="1"/>
           <p:nvPr/>
         </p:nvSpPr>
@@ -5975,7 +8424,7 @@
       </p:sp>
       <p:sp>
         <p:nvSpPr>
-          <p:cNvPr id="116" name="" descr="{&quot;isTemplate&quot;:true,&quot;type&quot;:&quot;text&quot;}"/>
+          <p:cNvPr id="187" name="" descr="{&quot;isTemplate&quot;:true,&quot;type&quot;:&quot;text&quot;}"/>
           <p:cNvSpPr txBox="1"/>
           <p:nvPr/>
         </p:nvSpPr>
@@ -6030,7 +8479,7 @@
       </p:sp>
       <p:sp>
         <p:nvSpPr>
-          <p:cNvPr id="117" name=""/>
+          <p:cNvPr id="188" name=""/>
           <p:cNvSpPr/>
           <p:nvPr/>
         </p:nvSpPr>
@@ -6051,15 +8500,12 @@
         </p:spPr>
         <p:txBody>
           <a:bodyPr/>
-          <a:p>
-            <a:pPr/>
-            <a:endParaRPr/>
-          </a:p>
-        </p:txBody>
-      </p:sp>
-      <p:sp>
-        <p:nvSpPr>
-          <p:cNvPr id="118" name="" descr="{&quot;isTemplate&quot;:true,&quot;type&quot;:&quot;text&quot;}"/>
+          <a:p/>
+        </p:txBody>
+      </p:sp>
+      <p:sp>
+        <p:nvSpPr>
+          <p:cNvPr id="189" name="" descr="{&quot;isTemplate&quot;:true,&quot;type&quot;:&quot;text&quot;}"/>
           <p:cNvSpPr txBox="1"/>
           <p:nvPr/>
         </p:nvSpPr>
@@ -6094,7 +8540,7 @@
       </p:sp>
       <p:sp>
         <p:nvSpPr>
-          <p:cNvPr id="119" name="" descr="{&quot;isTemplate&quot;:true,&quot;type&quot;:&quot;text&quot;}"/>
+          <p:cNvPr id="190" name="" descr="{&quot;isTemplate&quot;:true,&quot;type&quot;:&quot;text&quot;}"/>
           <p:cNvSpPr txBox="1"/>
           <p:nvPr/>
         </p:nvSpPr>
@@ -6129,7 +8575,7 @@
       </p:sp>
       <p:sp>
         <p:nvSpPr>
-          <p:cNvPr id="120" name=""/>
+          <p:cNvPr id="191" name=""/>
           <p:cNvSpPr/>
           <p:nvPr/>
         </p:nvSpPr>
@@ -6155,15 +8601,12 @@
         </p:spPr>
         <p:txBody>
           <a:bodyPr/>
-          <a:p>
-            <a:pPr/>
-            <a:endParaRPr/>
-          </a:p>
-        </p:txBody>
-      </p:sp>
-      <p:sp>
-        <p:nvSpPr>
-          <p:cNvPr id="121" name=""/>
+          <a:p/>
+        </p:txBody>
+      </p:sp>
+      <p:sp>
+        <p:nvSpPr>
+          <p:cNvPr id="192" name=""/>
           <p:cNvSpPr/>
           <p:nvPr/>
         </p:nvSpPr>
@@ -6184,15 +8627,12 @@
         </p:spPr>
         <p:txBody>
           <a:bodyPr/>
-          <a:p>
-            <a:pPr/>
-            <a:endParaRPr/>
-          </a:p>
-        </p:txBody>
-      </p:sp>
-      <p:sp>
-        <p:nvSpPr>
-          <p:cNvPr id="122" name="" descr="{&quot;isTemplate&quot;:true,&quot;type&quot;:&quot;text&quot;}"/>
+          <a:p/>
+        </p:txBody>
+      </p:sp>
+      <p:sp>
+        <p:nvSpPr>
+          <p:cNvPr id="193" name="" descr="{&quot;isTemplate&quot;:true,&quot;type&quot;:&quot;text&quot;}"/>
           <p:cNvSpPr txBox="1"/>
           <p:nvPr/>
         </p:nvSpPr>
@@ -6227,7 +8667,7 @@
       </p:sp>
       <p:sp>
         <p:nvSpPr>
-          <p:cNvPr id="123" name="" descr="{&quot;isTemplate&quot;:true,&quot;type&quot;:&quot;text&quot;}"/>
+          <p:cNvPr id="194" name="" descr="{&quot;isTemplate&quot;:true,&quot;type&quot;:&quot;text&quot;}"/>
           <p:cNvSpPr txBox="1"/>
           <p:nvPr/>
         </p:nvSpPr>
@@ -6262,7 +8702,7 @@
       </p:sp>
       <p:sp>
         <p:nvSpPr>
-          <p:cNvPr id="124" name="" descr="{&quot;isTemplate&quot;:true,&quot;type&quot;:&quot;text&quot;}"/>
+          <p:cNvPr id="195" name="" descr="{&quot;isTemplate&quot;:true,&quot;type&quot;:&quot;text&quot;}"/>
           <p:cNvSpPr txBox="1"/>
           <p:nvPr/>
         </p:nvSpPr>
@@ -6317,7 +8757,7 @@
       </p:sp>
       <p:sp>
         <p:nvSpPr>
-          <p:cNvPr id="125" name=""/>
+          <p:cNvPr id="196" name=""/>
           <p:cNvSpPr/>
           <p:nvPr/>
         </p:nvSpPr>
@@ -6343,15 +8783,12 @@
         </p:spPr>
         <p:txBody>
           <a:bodyPr/>
-          <a:p>
-            <a:pPr/>
-            <a:endParaRPr/>
-          </a:p>
-        </p:txBody>
-      </p:sp>
-      <p:sp>
-        <p:nvSpPr>
-          <p:cNvPr id="126" name=""/>
+          <a:p/>
+        </p:txBody>
+      </p:sp>
+      <p:sp>
+        <p:nvSpPr>
+          <p:cNvPr id="197" name=""/>
           <p:cNvSpPr/>
           <p:nvPr/>
         </p:nvSpPr>
@@ -6372,15 +8809,12 @@
         </p:spPr>
         <p:txBody>
           <a:bodyPr/>
-          <a:p>
-            <a:pPr/>
-            <a:endParaRPr/>
-          </a:p>
-        </p:txBody>
-      </p:sp>
-      <p:sp>
-        <p:nvSpPr>
-          <p:cNvPr id="127" name="" descr="{&quot;isTemplate&quot;:true,&quot;type&quot;:&quot;text&quot;}"/>
+          <a:p/>
+        </p:txBody>
+      </p:sp>
+      <p:sp>
+        <p:nvSpPr>
+          <p:cNvPr id="198" name="" descr="{&quot;isTemplate&quot;:true,&quot;type&quot;:&quot;text&quot;}"/>
           <p:cNvSpPr txBox="1"/>
           <p:nvPr/>
         </p:nvSpPr>
@@ -6415,7 +8849,7 @@
       </p:sp>
       <p:sp>
         <p:nvSpPr>
-          <p:cNvPr id="128" name="" descr="{&quot;isTemplate&quot;:true,&quot;type&quot;:&quot;text&quot;}"/>
+          <p:cNvPr id="199" name="" descr="{&quot;isTemplate&quot;:true,&quot;type&quot;:&quot;text&quot;}"/>
           <p:cNvSpPr txBox="1"/>
           <p:nvPr/>
         </p:nvSpPr>
@@ -6450,7 +8884,7 @@
       </p:sp>
       <p:sp>
         <p:nvSpPr>
-          <p:cNvPr id="129" name="" descr="{&quot;isTemplate&quot;:true,&quot;type&quot;:&quot;text&quot;}"/>
+          <p:cNvPr id="200" name="" descr="{&quot;isTemplate&quot;:true,&quot;type&quot;:&quot;text&quot;}"/>
           <p:cNvSpPr txBox="1"/>
           <p:nvPr/>
         </p:nvSpPr>
@@ -6485,7 +8919,7 @@
       </p:sp>
       <p:sp>
         <p:nvSpPr>
-          <p:cNvPr id="130" name=""/>
+          <p:cNvPr id="201" name=""/>
           <p:cNvSpPr/>
           <p:nvPr/>
         </p:nvSpPr>
@@ -6511,15 +8945,12 @@
         </p:spPr>
         <p:txBody>
           <a:bodyPr/>
-          <a:p>
-            <a:pPr/>
-            <a:endParaRPr/>
-          </a:p>
-        </p:txBody>
-      </p:sp>
-      <p:sp>
-        <p:nvSpPr>
-          <p:cNvPr id="131" name=""/>
+          <a:p/>
+        </p:txBody>
+      </p:sp>
+      <p:sp>
+        <p:nvSpPr>
+          <p:cNvPr id="202" name=""/>
           <p:cNvSpPr/>
           <p:nvPr/>
         </p:nvSpPr>
@@ -6540,15 +8971,12 @@
         </p:spPr>
         <p:txBody>
           <a:bodyPr/>
-          <a:p>
-            <a:pPr/>
-            <a:endParaRPr/>
-          </a:p>
-        </p:txBody>
-      </p:sp>
-      <p:sp>
-        <p:nvSpPr>
-          <p:cNvPr id="132" name="" descr="{&quot;isTemplate&quot;:true,&quot;type&quot;:&quot;text&quot;}"/>
+          <a:p/>
+        </p:txBody>
+      </p:sp>
+      <p:sp>
+        <p:nvSpPr>
+          <p:cNvPr id="203" name="" descr="{&quot;isTemplate&quot;:true,&quot;type&quot;:&quot;text&quot;}"/>
           <p:cNvSpPr txBox="1"/>
           <p:nvPr/>
         </p:nvSpPr>
@@ -6583,7 +9011,7 @@
       </p:sp>
       <p:sp>
         <p:nvSpPr>
-          <p:cNvPr id="133" name="" descr="{&quot;isTemplate&quot;:true,&quot;type&quot;:&quot;text&quot;}"/>
+          <p:cNvPr id="204" name="" descr="{&quot;isTemplate&quot;:true,&quot;type&quot;:&quot;text&quot;}"/>
           <p:cNvSpPr txBox="1"/>
           <p:nvPr/>
         </p:nvSpPr>
@@ -6618,7 +9046,7 @@
       </p:sp>
       <p:sp>
         <p:nvSpPr>
-          <p:cNvPr id="134" name="" descr="{&quot;isTemplate&quot;:true,&quot;type&quot;:&quot;text&quot;}"/>
+          <p:cNvPr id="205" name="" descr="{&quot;isTemplate&quot;:true,&quot;type&quot;:&quot;text&quot;}"/>
           <p:cNvSpPr txBox="1"/>
           <p:nvPr/>
         </p:nvSpPr>
@@ -6673,7 +9101,7 @@
       </p:sp>
       <p:sp>
         <p:nvSpPr>
-          <p:cNvPr id="135" name=""/>
+          <p:cNvPr id="206" name=""/>
           <p:cNvSpPr/>
           <p:nvPr/>
         </p:nvSpPr>
@@ -6699,15 +9127,12 @@
         </p:spPr>
         <p:txBody>
           <a:bodyPr/>
-          <a:p>
-            <a:pPr/>
-            <a:endParaRPr/>
-          </a:p>
-        </p:txBody>
-      </p:sp>
-      <p:sp>
-        <p:nvSpPr>
-          <p:cNvPr id="136" name=""/>
+          <a:p/>
+        </p:txBody>
+      </p:sp>
+      <p:sp>
+        <p:nvSpPr>
+          <p:cNvPr id="207" name=""/>
           <p:cNvSpPr/>
           <p:nvPr/>
         </p:nvSpPr>
@@ -6728,15 +9153,12 @@
         </p:spPr>
         <p:txBody>
           <a:bodyPr/>
-          <a:p>
-            <a:pPr/>
-            <a:endParaRPr/>
-          </a:p>
-        </p:txBody>
-      </p:sp>
-      <p:sp>
-        <p:nvSpPr>
-          <p:cNvPr id="137" name="" descr="{&quot;isTemplate&quot;:true,&quot;type&quot;:&quot;text&quot;}"/>
+          <a:p/>
+        </p:txBody>
+      </p:sp>
+      <p:sp>
+        <p:nvSpPr>
+          <p:cNvPr id="208" name="" descr="{&quot;isTemplate&quot;:true,&quot;type&quot;:&quot;text&quot;}"/>
           <p:cNvSpPr txBox="1"/>
           <p:nvPr/>
         </p:nvSpPr>
@@ -6771,7 +9193,7 @@
       </p:sp>
       <p:sp>
         <p:nvSpPr>
-          <p:cNvPr id="138" name="" descr="{&quot;isTemplate&quot;:true,&quot;type&quot;:&quot;text&quot;}"/>
+          <p:cNvPr id="209" name="" descr="{&quot;isTemplate&quot;:true,&quot;type&quot;:&quot;text&quot;}"/>
           <p:cNvSpPr txBox="1"/>
           <p:nvPr/>
         </p:nvSpPr>
@@ -6806,7 +9228,7 @@
       </p:sp>
       <p:sp>
         <p:nvSpPr>
-          <p:cNvPr id="139" name="" descr="{&quot;isTemplate&quot;:true,&quot;type&quot;:&quot;text&quot;}"/>
+          <p:cNvPr id="210" name="" descr="{&quot;isTemplate&quot;:true,&quot;type&quot;:&quot;text&quot;}"/>
           <p:cNvSpPr txBox="1"/>
           <p:nvPr/>
         </p:nvSpPr>
@@ -6841,7 +9263,7 @@
       </p:sp>
       <p:sp>
         <p:nvSpPr>
-          <p:cNvPr id="140" name=""/>
+          <p:cNvPr id="211" name=""/>
           <p:cNvSpPr/>
           <p:nvPr/>
         </p:nvSpPr>
@@ -6867,15 +9289,12 @@
         </p:spPr>
         <p:txBody>
           <a:bodyPr/>
-          <a:p>
-            <a:pPr/>
-            <a:endParaRPr/>
-          </a:p>
-        </p:txBody>
-      </p:sp>
-      <p:sp>
-        <p:nvSpPr>
-          <p:cNvPr id="141" name=""/>
+          <a:p/>
+        </p:txBody>
+      </p:sp>
+      <p:sp>
+        <p:nvSpPr>
+          <p:cNvPr id="212" name=""/>
           <p:cNvSpPr/>
           <p:nvPr/>
         </p:nvSpPr>
@@ -6896,15 +9315,12 @@
         </p:spPr>
         <p:txBody>
           <a:bodyPr/>
-          <a:p>
-            <a:pPr/>
-            <a:endParaRPr/>
-          </a:p>
-        </p:txBody>
-      </p:sp>
-      <p:sp>
-        <p:nvSpPr>
-          <p:cNvPr id="142" name="" descr="{&quot;isTemplate&quot;:true,&quot;type&quot;:&quot;text&quot;}"/>
+          <a:p/>
+        </p:txBody>
+      </p:sp>
+      <p:sp>
+        <p:nvSpPr>
+          <p:cNvPr id="213" name="" descr="{&quot;isTemplate&quot;:true,&quot;type&quot;:&quot;text&quot;}"/>
           <p:cNvSpPr txBox="1"/>
           <p:nvPr/>
         </p:nvSpPr>
@@ -6939,7 +9355,7 @@
       </p:sp>
       <p:sp>
         <p:nvSpPr>
-          <p:cNvPr id="143" name="" descr="{&quot;isTemplate&quot;:true,&quot;type&quot;:&quot;text&quot;}"/>
+          <p:cNvPr id="214" name="" descr="{&quot;isTemplate&quot;:true,&quot;type&quot;:&quot;text&quot;}"/>
           <p:cNvSpPr txBox="1"/>
           <p:nvPr/>
         </p:nvSpPr>
@@ -6974,7 +9390,7 @@
       </p:sp>
       <p:sp>
         <p:nvSpPr>
-          <p:cNvPr id="144" name="" descr="{&quot;isTemplate&quot;:true,&quot;type&quot;:&quot;text&quot;}"/>
+          <p:cNvPr id="215" name="" descr="{&quot;isTemplate&quot;:true,&quot;type&quot;:&quot;text&quot;}"/>
           <p:cNvSpPr txBox="1"/>
           <p:nvPr/>
         </p:nvSpPr>
@@ -7009,7 +9425,7 @@
       </p:sp>
       <p:sp>
         <p:nvSpPr>
-          <p:cNvPr id="145" name=""/>
+          <p:cNvPr id="216" name=""/>
           <p:cNvSpPr/>
           <p:nvPr/>
         </p:nvSpPr>
@@ -7030,15 +9446,12 @@
         </p:spPr>
         <p:txBody>
           <a:bodyPr/>
-          <a:p>
-            <a:pPr/>
-            <a:endParaRPr/>
-          </a:p>
-        </p:txBody>
-      </p:sp>
-      <p:sp>
-        <p:nvSpPr>
-          <p:cNvPr id="146" name=""/>
+          <a:p/>
+        </p:txBody>
+      </p:sp>
+      <p:sp>
+        <p:nvSpPr>
+          <p:cNvPr id="217" name=""/>
           <p:cNvSpPr/>
           <p:nvPr/>
         </p:nvSpPr>
@@ -7059,15 +9472,12 @@
         </p:spPr>
         <p:txBody>
           <a:bodyPr/>
-          <a:p>
-            <a:pPr/>
-            <a:endParaRPr/>
-          </a:p>
-        </p:txBody>
-      </p:sp>
-      <p:sp>
-        <p:nvSpPr>
-          <p:cNvPr id="147" name="" descr="{&quot;isTemplate&quot;:true,&quot;type&quot;:&quot;text&quot;}"/>
+          <a:p/>
+        </p:txBody>
+      </p:sp>
+      <p:sp>
+        <p:nvSpPr>
+          <p:cNvPr id="218" name="" descr="{&quot;isTemplate&quot;:true,&quot;type&quot;:&quot;text&quot;}"/>
           <p:cNvSpPr txBox="1"/>
           <p:nvPr/>
         </p:nvSpPr>
@@ -7105,12 +9515,12 @@
 </p:sld>
 </file>
 
-<file path=ppt/slides/slide15.xml><?xml version="1.0" encoding="utf-8"?>
+<file path=ppt/slides/slide17.xml><?xml version="1.0" encoding="utf-8"?>
 <p:sld xmlns:p="http://schemas.openxmlformats.org/presentationml/2006/main" xmlns:a="http://schemas.openxmlformats.org/drawingml/2006/main" xmlns:asvg="http://schemas.microsoft.com/office/drawing/2016/SVG/main" xmlns:r="http://schemas.openxmlformats.org/officeDocument/2006/relationships" xmlns:mc="http://schemas.openxmlformats.org/markup-compatibility/2006" mc:Ignorable="asvg">
   <p:cSld>
     <p:spTree>
       <p:nvGrpSpPr>
-        <p:cNvPr id="148" name=""/>
+        <p:cNvPr id="219" name="" descr="&lt;Slide&gt;&#10;  &lt;Box style={{ width: '1280px', height: '720px', background: '#0E3F8C', position: 'relative', overflow: 'hidden', alignItems: 'center', justifyContent: 'center' }}&gt;&#10;    {/* 背景装饰节点线稿 */}&#10;    &lt;Box style={{ position: 'absolute', top: 0, left: 0, width: 1280, height: 720, opacity: 0.10 }}&gt;&#10;      &lt;svg width={1280} height={720} viewBox='0 0 1280 720'&gt;&#10;        &lt;g stroke='#FFFFFF' strokeWidth='1.5' fill='none'&gt;&#10;          &lt;circle cx='150' cy='180' r='50' /&gt;&#10;          &lt;circle cx='480' cy='120' r='65' /&gt;&#10;          &lt;circle cx='820' cy='220' r='45' /&gt;&#10;          &lt;circle cx='1080' cy='150' r='55' /&gt;&#10;          &lt;circle cx='250' cy='520' r='60' /&gt;&#10;          &lt;circle cx='620' cy='580' r='50' /&gt;&#10;          &lt;circle cx='980' cy='520' r='65' /&gt;&#10;          &lt;path d='M150 180 L480 120 L820 220 L1080 150' /&gt;&#10;          &lt;path d='M480 120 L620 580 L250 520 Z' /&gt;&#10;          &lt;path d='M820 220 L980 520 L620 580' /&gt;&#10;          &lt;path d='M150 180 L250 520 M1080 150 L980 520' /&gt;&#10;        &lt;/g&gt;&#10;        &lt;g fill='#FFFFFF'&gt;&#10;          &lt;circle cx='150' cy='180' r='5' /&gt;&#10;          &lt;circle cx='480' cy='120' r='6' /&gt;&#10;          &lt;circle cx='820' cy='220' r='4' /&gt;&#10;          &lt;circle cx='1080' cy='150' r='5' /&gt;&#10;          &lt;circle cx='250' cy='520' r='5' /&gt;&#10;          &lt;circle cx='620' cy='580' r='4' /&gt;&#10;          &lt;circle cx='980' cy='520' r='6' /&gt;&#10;        &lt;/g&gt;&#10;      &lt;/svg&gt;&#10;    &lt;/Box&gt;&#10;&#10;    {/* 顶部信息 */}&#10;    &lt;Box style={{ position: 'absolute', top: 48, left: 0, right: 0, alignItems: 'center' }}&gt;&#10;      &lt;Text style={{ color: '#8FB3E8', fontSize: 16, letterSpacing: 2 }}&gt;中国科学技术大学软件学院 · 软件工程实践&lt;/Text&gt;&#10;    &lt;/Box&gt;&#10;&#10;    {/* 中央内容 */}&#10;    &lt;Box style={{ flexDirection: 'column', alignItems: 'center', gap: 32 }}&gt;&#10;      &lt;Box style={{ width: 78, height: 4, background: '#3D7BD9', borderRadius: 2 }} /&gt;&#10;      &lt;Text style={{ color: '#FFFFFF', fontSize: 64, fontWeight: 'bold', letterSpacing: 4 }}&gt;感谢聆听&lt;/Text&gt;&#10;      &lt;Text style={{ color: '#8FB3E8', fontSize: 24, letterSpacing: 2 }}&gt;恳请各位老师批评指正&lt;/Text&gt;&#10;      &lt;Box style={{ flexDirection: 'row', alignItems: 'center', gap: 24, marginTop: 16 }}&gt;&#10;        &lt;Text style={{ color: '#D6E4F7', fontSize: 18 }}&gt;熊佳昀 · 齐梦伟 · 张承伟 · 资唯&lt;/Text&gt;&#10;        &lt;Box style={{ width: 1, height: 20, background: 'rgba(255,255,255,0.3)' }} /&gt;&#10;        &lt;Text style={{ color: '#D6E4F7', fontSize: 18 }}&gt;指导教师 丁箐&lt;/Text&gt;&#10;      &lt;/Box&gt;&#10;    &lt;/Box&gt;&#10;&#10;    {/* 底部单位信息 */}&#10;    &lt;Box style={{ position: 'absolute', bottom: 48, left: 0, right: 0, alignItems: 'center' }}&gt;&#10;      &lt;Text style={{ color: '#8FB3E8', fontSize: 16, letterSpacing: 2 }}&gt;2026 年 10 月 · 开题答辩&lt;/Text&gt;&#10;    &lt;/Box&gt;&#10;  &lt;/Box&gt;&#10;&lt;/Slide&gt;&#10;"/>
         <p:cNvGrpSpPr/>
         <p:nvPr/>
       </p:nvGrpSpPr>
@@ -7124,7 +9534,7 @@
       </p:grpSpPr>
       <p:sp>
         <p:nvSpPr>
-          <p:cNvPr id="149" name=""/>
+          <p:cNvPr id="220" name=""/>
           <p:cNvSpPr/>
           <p:nvPr/>
         </p:nvSpPr>
@@ -7143,15 +9553,12 @@
         </p:spPr>
         <p:txBody>
           <a:bodyPr/>
-          <a:p>
-            <a:pPr/>
-            <a:endParaRPr/>
-          </a:p>
-        </p:txBody>
-      </p:sp>
-      <p:sp>
-        <p:nvSpPr>
-          <p:cNvPr id="150" name=""/>
+          <a:p/>
+        </p:txBody>
+      </p:sp>
+      <p:sp>
+        <p:nvSpPr>
+          <p:cNvPr id="221" name=""/>
           <p:cNvSpPr/>
           <p:nvPr/>
         </p:nvSpPr>
@@ -7172,15 +9579,12 @@
         </p:spPr>
         <p:txBody>
           <a:bodyPr/>
-          <a:p>
-            <a:pPr/>
-            <a:endParaRPr/>
-          </a:p>
-        </p:txBody>
-      </p:sp>
-      <p:sp>
-        <p:nvSpPr>
-          <p:cNvPr id="151" name="" descr="{&quot;isTemplate&quot;:true,&quot;type&quot;:&quot;text&quot;}"/>
+          <a:p/>
+        </p:txBody>
+      </p:sp>
+      <p:sp>
+        <p:nvSpPr>
+          <p:cNvPr id="222" name="" descr="{&quot;isTemplate&quot;:true,&quot;type&quot;:&quot;text&quot;}"/>
           <p:cNvSpPr txBox="1"/>
           <p:nvPr/>
         </p:nvSpPr>
@@ -7215,7 +9619,7 @@
       </p:sp>
       <p:sp>
         <p:nvSpPr>
-          <p:cNvPr id="152" name="" descr="{&quot;isTemplate&quot;:true,&quot;type&quot;:&quot;text&quot;}"/>
+          <p:cNvPr id="223" name="" descr="{&quot;isTemplate&quot;:true,&quot;type&quot;:&quot;text&quot;}"/>
           <p:cNvSpPr txBox="1"/>
           <p:nvPr/>
         </p:nvSpPr>
@@ -7250,7 +9654,7 @@
       </p:sp>
       <p:sp>
         <p:nvSpPr>
-          <p:cNvPr id="153" name="" descr="{&quot;isTemplate&quot;:true,&quot;type&quot;:&quot;text&quot;}"/>
+          <p:cNvPr id="224" name="" descr="{&quot;isTemplate&quot;:true,&quot;type&quot;:&quot;text&quot;}"/>
           <p:cNvSpPr txBox="1"/>
           <p:nvPr/>
         </p:nvSpPr>
@@ -7345,7 +9749,7 @@
       </p:sp>
       <p:sp>
         <p:nvSpPr>
-          <p:cNvPr id="154" name=""/>
+          <p:cNvPr id="225" name=""/>
           <p:cNvSpPr/>
           <p:nvPr/>
         </p:nvSpPr>
@@ -7366,15 +9770,12 @@
         </p:spPr>
         <p:txBody>
           <a:bodyPr/>
-          <a:p>
-            <a:pPr/>
-            <a:endParaRPr/>
-          </a:p>
-        </p:txBody>
-      </p:sp>
-      <p:sp>
-        <p:nvSpPr>
-          <p:cNvPr id="155" name="" descr="{&quot;isTemplate&quot;:true,&quot;type&quot;:&quot;text&quot;}"/>
+          <a:p/>
+        </p:txBody>
+      </p:sp>
+      <p:sp>
+        <p:nvSpPr>
+          <p:cNvPr id="226" name="" descr="{&quot;isTemplate&quot;:true,&quot;type&quot;:&quot;text&quot;}"/>
           <p:cNvSpPr txBox="1"/>
           <p:nvPr/>
         </p:nvSpPr>
@@ -7429,7 +9830,7 @@
       </p:sp>
       <p:pic>
         <p:nvPicPr>
-          <p:cNvPr id="156" name=""/>
+          <p:cNvPr id="227" name=""/>
           <p:cNvPicPr>
             <a:picLocks noChangeAspect="1"/>
           </p:cNvPicPr>
@@ -7461,7 +9862,7 @@
       </p:pic>
       <p:sp>
         <p:nvSpPr>
-          <p:cNvPr id="157" name="" descr="{&quot;isTemplate&quot;:true,&quot;type&quot;:&quot;text&quot;}"/>
+          <p:cNvPr id="228" name="" descr="{&quot;isTemplate&quot;:true,&quot;type&quot;:&quot;text&quot;}"/>
           <p:cNvSpPr txBox="1"/>
           <p:nvPr/>
         </p:nvSpPr>
@@ -7516,7 +9917,7 @@
       </p:sp>
       <p:sp>
         <p:nvSpPr>
-          <p:cNvPr id="158" name="" descr="{&quot;isTemplate&quot;:true,&quot;type&quot;:&quot;text&quot;}"/>
+          <p:cNvPr id="229" name="" descr="{&quot;isTemplate&quot;:true,&quot;type&quot;:&quot;text&quot;}"/>
           <p:cNvSpPr txBox="1"/>
           <p:nvPr/>
         </p:nvSpPr>
@@ -7609,7 +10010,7 @@
   <p:cSld>
     <p:spTree>
       <p:nvGrpSpPr>
-        <p:cNvPr id="159" name=""/>
+        <p:cNvPr id="230" name="" descr="&lt;Slide&gt;&#10;  &lt;Box style={{ width: '1280px', height: '720px', background: '#F7F9FC', flexDirection: 'row' }}&gt;&#10;    {/* 左侧深蓝栏 */}&#10;    &lt;Box style={{ width: 320, height: 720, background: '#0E3F8C', flexDirection: 'column', justifyContent: 'center', paddingLeft: 48, paddingRight: 48 }}&gt;&#10;      &lt;Box style={{ width: 48, height: 4, background: '#3D7BD9', borderRadius: 2, marginBottom: 28 }} /&gt;&#10;      &lt;Text style={{ color: '#FFFFFF', fontSize: 48, fontWeight: 'bold', letterSpacing: 4 }}&gt;目录&lt;/Text&gt;&#10;      &lt;Text style={{ color: '#8FB3E8', fontSize: 20, marginTop: 16, letterSpacing: 2 }}&gt;CONTENTS&lt;/Text&gt;&#10;    &lt;/Box&gt;&#10;&#10;    {/* 右侧目录条目 */}&#10;    &lt;Box style={{ flex: 1, flexDirection: 'column', justifyContent: 'center', paddingLeft: 72, paddingRight: 60, gap: 28 }}&gt;&#10;      {[&#10;        { n: '01', t: '选题背景与意义', d: '工艺知识痛点 · 通用大模型的局限' },&#10;        { n: '02', t: '项目目标与需求', d: '双链路定位 · 五大功能需求' },&#10;        { n: '03', t: '技术方案与选型', d: '总体架构 · 关键技术 · 组件选型' },&#10;        { n: '04', t: '开发方法与进度', d: '迭代开发 · 测试方案 · 7 阶段安排' },&#10;        { n: '05', t: '预期成果', d: '系统 · 指令 · 文档 · 评估报告' },&#10;      ].map((item) =&gt; (&#10;        &lt;Box key={item.n} style={{ flexDirection: 'row', alignItems: 'center', gap: 28, paddingBottom: 22, borderBottom: '1px solid #E5E7EB' }}&gt;&#10;          &lt;Box style={{ width: 60, height: 60, background: '#1E4FA8', borderRadius: 8, alignItems: 'center', justifyContent: 'center' }}&gt;&#10;            &lt;Text style={{ color: '#FFFFFF', fontSize: 24, fontWeight: 'bold' }}&gt;{item.n}&lt;/Text&gt;&#10;          &lt;/Box&gt;&#10;          &lt;Box style={{ flexDirection: 'column', gap: 4 }}&gt;&#10;            &lt;Text style={{ color: '#1A2230', fontSize: 28, fontWeight: 'bold' }}&gt;{item.t}&lt;/Text&gt;&#10;            &lt;Text style={{ color: '#8B97A8', fontSize: 16 }}&gt;{item.d}&lt;/Text&gt;&#10;          &lt;/Box&gt;&#10;        &lt;/Box&gt;&#10;      ))}&#10;    &lt;/Box&gt;&#10;  &lt;/Box&gt;&#10;&lt;/Slide&gt;&#10;"/>
         <p:cNvGrpSpPr/>
         <p:nvPr/>
       </p:nvGrpSpPr>
@@ -7623,7 +10024,7 @@
       </p:grpSpPr>
       <p:sp>
         <p:nvSpPr>
-          <p:cNvPr id="160" name=""/>
+          <p:cNvPr id="231" name=""/>
           <p:cNvSpPr/>
           <p:nvPr/>
         </p:nvSpPr>
@@ -7642,15 +10043,12 @@
         </p:spPr>
         <p:txBody>
           <a:bodyPr/>
-          <a:p>
-            <a:pPr/>
-            <a:endParaRPr/>
-          </a:p>
-        </p:txBody>
-      </p:sp>
-      <p:sp>
-        <p:nvSpPr>
-          <p:cNvPr id="161" name=""/>
+          <a:p/>
+        </p:txBody>
+      </p:sp>
+      <p:sp>
+        <p:nvSpPr>
+          <p:cNvPr id="232" name=""/>
           <p:cNvSpPr/>
           <p:nvPr/>
         </p:nvSpPr>
@@ -7669,15 +10067,12 @@
         </p:spPr>
         <p:txBody>
           <a:bodyPr/>
-          <a:p>
-            <a:pPr/>
-            <a:endParaRPr/>
-          </a:p>
-        </p:txBody>
-      </p:sp>
-      <p:sp>
-        <p:nvSpPr>
-          <p:cNvPr id="162" name=""/>
+          <a:p/>
+        </p:txBody>
+      </p:sp>
+      <p:sp>
+        <p:nvSpPr>
+          <p:cNvPr id="233" name=""/>
           <p:cNvSpPr/>
           <p:nvPr/>
         </p:nvSpPr>
@@ -7698,15 +10093,12 @@
         </p:spPr>
         <p:txBody>
           <a:bodyPr/>
-          <a:p>
-            <a:pPr/>
-            <a:endParaRPr/>
-          </a:p>
-        </p:txBody>
-      </p:sp>
-      <p:sp>
-        <p:nvSpPr>
-          <p:cNvPr id="163" name="" descr="{&quot;isTemplate&quot;:true,&quot;type&quot;:&quot;text&quot;}"/>
+          <a:p/>
+        </p:txBody>
+      </p:sp>
+      <p:sp>
+        <p:nvSpPr>
+          <p:cNvPr id="234" name="" descr="{&quot;isTemplate&quot;:true,&quot;type&quot;:&quot;text&quot;}"/>
           <p:cNvSpPr txBox="1"/>
           <p:nvPr/>
         </p:nvSpPr>
@@ -7741,7 +10133,7 @@
       </p:sp>
       <p:sp>
         <p:nvSpPr>
-          <p:cNvPr id="164" name="" descr="{&quot;isTemplate&quot;:true,&quot;type&quot;:&quot;text&quot;}"/>
+          <p:cNvPr id="235" name="" descr="{&quot;isTemplate&quot;:true,&quot;type&quot;:&quot;text&quot;}"/>
           <p:cNvSpPr txBox="1"/>
           <p:nvPr/>
         </p:nvSpPr>
@@ -7776,7 +10168,7 @@
       </p:sp>
       <p:sp>
         <p:nvSpPr>
-          <p:cNvPr id="165" name=""/>
+          <p:cNvPr id="236" name=""/>
           <p:cNvSpPr/>
           <p:nvPr/>
         </p:nvSpPr>
@@ -7811,15 +10203,12 @@
         </p:spPr>
         <p:txBody>
           <a:bodyPr/>
-          <a:p>
-            <a:pPr/>
-            <a:endParaRPr/>
-          </a:p>
-        </p:txBody>
-      </p:sp>
-      <p:sp>
-        <p:nvSpPr>
-          <p:cNvPr id="166" name=""/>
+          <a:p/>
+        </p:txBody>
+      </p:sp>
+      <p:sp>
+        <p:nvSpPr>
+          <p:cNvPr id="237" name=""/>
           <p:cNvSpPr/>
           <p:nvPr/>
         </p:nvSpPr>
@@ -7840,15 +10229,12 @@
         </p:spPr>
         <p:txBody>
           <a:bodyPr/>
-          <a:p>
-            <a:pPr/>
-            <a:endParaRPr/>
-          </a:p>
-        </p:txBody>
-      </p:sp>
-      <p:sp>
-        <p:nvSpPr>
-          <p:cNvPr id="167" name="" descr="{&quot;isTemplate&quot;:true,&quot;type&quot;:&quot;text&quot;}"/>
+          <a:p/>
+        </p:txBody>
+      </p:sp>
+      <p:sp>
+        <p:nvSpPr>
+          <p:cNvPr id="238" name="" descr="{&quot;isTemplate&quot;:true,&quot;type&quot;:&quot;text&quot;}"/>
           <p:cNvSpPr txBox="1"/>
           <p:nvPr/>
         </p:nvSpPr>
@@ -7883,7 +10269,7 @@
       </p:sp>
       <p:sp>
         <p:nvSpPr>
-          <p:cNvPr id="168" name="" descr="{&quot;isTemplate&quot;:true,&quot;type&quot;:&quot;text&quot;}"/>
+          <p:cNvPr id="239" name="" descr="{&quot;isTemplate&quot;:true,&quot;type&quot;:&quot;text&quot;}"/>
           <p:cNvSpPr txBox="1"/>
           <p:nvPr/>
         </p:nvSpPr>
@@ -7918,7 +10304,7 @@
       </p:sp>
       <p:sp>
         <p:nvSpPr>
-          <p:cNvPr id="169" name="" descr="{&quot;isTemplate&quot;:true,&quot;type&quot;:&quot;text&quot;}"/>
+          <p:cNvPr id="240" name="" descr="{&quot;isTemplate&quot;:true,&quot;type&quot;:&quot;text&quot;}"/>
           <p:cNvSpPr txBox="1"/>
           <p:nvPr/>
         </p:nvSpPr>
@@ -7973,7 +10359,7 @@
       </p:sp>
       <p:sp>
         <p:nvSpPr>
-          <p:cNvPr id="170" name=""/>
+          <p:cNvPr id="241" name=""/>
           <p:cNvSpPr/>
           <p:nvPr/>
         </p:nvSpPr>
@@ -8008,15 +10394,12 @@
         </p:spPr>
         <p:txBody>
           <a:bodyPr/>
-          <a:p>
-            <a:pPr/>
-            <a:endParaRPr/>
-          </a:p>
-        </p:txBody>
-      </p:sp>
-      <p:sp>
-        <p:nvSpPr>
-          <p:cNvPr id="171" name=""/>
+          <a:p/>
+        </p:txBody>
+      </p:sp>
+      <p:sp>
+        <p:nvSpPr>
+          <p:cNvPr id="242" name=""/>
           <p:cNvSpPr/>
           <p:nvPr/>
         </p:nvSpPr>
@@ -8037,15 +10420,12 @@
         </p:spPr>
         <p:txBody>
           <a:bodyPr/>
-          <a:p>
-            <a:pPr/>
-            <a:endParaRPr/>
-          </a:p>
-        </p:txBody>
-      </p:sp>
-      <p:sp>
-        <p:nvSpPr>
-          <p:cNvPr id="172" name="" descr="{&quot;isTemplate&quot;:true,&quot;type&quot;:&quot;text&quot;}"/>
+          <a:p/>
+        </p:txBody>
+      </p:sp>
+      <p:sp>
+        <p:nvSpPr>
+          <p:cNvPr id="243" name="" descr="{&quot;isTemplate&quot;:true,&quot;type&quot;:&quot;text&quot;}"/>
           <p:cNvSpPr txBox="1"/>
           <p:nvPr/>
         </p:nvSpPr>
@@ -8080,7 +10460,7 @@
       </p:sp>
       <p:sp>
         <p:nvSpPr>
-          <p:cNvPr id="173" name="" descr="{&quot;isTemplate&quot;:true,&quot;type&quot;:&quot;text&quot;}"/>
+          <p:cNvPr id="244" name="" descr="{&quot;isTemplate&quot;:true,&quot;type&quot;:&quot;text&quot;}"/>
           <p:cNvSpPr txBox="1"/>
           <p:nvPr/>
         </p:nvSpPr>
@@ -8115,7 +10495,7 @@
       </p:sp>
       <p:sp>
         <p:nvSpPr>
-          <p:cNvPr id="174" name="" descr="{&quot;isTemplate&quot;:true,&quot;type&quot;:&quot;text&quot;}"/>
+          <p:cNvPr id="245" name="" descr="{&quot;isTemplate&quot;:true,&quot;type&quot;:&quot;text&quot;}"/>
           <p:cNvSpPr txBox="1"/>
           <p:nvPr/>
         </p:nvSpPr>
@@ -8170,7 +10550,7 @@
       </p:sp>
       <p:sp>
         <p:nvSpPr>
-          <p:cNvPr id="175" name=""/>
+          <p:cNvPr id="246" name=""/>
           <p:cNvSpPr/>
           <p:nvPr/>
         </p:nvSpPr>
@@ -8205,15 +10585,12 @@
         </p:spPr>
         <p:txBody>
           <a:bodyPr/>
-          <a:p>
-            <a:pPr/>
-            <a:endParaRPr/>
-          </a:p>
-        </p:txBody>
-      </p:sp>
-      <p:sp>
-        <p:nvSpPr>
-          <p:cNvPr id="176" name=""/>
+          <a:p/>
+        </p:txBody>
+      </p:sp>
+      <p:sp>
+        <p:nvSpPr>
+          <p:cNvPr id="247" name=""/>
           <p:cNvSpPr/>
           <p:nvPr/>
         </p:nvSpPr>
@@ -8234,15 +10611,12 @@
         </p:spPr>
         <p:txBody>
           <a:bodyPr/>
-          <a:p>
-            <a:pPr/>
-            <a:endParaRPr/>
-          </a:p>
-        </p:txBody>
-      </p:sp>
-      <p:sp>
-        <p:nvSpPr>
-          <p:cNvPr id="177" name="" descr="{&quot;isTemplate&quot;:true,&quot;type&quot;:&quot;text&quot;}"/>
+          <a:p/>
+        </p:txBody>
+      </p:sp>
+      <p:sp>
+        <p:nvSpPr>
+          <p:cNvPr id="248" name="" descr="{&quot;isTemplate&quot;:true,&quot;type&quot;:&quot;text&quot;}"/>
           <p:cNvSpPr txBox="1"/>
           <p:nvPr/>
         </p:nvSpPr>
@@ -8277,7 +10651,7 @@
       </p:sp>
       <p:sp>
         <p:nvSpPr>
-          <p:cNvPr id="178" name="" descr="{&quot;isTemplate&quot;:true,&quot;type&quot;:&quot;text&quot;}"/>
+          <p:cNvPr id="249" name="" descr="{&quot;isTemplate&quot;:true,&quot;type&quot;:&quot;text&quot;}"/>
           <p:cNvSpPr txBox="1"/>
           <p:nvPr/>
         </p:nvSpPr>
@@ -8312,7 +10686,7 @@
       </p:sp>
       <p:sp>
         <p:nvSpPr>
-          <p:cNvPr id="179" name="" descr="{&quot;isTemplate&quot;:true,&quot;type&quot;:&quot;text&quot;}"/>
+          <p:cNvPr id="250" name="" descr="{&quot;isTemplate&quot;:true,&quot;type&quot;:&quot;text&quot;}"/>
           <p:cNvSpPr txBox="1"/>
           <p:nvPr/>
         </p:nvSpPr>
@@ -8387,7 +10761,7 @@
       </p:sp>
       <p:sp>
         <p:nvSpPr>
-          <p:cNvPr id="180" name=""/>
+          <p:cNvPr id="251" name=""/>
           <p:cNvSpPr/>
           <p:nvPr/>
         </p:nvSpPr>
@@ -8422,15 +10796,12 @@
         </p:spPr>
         <p:txBody>
           <a:bodyPr/>
-          <a:p>
-            <a:pPr/>
-            <a:endParaRPr/>
-          </a:p>
-        </p:txBody>
-      </p:sp>
-      <p:sp>
-        <p:nvSpPr>
-          <p:cNvPr id="181" name=""/>
+          <a:p/>
+        </p:txBody>
+      </p:sp>
+      <p:sp>
+        <p:nvSpPr>
+          <p:cNvPr id="252" name=""/>
           <p:cNvSpPr/>
           <p:nvPr/>
         </p:nvSpPr>
@@ -8451,15 +10822,12 @@
         </p:spPr>
         <p:txBody>
           <a:bodyPr/>
-          <a:p>
-            <a:pPr/>
-            <a:endParaRPr/>
-          </a:p>
-        </p:txBody>
-      </p:sp>
-      <p:sp>
-        <p:nvSpPr>
-          <p:cNvPr id="182" name="" descr="{&quot;isTemplate&quot;:true,&quot;type&quot;:&quot;text&quot;}"/>
+          <a:p/>
+        </p:txBody>
+      </p:sp>
+      <p:sp>
+        <p:nvSpPr>
+          <p:cNvPr id="253" name="" descr="{&quot;isTemplate&quot;:true,&quot;type&quot;:&quot;text&quot;}"/>
           <p:cNvSpPr txBox="1"/>
           <p:nvPr/>
         </p:nvSpPr>
@@ -8494,7 +10862,7 @@
       </p:sp>
       <p:sp>
         <p:nvSpPr>
-          <p:cNvPr id="183" name="" descr="{&quot;isTemplate&quot;:true,&quot;type&quot;:&quot;text&quot;}"/>
+          <p:cNvPr id="254" name="" descr="{&quot;isTemplate&quot;:true,&quot;type&quot;:&quot;text&quot;}"/>
           <p:cNvSpPr txBox="1"/>
           <p:nvPr/>
         </p:nvSpPr>
@@ -8529,7 +10897,7 @@
       </p:sp>
       <p:sp>
         <p:nvSpPr>
-          <p:cNvPr id="184" name="" descr="{&quot;isTemplate&quot;:true,&quot;type&quot;:&quot;text&quot;}"/>
+          <p:cNvPr id="255" name="" descr="{&quot;isTemplate&quot;:true,&quot;type&quot;:&quot;text&quot;}"/>
           <p:cNvSpPr txBox="1"/>
           <p:nvPr/>
         </p:nvSpPr>
@@ -8604,7 +10972,7 @@
       </p:sp>
       <p:sp>
         <p:nvSpPr>
-          <p:cNvPr id="185" name=""/>
+          <p:cNvPr id="256" name=""/>
           <p:cNvSpPr/>
           <p:nvPr/>
         </p:nvSpPr>
@@ -8639,15 +11007,12 @@
         </p:spPr>
         <p:txBody>
           <a:bodyPr/>
-          <a:p>
-            <a:pPr/>
-            <a:endParaRPr/>
-          </a:p>
-        </p:txBody>
-      </p:sp>
-      <p:sp>
-        <p:nvSpPr>
-          <p:cNvPr id="186" name=""/>
+          <a:p/>
+        </p:txBody>
+      </p:sp>
+      <p:sp>
+        <p:nvSpPr>
+          <p:cNvPr id="257" name=""/>
           <p:cNvSpPr/>
           <p:nvPr/>
         </p:nvSpPr>
@@ -8668,15 +11033,12 @@
         </p:spPr>
         <p:txBody>
           <a:bodyPr/>
-          <a:p>
-            <a:pPr/>
-            <a:endParaRPr/>
-          </a:p>
-        </p:txBody>
-      </p:sp>
-      <p:sp>
-        <p:nvSpPr>
-          <p:cNvPr id="187" name="" descr="{&quot;isTemplate&quot;:true,&quot;type&quot;:&quot;text&quot;}"/>
+          <a:p/>
+        </p:txBody>
+      </p:sp>
+      <p:sp>
+        <p:nvSpPr>
+          <p:cNvPr id="258" name="" descr="{&quot;isTemplate&quot;:true,&quot;type&quot;:&quot;text&quot;}"/>
           <p:cNvSpPr txBox="1"/>
           <p:nvPr/>
         </p:nvSpPr>
@@ -8711,7 +11073,7 @@
       </p:sp>
       <p:sp>
         <p:nvSpPr>
-          <p:cNvPr id="188" name="" descr="{&quot;isTemplate&quot;:true,&quot;type&quot;:&quot;text&quot;}"/>
+          <p:cNvPr id="259" name="" descr="{&quot;isTemplate&quot;:true,&quot;type&quot;:&quot;text&quot;}"/>
           <p:cNvSpPr txBox="1"/>
           <p:nvPr/>
         </p:nvSpPr>
@@ -8746,7 +11108,7 @@
       </p:sp>
       <p:sp>
         <p:nvSpPr>
-          <p:cNvPr id="189" name="" descr="{&quot;isTemplate&quot;:true,&quot;type&quot;:&quot;text&quot;}"/>
+          <p:cNvPr id="260" name="" descr="{&quot;isTemplate&quot;:true,&quot;type&quot;:&quot;text&quot;}"/>
           <p:cNvSpPr txBox="1"/>
           <p:nvPr/>
         </p:nvSpPr>
@@ -8849,7 +11211,7 @@
   <p:cSld>
     <p:spTree>
       <p:nvGrpSpPr>
-        <p:cNvPr id="190" name=""/>
+        <p:cNvPr id="261" name="" descr="&lt;Slide&gt;&#10;  &lt;Box style={{ width: '1280px', height: '720px', background: '#FFFFFF', flexDirection: 'row', alignItems: 'center' }}&gt;&#10;    {/* 左侧大数字 */}&#10;    &lt;Box style={{ width: 360, height: 720, background: '#F0F5FC', alignItems: 'center', justifyContent: 'center' }}&gt;&#10;      &lt;Text style={{ color: '#0E3F8C', fontSize: 200, fontWeight: 'bold', lineHeight: 1 }}&gt;01&lt;/Text&gt;&#10;    &lt;/Box&gt;&#10;&#10;    {/* 右侧标题与要点 */}&#10;    &lt;Box style={{ flex: 1, flexDirection: 'column', paddingLeft: 72, paddingRight: 60, gap: 28 }}&gt;&#10;      &lt;Box style={{ width: 48, height: 4, background: '#3D7BD9', borderRadius: 2 }} /&gt;&#10;      &lt;Text style={{ color: '#1A2230', fontSize: 48, fontWeight: 'bold' }}&gt;选题背景与意义&lt;/Text&gt;&#10;      &lt;Text style={{ color: '#8B97A8', fontSize: 20, letterSpacing: 1 }}&gt;研究意义 · 国内外现状 · 选题价值&lt;/Text&gt;&#10;&#10;      &lt;Box style={{ flexDirection: 'column', gap: 18, marginTop: 12 }}&gt;&#10;        {[&#10;          '机械加工工艺知识高度依赖人工经验，手册检索效率低',&#10;          '工艺知识传承困难，标准更新不及时',&#10;          '通用大模型直接生成参数存在幻觉与不可追溯问题',&#10;        ].map((item, idx) =&gt; (&#10;          &lt;Box key={idx} style={{ flexDirection: 'row', alignItems: 'flex-start', gap: 16 }}&gt;&#10;            &lt;Box style={{ width: 8, height: 8, background: '#1E4FA8', borderRadius: 4, marginTop: 10 }} /&gt;&#10;            &lt;Text style={{ color: '#4A5568', fontSize: 22, lineHeight: 1.5 }}&gt;{item}&lt;/Text&gt;&#10;          &lt;/Box&gt;&#10;        ))}&#10;      &lt;/Box&gt;&#10;    &lt;/Box&gt;&#10;  &lt;/Box&gt;&#10;&lt;/Slide&gt;&#10;"/>
         <p:cNvGrpSpPr/>
         <p:nvPr/>
       </p:nvGrpSpPr>
@@ -8863,7 +11225,7 @@
       </p:grpSpPr>
       <p:sp>
         <p:nvSpPr>
-          <p:cNvPr id="191" name=""/>
+          <p:cNvPr id="262" name=""/>
           <p:cNvSpPr/>
           <p:nvPr/>
         </p:nvSpPr>
@@ -8882,15 +11244,12 @@
         </p:spPr>
         <p:txBody>
           <a:bodyPr/>
-          <a:p>
-            <a:pPr/>
-            <a:endParaRPr/>
-          </a:p>
-        </p:txBody>
-      </p:sp>
-      <p:sp>
-        <p:nvSpPr>
-          <p:cNvPr id="192" name=""/>
+          <a:p/>
+        </p:txBody>
+      </p:sp>
+      <p:sp>
+        <p:nvSpPr>
+          <p:cNvPr id="263" name=""/>
           <p:cNvSpPr/>
           <p:nvPr/>
         </p:nvSpPr>
@@ -8909,15 +11268,12 @@
         </p:spPr>
         <p:txBody>
           <a:bodyPr/>
-          <a:p>
-            <a:pPr/>
-            <a:endParaRPr/>
-          </a:p>
-        </p:txBody>
-      </p:sp>
-      <p:sp>
-        <p:nvSpPr>
-          <p:cNvPr id="193" name="" descr="{&quot;isTemplate&quot;:true,&quot;type&quot;:&quot;text&quot;}"/>
+          <a:p/>
+        </p:txBody>
+      </p:sp>
+      <p:sp>
+        <p:nvSpPr>
+          <p:cNvPr id="264" name="" descr="{&quot;isTemplate&quot;:true,&quot;type&quot;:&quot;text&quot;}"/>
           <p:cNvSpPr txBox="1"/>
           <p:nvPr/>
         </p:nvSpPr>
@@ -8952,7 +11308,7 @@
       </p:sp>
       <p:sp>
         <p:nvSpPr>
-          <p:cNvPr id="194" name=""/>
+          <p:cNvPr id="265" name=""/>
           <p:cNvSpPr/>
           <p:nvPr/>
         </p:nvSpPr>
@@ -8973,15 +11329,12 @@
         </p:spPr>
         <p:txBody>
           <a:bodyPr/>
-          <a:p>
-            <a:pPr/>
-            <a:endParaRPr/>
-          </a:p>
-        </p:txBody>
-      </p:sp>
-      <p:sp>
-        <p:nvSpPr>
-          <p:cNvPr id="195" name="" descr="{&quot;isTemplate&quot;:true,&quot;type&quot;:&quot;text&quot;}"/>
+          <a:p/>
+        </p:txBody>
+      </p:sp>
+      <p:sp>
+        <p:nvSpPr>
+          <p:cNvPr id="266" name="" descr="{&quot;isTemplate&quot;:true,&quot;type&quot;:&quot;text&quot;}"/>
           <p:cNvSpPr txBox="1"/>
           <p:nvPr/>
         </p:nvSpPr>
@@ -9016,7 +11369,7 @@
       </p:sp>
       <p:sp>
         <p:nvSpPr>
-          <p:cNvPr id="196" name="" descr="{&quot;isTemplate&quot;:true,&quot;type&quot;:&quot;text&quot;}"/>
+          <p:cNvPr id="267" name="" descr="{&quot;isTemplate&quot;:true,&quot;type&quot;:&quot;text&quot;}"/>
           <p:cNvSpPr txBox="1"/>
           <p:nvPr/>
         </p:nvSpPr>
@@ -9091,7 +11444,7 @@
       </p:sp>
       <p:sp>
         <p:nvSpPr>
-          <p:cNvPr id="197" name=""/>
+          <p:cNvPr id="268" name=""/>
           <p:cNvSpPr/>
           <p:nvPr/>
         </p:nvSpPr>
@@ -9112,15 +11465,12 @@
         </p:spPr>
         <p:txBody>
           <a:bodyPr/>
-          <a:p>
-            <a:pPr/>
-            <a:endParaRPr/>
-          </a:p>
-        </p:txBody>
-      </p:sp>
-      <p:sp>
-        <p:nvSpPr>
-          <p:cNvPr id="198" name="" descr="{&quot;isTemplate&quot;:true,&quot;type&quot;:&quot;text&quot;}"/>
+          <a:p/>
+        </p:txBody>
+      </p:sp>
+      <p:sp>
+        <p:nvSpPr>
+          <p:cNvPr id="269" name="" descr="{&quot;isTemplate&quot;:true,&quot;type&quot;:&quot;text&quot;}"/>
           <p:cNvSpPr txBox="1"/>
           <p:nvPr/>
         </p:nvSpPr>
@@ -9155,7 +11505,7 @@
       </p:sp>
       <p:sp>
         <p:nvSpPr>
-          <p:cNvPr id="199" name=""/>
+          <p:cNvPr id="270" name=""/>
           <p:cNvSpPr/>
           <p:nvPr/>
         </p:nvSpPr>
@@ -9176,15 +11526,12 @@
         </p:spPr>
         <p:txBody>
           <a:bodyPr/>
-          <a:p>
-            <a:pPr/>
-            <a:endParaRPr/>
-          </a:p>
-        </p:txBody>
-      </p:sp>
-      <p:sp>
-        <p:nvSpPr>
-          <p:cNvPr id="200" name="" descr="{&quot;isTemplate&quot;:true,&quot;type&quot;:&quot;text&quot;}"/>
+          <a:p/>
+        </p:txBody>
+      </p:sp>
+      <p:sp>
+        <p:nvSpPr>
+          <p:cNvPr id="271" name="" descr="{&quot;isTemplate&quot;:true,&quot;type&quot;:&quot;text&quot;}"/>
           <p:cNvSpPr txBox="1"/>
           <p:nvPr/>
         </p:nvSpPr>
@@ -9219,7 +11566,7 @@
       </p:sp>
       <p:sp>
         <p:nvSpPr>
-          <p:cNvPr id="201" name=""/>
+          <p:cNvPr id="272" name=""/>
           <p:cNvSpPr/>
           <p:nvPr/>
         </p:nvSpPr>
@@ -9240,15 +11587,12 @@
         </p:spPr>
         <p:txBody>
           <a:bodyPr/>
-          <a:p>
-            <a:pPr/>
-            <a:endParaRPr/>
-          </a:p>
-        </p:txBody>
-      </p:sp>
-      <p:sp>
-        <p:nvSpPr>
-          <p:cNvPr id="202" name="" descr="{&quot;isTemplate&quot;:true,&quot;type&quot;:&quot;text&quot;}"/>
+          <a:p/>
+        </p:txBody>
+      </p:sp>
+      <p:sp>
+        <p:nvSpPr>
+          <p:cNvPr id="273" name="" descr="{&quot;isTemplate&quot;:true,&quot;type&quot;:&quot;text&quot;}"/>
           <p:cNvSpPr txBox="1"/>
           <p:nvPr/>
         </p:nvSpPr>
@@ -9291,7 +11635,7 @@
   <p:cSld>
     <p:spTree>
       <p:nvGrpSpPr>
-        <p:cNvPr id="203" name=""/>
+        <p:cNvPr id="274" name="" descr="&lt;Slide&gt;&#10;  &lt;Box style={{ width: '1280px', height: '720px', background: '#FFFFFF', flexDirection: 'column' }}&gt;&#10;    {/* 页眉 */}&#10;    &lt;Box style={{ height: 72, background: '#1E4FA8', flexDirection: 'row', alignItems: 'center', justifyContent: 'space-between', paddingLeft: 40, paddingRight: 40 }}&gt;&#10;      &lt;Text style={{ color: '#FFFFFF', fontSize: 16 }}&gt;基于 RAG 的轻量级企业工艺生成系统&lt;/Text&gt;&#10;      &lt;Text style={{ color: 'rgba(255,255,255,0.85)', fontSize: 14 }}&gt;选题背景&lt;/Text&gt;&#10;    &lt;/Box&gt;&#10;&#10;    {/* 主标题 */}&#10;    &lt;Box style={{ paddingLeft: 40, paddingRight: 40, paddingTop: 28, paddingBottom: 12 }}&gt;&#10;      &lt;Text style={{ color: '#1A2230', fontSize: 34, fontWeight: 'bold' }}&gt;通用大模型直接生成工艺参数的三大痛点&lt;/Text&gt;&#10;    &lt;/Box&gt;&#10;&#10;    {/* 非对称双栏：左 55% 痛点，右 40% 解法 */}&#10;    &lt;Box style={{ flex: 1, flexDirection: 'row', paddingLeft: 40, paddingRight: 40, gap: 36, paddingBottom: 20 }}&gt;&#10;      {/* 左：三大痛点 */}&#10;      &lt;Box style={{ flex: 1.4, flexDirection: 'column', gap: 20 }}&gt;&#10;        {[&#10;          { n: '01', t: '知识覆盖不全', d: '训练数据缺乏企业/行业内部的专业工艺资料，关键参数缺失' },&#10;          { n: '02', t: '幻觉 · 安全风险', d: '模型&quot;一本正经地编造&quot;切削参数，错误参数可能致刀具崩损、零件报废' },&#10;          { n: '03', t: '不可追溯', d: '生成结果无来源依据，无法核对，难以满足工程可验证、可担责要求' },&#10;        ].map((item) =&gt; (&#10;          &lt;Box key={item.n} style={{ flexDirection: 'row', gap: 20, padding: 22, background: '#F7F9FC', borderRadius: 10, border: '1px solid #E5E7EB', alignItems: 'flex-start' }}&gt;&#10;            &lt;Box style={{ width: 46, height: 46, background: '#1E4FA8', borderRadius: 8, alignItems: 'center', justifyContent: 'center' }}&gt;&#10;              &lt;Text style={{ color: '#FFFFFF', fontSize: 20, fontWeight: 'bold' }}&gt;{item.n}&lt;/Text&gt;&#10;            &lt;/Box&gt;&#10;            &lt;Box style={{ flex: 1, flexDirection: 'column', gap: 6 }}&gt;&#10;              &lt;Text style={{ color: '#1A2230', fontSize: 24, fontWeight: 'bold' }}&gt;{item.t}&lt;/Text&gt;&#10;              &lt;Text style={{ color: '#4A5568', fontSize: 18, lineHeight: 1.5 }}&gt;{item.d}&lt;/Text&gt;&#10;            &lt;/Box&gt;&#10;          &lt;/Box&gt;&#10;        ))}&#10;      &lt;/Box&gt;&#10;&#10;      {/* 右：RAG 解法 */}&#10;      &lt;Box style={{ flex: 1, flexDirection: 'column', justifyContent: 'center', padding: 28, background: '#0E3F8C', borderRadius: 12 }}&gt;&#10;        &lt;Text style={{ color: '#8FB3E8', fontSize: 16, letterSpacing: 2 }}&gt;我们的方案&lt;/Text&gt;&#10;        &lt;Text style={{ color: '#FFFFFF', fontSize: 30, fontWeight: 'bold', marginTop: 12, lineHeight: 1.4 }}&gt;&#10;          检索增强生成（RAG）&#10;        &lt;/Text&gt;&#10;        &lt;Text style={{ color: '#D6E4F7', fontSize: 20, lineHeight: 1.6, marginTop: 16 }}&gt;&#10;          先检索、后生成，让模型基于权威工艺资料作答，从源头缓解幻觉与不可追溯问题。&#10;        &lt;/Text&gt;&#10;        &lt;Box style={{ flexDirection: 'row', alignItems: 'center', gap: 12, marginTop: 24 }}&gt;&#10;          &lt;Box style={{ flex: 1, height: 4, background: '#3D7BD9', borderRadius: 2 }} /&gt;&#10;          &lt;Text style={{ color: '#8FB3E8', fontSize: 14 }}&gt;对症下药&lt;/Text&gt;&#10;        &lt;/Box&gt;&#10;      &lt;/Box&gt;&#10;    &lt;/Box&gt;&#10;&#10;    {/* 页脚 */}&#10;    &lt;Box style={{ height: 40, flexDirection: 'row', alignItems: 'center', justifyContent: 'space-between', paddingLeft: 40, paddingRight: 40 }}&gt;&#10;      &lt;Text style={{ color: '#8B97A8', fontSize: 14 }}&gt;中国科学技术大学软件学院&lt;/Text&gt;&#10;      &lt;Text style={{ color: '#1E4FA8', fontSize: 16, fontWeight: 'bold' }}&gt;04 / 17&lt;/Text&gt;&#10;    &lt;/Box&gt;&#10;  &lt;/Box&gt;&#10;&lt;/Slide&gt;&#10;"/>
         <p:cNvGrpSpPr/>
         <p:nvPr/>
       </p:nvGrpSpPr>
@@ -9305,7 +11649,7 @@
       </p:grpSpPr>
       <p:sp>
         <p:nvSpPr>
-          <p:cNvPr id="204" name=""/>
+          <p:cNvPr id="275" name=""/>
           <p:cNvSpPr/>
           <p:nvPr/>
         </p:nvSpPr>
@@ -9324,15 +11668,12 @@
         </p:spPr>
         <p:txBody>
           <a:bodyPr/>
-          <a:p>
-            <a:pPr/>
-            <a:endParaRPr/>
-          </a:p>
-        </p:txBody>
-      </p:sp>
-      <p:sp>
-        <p:nvSpPr>
-          <p:cNvPr id="205" name=""/>
+          <a:p/>
+        </p:txBody>
+      </p:sp>
+      <p:sp>
+        <p:nvSpPr>
+          <p:cNvPr id="276" name=""/>
           <p:cNvSpPr/>
           <p:nvPr/>
         </p:nvSpPr>
@@ -9351,15 +11692,12 @@
         </p:spPr>
         <p:txBody>
           <a:bodyPr/>
-          <a:p>
-            <a:pPr/>
-            <a:endParaRPr/>
-          </a:p>
-        </p:txBody>
-      </p:sp>
-      <p:sp>
-        <p:nvSpPr>
-          <p:cNvPr id="206" name="" descr="{&quot;isTemplate&quot;:true,&quot;type&quot;:&quot;text&quot;}"/>
+          <a:p/>
+        </p:txBody>
+      </p:sp>
+      <p:sp>
+        <p:nvSpPr>
+          <p:cNvPr id="277" name="" descr="{&quot;isTemplate&quot;:true,&quot;type&quot;:&quot;text&quot;}"/>
           <p:cNvSpPr txBox="1"/>
           <p:nvPr/>
         </p:nvSpPr>
@@ -9414,7 +11752,7 @@
       </p:sp>
       <p:sp>
         <p:nvSpPr>
-          <p:cNvPr id="207" name="" descr="{&quot;isTemplate&quot;:true,&quot;type&quot;:&quot;text&quot;}"/>
+          <p:cNvPr id="278" name="" descr="{&quot;isTemplate&quot;:true,&quot;type&quot;:&quot;text&quot;}"/>
           <p:cNvSpPr txBox="1"/>
           <p:nvPr/>
         </p:nvSpPr>
@@ -9451,7 +11789,7 @@
       </p:sp>
       <p:sp>
         <p:nvSpPr>
-          <p:cNvPr id="208" name="" descr="{&quot;isTemplate&quot;:true,&quot;type&quot;:&quot;text&quot;}"/>
+          <p:cNvPr id="279" name="" descr="{&quot;isTemplate&quot;:true,&quot;type&quot;:&quot;text&quot;}"/>
           <p:cNvSpPr txBox="1"/>
           <p:nvPr/>
         </p:nvSpPr>
@@ -9486,7 +11824,7 @@
       </p:sp>
       <p:sp>
         <p:nvSpPr>
-          <p:cNvPr id="209" name=""/>
+          <p:cNvPr id="280" name=""/>
           <p:cNvSpPr/>
           <p:nvPr/>
         </p:nvSpPr>
@@ -9512,15 +11850,12 @@
         </p:spPr>
         <p:txBody>
           <a:bodyPr/>
-          <a:p>
-            <a:pPr/>
-            <a:endParaRPr/>
-          </a:p>
-        </p:txBody>
-      </p:sp>
-      <p:sp>
-        <p:nvSpPr>
-          <p:cNvPr id="210" name=""/>
+          <a:p/>
+        </p:txBody>
+      </p:sp>
+      <p:sp>
+        <p:nvSpPr>
+          <p:cNvPr id="281" name=""/>
           <p:cNvSpPr/>
           <p:nvPr/>
         </p:nvSpPr>
@@ -9541,15 +11876,12 @@
         </p:spPr>
         <p:txBody>
           <a:bodyPr/>
-          <a:p>
-            <a:pPr/>
-            <a:endParaRPr/>
-          </a:p>
-        </p:txBody>
-      </p:sp>
-      <p:sp>
-        <p:nvSpPr>
-          <p:cNvPr id="211" name="" descr="{&quot;isTemplate&quot;:true,&quot;type&quot;:&quot;text&quot;}"/>
+          <a:p/>
+        </p:txBody>
+      </p:sp>
+      <p:sp>
+        <p:nvSpPr>
+          <p:cNvPr id="282" name="" descr="{&quot;isTemplate&quot;:true,&quot;type&quot;:&quot;text&quot;}"/>
           <p:cNvSpPr txBox="1"/>
           <p:nvPr/>
         </p:nvSpPr>
@@ -9584,7 +11916,7 @@
       </p:sp>
       <p:sp>
         <p:nvSpPr>
-          <p:cNvPr id="212" name="" descr="{&quot;isTemplate&quot;:true,&quot;type&quot;:&quot;text&quot;}"/>
+          <p:cNvPr id="283" name="" descr="{&quot;isTemplate&quot;:true,&quot;type&quot;:&quot;text&quot;}"/>
           <p:cNvSpPr txBox="1"/>
           <p:nvPr/>
         </p:nvSpPr>
@@ -9619,7 +11951,7 @@
       </p:sp>
       <p:sp>
         <p:nvSpPr>
-          <p:cNvPr id="213" name="" descr="{&quot;isTemplate&quot;:true,&quot;type&quot;:&quot;text&quot;}"/>
+          <p:cNvPr id="284" name="" descr="{&quot;isTemplate&quot;:true,&quot;type&quot;:&quot;text&quot;}"/>
           <p:cNvSpPr txBox="1"/>
           <p:nvPr/>
         </p:nvSpPr>
@@ -9674,7 +12006,7 @@
       </p:sp>
       <p:sp>
         <p:nvSpPr>
-          <p:cNvPr id="214" name=""/>
+          <p:cNvPr id="285" name=""/>
           <p:cNvSpPr/>
           <p:nvPr/>
         </p:nvSpPr>
@@ -9700,15 +12032,12 @@
         </p:spPr>
         <p:txBody>
           <a:bodyPr/>
-          <a:p>
-            <a:pPr/>
-            <a:endParaRPr/>
-          </a:p>
-        </p:txBody>
-      </p:sp>
-      <p:sp>
-        <p:nvSpPr>
-          <p:cNvPr id="215" name=""/>
+          <a:p/>
+        </p:txBody>
+      </p:sp>
+      <p:sp>
+        <p:nvSpPr>
+          <p:cNvPr id="286" name=""/>
           <p:cNvSpPr/>
           <p:nvPr/>
         </p:nvSpPr>
@@ -9729,15 +12058,12 @@
         </p:spPr>
         <p:txBody>
           <a:bodyPr/>
-          <a:p>
-            <a:pPr/>
-            <a:endParaRPr/>
-          </a:p>
-        </p:txBody>
-      </p:sp>
-      <p:sp>
-        <p:nvSpPr>
-          <p:cNvPr id="216" name="" descr="{&quot;isTemplate&quot;:true,&quot;type&quot;:&quot;text&quot;}"/>
+          <a:p/>
+        </p:txBody>
+      </p:sp>
+      <p:sp>
+        <p:nvSpPr>
+          <p:cNvPr id="287" name="" descr="{&quot;isTemplate&quot;:true,&quot;type&quot;:&quot;text&quot;}"/>
           <p:cNvSpPr txBox="1"/>
           <p:nvPr/>
         </p:nvSpPr>
@@ -9772,7 +12098,7 @@
       </p:sp>
       <p:sp>
         <p:nvSpPr>
-          <p:cNvPr id="217" name="" descr="{&quot;isTemplate&quot;:true,&quot;type&quot;:&quot;text&quot;}"/>
+          <p:cNvPr id="288" name="" descr="{&quot;isTemplate&quot;:true,&quot;type&quot;:&quot;text&quot;}"/>
           <p:cNvSpPr txBox="1"/>
           <p:nvPr/>
         </p:nvSpPr>
@@ -9827,7 +12153,7 @@
       </p:sp>
       <p:sp>
         <p:nvSpPr>
-          <p:cNvPr id="218" name="" descr="{&quot;isTemplate&quot;:true,&quot;type&quot;:&quot;text&quot;}"/>
+          <p:cNvPr id="289" name="" descr="{&quot;isTemplate&quot;:true,&quot;type&quot;:&quot;text&quot;}"/>
           <p:cNvSpPr txBox="1"/>
           <p:nvPr/>
         </p:nvSpPr>
@@ -9902,7 +12228,7 @@
       </p:sp>
       <p:sp>
         <p:nvSpPr>
-          <p:cNvPr id="219" name=""/>
+          <p:cNvPr id="290" name=""/>
           <p:cNvSpPr/>
           <p:nvPr/>
         </p:nvSpPr>
@@ -9928,15 +12254,12 @@
         </p:spPr>
         <p:txBody>
           <a:bodyPr/>
-          <a:p>
-            <a:pPr/>
-            <a:endParaRPr/>
-          </a:p>
-        </p:txBody>
-      </p:sp>
-      <p:sp>
-        <p:nvSpPr>
-          <p:cNvPr id="220" name=""/>
+          <a:p/>
+        </p:txBody>
+      </p:sp>
+      <p:sp>
+        <p:nvSpPr>
+          <p:cNvPr id="291" name=""/>
           <p:cNvSpPr/>
           <p:nvPr/>
         </p:nvSpPr>
@@ -9957,15 +12280,12 @@
         </p:spPr>
         <p:txBody>
           <a:bodyPr/>
-          <a:p>
-            <a:pPr/>
-            <a:endParaRPr/>
-          </a:p>
-        </p:txBody>
-      </p:sp>
-      <p:sp>
-        <p:nvSpPr>
-          <p:cNvPr id="221" name="" descr="{&quot;isTemplate&quot;:true,&quot;type&quot;:&quot;text&quot;}"/>
+          <a:p/>
+        </p:txBody>
+      </p:sp>
+      <p:sp>
+        <p:nvSpPr>
+          <p:cNvPr id="292" name="" descr="{&quot;isTemplate&quot;:true,&quot;type&quot;:&quot;text&quot;}"/>
           <p:cNvSpPr txBox="1"/>
           <p:nvPr/>
         </p:nvSpPr>
@@ -10000,7 +12320,7 @@
       </p:sp>
       <p:sp>
         <p:nvSpPr>
-          <p:cNvPr id="222" name="" descr="{&quot;isTemplate&quot;:true,&quot;type&quot;:&quot;text&quot;}"/>
+          <p:cNvPr id="293" name="" descr="{&quot;isTemplate&quot;:true,&quot;type&quot;:&quot;text&quot;}"/>
           <p:cNvSpPr txBox="1"/>
           <p:nvPr/>
         </p:nvSpPr>
@@ -10035,7 +12355,7 @@
       </p:sp>
       <p:sp>
         <p:nvSpPr>
-          <p:cNvPr id="223" name="" descr="{&quot;isTemplate&quot;:true,&quot;type&quot;:&quot;text&quot;}"/>
+          <p:cNvPr id="294" name="" descr="{&quot;isTemplate&quot;:true,&quot;type&quot;:&quot;text&quot;}"/>
           <p:cNvSpPr txBox="1"/>
           <p:nvPr/>
         </p:nvSpPr>
@@ -10070,7 +12390,7 @@
       </p:sp>
       <p:sp>
         <p:nvSpPr>
-          <p:cNvPr id="224" name=""/>
+          <p:cNvPr id="295" name=""/>
           <p:cNvSpPr/>
           <p:nvPr/>
         </p:nvSpPr>
@@ -10091,15 +12411,12 @@
         </p:spPr>
         <p:txBody>
           <a:bodyPr/>
-          <a:p>
-            <a:pPr/>
-            <a:endParaRPr/>
-          </a:p>
-        </p:txBody>
-      </p:sp>
-      <p:sp>
-        <p:nvSpPr>
-          <p:cNvPr id="225" name="" descr="{&quot;isTemplate&quot;:true,&quot;type&quot;:&quot;text&quot;}"/>
+          <a:p/>
+        </p:txBody>
+      </p:sp>
+      <p:sp>
+        <p:nvSpPr>
+          <p:cNvPr id="296" name="" descr="{&quot;isTemplate&quot;:true,&quot;type&quot;:&quot;text&quot;}"/>
           <p:cNvSpPr txBox="1"/>
           <p:nvPr/>
         </p:nvSpPr>
@@ -10134,7 +12451,7 @@
       </p:sp>
       <p:sp>
         <p:nvSpPr>
-          <p:cNvPr id="226" name="" descr="{&quot;isTemplate&quot;:true,&quot;type&quot;:&quot;text&quot;}"/>
+          <p:cNvPr id="297" name="" descr="{&quot;isTemplate&quot;:true,&quot;type&quot;:&quot;text&quot;}"/>
           <p:cNvSpPr txBox="1"/>
           <p:nvPr/>
         </p:nvSpPr>
@@ -10189,7 +12506,7 @@
       </p:sp>
       <p:sp>
         <p:nvSpPr>
-          <p:cNvPr id="227" name="" descr="{&quot;isTemplate&quot;:true,&quot;type&quot;:&quot;text&quot;}"/>
+          <p:cNvPr id="298" name="" descr="{&quot;isTemplate&quot;:true,&quot;type&quot;:&quot;text&quot;}"/>
           <p:cNvSpPr txBox="1"/>
           <p:nvPr/>
         </p:nvSpPr>
@@ -10226,7 +12543,7 @@
       </p:sp>
       <p:sp>
         <p:nvSpPr>
-          <p:cNvPr id="228" name=""/>
+          <p:cNvPr id="299" name=""/>
           <p:cNvSpPr/>
           <p:nvPr/>
         </p:nvSpPr>
@@ -10247,15 +12564,12 @@
         </p:spPr>
         <p:txBody>
           <a:bodyPr/>
-          <a:p>
-            <a:pPr/>
-            <a:endParaRPr/>
-          </a:p>
-        </p:txBody>
-      </p:sp>
-      <p:sp>
-        <p:nvSpPr>
-          <p:cNvPr id="229" name="" descr="{&quot;isTemplate&quot;:true,&quot;type&quot;:&quot;text&quot;}"/>
+          <a:p/>
+        </p:txBody>
+      </p:sp>
+      <p:sp>
+        <p:nvSpPr>
+          <p:cNvPr id="300" name="" descr="{&quot;isTemplate&quot;:true,&quot;type&quot;:&quot;text&quot;}"/>
           <p:cNvSpPr txBox="1"/>
           <p:nvPr/>
         </p:nvSpPr>
@@ -10290,7 +12604,7 @@
       </p:sp>
       <p:sp>
         <p:nvSpPr>
-          <p:cNvPr id="230" name="" descr="{&quot;isTemplate&quot;:true,&quot;type&quot;:&quot;text&quot;}"/>
+          <p:cNvPr id="301" name="" descr="{&quot;isTemplate&quot;:true,&quot;type&quot;:&quot;text&quot;}"/>
           <p:cNvSpPr txBox="1"/>
           <p:nvPr/>
         </p:nvSpPr>
@@ -10325,7 +12639,7 @@
       </p:sp>
       <p:sp>
         <p:nvSpPr>
-          <p:cNvPr id="231" name="" descr="{&quot;isTemplate&quot;:true,&quot;type&quot;:&quot;text&quot;}"/>
+          <p:cNvPr id="302" name="" descr="{&quot;isTemplate&quot;:true,&quot;type&quot;:&quot;text&quot;}"/>
           <p:cNvSpPr txBox="1"/>
           <p:nvPr/>
         </p:nvSpPr>
@@ -10352,7 +12666,7 @@
                 <a:latin typeface="Microsoft YaHei"/>
                 <a:ea typeface="Microsoft YaHei"/>
               </a:rPr>
-              <a:t>04 / 15</a:t>
+              <a:t>04 / 17</a:t>
             </a:r>
             <a:endParaRPr/>
           </a:p>
@@ -10368,7 +12682,7 @@
   <p:cSld>
     <p:spTree>
       <p:nvGrpSpPr>
-        <p:cNvPr id="232" name=""/>
+        <p:cNvPr id="303" name="" descr="&lt;Slide&gt;&#10;  &lt;Box style={{ width: '1280px', height: '720px', background: '#FFFFFF', flexDirection: 'row', alignItems: 'center' }}&gt;&#10;    {/* 左侧大数字 */}&#10;    &lt;Box style={{ width: 360, height: 720, background: '#F0F5FC', alignItems: 'center', justifyContent: 'center' }}&gt;&#10;      &lt;Text style={{ color: '#0E3F8C', fontSize: 200, fontWeight: 'bold', lineHeight: 1 }}&gt;02&lt;/Text&gt;&#10;    &lt;/Box&gt;&#10;&#10;    {/* 右侧标题与要点 */}&#10;    &lt;Box style={{ flex: 1, flexDirection: 'column', paddingLeft: 72, paddingRight: 60, gap: 28 }}&gt;&#10;      &lt;Box style={{ width: 48, height: 4, background: '#3D7BD9', borderRadius: 2 }} /&gt;&#10;      &lt;Text style={{ color: '#1A2230', fontSize: 48, fontWeight: 'bold' }}&gt;项目目标与需求&lt;/Text&gt;&#10;      &lt;Text style={{ color: '#8B97A8', fontSize: 20, letterSpacing: 1 }}&gt;双链路定位 · 五大功能需求&lt;/Text&gt;&#10;&#10;      &lt;Box style={{ padding: 24, background: '#F7F9FC', borderRadius: 10, border: '1px solid #E5E7EB', marginTop: 12 }}&gt;&#10;        &lt;Text style={{ color: '#1A2230', fontSize: 24, lineHeight: 1.6, fontWeight: 'bold' }}&gt;&#10;          构建「离线建库 + 在线问答」的轻量级工艺生成系统&#10;        &lt;/Text&gt;&#10;        &lt;Text style={{ color: '#4A5568', fontSize: 20, lineHeight: 1.6, marginTop: 10 }}&gt;&#10;          把工艺手册中的参数转化为可检索、可溯源的知识，自动生成带引用、可核对的加工指令。&#10;        &lt;/Text&gt;&#10;      &lt;/Box&gt;&#10;    &lt;/Box&gt;&#10;  &lt;/Box&gt;&#10;&lt;/Slide&gt;&#10;"/>
         <p:cNvGrpSpPr/>
         <p:nvPr/>
       </p:nvGrpSpPr>
@@ -10382,7 +12696,7 @@
       </p:grpSpPr>
       <p:sp>
         <p:nvSpPr>
-          <p:cNvPr id="233" name=""/>
+          <p:cNvPr id="304" name=""/>
           <p:cNvSpPr/>
           <p:nvPr/>
         </p:nvSpPr>
@@ -10401,15 +12715,12 @@
         </p:spPr>
         <p:txBody>
           <a:bodyPr/>
-          <a:p>
-            <a:pPr/>
-            <a:endParaRPr/>
-          </a:p>
-        </p:txBody>
-      </p:sp>
-      <p:sp>
-        <p:nvSpPr>
-          <p:cNvPr id="234" name=""/>
+          <a:p/>
+        </p:txBody>
+      </p:sp>
+      <p:sp>
+        <p:nvSpPr>
+          <p:cNvPr id="305" name=""/>
           <p:cNvSpPr/>
           <p:nvPr/>
         </p:nvSpPr>
@@ -10428,15 +12739,12 @@
         </p:spPr>
         <p:txBody>
           <a:bodyPr/>
-          <a:p>
-            <a:pPr/>
-            <a:endParaRPr/>
-          </a:p>
-        </p:txBody>
-      </p:sp>
-      <p:sp>
-        <p:nvSpPr>
-          <p:cNvPr id="235" name="" descr="{&quot;isTemplate&quot;:true,&quot;type&quot;:&quot;text&quot;}"/>
+          <a:p/>
+        </p:txBody>
+      </p:sp>
+      <p:sp>
+        <p:nvSpPr>
+          <p:cNvPr id="306" name="" descr="{&quot;isTemplate&quot;:true,&quot;type&quot;:&quot;text&quot;}"/>
           <p:cNvSpPr txBox="1"/>
           <p:nvPr/>
         </p:nvSpPr>
@@ -10471,7 +12779,7 @@
       </p:sp>
       <p:sp>
         <p:nvSpPr>
-          <p:cNvPr id="236" name=""/>
+          <p:cNvPr id="307" name=""/>
           <p:cNvSpPr/>
           <p:nvPr/>
         </p:nvSpPr>
@@ -10492,15 +12800,12 @@
         </p:spPr>
         <p:txBody>
           <a:bodyPr/>
-          <a:p>
-            <a:pPr/>
-            <a:endParaRPr/>
-          </a:p>
-        </p:txBody>
-      </p:sp>
-      <p:sp>
-        <p:nvSpPr>
-          <p:cNvPr id="237" name="" descr="{&quot;isTemplate&quot;:true,&quot;type&quot;:&quot;text&quot;}"/>
+          <a:p/>
+        </p:txBody>
+      </p:sp>
+      <p:sp>
+        <p:nvSpPr>
+          <p:cNvPr id="308" name="" descr="{&quot;isTemplate&quot;:true,&quot;type&quot;:&quot;text&quot;}"/>
           <p:cNvSpPr txBox="1"/>
           <p:nvPr/>
         </p:nvSpPr>
@@ -10535,7 +12840,7 @@
       </p:sp>
       <p:sp>
         <p:nvSpPr>
-          <p:cNvPr id="238" name="" descr="{&quot;isTemplate&quot;:true,&quot;type&quot;:&quot;text&quot;}"/>
+          <p:cNvPr id="309" name="" descr="{&quot;isTemplate&quot;:true,&quot;type&quot;:&quot;text&quot;}"/>
           <p:cNvSpPr txBox="1"/>
           <p:nvPr/>
         </p:nvSpPr>
@@ -10590,7 +12895,7 @@
       </p:sp>
       <p:sp>
         <p:nvSpPr>
-          <p:cNvPr id="239" name=""/>
+          <p:cNvPr id="310" name=""/>
           <p:cNvSpPr/>
           <p:nvPr/>
         </p:nvSpPr>
@@ -10616,15 +12921,12 @@
         </p:spPr>
         <p:txBody>
           <a:bodyPr/>
-          <a:p>
-            <a:pPr/>
-            <a:endParaRPr/>
-          </a:p>
-        </p:txBody>
-      </p:sp>
-      <p:sp>
-        <p:nvSpPr>
-          <p:cNvPr id="240" name="" descr="{&quot;isTemplate&quot;:true,&quot;type&quot;:&quot;text&quot;}"/>
+          <a:p/>
+        </p:txBody>
+      </p:sp>
+      <p:sp>
+        <p:nvSpPr>
+          <p:cNvPr id="311" name="" descr="{&quot;isTemplate&quot;:true,&quot;type&quot;:&quot;text&quot;}"/>
           <p:cNvSpPr txBox="1"/>
           <p:nvPr/>
         </p:nvSpPr>
@@ -10679,7 +12981,7 @@
       </p:sp>
       <p:sp>
         <p:nvSpPr>
-          <p:cNvPr id="241" name="" descr="{&quot;isTemplate&quot;:true,&quot;type&quot;:&quot;text&quot;}"/>
+          <p:cNvPr id="312" name="" descr="{&quot;isTemplate&quot;:true,&quot;type&quot;:&quot;text&quot;}"/>
           <p:cNvSpPr txBox="1"/>
           <p:nvPr/>
         </p:nvSpPr>
@@ -10724,7 +13026,7 @@
   <p:cSld>
     <p:spTree>
       <p:nvGrpSpPr>
-        <p:cNvPr id="242" name=""/>
+        <p:cNvPr id="313" name="" descr="&lt;Slide&gt;&#10;  &lt;Box style={{ width: '1280px', height: '720px', background: '#FFFFFF', flexDirection: 'column' }}&gt;&#10;    {/* 页眉 */}&#10;    &lt;Box style={{ height: 72, background: '#1E4FA8', flexDirection: 'row', alignItems: 'center', justifyContent: 'space-between', paddingLeft: 40, paddingRight: 40 }}&gt;&#10;      &lt;Text style={{ color: '#FFFFFF', fontSize: 16 }}&gt;基于 RAG 的轻量级企业工艺生成系统&lt;/Text&gt;&#10;      &lt;Text style={{ color: 'rgba(255,255,255,0.85)', fontSize: 14 }}&gt;项目目标&lt;/Text&gt;&#10;    &lt;/Box&gt;&#10;&#10;    {/* 左标题栏 + 右内容 */}&#10;    &lt;Box style={{ flex: 1, flexDirection: 'row', paddingLeft: 40, paddingRight: 40, paddingTop: 28, paddingBottom: 16, gap: 40 }}&gt;&#10;      {/* 左标题栏 */}&#10;      &lt;Box style={{ width: 300, flexDirection: 'column', gap: 16, justifyContent: 'space-between' }}&gt;&#10;        &lt;Box style={{ flexDirection: 'column', gap: 16 }}&gt;&#10;          &lt;Box style={{ width: 48, height: 4, background: '#3D7BD9', borderRadius: 2 }} /&gt;&#10;          &lt;Text style={{ color: '#1A2230', fontSize: 34, fontWeight: 'bold', lineHeight: 1.3 }}&gt;五大功能需求&lt;/Text&gt;&#10;          &lt;Text style={{ color: '#8B97A8', fontSize: 16, lineHeight: 1.5 }}&gt;对应选题五条硬性要求，一条不落&lt;/Text&gt;&#10;          &lt;Box style={{ padding: 18, background: '#F0F5FC', borderRadius: 8, marginTop: 8 }}&gt;&#10;            &lt;Text style={{ color: '#1E4FA8', fontSize: 18, fontWeight: 'bold' }}&gt;覆盖完整 RAG 链路&lt;/Text&gt;&#10;            &lt;Text style={{ color: '#4A5568', fontSize: 15, lineHeight: 1.5, marginTop: 6 }}&gt;解析 → 检索 → 重排 → 生成 → 溯源 → 评估&lt;/Text&gt;&#10;          &lt;/Box&gt;&#10;        &lt;/Box&gt;&#10;        {/* 补充：核心价值小结，填满左侧下方 */}&#10;        &lt;Box style={{ padding: 18, background: '#0E3F8C', borderRadius: 8 }}&gt;&#10;          &lt;Text style={{ color: '#FFFFFF', fontSize: 18, fontWeight: 'bold' }}&gt;核心目标&lt;/Text&gt;&#10;          &lt;Text style={{ color: '#D6E4F7', fontSize: 15, lineHeight: 1.6, marginTop: 8 }}&gt;&#10;            生成的参数真实可用、可核对、可追溯，而非仅供演示的玩具 Demo。&#10;          &lt;/Text&gt;&#10;        &lt;/Box&gt;&#10;      &lt;/Box&gt;&#10;&#10;      {/* 右：五项功能卡片（纵向列表） */}&#10;      &lt;Box style={{ flex: 1, flexDirection: 'column', gap: 14 }}&gt;&#10;        {[&#10;          { n: '①', t: '文档格式解析', d: '解析工艺 PDF 的文字、表格、页码与版面结构' },&#10;          { n: '②', t: '稠密 + 稀疏混合召回', d: 'BGE-M3 稠密向量检索 + BM25 关键词检索，RRF 融合' },&#10;          { n: '③', t: '重排序模块', d: 'Cross-encoder（bge-reranker）二次精排，提升检索精度' },&#10;          { n: '④', t: '多轮对话 + 引用溯源', d: '上下文追问、查询改写；每条参数标注来源页码' },&#10;          { n: '⑤', t: '多文档测试（人工评估）', d: '多份文档构建测试集，人工评估准确率' },&#10;        ].map((item) =&gt; (&#10;          &lt;Box key={item.n} style={{ flexDirection: 'row', alignItems: 'center', gap: 20, padding: 16, background: '#F7F9FC', borderRadius: 10, border: '1px solid #E5E7EB' }}&gt;&#10;            &lt;Box style={{ width: 44, height: 44, background: '#1E4FA8', borderRadius: 22, alignItems: 'center', justifyContent: 'center' }}&gt;&#10;              &lt;Text style={{ color: '#FFFFFF', fontSize: 20, fontWeight: 'bold' }}&gt;{item.n}&lt;/Text&gt;&#10;            &lt;/Box&gt;&#10;            &lt;Box style={{ flex: 1, flexDirection: 'column', gap: 4 }}&gt;&#10;              &lt;Text style={{ color: '#1A2230', fontSize: 22, fontWeight: 'bold' }}&gt;{item.t}&lt;/Text&gt;&#10;              &lt;Text style={{ color: '#4A5568', fontSize: 16, lineHeight: 1.4 }}&gt;{item.d}&lt;/Text&gt;&#10;            &lt;/Box&gt;&#10;          &lt;/Box&gt;&#10;        ))}&#10;      &lt;/Box&gt;&#10;    &lt;/Box&gt;&#10;&#10;    {/* 页脚 */}&#10;    &lt;Box style={{ height: 40, flexDirection: 'row', alignItems: 'center', justifyContent: 'space-between', paddingLeft: 40, paddingRight: 40 }}&gt;&#10;      &lt;Text style={{ color: '#8B97A8', fontSize: 14 }}&gt;中国科学技术大学软件学院&lt;/Text&gt;&#10;      &lt;Text style={{ color: '#1E4FA8', fontSize: 16, fontWeight: 'bold' }}&gt;06 / 17&lt;/Text&gt;&#10;    &lt;/Box&gt;&#10;  &lt;/Box&gt;&#10;&lt;/Slide&gt;&#10;"/>
         <p:cNvGrpSpPr/>
         <p:nvPr/>
       </p:nvGrpSpPr>
@@ -10738,7 +13040,7 @@
       </p:grpSpPr>
       <p:sp>
         <p:nvSpPr>
-          <p:cNvPr id="243" name=""/>
+          <p:cNvPr id="314" name=""/>
           <p:cNvSpPr/>
           <p:nvPr/>
         </p:nvSpPr>
@@ -10757,15 +13059,12 @@
         </p:spPr>
         <p:txBody>
           <a:bodyPr/>
-          <a:p>
-            <a:pPr/>
-            <a:endParaRPr/>
-          </a:p>
-        </p:txBody>
-      </p:sp>
-      <p:sp>
-        <p:nvSpPr>
-          <p:cNvPr id="244" name=""/>
+          <a:p/>
+        </p:txBody>
+      </p:sp>
+      <p:sp>
+        <p:nvSpPr>
+          <p:cNvPr id="315" name=""/>
           <p:cNvSpPr/>
           <p:nvPr/>
         </p:nvSpPr>
@@ -10784,15 +13083,12 @@
         </p:spPr>
         <p:txBody>
           <a:bodyPr/>
-          <a:p>
-            <a:pPr/>
-            <a:endParaRPr/>
-          </a:p>
-        </p:txBody>
-      </p:sp>
-      <p:sp>
-        <p:nvSpPr>
-          <p:cNvPr id="245" name="" descr="{&quot;isTemplate&quot;:true,&quot;type&quot;:&quot;text&quot;}"/>
+          <a:p/>
+        </p:txBody>
+      </p:sp>
+      <p:sp>
+        <p:nvSpPr>
+          <p:cNvPr id="316" name="" descr="{&quot;isTemplate&quot;:true,&quot;type&quot;:&quot;text&quot;}"/>
           <p:cNvSpPr txBox="1"/>
           <p:nvPr/>
         </p:nvSpPr>
@@ -10847,7 +13143,7 @@
       </p:sp>
       <p:sp>
         <p:nvSpPr>
-          <p:cNvPr id="246" name="" descr="{&quot;isTemplate&quot;:true,&quot;type&quot;:&quot;text&quot;}"/>
+          <p:cNvPr id="317" name="" descr="{&quot;isTemplate&quot;:true,&quot;type&quot;:&quot;text&quot;}"/>
           <p:cNvSpPr txBox="1"/>
           <p:nvPr/>
         </p:nvSpPr>
@@ -10884,7 +13180,7 @@
       </p:sp>
       <p:sp>
         <p:nvSpPr>
-          <p:cNvPr id="247" name=""/>
+          <p:cNvPr id="318" name=""/>
           <p:cNvSpPr/>
           <p:nvPr/>
         </p:nvSpPr>
@@ -10905,15 +13201,12 @@
         </p:spPr>
         <p:txBody>
           <a:bodyPr/>
-          <a:p>
-            <a:pPr/>
-            <a:endParaRPr/>
-          </a:p>
-        </p:txBody>
-      </p:sp>
-      <p:sp>
-        <p:nvSpPr>
-          <p:cNvPr id="248" name="" descr="{&quot;isTemplate&quot;:true,&quot;type&quot;:&quot;text&quot;}"/>
+          <a:p/>
+        </p:txBody>
+      </p:sp>
+      <p:sp>
+        <p:nvSpPr>
+          <p:cNvPr id="319" name="" descr="{&quot;isTemplate&quot;:true,&quot;type&quot;:&quot;text&quot;}"/>
           <p:cNvSpPr txBox="1"/>
           <p:nvPr/>
         </p:nvSpPr>
@@ -10948,7 +13241,7 @@
       </p:sp>
       <p:sp>
         <p:nvSpPr>
-          <p:cNvPr id="249" name="" descr="{&quot;isTemplate&quot;:true,&quot;type&quot;:&quot;text&quot;}"/>
+          <p:cNvPr id="320" name="" descr="{&quot;isTemplate&quot;:true,&quot;type&quot;:&quot;text&quot;}"/>
           <p:cNvSpPr txBox="1"/>
           <p:nvPr/>
         </p:nvSpPr>
@@ -10983,7 +13276,7 @@
       </p:sp>
       <p:sp>
         <p:nvSpPr>
-          <p:cNvPr id="250" name=""/>
+          <p:cNvPr id="321" name=""/>
           <p:cNvSpPr/>
           <p:nvPr/>
         </p:nvSpPr>
@@ -11004,15 +13297,12 @@
         </p:spPr>
         <p:txBody>
           <a:bodyPr/>
-          <a:p>
-            <a:pPr/>
-            <a:endParaRPr/>
-          </a:p>
-        </p:txBody>
-      </p:sp>
-      <p:sp>
-        <p:nvSpPr>
-          <p:cNvPr id="251" name="" descr="{&quot;isTemplate&quot;:true,&quot;type&quot;:&quot;text&quot;}"/>
+          <a:p/>
+        </p:txBody>
+      </p:sp>
+      <p:sp>
+        <p:nvSpPr>
+          <p:cNvPr id="322" name="" descr="{&quot;isTemplate&quot;:true,&quot;type&quot;:&quot;text&quot;}"/>
           <p:cNvSpPr txBox="1"/>
           <p:nvPr/>
         </p:nvSpPr>
@@ -11067,7 +13357,7 @@
       </p:sp>
       <p:sp>
         <p:nvSpPr>
-          <p:cNvPr id="252" name="" descr="{&quot;isTemplate&quot;:true,&quot;type&quot;:&quot;text&quot;}"/>
+          <p:cNvPr id="323" name="" descr="{&quot;isTemplate&quot;:true,&quot;type&quot;:&quot;text&quot;}"/>
           <p:cNvSpPr txBox="1"/>
           <p:nvPr/>
         </p:nvSpPr>
@@ -11204,7 +13494,7 @@
       </p:sp>
       <p:sp>
         <p:nvSpPr>
-          <p:cNvPr id="253" name=""/>
+          <p:cNvPr id="324" name=""/>
           <p:cNvSpPr/>
           <p:nvPr/>
         </p:nvSpPr>
@@ -11225,15 +13515,12 @@
         </p:spPr>
         <p:txBody>
           <a:bodyPr/>
-          <a:p>
-            <a:pPr/>
-            <a:endParaRPr/>
-          </a:p>
-        </p:txBody>
-      </p:sp>
-      <p:sp>
-        <p:nvSpPr>
-          <p:cNvPr id="254" name="" descr="{&quot;isTemplate&quot;:true,&quot;type&quot;:&quot;text&quot;}"/>
+          <a:p/>
+        </p:txBody>
+      </p:sp>
+      <p:sp>
+        <p:nvSpPr>
+          <p:cNvPr id="325" name="" descr="{&quot;isTemplate&quot;:true,&quot;type&quot;:&quot;text&quot;}"/>
           <p:cNvSpPr txBox="1"/>
           <p:nvPr/>
         </p:nvSpPr>
@@ -11268,7 +13555,7 @@
       </p:sp>
       <p:sp>
         <p:nvSpPr>
-          <p:cNvPr id="255" name="" descr="{&quot;isTemplate&quot;:true,&quot;type&quot;:&quot;text&quot;}"/>
+          <p:cNvPr id="326" name="" descr="{&quot;isTemplate&quot;:true,&quot;type&quot;:&quot;text&quot;}"/>
           <p:cNvSpPr txBox="1"/>
           <p:nvPr/>
         </p:nvSpPr>
@@ -11325,7 +13612,7 @@
       </p:sp>
       <p:sp>
         <p:nvSpPr>
-          <p:cNvPr id="256" name=""/>
+          <p:cNvPr id="327" name=""/>
           <p:cNvSpPr/>
           <p:nvPr/>
         </p:nvSpPr>
@@ -11351,15 +13638,12 @@
         </p:spPr>
         <p:txBody>
           <a:bodyPr/>
-          <a:p>
-            <a:pPr/>
-            <a:endParaRPr/>
-          </a:p>
-        </p:txBody>
-      </p:sp>
-      <p:sp>
-        <p:nvSpPr>
-          <p:cNvPr id="257" name=""/>
+          <a:p/>
+        </p:txBody>
+      </p:sp>
+      <p:sp>
+        <p:nvSpPr>
+          <p:cNvPr id="328" name=""/>
           <p:cNvSpPr/>
           <p:nvPr/>
         </p:nvSpPr>
@@ -11380,15 +13664,12 @@
         </p:spPr>
         <p:txBody>
           <a:bodyPr/>
-          <a:p>
-            <a:pPr/>
-            <a:endParaRPr/>
-          </a:p>
-        </p:txBody>
-      </p:sp>
-      <p:sp>
-        <p:nvSpPr>
-          <p:cNvPr id="258" name="" descr="{&quot;isTemplate&quot;:true,&quot;type&quot;:&quot;text&quot;}"/>
+          <a:p/>
+        </p:txBody>
+      </p:sp>
+      <p:sp>
+        <p:nvSpPr>
+          <p:cNvPr id="329" name="" descr="{&quot;isTemplate&quot;:true,&quot;type&quot;:&quot;text&quot;}"/>
           <p:cNvSpPr txBox="1"/>
           <p:nvPr/>
         </p:nvSpPr>
@@ -11423,7 +13704,7 @@
       </p:sp>
       <p:sp>
         <p:nvSpPr>
-          <p:cNvPr id="259" name="" descr="{&quot;isTemplate&quot;:true,&quot;type&quot;:&quot;text&quot;}"/>
+          <p:cNvPr id="330" name="" descr="{&quot;isTemplate&quot;:true,&quot;type&quot;:&quot;text&quot;}"/>
           <p:cNvSpPr txBox="1"/>
           <p:nvPr/>
         </p:nvSpPr>
@@ -11458,7 +13739,7 @@
       </p:sp>
       <p:sp>
         <p:nvSpPr>
-          <p:cNvPr id="260" name="" descr="{&quot;isTemplate&quot;:true,&quot;type&quot;:&quot;text&quot;}"/>
+          <p:cNvPr id="331" name="" descr="{&quot;isTemplate&quot;:true,&quot;type&quot;:&quot;text&quot;}"/>
           <p:cNvSpPr txBox="1"/>
           <p:nvPr/>
         </p:nvSpPr>
@@ -11513,7 +13794,7 @@
       </p:sp>
       <p:sp>
         <p:nvSpPr>
-          <p:cNvPr id="261" name=""/>
+          <p:cNvPr id="332" name=""/>
           <p:cNvSpPr/>
           <p:nvPr/>
         </p:nvSpPr>
@@ -11539,15 +13820,12 @@
         </p:spPr>
         <p:txBody>
           <a:bodyPr/>
-          <a:p>
-            <a:pPr/>
-            <a:endParaRPr/>
-          </a:p>
-        </p:txBody>
-      </p:sp>
-      <p:sp>
-        <p:nvSpPr>
-          <p:cNvPr id="262" name=""/>
+          <a:p/>
+        </p:txBody>
+      </p:sp>
+      <p:sp>
+        <p:nvSpPr>
+          <p:cNvPr id="333" name=""/>
           <p:cNvSpPr/>
           <p:nvPr/>
         </p:nvSpPr>
@@ -11568,15 +13846,12 @@
         </p:spPr>
         <p:txBody>
           <a:bodyPr/>
-          <a:p>
-            <a:pPr/>
-            <a:endParaRPr/>
-          </a:p>
-        </p:txBody>
-      </p:sp>
-      <p:sp>
-        <p:nvSpPr>
-          <p:cNvPr id="263" name="" descr="{&quot;isTemplate&quot;:true,&quot;type&quot;:&quot;text&quot;}"/>
+          <a:p/>
+        </p:txBody>
+      </p:sp>
+      <p:sp>
+        <p:nvSpPr>
+          <p:cNvPr id="334" name="" descr="{&quot;isTemplate&quot;:true,&quot;type&quot;:&quot;text&quot;}"/>
           <p:cNvSpPr txBox="1"/>
           <p:nvPr/>
         </p:nvSpPr>
@@ -11611,7 +13886,7 @@
       </p:sp>
       <p:sp>
         <p:nvSpPr>
-          <p:cNvPr id="264" name="" descr="{&quot;isTemplate&quot;:true,&quot;type&quot;:&quot;text&quot;}"/>
+          <p:cNvPr id="335" name="" descr="{&quot;isTemplate&quot;:true,&quot;type&quot;:&quot;text&quot;}"/>
           <p:cNvSpPr txBox="1"/>
           <p:nvPr/>
         </p:nvSpPr>
@@ -11666,7 +13941,7 @@
       </p:sp>
       <p:sp>
         <p:nvSpPr>
-          <p:cNvPr id="265" name="" descr="{&quot;isTemplate&quot;:true,&quot;type&quot;:&quot;text&quot;}"/>
+          <p:cNvPr id="336" name="" descr="{&quot;isTemplate&quot;:true,&quot;type&quot;:&quot;text&quot;}"/>
           <p:cNvSpPr txBox="1"/>
           <p:nvPr/>
         </p:nvSpPr>
@@ -11751,7 +14026,7 @@
       </p:sp>
       <p:sp>
         <p:nvSpPr>
-          <p:cNvPr id="266" name=""/>
+          <p:cNvPr id="337" name=""/>
           <p:cNvSpPr/>
           <p:nvPr/>
         </p:nvSpPr>
@@ -11777,15 +14052,12 @@
         </p:spPr>
         <p:txBody>
           <a:bodyPr/>
-          <a:p>
-            <a:pPr/>
-            <a:endParaRPr/>
-          </a:p>
-        </p:txBody>
-      </p:sp>
-      <p:sp>
-        <p:nvSpPr>
-          <p:cNvPr id="267" name=""/>
+          <a:p/>
+        </p:txBody>
+      </p:sp>
+      <p:sp>
+        <p:nvSpPr>
+          <p:cNvPr id="338" name=""/>
           <p:cNvSpPr/>
           <p:nvPr/>
         </p:nvSpPr>
@@ -11806,15 +14078,12 @@
         </p:spPr>
         <p:txBody>
           <a:bodyPr/>
-          <a:p>
-            <a:pPr/>
-            <a:endParaRPr/>
-          </a:p>
-        </p:txBody>
-      </p:sp>
-      <p:sp>
-        <p:nvSpPr>
-          <p:cNvPr id="268" name="" descr="{&quot;isTemplate&quot;:true,&quot;type&quot;:&quot;text&quot;}"/>
+          <a:p/>
+        </p:txBody>
+      </p:sp>
+      <p:sp>
+        <p:nvSpPr>
+          <p:cNvPr id="339" name="" descr="{&quot;isTemplate&quot;:true,&quot;type&quot;:&quot;text&quot;}"/>
           <p:cNvSpPr txBox="1"/>
           <p:nvPr/>
         </p:nvSpPr>
@@ -11849,7 +14118,7 @@
       </p:sp>
       <p:sp>
         <p:nvSpPr>
-          <p:cNvPr id="269" name="" descr="{&quot;isTemplate&quot;:true,&quot;type&quot;:&quot;text&quot;}"/>
+          <p:cNvPr id="340" name="" descr="{&quot;isTemplate&quot;:true,&quot;type&quot;:&quot;text&quot;}"/>
           <p:cNvSpPr txBox="1"/>
           <p:nvPr/>
         </p:nvSpPr>
@@ -11884,7 +14153,7 @@
       </p:sp>
       <p:sp>
         <p:nvSpPr>
-          <p:cNvPr id="270" name="" descr="{&quot;isTemplate&quot;:true,&quot;type&quot;:&quot;text&quot;}"/>
+          <p:cNvPr id="341" name="" descr="{&quot;isTemplate&quot;:true,&quot;type&quot;:&quot;text&quot;}"/>
           <p:cNvSpPr txBox="1"/>
           <p:nvPr/>
         </p:nvSpPr>
@@ -11949,7 +14218,7 @@
       </p:sp>
       <p:sp>
         <p:nvSpPr>
-          <p:cNvPr id="271" name=""/>
+          <p:cNvPr id="342" name=""/>
           <p:cNvSpPr/>
           <p:nvPr/>
         </p:nvSpPr>
@@ -11975,15 +14244,12 @@
         </p:spPr>
         <p:txBody>
           <a:bodyPr/>
-          <a:p>
-            <a:pPr/>
-            <a:endParaRPr/>
-          </a:p>
-        </p:txBody>
-      </p:sp>
-      <p:sp>
-        <p:nvSpPr>
-          <p:cNvPr id="272" name=""/>
+          <a:p/>
+        </p:txBody>
+      </p:sp>
+      <p:sp>
+        <p:nvSpPr>
+          <p:cNvPr id="343" name=""/>
           <p:cNvSpPr/>
           <p:nvPr/>
         </p:nvSpPr>
@@ -12004,15 +14270,12 @@
         </p:spPr>
         <p:txBody>
           <a:bodyPr/>
-          <a:p>
-            <a:pPr/>
-            <a:endParaRPr/>
-          </a:p>
-        </p:txBody>
-      </p:sp>
-      <p:sp>
-        <p:nvSpPr>
-          <p:cNvPr id="273" name="" descr="{&quot;isTemplate&quot;:true,&quot;type&quot;:&quot;text&quot;}"/>
+          <a:p/>
+        </p:txBody>
+      </p:sp>
+      <p:sp>
+        <p:nvSpPr>
+          <p:cNvPr id="344" name="" descr="{&quot;isTemplate&quot;:true,&quot;type&quot;:&quot;text&quot;}"/>
           <p:cNvSpPr txBox="1"/>
           <p:nvPr/>
         </p:nvSpPr>
@@ -12047,7 +14310,7 @@
       </p:sp>
       <p:sp>
         <p:nvSpPr>
-          <p:cNvPr id="274" name="" descr="{&quot;isTemplate&quot;:true,&quot;type&quot;:&quot;text&quot;}"/>
+          <p:cNvPr id="345" name="" descr="{&quot;isTemplate&quot;:true,&quot;type&quot;:&quot;text&quot;}"/>
           <p:cNvSpPr txBox="1"/>
           <p:nvPr/>
         </p:nvSpPr>
@@ -12102,7 +14365,7 @@
       </p:sp>
       <p:sp>
         <p:nvSpPr>
-          <p:cNvPr id="275" name="" descr="{&quot;isTemplate&quot;:true,&quot;type&quot;:&quot;text&quot;}"/>
+          <p:cNvPr id="346" name="" descr="{&quot;isTemplate&quot;:true,&quot;type&quot;:&quot;text&quot;}"/>
           <p:cNvSpPr txBox="1"/>
           <p:nvPr/>
         </p:nvSpPr>
@@ -12137,7 +14400,7 @@
       </p:sp>
       <p:sp>
         <p:nvSpPr>
-          <p:cNvPr id="276" name=""/>
+          <p:cNvPr id="347" name=""/>
           <p:cNvSpPr/>
           <p:nvPr/>
         </p:nvSpPr>
@@ -12163,15 +14426,12 @@
         </p:spPr>
         <p:txBody>
           <a:bodyPr/>
-          <a:p>
-            <a:pPr/>
-            <a:endParaRPr/>
-          </a:p>
-        </p:txBody>
-      </p:sp>
-      <p:sp>
-        <p:nvSpPr>
-          <p:cNvPr id="277" name=""/>
+          <a:p/>
+        </p:txBody>
+      </p:sp>
+      <p:sp>
+        <p:nvSpPr>
+          <p:cNvPr id="348" name=""/>
           <p:cNvSpPr/>
           <p:nvPr/>
         </p:nvSpPr>
@@ -12192,15 +14452,12 @@
         </p:spPr>
         <p:txBody>
           <a:bodyPr/>
-          <a:p>
-            <a:pPr/>
-            <a:endParaRPr/>
-          </a:p>
-        </p:txBody>
-      </p:sp>
-      <p:sp>
-        <p:nvSpPr>
-          <p:cNvPr id="278" name="" descr="{&quot;isTemplate&quot;:true,&quot;type&quot;:&quot;text&quot;}"/>
+          <a:p/>
+        </p:txBody>
+      </p:sp>
+      <p:sp>
+        <p:nvSpPr>
+          <p:cNvPr id="349" name="" descr="{&quot;isTemplate&quot;:true,&quot;type&quot;:&quot;text&quot;}"/>
           <p:cNvSpPr txBox="1"/>
           <p:nvPr/>
         </p:nvSpPr>
@@ -12235,7 +14492,7 @@
       </p:sp>
       <p:sp>
         <p:nvSpPr>
-          <p:cNvPr id="279" name="" descr="{&quot;isTemplate&quot;:true,&quot;type&quot;:&quot;text&quot;}"/>
+          <p:cNvPr id="350" name="" descr="{&quot;isTemplate&quot;:true,&quot;type&quot;:&quot;text&quot;}"/>
           <p:cNvSpPr txBox="1"/>
           <p:nvPr/>
         </p:nvSpPr>
@@ -12270,7 +14527,7 @@
       </p:sp>
       <p:sp>
         <p:nvSpPr>
-          <p:cNvPr id="280" name="" descr="{&quot;isTemplate&quot;:true,&quot;type&quot;:&quot;text&quot;}"/>
+          <p:cNvPr id="351" name="" descr="{&quot;isTemplate&quot;:true,&quot;type&quot;:&quot;text&quot;}"/>
           <p:cNvSpPr txBox="1"/>
           <p:nvPr/>
         </p:nvSpPr>
@@ -12305,7 +14562,7 @@
       </p:sp>
       <p:sp>
         <p:nvSpPr>
-          <p:cNvPr id="281" name="" descr="{&quot;isTemplate&quot;:true,&quot;type&quot;:&quot;text&quot;}"/>
+          <p:cNvPr id="352" name="" descr="{&quot;isTemplate&quot;:true,&quot;type&quot;:&quot;text&quot;}"/>
           <p:cNvSpPr txBox="1"/>
           <p:nvPr/>
         </p:nvSpPr>
@@ -12340,7 +14597,7 @@
       </p:sp>
       <p:sp>
         <p:nvSpPr>
-          <p:cNvPr id="282" name="" descr="{&quot;isTemplate&quot;:true,&quot;type&quot;:&quot;text&quot;}"/>
+          <p:cNvPr id="353" name="" descr="{&quot;isTemplate&quot;:true,&quot;type&quot;:&quot;text&quot;}"/>
           <p:cNvSpPr txBox="1"/>
           <p:nvPr/>
         </p:nvSpPr>
@@ -12367,7 +14624,7 @@
                 <a:latin typeface="Microsoft YaHei"/>
                 <a:ea typeface="Microsoft YaHei"/>
               </a:rPr>
-              <a:t>06 / 15</a:t>
+              <a:t>06 / 17</a:t>
             </a:r>
             <a:endParaRPr/>
           </a:p>
@@ -12383,7 +14640,7 @@
   <p:cSld>
     <p:spTree>
       <p:nvGrpSpPr>
-        <p:cNvPr id="283" name=""/>
+        <p:cNvPr id="354" name="" descr="&lt;Slide&gt;&#10;  &lt;Box style={{ width: '1280px', height: '720px', background: '#FFFFFF', flexDirection: 'column' }}&gt;&#10;    {/* 页眉 */}&#10;    &lt;Box style={{ height: 72, background: '#1E4FA8', flexDirection: 'row', alignItems: 'center', justifyContent: 'space-between', paddingLeft: 40, paddingRight: 40 }}&gt;&#10;      &lt;Text style={{ color: '#FFFFFF', fontSize: 16 }}&gt;基于 RAG 的轻量级企业工艺生成系统&lt;/Text&gt;&#10;      &lt;Text style={{ color: 'rgba(255,255,255,0.85)', fontSize: 14 }}&gt;项目目标&lt;/Text&gt;&#10;    &lt;/Box&gt;&#10;&#10;    {/* 主标题 */}&#10;    &lt;Box style={{ paddingLeft: 40, paddingRight: 40, paddingTop: 22, paddingBottom: 8, flexDirection: 'row', alignItems: 'baseline', gap: 16 }}&gt;&#10;      &lt;Text style={{ color: '#1A2230', fontSize: 34, fontWeight: 'bold' }}&gt;系统用例图（UML）&lt;/Text&gt;&#10;      &lt;Text style={{ color: '#8B97A8', fontSize: 16 }}&gt;Use Case Diagram · 需求分析&lt;/Text&gt;&#10;    &lt;/Box&gt;&#10;&#10;    {/* 用例图（大图 anchor） */}&#10;    &lt;Box style={{ flex: 1, paddingLeft: 40, paddingRight: 40, paddingBottom: 4, alignItems: 'center', justifyContent: 'center' }}&gt;&#10;      &lt;svg width={1180} height={520} viewBox='0 0 1180 520'&gt;&#10;        {/* 系统边界 */}&#10;        &lt;rect x='215' y='15' width='620' height='460' rx='12' fill='#F7F9FC' stroke='#D6DCE5' strokeWidth='1.5' /&gt;&#10;        &lt;text x='235' y='47' font-size='18' font-weight='bold' fill='#0E3F8C'&gt;工艺 RAG 生成系统&lt;/text&gt;&#10;&#10;        {/* Actor：系统管理员 */}&#10;        &lt;g stroke='#1A2230' stroke-width='2' fill='none'&gt;&#10;          &lt;circle cx='95' cy='103' r='9' fill='#FFFFFF' /&gt;&#10;          &lt;line x1='95' y1='112' x2='95' y2='133' /&gt;&#10;          &lt;line x1='79' y1='122' x2='111' y2='122' /&gt;&#10;          &lt;line x1='95' y1='133' x2='81' y2='151' /&gt;&#10;          &lt;line x1='95' y1='133' x2='109' y2='151' /&gt;&#10;        &lt;/g&gt;&#10;        &lt;text x='95' y='170' text-anchor='middle' font-size='15' font-weight='bold' fill='#1A2230'&gt;系统管理员&lt;/text&gt;&#10;&#10;        {/* Actor：工艺人员 */}&#10;        &lt;g stroke='#1A2230' stroke-width='2' fill='none'&gt;&#10;          &lt;circle cx='95' cy='248' r='9' fill='#FFFFFF' /&gt;&#10;          &lt;line x1='95' y1='257' x2='95' y2='278' /&gt;&#10;          &lt;line x1='79' y1='267' x2='111' y2='267' /&gt;&#10;          &lt;line x1='95' y1='278' x2='81' y2='296' /&gt;&#10;          &lt;line x1='95' y1='278' x2='109' y2='296' /&gt;&#10;        &lt;/g&gt;&#10;        &lt;text x='95' y='315' text-anchor='middle' font-size='15' font-weight='bold' fill='#1A2230'&gt;工艺人员&lt;/text&gt;&#10;&#10;        {/* Actor：评估人员 */}&#10;        &lt;g stroke='#1A2230' stroke-width='2' fill='none'&gt;&#10;          &lt;circle cx='95' cy='393' r='9' fill='#FFFFFF' /&gt;&#10;          &lt;line x1='95' y1='402' x2='95' y2='423' /&gt;&#10;          &lt;line x1='79' y1='412' x2='111' y2='412' /&gt;&#10;          &lt;line x1='95' y1='423' x2='81' y2='441' /&gt;&#10;          &lt;line x1='95' y1='423' x2='109' y2='441' /&gt;&#10;        &lt;/g&gt;&#10;        &lt;text x='95' y='460' text-anchor='middle' font-size='15' font-weight='bold' fill='#1A2230'&gt;评估人员&lt;/text&gt;&#10;&#10;        {/* 用例椭圆（列1） */}&#10;        &lt;g font-size='15' fill='#1A2230' text-anchor='middle'&gt;&#10;          &lt;ellipse cx='400' cy='125' rx='85' ry='27' fill='#FFFFFF' stroke='#1E4FA8' strokeWidth='2' /&gt;&#10;          &lt;text x='400' y='130'&gt;上传工艺文档&lt;/text&gt;&#10;&#10;          &lt;ellipse cx='400' cy='200' rx='85' ry='27' fill='#FFFFFF' stroke='#1E4FA8' strokeWidth='2' /&gt;&#10;          &lt;text x='400' y='205'&gt;构建知识库&lt;/text&gt;&#10;&#10;          &lt;ellipse cx='400' cy='270' rx='85' ry='27' fill='#FFFFFF' stroke='#1E4FA8' strokeWidth='2' /&gt;&#10;          &lt;text x='400' y='275'&gt;工艺问答&lt;/text&gt;&#10;&#10;          &lt;ellipse cx='400' cy='340' rx='85' ry='27' fill='#FFFFFF' stroke='#1E4FA8' strokeWidth='2' /&gt;&#10;          &lt;text x='400' y='345'&gt;多轮对话&lt;/text&gt;&#10;&#10;          &lt;ellipse cx='400' cy='415' rx='85' ry='27' fill='#FFFFFF' stroke='#1E4FA8' strokeWidth='2' /&gt;&#10;          &lt;text x='400' y='420'&gt;人工评估&lt;/text&gt;&#10;        &lt;/g&gt;&#10;&#10;        {/* 用例椭圆（列2） */}&#10;        &lt;g font-size='15' fill='#1A2230' text-anchor='middle'&gt;&#10;          &lt;ellipse cx='660' cy='270' rx='85' ry='27' fill='#FFFFFF' stroke='#1E4FA8' strokeWidth='2' /&gt;&#10;          &lt;text x='660' y='275'&gt;引用溯源&lt;/text&gt;&#10;&#10;          &lt;ellipse cx='660' cy='415' rx='85' ry='27' fill='#FFFFFF' stroke='#1E4FA8' strokeWidth='2' /&gt;&#10;          &lt;text x='660' y='420'&gt;结构化输出&lt;/text&gt;&#10;        &lt;/g&gt;&#10;&#10;        {/* 关联线（actor → 用例） */}&#10;        &lt;g stroke='#3D7BD9' stroke-width='2' fill='none'&gt;&#10;          &lt;line x1='95' y1='113' x2='315' y2='125' /&gt;&#10;          &lt;line x1='95' y1='113' x2='315' y2='200' /&gt;&#10;          &lt;line x1='95' y1='258' x2='315' y2='270' /&gt;&#10;          &lt;line x1='95' y1='258' x2='315' y2='340' /&gt;&#10;          &lt;line x1='95' y1='403' x2='315' y2='415' /&gt;&#10;        &lt;/g&gt;&#10;&#10;        {/* include 关系 */}&#10;        &lt;g stroke='#3D7BD9' stroke-width='1.5' fill='none' strokeDasharray='6 4'&gt;&#10;          &lt;line x1='485' y1='270' x2='575' y2='270' /&gt;&#10;          &lt;line x1='485' y1='270' x2='575' y2='415' /&gt;&#10;        &lt;/g&gt;&#10;        &lt;path d='M575 270 l-10 -6 v12 z' fill='#3D7BD9' stroke='none' /&gt;&#10;        &lt;path d='M575 415 l-10 -6 v12 z' fill='#3D7BD9' stroke='none' /&gt;&#10;        &lt;text x='530' y='260' text-anchor='middle' font-size='13' fill='#8B97A8'&gt;«include»&lt;/text&gt;&#10;&#10;        {/* 右侧：选题要求对应卡片 */}&#10;        &lt;rect x='870' y='60' width='295' height='390' rx='10' fill='#F0F5FC' stroke='#D6DCE5' strokeWidth='1.5' /&gt;&#10;        &lt;text x='892' y='92' font-size='16' font-weight='bold' fill='#0E3F8C'&gt;选题要求对应&lt;/text&gt;&#10;        &lt;line x1='892' y1='106' x2='1143' y2='106' stroke='#E5E7EB' strokeWidth='1' /&gt;&#10;        &lt;g font-size='14' fill='#1A2230'&gt;&#10;          &lt;text x='892' y='142'&gt;① 文档格式解析&lt;/text&gt;&#10;          &lt;text x='892' y='182'&gt;② 稠密 + 稀疏混合召回&lt;/text&gt;&#10;          &lt;text x='892' y='222'&gt;③ 重排序模块&lt;/text&gt;&#10;          &lt;text x='892' y='262'&gt;④ 多轮对话 + 引用溯源&lt;/text&gt;&#10;          &lt;text x='892' y='302'&gt;⑤ 多文档人工评估&lt;/text&gt;&#10;        &lt;/g&gt;&#10;        &lt;text x='892' y='352' font-size='13' fill='#4A5568'&gt;用例图以标准 UML 规范&lt;/text&gt;&#10;        &lt;text x='892' y='374' font-size='13' fill='#4A5568'&gt;表达参与者与系统功能&lt;/text&gt;&#10;        &lt;text x='892' y='396' font-size='13' fill='#4A5568'&gt;的边界及包含关系。&lt;/text&gt;&#10;&#10;        {/* 底部说明 */}&#10;        &lt;text x='60' y='508' font-size='14' fill='#8B97A8'&gt;实线表示参与者与用例的关联关系，虚线箭头表示 «include» 包含关系。&lt;/text&gt;&#10;      &lt;/svg&gt;&#10;    &lt;/Box&gt;&#10;&#10;    {/* 页脚 */}&#10;    &lt;Box style={{ height: 40, flexDirection: 'row', alignItems: 'center', justifyContent: 'space-between', paddingLeft: 40, paddingRight: 40 }}&gt;&#10;      &lt;Text style={{ color: '#8B97A8', fontSize: 14 }}&gt;中国科学技术大学软件学院&lt;/Text&gt;&#10;      &lt;Text style={{ color: '#1E4FA8', fontSize: 16, fontWeight: 'bold' }}&gt;07 / 17&lt;/Text&gt;&#10;    &lt;/Box&gt;&#10;  &lt;/Box&gt;&#10;&lt;/Slide&gt;&#10;"/>
         <p:cNvGrpSpPr/>
         <p:nvPr/>
       </p:nvGrpSpPr>
@@ -12397,7 +14654,7 @@
       </p:grpSpPr>
       <p:sp>
         <p:nvSpPr>
-          <p:cNvPr id="284" name=""/>
+          <p:cNvPr id="355" name=""/>
           <p:cNvSpPr/>
           <p:nvPr/>
         </p:nvSpPr>
@@ -12416,15 +14673,12 @@
         </p:spPr>
         <p:txBody>
           <a:bodyPr/>
-          <a:p>
-            <a:pPr/>
-            <a:endParaRPr/>
-          </a:p>
-        </p:txBody>
-      </p:sp>
-      <p:sp>
-        <p:nvSpPr>
-          <p:cNvPr id="285" name=""/>
+          <a:p/>
+        </p:txBody>
+      </p:sp>
+      <p:sp>
+        <p:nvSpPr>
+          <p:cNvPr id="356" name=""/>
           <p:cNvSpPr/>
           <p:nvPr/>
         </p:nvSpPr>
@@ -12443,15 +14697,12 @@
         </p:spPr>
         <p:txBody>
           <a:bodyPr/>
-          <a:p>
-            <a:pPr/>
-            <a:endParaRPr/>
-          </a:p>
-        </p:txBody>
-      </p:sp>
-      <p:sp>
-        <p:nvSpPr>
-          <p:cNvPr id="286" name="" descr="{&quot;isTemplate&quot;:true,&quot;type&quot;:&quot;text&quot;}"/>
+          <a:p/>
+        </p:txBody>
+      </p:sp>
+      <p:sp>
+        <p:nvSpPr>
+          <p:cNvPr id="357" name="" descr="{&quot;isTemplate&quot;:true,&quot;type&quot;:&quot;text&quot;}"/>
           <p:cNvSpPr txBox="1"/>
           <p:nvPr/>
         </p:nvSpPr>
@@ -12506,7 +14757,7 @@
       </p:sp>
       <p:sp>
         <p:nvSpPr>
-          <p:cNvPr id="287" name="" descr="{&quot;isTemplate&quot;:true,&quot;type&quot;:&quot;text&quot;}"/>
+          <p:cNvPr id="358" name="" descr="{&quot;isTemplate&quot;:true,&quot;type&quot;:&quot;text&quot;}"/>
           <p:cNvSpPr txBox="1"/>
           <p:nvPr/>
         </p:nvSpPr>
@@ -12535,22 +14786,22 @@
                 <a:latin typeface="Microsoft YaHei"/>
                 <a:ea typeface="Microsoft YaHei"/>
               </a:rPr>
-              <a:t>技术方案</a:t>
-            </a:r>
-            <a:endParaRPr/>
-          </a:p>
-        </p:txBody>
-      </p:sp>
-      <p:sp>
-        <p:nvSpPr>
-          <p:cNvPr id="288" name="" descr="{&quot;isTemplate&quot;:true,&quot;type&quot;:&quot;text&quot;}"/>
+              <a:t>项目目标</a:t>
+            </a:r>
+            <a:endParaRPr/>
+          </a:p>
+        </p:txBody>
+      </p:sp>
+      <p:sp>
+        <p:nvSpPr>
+          <p:cNvPr id="359" name="" descr="{&quot;isTemplate&quot;:true,&quot;type&quot;:&quot;text&quot;}"/>
           <p:cNvSpPr txBox="1"/>
           <p:nvPr/>
         </p:nvSpPr>
         <p:spPr>
           <a:xfrm rot="0" flipH="0" flipV="0">
             <a:off x="381000" y="895350"/>
-            <a:ext cx="11430000" cy="390525"/>
+            <a:ext cx="3028950" cy="390525"/>
           </a:xfrm>
           <a:prstGeom prst="rect"/>
         </p:spPr>
@@ -12570,7 +14821,72 @@
                 <a:latin typeface="Microsoft YaHei"/>
                 <a:ea typeface="Microsoft YaHei"/>
               </a:rPr>
-              <a:t>系统总体架构：双链路</a:t>
+              <a:t>系统用例图（</a:t>
+            </a:r>
+            <a:r>
+              <a:rPr lang="en-US" sz="2550" b="1">
+                <a:solidFill>
+                  <a:srgbClr val="1A2230"/>
+                </a:solidFill>
+                <a:latin typeface="Microsoft YaHei"/>
+                <a:ea typeface="Microsoft YaHei"/>
+              </a:rPr>
+              <a:t>UML</a:t>
+            </a:r>
+            <a:r>
+              <a:rPr lang="zh-CN" sz="2550" b="1">
+                <a:solidFill>
+                  <a:srgbClr val="1A2230"/>
+                </a:solidFill>
+                <a:latin typeface="Microsoft YaHei"/>
+                <a:ea typeface="Microsoft YaHei"/>
+              </a:rPr>
+              <a:t>）</a:t>
+            </a:r>
+            <a:endParaRPr/>
+          </a:p>
+        </p:txBody>
+      </p:sp>
+      <p:sp>
+        <p:nvSpPr>
+          <p:cNvPr id="360" name="" descr="{&quot;isTemplate&quot;:true,&quot;type&quot;:&quot;text&quot;}"/>
+          <p:cNvSpPr txBox="1"/>
+          <p:nvPr/>
+        </p:nvSpPr>
+        <p:spPr>
+          <a:xfrm rot="0" flipH="0" flipV="0">
+            <a:off x="3562350" y="895350"/>
+            <a:ext cx="2066925" cy="390525"/>
+          </a:xfrm>
+          <a:prstGeom prst="rect"/>
+        </p:spPr>
+        <p:txBody>
+          <a:bodyPr wrap="none" lIns="0" tIns="0" rIns="0" bIns="0"/>
+          <a:p>
+            <a:pPr>
+              <a:lnSpc>
+                <a:spcPct val="100000"/>
+              </a:lnSpc>
+            </a:pPr>
+            <a:r>
+              <a:rPr lang="en-US" sz="1200">
+                <a:solidFill>
+                  <a:srgbClr val="8B97A8"/>
+                </a:solidFill>
+                <a:latin typeface="Microsoft YaHei"/>
+                <a:ea typeface="Microsoft YaHei"/>
+              </a:rPr>
+              <a:t xml:space="preserve">Use Case Diagram · </a:t>
+            </a:r>
+            <a:r>
+              <a:rPr lang="zh-CN" sz="1200">
+                <a:solidFill>
+                  <a:srgbClr val="8B97A8"/>
+                </a:solidFill>
+                <a:latin typeface="Microsoft YaHei"/>
+                <a:ea typeface="Microsoft YaHei"/>
+              </a:rPr>
+              <a:t>需求分析</a:t>
             </a:r>
             <a:endParaRPr/>
           </a:p>
@@ -12578,7 +14894,7 @@
       </p:sp>
       <p:pic>
         <p:nvPicPr>
-          <p:cNvPr id="289" name=""/>
+          <p:cNvPr id="361" name=""/>
           <p:cNvPicPr>
             <a:picLocks noChangeAspect="1"/>
           </p:cNvPicPr>
@@ -12598,8 +14914,8 @@
         </p:blipFill>
         <p:spPr>
           <a:xfrm rot="0" flipH="0" flipV="0">
-            <a:off x="476250" y="1457325"/>
-            <a:ext cx="11239500" cy="4857750"/>
+            <a:off x="476250" y="1428750"/>
+            <a:ext cx="11239500" cy="4953000"/>
           </a:xfrm>
           <a:prstGeom prst="rect">
             <a:avLst/>
@@ -12609,7 +14925,7 @@
       </p:pic>
       <p:sp>
         <p:nvSpPr>
-          <p:cNvPr id="290" name="" descr="{&quot;isTemplate&quot;:true,&quot;type&quot;:&quot;text&quot;}"/>
+          <p:cNvPr id="362" name="" descr="{&quot;isTemplate&quot;:true,&quot;type&quot;:&quot;text&quot;}"/>
           <p:cNvSpPr txBox="1"/>
           <p:nvPr/>
         </p:nvSpPr>
@@ -12644,7 +14960,7 @@
       </p:sp>
       <p:sp>
         <p:nvSpPr>
-          <p:cNvPr id="291" name="" descr="{&quot;isTemplate&quot;:true,&quot;type&quot;:&quot;text&quot;}"/>
+          <p:cNvPr id="363" name="" descr="{&quot;isTemplate&quot;:true,&quot;type&quot;:&quot;text&quot;}"/>
           <p:cNvSpPr txBox="1"/>
           <p:nvPr/>
         </p:nvSpPr>
@@ -12671,7 +14987,7 @@
                 <a:latin typeface="Microsoft YaHei"/>
                 <a:ea typeface="Microsoft YaHei"/>
               </a:rPr>
-              <a:t>07 / 15</a:t>
+              <a:t>07 / 17</a:t>
             </a:r>
             <a:endParaRPr/>
           </a:p>
@@ -12687,7 +15003,7 @@
   <p:cSld>
     <p:spTree>
       <p:nvGrpSpPr>
-        <p:cNvPr id="292" name="" descr="&lt;Slide&gt;&#10;  &lt;Box style={{ width: '1280px', height: '720px', background: '#FFFFFF', flexDirection: 'column' }}&gt;&#10;    {/* 页眉 */}&#10;    &lt;Box style={{ height: 72, background: '#1E4FA8', flexDirection: 'row', alignItems: 'center', justifyContent: 'space-between', paddingLeft: 40, paddingRight: 40 }}&gt;&#10;      &lt;Text style={{ color: '#FFFFFF', fontSize: 16 }}&gt;基于 RAG 的轻量级企业工艺生成系统&lt;/Text&gt;&#10;      &lt;Text style={{ color: 'rgba(255,255,255,0.85)', fontSize: 14 }}&gt;技术方案&lt;/Text&gt;&#10;    &lt;/Box&gt;&#10;&#10;    {/* 主标题 */}&#10;    &lt;Box style={{ paddingLeft: 40, paddingRight: 40, paddingTop: 22, paddingBottom: 8 }}&gt;&#10;      &lt;Text style={{ color: '#1A2230', fontSize: 34, fontWeight: 'bold' }}&gt;系统总体架构：双链路&lt;/Text&gt;&#10;    &lt;/Box&gt;&#10;&#10;    {/* 架构图（大图 anchor） */}&#10;    &lt;Box style={{ flex: 1, paddingLeft: 40, paddingRight: 40, paddingBottom: 8, alignItems: 'center', justifyContent: 'center' }}&gt;&#10;      &lt;svg width={1180} height={510} viewBox='0 0 1180 510'&gt;&#10;        {/* 离线建库链路（上） */}&#10;        &lt;rect x='0' y='6' width='1180' height='165' rx='12' fill='#F0F5FC' stroke='#D6DCE5' strokeWidth='1.5' /&gt;&#10;        &lt;text x='30' y='40' font-size='20' font-weight='bold' fill='#0E3F8C'&gt;离线建库链路（一次构建）&lt;/text&gt;&#10;&#10;        {/* 离线节点 */}&#10;        &lt;g font-size='15' fill='#1A2230' text-anchor='middle'&gt;&#10;          &lt;rect x='45' y='72' width='158' height='66' rx='8' fill='#FFFFFF' stroke='#1E4FA8' strokeWidth='1.5' /&gt;&#10;          &lt;text x='124' y='100' font-weight='bold'&gt;工艺 PDF&lt;/text&gt;&#10;          &lt;text x='124' y='122' fill='#8B97A8'&gt;原始文档&lt;/text&gt;&#10;&#10;          &lt;rect x='263' y='72' width='158' height='66' rx='8' fill='#FFFFFF' stroke='#1E4FA8' strokeWidth='1.5' /&gt;&#10;          &lt;text x='342' y='100' font-weight='bold'&gt;解析&lt;/text&gt;&#10;          &lt;text x='342' y='122' fill='#8B97A8'&gt;PyMuPDF + pdfplumber&lt;/text&gt;&#10;&#10;          &lt;rect x='481' y='72' width='158' height='66' rx='8' fill='#FFFFFF' stroke='#1E4FA8' strokeWidth='1.5' /&gt;&#10;          &lt;text x='560' y='100' font-weight='bold'&gt;分块&lt;/text&gt;&#10;          &lt;text x='560' y='122' fill='#8B97A8'&gt;递归 + 表格保护&lt;/text&gt;&#10;&#10;          &lt;rect x='699' y='72' width='158' height='66' rx='8' fill='#FFFFFF' stroke='#1E4FA8' strokeWidth='1.5' /&gt;&#10;          &lt;text x='778' y='100' font-weight='bold'&gt;向量化&lt;/text&gt;&#10;          &lt;text x='778' y='122' fill='#8B97A8'&gt;BGE-M3 嵌入&lt;/text&gt;&#10;&#10;          &lt;rect x='917' y='72' width='158' height='66' rx='8' fill='#1E4FA8' /&gt;&#10;          &lt;text x='996' y='100' font-weight='bold' fill='#FFFFFF'&gt;索引入库&lt;/text&gt;&#10;          &lt;text x='996' y='122' fill='#D6E4F7'&gt;Chroma + BM25&lt;/text&gt;&#10;        &lt;/g&gt;&#10;        {/* 离线箭头 */}&#10;        &lt;g stroke='#3D7BD9' stroke-width='2.5' fill='#3D7BD9'&gt;&#10;          &lt;path d='M203 105 L258 105' /&gt;&#10;          &lt;path d='M421 105 L476 105' /&gt;&#10;          &lt;path d='M639 105 L694 105' /&gt;&#10;          &lt;path d='M857 105 L912 105' /&gt;&#10;          &lt;path d='M258 105 l-8 -6 v12 z' /&gt;&#10;          &lt;path d='M476 105 l-8 -6 v12 z' /&gt;&#10;          &lt;path d='M694 105 l-8 -6 v12 z' /&gt;&#10;          &lt;path d='M912 105 l-8 -6 v12 z' /&gt;&#10;        &lt;/g&gt;&#10;&#10;        {/* 知识库（中间，上接离线、下接在线） */}&#10;        &lt;rect x='360' y='208' width='460' height='56' rx='28' fill='#0E3F8C' /&gt;&#10;        &lt;text x='590' y='242' font-size='19' font-weight='bold' fill='#FFFFFF' text-anchor='middle'&gt;工艺知识库（稠密向量 + 稀疏索引）&lt;/text&gt;&#10;        &lt;g&gt;&#10;          {/* 索引入库 → 知识库（L 形折线：下→左→下，接入知识库顶边正中） */}&#10;          &lt;path d='M996 138 L996 173 L590 173 L590 206' stroke='#3D7BD9' stroke-width='2.5' fill='none' /&gt;&#10;          &lt;path d='M590 206 l-8 12 l16 0 z' fill='#3D7BD9' /&gt;&#10;          &lt;text x='800' y='166' font-size='13' fill='#3D7BD9'&gt;写入索引&lt;/text&gt;&#10;          {/* 知识库 → 混合召回（L 形折线：下→左→下，接入混合召回顶边正中） */}&#10;          &lt;path d='M590 264 L590 330 L330 330 L330 402' stroke='#3D7BD9' stroke-width='2.5' fill='none' /&gt;&#10;          &lt;path d='M330 402 l-8 12 l16 0 z' fill='#3D7BD9' /&gt;&#10;          &lt;text x='350' y='322' font-size='13' fill='#3D7BD9'&gt;供在线检索&lt;/text&gt;&#10;        &lt;/g&gt;&#10;&#10;        {/* 在线问答链路（下） */}&#10;        &lt;rect x='0' y='342' width='1180' height='160' rx='12' fill='#F0F5FC' stroke='#D6DCE5' strokeWidth='1.5' /&gt;&#10;        &lt;text x='30' y='376' font-size='20' font-weight='bold' fill='#0E3F8C'&gt;在线问答链路（每次提问）&lt;/text&gt;&#10;&#10;        &lt;g font-size='14' fill='#1A2230' text-anchor='middle'&gt;&#10;          &lt;rect x='45' y='404' width='150' height='62' rx='8' fill='#FFFFFF' stroke='#1E4FA8' strokeWidth='1.5' /&gt;&#10;          &lt;text x='120' y='430' font-weight='bold'&gt;用户问题&lt;/text&gt;&#10;          &lt;text x='120' y='450' fill='#8B97A8'&gt;查询改写&lt;/text&gt;&#10;&#10;          &lt;rect x='255' y='404' width='150' height='62' rx='8' fill='#FFFFFF' stroke='#1E4FA8' strokeWidth='1.5' /&gt;&#10;          &lt;text x='330' y='430' font-weight='bold'&gt;混合召回&lt;/text&gt;&#10;          &lt;text x='330' y='450' fill='#8B97A8'&gt;稠密 + 稀疏&lt;/text&gt;&#10;&#10;          &lt;rect x='465' y='404' width='150' height='62' rx='8' fill='#FFFFFF' stroke='#1E4FA8' strokeWidth='1.5' /&gt;&#10;          &lt;text x='540' y='430' font-weight='bold'&gt;RRF 融合&lt;/text&gt;&#10;          &lt;text x='540' y='450' fill='#8B97A8'&gt;k=60 去重&lt;/text&gt;&#10;&#10;          &lt;rect x='675' y='404' width='150' height='62' rx='8' fill='#FFFFFF' stroke='#1E4FA8' strokeWidth='1.5' /&gt;&#10;          &lt;text x='750' y='430' font-weight='bold'&gt;重排序&lt;/text&gt;&#10;          &lt;text x='750' y='450' fill='#8B97A8'&gt;bge-reranker&lt;/text&gt;&#10;&#10;          &lt;rect x='885' y='404' width='150' height='62' rx='8' fill='#FFFFFF' stroke='#1E4FA8' strokeWidth='1.5' /&gt;&#10;          &lt;text x='960' y='430' font-weight='bold'&gt;生成&lt;/text&gt;&#10;          &lt;text x='960' y='450' fill='#8B97A8'&gt;大模型 API&lt;/text&gt;&#10;        &lt;/g&gt;&#10;        {/* 加工指令（右侧终点） */}&#10;        &lt;rect x='1050' y='404' width='115' height='62' rx='8' fill='#1E4FA8' /&gt;&#10;        &lt;text x='1107' y='430' font-size='14' font-weight='bold' fill='#FFFFFF' text-anchor='middle'&gt;加工指令&lt;/text&gt;&#10;        &lt;text x='1107' y='450' font-size='14' fill='#D6E4F7' text-anchor='middle'&gt;带引用&lt;/text&gt;&#10;&#10;        &lt;g stroke='#3D7BD9' stroke-width='2.5' fill='#3D7BD9'&gt;&#10;          &lt;path d='M195 435 L250 435' /&gt;&#10;          &lt;path d='M405 435 L460 435' /&gt;&#10;          &lt;path d='M615 435 L670 435' /&gt;&#10;          &lt;path d='M825 435 L880 435' /&gt;&#10;          &lt;path d='M1035 435 L1045 435' /&gt;&#10;          &lt;path d='M250 435 l-8 -6 v12 z' /&gt;&#10;          &lt;path d='M460 435 l-8 -6 v12 z' /&gt;&#10;          &lt;path d='M670 435 l-8 -6 v12 z' /&gt;&#10;          &lt;path d='M880 435 l-8 -6 v12 z' /&gt;&#10;          &lt;path d='M1045 435 l-8 -6 v12 z' /&gt;&#10;        &lt;/g&gt;&#10;      &lt;/svg&gt;&#10;    &lt;/Box&gt;&#10;&#10;    {/* 页脚 */}&#10;    &lt;Box style={{ height: 40, flexDirection: 'row', alignItems: 'center', justifyContent: 'space-between', paddingLeft: 40, paddingRight: 40 }}&gt;&#10;      &lt;Text style={{ color: '#8B97A8', fontSize: 14 }}&gt;中国科学技术大学软件学院&lt;/Text&gt;&#10;      &lt;Text style={{ color: '#1E4FA8', fontSize: 16, fontWeight: 'bold' }}&gt;08 / 17&lt;/Text&gt;&#10;    &lt;/Box&gt;&#10;  &lt;/Box&gt;&#10;&lt;/Slide&gt;&#10;"/>
+        <p:cNvPr id="364" name="" descr="&lt;Slide&gt;&#10;  &lt;Box style={{ width: '1280px', height: '720px', background: '#FFFFFF', flexDirection: 'column' }}&gt;&#10;    {/* 页眉 */}&#10;    &lt;Box style={{ height: 72, background: '#1E4FA8', flexDirection: 'row', alignItems: 'center', justifyContent: 'space-between', paddingLeft: 40, paddingRight: 40 }}&gt;&#10;      &lt;Text style={{ color: '#FFFFFF', fontSize: 16 }}&gt;基于 RAG 的轻量级企业工艺生成系统&lt;/Text&gt;&#10;      &lt;Text style={{ color: 'rgba(255,255,255,0.85)', fontSize: 14 }}&gt;技术方案&lt;/Text&gt;&#10;    &lt;/Box&gt;&#10;&#10;    {/* 主标题 */}&#10;    &lt;Box style={{ paddingLeft: 40, paddingRight: 40, paddingTop: 22, paddingBottom: 8 }}&gt;&#10;      &lt;Text style={{ color: '#1A2230', fontSize: 34, fontWeight: 'bold' }}&gt;系统总体架构：双链路&lt;/Text&gt;&#10;    &lt;/Box&gt;&#10;&#10;    {/* 架构图（大图 anchor） */}&#10;    &lt;Box style={{ flex: 1, paddingLeft: 40, paddingRight: 40, paddingBottom: 8, alignItems: 'center', justifyContent: 'center' }}&gt;&#10;      &lt;svg width={1180} height={510} viewBox='0 0 1180 510'&gt;&#10;        {/* 离线建库链路（上） */}&#10;        &lt;rect x='0' y='6' width='1180' height='165' rx='12' fill='#F0F5FC' stroke='#D6DCE5' strokeWidth='1.5' /&gt;&#10;        &lt;text x='30' y='40' font-size='20' font-weight='bold' fill='#0E3F8C'&gt;离线建库链路（一次构建）&lt;/text&gt;&#10;&#10;        {/* 离线节点 */}&#10;        &lt;g font-size='15' fill='#1A2230' text-anchor='middle'&gt;&#10;          &lt;rect x='45' y='72' width='158' height='66' rx='8' fill='#FFFFFF' stroke='#1E4FA8' strokeWidth='1.5' /&gt;&#10;          &lt;text x='124' y='100' font-weight='bold'&gt;工艺 PDF&lt;/text&gt;&#10;          &lt;text x='124' y='122' fill='#8B97A8'&gt;原始文档&lt;/text&gt;&#10;&#10;          &lt;rect x='263' y='72' width='158' height='66' rx='8' fill='#FFFFFF' stroke='#1E4FA8' strokeWidth='1.5' /&gt;&#10;          &lt;text x='342' y='100' font-weight='bold'&gt;解析&lt;/text&gt;&#10;          &lt;text x='342' y='122' fill='#8B97A8'&gt;PyMuPDF + pdfplumber&lt;/text&gt;&#10;&#10;          &lt;rect x='481' y='72' width='158' height='66' rx='8' fill='#FFFFFF' stroke='#1E4FA8' strokeWidth='1.5' /&gt;&#10;          &lt;text x='560' y='100' font-weight='bold'&gt;分块&lt;/text&gt;&#10;          &lt;text x='560' y='122' fill='#8B97A8'&gt;递归 + 表格保护&lt;/text&gt;&#10;&#10;          &lt;rect x='699' y='72' width='158' height='66' rx='8' fill='#FFFFFF' stroke='#1E4FA8' strokeWidth='1.5' /&gt;&#10;          &lt;text x='778' y='100' font-weight='bold'&gt;向量化&lt;/text&gt;&#10;          &lt;text x='778' y='122' fill='#8B97A8'&gt;BGE-M3 嵌入&lt;/text&gt;&#10;&#10;          &lt;rect x='917' y='72' width='158' height='66' rx='8' fill='#1E4FA8' /&gt;&#10;          &lt;text x='996' y='100' font-weight='bold' fill='#FFFFFF'&gt;索引入库&lt;/text&gt;&#10;          &lt;text x='996' y='122' fill='#D6E4F7'&gt;Chroma + BM25&lt;/text&gt;&#10;        &lt;/g&gt;&#10;        {/* 离线箭头 */}&#10;        &lt;g stroke='#3D7BD9' stroke-width='2.5' fill='#3D7BD9'&gt;&#10;          &lt;path d='M203 105 L258 105' /&gt;&#10;          &lt;path d='M421 105 L476 105' /&gt;&#10;          &lt;path d='M639 105 L694 105' /&gt;&#10;          &lt;path d='M857 105 L912 105' /&gt;&#10;          &lt;path d='M258 105 l-8 -6 v12 z' /&gt;&#10;          &lt;path d='M476 105 l-8 -6 v12 z' /&gt;&#10;          &lt;path d='M694 105 l-8 -6 v12 z' /&gt;&#10;          &lt;path d='M912 105 l-8 -6 v12 z' /&gt;&#10;        &lt;/g&gt;&#10;&#10;        {/* 知识库（中间，上接离线、下接在线） */}&#10;        &lt;rect x='360' y='208' width='460' height='56' rx='28' fill='#0E3F8C' /&gt;&#10;        &lt;text x='590' y='242' font-size='19' font-weight='bold' fill='#FFFFFF' text-anchor='middle'&gt;工艺知识库（稠密向量 + 稀疏索引）&lt;/text&gt;&#10;        &lt;g&gt;&#10;          {/* 索引入库 → 知识库（L 形折线：下→左→下，接入知识库顶边正中） */}&#10;          &lt;path d='M996 138 L996 173 L590 173 L590 206' stroke='#3D7BD9' stroke-width='2.5' fill='none' /&gt;&#10;          &lt;path d='M590 206 l-8 12 l16 0 z' fill='#3D7BD9' /&gt;&#10;          &lt;text x='800' y='166' font-size='13' fill='#3D7BD9'&gt;写入索引&lt;/text&gt;&#10;          {/* 知识库 → 混合召回（L 形折线：下→左→下，接入混合召回顶边正中） */}&#10;          &lt;path d='M590 264 L590 330 L330 330 L330 402' stroke='#3D7BD9' stroke-width='2.5' fill='none' /&gt;&#10;          &lt;path d='M330 402 l-8 12 l16 0 z' fill='#3D7BD9' /&gt;&#10;          &lt;text x='350' y='322' font-size='13' fill='#3D7BD9'&gt;供在线检索&lt;/text&gt;&#10;        &lt;/g&gt;&#10;&#10;        {/* 在线问答链路（下） */}&#10;        &lt;rect x='0' y='342' width='1180' height='160' rx='12' fill='#F0F5FC' stroke='#D6DCE5' strokeWidth='1.5' /&gt;&#10;        &lt;text x='30' y='376' font-size='20' font-weight='bold' fill='#0E3F8C'&gt;在线问答链路（每次提问）&lt;/text&gt;&#10;&#10;        &lt;g font-size='14' fill='#1A2230' text-anchor='middle'&gt;&#10;          &lt;rect x='45' y='404' width='150' height='62' rx='8' fill='#FFFFFF' stroke='#1E4FA8' strokeWidth='1.5' /&gt;&#10;          &lt;text x='120' y='430' font-weight='bold'&gt;用户问题&lt;/text&gt;&#10;          &lt;text x='120' y='450' fill='#8B97A8'&gt;查询改写&lt;/text&gt;&#10;&#10;          &lt;rect x='255' y='404' width='150' height='62' rx='8' fill='#FFFFFF' stroke='#1E4FA8' strokeWidth='1.5' /&gt;&#10;          &lt;text x='330' y='430' font-weight='bold'&gt;混合召回&lt;/text&gt;&#10;          &lt;text x='330' y='450' fill='#8B97A8'&gt;稠密 + 稀疏&lt;/text&gt;&#10;&#10;          &lt;rect x='465' y='404' width='150' height='62' rx='8' fill='#FFFFFF' stroke='#1E4FA8' strokeWidth='1.5' /&gt;&#10;          &lt;text x='540' y='430' font-weight='bold'&gt;RRF 融合&lt;/text&gt;&#10;          &lt;text x='540' y='450' fill='#8B97A8'&gt;k=60 去重&lt;/text&gt;&#10;&#10;          &lt;rect x='675' y='404' width='150' height='62' rx='8' fill='#FFFFFF' stroke='#1E4FA8' strokeWidth='1.5' /&gt;&#10;          &lt;text x='750' y='430' font-weight='bold'&gt;重排序&lt;/text&gt;&#10;          &lt;text x='750' y='450' fill='#8B97A8'&gt;bge-reranker&lt;/text&gt;&#10;&#10;          &lt;rect x='885' y='404' width='150' height='62' rx='8' fill='#FFFFFF' stroke='#1E4FA8' strokeWidth='1.5' /&gt;&#10;          &lt;text x='960' y='430' font-weight='bold'&gt;生成&lt;/text&gt;&#10;          &lt;text x='960' y='450' fill='#8B97A8'&gt;大模型 API&lt;/text&gt;&#10;        &lt;/g&gt;&#10;        {/* 加工指令（右侧终点） */}&#10;        &lt;rect x='1050' y='404' width='115' height='62' rx='8' fill='#1E4FA8' /&gt;&#10;        &lt;text x='1107' y='430' font-size='14' font-weight='bold' fill='#FFFFFF' text-anchor='middle'&gt;加工指令&lt;/text&gt;&#10;        &lt;text x='1107' y='450' font-size='14' fill='#D6E4F7' text-anchor='middle'&gt;带引用&lt;/text&gt;&#10;&#10;        &lt;g stroke='#3D7BD9' stroke-width='2.5' fill='#3D7BD9'&gt;&#10;          &lt;path d='M195 435 L250 435' /&gt;&#10;          &lt;path d='M405 435 L460 435' /&gt;&#10;          &lt;path d='M615 435 L670 435' /&gt;&#10;          &lt;path d='M825 435 L880 435' /&gt;&#10;          &lt;path d='M1035 435 L1045 435' /&gt;&#10;          &lt;path d='M250 435 l-8 -6 v12 z' /&gt;&#10;          &lt;path d='M460 435 l-8 -6 v12 z' /&gt;&#10;          &lt;path d='M670 435 l-8 -6 v12 z' /&gt;&#10;          &lt;path d='M880 435 l-8 -6 v12 z' /&gt;&#10;          &lt;path d='M1045 435 l-8 -6 v12 z' /&gt;&#10;        &lt;/g&gt;&#10;      &lt;/svg&gt;&#10;    &lt;/Box&gt;&#10;&#10;    {/* 页脚 */}&#10;    &lt;Box style={{ height: 40, flexDirection: 'row', alignItems: 'center', justifyContent: 'space-between', paddingLeft: 40, paddingRight: 40 }}&gt;&#10;      &lt;Text style={{ color: '#8B97A8', fontSize: 14 }}&gt;中国科学技术大学软件学院&lt;/Text&gt;&#10;      &lt;Text style={{ color: '#1E4FA8', fontSize: 16, fontWeight: 'bold' }}&gt;08 / 17&lt;/Text&gt;&#10;    &lt;/Box&gt;&#10;  &lt;/Box&gt;&#10;&lt;/Slide&gt;&#10;"/>
         <p:cNvGrpSpPr/>
         <p:nvPr/>
       </p:nvGrpSpPr>
@@ -12701,7 +15017,7 @@
       </p:grpSpPr>
       <p:sp>
         <p:nvSpPr>
-          <p:cNvPr id="293" name=""/>
+          <p:cNvPr id="365" name=""/>
           <p:cNvSpPr/>
           <p:nvPr/>
         </p:nvSpPr>
@@ -12725,7 +15041,7 @@
       </p:sp>
       <p:sp>
         <p:nvSpPr>
-          <p:cNvPr id="294" name=""/>
+          <p:cNvPr id="366" name=""/>
           <p:cNvSpPr/>
           <p:nvPr/>
         </p:nvSpPr>
@@ -12749,7 +15065,7 @@
       </p:sp>
       <p:sp>
         <p:nvSpPr>
-          <p:cNvPr id="295" name="" descr="{&quot;isTemplate&quot;:true,&quot;type&quot;:&quot;text&quot;}"/>
+          <p:cNvPr id="367" name="" descr="{&quot;isTemplate&quot;:true,&quot;type&quot;:&quot;text&quot;}"/>
           <p:cNvSpPr txBox="1"/>
           <p:nvPr/>
         </p:nvSpPr>
@@ -12804,7 +15120,7 @@
       </p:sp>
       <p:sp>
         <p:nvSpPr>
-          <p:cNvPr id="296" name="" descr="{&quot;isTemplate&quot;:true,&quot;type&quot;:&quot;text&quot;}"/>
+          <p:cNvPr id="368" name="" descr="{&quot;isTemplate&quot;:true,&quot;type&quot;:&quot;text&quot;}"/>
           <p:cNvSpPr txBox="1"/>
           <p:nvPr/>
         </p:nvSpPr>
@@ -12841,7 +15157,7 @@
       </p:sp>
       <p:sp>
         <p:nvSpPr>
-          <p:cNvPr id="297" name="" descr="{&quot;isTemplate&quot;:true,&quot;type&quot;:&quot;text&quot;}"/>
+          <p:cNvPr id="369" name="" descr="{&quot;isTemplate&quot;:true,&quot;type&quot;:&quot;text&quot;}"/>
           <p:cNvSpPr txBox="1"/>
           <p:nvPr/>
         </p:nvSpPr>
@@ -12876,7 +15192,7 @@
       </p:sp>
       <p:pic>
         <p:nvPicPr>
-          <p:cNvPr id="298" name=""/>
+          <p:cNvPr id="370" name=""/>
           <p:cNvPicPr>
             <a:picLocks noChangeAspect="1"/>
           </p:cNvPicPr>
@@ -12907,7 +15223,7 @@
       </p:pic>
       <p:sp>
         <p:nvSpPr>
-          <p:cNvPr id="299" name="" descr="{&quot;isTemplate&quot;:true,&quot;type&quot;:&quot;text&quot;}"/>
+          <p:cNvPr id="371" name="" descr="{&quot;isTemplate&quot;:true,&quot;type&quot;:&quot;text&quot;}"/>
           <p:cNvSpPr txBox="1"/>
           <p:nvPr/>
         </p:nvSpPr>
@@ -12942,7 +15258,7 @@
       </p:sp>
       <p:sp>
         <p:nvSpPr>
-          <p:cNvPr id="300" name="" descr="{&quot;isTemplate&quot;:true,&quot;type&quot;:&quot;text&quot;}"/>
+          <p:cNvPr id="372" name="" descr="{&quot;isTemplate&quot;:true,&quot;type&quot;:&quot;text&quot;}"/>
           <p:cNvSpPr txBox="1"/>
           <p:nvPr/>
         </p:nvSpPr>
@@ -12981,11 +15297,11 @@
 </file>
 
 <file path=ppt/slides/slide9.xml><?xml version="1.0" encoding="utf-8"?>
-<p:sld xmlns:p="http://schemas.openxmlformats.org/presentationml/2006/main" xmlns:a="http://schemas.openxmlformats.org/drawingml/2006/main">
+<p:sld xmlns:p="http://schemas.openxmlformats.org/presentationml/2006/main" xmlns:a="http://schemas.openxmlformats.org/drawingml/2006/main" xmlns:asvg="http://schemas.microsoft.com/office/drawing/2016/SVG/main" xmlns:r="http://schemas.openxmlformats.org/officeDocument/2006/relationships" xmlns:mc="http://schemas.openxmlformats.org/markup-compatibility/2006" mc:Ignorable="asvg">
   <p:cSld>
     <p:spTree>
       <p:nvGrpSpPr>
-        <p:cNvPr id="301" name=""/>
+        <p:cNvPr id="373" name="" descr="&lt;Slide&gt;&#10;  &lt;Box style={{ width: '1280px', height: '720px', background: '#FFFFFF', flexDirection: 'column' }}&gt;&#10;    {/* 页眉 */}&#10;    &lt;Box style={{ height: 72, background: '#1E4FA8', flexDirection: 'row', alignItems: 'center', justifyContent: 'space-between', paddingLeft: 40, paddingRight: 40 }}&gt;&#10;      &lt;Text style={{ color: '#FFFFFF', fontSize: 16 }}&gt;基于 RAG 的轻量级企业工艺生成系统&lt;/Text&gt;&#10;      &lt;Text style={{ color: 'rgba(255,255,255,0.85)', fontSize: 14 }}&gt;技术方案&lt;/Text&gt;&#10;    &lt;/Box&gt;&#10;&#10;    {/* 主标题 */}&#10;    &lt;Box style={{ paddingLeft: 40, paddingRight: 40, paddingTop: 22, paddingBottom: 8, flexDirection: 'row', alignItems: 'baseline', gap: 16 }}&gt;&#10;      &lt;Text style={{ color: '#1A2230', fontSize: 34, fontWeight: 'bold' }}&gt;系统组件图（UML）&lt;/Text&gt;&#10;      &lt;Text style={{ color: '#8B97A8', fontSize: 16 }}&gt;Component Diagram · 概要设计&lt;/Text&gt;&#10;    &lt;/Box&gt;&#10;&#10;    {/* 组件图（大图 anchor） */}&#10;    &lt;Box style={{ flex: 1, paddingLeft: 40, paddingRight: 40, paddingBottom: 4, alignItems: 'center', justifyContent: 'center' }}&gt;&#10;      &lt;svg width={1180} height={520} viewBox='0 0 1180 520'&gt;&#10;        {/* 离线建库链路（一组组件，用虚线框表示逻辑分组，非泳道） */}&#10;        &lt;text x='40' y='50' font-size='19' font-weight='bold' fill='#0E3F8C'&gt;离线建库（一次构建）&lt;/text&gt;&#10;&#10;        &lt;g&gt;&#10;          &lt;rect x='40' y='70' width='220' height='95' rx='6' fill='#FFFFFF' stroke='#1E4FA8' strokeWidth='2' /&gt;&#10;          &lt;rect x='226' y='62' width='22' height='12' rx='2' fill='#FFFFFF' stroke='#1E4FA8' strokeWidth='1.5' /&gt;&#10;          &lt;rect x='234' y='58' width='12' height='8' rx='2' fill='#FFFFFF' stroke='#1E4FA8' strokeWidth='1.5' /&gt;&#10;          &lt;text x='150' y='105' text-anchor='middle' font-size='17' font-weight='bold' fill='#1A2230'&gt;文档解析&lt;/text&gt;&#10;          &lt;text x='150' y='127' text-anchor='middle' font-size='12' fill='#8B97A8'&gt;«component»&lt;/text&gt;&#10;          &lt;text x='150' y='149' text-anchor='middle' font-size='12' fill='#4A5568'&gt;PyMuPDF + pdfplumber&lt;/text&gt;&#10;&#10;          &lt;rect x='320' y='70' width='220' height='95' rx='6' fill='#FFFFFF' stroke='#1E4FA8' strokeWidth='2' /&gt;&#10;          &lt;rect x='506' y='62' width='22' height='12' rx='2' fill='#FFFFFF' stroke='#1E4FA8' strokeWidth='1.5' /&gt;&#10;          &lt;rect x='514' y='58' width='12' height='8' rx='2' fill='#FFFFFF' stroke='#1E4FA8' strokeWidth='1.5' /&gt;&#10;          &lt;text x='430' y='105' text-anchor='middle' font-size='17' font-weight='bold' fill='#1A2230'&gt;文档分块&lt;/text&gt;&#10;          &lt;text x='430' y='127' text-anchor='middle' font-size='12' fill='#8B97A8'&gt;«component»&lt;/text&gt;&#10;          &lt;text x='430' y='149' text-anchor='middle' font-size='12' fill='#4A5568'&gt;递归分块 + 表格保护&lt;/text&gt;&#10;&#10;          &lt;rect x='600' y='70' width='220' height='95' rx='6' fill='#FFFFFF' stroke='#1E4FA8' strokeWidth='2' /&gt;&#10;          &lt;rect x='786' y='62' width='22' height='12' rx='2' fill='#FFFFFF' stroke='#1E4FA8' strokeWidth='1.5' /&gt;&#10;          &lt;rect x='794' y='58' width='12' height='8' rx='2' fill='#FFFFFF' stroke='#1E4FA8' strokeWidth='1.5' /&gt;&#10;          &lt;text x='710' y='105' text-anchor='middle' font-size='17' font-weight='bold' fill='#1A2230'&gt;向量化&lt;/text&gt;&#10;          &lt;text x='710' y='127' text-anchor='middle' font-size='12' fill='#8B97A8'&gt;«component»&lt;/text&gt;&#10;          &lt;text x='710' y='149' text-anchor='middle' font-size='12' fill='#4A5568'&gt;BGE-M3 嵌入&lt;/text&gt;&#10;&#10;          &lt;rect x='880' y='70' width='220' height='95' rx='6' fill='#1E4FA8' /&gt;&#10;          &lt;rect x='1066' y='62' width='22' height='12' rx='2' fill='#1E4FA8' stroke='#FFFFFF' strokeWidth='1.5' /&gt;&#10;          &lt;rect x='1074' y='58' width='12' height='8' rx='2' fill='#1E4FA8' stroke='#FFFFFF' strokeWidth='1.5' /&gt;&#10;          &lt;text x='990' y='105' text-anchor='middle' font-size='17' font-weight='bold' fill='#FFFFFF'&gt;索引构建&lt;/text&gt;&#10;          &lt;text x='990' y='127' text-anchor='middle' font-size='12' fill='#D6E4F7'&gt;«component»&lt;/text&gt;&#10;          &lt;text x='990' y='149' text-anchor='middle' font-size='12' fill='#D6E4F7'&gt;Chroma + BM25&lt;/text&gt;&#10;        &lt;/g&gt;&#10;        {/* 离线依赖箭头（虚线开放箭头 = UML 依赖） */}&#10;        &lt;g stroke='#3D7BD9' stroke-width='2' fill='none' stroke-dasharray='6 4'&gt;&#10;          &lt;path d='M260 117 L312 117' /&gt;&#10;          &lt;path d='M540 117 L592 117' /&gt;&#10;          &lt;path d='M820 117 L872 117' /&gt;&#10;        &lt;/g&gt;&#10;        &lt;g stroke='#3D7BD9' stroke-width='2' fill='#3D7BD9'&gt;&#10;          &lt;path d='M312 117 l-8 -6 v12 z' /&gt;&#10;          &lt;path d='M592 117 l-8 -6 v12 z' /&gt;&#10;          &lt;path d='M872 117 l-8 -6 v12 z' /&gt;&#10;        &lt;/g&gt;&#10;        {/* 接口名（棒棒糖 lollipop，标注在依赖关系上） */}&#10;        &lt;g font-size='11' fill='#3D7BD9'&gt;&#10;          &lt;text x='286' y='108'&gt;IChunk&lt;/text&gt;&#10;          &lt;text x='566' y='108'&gt;IVector&lt;/text&gt;&#10;          &lt;text x='846' y='108'&gt;IIndex&lt;/text&gt;&#10;        &lt;/g&gt;&#10;&#10;        {/* 在线问答链路（一组组件） */}&#10;        &lt;text x='40' y='245' font-size='19' font-weight='bold' fill='#0E3F8C'&gt;在线问答（每次提问）&lt;/text&gt;&#10;&#10;        &lt;g&gt;&#10;          &lt;rect x='40' y='265' width='165' height='95' rx='6' fill='#FFFFFF' stroke='#1E4FA8' strokeWidth='2' /&gt;&#10;          &lt;rect x='171' y='257' width='22' height='12' rx='2' fill='#FFFFFF' stroke='#1E4FA8' strokeWidth='1.5' /&gt;&#10;          &lt;rect x='179' y='253' width='12' height='8' rx='2' fill='#FFFFFF' stroke='#1E4FA8' strokeWidth='1.5' /&gt;&#10;          &lt;text x='122' y='300' text-anchor='middle' font-size='16' font-weight='bold' fill='#1A2230'&gt;对话管理&lt;/text&gt;&#10;          &lt;text x='122' y='322' text-anchor='middle' font-size='12' fill='#8B97A8'&gt;«component»&lt;/text&gt;&#10;          &lt;text x='122' y='344' text-anchor='middle' font-size='12' fill='#4A5568'&gt;查询改写&lt;/text&gt;&#10;&#10;          &lt;rect x='243' y='265' width='165' height='95' rx='6' fill='#FFFFFF' stroke='#1E4FA8' strokeWidth='2' /&gt;&#10;          &lt;rect x='374' y='257' width='22' height='12' rx='2' fill='#FFFFFF' stroke='#1E4FA8' strokeWidth='1.5' /&gt;&#10;          &lt;rect x='382' y='253' width='12' height='8' rx='2' fill='#FFFFFF' stroke='#1E4FA8' strokeWidth='1.5' /&gt;&#10;          &lt;text x='325' y='300' text-anchor='middle' font-size='16' font-weight='bold' fill='#1A2230'&gt;混合检索&lt;/text&gt;&#10;          &lt;text x='325' y='322' text-anchor='middle' font-size='12' fill='#8B97A8'&gt;«component»&lt;/text&gt;&#10;          &lt;text x='325' y='344' text-anchor='middle' font-size='12' fill='#4A5568'&gt;稠密 + 稀疏&lt;/text&gt;&#10;&#10;          &lt;rect x='446' y='265' width='165' height='95' rx='6' fill='#FFFFFF' stroke='#1E4FA8' strokeWidth='2' /&gt;&#10;          &lt;rect x='577' y='257' width='22' height='12' rx='2' fill='#FFFFFF' stroke='#1E4FA8' strokeWidth='1.5' /&gt;&#10;          &lt;rect x='585' y='253' width='12' height='8' rx='2' fill='#FFFFFF' stroke='#1E4FA8' strokeWidth='1.5' /&gt;&#10;          &lt;text x='528' y='300' text-anchor='middle' font-size='16' font-weight='bold' fill='#1A2230'&gt;重排序&lt;/text&gt;&#10;          &lt;text x='528' y='322' text-anchor='middle' font-size='12' fill='#8B97A8'&gt;«component»&lt;/text&gt;&#10;          &lt;text x='528' y='344' text-anchor='middle' font-size='12' fill='#4A5568'&gt;bge-reranker&lt;/text&gt;&#10;&#10;          &lt;rect x='649' y='265' width='165' height='95' rx='6' fill='#FFFFFF' stroke='#1E4FA8' strokeWidth='2' /&gt;&#10;          &lt;rect x='780' y='257' width='22' height='12' rx='2' fill='#FFFFFF' stroke='#1E4FA8' strokeWidth='1.5' /&gt;&#10;          &lt;rect x='788' y='253' width='12' height='8' rx='2' fill='#FFFFFF' stroke='#1E4FA8' strokeWidth='1.5' /&gt;&#10;          &lt;text x='731' y='300' text-anchor='middle' font-size='16' font-weight='bold' fill='#1A2230'&gt;生成&lt;/text&gt;&#10;          &lt;text x='731' y='322' text-anchor='middle' font-size='12' fill='#8B97A8'&gt;«component»&lt;/text&gt;&#10;          &lt;text x='731' y='344' text-anchor='middle' font-size='12' fill='#4A5568'&gt;大模型 API&lt;/text&gt;&#10;&#10;          &lt;rect x='852' y='265' width='165' height='95' rx='6' fill='#FFFFFF' stroke='#1E4FA8' strokeWidth='2' /&gt;&#10;          &lt;rect x='983' y='257' width='22' height='12' rx='2' fill='#FFFFFF' stroke='#1E4FA8' strokeWidth='1.5' /&gt;&#10;          &lt;rect x='991' y='253' width='12' height='8' rx='2' fill='#FFFFFF' stroke='#1E4FA8' strokeWidth='1.5' /&gt;&#10;          &lt;text x='934' y='300' text-anchor='middle' font-size='16' font-weight='bold' fill='#1A2230'&gt;引用溯源&lt;/text&gt;&#10;          &lt;text x='934' y='322' text-anchor='middle' font-size='12' fill='#8B97A8'&gt;«component»&lt;/text&gt;&#10;          &lt;text x='934' y='344' text-anchor='middle' font-size='12' fill='#4A5568'&gt;页码定位&lt;/text&gt;&#10;&#10;          &lt;rect x='1055' y='265' width='165' height='95' rx='6' fill='#1E4FA8' /&gt;&#10;          &lt;rect x='1186' y='257' width='22' height='12' rx='2' fill='#1E4FA8' stroke='#FFFFFF' strokeWidth='1.5' /&gt;&#10;          &lt;rect x='1194' y='253' width='12' height='8' rx='2' fill='#1E4FA8' stroke='#FFFFFF' strokeWidth='1.5' /&gt;&#10;          &lt;text x='1137' y='300' text-anchor='middle' font-size='16' font-weight='bold' fill='#FFFFFF'&gt;Web 界面&lt;/text&gt;&#10;          &lt;text x='1137' y='322' text-anchor='middle' font-size='12' fill='#D6E4F7'&gt;«component»&lt;/text&gt;&#10;          &lt;text x='1137' y='344' text-anchor='middle' font-size='12' fill='#D6E4F7'&gt;Gradio&lt;/text&gt;&#10;        &lt;/g&gt;&#10;        {/* 在线依赖箭头（虚线开放箭头 = UML 依赖） */}&#10;        &lt;g stroke='#3D7BD9' stroke-width='2' fill='none' stroke-dasharray='6 4'&gt;&#10;          &lt;path d='M205 312 L235 312' /&gt;&#10;          &lt;path d='M408 312 L438 312' /&gt;&#10;          &lt;path d='M611 312 L641 312' /&gt;&#10;          &lt;path d='M814 312 L844 312' /&gt;&#10;          &lt;path d='M1017 312 L1047 312' /&gt;&#10;        &lt;/g&gt;&#10;        &lt;g stroke='#3D7BD9' stroke-width='2' fill='#3D7BD9'&gt;&#10;          &lt;path d='M235 312 l-8 -6 v12 z' /&gt;&#10;          &lt;path d='M438 312 l-8 -6 v12 z' /&gt;&#10;          &lt;path d='M641 312 l-8 -6 v12 z' /&gt;&#10;          &lt;path d='M844 312 l-8 -6 v12 z' /&gt;&#10;          &lt;path d='M1047 312 l-8 -6 v12 z' /&gt;&#10;        &lt;/g&gt;&#10;        {/* 接口名 */}&#10;        &lt;g font-size='11' fill='#3D7BD9'&gt;&#10;          &lt;text x='220' y='303'&gt;IQuery&lt;/text&gt;&#10;          &lt;text x='423' y='303'&gt;IRetrieve&lt;/text&gt;&#10;          &lt;text x='626' y='303'&gt;IRerank&lt;/text&gt;&#10;          &lt;text x='829' y='303'&gt;IGenerate&lt;/text&gt;&#10;          &lt;text x='1032' y='303'&gt;ICite&lt;/text&gt;&#10;        &lt;/g&gt;&#10;&#10;        {/* 依赖关系：在线检索依赖离线索引组件（虚线开放箭头） */}&#10;        &lt;path d='M240 360 C240 470 990 470 990 178' fill='none' stroke='#3D7BD9' stroke-width='2' stroke-dasharray='6 4' /&gt;&#10;        &lt;path d='M990 178 l-8 6 v-12 z' fill='#3D7BD9' stroke='#3D7BD9' stroke-width='2' /&gt;&#10;        &lt;text x='600' y='462' text-anchor='middle' font-size='12' fill='#3D7BD9'&gt;«use» IIndex&lt;/text&gt;&#10;&#10;        {/* 底部说明 */}&#10;        &lt;text x='40' y='512' font-size='14' fill='#8B97A8'&gt;虚线开放箭头表示组件间依赖；右上角图标与 «component» 为 UML 组件符号，接口以名称标注。&lt;/text&gt;&#10;      &lt;/svg&gt;&#10;    &lt;/Box&gt;&#10;&#10;    {/* 页脚 */}&#10;    &lt;Box style={{ height: 40, flexDirection: 'row', alignItems: 'center', justifyContent: 'space-between', paddingLeft: 40, paddingRight: 40 }}&gt;&#10;      &lt;Text style={{ color: '#8B97A8', fontSize: 14 }}&gt;中国科学技术大学软件学院&lt;/Text&gt;&#10;      &lt;Text style={{ color: '#1E4FA8', fontSize: 16, fontWeight: 'bold' }}&gt;09 / 17&lt;/Text&gt;&#10;    &lt;/Box&gt;&#10;  &lt;/Box&gt;&#10;&lt;/Slide&gt;&#10;"/>
         <p:cNvGrpSpPr/>
         <p:nvPr/>
       </p:nvGrpSpPr>
@@ -12999,7 +15315,7 @@
       </p:grpSpPr>
       <p:sp>
         <p:nvSpPr>
-          <p:cNvPr id="302" name=""/>
+          <p:cNvPr id="374" name=""/>
           <p:cNvSpPr/>
           <p:nvPr/>
         </p:nvSpPr>
@@ -13018,15 +15334,12 @@
         </p:spPr>
         <p:txBody>
           <a:bodyPr/>
-          <a:p>
-            <a:pPr/>
-            <a:endParaRPr/>
-          </a:p>
-        </p:txBody>
-      </p:sp>
-      <p:sp>
-        <p:nvSpPr>
-          <p:cNvPr id="303" name=""/>
+          <a:p/>
+        </p:txBody>
+      </p:sp>
+      <p:sp>
+        <p:nvSpPr>
+          <p:cNvPr id="375" name=""/>
           <p:cNvSpPr/>
           <p:nvPr/>
         </p:nvSpPr>
@@ -13045,15 +15358,12 @@
         </p:spPr>
         <p:txBody>
           <a:bodyPr/>
-          <a:p>
-            <a:pPr/>
-            <a:endParaRPr/>
-          </a:p>
-        </p:txBody>
-      </p:sp>
-      <p:sp>
-        <p:nvSpPr>
-          <p:cNvPr id="304" name="" descr="{&quot;isTemplate&quot;:true,&quot;type&quot;:&quot;text&quot;}"/>
+          <a:p/>
+        </p:txBody>
+      </p:sp>
+      <p:sp>
+        <p:nvSpPr>
+          <p:cNvPr id="376" name="" descr="{&quot;isTemplate&quot;:true,&quot;type&quot;:&quot;text&quot;}"/>
           <p:cNvSpPr txBox="1"/>
           <p:nvPr/>
         </p:nvSpPr>
@@ -13108,7 +15418,7 @@
       </p:sp>
       <p:sp>
         <p:nvSpPr>
-          <p:cNvPr id="305" name="" descr="{&quot;isTemplate&quot;:true,&quot;type&quot;:&quot;text&quot;}"/>
+          <p:cNvPr id="377" name="" descr="{&quot;isTemplate&quot;:true,&quot;type&quot;:&quot;text&quot;}"/>
           <p:cNvSpPr txBox="1"/>
           <p:nvPr/>
         </p:nvSpPr>
@@ -13145,1149 +15455,138 @@
       </p:sp>
       <p:sp>
         <p:nvSpPr>
-          <p:cNvPr id="306" name=""/>
-          <p:cNvSpPr/>
-          <p:nvPr/>
-        </p:nvSpPr>
-        <p:spPr>
-          <a:xfrm rot="0" flipH="0" flipV="0">
-            <a:off x="381000" y="952500"/>
-            <a:ext cx="457200" cy="38100"/>
-          </a:xfrm>
-          <a:prstGeom prst="roundRect">
-            <a:avLst>
-              <a:gd name="adj" fmla="val 50000"/>
-            </a:avLst>
+          <p:cNvPr id="378" name="" descr="{&quot;isTemplate&quot;:true,&quot;type&quot;:&quot;text&quot;}"/>
+          <p:cNvSpPr txBox="1"/>
+          <p:nvPr/>
+        </p:nvSpPr>
+        <p:spPr>
+          <a:xfrm rot="0" flipH="0" flipV="0">
+            <a:off x="381000" y="895350"/>
+            <a:ext cx="3028950" cy="390525"/>
+          </a:xfrm>
+          <a:prstGeom prst="rect"/>
+        </p:spPr>
+        <p:txBody>
+          <a:bodyPr wrap="none" lIns="0" tIns="0" rIns="0" bIns="0"/>
+          <a:p>
+            <a:pPr>
+              <a:lnSpc>
+                <a:spcPct val="100000"/>
+              </a:lnSpc>
+            </a:pPr>
+            <a:r>
+              <a:rPr lang="zh-CN" sz="2550" b="1">
+                <a:solidFill>
+                  <a:srgbClr val="1A2230"/>
+                </a:solidFill>
+                <a:latin typeface="Microsoft YaHei"/>
+                <a:ea typeface="Microsoft YaHei"/>
+              </a:rPr>
+              <a:t>系统组件图（</a:t>
+            </a:r>
+            <a:r>
+              <a:rPr lang="en-US" sz="2550" b="1">
+                <a:solidFill>
+                  <a:srgbClr val="1A2230"/>
+                </a:solidFill>
+                <a:latin typeface="Microsoft YaHei"/>
+                <a:ea typeface="Microsoft YaHei"/>
+              </a:rPr>
+              <a:t>UML</a:t>
+            </a:r>
+            <a:r>
+              <a:rPr lang="zh-CN" sz="2550" b="1">
+                <a:solidFill>
+                  <a:srgbClr val="1A2230"/>
+                </a:solidFill>
+                <a:latin typeface="Microsoft YaHei"/>
+                <a:ea typeface="Microsoft YaHei"/>
+              </a:rPr>
+              <a:t>）</a:t>
+            </a:r>
+            <a:endParaRPr/>
+          </a:p>
+        </p:txBody>
+      </p:sp>
+      <p:sp>
+        <p:nvSpPr>
+          <p:cNvPr id="379" name="" descr="{&quot;isTemplate&quot;:true,&quot;type&quot;:&quot;text&quot;}"/>
+          <p:cNvSpPr txBox="1"/>
+          <p:nvPr/>
+        </p:nvSpPr>
+        <p:spPr>
+          <a:xfrm rot="0" flipH="0" flipV="0">
+            <a:off x="3562350" y="895350"/>
+            <a:ext cx="2276475" cy="390525"/>
+          </a:xfrm>
+          <a:prstGeom prst="rect"/>
+        </p:spPr>
+        <p:txBody>
+          <a:bodyPr wrap="none" lIns="0" tIns="0" rIns="0" bIns="0"/>
+          <a:p>
+            <a:pPr>
+              <a:lnSpc>
+                <a:spcPct val="100000"/>
+              </a:lnSpc>
+            </a:pPr>
+            <a:r>
+              <a:rPr lang="en-US" sz="1200">
+                <a:solidFill>
+                  <a:srgbClr val="8B97A8"/>
+                </a:solidFill>
+                <a:latin typeface="Microsoft YaHei"/>
+                <a:ea typeface="Microsoft YaHei"/>
+              </a:rPr>
+              <a:t xml:space="preserve">Component Diagram · </a:t>
+            </a:r>
+            <a:r>
+              <a:rPr lang="zh-CN" sz="1200">
+                <a:solidFill>
+                  <a:srgbClr val="8B97A8"/>
+                </a:solidFill>
+                <a:latin typeface="Microsoft YaHei"/>
+                <a:ea typeface="Microsoft YaHei"/>
+              </a:rPr>
+              <a:t>概要设计</a:t>
+            </a:r>
+            <a:endParaRPr/>
+          </a:p>
+        </p:txBody>
+      </p:sp>
+      <p:pic>
+        <p:nvPicPr>
+          <p:cNvPr id="380" name=""/>
+          <p:cNvPicPr>
+            <a:picLocks noChangeAspect="1"/>
+          </p:cNvPicPr>
+          <p:nvPr/>
+        </p:nvPicPr>
+        <p:blipFill>
+          <a:blip>
+            <a:extLst>
+              <a:ext uri="{96DAC541-7B7A-43D3-8B79-37D633B846F1}">
+                <asvg:svgBlip r:embed="rId1"/>
+              </a:ext>
+            </a:extLst>
+          </a:blip>
+          <a:stretch>
+            <a:fillRect/>
+          </a:stretch>
+        </p:blipFill>
+        <p:spPr>
+          <a:xfrm rot="0" flipH="0" flipV="0">
+            <a:off x="476250" y="1428750"/>
+            <a:ext cx="11239500" cy="4953000"/>
+          </a:xfrm>
+          <a:prstGeom prst="rect">
+            <a:avLst/>
           </a:prstGeom>
-          <a:solidFill>
-            <a:srgbClr val="3D7BD9"/>
-          </a:solidFill>
           <a:ln/>
         </p:spPr>
-        <p:txBody>
-          <a:bodyPr/>
-          <a:p>
-            <a:pPr/>
-            <a:endParaRPr/>
-          </a:p>
-        </p:txBody>
-      </p:sp>
-      <p:sp>
-        <p:nvSpPr>
-          <p:cNvPr id="307" name="" descr="{&quot;isTemplate&quot;:true,&quot;type&quot;:&quot;text&quot;}"/>
-          <p:cNvSpPr txBox="1"/>
-          <p:nvPr/>
-        </p:nvSpPr>
-        <p:spPr>
-          <a:xfrm rot="0" flipH="0" flipV="0">
-            <a:off x="381000" y="1143000"/>
-            <a:ext cx="2857500" cy="514350"/>
-          </a:xfrm>
-          <a:prstGeom prst="rect"/>
-        </p:spPr>
-        <p:txBody>
-          <a:bodyPr wrap="none" lIns="0" tIns="0" rIns="0" bIns="0"/>
-          <a:p>
-            <a:pPr>
-              <a:lnSpc>
-                <a:spcPct val="130000"/>
-              </a:lnSpc>
-            </a:pPr>
-            <a:r>
-              <a:rPr lang="zh-CN" sz="2550" b="1">
-                <a:solidFill>
-                  <a:srgbClr val="1A2230"/>
-                </a:solidFill>
-                <a:latin typeface="Microsoft YaHei"/>
-                <a:ea typeface="Microsoft YaHei"/>
-              </a:rPr>
-              <a:t>在线问答链路</a:t>
-            </a:r>
-            <a:endParaRPr/>
-          </a:p>
-        </p:txBody>
-      </p:sp>
-      <p:sp>
-        <p:nvSpPr>
-          <p:cNvPr id="308" name="" descr="{&quot;isTemplate&quot;:true,&quot;type&quot;:&quot;text&quot;}"/>
-          <p:cNvSpPr txBox="1"/>
-          <p:nvPr/>
-        </p:nvSpPr>
-        <p:spPr>
-          <a:xfrm rot="0" flipH="0" flipV="0">
-            <a:off x="381000" y="1809750"/>
-            <a:ext cx="2857500" cy="552450"/>
-          </a:xfrm>
-          <a:prstGeom prst="rect"/>
-        </p:spPr>
-        <p:txBody>
-          <a:bodyPr wrap="square" lIns="0" tIns="0" rIns="0" bIns="0">
-            <a:normAutofit/>
-          </a:bodyPr>
-          <a:p>
-            <a:pPr>
-              <a:lnSpc>
-                <a:spcPct val="150000"/>
-              </a:lnSpc>
-            </a:pPr>
-            <a:r>
-              <a:rPr lang="zh-CN" sz="1200">
-                <a:solidFill>
-                  <a:srgbClr val="8B97A8"/>
-                </a:solidFill>
-                <a:latin typeface="Microsoft YaHei"/>
-                <a:ea typeface="Microsoft YaHei"/>
-              </a:rPr>
-              <a:t>每次提问，从知识库检索并生成带引用的加工指令</a:t>
-            </a:r>
-            <a:endParaRPr/>
-          </a:p>
-        </p:txBody>
-      </p:sp>
-      <p:sp>
-        <p:nvSpPr>
-          <p:cNvPr id="309" name=""/>
-          <p:cNvSpPr/>
-          <p:nvPr/>
-        </p:nvSpPr>
-        <p:spPr>
-          <a:xfrm rot="0" flipH="0" flipV="0">
-            <a:off x="381000" y="5143500"/>
-            <a:ext cx="2857500" cy="1181100"/>
-          </a:xfrm>
-          <a:prstGeom prst="roundRect">
-            <a:avLst>
-              <a:gd name="adj" fmla="val 6452"/>
-            </a:avLst>
-          </a:prstGeom>
-          <a:solidFill>
-            <a:srgbClr val="0E3F8C"/>
-          </a:solidFill>
-          <a:ln/>
-        </p:spPr>
-        <p:txBody>
-          <a:bodyPr/>
-          <a:p>
-            <a:pPr/>
-            <a:endParaRPr/>
-          </a:p>
-        </p:txBody>
-      </p:sp>
-      <p:sp>
-        <p:nvSpPr>
-          <p:cNvPr id="310" name="" descr="{&quot;isTemplate&quot;:true,&quot;type&quot;:&quot;text&quot;}"/>
-          <p:cNvSpPr txBox="1"/>
-          <p:nvPr/>
-        </p:nvSpPr>
-        <p:spPr>
-          <a:xfrm rot="0" flipH="0" flipV="0">
-            <a:off x="552450" y="5314950"/>
-            <a:ext cx="2514600" cy="209550"/>
-          </a:xfrm>
-          <a:prstGeom prst="rect"/>
-        </p:spPr>
-        <p:txBody>
-          <a:bodyPr wrap="none" lIns="0" tIns="0" rIns="0" bIns="0"/>
-          <a:p>
-            <a:pPr>
-              <a:lnSpc>
-                <a:spcPct val="100000"/>
-              </a:lnSpc>
-            </a:pPr>
-            <a:r>
-              <a:rPr lang="zh-CN" sz="1350" b="1">
-                <a:solidFill>
-                  <a:srgbClr val="FFFFFF"/>
-                </a:solidFill>
-                <a:latin typeface="Microsoft YaHei"/>
-                <a:ea typeface="Microsoft YaHei"/>
-              </a:rPr>
-              <a:t>关键点</a:t>
-            </a:r>
-            <a:endParaRPr/>
-          </a:p>
-        </p:txBody>
-      </p:sp>
-      <p:sp>
-        <p:nvSpPr>
-          <p:cNvPr id="311" name="" descr="{&quot;isTemplate&quot;:true,&quot;type&quot;:&quot;text&quot;}"/>
-          <p:cNvSpPr txBox="1"/>
-          <p:nvPr/>
-        </p:nvSpPr>
-        <p:spPr>
-          <a:xfrm rot="0" flipH="0" flipV="0">
-            <a:off x="552450" y="5600700"/>
-            <a:ext cx="2514600" cy="552450"/>
-          </a:xfrm>
-          <a:prstGeom prst="rect"/>
-        </p:spPr>
-        <p:txBody>
-          <a:bodyPr wrap="square" lIns="0" tIns="0" rIns="0" bIns="0">
-            <a:normAutofit/>
-          </a:bodyPr>
-          <a:p>
-            <a:pPr>
-              <a:lnSpc>
-                <a:spcPct val="160000"/>
-              </a:lnSpc>
-            </a:pPr>
-            <a:r>
-              <a:rPr lang="zh-CN" sz="1125">
-                <a:solidFill>
-                  <a:srgbClr val="D6E4F7"/>
-                </a:solidFill>
-                <a:latin typeface="Microsoft YaHei"/>
-                <a:ea typeface="Microsoft YaHei"/>
-              </a:rPr>
-              <a:t>多轮查询改写：把含代词、省略的追问补全为独立问题，再走检索链路。</a:t>
-            </a:r>
-            <a:endParaRPr/>
-          </a:p>
-        </p:txBody>
-      </p:sp>
-      <p:sp>
-        <p:nvSpPr>
-          <p:cNvPr id="312" name=""/>
-          <p:cNvSpPr/>
-          <p:nvPr/>
-        </p:nvSpPr>
-        <p:spPr>
-          <a:xfrm rot="0" flipH="0" flipV="0">
-            <a:off x="3619500" y="952500"/>
-            <a:ext cx="8191500" cy="895350"/>
-          </a:xfrm>
-          <a:prstGeom prst="roundRect">
-            <a:avLst>
-              <a:gd name="adj" fmla="val 10638"/>
-            </a:avLst>
-          </a:prstGeom>
-          <a:solidFill>
-            <a:srgbClr val="F7F9FC"/>
-          </a:solidFill>
-          <a:ln w="12700">
-            <a:solidFill>
-              <a:srgbClr val="E5E7EB"/>
-            </a:solidFill>
-            <a:prstDash val="solid"/>
-          </a:ln>
-        </p:spPr>
-        <p:txBody>
-          <a:bodyPr/>
-          <a:p>
-            <a:pPr/>
-            <a:endParaRPr/>
-          </a:p>
-        </p:txBody>
-      </p:sp>
-      <p:sp>
-        <p:nvSpPr>
-          <p:cNvPr id="313" name=""/>
-          <p:cNvSpPr/>
-          <p:nvPr/>
-        </p:nvSpPr>
-        <p:spPr>
-          <a:xfrm rot="0" flipH="0" flipV="0">
-            <a:off x="3771900" y="1181100"/>
-            <a:ext cx="438150" cy="438150"/>
-          </a:xfrm>
-          <a:prstGeom prst="roundRect">
-            <a:avLst>
-              <a:gd name="adj" fmla="val 50000"/>
-            </a:avLst>
-          </a:prstGeom>
-          <a:solidFill>
-            <a:srgbClr val="1E4FA8"/>
-          </a:solidFill>
-          <a:ln/>
-        </p:spPr>
-        <p:txBody>
-          <a:bodyPr/>
-          <a:p>
-            <a:pPr/>
-            <a:endParaRPr/>
-          </a:p>
-        </p:txBody>
-      </p:sp>
-      <p:sp>
-        <p:nvSpPr>
-          <p:cNvPr id="314" name="" descr="{&quot;isTemplate&quot;:true,&quot;type&quot;:&quot;text&quot;}"/>
-          <p:cNvSpPr txBox="1"/>
-          <p:nvPr/>
-        </p:nvSpPr>
-        <p:spPr>
-          <a:xfrm rot="0" flipH="0" flipV="0">
-            <a:off x="3933825" y="1285875"/>
-            <a:ext cx="123825" cy="228600"/>
-          </a:xfrm>
-          <a:prstGeom prst="rect"/>
-        </p:spPr>
-        <p:txBody>
-          <a:bodyPr wrap="none" lIns="0" tIns="0" rIns="0" bIns="0"/>
-          <a:p>
-            <a:pPr>
-              <a:lnSpc>
-                <a:spcPct val="100000"/>
-              </a:lnSpc>
-            </a:pPr>
-            <a:r>
-              <a:rPr lang="en-US" sz="1500" b="1">
-                <a:solidFill>
-                  <a:srgbClr val="FFFFFF"/>
-                </a:solidFill>
-                <a:latin typeface="Microsoft YaHei"/>
-                <a:ea typeface="Microsoft YaHei"/>
-              </a:rPr>
-              <a:t>1</a:t>
-            </a:r>
-            <a:endParaRPr/>
-          </a:p>
-        </p:txBody>
-      </p:sp>
-      <p:sp>
-        <p:nvSpPr>
-          <p:cNvPr id="315" name="" descr="{&quot;isTemplate&quot;:true,&quot;type&quot;:&quot;text&quot;}"/>
-          <p:cNvSpPr txBox="1"/>
-          <p:nvPr/>
-        </p:nvSpPr>
-        <p:spPr>
-          <a:xfrm rot="0" flipH="0" flipV="0">
-            <a:off x="4400550" y="1104900"/>
-            <a:ext cx="7258050" cy="257175"/>
-          </a:xfrm>
-          <a:prstGeom prst="rect"/>
-        </p:spPr>
-        <p:txBody>
-          <a:bodyPr wrap="none" lIns="0" tIns="0" rIns="0" bIns="0"/>
-          <a:p>
-            <a:pPr>
-              <a:lnSpc>
-                <a:spcPct val="100000"/>
-              </a:lnSpc>
-            </a:pPr>
-            <a:r>
-              <a:rPr lang="zh-CN" sz="1650" b="1">
-                <a:solidFill>
-                  <a:srgbClr val="1A2230"/>
-                </a:solidFill>
-                <a:latin typeface="Microsoft YaHei"/>
-                <a:ea typeface="Microsoft YaHei"/>
-              </a:rPr>
-              <a:t>查询改写</a:t>
-            </a:r>
-            <a:endParaRPr/>
-          </a:p>
-        </p:txBody>
-      </p:sp>
-      <p:sp>
-        <p:nvSpPr>
-          <p:cNvPr id="316" name="" descr="{&quot;isTemplate&quot;:true,&quot;type&quot;:&quot;text&quot;}"/>
-          <p:cNvSpPr txBox="1"/>
-          <p:nvPr/>
-        </p:nvSpPr>
-        <p:spPr>
-          <a:xfrm rot="0" flipH="0" flipV="0">
-            <a:off x="4400550" y="1419225"/>
-            <a:ext cx="7258050" cy="276225"/>
-          </a:xfrm>
-          <a:prstGeom prst="rect"/>
-        </p:spPr>
-        <p:txBody>
-          <a:bodyPr wrap="none" lIns="0" tIns="0" rIns="0" bIns="0"/>
-          <a:p>
-            <a:pPr>
-              <a:lnSpc>
-                <a:spcPct val="150000"/>
-              </a:lnSpc>
-            </a:pPr>
-            <a:r>
-              <a:rPr lang="zh-CN" sz="1200">
-                <a:solidFill>
-                  <a:srgbClr val="4A5568"/>
-                </a:solidFill>
-                <a:latin typeface="Microsoft YaHei"/>
-                <a:ea typeface="Microsoft YaHei"/>
-              </a:rPr>
-              <a:t>记录历史，将追问补全为独立问题</a:t>
-            </a:r>
-            <a:endParaRPr/>
-          </a:p>
-        </p:txBody>
-      </p:sp>
-      <p:sp>
-        <p:nvSpPr>
-          <p:cNvPr id="317" name=""/>
-          <p:cNvSpPr/>
-          <p:nvPr/>
-        </p:nvSpPr>
-        <p:spPr>
-          <a:xfrm rot="0" flipH="0" flipV="0">
-            <a:off x="3619500" y="2076450"/>
-            <a:ext cx="8191500" cy="895350"/>
-          </a:xfrm>
-          <a:prstGeom prst="roundRect">
-            <a:avLst>
-              <a:gd name="adj" fmla="val 10638"/>
-            </a:avLst>
-          </a:prstGeom>
-          <a:solidFill>
-            <a:srgbClr val="F7F9FC"/>
-          </a:solidFill>
-          <a:ln w="12700">
-            <a:solidFill>
-              <a:srgbClr val="E5E7EB"/>
-            </a:solidFill>
-            <a:prstDash val="solid"/>
-          </a:ln>
-        </p:spPr>
-        <p:txBody>
-          <a:bodyPr/>
-          <a:p>
-            <a:pPr/>
-            <a:endParaRPr/>
-          </a:p>
-        </p:txBody>
-      </p:sp>
-      <p:sp>
-        <p:nvSpPr>
-          <p:cNvPr id="318" name=""/>
-          <p:cNvSpPr/>
-          <p:nvPr/>
-        </p:nvSpPr>
-        <p:spPr>
-          <a:xfrm rot="0" flipH="0" flipV="0">
-            <a:off x="3771900" y="2305050"/>
-            <a:ext cx="438150" cy="438150"/>
-          </a:xfrm>
-          <a:prstGeom prst="roundRect">
-            <a:avLst>
-              <a:gd name="adj" fmla="val 50000"/>
-            </a:avLst>
-          </a:prstGeom>
-          <a:solidFill>
-            <a:srgbClr val="1E4FA8"/>
-          </a:solidFill>
-          <a:ln/>
-        </p:spPr>
-        <p:txBody>
-          <a:bodyPr/>
-          <a:p>
-            <a:pPr/>
-            <a:endParaRPr/>
-          </a:p>
-        </p:txBody>
-      </p:sp>
-      <p:sp>
-        <p:nvSpPr>
-          <p:cNvPr id="319" name="" descr="{&quot;isTemplate&quot;:true,&quot;type&quot;:&quot;text&quot;}"/>
-          <p:cNvSpPr txBox="1"/>
-          <p:nvPr/>
-        </p:nvSpPr>
-        <p:spPr>
-          <a:xfrm rot="0" flipH="0" flipV="0">
-            <a:off x="3933825" y="2409825"/>
-            <a:ext cx="123825" cy="228600"/>
-          </a:xfrm>
-          <a:prstGeom prst="rect"/>
-        </p:spPr>
-        <p:txBody>
-          <a:bodyPr wrap="none" lIns="0" tIns="0" rIns="0" bIns="0"/>
-          <a:p>
-            <a:pPr>
-              <a:lnSpc>
-                <a:spcPct val="100000"/>
-              </a:lnSpc>
-            </a:pPr>
-            <a:r>
-              <a:rPr lang="en-US" sz="1500" b="1">
-                <a:solidFill>
-                  <a:srgbClr val="FFFFFF"/>
-                </a:solidFill>
-                <a:latin typeface="Microsoft YaHei"/>
-                <a:ea typeface="Microsoft YaHei"/>
-              </a:rPr>
-              <a:t>2</a:t>
-            </a:r>
-            <a:endParaRPr/>
-          </a:p>
-        </p:txBody>
-      </p:sp>
-      <p:sp>
-        <p:nvSpPr>
-          <p:cNvPr id="320" name="" descr="{&quot;isTemplate&quot;:true,&quot;type&quot;:&quot;text&quot;}"/>
-          <p:cNvSpPr txBox="1"/>
-          <p:nvPr/>
-        </p:nvSpPr>
-        <p:spPr>
-          <a:xfrm rot="0" flipH="0" flipV="0">
-            <a:off x="4400550" y="2228850"/>
-            <a:ext cx="7258050" cy="257175"/>
-          </a:xfrm>
-          <a:prstGeom prst="rect"/>
-        </p:spPr>
-        <p:txBody>
-          <a:bodyPr wrap="none" lIns="0" tIns="0" rIns="0" bIns="0"/>
-          <a:p>
-            <a:pPr>
-              <a:lnSpc>
-                <a:spcPct val="100000"/>
-              </a:lnSpc>
-            </a:pPr>
-            <a:r>
-              <a:rPr lang="zh-CN" sz="1650" b="1">
-                <a:solidFill>
-                  <a:srgbClr val="1A2230"/>
-                </a:solidFill>
-                <a:latin typeface="Microsoft YaHei"/>
-                <a:ea typeface="Microsoft YaHei"/>
-              </a:rPr>
-              <a:t>混合召回</a:t>
-            </a:r>
-            <a:endParaRPr/>
-          </a:p>
-        </p:txBody>
-      </p:sp>
-      <p:sp>
-        <p:nvSpPr>
-          <p:cNvPr id="321" name="" descr="{&quot;isTemplate&quot;:true,&quot;type&quot;:&quot;text&quot;}"/>
-          <p:cNvSpPr txBox="1"/>
-          <p:nvPr/>
-        </p:nvSpPr>
-        <p:spPr>
-          <a:xfrm rot="0" flipH="0" flipV="0">
-            <a:off x="4400550" y="2543175"/>
-            <a:ext cx="7258050" cy="276225"/>
-          </a:xfrm>
-          <a:prstGeom prst="rect"/>
-        </p:spPr>
-        <p:txBody>
-          <a:bodyPr wrap="none" lIns="0" tIns="0" rIns="0" bIns="0"/>
-          <a:p>
-            <a:pPr>
-              <a:lnSpc>
-                <a:spcPct val="150000"/>
-              </a:lnSpc>
-            </a:pPr>
-            <a:r>
-              <a:rPr lang="zh-CN" sz="1200">
-                <a:solidFill>
-                  <a:srgbClr val="4A5568"/>
-                </a:solidFill>
-                <a:latin typeface="Microsoft YaHei"/>
-                <a:ea typeface="Microsoft YaHei"/>
-              </a:rPr>
-              <a:t>并行执行向量检索</a:t>
-            </a:r>
-            <a:r>
-              <a:rPr lang="en-US" sz="1200">
-                <a:solidFill>
-                  <a:srgbClr val="4A5568"/>
-                </a:solidFill>
-                <a:latin typeface="Microsoft YaHei"/>
-                <a:ea typeface="Microsoft YaHei"/>
-              </a:rPr>
-              <a:t xml:space="preserve"> + BM25 </a:t>
-            </a:r>
-            <a:r>
-              <a:rPr lang="zh-CN" sz="1200">
-                <a:solidFill>
-                  <a:srgbClr val="4A5568"/>
-                </a:solidFill>
-                <a:latin typeface="Microsoft YaHei"/>
-                <a:ea typeface="Microsoft YaHei"/>
-              </a:rPr>
-              <a:t>检索</a:t>
-            </a:r>
-            <a:endParaRPr/>
-          </a:p>
-        </p:txBody>
-      </p:sp>
-      <p:sp>
-        <p:nvSpPr>
-          <p:cNvPr id="322" name=""/>
-          <p:cNvSpPr/>
-          <p:nvPr/>
-        </p:nvSpPr>
-        <p:spPr>
-          <a:xfrm rot="0" flipH="0" flipV="0">
-            <a:off x="3619500" y="3190875"/>
-            <a:ext cx="8191500" cy="895350"/>
-          </a:xfrm>
-          <a:prstGeom prst="roundRect">
-            <a:avLst>
-              <a:gd name="adj" fmla="val 10638"/>
-            </a:avLst>
-          </a:prstGeom>
-          <a:solidFill>
-            <a:srgbClr val="F7F9FC"/>
-          </a:solidFill>
-          <a:ln w="12700">
-            <a:solidFill>
-              <a:srgbClr val="E5E7EB"/>
-            </a:solidFill>
-            <a:prstDash val="solid"/>
-          </a:ln>
-        </p:spPr>
-        <p:txBody>
-          <a:bodyPr/>
-          <a:p>
-            <a:pPr/>
-            <a:endParaRPr/>
-          </a:p>
-        </p:txBody>
-      </p:sp>
-      <p:sp>
-        <p:nvSpPr>
-          <p:cNvPr id="323" name=""/>
-          <p:cNvSpPr/>
-          <p:nvPr/>
-        </p:nvSpPr>
-        <p:spPr>
-          <a:xfrm rot="0" flipH="0" flipV="0">
-            <a:off x="3771900" y="3419475"/>
-            <a:ext cx="438150" cy="438150"/>
-          </a:xfrm>
-          <a:prstGeom prst="roundRect">
-            <a:avLst>
-              <a:gd name="adj" fmla="val 50000"/>
-            </a:avLst>
-          </a:prstGeom>
-          <a:solidFill>
-            <a:srgbClr val="1E4FA8"/>
-          </a:solidFill>
-          <a:ln/>
-        </p:spPr>
-        <p:txBody>
-          <a:bodyPr/>
-          <a:p>
-            <a:pPr/>
-            <a:endParaRPr/>
-          </a:p>
-        </p:txBody>
-      </p:sp>
-      <p:sp>
-        <p:nvSpPr>
-          <p:cNvPr id="324" name="" descr="{&quot;isTemplate&quot;:true,&quot;type&quot;:&quot;text&quot;}"/>
-          <p:cNvSpPr txBox="1"/>
-          <p:nvPr/>
-        </p:nvSpPr>
-        <p:spPr>
-          <a:xfrm rot="0" flipH="0" flipV="0">
-            <a:off x="3933825" y="3524250"/>
-            <a:ext cx="123825" cy="228600"/>
-          </a:xfrm>
-          <a:prstGeom prst="rect"/>
-        </p:spPr>
-        <p:txBody>
-          <a:bodyPr wrap="none" lIns="0" tIns="0" rIns="0" bIns="0"/>
-          <a:p>
-            <a:pPr>
-              <a:lnSpc>
-                <a:spcPct val="100000"/>
-              </a:lnSpc>
-            </a:pPr>
-            <a:r>
-              <a:rPr lang="en-US" sz="1500" b="1">
-                <a:solidFill>
-                  <a:srgbClr val="FFFFFF"/>
-                </a:solidFill>
-                <a:latin typeface="Microsoft YaHei"/>
-                <a:ea typeface="Microsoft YaHei"/>
-              </a:rPr>
-              <a:t>3</a:t>
-            </a:r>
-            <a:endParaRPr/>
-          </a:p>
-        </p:txBody>
-      </p:sp>
-      <p:sp>
-        <p:nvSpPr>
-          <p:cNvPr id="325" name="" descr="{&quot;isTemplate&quot;:true,&quot;type&quot;:&quot;text&quot;}"/>
-          <p:cNvSpPr txBox="1"/>
-          <p:nvPr/>
-        </p:nvSpPr>
-        <p:spPr>
-          <a:xfrm rot="0" flipH="0" flipV="0">
-            <a:off x="4400550" y="3343275"/>
-            <a:ext cx="7258050" cy="257175"/>
-          </a:xfrm>
-          <a:prstGeom prst="rect"/>
-        </p:spPr>
-        <p:txBody>
-          <a:bodyPr wrap="none" lIns="0" tIns="0" rIns="0" bIns="0"/>
-          <a:p>
-            <a:pPr>
-              <a:lnSpc>
-                <a:spcPct val="100000"/>
-              </a:lnSpc>
-            </a:pPr>
-            <a:r>
-              <a:rPr lang="en-US" sz="1650" b="1">
-                <a:solidFill>
-                  <a:srgbClr val="1A2230"/>
-                </a:solidFill>
-                <a:latin typeface="Microsoft YaHei"/>
-                <a:ea typeface="Microsoft YaHei"/>
-              </a:rPr>
-              <a:t xml:space="preserve">RRF </a:t>
-            </a:r>
-            <a:r>
-              <a:rPr lang="zh-CN" sz="1650" b="1">
-                <a:solidFill>
-                  <a:srgbClr val="1A2230"/>
-                </a:solidFill>
-                <a:latin typeface="Microsoft YaHei"/>
-                <a:ea typeface="Microsoft YaHei"/>
-              </a:rPr>
-              <a:t>融合</a:t>
-            </a:r>
-            <a:endParaRPr/>
-          </a:p>
-        </p:txBody>
-      </p:sp>
-      <p:sp>
-        <p:nvSpPr>
-          <p:cNvPr id="326" name="" descr="{&quot;isTemplate&quot;:true,&quot;type&quot;:&quot;text&quot;}"/>
-          <p:cNvSpPr txBox="1"/>
-          <p:nvPr/>
-        </p:nvSpPr>
-        <p:spPr>
-          <a:xfrm rot="0" flipH="0" flipV="0">
-            <a:off x="4400550" y="3657600"/>
-            <a:ext cx="7258050" cy="276225"/>
-          </a:xfrm>
-          <a:prstGeom prst="rect"/>
-        </p:spPr>
-        <p:txBody>
-          <a:bodyPr wrap="none" lIns="0" tIns="0" rIns="0" bIns="0"/>
-          <a:p>
-            <a:pPr>
-              <a:lnSpc>
-                <a:spcPct val="150000"/>
-              </a:lnSpc>
-            </a:pPr>
-            <a:r>
-              <a:rPr lang="en-US" sz="1200">
-                <a:solidFill>
-                  <a:srgbClr val="4A5568"/>
-                </a:solidFill>
-                <a:latin typeface="Microsoft YaHei"/>
-                <a:ea typeface="Microsoft YaHei"/>
-              </a:rPr>
-              <a:t xml:space="preserve">k=60 </a:t>
-            </a:r>
-            <a:r>
-              <a:rPr lang="zh-CN" sz="1200">
-                <a:solidFill>
-                  <a:srgbClr val="4A5568"/>
-                </a:solidFill>
-                <a:latin typeface="Microsoft YaHei"/>
-                <a:ea typeface="Microsoft YaHei"/>
-              </a:rPr>
-              <a:t>合并两路结果并去重</a:t>
-            </a:r>
-            <a:endParaRPr/>
-          </a:p>
-        </p:txBody>
-      </p:sp>
-      <p:sp>
-        <p:nvSpPr>
-          <p:cNvPr id="327" name=""/>
-          <p:cNvSpPr/>
-          <p:nvPr/>
-        </p:nvSpPr>
-        <p:spPr>
-          <a:xfrm rot="0" flipH="0" flipV="0">
-            <a:off x="3619500" y="4314825"/>
-            <a:ext cx="8191500" cy="895350"/>
-          </a:xfrm>
-          <a:prstGeom prst="roundRect">
-            <a:avLst>
-              <a:gd name="adj" fmla="val 10638"/>
-            </a:avLst>
-          </a:prstGeom>
-          <a:solidFill>
-            <a:srgbClr val="F7F9FC"/>
-          </a:solidFill>
-          <a:ln w="12700">
-            <a:solidFill>
-              <a:srgbClr val="E5E7EB"/>
-            </a:solidFill>
-            <a:prstDash val="solid"/>
-          </a:ln>
-        </p:spPr>
-        <p:txBody>
-          <a:bodyPr/>
-          <a:p>
-            <a:pPr/>
-            <a:endParaRPr/>
-          </a:p>
-        </p:txBody>
-      </p:sp>
-      <p:sp>
-        <p:nvSpPr>
-          <p:cNvPr id="328" name=""/>
-          <p:cNvSpPr/>
-          <p:nvPr/>
-        </p:nvSpPr>
-        <p:spPr>
-          <a:xfrm rot="0" flipH="0" flipV="0">
-            <a:off x="3771900" y="4543425"/>
-            <a:ext cx="438150" cy="438150"/>
-          </a:xfrm>
-          <a:prstGeom prst="roundRect">
-            <a:avLst>
-              <a:gd name="adj" fmla="val 50000"/>
-            </a:avLst>
-          </a:prstGeom>
-          <a:solidFill>
-            <a:srgbClr val="1E4FA8"/>
-          </a:solidFill>
-          <a:ln/>
-        </p:spPr>
-        <p:txBody>
-          <a:bodyPr/>
-          <a:p>
-            <a:pPr/>
-            <a:endParaRPr/>
-          </a:p>
-        </p:txBody>
-      </p:sp>
-      <p:sp>
-        <p:nvSpPr>
-          <p:cNvPr id="329" name="" descr="{&quot;isTemplate&quot;:true,&quot;type&quot;:&quot;text&quot;}"/>
-          <p:cNvSpPr txBox="1"/>
-          <p:nvPr/>
-        </p:nvSpPr>
-        <p:spPr>
-          <a:xfrm rot="0" flipH="0" flipV="0">
-            <a:off x="3933825" y="4648200"/>
-            <a:ext cx="123825" cy="228600"/>
-          </a:xfrm>
-          <a:prstGeom prst="rect"/>
-        </p:spPr>
-        <p:txBody>
-          <a:bodyPr wrap="none" lIns="0" tIns="0" rIns="0" bIns="0"/>
-          <a:p>
-            <a:pPr>
-              <a:lnSpc>
-                <a:spcPct val="100000"/>
-              </a:lnSpc>
-            </a:pPr>
-            <a:r>
-              <a:rPr lang="en-US" sz="1500" b="1">
-                <a:solidFill>
-                  <a:srgbClr val="FFFFFF"/>
-                </a:solidFill>
-                <a:latin typeface="Microsoft YaHei"/>
-                <a:ea typeface="Microsoft YaHei"/>
-              </a:rPr>
-              <a:t>4</a:t>
-            </a:r>
-            <a:endParaRPr/>
-          </a:p>
-        </p:txBody>
-      </p:sp>
-      <p:sp>
-        <p:nvSpPr>
-          <p:cNvPr id="330" name="" descr="{&quot;isTemplate&quot;:true,&quot;type&quot;:&quot;text&quot;}"/>
-          <p:cNvSpPr txBox="1"/>
-          <p:nvPr/>
-        </p:nvSpPr>
-        <p:spPr>
-          <a:xfrm rot="0" flipH="0" flipV="0">
-            <a:off x="4400550" y="4467225"/>
-            <a:ext cx="7258050" cy="257175"/>
-          </a:xfrm>
-          <a:prstGeom prst="rect"/>
-        </p:spPr>
-        <p:txBody>
-          <a:bodyPr wrap="none" lIns="0" tIns="0" rIns="0" bIns="0"/>
-          <a:p>
-            <a:pPr>
-              <a:lnSpc>
-                <a:spcPct val="100000"/>
-              </a:lnSpc>
-            </a:pPr>
-            <a:r>
-              <a:rPr lang="zh-CN" sz="1650" b="1">
-                <a:solidFill>
-                  <a:srgbClr val="1A2230"/>
-                </a:solidFill>
-                <a:latin typeface="Microsoft YaHei"/>
-                <a:ea typeface="Microsoft YaHei"/>
-              </a:rPr>
-              <a:t>重排序</a:t>
-            </a:r>
-            <a:endParaRPr/>
-          </a:p>
-        </p:txBody>
-      </p:sp>
-      <p:sp>
-        <p:nvSpPr>
-          <p:cNvPr id="331" name="" descr="{&quot;isTemplate&quot;:true,&quot;type&quot;:&quot;text&quot;}"/>
-          <p:cNvSpPr txBox="1"/>
-          <p:nvPr/>
-        </p:nvSpPr>
-        <p:spPr>
-          <a:xfrm rot="0" flipH="0" flipV="0">
-            <a:off x="4400550" y="4781550"/>
-            <a:ext cx="7258050" cy="276225"/>
-          </a:xfrm>
-          <a:prstGeom prst="rect"/>
-        </p:spPr>
-        <p:txBody>
-          <a:bodyPr wrap="none" lIns="0" tIns="0" rIns="0" bIns="0"/>
-          <a:p>
-            <a:pPr>
-              <a:lnSpc>
-                <a:spcPct val="150000"/>
-              </a:lnSpc>
-            </a:pPr>
-            <a:r>
-              <a:rPr lang="en-US" sz="1200">
-                <a:solidFill>
-                  <a:srgbClr val="4A5568"/>
-                </a:solidFill>
-                <a:latin typeface="Microsoft YaHei"/>
-                <a:ea typeface="Microsoft YaHei"/>
-              </a:rPr>
-              <a:t xml:space="preserve">bge-reranker-v2-m3 </a:t>
-            </a:r>
-            <a:r>
-              <a:rPr lang="zh-CN" sz="1200">
-                <a:solidFill>
-                  <a:srgbClr val="4A5568"/>
-                </a:solidFill>
-                <a:latin typeface="Microsoft YaHei"/>
-                <a:ea typeface="Microsoft YaHei"/>
-              </a:rPr>
-              <a:t>精排，取</a:t>
-            </a:r>
-            <a:r>
-              <a:rPr lang="en-US" sz="1200">
-                <a:solidFill>
-                  <a:srgbClr val="4A5568"/>
-                </a:solidFill>
-                <a:latin typeface="Microsoft YaHei"/>
-                <a:ea typeface="Microsoft YaHei"/>
-              </a:rPr>
-              <a:t xml:space="preserve"> top 3~5</a:t>
-            </a:r>
-            <a:endParaRPr/>
-          </a:p>
-        </p:txBody>
-      </p:sp>
-      <p:sp>
-        <p:nvSpPr>
-          <p:cNvPr id="332" name=""/>
-          <p:cNvSpPr/>
-          <p:nvPr/>
-        </p:nvSpPr>
-        <p:spPr>
-          <a:xfrm rot="0" flipH="0" flipV="0">
-            <a:off x="3619500" y="5429250"/>
-            <a:ext cx="8191500" cy="895350"/>
-          </a:xfrm>
-          <a:prstGeom prst="roundRect">
-            <a:avLst>
-              <a:gd name="adj" fmla="val 10638"/>
-            </a:avLst>
-          </a:prstGeom>
-          <a:solidFill>
-            <a:srgbClr val="F7F9FC"/>
-          </a:solidFill>
-          <a:ln w="12700">
-            <a:solidFill>
-              <a:srgbClr val="E5E7EB"/>
-            </a:solidFill>
-            <a:prstDash val="solid"/>
-          </a:ln>
-        </p:spPr>
-        <p:txBody>
-          <a:bodyPr/>
-          <a:p>
-            <a:pPr/>
-            <a:endParaRPr/>
-          </a:p>
-        </p:txBody>
-      </p:sp>
-      <p:sp>
-        <p:nvSpPr>
-          <p:cNvPr id="333" name=""/>
-          <p:cNvSpPr/>
-          <p:nvPr/>
-        </p:nvSpPr>
-        <p:spPr>
-          <a:xfrm rot="0" flipH="0" flipV="0">
-            <a:off x="3771900" y="5657850"/>
-            <a:ext cx="438150" cy="438150"/>
-          </a:xfrm>
-          <a:prstGeom prst="roundRect">
-            <a:avLst>
-              <a:gd name="adj" fmla="val 50000"/>
-            </a:avLst>
-          </a:prstGeom>
-          <a:solidFill>
-            <a:srgbClr val="1E4FA8"/>
-          </a:solidFill>
-          <a:ln/>
-        </p:spPr>
-        <p:txBody>
-          <a:bodyPr/>
-          <a:p>
-            <a:pPr/>
-            <a:endParaRPr/>
-          </a:p>
-        </p:txBody>
-      </p:sp>
-      <p:sp>
-        <p:nvSpPr>
-          <p:cNvPr id="334" name="" descr="{&quot;isTemplate&quot;:true,&quot;type&quot;:&quot;text&quot;}"/>
-          <p:cNvSpPr txBox="1"/>
-          <p:nvPr/>
-        </p:nvSpPr>
-        <p:spPr>
-          <a:xfrm rot="0" flipH="0" flipV="0">
-            <a:off x="3933825" y="5762625"/>
-            <a:ext cx="123825" cy="228600"/>
-          </a:xfrm>
-          <a:prstGeom prst="rect"/>
-        </p:spPr>
-        <p:txBody>
-          <a:bodyPr wrap="none" lIns="0" tIns="0" rIns="0" bIns="0"/>
-          <a:p>
-            <a:pPr>
-              <a:lnSpc>
-                <a:spcPct val="100000"/>
-              </a:lnSpc>
-            </a:pPr>
-            <a:r>
-              <a:rPr lang="en-US" sz="1500" b="1">
-                <a:solidFill>
-                  <a:srgbClr val="FFFFFF"/>
-                </a:solidFill>
-                <a:latin typeface="Microsoft YaHei"/>
-                <a:ea typeface="Microsoft YaHei"/>
-              </a:rPr>
-              <a:t>5</a:t>
-            </a:r>
-            <a:endParaRPr/>
-          </a:p>
-        </p:txBody>
-      </p:sp>
-      <p:sp>
-        <p:nvSpPr>
-          <p:cNvPr id="335" name="" descr="{&quot;isTemplate&quot;:true,&quot;type&quot;:&quot;text&quot;}"/>
-          <p:cNvSpPr txBox="1"/>
-          <p:nvPr/>
-        </p:nvSpPr>
-        <p:spPr>
-          <a:xfrm rot="0" flipH="0" flipV="0">
-            <a:off x="4400550" y="5581650"/>
-            <a:ext cx="7258050" cy="257175"/>
-          </a:xfrm>
-          <a:prstGeom prst="rect"/>
-        </p:spPr>
-        <p:txBody>
-          <a:bodyPr wrap="none" lIns="0" tIns="0" rIns="0" bIns="0"/>
-          <a:p>
-            <a:pPr>
-              <a:lnSpc>
-                <a:spcPct val="100000"/>
-              </a:lnSpc>
-            </a:pPr>
-            <a:r>
-              <a:rPr lang="zh-CN" sz="1650" b="1">
-                <a:solidFill>
-                  <a:srgbClr val="1A2230"/>
-                </a:solidFill>
-                <a:latin typeface="Microsoft YaHei"/>
-                <a:ea typeface="Microsoft YaHei"/>
-              </a:rPr>
-              <a:t>生成</a:t>
-            </a:r>
-            <a:r>
-              <a:rPr lang="en-US" sz="1650" b="1">
-                <a:solidFill>
-                  <a:srgbClr val="1A2230"/>
-                </a:solidFill>
-                <a:latin typeface="Microsoft YaHei"/>
-                <a:ea typeface="Microsoft YaHei"/>
-              </a:rPr>
-              <a:t xml:space="preserve"> + </a:t>
-            </a:r>
-            <a:r>
-              <a:rPr lang="zh-CN" sz="1650" b="1">
-                <a:solidFill>
-                  <a:srgbClr val="1A2230"/>
-                </a:solidFill>
-                <a:latin typeface="Microsoft YaHei"/>
-                <a:ea typeface="Microsoft YaHei"/>
-              </a:rPr>
-              <a:t>溯源</a:t>
-            </a:r>
-            <a:endParaRPr/>
-          </a:p>
-        </p:txBody>
-      </p:sp>
-      <p:sp>
-        <p:nvSpPr>
-          <p:cNvPr id="336" name="" descr="{&quot;isTemplate&quot;:true,&quot;type&quot;:&quot;text&quot;}"/>
-          <p:cNvSpPr txBox="1"/>
-          <p:nvPr/>
-        </p:nvSpPr>
-        <p:spPr>
-          <a:xfrm rot="0" flipH="0" flipV="0">
-            <a:off x="4400550" y="5895975"/>
-            <a:ext cx="7258050" cy="276225"/>
-          </a:xfrm>
-          <a:prstGeom prst="rect"/>
-        </p:spPr>
-        <p:txBody>
-          <a:bodyPr wrap="none" lIns="0" tIns="0" rIns="0" bIns="0"/>
-          <a:p>
-            <a:pPr>
-              <a:lnSpc>
-                <a:spcPct val="150000"/>
-              </a:lnSpc>
-            </a:pPr>
-            <a:r>
-              <a:rPr lang="zh-CN" sz="1200">
-                <a:solidFill>
-                  <a:srgbClr val="4A5568"/>
-                </a:solidFill>
-                <a:latin typeface="Microsoft YaHei"/>
-                <a:ea typeface="Microsoft YaHei"/>
-              </a:rPr>
-              <a:t>拼装</a:t>
-            </a:r>
-            <a:r>
-              <a:rPr lang="en-US" sz="1200">
-                <a:solidFill>
-                  <a:srgbClr val="4A5568"/>
-                </a:solidFill>
-                <a:latin typeface="Microsoft YaHei"/>
-                <a:ea typeface="Microsoft YaHei"/>
-              </a:rPr>
-              <a:t xml:space="preserve"> Prompt </a:t>
-            </a:r>
-            <a:r>
-              <a:rPr lang="zh-CN" sz="1200">
-                <a:solidFill>
-                  <a:srgbClr val="4A5568"/>
-                </a:solidFill>
-                <a:latin typeface="Microsoft YaHei"/>
-                <a:ea typeface="Microsoft YaHei"/>
-              </a:rPr>
-              <a:t>调用大模型，生成带引用的结构化指令</a:t>
-            </a:r>
-            <a:endParaRPr/>
-          </a:p>
-        </p:txBody>
-      </p:sp>
-      <p:sp>
-        <p:nvSpPr>
-          <p:cNvPr id="337" name="" descr="{&quot;isTemplate&quot;:true,&quot;type&quot;:&quot;text&quot;}"/>
+      </p:pic>
+      <p:sp>
+        <p:nvSpPr>
+          <p:cNvPr id="381" name="" descr="{&quot;isTemplate&quot;:true,&quot;type&quot;:&quot;text&quot;}"/>
           <p:cNvSpPr txBox="1"/>
           <p:nvPr/>
         </p:nvSpPr>
@@ -14322,7 +15621,7 @@
       </p:sp>
       <p:sp>
         <p:nvSpPr>
-          <p:cNvPr id="338" name="" descr="{&quot;isTemplate&quot;:true,&quot;type&quot;:&quot;text&quot;}"/>
+          <p:cNvPr id="382" name="" descr="{&quot;isTemplate&quot;:true,&quot;type&quot;:&quot;text&quot;}"/>
           <p:cNvSpPr txBox="1"/>
           <p:nvPr/>
         </p:nvSpPr>
@@ -14349,7 +15648,7 @@
                 <a:latin typeface="Microsoft YaHei"/>
                 <a:ea typeface="Microsoft YaHei"/>
               </a:rPr>
-              <a:t>09 / 15</a:t>
+              <a:t>09 / 17</a:t>
             </a:r>
             <a:endParaRPr/>
           </a:p>
